--- a/docs/test/stress/e2e-outputs/income_case01_seocho_medical_basic.pptx
+++ b/docs/test/stress/e2e-outputs/income_case01_seocho_medical_basic.pptx
@@ -3998,7 +3998,119 @@
       </p:sp>
       <p:sp>
         <p:nvSpPr>
-          <p:cNvPr id="19" name="Text 17"/>
+          <p:cNvPr id="19" name="Shape 17"/>
+          <p:cNvSpPr/>
+          <p:nvPr/>
+        </p:nvSpPr>
+        <p:spPr>
+          <a:xfrm>
+            <a:off x="566928" y="3611880"/>
+            <a:ext cx="5437480" cy="1097280"/>
+          </a:xfrm>
+          <a:prstGeom prst="roundRect">
+            <a:avLst>
+              <a:gd name="adj" fmla="val 5000"/>
+            </a:avLst>
+          </a:prstGeom>
+          <a:solidFill>
+            <a:srgbClr val="DBEAFE"/>
+          </a:solidFill>
+          <a:ln/>
+        </p:spPr>
+      </p:sp>
+      <p:sp>
+        <p:nvSpPr>
+          <p:cNvPr id="20" name="Shape 18"/>
+          <p:cNvSpPr/>
+          <p:nvPr/>
+        </p:nvSpPr>
+        <p:spPr>
+          <a:xfrm>
+            <a:off x="566928" y="3666744"/>
+            <a:ext cx="36576" cy="987552"/>
+          </a:xfrm>
+          <a:prstGeom prst="rect">
+            <a:avLst/>
+          </a:prstGeom>
+          <a:solidFill>
+            <a:srgbClr val="1D4ED8"/>
+          </a:solidFill>
+          <a:ln/>
+        </p:spPr>
+      </p:sp>
+      <p:sp>
+        <p:nvSpPr>
+          <p:cNvPr id="21" name="Text 19"/>
+          <p:cNvSpPr/>
+          <p:nvPr/>
+        </p:nvSpPr>
+        <p:spPr>
+          <a:xfrm>
+            <a:off x="749808" y="3721608"/>
+            <a:ext cx="5108296" cy="201168"/>
+          </a:xfrm>
+          <a:prstGeom prst="rect">
+            <a:avLst/>
+          </a:prstGeom>
+          <a:noFill/>
+          <a:ln/>
+        </p:spPr>
+        <p:txBody>
+          <a:bodyPr wrap="square" lIns="0" tIns="0" rIns="0" bIns="0" rtlCol="0" anchor="ctr"/>
+          <a:lstStyle/>
+          <a:p>
+            <a:pPr indent="0" marL="0">
+              <a:buNone/>
+            </a:pPr>
+            <a:endParaRPr lang="en-US" sz="1050" dirty="0"/>
+          </a:p>
+        </p:txBody>
+      </p:sp>
+      <p:sp>
+        <p:nvSpPr>
+          <p:cNvPr id="22" name="Text 20"/>
+          <p:cNvSpPr/>
+          <p:nvPr/>
+        </p:nvSpPr>
+        <p:spPr>
+          <a:xfrm>
+            <a:off x="749808" y="3941064"/>
+            <a:ext cx="5108296" cy="694944"/>
+          </a:xfrm>
+          <a:prstGeom prst="rect">
+            <a:avLst/>
+          </a:prstGeom>
+          <a:noFill/>
+          <a:ln/>
+        </p:spPr>
+        <p:txBody>
+          <a:bodyPr wrap="square" lIns="0" tIns="0" rIns="0" bIns="0" rtlCol="0" anchor="t"/>
+          <a:lstStyle/>
+          <a:p>
+            <a:pPr indent="0" marL="0">
+              <a:lnSpc>
+                <a:spcPct val="120000"/>
+              </a:lnSpc>
+              <a:buNone/>
+            </a:pPr>
+            <a:r>
+              <a:rPr lang="en-US" sz="930" dirty="0">
+                <a:solidFill>
+                  <a:srgbClr val="0F172A"/>
+                </a:solidFill>
+                <a:latin typeface="Pretendard" pitchFamily="34" charset="0"/>
+                <a:ea typeface="Pretendard" pitchFamily="34" charset="-122"/>
+                <a:cs typeface="Pretendard" pitchFamily="34" charset="-120"/>
+              </a:rPr>
+              <a:t>본 매물은 서초권역 대로변 입지의 우량 메디컬 테넌트 만실 운영 자산입니다.</a:t>
+            </a:r>
+            <a:endParaRPr lang="en-US" sz="930" dirty="0"/>
+          </a:p>
+        </p:txBody>
+      </p:sp>
+      <p:sp>
+        <p:nvSpPr>
+          <p:cNvPr id="23" name="Text 21"/>
           <p:cNvSpPr/>
           <p:nvPr/>
         </p:nvSpPr>
@@ -4037,7 +4149,7 @@
       </p:sp>
       <p:sp>
         <p:nvSpPr>
-          <p:cNvPr id="20" name="Shape 18"/>
+          <p:cNvPr id="24" name="Shape 22"/>
           <p:cNvSpPr/>
           <p:nvPr/>
         </p:nvSpPr>
@@ -4602,7 +4714,7 @@
                 <a:ea typeface="Pretendard" pitchFamily="34" charset="-122"/>
                 <a:cs typeface="Pretendard" pitchFamily="34" charset="-120"/>
               </a:rPr>
-              <a:t>{"ok"</a:t>
+              <a:t>소재지</a:t>
             </a:r>
             <a:endParaRPr lang="en-US" sz="1400" dirty="0"/>
           </a:p>
@@ -4644,7 +4756,7 @@
                 <a:ea typeface="Pretendard" pitchFamily="34" charset="-122"/>
                 <a:cs typeface="Pretendard" pitchFamily="34" charset="-120"/>
               </a:rPr>
-              <a:t>true,"mocked":true,"extractedFields":{"area_signal":"역삼","asset_type":"오피스빌딩","price_band":"300억","size_signal":"3000평(약 9917.4㎡)"},"extractedFacts":{"region":"역삼","exactAddressCandidate":"역삼동 742-1","assetType":"오피스빌딩","priceText":"300억","sizeText":"3000평(약 9917.4㎡)","currentUse":"오피스","currentUseSignal":"근린생활시설","leaseSignal":"임대중","vacancySignal":"공실없음","tenantNames":"쿠팡","네이버","unitRentTexts":"301호: 1500만","sellerMotivationText":"자산 효율화","brokerNotes":"초역세권 매물"},"detectedSensitiveFields":"exact_address","tenant_name","ambiguousFields":,"warnings":,"areaSignal":"역삼","assetType":"오피스빌딩","priceBand":"300억","sizeSignal":"3000평(약 9917.4㎡)","dealType":"매각","buildingName":"역삼 센트럴타워","exactAddress":"역삼동 742-1","totalFloorArea":9917.3,"buildYear":2015,"currentUseSignal":"근린생활시설","vacancySignal":"공실 없음","fitSummary":"초역세권 근생 빌딩으로 시행/사옥 매입에 최적화","cautionSummary":"주요 임차 업종 만기 조율 필요","hiddenFields":"exact_address","seller_motivation","confidence":{"areaSignal":"confirmed","assetType":"confirmed","priceBand":"ai_hypothesis","fitSummary":"ai_hypothesis"},"missingData":"sizeSignal","boundaryNote":"본 자료는 실거래 통계 기반 참고치입니다.","buyerType":"법인 사옥형","budgetRange":{"min":50,"max":80,"display":"50억~80억"},"preferredRegions":"강남","성수","assetTypes":"꼬마빌딩","사옥용","purchasePurpose":"사옥용 매입","mustHave":"초역세권","주차","niceToHave":"테라스","루프탑","riskTolerance":"medium","financingNote":"자본금 50% 준비","missingQuestions":"구체적인 입주 시기가 언제인가요?","선호하는 수익률이 있나요?","privacyNotes":"연락처 비공개","fitReasons":"매수자 예산(50-80억)에 부합하는 매물입니다.","요청하신 성수/강남 권역에 해당합니다.","cautionReasons":"요청한 용도와 달리 명도 협의가 다소 필요합니다.","recommendedNextAction":"현장 답사 제안","kakaoMessage":"안녕하세요! 요청하신 조건에 부합하는 추천 매물이 있어 안내해 드립니다. 확인해보시고 피드백 부탁드립니다.","title":"강남 역삼역 초역세권 오피스 사옥용 빌딩 매각","shortSummary":"역삼역 도보 5분 거리의 준신축급 대형 오피스빌딩입니다.","dealPoints":"초역세권","사옥 최적","cautionPoints":"명도 조율 필요","hiddenInfoNotice":"보증금 및 지번은 인가 후 확인 가능","gateMessage":"G1 등급 등록이 필요합니다.","kakaoText":"강남 역삼역 오피스 빌딩 매각 안내입니다.","exactUnitCandidate":"101호","floor":"1층","areaSqmText":"150㎡","spaceType":"office","depositText":"5000만","monthlyRentText":"400만","maintenanceFeeText":"50만","availableFromText":"즉시입주","leaseTermMonthsText":"24","incentivesText":"렌트프리 2개월","restrictions":,"landlordIdentity":"김성수","currentTenant":"스타트업","vacancyReason":"이전 확장","rentNegotiation":"협의 가능","region":"성수동","areaSqm":150,"deposit":5000,"monthlyRent":400,"maintenanceFee":50,"availableFrom":"즉시입주","leaseTermMonths":24,"incentives":{"rentFreeMonths":2,"interiorSupport":"일부 인테리어 지원","freeRentDetail":"렌트프리 2개월 지원"},"shortSummaryLease":"성수역 도보 5분 거리 1층 리테일 상가 매물입니다."}</a:t>
+              <a:t>서초권역</a:t>
             </a:r>
             <a:endParaRPr lang="en-US" sz="1400" dirty="0"/>
           </a:p>
@@ -4653,6 +4765,862 @@
       <p:sp>
         <p:nvSpPr>
           <p:cNvPr id="8" name="Shape 6"/>
+          <p:cNvSpPr/>
+          <p:nvPr/>
+        </p:nvSpPr>
+        <p:spPr>
+          <a:xfrm>
+            <a:off x="566928" y="2048256"/>
+            <a:ext cx="6858000" cy="0"/>
+          </a:xfrm>
+          <a:prstGeom prst="line">
+            <a:avLst/>
+          </a:prstGeom>
+          <a:noFill/>
+          <a:ln w="3810">
+            <a:solidFill>
+              <a:srgbClr val="CBD5E1"/>
+            </a:solidFill>
+            <a:prstDash val="solid"/>
+          </a:ln>
+        </p:spPr>
+      </p:sp>
+      <p:sp>
+        <p:nvSpPr>
+          <p:cNvPr id="9" name="Text 7"/>
+          <p:cNvSpPr/>
+          <p:nvPr/>
+        </p:nvSpPr>
+        <p:spPr>
+          <a:xfrm>
+            <a:off x="566928" y="2048256"/>
+            <a:ext cx="2606040" cy="402336"/>
+          </a:xfrm>
+          <a:prstGeom prst="rect">
+            <a:avLst/>
+          </a:prstGeom>
+          <a:noFill/>
+          <a:ln/>
+        </p:spPr>
+        <p:txBody>
+          <a:bodyPr wrap="square" lIns="0" tIns="0" rIns="0" bIns="0" rtlCol="0" anchor="ctr"/>
+          <a:lstStyle/>
+          <a:p>
+            <a:pPr indent="0" marL="0">
+              <a:lnSpc>
+                <a:spcPct val="120000"/>
+              </a:lnSpc>
+              <a:buNone/>
+            </a:pPr>
+            <a:r>
+              <a:rPr lang="en-US" sz="1400" dirty="0">
+                <a:solidFill>
+                  <a:srgbClr val="64748B"/>
+                </a:solidFill>
+                <a:latin typeface="Pretendard" pitchFamily="34" charset="0"/>
+                <a:ea typeface="Pretendard" pitchFamily="34" charset="-122"/>
+                <a:cs typeface="Pretendard" pitchFamily="34" charset="-120"/>
+              </a:rPr>
+              <a:t>주요 용도</a:t>
+            </a:r>
+            <a:endParaRPr lang="en-US" sz="1400" dirty="0"/>
+          </a:p>
+        </p:txBody>
+      </p:sp>
+      <p:sp>
+        <p:nvSpPr>
+          <p:cNvPr id="10" name="Text 8"/>
+          <p:cNvSpPr/>
+          <p:nvPr/>
+        </p:nvSpPr>
+        <p:spPr>
+          <a:xfrm>
+            <a:off x="3172968" y="2048256"/>
+            <a:ext cx="4251960" cy="402336"/>
+          </a:xfrm>
+          <a:prstGeom prst="rect">
+            <a:avLst/>
+          </a:prstGeom>
+          <a:noFill/>
+          <a:ln/>
+        </p:spPr>
+        <p:txBody>
+          <a:bodyPr wrap="square" lIns="0" tIns="0" rIns="0" bIns="0" rtlCol="0" anchor="ctr"/>
+          <a:lstStyle/>
+          <a:p>
+            <a:pPr indent="0" marL="0">
+              <a:lnSpc>
+                <a:spcPct val="120000"/>
+              </a:lnSpc>
+              <a:buNone/>
+            </a:pPr>
+            <a:r>
+              <a:rPr lang="en-US" sz="1400" b="1" dirty="0">
+                <a:solidFill>
+                  <a:srgbClr val="0F172A"/>
+                </a:solidFill>
+                <a:latin typeface="Pretendard" pitchFamily="34" charset="0"/>
+                <a:ea typeface="Pretendard" pitchFamily="34" charset="-122"/>
+                <a:cs typeface="Pretendard" pitchFamily="34" charset="-120"/>
+              </a:rPr>
+              <a:t>근린생활시설 / 메디컬</a:t>
+            </a:r>
+            <a:endParaRPr lang="en-US" sz="1400" dirty="0"/>
+          </a:p>
+        </p:txBody>
+      </p:sp>
+      <p:sp>
+        <p:nvSpPr>
+          <p:cNvPr id="11" name="Shape 9"/>
+          <p:cNvSpPr/>
+          <p:nvPr/>
+        </p:nvSpPr>
+        <p:spPr>
+          <a:xfrm>
+            <a:off x="566928" y="2450592"/>
+            <a:ext cx="6858000" cy="0"/>
+          </a:xfrm>
+          <a:prstGeom prst="line">
+            <a:avLst/>
+          </a:prstGeom>
+          <a:noFill/>
+          <a:ln w="3810">
+            <a:solidFill>
+              <a:srgbClr val="CBD5E1"/>
+            </a:solidFill>
+            <a:prstDash val="solid"/>
+          </a:ln>
+        </p:spPr>
+      </p:sp>
+      <p:sp>
+        <p:nvSpPr>
+          <p:cNvPr id="12" name="Text 10"/>
+          <p:cNvSpPr/>
+          <p:nvPr/>
+        </p:nvSpPr>
+        <p:spPr>
+          <a:xfrm>
+            <a:off x="566928" y="2450592"/>
+            <a:ext cx="2606040" cy="402336"/>
+          </a:xfrm>
+          <a:prstGeom prst="rect">
+            <a:avLst/>
+          </a:prstGeom>
+          <a:noFill/>
+          <a:ln/>
+        </p:spPr>
+        <p:txBody>
+          <a:bodyPr wrap="square" lIns="0" tIns="0" rIns="0" bIns="0" rtlCol="0" anchor="ctr"/>
+          <a:lstStyle/>
+          <a:p>
+            <a:pPr indent="0" marL="0">
+              <a:lnSpc>
+                <a:spcPct val="120000"/>
+              </a:lnSpc>
+              <a:buNone/>
+            </a:pPr>
+            <a:r>
+              <a:rPr lang="en-US" sz="1400" dirty="0">
+                <a:solidFill>
+                  <a:srgbClr val="64748B"/>
+                </a:solidFill>
+                <a:latin typeface="Pretendard" pitchFamily="34" charset="0"/>
+                <a:ea typeface="Pretendard" pitchFamily="34" charset="-122"/>
+                <a:cs typeface="Pretendard" pitchFamily="34" charset="-120"/>
+              </a:rPr>
+              <a:t>연면적</a:t>
+            </a:r>
+            <a:endParaRPr lang="en-US" sz="1400" dirty="0"/>
+          </a:p>
+        </p:txBody>
+      </p:sp>
+      <p:sp>
+        <p:nvSpPr>
+          <p:cNvPr id="13" name="Text 11"/>
+          <p:cNvSpPr/>
+          <p:nvPr/>
+        </p:nvSpPr>
+        <p:spPr>
+          <a:xfrm>
+            <a:off x="3172968" y="2450592"/>
+            <a:ext cx="4251960" cy="402336"/>
+          </a:xfrm>
+          <a:prstGeom prst="rect">
+            <a:avLst/>
+          </a:prstGeom>
+          <a:noFill/>
+          <a:ln/>
+        </p:spPr>
+        <p:txBody>
+          <a:bodyPr wrap="square" lIns="0" tIns="0" rIns="0" bIns="0" rtlCol="0" anchor="ctr"/>
+          <a:lstStyle/>
+          <a:p>
+            <a:pPr indent="0" marL="0">
+              <a:lnSpc>
+                <a:spcPct val="120000"/>
+              </a:lnSpc>
+              <a:buNone/>
+            </a:pPr>
+            <a:r>
+              <a:rPr lang="en-US" sz="1400" b="1" dirty="0">
+                <a:solidFill>
+                  <a:srgbClr val="0F172A"/>
+                </a:solidFill>
+                <a:latin typeface="Pretendard" pitchFamily="34" charset="0"/>
+                <a:ea typeface="Pretendard" pitchFamily="34" charset="-122"/>
+                <a:cs typeface="Pretendard" pitchFamily="34" charset="-120"/>
+              </a:rPr>
+              <a:t>5,000㎡ (약 1513평(약 5001.7㎡))</a:t>
+            </a:r>
+            <a:endParaRPr lang="en-US" sz="1400" dirty="0"/>
+          </a:p>
+        </p:txBody>
+      </p:sp>
+      <p:sp>
+        <p:nvSpPr>
+          <p:cNvPr id="14" name="Shape 12"/>
+          <p:cNvSpPr/>
+          <p:nvPr/>
+        </p:nvSpPr>
+        <p:spPr>
+          <a:xfrm>
+            <a:off x="566928" y="2852928"/>
+            <a:ext cx="6858000" cy="0"/>
+          </a:xfrm>
+          <a:prstGeom prst="line">
+            <a:avLst/>
+          </a:prstGeom>
+          <a:noFill/>
+          <a:ln w="3810">
+            <a:solidFill>
+              <a:srgbClr val="CBD5E1"/>
+            </a:solidFill>
+            <a:prstDash val="solid"/>
+          </a:ln>
+        </p:spPr>
+      </p:sp>
+      <p:sp>
+        <p:nvSpPr>
+          <p:cNvPr id="15" name="Text 13"/>
+          <p:cNvSpPr/>
+          <p:nvPr/>
+        </p:nvSpPr>
+        <p:spPr>
+          <a:xfrm>
+            <a:off x="566928" y="2852928"/>
+            <a:ext cx="2606040" cy="402336"/>
+          </a:xfrm>
+          <a:prstGeom prst="rect">
+            <a:avLst/>
+          </a:prstGeom>
+          <a:noFill/>
+          <a:ln/>
+        </p:spPr>
+        <p:txBody>
+          <a:bodyPr wrap="square" lIns="0" tIns="0" rIns="0" bIns="0" rtlCol="0" anchor="ctr"/>
+          <a:lstStyle/>
+          <a:p>
+            <a:pPr indent="0" marL="0">
+              <a:lnSpc>
+                <a:spcPct val="120000"/>
+              </a:lnSpc>
+              <a:buNone/>
+            </a:pPr>
+            <a:r>
+              <a:rPr lang="en-US" sz="1400" dirty="0">
+                <a:solidFill>
+                  <a:srgbClr val="64748B"/>
+                </a:solidFill>
+                <a:latin typeface="Pretendard" pitchFamily="34" charset="0"/>
+                <a:ea typeface="Pretendard" pitchFamily="34" charset="-122"/>
+                <a:cs typeface="Pretendard" pitchFamily="34" charset="-120"/>
+              </a:rPr>
+              <a:t>대지면적</a:t>
+            </a:r>
+            <a:endParaRPr lang="en-US" sz="1400" dirty="0"/>
+          </a:p>
+        </p:txBody>
+      </p:sp>
+      <p:sp>
+        <p:nvSpPr>
+          <p:cNvPr id="16" name="Text 14"/>
+          <p:cNvSpPr/>
+          <p:nvPr/>
+        </p:nvSpPr>
+        <p:spPr>
+          <a:xfrm>
+            <a:off x="3172968" y="2852928"/>
+            <a:ext cx="4251960" cy="402336"/>
+          </a:xfrm>
+          <a:prstGeom prst="rect">
+            <a:avLst/>
+          </a:prstGeom>
+          <a:noFill/>
+          <a:ln/>
+        </p:spPr>
+        <p:txBody>
+          <a:bodyPr wrap="square" lIns="0" tIns="0" rIns="0" bIns="0" rtlCol="0" anchor="ctr"/>
+          <a:lstStyle/>
+          <a:p>
+            <a:pPr indent="0" marL="0">
+              <a:lnSpc>
+                <a:spcPct val="120000"/>
+              </a:lnSpc>
+              <a:buNone/>
+            </a:pPr>
+            <a:r>
+              <a:rPr lang="en-US" sz="1400" b="1" dirty="0">
+                <a:solidFill>
+                  <a:srgbClr val="0F172A"/>
+                </a:solidFill>
+                <a:latin typeface="Pretendard" pitchFamily="34" charset="0"/>
+                <a:ea typeface="Pretendard" pitchFamily="34" charset="-122"/>
+                <a:cs typeface="Pretendard" pitchFamily="34" charset="-120"/>
+              </a:rPr>
+              <a:t>1,000㎡ (약 303평(약 1001.7㎡))</a:t>
+            </a:r>
+            <a:endParaRPr lang="en-US" sz="1400" dirty="0"/>
+          </a:p>
+        </p:txBody>
+      </p:sp>
+      <p:sp>
+        <p:nvSpPr>
+          <p:cNvPr id="17" name="Shape 15"/>
+          <p:cNvSpPr/>
+          <p:nvPr/>
+        </p:nvSpPr>
+        <p:spPr>
+          <a:xfrm>
+            <a:off x="566928" y="3255264"/>
+            <a:ext cx="6858000" cy="0"/>
+          </a:xfrm>
+          <a:prstGeom prst="line">
+            <a:avLst/>
+          </a:prstGeom>
+          <a:noFill/>
+          <a:ln w="3810">
+            <a:solidFill>
+              <a:srgbClr val="CBD5E1"/>
+            </a:solidFill>
+            <a:prstDash val="solid"/>
+          </a:ln>
+        </p:spPr>
+      </p:sp>
+      <p:sp>
+        <p:nvSpPr>
+          <p:cNvPr id="18" name="Text 16"/>
+          <p:cNvSpPr/>
+          <p:nvPr/>
+        </p:nvSpPr>
+        <p:spPr>
+          <a:xfrm>
+            <a:off x="566928" y="3255264"/>
+            <a:ext cx="2606040" cy="402336"/>
+          </a:xfrm>
+          <a:prstGeom prst="rect">
+            <a:avLst/>
+          </a:prstGeom>
+          <a:noFill/>
+          <a:ln/>
+        </p:spPr>
+        <p:txBody>
+          <a:bodyPr wrap="square" lIns="0" tIns="0" rIns="0" bIns="0" rtlCol="0" anchor="ctr"/>
+          <a:lstStyle/>
+          <a:p>
+            <a:pPr indent="0" marL="0">
+              <a:lnSpc>
+                <a:spcPct val="120000"/>
+              </a:lnSpc>
+              <a:buNone/>
+            </a:pPr>
+            <a:r>
+              <a:rPr lang="en-US" sz="1400" dirty="0">
+                <a:solidFill>
+                  <a:srgbClr val="64748B"/>
+                </a:solidFill>
+                <a:latin typeface="Pretendard" pitchFamily="34" charset="0"/>
+                <a:ea typeface="Pretendard" pitchFamily="34" charset="-122"/>
+                <a:cs typeface="Pretendard" pitchFamily="34" charset="-120"/>
+              </a:rPr>
+              <a:t>용도지역</a:t>
+            </a:r>
+            <a:endParaRPr lang="en-US" sz="1400" dirty="0"/>
+          </a:p>
+        </p:txBody>
+      </p:sp>
+      <p:sp>
+        <p:nvSpPr>
+          <p:cNvPr id="19" name="Text 17"/>
+          <p:cNvSpPr/>
+          <p:nvPr/>
+        </p:nvSpPr>
+        <p:spPr>
+          <a:xfrm>
+            <a:off x="3172968" y="3255264"/>
+            <a:ext cx="4251960" cy="402336"/>
+          </a:xfrm>
+          <a:prstGeom prst="rect">
+            <a:avLst/>
+          </a:prstGeom>
+          <a:noFill/>
+          <a:ln/>
+        </p:spPr>
+        <p:txBody>
+          <a:bodyPr wrap="square" lIns="0" tIns="0" rIns="0" bIns="0" rtlCol="0" anchor="ctr"/>
+          <a:lstStyle/>
+          <a:p>
+            <a:pPr indent="0" marL="0">
+              <a:lnSpc>
+                <a:spcPct val="120000"/>
+              </a:lnSpc>
+              <a:buNone/>
+            </a:pPr>
+            <a:r>
+              <a:rPr lang="en-US" sz="1400" b="1" dirty="0">
+                <a:solidFill>
+                  <a:srgbClr val="0F172A"/>
+                </a:solidFill>
+                <a:latin typeface="Pretendard" pitchFamily="34" charset="0"/>
+                <a:ea typeface="Pretendard" pitchFamily="34" charset="-122"/>
+                <a:cs typeface="Pretendard" pitchFamily="34" charset="-120"/>
+              </a:rPr>
+              <a:t>일반상업지역</a:t>
+            </a:r>
+            <a:endParaRPr lang="en-US" sz="1400" dirty="0"/>
+          </a:p>
+        </p:txBody>
+      </p:sp>
+      <p:sp>
+        <p:nvSpPr>
+          <p:cNvPr id="20" name="Shape 18"/>
+          <p:cNvSpPr/>
+          <p:nvPr/>
+        </p:nvSpPr>
+        <p:spPr>
+          <a:xfrm>
+            <a:off x="566928" y="3657600"/>
+            <a:ext cx="6858000" cy="0"/>
+          </a:xfrm>
+          <a:prstGeom prst="line">
+            <a:avLst/>
+          </a:prstGeom>
+          <a:noFill/>
+          <a:ln w="3810">
+            <a:solidFill>
+              <a:srgbClr val="CBD5E1"/>
+            </a:solidFill>
+            <a:prstDash val="solid"/>
+          </a:ln>
+        </p:spPr>
+      </p:sp>
+      <p:sp>
+        <p:nvSpPr>
+          <p:cNvPr id="21" name="Text 19"/>
+          <p:cNvSpPr/>
+          <p:nvPr/>
+        </p:nvSpPr>
+        <p:spPr>
+          <a:xfrm>
+            <a:off x="566928" y="3657600"/>
+            <a:ext cx="2606040" cy="402336"/>
+          </a:xfrm>
+          <a:prstGeom prst="rect">
+            <a:avLst/>
+          </a:prstGeom>
+          <a:noFill/>
+          <a:ln/>
+        </p:spPr>
+        <p:txBody>
+          <a:bodyPr wrap="square" lIns="0" tIns="0" rIns="0" bIns="0" rtlCol="0" anchor="ctr"/>
+          <a:lstStyle/>
+          <a:p>
+            <a:pPr indent="0" marL="0">
+              <a:lnSpc>
+                <a:spcPct val="120000"/>
+              </a:lnSpc>
+              <a:buNone/>
+            </a:pPr>
+            <a:r>
+              <a:rPr lang="en-US" sz="1400" dirty="0">
+                <a:solidFill>
+                  <a:srgbClr val="64748B"/>
+                </a:solidFill>
+                <a:latin typeface="Pretendard" pitchFamily="34" charset="0"/>
+                <a:ea typeface="Pretendard" pitchFamily="34" charset="-122"/>
+                <a:cs typeface="Pretendard" pitchFamily="34" charset="-120"/>
+              </a:rPr>
+              <a:t>승강기</a:t>
+            </a:r>
+            <a:endParaRPr lang="en-US" sz="1400" dirty="0"/>
+          </a:p>
+        </p:txBody>
+      </p:sp>
+      <p:sp>
+        <p:nvSpPr>
+          <p:cNvPr id="22" name="Text 20"/>
+          <p:cNvSpPr/>
+          <p:nvPr/>
+        </p:nvSpPr>
+        <p:spPr>
+          <a:xfrm>
+            <a:off x="3172968" y="3657600"/>
+            <a:ext cx="4251960" cy="402336"/>
+          </a:xfrm>
+          <a:prstGeom prst="rect">
+            <a:avLst/>
+          </a:prstGeom>
+          <a:noFill/>
+          <a:ln/>
+        </p:spPr>
+        <p:txBody>
+          <a:bodyPr wrap="square" lIns="0" tIns="0" rIns="0" bIns="0" rtlCol="0" anchor="ctr"/>
+          <a:lstStyle/>
+          <a:p>
+            <a:pPr indent="0" marL="0">
+              <a:lnSpc>
+                <a:spcPct val="120000"/>
+              </a:lnSpc>
+              <a:buNone/>
+            </a:pPr>
+            <a:r>
+              <a:rPr lang="en-US" sz="1400" b="1" dirty="0">
+                <a:solidFill>
+                  <a:srgbClr val="0F172A"/>
+                </a:solidFill>
+                <a:latin typeface="Pretendard" pitchFamily="34" charset="0"/>
+                <a:ea typeface="Pretendard" pitchFamily="34" charset="-122"/>
+                <a:cs typeface="Pretendard" pitchFamily="34" charset="-120"/>
+              </a:rPr>
+              <a:t>1대 (15인승 침대용)</a:t>
+            </a:r>
+            <a:endParaRPr lang="en-US" sz="1400" dirty="0"/>
+          </a:p>
+        </p:txBody>
+      </p:sp>
+      <p:sp>
+        <p:nvSpPr>
+          <p:cNvPr id="23" name="Shape 21"/>
+          <p:cNvSpPr/>
+          <p:nvPr/>
+        </p:nvSpPr>
+        <p:spPr>
+          <a:xfrm>
+            <a:off x="566928" y="4059936"/>
+            <a:ext cx="6858000" cy="0"/>
+          </a:xfrm>
+          <a:prstGeom prst="line">
+            <a:avLst/>
+          </a:prstGeom>
+          <a:noFill/>
+          <a:ln w="3810">
+            <a:solidFill>
+              <a:srgbClr val="CBD5E1"/>
+            </a:solidFill>
+            <a:prstDash val="solid"/>
+          </a:ln>
+        </p:spPr>
+      </p:sp>
+      <p:sp>
+        <p:nvSpPr>
+          <p:cNvPr id="24" name="Text 22"/>
+          <p:cNvSpPr/>
+          <p:nvPr/>
+        </p:nvSpPr>
+        <p:spPr>
+          <a:xfrm>
+            <a:off x="566928" y="4059936"/>
+            <a:ext cx="2606040" cy="402336"/>
+          </a:xfrm>
+          <a:prstGeom prst="rect">
+            <a:avLst/>
+          </a:prstGeom>
+          <a:noFill/>
+          <a:ln/>
+        </p:spPr>
+        <p:txBody>
+          <a:bodyPr wrap="square" lIns="0" tIns="0" rIns="0" bIns="0" rtlCol="0" anchor="ctr"/>
+          <a:lstStyle/>
+          <a:p>
+            <a:pPr indent="0" marL="0">
+              <a:lnSpc>
+                <a:spcPct val="120000"/>
+              </a:lnSpc>
+              <a:buNone/>
+            </a:pPr>
+            <a:r>
+              <a:rPr lang="en-US" sz="1400" dirty="0">
+                <a:solidFill>
+                  <a:srgbClr val="64748B"/>
+                </a:solidFill>
+                <a:latin typeface="Pretendard" pitchFamily="34" charset="0"/>
+                <a:ea typeface="Pretendard" pitchFamily="34" charset="-122"/>
+                <a:cs typeface="Pretendard" pitchFamily="34" charset="-120"/>
+              </a:rPr>
+              <a:t>주차 대수</a:t>
+            </a:r>
+            <a:endParaRPr lang="en-US" sz="1400" dirty="0"/>
+          </a:p>
+        </p:txBody>
+      </p:sp>
+      <p:sp>
+        <p:nvSpPr>
+          <p:cNvPr id="25" name="Text 23"/>
+          <p:cNvSpPr/>
+          <p:nvPr/>
+        </p:nvSpPr>
+        <p:spPr>
+          <a:xfrm>
+            <a:off x="3172968" y="4059936"/>
+            <a:ext cx="4251960" cy="402336"/>
+          </a:xfrm>
+          <a:prstGeom prst="rect">
+            <a:avLst/>
+          </a:prstGeom>
+          <a:noFill/>
+          <a:ln/>
+        </p:spPr>
+        <p:txBody>
+          <a:bodyPr wrap="square" lIns="0" tIns="0" rIns="0" bIns="0" rtlCol="0" anchor="ctr"/>
+          <a:lstStyle/>
+          <a:p>
+            <a:pPr indent="0" marL="0">
+              <a:lnSpc>
+                <a:spcPct val="120000"/>
+              </a:lnSpc>
+              <a:buNone/>
+            </a:pPr>
+            <a:r>
+              <a:rPr lang="en-US" sz="1400" b="1" dirty="0">
+                <a:solidFill>
+                  <a:srgbClr val="0F172A"/>
+                </a:solidFill>
+                <a:latin typeface="Pretendard" pitchFamily="34" charset="0"/>
+                <a:ea typeface="Pretendard" pitchFamily="34" charset="-122"/>
+                <a:cs typeface="Pretendard" pitchFamily="34" charset="-120"/>
+              </a:rPr>
+              <a:t>18대 (자주식 완비)</a:t>
+            </a:r>
+            <a:endParaRPr lang="en-US" sz="1400" dirty="0"/>
+          </a:p>
+        </p:txBody>
+      </p:sp>
+      <p:sp>
+        <p:nvSpPr>
+          <p:cNvPr id="26" name="Shape 24"/>
+          <p:cNvSpPr/>
+          <p:nvPr/>
+        </p:nvSpPr>
+        <p:spPr>
+          <a:xfrm>
+            <a:off x="566928" y="4462272"/>
+            <a:ext cx="6858000" cy="0"/>
+          </a:xfrm>
+          <a:prstGeom prst="line">
+            <a:avLst/>
+          </a:prstGeom>
+          <a:noFill/>
+          <a:ln w="3810">
+            <a:solidFill>
+              <a:srgbClr val="CBD5E1"/>
+            </a:solidFill>
+            <a:prstDash val="solid"/>
+          </a:ln>
+        </p:spPr>
+      </p:sp>
+      <p:sp>
+        <p:nvSpPr>
+          <p:cNvPr id="27" name="Text 25"/>
+          <p:cNvSpPr/>
+          <p:nvPr/>
+        </p:nvSpPr>
+        <p:spPr>
+          <a:xfrm>
+            <a:off x="566928" y="4462272"/>
+            <a:ext cx="2606040" cy="402336"/>
+          </a:xfrm>
+          <a:prstGeom prst="rect">
+            <a:avLst/>
+          </a:prstGeom>
+          <a:noFill/>
+          <a:ln/>
+        </p:spPr>
+        <p:txBody>
+          <a:bodyPr wrap="square" lIns="0" tIns="0" rIns="0" bIns="0" rtlCol="0" anchor="ctr"/>
+          <a:lstStyle/>
+          <a:p>
+            <a:pPr indent="0" marL="0">
+              <a:lnSpc>
+                <a:spcPct val="120000"/>
+              </a:lnSpc>
+              <a:buNone/>
+            </a:pPr>
+            <a:r>
+              <a:rPr lang="en-US" sz="1400" dirty="0">
+                <a:solidFill>
+                  <a:srgbClr val="64748B"/>
+                </a:solidFill>
+                <a:latin typeface="Pretendard" pitchFamily="34" charset="0"/>
+                <a:ea typeface="Pretendard" pitchFamily="34" charset="-122"/>
+                <a:cs typeface="Pretendard" pitchFamily="34" charset="-120"/>
+              </a:rPr>
+              <a:t>주구조</a:t>
+            </a:r>
+            <a:endParaRPr lang="en-US" sz="1400" dirty="0"/>
+          </a:p>
+        </p:txBody>
+      </p:sp>
+      <p:sp>
+        <p:nvSpPr>
+          <p:cNvPr id="28" name="Text 26"/>
+          <p:cNvSpPr/>
+          <p:nvPr/>
+        </p:nvSpPr>
+        <p:spPr>
+          <a:xfrm>
+            <a:off x="3172968" y="4462272"/>
+            <a:ext cx="4251960" cy="402336"/>
+          </a:xfrm>
+          <a:prstGeom prst="rect">
+            <a:avLst/>
+          </a:prstGeom>
+          <a:noFill/>
+          <a:ln/>
+        </p:spPr>
+        <p:txBody>
+          <a:bodyPr wrap="square" lIns="0" tIns="0" rIns="0" bIns="0" rtlCol="0" anchor="ctr"/>
+          <a:lstStyle/>
+          <a:p>
+            <a:pPr indent="0" marL="0">
+              <a:lnSpc>
+                <a:spcPct val="120000"/>
+              </a:lnSpc>
+              <a:buNone/>
+            </a:pPr>
+            <a:r>
+              <a:rPr lang="en-US" sz="1400" b="1" dirty="0">
+                <a:solidFill>
+                  <a:srgbClr val="0F172A"/>
+                </a:solidFill>
+                <a:latin typeface="Pretendard" pitchFamily="34" charset="0"/>
+                <a:ea typeface="Pretendard" pitchFamily="34" charset="-122"/>
+                <a:cs typeface="Pretendard" pitchFamily="34" charset="-120"/>
+              </a:rPr>
+              <a:t>철근콘크리트구조</a:t>
+            </a:r>
+            <a:endParaRPr lang="en-US" sz="1400" dirty="0"/>
+          </a:p>
+        </p:txBody>
+      </p:sp>
+      <p:sp>
+        <p:nvSpPr>
+          <p:cNvPr id="29" name="Shape 27"/>
+          <p:cNvSpPr/>
+          <p:nvPr/>
+        </p:nvSpPr>
+        <p:spPr>
+          <a:xfrm>
+            <a:off x="566928" y="4864608"/>
+            <a:ext cx="6858000" cy="0"/>
+          </a:xfrm>
+          <a:prstGeom prst="line">
+            <a:avLst/>
+          </a:prstGeom>
+          <a:noFill/>
+          <a:ln w="3810">
+            <a:solidFill>
+              <a:srgbClr val="CBD5E1"/>
+            </a:solidFill>
+            <a:prstDash val="solid"/>
+          </a:ln>
+        </p:spPr>
+      </p:sp>
+      <p:sp>
+        <p:nvSpPr>
+          <p:cNvPr id="30" name="Text 28"/>
+          <p:cNvSpPr/>
+          <p:nvPr/>
+        </p:nvSpPr>
+        <p:spPr>
+          <a:xfrm>
+            <a:off x="566928" y="4864608"/>
+            <a:ext cx="2606040" cy="402336"/>
+          </a:xfrm>
+          <a:prstGeom prst="rect">
+            <a:avLst/>
+          </a:prstGeom>
+          <a:noFill/>
+          <a:ln/>
+        </p:spPr>
+        <p:txBody>
+          <a:bodyPr wrap="square" lIns="0" tIns="0" rIns="0" bIns="0" rtlCol="0" anchor="ctr"/>
+          <a:lstStyle/>
+          <a:p>
+            <a:pPr indent="0" marL="0">
+              <a:lnSpc>
+                <a:spcPct val="120000"/>
+              </a:lnSpc>
+              <a:buNone/>
+            </a:pPr>
+            <a:r>
+              <a:rPr lang="en-US" sz="1400" dirty="0">
+                <a:solidFill>
+                  <a:srgbClr val="64748B"/>
+                </a:solidFill>
+                <a:latin typeface="Pretendard" pitchFamily="34" charset="0"/>
+                <a:ea typeface="Pretendard" pitchFamily="34" charset="-122"/>
+                <a:cs typeface="Pretendard" pitchFamily="34" charset="-120"/>
+              </a:rPr>
+              <a:t>매매 희망가</a:t>
+            </a:r>
+            <a:endParaRPr lang="en-US" sz="1400" dirty="0"/>
+          </a:p>
+        </p:txBody>
+      </p:sp>
+      <p:sp>
+        <p:nvSpPr>
+          <p:cNvPr id="31" name="Text 29"/>
+          <p:cNvSpPr/>
+          <p:nvPr/>
+        </p:nvSpPr>
+        <p:spPr>
+          <a:xfrm>
+            <a:off x="3172968" y="4864608"/>
+            <a:ext cx="4251960" cy="402336"/>
+          </a:xfrm>
+          <a:prstGeom prst="rect">
+            <a:avLst/>
+          </a:prstGeom>
+          <a:noFill/>
+          <a:ln/>
+        </p:spPr>
+        <p:txBody>
+          <a:bodyPr wrap="square" lIns="0" tIns="0" rIns="0" bIns="0" rtlCol="0" anchor="ctr"/>
+          <a:lstStyle/>
+          <a:p>
+            <a:pPr indent="0" marL="0">
+              <a:lnSpc>
+                <a:spcPct val="120000"/>
+              </a:lnSpc>
+              <a:buNone/>
+            </a:pPr>
+            <a:r>
+              <a:rPr lang="en-US" sz="1400" b="1" dirty="0">
+                <a:solidFill>
+                  <a:srgbClr val="0F172A"/>
+                </a:solidFill>
+                <a:latin typeface="Pretendard" pitchFamily="34" charset="0"/>
+                <a:ea typeface="Pretendard" pitchFamily="34" charset="-122"/>
+                <a:cs typeface="Pretendard" pitchFamily="34" charset="-120"/>
+              </a:rPr>
+              <a:t>165억</a:t>
+            </a:r>
+            <a:endParaRPr lang="en-US" sz="1400" dirty="0"/>
+          </a:p>
+        </p:txBody>
+      </p:sp>
+      <p:sp>
+        <p:nvSpPr>
+          <p:cNvPr id="32" name="Shape 30"/>
           <p:cNvSpPr/>
           <p:nvPr/>
         </p:nvSpPr>
@@ -4675,18 +5643,18 @@
       </p:sp>
       <p:sp>
         <p:nvSpPr>
-          <p:cNvPr id="9" name="Shape 7"/>
+          <p:cNvPr id="33" name="Shape 31"/>
           <p:cNvSpPr/>
           <p:nvPr/>
         </p:nvSpPr>
         <p:spPr>
           <a:xfrm>
             <a:off x="7784287" y="1645920"/>
-            <a:ext cx="3840480" cy="2103120"/>
+            <a:ext cx="3840480" cy="1645920"/>
           </a:xfrm>
           <a:prstGeom prst="roundRect">
             <a:avLst>
-              <a:gd name="adj" fmla="val 2609"/>
+              <a:gd name="adj" fmla="val 3333"/>
             </a:avLst>
           </a:prstGeom>
           <a:solidFill>
@@ -4697,14 +5665,14 @@
       </p:sp>
       <p:sp>
         <p:nvSpPr>
-          <p:cNvPr id="10" name="Shape 8"/>
+          <p:cNvPr id="34" name="Shape 32"/>
           <p:cNvSpPr/>
           <p:nvPr/>
         </p:nvSpPr>
         <p:spPr>
           <a:xfrm>
             <a:off x="7784287" y="1700784"/>
-            <a:ext cx="36576" cy="1993392"/>
+            <a:ext cx="36576" cy="1536192"/>
           </a:xfrm>
           <a:prstGeom prst="rect">
             <a:avLst/>
@@ -4717,7 +5685,7 @@
       </p:sp>
       <p:sp>
         <p:nvSpPr>
-          <p:cNvPr id="11" name="Text 9"/>
+          <p:cNvPr id="35" name="Text 33"/>
           <p:cNvSpPr/>
           <p:nvPr/>
         </p:nvSpPr>
@@ -4739,31 +5707,20 @@
             <a:pPr indent="0" marL="0">
               <a:buNone/>
             </a:pPr>
-            <a:r>
-              <a:rPr lang="en-US" sz="1050" b="1" dirty="0">
-                <a:solidFill>
-                  <a:srgbClr val="1D4ED8"/>
-                </a:solidFill>
-                <a:latin typeface="Pretendard" pitchFamily="34" charset="0"/>
-                <a:ea typeface="Pretendard" pitchFamily="34" charset="-122"/>
-                <a:cs typeface="Pretendard" pitchFamily="34" charset="-120"/>
-              </a:rPr>
-              <a:t>토지 및 건물 분석 포인트</a:t>
-            </a:r>
             <a:endParaRPr lang="en-US" sz="1050" dirty="0"/>
           </a:p>
         </p:txBody>
       </p:sp>
       <p:sp>
         <p:nvSpPr>
-          <p:cNvPr id="12" name="Text 10"/>
+          <p:cNvPr id="36" name="Text 34"/>
           <p:cNvSpPr/>
           <p:nvPr/>
         </p:nvSpPr>
         <p:spPr>
           <a:xfrm>
             <a:off x="7967167" y="1975104"/>
-            <a:ext cx="3511296" cy="1700784"/>
+            <a:ext cx="3511296" cy="1243584"/>
           </a:xfrm>
           <a:prstGeom prst="rect">
             <a:avLst/>
@@ -4775,12 +5732,11 @@
           <a:bodyPr wrap="square" lIns="0" tIns="0" rIns="0" bIns="0" rtlCol="0" anchor="t"/>
           <a:lstStyle/>
           <a:p>
-            <a:pPr marL="342900" indent="-342900">
+            <a:pPr indent="0" marL="0">
               <a:lnSpc>
                 <a:spcPct val="120000"/>
               </a:lnSpc>
-              <a:buSzPct val="100000"/>
-              <a:buChar char="•"/>
+              <a:buNone/>
             </a:pPr>
             <a:r>
               <a:rPr lang="en-US" sz="930" dirty="0">
@@ -4791,223 +5747,15 @@
                 <a:ea typeface="Pretendard" pitchFamily="34" charset="-122"/>
                 <a:cs typeface="Pretendard" pitchFamily="34" charset="-120"/>
               </a:rPr>
-              <a:t>서초대로 25m 메인 도로변 우수한 가시성 확보</a:t>
+              <a:t>본 매물은 서초권역 대로변 입지의 우량 메디컬 테넌트 만실 운영 자산입니다.</a:t>
             </a:r>
             <a:endParaRPr lang="en-US" sz="930" dirty="0"/>
           </a:p>
-          <a:p>
-            <a:pPr marL="342900" indent="-342900">
-              <a:lnSpc>
-                <a:spcPct val="120000"/>
-              </a:lnSpc>
-              <a:buSzPct val="100000"/>
-              <a:buChar char="•"/>
-            </a:pPr>
-            <a:r>
-              <a:rPr lang="en-US" sz="930" dirty="0">
-                <a:solidFill>
-                  <a:srgbClr val="0F172A"/>
-                </a:solidFill>
-                <a:latin typeface="Pretendard" pitchFamily="34" charset="0"/>
-                <a:ea typeface="Pretendard" pitchFamily="34" charset="-122"/>
-                <a:cs typeface="Pretendard" pitchFamily="34" charset="-120"/>
-              </a:rPr>
-              <a:t>제3종일반주거지역 법정 용적률 완비 자산</a:t>
-            </a:r>
-            <a:endParaRPr lang="en-US" sz="930" dirty="0"/>
-          </a:p>
-          <a:p>
-            <a:pPr marL="342900" indent="-342900">
-              <a:lnSpc>
-                <a:spcPct val="120000"/>
-              </a:lnSpc>
-              <a:buSzPct val="100000"/>
-              <a:buChar char="•"/>
-            </a:pPr>
-            <a:r>
-              <a:rPr lang="en-US" sz="930" dirty="0">
-                <a:solidFill>
-                  <a:srgbClr val="0F172A"/>
-                </a:solidFill>
-                <a:latin typeface="Pretendard" pitchFamily="34" charset="0"/>
-                <a:ea typeface="Pretendard" pitchFamily="34" charset="-122"/>
-                <a:cs typeface="Pretendard" pitchFamily="34" charset="-120"/>
-              </a:rPr>
-              <a:t>침대용 승강기 완비로 병의원 입점 최적화 구조</a:t>
-            </a:r>
-            <a:endParaRPr lang="en-US" sz="930" dirty="0"/>
-          </a:p>
-        </p:txBody>
-      </p:sp>
-      <p:sp>
-        <p:nvSpPr>
-          <p:cNvPr id="13" name="Shape 11"/>
-          <p:cNvSpPr/>
-          <p:nvPr/>
-        </p:nvSpPr>
-        <p:spPr>
-          <a:xfrm>
-            <a:off x="7784287" y="3977640"/>
-            <a:ext cx="3840480" cy="2148840"/>
-          </a:xfrm>
-          <a:prstGeom prst="roundRect">
-            <a:avLst>
-              <a:gd name="adj" fmla="val 2553"/>
-            </a:avLst>
-          </a:prstGeom>
-          <a:solidFill>
-            <a:srgbClr val="DBEAFE"/>
-          </a:solidFill>
-          <a:ln/>
-        </p:spPr>
-      </p:sp>
-      <p:sp>
-        <p:nvSpPr>
-          <p:cNvPr id="14" name="Shape 12"/>
-          <p:cNvSpPr/>
-          <p:nvPr/>
-        </p:nvSpPr>
-        <p:spPr>
-          <a:xfrm>
-            <a:off x="7784287" y="4032504"/>
-            <a:ext cx="36576" cy="2039112"/>
-          </a:xfrm>
-          <a:prstGeom prst="rect">
-            <a:avLst/>
-          </a:prstGeom>
-          <a:solidFill>
-            <a:srgbClr val="1D4ED8"/>
-          </a:solidFill>
-          <a:ln/>
-        </p:spPr>
-      </p:sp>
-      <p:sp>
-        <p:nvSpPr>
-          <p:cNvPr id="15" name="Text 13"/>
-          <p:cNvSpPr/>
-          <p:nvPr/>
-        </p:nvSpPr>
-        <p:spPr>
-          <a:xfrm>
-            <a:off x="7967167" y="4087368"/>
-            <a:ext cx="3511296" cy="201168"/>
-          </a:xfrm>
-          <a:prstGeom prst="rect">
-            <a:avLst/>
-          </a:prstGeom>
-          <a:noFill/>
-          <a:ln/>
-        </p:spPr>
-        <p:txBody>
-          <a:bodyPr wrap="square" lIns="0" tIns="0" rIns="0" bIns="0" rtlCol="0" anchor="ctr"/>
-          <a:lstStyle/>
-          <a:p>
-            <a:pPr indent="0" marL="0">
-              <a:buNone/>
-            </a:pPr>
-            <a:r>
-              <a:rPr lang="en-US" sz="1050" b="1" dirty="0">
-                <a:solidFill>
-                  <a:srgbClr val="1D4ED8"/>
-                </a:solidFill>
-                <a:latin typeface="Pretendard" pitchFamily="34" charset="0"/>
-                <a:ea typeface="Pretendard" pitchFamily="34" charset="-122"/>
-                <a:cs typeface="Pretendard" pitchFamily="34" charset="-120"/>
-              </a:rPr>
-              <a:t>물건 실사 및 관리 상태</a:t>
-            </a:r>
-            <a:endParaRPr lang="en-US" sz="1050" dirty="0"/>
-          </a:p>
-        </p:txBody>
-      </p:sp>
-      <p:sp>
-        <p:nvSpPr>
-          <p:cNvPr id="16" name="Text 14"/>
-          <p:cNvSpPr/>
-          <p:nvPr/>
-        </p:nvSpPr>
-        <p:spPr>
-          <a:xfrm>
-            <a:off x="7967167" y="4306824"/>
-            <a:ext cx="3511296" cy="1746504"/>
-          </a:xfrm>
-          <a:prstGeom prst="rect">
-            <a:avLst/>
-          </a:prstGeom>
-          <a:noFill/>
-          <a:ln/>
-        </p:spPr>
-        <p:txBody>
-          <a:bodyPr wrap="square" lIns="0" tIns="0" rIns="0" bIns="0" rtlCol="0" anchor="t"/>
-          <a:lstStyle/>
-          <a:p>
-            <a:pPr marL="342900" indent="-342900">
-              <a:lnSpc>
-                <a:spcPct val="120000"/>
-              </a:lnSpc>
-              <a:buSzPct val="100000"/>
-              <a:buChar char="•"/>
-            </a:pPr>
-            <a:r>
-              <a:rPr lang="en-US" sz="930" dirty="0">
-                <a:solidFill>
-                  <a:srgbClr val="0F172A"/>
-                </a:solidFill>
-                <a:latin typeface="Pretendard" pitchFamily="34" charset="0"/>
-                <a:ea typeface="Pretendard" pitchFamily="34" charset="-122"/>
-                <a:cs typeface="Pretendard" pitchFamily="34" charset="-120"/>
-              </a:rPr>
-              <a:t>2017년 준공 신축급 상태로 누수·균열 0건</a:t>
-            </a:r>
-            <a:endParaRPr lang="en-US" sz="930" dirty="0"/>
-          </a:p>
-          <a:p>
-            <a:pPr marL="342900" indent="-342900">
-              <a:lnSpc>
-                <a:spcPct val="120000"/>
-              </a:lnSpc>
-              <a:buSzPct val="100000"/>
-              <a:buChar char="•"/>
-            </a:pPr>
-            <a:r>
-              <a:rPr lang="en-US" sz="930" dirty="0">
-                <a:solidFill>
-                  <a:srgbClr val="0F172A"/>
-                </a:solidFill>
-                <a:latin typeface="Pretendard" pitchFamily="34" charset="0"/>
-                <a:ea typeface="Pretendard" pitchFamily="34" charset="-122"/>
-                <a:cs typeface="Pretendard" pitchFamily="34" charset="-120"/>
-              </a:rPr>
-              <a:t>단독 법인 소유로 권리관계 투명</a:t>
-            </a:r>
-            <a:endParaRPr lang="en-US" sz="930" dirty="0"/>
-          </a:p>
-          <a:p>
-            <a:pPr marL="342900" indent="-342900">
-              <a:lnSpc>
-                <a:spcPct val="120000"/>
-              </a:lnSpc>
-              <a:buSzPct val="100000"/>
-              <a:buChar char="•"/>
-            </a:pPr>
-            <a:r>
-              <a:rPr lang="en-US" sz="930" dirty="0">
-                <a:solidFill>
-                  <a:srgbClr val="0F172A"/>
-                </a:solidFill>
-                <a:latin typeface="Pretendard" pitchFamily="34" charset="0"/>
-                <a:ea typeface="Pretendard" pitchFamily="34" charset="-122"/>
-                <a:cs typeface="Pretendard" pitchFamily="34" charset="-120"/>
-              </a:rPr>
-              <a:t>1금융권 담보대출 85억 원 승계 적격</a:t>
-            </a:r>
-            <a:endParaRPr lang="en-US" sz="930" dirty="0"/>
-          </a:p>
-        </p:txBody>
-      </p:sp>
-      <p:sp>
-        <p:nvSpPr>
-          <p:cNvPr id="17" name="Text 15"/>
+        </p:txBody>
+      </p:sp>
+      <p:sp>
+        <p:nvSpPr>
+          <p:cNvPr id="37" name="Text 35"/>
           <p:cNvSpPr/>
           <p:nvPr/>
         </p:nvSpPr>
@@ -5046,7 +5794,7 @@
       </p:sp>
       <p:sp>
         <p:nvSpPr>
-          <p:cNvPr id="18" name="Shape 16"/>
+          <p:cNvPr id="38" name="Shape 36"/>
           <p:cNvSpPr/>
           <p:nvPr/>
         </p:nvSpPr>
@@ -5481,17 +6229,137 @@
         </p:nvSpPr>
         <p:spPr>
           <a:xfrm>
-            <a:off x="566928" y="1417320"/>
-            <a:ext cx="2606040" cy="402336"/>
-          </a:xfrm>
-          <a:prstGeom prst="rect">
-            <a:avLst/>
-          </a:prstGeom>
-          <a:noFill/>
-          <a:ln/>
-        </p:spPr>
-        <p:txBody>
-          <a:bodyPr wrap="square" lIns="0" tIns="0" rIns="0" bIns="0" rtlCol="0" anchor="ctr"/>
+            <a:off x="566928" y="1325880"/>
+            <a:ext cx="6858000" cy="237744"/>
+          </a:xfrm>
+          <a:prstGeom prst="rect">
+            <a:avLst/>
+          </a:prstGeom>
+          <a:noFill/>
+          <a:ln/>
+        </p:spPr>
+        <p:txBody>
+          <a:bodyPr wrap="square" lIns="0" tIns="0" rIns="0" bIns="0" rtlCol="0" anchor="ctr"/>
+          <a:lstStyle/>
+          <a:p>
+            <a:pPr indent="0" marL="0">
+              <a:buNone/>
+            </a:pPr>
+            <a:r>
+              <a:rPr lang="en-US" sz="1100" b="1" dirty="0">
+                <a:solidFill>
+                  <a:srgbClr val="0F172A"/>
+                </a:solidFill>
+                <a:latin typeface="Pretendard" pitchFamily="34" charset="0"/>
+                <a:ea typeface="Pretendard" pitchFamily="34" charset="-122"/>
+                <a:cs typeface="Pretendard" pitchFamily="34" charset="-120"/>
+              </a:rPr>
+              <a:t>핵심 현금흐름 3줄 요약 (내 돈 &amp; 월 순수익)</a:t>
+            </a:r>
+            <a:endParaRPr lang="en-US" sz="1100" dirty="0"/>
+          </a:p>
+        </p:txBody>
+      </p:sp>
+      <p:sp>
+        <p:nvSpPr>
+          <p:cNvPr id="6" name="Shape 4"/>
+          <p:cNvSpPr/>
+          <p:nvPr/>
+        </p:nvSpPr>
+        <p:spPr>
+          <a:xfrm>
+            <a:off x="566928" y="1828800"/>
+            <a:ext cx="6858000" cy="2743200"/>
+          </a:xfrm>
+          <a:prstGeom prst="roundRect">
+            <a:avLst>
+              <a:gd name="adj" fmla="val 2000"/>
+            </a:avLst>
+          </a:prstGeom>
+          <a:solidFill>
+            <a:srgbClr val="DBEAFE"/>
+          </a:solidFill>
+          <a:ln/>
+        </p:spPr>
+      </p:sp>
+      <p:sp>
+        <p:nvSpPr>
+          <p:cNvPr id="7" name="Shape 5"/>
+          <p:cNvSpPr/>
+          <p:nvPr/>
+        </p:nvSpPr>
+        <p:spPr>
+          <a:xfrm>
+            <a:off x="566928" y="1883664"/>
+            <a:ext cx="36576" cy="2633472"/>
+          </a:xfrm>
+          <a:prstGeom prst="rect">
+            <a:avLst/>
+          </a:prstGeom>
+          <a:solidFill>
+            <a:srgbClr val="1D4ED8"/>
+          </a:solidFill>
+          <a:ln/>
+        </p:spPr>
+      </p:sp>
+      <p:sp>
+        <p:nvSpPr>
+          <p:cNvPr id="8" name="Text 6"/>
+          <p:cNvSpPr/>
+          <p:nvPr/>
+        </p:nvSpPr>
+        <p:spPr>
+          <a:xfrm>
+            <a:off x="749808" y="1938528"/>
+            <a:ext cx="6528816" cy="201168"/>
+          </a:xfrm>
+          <a:prstGeom prst="rect">
+            <a:avLst/>
+          </a:prstGeom>
+          <a:noFill/>
+          <a:ln/>
+        </p:spPr>
+        <p:txBody>
+          <a:bodyPr wrap="square" lIns="0" tIns="0" rIns="0" bIns="0" rtlCol="0" anchor="ctr"/>
+          <a:lstStyle/>
+          <a:p>
+            <a:pPr indent="0" marL="0">
+              <a:buNone/>
+            </a:pPr>
+            <a:r>
+              <a:rPr lang="en-US" sz="1050" b="1" dirty="0">
+                <a:solidFill>
+                  <a:srgbClr val="1D4ED8"/>
+                </a:solidFill>
+                <a:latin typeface="Pretendard" pitchFamily="34" charset="0"/>
+                <a:ea typeface="Pretendard" pitchFamily="34" charset="-122"/>
+                <a:cs typeface="Pretendard" pitchFamily="34" charset="-120"/>
+              </a:rPr>
+              <a:t>핵심 투자 가치 제안 (Value Proposition)</a:t>
+            </a:r>
+            <a:endParaRPr lang="en-US" sz="1050" dirty="0"/>
+          </a:p>
+        </p:txBody>
+      </p:sp>
+      <p:sp>
+        <p:nvSpPr>
+          <p:cNvPr id="9" name="Text 7"/>
+          <p:cNvSpPr/>
+          <p:nvPr/>
+        </p:nvSpPr>
+        <p:spPr>
+          <a:xfrm>
+            <a:off x="749808" y="2157984"/>
+            <a:ext cx="6528816" cy="2340864"/>
+          </a:xfrm>
+          <a:prstGeom prst="rect">
+            <a:avLst/>
+          </a:prstGeom>
+          <a:noFill/>
+          <a:ln/>
+        </p:spPr>
+        <p:txBody>
+          <a:bodyPr wrap="square" lIns="0" tIns="0" rIns="0" bIns="0" rtlCol="0" anchor="t"/>
           <a:lstStyle/>
           <a:p>
             <a:pPr indent="0" marL="0">
@@ -5501,49 +6369,7 @@
               <a:buNone/>
             </a:pPr>
             <a:r>
-              <a:rPr lang="en-US" sz="1300" dirty="0">
-                <a:solidFill>
-                  <a:srgbClr val="64748B"/>
-                </a:solidFill>
-                <a:latin typeface="Pretendard" pitchFamily="34" charset="0"/>
-                <a:ea typeface="Pretendard" pitchFamily="34" charset="-122"/>
-                <a:cs typeface="Pretendard" pitchFamily="34" charset="-120"/>
-              </a:rPr>
-              <a:t>{"ok"</a:t>
-            </a:r>
-            <a:endParaRPr lang="en-US" sz="1300" dirty="0"/>
-          </a:p>
-        </p:txBody>
-      </p:sp>
-      <p:sp>
-        <p:nvSpPr>
-          <p:cNvPr id="6" name="Text 4"/>
-          <p:cNvSpPr/>
-          <p:nvPr/>
-        </p:nvSpPr>
-        <p:spPr>
-          <a:xfrm>
-            <a:off x="3172968" y="1417320"/>
-            <a:ext cx="4251960" cy="402336"/>
-          </a:xfrm>
-          <a:prstGeom prst="rect">
-            <a:avLst/>
-          </a:prstGeom>
-          <a:noFill/>
-          <a:ln/>
-        </p:spPr>
-        <p:txBody>
-          <a:bodyPr wrap="square" lIns="0" tIns="0" rIns="0" bIns="0" rtlCol="0" anchor="ctr"/>
-          <a:lstStyle/>
-          <a:p>
-            <a:pPr indent="0" marL="0">
-              <a:lnSpc>
-                <a:spcPct val="120000"/>
-              </a:lnSpc>
-              <a:buNone/>
-            </a:pPr>
-            <a:r>
-              <a:rPr lang="en-US" sz="1300" b="1" dirty="0">
+              <a:rPr lang="en-US" sz="930" dirty="0">
                 <a:solidFill>
                   <a:srgbClr val="0F172A"/>
                 </a:solidFill>
@@ -5551,15 +6377,15 @@
                 <a:ea typeface="Pretendard" pitchFamily="34" charset="-122"/>
                 <a:cs typeface="Pretendard" pitchFamily="34" charset="-120"/>
               </a:rPr>
-              <a:t>true,"mocked":true,"extractedFields":{"area_signal":"역삼","asset_type":"오피스빌딩","price_band":"300억","size_signal":"3000평(약 9917.4㎡)"},"extractedFacts":{"region":"역삼","exactAddressCandidate":"역삼동 742-1","assetType":"오피스빌딩","priceText":"300억","sizeText":"3000평(약 9917.4㎡)","currentUse":"오피스","currentUseSignal":"근린생활시설","leaseSignal":"임대중","vacancySignal":"공실없음","tenantNames":"쿠팡","네이버","unitRentTexts":"301호: 1500만","sellerMotivationText":"자산 효율화","brokerNotes":"초역세권 매물"},"detectedSensitiveFields":"exact_address","tenant_name","ambiguousFields":,"warnings":,"areaSignal":"역삼","assetType":"오피스빌딩","priceBand":"300억","sizeSignal":"3000평(약 9917.4㎡)","dealType":"매각","buildingName":"역삼 센트럴타워","exactAddress":"역삼동 742-1","totalFloorArea":9917.3,"buildYear":2015,"currentUseSignal":"근린생활시설","vacancySignal":"공실 없음","fitSummary":"초역세권 근생 빌딩으로 시행/사옥 매입에 최적화","cautionSummary":"주요 임차 업종 만기 조율 필요","hiddenFields":"exact_address","seller_motivation","confidence":{"areaSignal":"confirmed","assetType":"confirmed","priceBand":"ai_hypothesis","fitSummary":"ai_hypothesis"},"missingData":"sizeSignal","boundaryNote":"본 자료는 실거래 통계 기반 참고치입니다.","buyerType":"법인 사옥형","budgetRange":{"min":50,"max":80,"display":"50억~80억"},"preferredRegions":"강남","성수","assetTypes":"꼬마빌딩","사옥용","purchasePurpose":"사옥용 매입","mustHave":"초역세권","주차","niceToHave":"테라스","루프탑","riskTolerance":"medium","financingNote":"자본금 50% 준비","missingQuestions":"구체적인 입주 시기가 언제인가요?","선호하는 수익률이 있나요?","privacyNotes":"연락처 비공개","fitReasons":"매수자 예산(50-80억)에 부합하는 매물입니다.","요청하신 성수/강남 권역에 해당합니다.","cautionReasons":"요청한 용도와 달리 명도 협의가 다소 필요합니다.","recommendedNextAction":"현장 답사 제안","kakaoMessage":"안녕하세요! 요청하신 조건에 부합하는 추천 매물이 있어 안내해 드립니다. 확인해보시고 피드백 부탁드립니다.","title":"강남 역삼역 초역세권 오피스 사옥용 빌딩 매각","shortSummary":"역삼역 도보 5분 거리의 준신축급 대형 오피스빌딩입니다.","dealPoints":"초역세권","사옥 최적","cautionPoints":"명도 조율 필요","hiddenInfoNotice":"보증금 및 지번은 인가 후 확인 가능","gateMessage":"G1 등급 등록이 필요합니다.","kakaoText":"강남 역삼역 오피스 빌딩 매각 안내입니다.","exactUnitCandidate":"101호","floor":"1층","areaSqmText":"150㎡","spaceType":"office","depositText":"5000만","monthlyRentText":"400만","maintenanceFeeText":"50만","availableFromText":"즉시입주","leaseTermMonthsText":"24","incentivesText":"렌트프리 2개월","restrictions":,"landlordIdentity":"김성수","currentTenant":"스타트업","vacancyReason":"이전 확장","rentNegotiation":"협의 가능","region":"성수동","areaSqm":150,"deposit":5000,"monthlyRent":400,"maintenanceFee":50,"availableFrom":"즉시입주","leaseTermMonths":24,"incentives":{"rentFreeMonths":2,"interiorSupport":"일부 인테리어 지원","freeRentDetail":"렌트프리 2개월 지원"},"shortSummaryLease":"성수역 도보 5분 거리 1층 리테일 상가 매물입니다."}</a:t>
-            </a:r>
-            <a:endParaRPr lang="en-US" sz="1300" dirty="0"/>
-          </a:p>
-        </p:txBody>
-      </p:sp>
-      <p:sp>
-        <p:nvSpPr>
-          <p:cNvPr id="7" name="Shape 5"/>
+              <a:t>아래 수치는 AI 추정값으로 참고용이며, 투자 결정의 근거로 사용할 수 없습니다. 면책: AI 추정값 (참고용). 실제 수익은 임대차 조건·공실률·세금에 따라 상이합니다.</a:t>
+            </a:r>
+            <a:endParaRPr lang="en-US" sz="930" dirty="0"/>
+          </a:p>
+        </p:txBody>
+      </p:sp>
+      <p:sp>
+        <p:nvSpPr>
+          <p:cNvPr id="10" name="Shape 8"/>
           <p:cNvSpPr/>
           <p:nvPr/>
         </p:nvSpPr>
@@ -5582,7 +6408,1298 @@
       </p:sp>
       <p:sp>
         <p:nvSpPr>
-          <p:cNvPr id="8" name="Text 6"/>
+          <p:cNvPr id="11" name="Shape 9"/>
+          <p:cNvSpPr/>
+          <p:nvPr/>
+        </p:nvSpPr>
+        <p:spPr>
+          <a:xfrm>
+            <a:off x="7784287" y="1536192"/>
+            <a:ext cx="3840480" cy="1005840"/>
+          </a:xfrm>
+          <a:prstGeom prst="roundRect">
+            <a:avLst>
+              <a:gd name="adj" fmla="val 5455"/>
+            </a:avLst>
+          </a:prstGeom>
+          <a:solidFill>
+            <a:srgbClr val="F8FAFC"/>
+          </a:solidFill>
+          <a:ln w="6350">
+            <a:solidFill>
+              <a:srgbClr val="CBD5E1"/>
+            </a:solidFill>
+            <a:prstDash val="solid"/>
+          </a:ln>
+        </p:spPr>
+      </p:sp>
+      <p:sp>
+        <p:nvSpPr>
+          <p:cNvPr id="12" name="Text 10"/>
+          <p:cNvSpPr/>
+          <p:nvPr/>
+        </p:nvSpPr>
+        <p:spPr>
+          <a:xfrm>
+            <a:off x="7948879" y="1664208"/>
+            <a:ext cx="3511296" cy="201168"/>
+          </a:xfrm>
+          <a:prstGeom prst="rect">
+            <a:avLst/>
+          </a:prstGeom>
+          <a:noFill/>
+          <a:ln/>
+        </p:spPr>
+        <p:txBody>
+          <a:bodyPr wrap="square" lIns="0" tIns="0" rIns="0" bIns="0" rtlCol="0" anchor="ctr"/>
+          <a:lstStyle/>
+          <a:p>
+            <a:pPr indent="0" marL="0">
+              <a:buNone/>
+            </a:pPr>
+            <a:r>
+              <a:rPr lang="en-US" sz="950" dirty="0">
+                <a:solidFill>
+                  <a:srgbClr val="64748B"/>
+                </a:solidFill>
+                <a:latin typeface="Pretendard" pitchFamily="34" charset="0"/>
+                <a:ea typeface="Pretendard" pitchFamily="34" charset="-122"/>
+                <a:cs typeface="Pretendard" pitchFamily="34" charset="-120"/>
+              </a:rPr>
+              <a:t>① 실투자금 (내 돈)</a:t>
+            </a:r>
+            <a:endParaRPr lang="en-US" sz="950" dirty="0"/>
+          </a:p>
+        </p:txBody>
+      </p:sp>
+      <p:sp>
+        <p:nvSpPr>
+          <p:cNvPr id="13" name="Text 11"/>
+          <p:cNvSpPr/>
+          <p:nvPr/>
+        </p:nvSpPr>
+        <p:spPr>
+          <a:xfrm>
+            <a:off x="7948879" y="1847088"/>
+            <a:ext cx="3511296" cy="402336"/>
+          </a:xfrm>
+          <a:prstGeom prst="rect">
+            <a:avLst/>
+          </a:prstGeom>
+          <a:noFill/>
+          <a:ln/>
+        </p:spPr>
+        <p:txBody>
+          <a:bodyPr wrap="square" lIns="0" tIns="0" rIns="0" bIns="0" rtlCol="0" anchor="ctr">
+            <a:normAutofit/>
+          </a:bodyPr>
+          <a:lstStyle/>
+          <a:p>
+            <a:pPr indent="0" marL="0">
+              <a:buNone/>
+            </a:pPr>
+            <a:r>
+              <a:rPr lang="en-US" sz="1800" b="1" dirty="0">
+                <a:solidFill>
+                  <a:srgbClr val="0F172A"/>
+                </a:solidFill>
+                <a:latin typeface="Pretendard" pitchFamily="34" charset="0"/>
+                <a:ea typeface="Pretendard" pitchFamily="34" charset="-122"/>
+                <a:cs typeface="Pretendard" pitchFamily="34" charset="-120"/>
+              </a:rPr>
+              <a:t>약 68.5억 원</a:t>
+            </a:r>
+            <a:endParaRPr lang="en-US" sz="1800" dirty="0"/>
+          </a:p>
+        </p:txBody>
+      </p:sp>
+      <p:sp>
+        <p:nvSpPr>
+          <p:cNvPr id="14" name="Text 12"/>
+          <p:cNvSpPr/>
+          <p:nvPr/>
+        </p:nvSpPr>
+        <p:spPr>
+          <a:xfrm>
+            <a:off x="7948879" y="2212848"/>
+            <a:ext cx="3511296" cy="164592"/>
+          </a:xfrm>
+          <a:prstGeom prst="rect">
+            <a:avLst/>
+          </a:prstGeom>
+          <a:noFill/>
+          <a:ln/>
+        </p:spPr>
+        <p:txBody>
+          <a:bodyPr wrap="square" lIns="0" tIns="0" rIns="0" bIns="0" rtlCol="0" anchor="ctr"/>
+          <a:lstStyle/>
+          <a:p>
+            <a:pPr indent="0" marL="0">
+              <a:buNone/>
+            </a:pPr>
+            <a:r>
+              <a:rPr lang="en-US" sz="880" dirty="0">
+                <a:solidFill>
+                  <a:srgbClr val="64748B"/>
+                </a:solidFill>
+                <a:latin typeface="Pretendard" pitchFamily="34" charset="0"/>
+                <a:ea typeface="Pretendard" pitchFamily="34" charset="-122"/>
+                <a:cs typeface="Pretendard" pitchFamily="34" charset="-120"/>
+              </a:rPr>
+              <a:t>매매가(165억) - 대출(85억) - 보증금(11.5억)</a:t>
+            </a:r>
+            <a:endParaRPr lang="en-US" sz="880" dirty="0"/>
+          </a:p>
+        </p:txBody>
+      </p:sp>
+      <p:sp>
+        <p:nvSpPr>
+          <p:cNvPr id="15" name="Shape 13"/>
+          <p:cNvSpPr/>
+          <p:nvPr/>
+        </p:nvSpPr>
+        <p:spPr>
+          <a:xfrm>
+            <a:off x="7784287" y="2670048"/>
+            <a:ext cx="3840480" cy="1005840"/>
+          </a:xfrm>
+          <a:prstGeom prst="roundRect">
+            <a:avLst>
+              <a:gd name="adj" fmla="val 5455"/>
+            </a:avLst>
+          </a:prstGeom>
+          <a:solidFill>
+            <a:srgbClr val="F8FAFC"/>
+          </a:solidFill>
+          <a:ln w="6350">
+            <a:solidFill>
+              <a:srgbClr val="CBD5E1"/>
+            </a:solidFill>
+            <a:prstDash val="solid"/>
+          </a:ln>
+        </p:spPr>
+      </p:sp>
+      <p:sp>
+        <p:nvSpPr>
+          <p:cNvPr id="16" name="Text 14"/>
+          <p:cNvSpPr/>
+          <p:nvPr/>
+        </p:nvSpPr>
+        <p:spPr>
+          <a:xfrm>
+            <a:off x="7948879" y="2798064"/>
+            <a:ext cx="3511296" cy="201168"/>
+          </a:xfrm>
+          <a:prstGeom prst="rect">
+            <a:avLst/>
+          </a:prstGeom>
+          <a:noFill/>
+          <a:ln/>
+        </p:spPr>
+        <p:txBody>
+          <a:bodyPr wrap="square" lIns="0" tIns="0" rIns="0" bIns="0" rtlCol="0" anchor="ctr"/>
+          <a:lstStyle/>
+          <a:p>
+            <a:pPr indent="0" marL="0">
+              <a:buNone/>
+            </a:pPr>
+            <a:r>
+              <a:rPr lang="en-US" sz="950" dirty="0">
+                <a:solidFill>
+                  <a:srgbClr val="64748B"/>
+                </a:solidFill>
+                <a:latin typeface="Pretendard" pitchFamily="34" charset="0"/>
+                <a:ea typeface="Pretendard" pitchFamily="34" charset="-122"/>
+                <a:cs typeface="Pretendard" pitchFamily="34" charset="-120"/>
+              </a:rPr>
+              <a:t>② 매달 통장에 꽂히는 돈</a:t>
+            </a:r>
+            <a:endParaRPr lang="en-US" sz="950" dirty="0"/>
+          </a:p>
+        </p:txBody>
+      </p:sp>
+      <p:sp>
+        <p:nvSpPr>
+          <p:cNvPr id="17" name="Text 15"/>
+          <p:cNvSpPr/>
+          <p:nvPr/>
+        </p:nvSpPr>
+        <p:spPr>
+          <a:xfrm>
+            <a:off x="7948879" y="2980944"/>
+            <a:ext cx="3511296" cy="402336"/>
+          </a:xfrm>
+          <a:prstGeom prst="rect">
+            <a:avLst/>
+          </a:prstGeom>
+          <a:noFill/>
+          <a:ln/>
+        </p:spPr>
+        <p:txBody>
+          <a:bodyPr wrap="square" lIns="0" tIns="0" rIns="0" bIns="0" rtlCol="0" anchor="ctr">
+            <a:normAutofit/>
+          </a:bodyPr>
+          <a:lstStyle/>
+          <a:p>
+            <a:pPr indent="0" marL="0">
+              <a:buNone/>
+            </a:pPr>
+            <a:r>
+              <a:rPr lang="en-US" sz="1800" b="1" dirty="0">
+                <a:solidFill>
+                  <a:srgbClr val="0F172A"/>
+                </a:solidFill>
+                <a:latin typeface="Pretendard" pitchFamily="34" charset="0"/>
+                <a:ea typeface="Pretendard" pitchFamily="34" charset="-122"/>
+                <a:cs typeface="Pretendard" pitchFamily="34" charset="-120"/>
+              </a:rPr>
+              <a:t>월 약 2,763만 원</a:t>
+            </a:r>
+            <a:endParaRPr lang="en-US" sz="1800" dirty="0"/>
+          </a:p>
+        </p:txBody>
+      </p:sp>
+      <p:sp>
+        <p:nvSpPr>
+          <p:cNvPr id="18" name="Text 16"/>
+          <p:cNvSpPr/>
+          <p:nvPr/>
+        </p:nvSpPr>
+        <p:spPr>
+          <a:xfrm>
+            <a:off x="7948879" y="3346704"/>
+            <a:ext cx="3511296" cy="164592"/>
+          </a:xfrm>
+          <a:prstGeom prst="rect">
+            <a:avLst/>
+          </a:prstGeom>
+          <a:noFill/>
+          <a:ln/>
+        </p:spPr>
+        <p:txBody>
+          <a:bodyPr wrap="square" lIns="0" tIns="0" rIns="0" bIns="0" rtlCol="0" anchor="ctr"/>
+          <a:lstStyle/>
+          <a:p>
+            <a:pPr indent="0" marL="0">
+              <a:buNone/>
+            </a:pPr>
+            <a:r>
+              <a:rPr lang="en-US" sz="880" dirty="0">
+                <a:solidFill>
+                  <a:srgbClr val="64748B"/>
+                </a:solidFill>
+                <a:latin typeface="Pretendard" pitchFamily="34" charset="0"/>
+                <a:ea typeface="Pretendard" pitchFamily="34" charset="-122"/>
+                <a:cs typeface="Pretendard" pitchFamily="34" charset="-120"/>
+              </a:rPr>
+              <a:t>월 임대료(5,950만) - 월 이자(3,188만) (금리 4.5%)</a:t>
+            </a:r>
+            <a:endParaRPr lang="en-US" sz="880" dirty="0"/>
+          </a:p>
+        </p:txBody>
+      </p:sp>
+      <p:sp>
+        <p:nvSpPr>
+          <p:cNvPr id="19" name="Shape 17"/>
+          <p:cNvSpPr/>
+          <p:nvPr/>
+        </p:nvSpPr>
+        <p:spPr>
+          <a:xfrm>
+            <a:off x="7784287" y="3803904"/>
+            <a:ext cx="3840480" cy="1005840"/>
+          </a:xfrm>
+          <a:prstGeom prst="roundRect">
+            <a:avLst>
+              <a:gd name="adj" fmla="val 5455"/>
+            </a:avLst>
+          </a:prstGeom>
+          <a:solidFill>
+            <a:srgbClr val="F8FAFC"/>
+          </a:solidFill>
+          <a:ln w="6350">
+            <a:solidFill>
+              <a:srgbClr val="CBD5E1"/>
+            </a:solidFill>
+            <a:prstDash val="solid"/>
+          </a:ln>
+        </p:spPr>
+      </p:sp>
+      <p:sp>
+        <p:nvSpPr>
+          <p:cNvPr id="20" name="Text 18"/>
+          <p:cNvSpPr/>
+          <p:nvPr/>
+        </p:nvSpPr>
+        <p:spPr>
+          <a:xfrm>
+            <a:off x="7948879" y="3931920"/>
+            <a:ext cx="3511296" cy="201168"/>
+          </a:xfrm>
+          <a:prstGeom prst="rect">
+            <a:avLst/>
+          </a:prstGeom>
+          <a:noFill/>
+          <a:ln/>
+        </p:spPr>
+        <p:txBody>
+          <a:bodyPr wrap="square" lIns="0" tIns="0" rIns="0" bIns="0" rtlCol="0" anchor="ctr"/>
+          <a:lstStyle/>
+          <a:p>
+            <a:pPr indent="0" marL="0">
+              <a:buNone/>
+            </a:pPr>
+            <a:r>
+              <a:rPr lang="en-US" sz="950" dirty="0">
+                <a:solidFill>
+                  <a:srgbClr val="64748B"/>
+                </a:solidFill>
+                <a:latin typeface="Pretendard" pitchFamily="34" charset="0"/>
+                <a:ea typeface="Pretendard" pitchFamily="34" charset="-122"/>
+                <a:cs typeface="Pretendard" pitchFamily="34" charset="-120"/>
+              </a:rPr>
+              <a:t>③ 내 돈 대비 연 수익률</a:t>
+            </a:r>
+            <a:endParaRPr lang="en-US" sz="950" dirty="0"/>
+          </a:p>
+        </p:txBody>
+      </p:sp>
+      <p:sp>
+        <p:nvSpPr>
+          <p:cNvPr id="21" name="Text 19"/>
+          <p:cNvSpPr/>
+          <p:nvPr/>
+        </p:nvSpPr>
+        <p:spPr>
+          <a:xfrm>
+            <a:off x="7948879" y="4114800"/>
+            <a:ext cx="3511296" cy="402336"/>
+          </a:xfrm>
+          <a:prstGeom prst="rect">
+            <a:avLst/>
+          </a:prstGeom>
+          <a:noFill/>
+          <a:ln/>
+        </p:spPr>
+        <p:txBody>
+          <a:bodyPr wrap="square" lIns="0" tIns="0" rIns="0" bIns="0" rtlCol="0" anchor="ctr">
+            <a:normAutofit/>
+          </a:bodyPr>
+          <a:lstStyle/>
+          <a:p>
+            <a:pPr indent="0" marL="0">
+              <a:buNone/>
+            </a:pPr>
+            <a:r>
+              <a:rPr lang="en-US" sz="1800" b="1" dirty="0">
+                <a:solidFill>
+                  <a:srgbClr val="0F172A"/>
+                </a:solidFill>
+                <a:latin typeface="Pretendard" pitchFamily="34" charset="0"/>
+                <a:ea typeface="Pretendard" pitchFamily="34" charset="-122"/>
+                <a:cs typeface="Pretendard" pitchFamily="34" charset="-120"/>
+              </a:rPr>
+              <a:t>연 4.84%</a:t>
+            </a:r>
+            <a:endParaRPr lang="en-US" sz="1800" dirty="0"/>
+          </a:p>
+        </p:txBody>
+      </p:sp>
+      <p:sp>
+        <p:nvSpPr>
+          <p:cNvPr id="22" name="Text 20"/>
+          <p:cNvSpPr/>
+          <p:nvPr/>
+        </p:nvSpPr>
+        <p:spPr>
+          <a:xfrm>
+            <a:off x="7948879" y="4480560"/>
+            <a:ext cx="3511296" cy="164592"/>
+          </a:xfrm>
+          <a:prstGeom prst="rect">
+            <a:avLst/>
+          </a:prstGeom>
+          <a:noFill/>
+          <a:ln/>
+        </p:spPr>
+        <p:txBody>
+          <a:bodyPr wrap="square" lIns="0" tIns="0" rIns="0" bIns="0" rtlCol="0" anchor="ctr"/>
+          <a:lstStyle/>
+          <a:p>
+            <a:pPr indent="0" marL="0">
+              <a:buNone/>
+            </a:pPr>
+            <a:r>
+              <a:rPr lang="en-US" sz="880" dirty="0">
+                <a:solidFill>
+                  <a:srgbClr val="64748B"/>
+                </a:solidFill>
+                <a:latin typeface="Pretendard" pitchFamily="34" charset="0"/>
+                <a:ea typeface="Pretendard" pitchFamily="34" charset="-122"/>
+                <a:cs typeface="Pretendard" pitchFamily="34" charset="-120"/>
+              </a:rPr>
+              <a:t>실투자금 대비 연 순수익(약 3.31억 원)</a:t>
+            </a:r>
+            <a:endParaRPr lang="en-US" sz="880" dirty="0"/>
+          </a:p>
+        </p:txBody>
+      </p:sp>
+      <p:sp>
+        <p:nvSpPr>
+          <p:cNvPr id="23" name="Shape 21"/>
+          <p:cNvSpPr/>
+          <p:nvPr/>
+        </p:nvSpPr>
+        <p:spPr>
+          <a:xfrm>
+            <a:off x="7784287" y="4937760"/>
+            <a:ext cx="3840480" cy="1005840"/>
+          </a:xfrm>
+          <a:prstGeom prst="roundRect">
+            <a:avLst>
+              <a:gd name="adj" fmla="val 5455"/>
+            </a:avLst>
+          </a:prstGeom>
+          <a:solidFill>
+            <a:srgbClr val="F8FAFC"/>
+          </a:solidFill>
+          <a:ln w="6350">
+            <a:solidFill>
+              <a:srgbClr val="CBD5E1"/>
+            </a:solidFill>
+            <a:prstDash val="solid"/>
+          </a:ln>
+        </p:spPr>
+      </p:sp>
+      <p:sp>
+        <p:nvSpPr>
+          <p:cNvPr id="24" name="Text 22"/>
+          <p:cNvSpPr/>
+          <p:nvPr/>
+        </p:nvSpPr>
+        <p:spPr>
+          <a:xfrm>
+            <a:off x="7948879" y="5065776"/>
+            <a:ext cx="3511296" cy="201168"/>
+          </a:xfrm>
+          <a:prstGeom prst="rect">
+            <a:avLst/>
+          </a:prstGeom>
+          <a:noFill/>
+          <a:ln/>
+        </p:spPr>
+        <p:txBody>
+          <a:bodyPr wrap="square" lIns="0" tIns="0" rIns="0" bIns="0" rtlCol="0" anchor="ctr"/>
+          <a:lstStyle/>
+          <a:p>
+            <a:pPr indent="0" marL="0">
+              <a:buNone/>
+            </a:pPr>
+            <a:r>
+              <a:rPr lang="en-US" sz="950" dirty="0">
+                <a:solidFill>
+                  <a:srgbClr val="64748B"/>
+                </a:solidFill>
+                <a:latin typeface="Pretendard" pitchFamily="34" charset="0"/>
+                <a:ea typeface="Pretendard" pitchFamily="34" charset="-122"/>
+                <a:cs typeface="Pretendard" pitchFamily="34" charset="-120"/>
+              </a:rPr>
+              <a:t>연 순영업소득(남는 돈 NOI)</a:t>
+            </a:r>
+            <a:endParaRPr lang="en-US" sz="950" dirty="0"/>
+          </a:p>
+        </p:txBody>
+      </p:sp>
+      <p:sp>
+        <p:nvSpPr>
+          <p:cNvPr id="25" name="Text 23"/>
+          <p:cNvSpPr/>
+          <p:nvPr/>
+        </p:nvSpPr>
+        <p:spPr>
+          <a:xfrm>
+            <a:off x="7948879" y="5248656"/>
+            <a:ext cx="3511296" cy="402336"/>
+          </a:xfrm>
+          <a:prstGeom prst="rect">
+            <a:avLst/>
+          </a:prstGeom>
+          <a:noFill/>
+          <a:ln/>
+        </p:spPr>
+        <p:txBody>
+          <a:bodyPr wrap="square" lIns="0" tIns="0" rIns="0" bIns="0" rtlCol="0" anchor="ctr">
+            <a:normAutofit/>
+          </a:bodyPr>
+          <a:lstStyle/>
+          <a:p>
+            <a:pPr indent="0" marL="0">
+              <a:buNone/>
+            </a:pPr>
+            <a:r>
+              <a:rPr lang="en-US" sz="1400" b="1" dirty="0">
+                <a:solidFill>
+                  <a:srgbClr val="0F172A"/>
+                </a:solidFill>
+                <a:latin typeface="Pretendard" pitchFamily="34" charset="0"/>
+                <a:ea typeface="Pretendard" pitchFamily="34" charset="-122"/>
+                <a:cs typeface="Pretendard" pitchFamily="34" charset="-120"/>
+              </a:rPr>
+              <a:t>약 4.9억 원~약 6.0억 원</a:t>
+            </a:r>
+            <a:endParaRPr lang="en-US" sz="1400" dirty="0"/>
+          </a:p>
+        </p:txBody>
+      </p:sp>
+      <p:sp>
+        <p:nvSpPr>
+          <p:cNvPr id="26" name="Text 24"/>
+          <p:cNvSpPr/>
+          <p:nvPr/>
+        </p:nvSpPr>
+        <p:spPr>
+          <a:xfrm>
+            <a:off x="7948879" y="5614416"/>
+            <a:ext cx="3511296" cy="164592"/>
+          </a:xfrm>
+          <a:prstGeom prst="rect">
+            <a:avLst/>
+          </a:prstGeom>
+          <a:noFill/>
+          <a:ln/>
+        </p:spPr>
+        <p:txBody>
+          <a:bodyPr wrap="square" lIns="0" tIns="0" rIns="0" bIns="0" rtlCol="0" anchor="ctr"/>
+          <a:lstStyle/>
+          <a:p>
+            <a:pPr indent="0" marL="0">
+              <a:buNone/>
+            </a:pPr>
+            <a:r>
+              <a:rPr lang="en-US" sz="880" dirty="0">
+                <a:solidFill>
+                  <a:srgbClr val="64748B"/>
+                </a:solidFill>
+                <a:latin typeface="Pretendard" pitchFamily="34" charset="0"/>
+                <a:ea typeface="Pretendard" pitchFamily="34" charset="-122"/>
+                <a:cs typeface="Pretendard" pitchFamily="34" charset="-120"/>
+              </a:rPr>
+              <a:t>운영비 차감 후 실질 순수익</a:t>
+            </a:r>
+            <a:endParaRPr lang="en-US" sz="880" dirty="0"/>
+          </a:p>
+        </p:txBody>
+      </p:sp>
+      <p:sp>
+        <p:nvSpPr>
+          <p:cNvPr id="27" name="Shape 25"/>
+          <p:cNvSpPr/>
+          <p:nvPr/>
+        </p:nvSpPr>
+        <p:spPr>
+          <a:xfrm>
+            <a:off x="7784287" y="6071616"/>
+            <a:ext cx="3840480" cy="1005840"/>
+          </a:xfrm>
+          <a:prstGeom prst="roundRect">
+            <a:avLst>
+              <a:gd name="adj" fmla="val 5455"/>
+            </a:avLst>
+          </a:prstGeom>
+          <a:solidFill>
+            <a:srgbClr val="F8FAFC"/>
+          </a:solidFill>
+          <a:ln w="6350">
+            <a:solidFill>
+              <a:srgbClr val="CBD5E1"/>
+            </a:solidFill>
+            <a:prstDash val="solid"/>
+          </a:ln>
+        </p:spPr>
+      </p:sp>
+      <p:sp>
+        <p:nvSpPr>
+          <p:cNvPr id="28" name="Text 26"/>
+          <p:cNvSpPr/>
+          <p:nvPr/>
+        </p:nvSpPr>
+        <p:spPr>
+          <a:xfrm>
+            <a:off x="7948879" y="6199632"/>
+            <a:ext cx="3511296" cy="201168"/>
+          </a:xfrm>
+          <a:prstGeom prst="rect">
+            <a:avLst/>
+          </a:prstGeom>
+          <a:noFill/>
+          <a:ln/>
+        </p:spPr>
+        <p:txBody>
+          <a:bodyPr wrap="square" lIns="0" tIns="0" rIns="0" bIns="0" rtlCol="0" anchor="ctr"/>
+          <a:lstStyle/>
+          <a:p>
+            <a:pPr indent="0" marL="0">
+              <a:buNone/>
+            </a:pPr>
+            <a:r>
+              <a:rPr lang="en-US" sz="950" dirty="0">
+                <a:solidFill>
+                  <a:srgbClr val="64748B"/>
+                </a:solidFill>
+                <a:latin typeface="Pretendard" pitchFamily="34" charset="0"/>
+                <a:ea typeface="Pretendard" pitchFamily="34" charset="-122"/>
+                <a:cs typeface="Pretendard" pitchFamily="34" charset="-120"/>
+              </a:rPr>
+              <a:t>연 순수익률(Cap Rate)</a:t>
+            </a:r>
+            <a:endParaRPr lang="en-US" sz="950" dirty="0"/>
+          </a:p>
+        </p:txBody>
+      </p:sp>
+      <p:sp>
+        <p:nvSpPr>
+          <p:cNvPr id="29" name="Text 27"/>
+          <p:cNvSpPr/>
+          <p:nvPr/>
+        </p:nvSpPr>
+        <p:spPr>
+          <a:xfrm>
+            <a:off x="7948879" y="6382512"/>
+            <a:ext cx="3511296" cy="402336"/>
+          </a:xfrm>
+          <a:prstGeom prst="rect">
+            <a:avLst/>
+          </a:prstGeom>
+          <a:noFill/>
+          <a:ln/>
+        </p:spPr>
+        <p:txBody>
+          <a:bodyPr wrap="square" lIns="0" tIns="0" rIns="0" bIns="0" rtlCol="0" anchor="ctr">
+            <a:normAutofit/>
+          </a:bodyPr>
+          <a:lstStyle/>
+          <a:p>
+            <a:pPr indent="0" marL="0">
+              <a:buNone/>
+            </a:pPr>
+            <a:r>
+              <a:rPr lang="en-US" sz="1800" b="1" dirty="0">
+                <a:solidFill>
+                  <a:srgbClr val="0F172A"/>
+                </a:solidFill>
+                <a:latin typeface="Arial" pitchFamily="34" charset="0"/>
+                <a:ea typeface="Arial" pitchFamily="34" charset="-122"/>
+                <a:cs typeface="Arial" pitchFamily="34" charset="-120"/>
+              </a:rPr>
+              <a:t>3.0%–3.6%</a:t>
+            </a:r>
+            <a:endParaRPr lang="en-US" sz="1800" dirty="0"/>
+          </a:p>
+        </p:txBody>
+      </p:sp>
+      <p:sp>
+        <p:nvSpPr>
+          <p:cNvPr id="30" name="Text 28"/>
+          <p:cNvSpPr/>
+          <p:nvPr/>
+        </p:nvSpPr>
+        <p:spPr>
+          <a:xfrm>
+            <a:off x="7948879" y="6748272"/>
+            <a:ext cx="3511296" cy="164592"/>
+          </a:xfrm>
+          <a:prstGeom prst="rect">
+            <a:avLst/>
+          </a:prstGeom>
+          <a:noFill/>
+          <a:ln/>
+        </p:spPr>
+        <p:txBody>
+          <a:bodyPr wrap="square" lIns="0" tIns="0" rIns="0" bIns="0" rtlCol="0" anchor="ctr"/>
+          <a:lstStyle/>
+          <a:p>
+            <a:pPr indent="0" marL="0">
+              <a:buNone/>
+            </a:pPr>
+            <a:r>
+              <a:rPr lang="en-US" sz="880" dirty="0">
+                <a:solidFill>
+                  <a:srgbClr val="64748B"/>
+                </a:solidFill>
+                <a:latin typeface="Pretendard" pitchFamily="34" charset="0"/>
+                <a:ea typeface="Pretendard" pitchFamily="34" charset="-122"/>
+                <a:cs typeface="Pretendard" pitchFamily="34" charset="-120"/>
+              </a:rPr>
+              <a:t>매매가 대비 구간 추정</a:t>
+            </a:r>
+            <a:endParaRPr lang="en-US" sz="880" dirty="0"/>
+          </a:p>
+        </p:txBody>
+      </p:sp>
+      <p:sp>
+        <p:nvSpPr>
+          <p:cNvPr id="31" name="Shape 29"/>
+          <p:cNvSpPr/>
+          <p:nvPr/>
+        </p:nvSpPr>
+        <p:spPr>
+          <a:xfrm>
+            <a:off x="7784287" y="7205472"/>
+            <a:ext cx="3840480" cy="1005840"/>
+          </a:xfrm>
+          <a:prstGeom prst="roundRect">
+            <a:avLst>
+              <a:gd name="adj" fmla="val 5455"/>
+            </a:avLst>
+          </a:prstGeom>
+          <a:solidFill>
+            <a:srgbClr val="F8FAFC"/>
+          </a:solidFill>
+          <a:ln w="6350">
+            <a:solidFill>
+              <a:srgbClr val="CBD5E1"/>
+            </a:solidFill>
+            <a:prstDash val="solid"/>
+          </a:ln>
+        </p:spPr>
+      </p:sp>
+      <p:sp>
+        <p:nvSpPr>
+          <p:cNvPr id="32" name="Text 30"/>
+          <p:cNvSpPr/>
+          <p:nvPr/>
+        </p:nvSpPr>
+        <p:spPr>
+          <a:xfrm>
+            <a:off x="7948879" y="7333488"/>
+            <a:ext cx="3511296" cy="201168"/>
+          </a:xfrm>
+          <a:prstGeom prst="rect">
+            <a:avLst/>
+          </a:prstGeom>
+          <a:noFill/>
+          <a:ln/>
+        </p:spPr>
+        <p:txBody>
+          <a:bodyPr wrap="square" lIns="0" tIns="0" rIns="0" bIns="0" rtlCol="0" anchor="ctr"/>
+          <a:lstStyle/>
+          <a:p>
+            <a:pPr indent="0" marL="0">
+              <a:buNone/>
+            </a:pPr>
+            <a:r>
+              <a:rPr lang="en-US" sz="950" dirty="0">
+                <a:solidFill>
+                  <a:srgbClr val="64748B"/>
+                </a:solidFill>
+                <a:latin typeface="Pretendard" pitchFamily="34" charset="0"/>
+                <a:ea typeface="Pretendard" pitchFamily="34" charset="-122"/>
+                <a:cs typeface="Pretendard" pitchFamily="34" charset="-120"/>
+              </a:rPr>
+              <a:t>5년 보유 시 투자수익률(IRR)</a:t>
+            </a:r>
+            <a:endParaRPr lang="en-US" sz="950" dirty="0"/>
+          </a:p>
+        </p:txBody>
+      </p:sp>
+      <p:sp>
+        <p:nvSpPr>
+          <p:cNvPr id="33" name="Text 31"/>
+          <p:cNvSpPr/>
+          <p:nvPr/>
+        </p:nvSpPr>
+        <p:spPr>
+          <a:xfrm>
+            <a:off x="7948879" y="7516368"/>
+            <a:ext cx="3511296" cy="402336"/>
+          </a:xfrm>
+          <a:prstGeom prst="rect">
+            <a:avLst/>
+          </a:prstGeom>
+          <a:noFill/>
+          <a:ln/>
+        </p:spPr>
+        <p:txBody>
+          <a:bodyPr wrap="square" lIns="0" tIns="0" rIns="0" bIns="0" rtlCol="0" anchor="ctr">
+            <a:normAutofit/>
+          </a:bodyPr>
+          <a:lstStyle/>
+          <a:p>
+            <a:pPr indent="0" marL="0">
+              <a:buNone/>
+            </a:pPr>
+            <a:r>
+              <a:rPr lang="en-US" sz="1800" b="1" dirty="0">
+                <a:solidFill>
+                  <a:srgbClr val="0F172A"/>
+                </a:solidFill>
+                <a:latin typeface="Arial" pitchFamily="34" charset="0"/>
+                <a:ea typeface="Arial" pitchFamily="34" charset="-122"/>
+                <a:cs typeface="Arial" pitchFamily="34" charset="-120"/>
+              </a:rPr>
+              <a:t>-2.9%–6.4%</a:t>
+            </a:r>
+            <a:endParaRPr lang="en-US" sz="1800" dirty="0"/>
+          </a:p>
+        </p:txBody>
+      </p:sp>
+      <p:sp>
+        <p:nvSpPr>
+          <p:cNvPr id="34" name="Text 32"/>
+          <p:cNvSpPr/>
+          <p:nvPr/>
+        </p:nvSpPr>
+        <p:spPr>
+          <a:xfrm>
+            <a:off x="7948879" y="7882128"/>
+            <a:ext cx="3511296" cy="164592"/>
+          </a:xfrm>
+          <a:prstGeom prst="rect">
+            <a:avLst/>
+          </a:prstGeom>
+          <a:noFill/>
+          <a:ln/>
+        </p:spPr>
+        <p:txBody>
+          <a:bodyPr wrap="square" lIns="0" tIns="0" rIns="0" bIns="0" rtlCol="0" anchor="ctr"/>
+          <a:lstStyle/>
+          <a:p>
+            <a:pPr indent="0" marL="0">
+              <a:buNone/>
+            </a:pPr>
+            <a:r>
+              <a:rPr lang="en-US" sz="880" dirty="0">
+                <a:solidFill>
+                  <a:srgbClr val="64748B"/>
+                </a:solidFill>
+                <a:latin typeface="Pretendard" pitchFamily="34" charset="0"/>
+                <a:ea typeface="Pretendard" pitchFamily="34" charset="-122"/>
+                <a:cs typeface="Pretendard" pitchFamily="34" charset="-120"/>
+              </a:rPr>
+              <a:t>시나리오 추정, 참고용</a:t>
+            </a:r>
+            <a:endParaRPr lang="en-US" sz="880" dirty="0"/>
+          </a:p>
+        </p:txBody>
+      </p:sp>
+      <p:sp>
+        <p:nvSpPr>
+          <p:cNvPr id="35" name="Shape 33"/>
+          <p:cNvSpPr/>
+          <p:nvPr/>
+        </p:nvSpPr>
+        <p:spPr>
+          <a:xfrm>
+            <a:off x="7784287" y="8339328"/>
+            <a:ext cx="3840480" cy="1005840"/>
+          </a:xfrm>
+          <a:prstGeom prst="roundRect">
+            <a:avLst>
+              <a:gd name="adj" fmla="val 5455"/>
+            </a:avLst>
+          </a:prstGeom>
+          <a:solidFill>
+            <a:srgbClr val="F8FAFC"/>
+          </a:solidFill>
+          <a:ln w="6350">
+            <a:solidFill>
+              <a:srgbClr val="CBD5E1"/>
+            </a:solidFill>
+            <a:prstDash val="solid"/>
+          </a:ln>
+        </p:spPr>
+      </p:sp>
+      <p:sp>
+        <p:nvSpPr>
+          <p:cNvPr id="36" name="Text 34"/>
+          <p:cNvSpPr/>
+          <p:nvPr/>
+        </p:nvSpPr>
+        <p:spPr>
+          <a:xfrm>
+            <a:off x="7948879" y="8467344"/>
+            <a:ext cx="3511296" cy="201168"/>
+          </a:xfrm>
+          <a:prstGeom prst="rect">
+            <a:avLst/>
+          </a:prstGeom>
+          <a:noFill/>
+          <a:ln/>
+        </p:spPr>
+        <p:txBody>
+          <a:bodyPr wrap="square" lIns="0" tIns="0" rIns="0" bIns="0" rtlCol="0" anchor="ctr"/>
+          <a:lstStyle/>
+          <a:p>
+            <a:pPr indent="0" marL="0">
+              <a:buNone/>
+            </a:pPr>
+            <a:r>
+              <a:rPr lang="en-US" sz="950" dirty="0">
+                <a:solidFill>
+                  <a:srgbClr val="64748B"/>
+                </a:solidFill>
+                <a:latin typeface="Pretendard" pitchFamily="34" charset="0"/>
+                <a:ea typeface="Pretendard" pitchFamily="34" charset="-122"/>
+                <a:cs typeface="Pretendard" pitchFamily="34" charset="-120"/>
+              </a:rPr>
+              <a:t>총 수익률(Gross Yield)</a:t>
+            </a:r>
+            <a:endParaRPr lang="en-US" sz="950" dirty="0"/>
+          </a:p>
+        </p:txBody>
+      </p:sp>
+      <p:sp>
+        <p:nvSpPr>
+          <p:cNvPr id="37" name="Text 35"/>
+          <p:cNvSpPr/>
+          <p:nvPr/>
+        </p:nvSpPr>
+        <p:spPr>
+          <a:xfrm>
+            <a:off x="7948879" y="8650224"/>
+            <a:ext cx="3511296" cy="402336"/>
+          </a:xfrm>
+          <a:prstGeom prst="rect">
+            <a:avLst/>
+          </a:prstGeom>
+          <a:noFill/>
+          <a:ln/>
+        </p:spPr>
+        <p:txBody>
+          <a:bodyPr wrap="square" lIns="0" tIns="0" rIns="0" bIns="0" rtlCol="0" anchor="ctr">
+            <a:normAutofit/>
+          </a:bodyPr>
+          <a:lstStyle/>
+          <a:p>
+            <a:pPr indent="0" marL="0">
+              <a:buNone/>
+            </a:pPr>
+            <a:r>
+              <a:rPr lang="en-US" sz="2500" b="1" dirty="0">
+                <a:solidFill>
+                  <a:srgbClr val="0F172A"/>
+                </a:solidFill>
+                <a:latin typeface="Arial" pitchFamily="34" charset="0"/>
+                <a:ea typeface="Arial" pitchFamily="34" charset="-122"/>
+                <a:cs typeface="Arial" pitchFamily="34" charset="-120"/>
+              </a:rPr>
+              <a:t>4.3%</a:t>
+            </a:r>
+            <a:endParaRPr lang="en-US" sz="2500" dirty="0"/>
+          </a:p>
+        </p:txBody>
+      </p:sp>
+      <p:sp>
+        <p:nvSpPr>
+          <p:cNvPr id="38" name="Text 36"/>
+          <p:cNvSpPr/>
+          <p:nvPr/>
+        </p:nvSpPr>
+        <p:spPr>
+          <a:xfrm>
+            <a:off x="7948879" y="9015984"/>
+            <a:ext cx="3511296" cy="164592"/>
+          </a:xfrm>
+          <a:prstGeom prst="rect">
+            <a:avLst/>
+          </a:prstGeom>
+          <a:noFill/>
+          <a:ln/>
+        </p:spPr>
+        <p:txBody>
+          <a:bodyPr wrap="square" lIns="0" tIns="0" rIns="0" bIns="0" rtlCol="0" anchor="ctr"/>
+          <a:lstStyle/>
+          <a:p>
+            <a:pPr indent="0" marL="0">
+              <a:buNone/>
+            </a:pPr>
+            <a:r>
+              <a:rPr lang="en-US" sz="880" dirty="0">
+                <a:solidFill>
+                  <a:srgbClr val="64748B"/>
+                </a:solidFill>
+                <a:latin typeface="Pretendard" pitchFamily="34" charset="0"/>
+                <a:ea typeface="Pretendard" pitchFamily="34" charset="-122"/>
+                <a:cs typeface="Pretendard" pitchFamily="34" charset="-120"/>
+              </a:rPr>
+              <a:t>연 임대수입/매매가</a:t>
+            </a:r>
+            <a:endParaRPr lang="en-US" sz="880" dirty="0"/>
+          </a:p>
+        </p:txBody>
+      </p:sp>
+      <p:sp>
+        <p:nvSpPr>
+          <p:cNvPr id="39" name="Shape 37"/>
+          <p:cNvSpPr/>
+          <p:nvPr/>
+        </p:nvSpPr>
+        <p:spPr>
+          <a:xfrm>
+            <a:off x="7784287" y="9473184"/>
+            <a:ext cx="3840480" cy="1005840"/>
+          </a:xfrm>
+          <a:prstGeom prst="roundRect">
+            <a:avLst>
+              <a:gd name="adj" fmla="val 5455"/>
+            </a:avLst>
+          </a:prstGeom>
+          <a:solidFill>
+            <a:srgbClr val="F8FAFC"/>
+          </a:solidFill>
+          <a:ln w="6350">
+            <a:solidFill>
+              <a:srgbClr val="CBD5E1"/>
+            </a:solidFill>
+            <a:prstDash val="solid"/>
+          </a:ln>
+        </p:spPr>
+      </p:sp>
+      <p:sp>
+        <p:nvSpPr>
+          <p:cNvPr id="40" name="Text 38"/>
+          <p:cNvSpPr/>
+          <p:nvPr/>
+        </p:nvSpPr>
+        <p:spPr>
+          <a:xfrm>
+            <a:off x="7948879" y="9601200"/>
+            <a:ext cx="3511296" cy="201168"/>
+          </a:xfrm>
+          <a:prstGeom prst="rect">
+            <a:avLst/>
+          </a:prstGeom>
+          <a:noFill/>
+          <a:ln/>
+        </p:spPr>
+        <p:txBody>
+          <a:bodyPr wrap="square" lIns="0" tIns="0" rIns="0" bIns="0" rtlCol="0" anchor="ctr"/>
+          <a:lstStyle/>
+          <a:p>
+            <a:pPr indent="0" marL="0">
+              <a:buNone/>
+            </a:pPr>
+            <a:r>
+              <a:rPr lang="en-US" sz="950" dirty="0">
+                <a:solidFill>
+                  <a:srgbClr val="64748B"/>
+                </a:solidFill>
+                <a:latin typeface="Pretendard" pitchFamily="34" charset="0"/>
+                <a:ea typeface="Pretendard" pitchFamily="34" charset="-122"/>
+                <a:cs typeface="Pretendard" pitchFamily="34" charset="-120"/>
+              </a:rPr>
+              <a:t>평당 매매가</a:t>
+            </a:r>
+            <a:endParaRPr lang="en-US" sz="950" dirty="0"/>
+          </a:p>
+        </p:txBody>
+      </p:sp>
+      <p:sp>
+        <p:nvSpPr>
+          <p:cNvPr id="41" name="Text 39"/>
+          <p:cNvSpPr/>
+          <p:nvPr/>
+        </p:nvSpPr>
+        <p:spPr>
+          <a:xfrm>
+            <a:off x="7948879" y="9784080"/>
+            <a:ext cx="3511296" cy="402336"/>
+          </a:xfrm>
+          <a:prstGeom prst="rect">
+            <a:avLst/>
+          </a:prstGeom>
+          <a:noFill/>
+          <a:ln/>
+        </p:spPr>
+        <p:txBody>
+          <a:bodyPr wrap="square" lIns="0" tIns="0" rIns="0" bIns="0" rtlCol="0" anchor="ctr">
+            <a:normAutofit/>
+          </a:bodyPr>
+          <a:lstStyle/>
+          <a:p>
+            <a:pPr indent="0" marL="0">
+              <a:buNone/>
+            </a:pPr>
+            <a:r>
+              <a:rPr lang="en-US" sz="1400" b="1" dirty="0">
+                <a:solidFill>
+                  <a:srgbClr val="0F172A"/>
+                </a:solidFill>
+                <a:latin typeface="Pretendard" pitchFamily="34" charset="0"/>
+                <a:ea typeface="Pretendard" pitchFamily="34" charset="-122"/>
+                <a:cs typeface="Pretendard" pitchFamily="34" charset="-120"/>
+              </a:rPr>
+              <a:t>10,909,074원/평</a:t>
+            </a:r>
+            <a:endParaRPr lang="en-US" sz="1400" dirty="0"/>
+          </a:p>
+        </p:txBody>
+      </p:sp>
+      <p:sp>
+        <p:nvSpPr>
+          <p:cNvPr id="42" name="Text 40"/>
+          <p:cNvSpPr/>
+          <p:nvPr/>
+        </p:nvSpPr>
+        <p:spPr>
+          <a:xfrm>
+            <a:off x="7948879" y="10149840"/>
+            <a:ext cx="3511296" cy="164592"/>
+          </a:xfrm>
+          <a:prstGeom prst="rect">
+            <a:avLst/>
+          </a:prstGeom>
+          <a:noFill/>
+          <a:ln/>
+        </p:spPr>
+        <p:txBody>
+          <a:bodyPr wrap="square" lIns="0" tIns="0" rIns="0" bIns="0" rtlCol="0" anchor="ctr"/>
+          <a:lstStyle/>
+          <a:p>
+            <a:pPr indent="0" marL="0">
+              <a:buNone/>
+            </a:pPr>
+            <a:r>
+              <a:rPr lang="en-US" sz="880" dirty="0">
+                <a:solidFill>
+                  <a:srgbClr val="64748B"/>
+                </a:solidFill>
+                <a:latin typeface="Pretendard" pitchFamily="34" charset="0"/>
+                <a:ea typeface="Pretendard" pitchFamily="34" charset="-122"/>
+                <a:cs typeface="Pretendard" pitchFamily="34" charset="-120"/>
+              </a:rPr>
+              <a:t>참고용</a:t>
+            </a:r>
+            <a:endParaRPr lang="en-US" sz="880" dirty="0"/>
+          </a:p>
+        </p:txBody>
+      </p:sp>
+      <p:sp>
+        <p:nvSpPr>
+          <p:cNvPr id="43" name="Shape 41"/>
+          <p:cNvSpPr/>
+          <p:nvPr/>
+        </p:nvSpPr>
+        <p:spPr>
+          <a:xfrm>
+            <a:off x="7784287" y="10607040"/>
+            <a:ext cx="3840480" cy="1097280"/>
+          </a:xfrm>
+          <a:prstGeom prst="roundRect">
+            <a:avLst>
+              <a:gd name="adj" fmla="val 5000"/>
+            </a:avLst>
+          </a:prstGeom>
+          <a:solidFill>
+            <a:srgbClr val="DBEAFE"/>
+          </a:solidFill>
+          <a:ln/>
+        </p:spPr>
+      </p:sp>
+      <p:sp>
+        <p:nvSpPr>
+          <p:cNvPr id="44" name="Shape 42"/>
+          <p:cNvSpPr/>
+          <p:nvPr/>
+        </p:nvSpPr>
+        <p:spPr>
+          <a:xfrm>
+            <a:off x="7784287" y="10661904"/>
+            <a:ext cx="36576" cy="987552"/>
+          </a:xfrm>
+          <a:prstGeom prst="rect">
+            <a:avLst/>
+          </a:prstGeom>
+          <a:solidFill>
+            <a:srgbClr val="1D4ED8"/>
+          </a:solidFill>
+          <a:ln/>
+        </p:spPr>
+      </p:sp>
+      <p:sp>
+        <p:nvSpPr>
+          <p:cNvPr id="45" name="Text 43"/>
+          <p:cNvSpPr/>
+          <p:nvPr/>
+        </p:nvSpPr>
+        <p:spPr>
+          <a:xfrm>
+            <a:off x="7967167" y="10716768"/>
+            <a:ext cx="3511296" cy="201168"/>
+          </a:xfrm>
+          <a:prstGeom prst="rect">
+            <a:avLst/>
+          </a:prstGeom>
+          <a:noFill/>
+          <a:ln/>
+        </p:spPr>
+        <p:txBody>
+          <a:bodyPr wrap="square" lIns="0" tIns="0" rIns="0" bIns="0" rtlCol="0" anchor="ctr"/>
+          <a:lstStyle/>
+          <a:p>
+            <a:pPr indent="0" marL="0">
+              <a:buNone/>
+            </a:pPr>
+            <a:r>
+              <a:rPr lang="en-US" sz="1050" b="1" dirty="0">
+                <a:solidFill>
+                  <a:srgbClr val="1D4ED8"/>
+                </a:solidFill>
+                <a:latin typeface="Pretendard" pitchFamily="34" charset="0"/>
+                <a:ea typeface="Pretendard" pitchFamily="34" charset="-122"/>
+                <a:cs typeface="Pretendard" pitchFamily="34" charset="-120"/>
+              </a:rPr>
+              <a:t>면책</a:t>
+            </a:r>
+            <a:endParaRPr lang="en-US" sz="1050" dirty="0"/>
+          </a:p>
+        </p:txBody>
+      </p:sp>
+      <p:sp>
+        <p:nvSpPr>
+          <p:cNvPr id="46" name="Text 44"/>
+          <p:cNvSpPr/>
+          <p:nvPr/>
+        </p:nvSpPr>
+        <p:spPr>
+          <a:xfrm>
+            <a:off x="7967167" y="10936224"/>
+            <a:ext cx="3511296" cy="694944"/>
+          </a:xfrm>
+          <a:prstGeom prst="rect">
+            <a:avLst/>
+          </a:prstGeom>
+          <a:noFill/>
+          <a:ln/>
+        </p:spPr>
+        <p:txBody>
+          <a:bodyPr wrap="square" lIns="0" tIns="0" rIns="0" bIns="0" rtlCol="0" anchor="t"/>
+          <a:lstStyle/>
+          <a:p>
+            <a:pPr indent="0" marL="0">
+              <a:lnSpc>
+                <a:spcPct val="120000"/>
+              </a:lnSpc>
+              <a:buNone/>
+            </a:pPr>
+            <a:r>
+              <a:rPr lang="en-US" sz="930" dirty="0">
+                <a:solidFill>
+                  <a:srgbClr val="0F172A"/>
+                </a:solidFill>
+                <a:latin typeface="Pretendard" pitchFamily="34" charset="0"/>
+                <a:ea typeface="Pretendard" pitchFamily="34" charset="-122"/>
+                <a:cs typeface="Pretendard" pitchFamily="34" charset="-120"/>
+              </a:rPr>
+              <a:t>AI 추정값 (참고용). 실제 수익은 임대차 조건·공실률·세금에 따라 상이합니다.</a:t>
+            </a:r>
+            <a:endParaRPr lang="en-US" sz="930" dirty="0"/>
+          </a:p>
+        </p:txBody>
+      </p:sp>
+      <p:sp>
+        <p:nvSpPr>
+          <p:cNvPr id="47" name="Text 45"/>
           <p:cNvSpPr/>
           <p:nvPr/>
         </p:nvSpPr>
@@ -5621,7 +7738,7 @@
       </p:sp>
       <p:sp>
         <p:nvSpPr>
-          <p:cNvPr id="9" name="Shape 7"/>
+          <p:cNvPr id="48" name="Shape 46"/>
           <p:cNvSpPr/>
           <p:nvPr/>
         </p:nvSpPr>
@@ -5641,45 +7758,6 @@
             <a:prstDash val="solid"/>
           </a:ln>
         </p:spPr>
-      </p:sp>
-      <p:sp>
-        <p:nvSpPr>
-          <p:cNvPr id="10" name="Text 8"/>
-          <p:cNvSpPr/>
-          <p:nvPr/>
-        </p:nvSpPr>
-        <p:spPr>
-          <a:xfrm>
-            <a:off x="566928" y="1481328"/>
-            <a:ext cx="11057839" cy="9692640"/>
-          </a:xfrm>
-          <a:prstGeom prst="rect">
-            <a:avLst/>
-          </a:prstGeom>
-          <a:noFill/>
-          <a:ln/>
-        </p:spPr>
-        <p:txBody>
-          <a:bodyPr wrap="square" lIns="0" tIns="0" rIns="0" bIns="0" rtlCol="0" anchor="t"/>
-          <a:lstStyle/>
-          <a:p>
-            <a:pPr indent="0" marL="0">
-              <a:buNone/>
-            </a:pPr>
-            <a:r>
-              <a:rPr lang="en-US" sz="1000" dirty="0">
-                <a:solidFill>
-                  <a:srgbClr val="0F172A"/>
-                </a:solidFill>
-                <a:latin typeface="Pretendard" pitchFamily="34" charset="0"/>
-                <a:ea typeface="Pretendard" pitchFamily="34" charset="-122"/>
-                <a:cs typeface="Pretendard" pitchFamily="34" charset="-120"/>
-              </a:rPr>
-              <a:t>{"ok":true,"mocked":true,"extractedFields":{"area_signal":"역삼","asset_type":"오피스빌딩","price_band":"300억","size_signal":"3000평(약 9917.4㎡)"},"extractedFacts":{"region":"역삼","exactAddressCandidate":"역삼동 742-1","assetType":"오피스빌딩","priceText":"300억","sizeText":"3000평(약 9917.4㎡)","currentUse":"오피스","currentUseSignal":"근린생활시설","leaseSignal":"임대중","vacancySignal":"공실없음","tenantNames":["쿠팡","네이버"],"unitRentTexts":["301호: 1500만"],"sellerMotivationText":"자산 효율화","brokerNotes":["초역세권 매물"]},"detectedSensitiveFields":["exact_address","tenant_name"],"ambiguousFields":[],"warnings":[],"areaSignal":"역삼","assetType":"오피스빌딩","priceBand":"300억","sizeSignal":"3000평(약 9917.4㎡)","dealType":"매각","buildingName":"역삼 센트럴타워","exactAddress":"역삼동 742-1","totalFloorArea":9917.3,"buildYear":2015,"currentUseSignal":"근린생활시설","vacancySignal":"공실 없음","fitSummary":"초역세권 근생 빌딩으로 시행/사옥 매입에 최적화","cautionSummary":"주요 임차 업종 만기 조율 필요","hiddenFields":["exact_address","seller_motivation"],"confidence":{"areaSignal":"confirmed","assetType":"confirmed","priceBand":"ai_hypothesis","fitSummary":"ai_hypothesis"},"missingData":["sizeSignal"],"boundaryNote":"본 자료는 실거래 통계 기반 참고치입니다.","buyerType":"법인 사옥형","budgetRange":{"min":50,"max":80,"display":"50억~80억"},"preferredRegions":["강남","성수"],"assetTypes":["꼬마빌딩","사옥용"],"purchasePurpose":"사옥용 매입","mustHave":["초역세권","주차"],"niceToHave":["테라스","루프탑"],"riskTolerance":"medium","financingNote":"자본금 50% 준비","missingQuestions":["구체적인 입주 시기가 언제인가요?","선호하는 수익률이 있나요?"],"privacyNotes":["연락처 비공개"],"fitReasons":["매수자 예산(50-80억)에 부합하는 매물입니다.","요청하신 성수/강남 권역에 해당합니다."],"cautionReasons":["요청한 용도와 달리 명도 협의가 다소 필요합니다."],"recommendedNextAction":"현장 답사 제안","kakaoMessage":"안녕하세요! 요청하신 조건에 부합하는 추천 매물이 있어 안내해 드립니다. 확인해보시고 피드백 부탁드립니다.","title":"강남 역삼역 초역세권 오피스 사옥용 빌딩 매각","shortSummary":"역삼역 도보 5분 거리의 준신축급 대형 오피스빌딩입니다.","dealPoints":["초역세권","사옥 최적"],"cautionPoints":["명도 조율 필요"],"hiddenInfoNotice":["보증금 및 지번은 인가 후 확인 가능"],"gateMessage":"G1 등급 등록이 필요합니다.","kakaoText":"강남 역삼역 오피스 빌딩 매각 안내입니다.","exactUnitCandidate":"101호","floor":"1층","areaSqmText":"150㎡","spaceType":"office","depositText":"5000만","monthlyRentText":"400만","maintenanceFeeText":"50만","availableFromText":"즉시입주","leaseTermMonthsText":"24","incentivesText":"렌트프리 2개월","restrictions":[],"landlordIdentity":"김성수","currentTenant":"스타트업","vacancyReason":"이전 확장","rentNegotiation":"협의 가능","region":"성수동","areaSqm":150,"deposit":5000,"monthlyRent":400,"maintenanceFee":50,"availableFrom":"즉시입주","leaseTermMonths":24,"incentives":{"rentFreeMonths":2,"interiorSupport":"일부 인테리어 지원","freeRentDetail":"렌트프리 2개월 지원"},"shortSummaryLease":"성수역 도보 5분 거리 1층 리테일 상가 매물입니다."}</a:t>
-            </a:r>
-            <a:endParaRPr lang="en-US" sz="1000" dirty="0"/>
-          </a:p>
-        </p:txBody>
       </p:sp>
     </p:spTree>
   </p:cSld>
@@ -6219,7 +8297,7 @@
                 <a:ea typeface="Pretendard" pitchFamily="34" charset="-122"/>
                 <a:cs typeface="Pretendard" pitchFamily="34" charset="-120"/>
               </a:rPr>
-              <a:t>3대 핵심 투자 포인트 (Investment Highlights)</a:t>
+              <a:t>밸류업 시나리오 (AI 추정)</a:t>
             </a:r>
             <a:endParaRPr lang="en-US" sz="1050" dirty="0"/>
           </a:p>
@@ -6228,642 +8306,6 @@
       <p:sp>
         <p:nvSpPr>
           <p:cNvPr id="6" name="Shape 4"/>
-          <p:cNvSpPr/>
-          <p:nvPr/>
-        </p:nvSpPr>
-        <p:spPr>
-          <a:xfrm>
-            <a:off x="566928" y="1481328"/>
-            <a:ext cx="3472586" cy="3474720"/>
-          </a:xfrm>
-          <a:prstGeom prst="roundRect">
-            <a:avLst>
-              <a:gd name="adj" fmla="val 2107"/>
-            </a:avLst>
-          </a:prstGeom>
-          <a:solidFill>
-            <a:srgbClr val="F8FAFC"/>
-          </a:solidFill>
-          <a:ln w="10160">
-            <a:solidFill>
-              <a:srgbClr val="CBD5E1"/>
-            </a:solidFill>
-            <a:prstDash val="solid"/>
-          </a:ln>
-        </p:spPr>
-      </p:sp>
-      <p:sp>
-        <p:nvSpPr>
-          <p:cNvPr id="7" name="Shape 5"/>
-          <p:cNvSpPr/>
-          <p:nvPr/>
-        </p:nvSpPr>
-        <p:spPr>
-          <a:xfrm>
-            <a:off x="566928" y="1481328"/>
-            <a:ext cx="3472586" cy="54864"/>
-          </a:xfrm>
-          <a:prstGeom prst="rect">
-            <a:avLst/>
-          </a:prstGeom>
-          <a:solidFill>
-            <a:srgbClr val="6B8E00"/>
-          </a:solidFill>
-          <a:ln/>
-        </p:spPr>
-      </p:sp>
-      <p:sp>
-        <p:nvSpPr>
-          <p:cNvPr id="8" name="Shape 6"/>
-          <p:cNvSpPr/>
-          <p:nvPr/>
-        </p:nvSpPr>
-        <p:spPr>
-          <a:xfrm>
-            <a:off x="795528" y="1755648"/>
-            <a:ext cx="475488" cy="292608"/>
-          </a:xfrm>
-          <a:prstGeom prst="roundRect">
-            <a:avLst>
-              <a:gd name="adj" fmla="val 12500"/>
-            </a:avLst>
-          </a:prstGeom>
-          <a:solidFill>
-            <a:srgbClr val="A3D900"/>
-          </a:solidFill>
-          <a:ln/>
-        </p:spPr>
-      </p:sp>
-      <p:sp>
-        <p:nvSpPr>
-          <p:cNvPr id="9" name="Text 7"/>
-          <p:cNvSpPr/>
-          <p:nvPr/>
-        </p:nvSpPr>
-        <p:spPr>
-          <a:xfrm>
-            <a:off x="795528" y="1755648"/>
-            <a:ext cx="475488" cy="292608"/>
-          </a:xfrm>
-          <a:prstGeom prst="rect">
-            <a:avLst/>
-          </a:prstGeom>
-          <a:noFill/>
-          <a:ln/>
-        </p:spPr>
-        <p:txBody>
-          <a:bodyPr wrap="square" lIns="0" tIns="0" rIns="0" bIns="0" rtlCol="0" anchor="ctr"/>
-          <a:lstStyle/>
-          <a:p>
-            <a:pPr algn="ctr" indent="0" marL="0">
-              <a:buNone/>
-            </a:pPr>
-            <a:r>
-              <a:rPr lang="en-US" sz="1100" b="1" dirty="0">
-                <a:solidFill>
-                  <a:srgbClr val="4F6A00"/>
-                </a:solidFill>
-                <a:latin typeface="Arial" pitchFamily="34" charset="0"/>
-                <a:ea typeface="Arial" pitchFamily="34" charset="-122"/>
-                <a:cs typeface="Arial" pitchFamily="34" charset="-120"/>
-              </a:rPr>
-              <a:t>01</a:t>
-            </a:r>
-            <a:endParaRPr lang="en-US" sz="1100" dirty="0"/>
-          </a:p>
-        </p:txBody>
-      </p:sp>
-      <p:sp>
-        <p:nvSpPr>
-          <p:cNvPr id="10" name="Text 8"/>
-          <p:cNvSpPr/>
-          <p:nvPr/>
-        </p:nvSpPr>
-        <p:spPr>
-          <a:xfrm>
-            <a:off x="795528" y="2194560"/>
-            <a:ext cx="3015386" cy="365760"/>
-          </a:xfrm>
-          <a:prstGeom prst="rect">
-            <a:avLst/>
-          </a:prstGeom>
-          <a:noFill/>
-          <a:ln/>
-        </p:spPr>
-        <p:txBody>
-          <a:bodyPr wrap="square" lIns="0" tIns="0" rIns="0" bIns="0" rtlCol="0" anchor="t"/>
-          <a:lstStyle/>
-          <a:p>
-            <a:pPr indent="0" marL="0">
-              <a:buNone/>
-            </a:pPr>
-            <a:r>
-              <a:rPr lang="en-US" sz="1500" b="1" dirty="0">
-                <a:solidFill>
-                  <a:srgbClr val="0F172A"/>
-                </a:solidFill>
-                <a:latin typeface="Pretendard" pitchFamily="34" charset="0"/>
-                <a:ea typeface="Pretendard" pitchFamily="34" charset="-122"/>
-                <a:cs typeface="Pretendard" pitchFamily="34" charset="-120"/>
-              </a:rPr>
-              <a:t>원금 안전판 확보</a:t>
-            </a:r>
-            <a:endParaRPr lang="en-US" sz="1500" dirty="0"/>
-          </a:p>
-        </p:txBody>
-      </p:sp>
-      <p:sp>
-        <p:nvSpPr>
-          <p:cNvPr id="11" name="Shape 9"/>
-          <p:cNvSpPr/>
-          <p:nvPr/>
-        </p:nvSpPr>
-        <p:spPr>
-          <a:xfrm>
-            <a:off x="795528" y="2624328"/>
-            <a:ext cx="3015386" cy="0"/>
-          </a:xfrm>
-          <a:prstGeom prst="line">
-            <a:avLst/>
-          </a:prstGeom>
-          <a:noFill/>
-          <a:ln w="6350">
-            <a:solidFill>
-              <a:srgbClr val="CBD5E1"/>
-            </a:solidFill>
-            <a:prstDash val="solid"/>
-          </a:ln>
-        </p:spPr>
-      </p:sp>
-      <p:sp>
-        <p:nvSpPr>
-          <p:cNvPr id="12" name="Text 10"/>
-          <p:cNvSpPr/>
-          <p:nvPr/>
-        </p:nvSpPr>
-        <p:spPr>
-          <a:xfrm>
-            <a:off x="795528" y="2779776"/>
-            <a:ext cx="3015386" cy="1965960"/>
-          </a:xfrm>
-          <a:prstGeom prst="rect">
-            <a:avLst/>
-          </a:prstGeom>
-          <a:noFill/>
-          <a:ln/>
-        </p:spPr>
-        <p:txBody>
-          <a:bodyPr wrap="square" lIns="0" tIns="0" rIns="0" bIns="0" rtlCol="0" anchor="t"/>
-          <a:lstStyle/>
-          <a:p>
-            <a:pPr indent="0" marL="0">
-              <a:lnSpc>
-                <a:spcPct val="130000"/>
-              </a:lnSpc>
-              <a:buNone/>
-            </a:pPr>
-            <a:r>
-              <a:rPr lang="en-US" sz="1200" dirty="0">
-                <a:solidFill>
-                  <a:srgbClr val="0F172A"/>
-                </a:solidFill>
-                <a:latin typeface="Pretendard" pitchFamily="34" charset="0"/>
-                <a:ea typeface="Pretendard" pitchFamily="34" charset="-122"/>
-                <a:cs typeface="Pretendard" pitchFamily="34" charset="-120"/>
-              </a:rPr>
-              <a:t>서초권역의 핵심 입지로, 우량한 대지 지분 가치가 하방 경직성을 강력히 지지합니다.</a:t>
-            </a:r>
-            <a:endParaRPr lang="en-US" sz="1200" dirty="0"/>
-          </a:p>
-        </p:txBody>
-      </p:sp>
-      <p:sp>
-        <p:nvSpPr>
-          <p:cNvPr id="13" name="Shape 11"/>
-          <p:cNvSpPr/>
-          <p:nvPr/>
-        </p:nvSpPr>
-        <p:spPr>
-          <a:xfrm>
-            <a:off x="4359554" y="1481328"/>
-            <a:ext cx="3472586" cy="3474720"/>
-          </a:xfrm>
-          <a:prstGeom prst="roundRect">
-            <a:avLst>
-              <a:gd name="adj" fmla="val 2107"/>
-            </a:avLst>
-          </a:prstGeom>
-          <a:solidFill>
-            <a:srgbClr val="F8FAFC"/>
-          </a:solidFill>
-          <a:ln w="10160">
-            <a:solidFill>
-              <a:srgbClr val="CBD5E1"/>
-            </a:solidFill>
-            <a:prstDash val="solid"/>
-          </a:ln>
-        </p:spPr>
-      </p:sp>
-      <p:sp>
-        <p:nvSpPr>
-          <p:cNvPr id="14" name="Shape 12"/>
-          <p:cNvSpPr/>
-          <p:nvPr/>
-        </p:nvSpPr>
-        <p:spPr>
-          <a:xfrm>
-            <a:off x="4359554" y="1481328"/>
-            <a:ext cx="3472586" cy="54864"/>
-          </a:xfrm>
-          <a:prstGeom prst="rect">
-            <a:avLst/>
-          </a:prstGeom>
-          <a:solidFill>
-            <a:srgbClr val="6B8E00"/>
-          </a:solidFill>
-          <a:ln/>
-        </p:spPr>
-      </p:sp>
-      <p:sp>
-        <p:nvSpPr>
-          <p:cNvPr id="15" name="Shape 13"/>
-          <p:cNvSpPr/>
-          <p:nvPr/>
-        </p:nvSpPr>
-        <p:spPr>
-          <a:xfrm>
-            <a:off x="4588154" y="1755648"/>
-            <a:ext cx="475488" cy="292608"/>
-          </a:xfrm>
-          <a:prstGeom prst="roundRect">
-            <a:avLst>
-              <a:gd name="adj" fmla="val 12500"/>
-            </a:avLst>
-          </a:prstGeom>
-          <a:solidFill>
-            <a:srgbClr val="A3D900"/>
-          </a:solidFill>
-          <a:ln/>
-        </p:spPr>
-      </p:sp>
-      <p:sp>
-        <p:nvSpPr>
-          <p:cNvPr id="16" name="Text 14"/>
-          <p:cNvSpPr/>
-          <p:nvPr/>
-        </p:nvSpPr>
-        <p:spPr>
-          <a:xfrm>
-            <a:off x="4588154" y="1755648"/>
-            <a:ext cx="475488" cy="292608"/>
-          </a:xfrm>
-          <a:prstGeom prst="rect">
-            <a:avLst/>
-          </a:prstGeom>
-          <a:noFill/>
-          <a:ln/>
-        </p:spPr>
-        <p:txBody>
-          <a:bodyPr wrap="square" lIns="0" tIns="0" rIns="0" bIns="0" rtlCol="0" anchor="ctr"/>
-          <a:lstStyle/>
-          <a:p>
-            <a:pPr algn="ctr" indent="0" marL="0">
-              <a:buNone/>
-            </a:pPr>
-            <a:r>
-              <a:rPr lang="en-US" sz="1100" b="1" dirty="0">
-                <a:solidFill>
-                  <a:srgbClr val="4F6A00"/>
-                </a:solidFill>
-                <a:latin typeface="Arial" pitchFamily="34" charset="0"/>
-                <a:ea typeface="Arial" pitchFamily="34" charset="-122"/>
-                <a:cs typeface="Arial" pitchFamily="34" charset="-120"/>
-              </a:rPr>
-              <a:t>02</a:t>
-            </a:r>
-            <a:endParaRPr lang="en-US" sz="1100" dirty="0"/>
-          </a:p>
-        </p:txBody>
-      </p:sp>
-      <p:sp>
-        <p:nvSpPr>
-          <p:cNvPr id="17" name="Text 15"/>
-          <p:cNvSpPr/>
-          <p:nvPr/>
-        </p:nvSpPr>
-        <p:spPr>
-          <a:xfrm>
-            <a:off x="4588154" y="2194560"/>
-            <a:ext cx="3015386" cy="365760"/>
-          </a:xfrm>
-          <a:prstGeom prst="rect">
-            <a:avLst/>
-          </a:prstGeom>
-          <a:noFill/>
-          <a:ln/>
-        </p:spPr>
-        <p:txBody>
-          <a:bodyPr wrap="square" lIns="0" tIns="0" rIns="0" bIns="0" rtlCol="0" anchor="t"/>
-          <a:lstStyle/>
-          <a:p>
-            <a:pPr indent="0" marL="0">
-              <a:buNone/>
-            </a:pPr>
-            <a:r>
-              <a:rPr lang="en-US" sz="1500" b="1" dirty="0">
-                <a:solidFill>
-                  <a:srgbClr val="0F172A"/>
-                </a:solidFill>
-                <a:latin typeface="Pretendard" pitchFamily="34" charset="0"/>
-                <a:ea typeface="Pretendard" pitchFamily="34" charset="-122"/>
-                <a:cs typeface="Pretendard" pitchFamily="34" charset="-120"/>
-              </a:rPr>
-              <a:t>확실한 월 현금흐름</a:t>
-            </a:r>
-            <a:endParaRPr lang="en-US" sz="1500" dirty="0"/>
-          </a:p>
-        </p:txBody>
-      </p:sp>
-      <p:sp>
-        <p:nvSpPr>
-          <p:cNvPr id="18" name="Shape 16"/>
-          <p:cNvSpPr/>
-          <p:nvPr/>
-        </p:nvSpPr>
-        <p:spPr>
-          <a:xfrm>
-            <a:off x="4588154" y="2624328"/>
-            <a:ext cx="3015386" cy="0"/>
-          </a:xfrm>
-          <a:prstGeom prst="line">
-            <a:avLst/>
-          </a:prstGeom>
-          <a:noFill/>
-          <a:ln w="6350">
-            <a:solidFill>
-              <a:srgbClr val="CBD5E1"/>
-            </a:solidFill>
-            <a:prstDash val="solid"/>
-          </a:ln>
-        </p:spPr>
-      </p:sp>
-      <p:sp>
-        <p:nvSpPr>
-          <p:cNvPr id="19" name="Text 17"/>
-          <p:cNvSpPr/>
-          <p:nvPr/>
-        </p:nvSpPr>
-        <p:spPr>
-          <a:xfrm>
-            <a:off x="4588154" y="2779776"/>
-            <a:ext cx="3015386" cy="1965960"/>
-          </a:xfrm>
-          <a:prstGeom prst="rect">
-            <a:avLst/>
-          </a:prstGeom>
-          <a:noFill/>
-          <a:ln/>
-        </p:spPr>
-        <p:txBody>
-          <a:bodyPr wrap="square" lIns="0" tIns="0" rIns="0" bIns="0" rtlCol="0" anchor="t"/>
-          <a:lstStyle/>
-          <a:p>
-            <a:pPr indent="0" marL="0">
-              <a:lnSpc>
-                <a:spcPct val="130000"/>
-              </a:lnSpc>
-              <a:buNone/>
-            </a:pPr>
-            <a:r>
-              <a:rPr lang="en-US" sz="1200" dirty="0">
-                <a:solidFill>
-                  <a:srgbClr val="0F172A"/>
-                </a:solidFill>
-                <a:latin typeface="Pretendard" pitchFamily="34" charset="0"/>
-                <a:ea typeface="Pretendard" pitchFamily="34" charset="-122"/>
-                <a:cs typeface="Pretendard" pitchFamily="34" charset="-120"/>
-              </a:rPr>
-              <a:t>우량 테넌트 만실 운영 및 장기 계약 구조를 통해 매월 안정적인 순수익 창출이 검토 여지가 있으나, 관련 법규·인허가·시설 요건의 현장 확인이 필요합니다..</a:t>
-            </a:r>
-            <a:endParaRPr lang="en-US" sz="1200" dirty="0"/>
-          </a:p>
-        </p:txBody>
-      </p:sp>
-      <p:sp>
-        <p:nvSpPr>
-          <p:cNvPr id="20" name="Shape 18"/>
-          <p:cNvSpPr/>
-          <p:nvPr/>
-        </p:nvSpPr>
-        <p:spPr>
-          <a:xfrm>
-            <a:off x="8152181" y="1481328"/>
-            <a:ext cx="3472586" cy="3474720"/>
-          </a:xfrm>
-          <a:prstGeom prst="roundRect">
-            <a:avLst>
-              <a:gd name="adj" fmla="val 2107"/>
-            </a:avLst>
-          </a:prstGeom>
-          <a:solidFill>
-            <a:srgbClr val="F8FAFC"/>
-          </a:solidFill>
-          <a:ln w="10160">
-            <a:solidFill>
-              <a:srgbClr val="CBD5E1"/>
-            </a:solidFill>
-            <a:prstDash val="solid"/>
-          </a:ln>
-        </p:spPr>
-      </p:sp>
-      <p:sp>
-        <p:nvSpPr>
-          <p:cNvPr id="21" name="Shape 19"/>
-          <p:cNvSpPr/>
-          <p:nvPr/>
-        </p:nvSpPr>
-        <p:spPr>
-          <a:xfrm>
-            <a:off x="8152181" y="1481328"/>
-            <a:ext cx="3472586" cy="54864"/>
-          </a:xfrm>
-          <a:prstGeom prst="rect">
-            <a:avLst/>
-          </a:prstGeom>
-          <a:solidFill>
-            <a:srgbClr val="6B8E00"/>
-          </a:solidFill>
-          <a:ln/>
-        </p:spPr>
-      </p:sp>
-      <p:sp>
-        <p:nvSpPr>
-          <p:cNvPr id="22" name="Shape 20"/>
-          <p:cNvSpPr/>
-          <p:nvPr/>
-        </p:nvSpPr>
-        <p:spPr>
-          <a:xfrm>
-            <a:off x="8380781" y="1755648"/>
-            <a:ext cx="475488" cy="292608"/>
-          </a:xfrm>
-          <a:prstGeom prst="roundRect">
-            <a:avLst>
-              <a:gd name="adj" fmla="val 12500"/>
-            </a:avLst>
-          </a:prstGeom>
-          <a:solidFill>
-            <a:srgbClr val="A3D900"/>
-          </a:solidFill>
-          <a:ln/>
-        </p:spPr>
-      </p:sp>
-      <p:sp>
-        <p:nvSpPr>
-          <p:cNvPr id="23" name="Text 21"/>
-          <p:cNvSpPr/>
-          <p:nvPr/>
-        </p:nvSpPr>
-        <p:spPr>
-          <a:xfrm>
-            <a:off x="8380781" y="1755648"/>
-            <a:ext cx="475488" cy="292608"/>
-          </a:xfrm>
-          <a:prstGeom prst="rect">
-            <a:avLst/>
-          </a:prstGeom>
-          <a:noFill/>
-          <a:ln/>
-        </p:spPr>
-        <p:txBody>
-          <a:bodyPr wrap="square" lIns="0" tIns="0" rIns="0" bIns="0" rtlCol="0" anchor="ctr"/>
-          <a:lstStyle/>
-          <a:p>
-            <a:pPr algn="ctr" indent="0" marL="0">
-              <a:buNone/>
-            </a:pPr>
-            <a:r>
-              <a:rPr lang="en-US" sz="1100" b="1" dirty="0">
-                <a:solidFill>
-                  <a:srgbClr val="4F6A00"/>
-                </a:solidFill>
-                <a:latin typeface="Arial" pitchFamily="34" charset="0"/>
-                <a:ea typeface="Arial" pitchFamily="34" charset="-122"/>
-                <a:cs typeface="Arial" pitchFamily="34" charset="-120"/>
-              </a:rPr>
-              <a:t>03</a:t>
-            </a:r>
-            <a:endParaRPr lang="en-US" sz="1100" dirty="0"/>
-          </a:p>
-        </p:txBody>
-      </p:sp>
-      <p:sp>
-        <p:nvSpPr>
-          <p:cNvPr id="24" name="Text 22"/>
-          <p:cNvSpPr/>
-          <p:nvPr/>
-        </p:nvSpPr>
-        <p:spPr>
-          <a:xfrm>
-            <a:off x="8380781" y="2194560"/>
-            <a:ext cx="3015386" cy="365760"/>
-          </a:xfrm>
-          <a:prstGeom prst="rect">
-            <a:avLst/>
-          </a:prstGeom>
-          <a:noFill/>
-          <a:ln/>
-        </p:spPr>
-        <p:txBody>
-          <a:bodyPr wrap="square" lIns="0" tIns="0" rIns="0" bIns="0" rtlCol="0" anchor="t"/>
-          <a:lstStyle/>
-          <a:p>
-            <a:pPr indent="0" marL="0">
-              <a:buNone/>
-            </a:pPr>
-            <a:r>
-              <a:rPr lang="en-US" sz="1500" b="1" dirty="0">
-                <a:solidFill>
-                  <a:srgbClr val="0F172A"/>
-                </a:solidFill>
-                <a:latin typeface="Pretendard" pitchFamily="34" charset="0"/>
-                <a:ea typeface="Pretendard" pitchFamily="34" charset="-122"/>
-                <a:cs typeface="Pretendard" pitchFamily="34" charset="-120"/>
-              </a:rPr>
-              <a:t>가치 상승 및 출구 전략</a:t>
-            </a:r>
-            <a:endParaRPr lang="en-US" sz="1500" dirty="0"/>
-          </a:p>
-        </p:txBody>
-      </p:sp>
-      <p:sp>
-        <p:nvSpPr>
-          <p:cNvPr id="25" name="Shape 23"/>
-          <p:cNvSpPr/>
-          <p:nvPr/>
-        </p:nvSpPr>
-        <p:spPr>
-          <a:xfrm>
-            <a:off x="8380781" y="2624328"/>
-            <a:ext cx="3015386" cy="0"/>
-          </a:xfrm>
-          <a:prstGeom prst="line">
-            <a:avLst/>
-          </a:prstGeom>
-          <a:noFill/>
-          <a:ln w="6350">
-            <a:solidFill>
-              <a:srgbClr val="CBD5E1"/>
-            </a:solidFill>
-            <a:prstDash val="solid"/>
-          </a:ln>
-        </p:spPr>
-      </p:sp>
-      <p:sp>
-        <p:nvSpPr>
-          <p:cNvPr id="26" name="Text 24"/>
-          <p:cNvSpPr/>
-          <p:nvPr/>
-        </p:nvSpPr>
-        <p:spPr>
-          <a:xfrm>
-            <a:off x="8380781" y="2779776"/>
-            <a:ext cx="3015386" cy="1965960"/>
-          </a:xfrm>
-          <a:prstGeom prst="rect">
-            <a:avLst/>
-          </a:prstGeom>
-          <a:noFill/>
-          <a:ln/>
-        </p:spPr>
-        <p:txBody>
-          <a:bodyPr wrap="square" lIns="0" tIns="0" rIns="0" bIns="0" rtlCol="0" anchor="t"/>
-          <a:lstStyle/>
-          <a:p>
-            <a:pPr indent="0" marL="0">
-              <a:lnSpc>
-                <a:spcPct val="130000"/>
-              </a:lnSpc>
-              <a:buNone/>
-            </a:pPr>
-            <a:r>
-              <a:rPr lang="en-US" sz="1200" dirty="0">
-                <a:solidFill>
-                  <a:srgbClr val="0F172A"/>
-                </a:solidFill>
-                <a:latin typeface="Pretendard" pitchFamily="34" charset="0"/>
-                <a:ea typeface="Pretendard" pitchFamily="34" charset="-122"/>
-                <a:cs typeface="Pretendard" pitchFamily="34" charset="-120"/>
-              </a:rPr>
-              <a:t>현행 공법 여력을 활용한 밸류업 기회와 더불어 향후 권역 지가 상승에 따른 시세차익 실현이 유력합니다.</a:t>
-            </a:r>
-            <a:endParaRPr lang="en-US" sz="1200" dirty="0"/>
-          </a:p>
-        </p:txBody>
-      </p:sp>
-      <p:sp>
-        <p:nvSpPr>
-          <p:cNvPr id="27" name="Shape 25"/>
           <p:cNvSpPr/>
           <p:nvPr/>
         </p:nvSpPr>
@@ -6890,7 +8332,7 @@
       </p:sp>
       <p:sp>
         <p:nvSpPr>
-          <p:cNvPr id="28" name="Text 26"/>
+          <p:cNvPr id="7" name="Text 5"/>
           <p:cNvSpPr/>
           <p:nvPr/>
         </p:nvSpPr>
@@ -6929,7 +8371,7 @@
       </p:sp>
       <p:sp>
         <p:nvSpPr>
-          <p:cNvPr id="29" name="Text 27"/>
+          <p:cNvPr id="8" name="Text 6"/>
           <p:cNvSpPr/>
           <p:nvPr/>
         </p:nvSpPr>
@@ -6963,7 +8405,7 @@
                 <a:ea typeface="Pretendard" pitchFamily="34" charset="-122"/>
                 <a:cs typeface="Pretendard" pitchFamily="34" charset="-120"/>
               </a:rPr>
-              <a:t>본 자산의 3대 핵심 투자 포인트와 예상 매수자 유형 분석입니다. &gt; 밸류업 시나리오는 AI 추정이며 실제 시장 조건에 따라 다를 수 있습니다.</a:t>
+              <a:t>{"ok":true,"mocked":true,"extractedFields":{"area_signal":"역삼","asset_type":"오피스빌딩","price_band":"300억","size_signal":"3000평(약 9917.4㎡)"},"extractedFacts":{"region":"역삼","exactAddressCandidate":"역삼동 742-1","assetType":"오피스빌딩","priceText":"300억","sizeText":"3000평(약 9917.4㎡)","currentUse":"오피스","currentUseSignal":"근린생활시설","leaseSignal":"임대중","vacancySignal":"공실없음","tenantNames":["쿠팡","네이버"],"unitRentTexts":["301호: 1500만"],"sellerMotivationText":"자산 효율화","brokerNotes":["초역세권 매물"]},"detectedSensitiveFields":["exact_address","tenant_name"],"ambiguousFields":[],"warnings":[],"areaSignal":"역삼","assetType":"오피스빌딩","priceBand":"300억","sizeSignal":"3000평(약 9917.4㎡)","dealType":"매각","buildingName":"역삼 센트럴타워","exactAddress":"역삼동 742-1","totalFloorArea":9917.3,"buildYear":2015,"currentUseSignal":"근린생활시설","vacancySignal":"공실 없음","fitSummary":"초역세권 근생 빌딩으로 시행/사옥 매입에 최적화","cautionSummary":"주요 임차 업종 만기 조율 필요","hiddenFields":["exact_address","seller_motivation"],"confidence":{"areaSignal":"confirmed","assetType":"confirmed","priceBand":"ai_hypothesis","fitSummary":"ai_hypothesis"},"missingData":["sizeSignal"],"boundaryNote":"본 자료는 실거래 통계 기반 참고치입니다.","buyerType":"법인 사옥형","budgetRange":{"min":50,"max":80,"display":"50억~80억"},"preferredRegions":["강남","성수"],"assetTypes":["꼬마빌딩","사옥용"],"purchasePurpose":"사옥용 매입","mustHave":["초역세권","주차"],"niceToHave":["테라스","루프탑"],"riskTolerance":"medium","financingNote":"자본금 50% 준비","missingQuestions":["구체적인 입주 시기가 언제인가요?","선호하는 수익률이 있나요?"],"privacyNotes":["연락처 비공개"],"fitReasons":["매수자 예산(50-80억)에 부합하는 매물입니다.","요청하신 성수/강남 권역에 해당합니다."],"cautionReasons":["요청한 용도와 달리 명도 협의가 다소 필요합니다."],"recommendedNextAction":"현장 답사 제안","kakaoMessage":"안녕하세요! 요청하신 조건에 부합하는 추천 매물이 있어 안내해 드립니다. 확인해보시고 피드백 부탁드립니다.","title":"강남 역삼역 초역세권 오피스 사옥용 빌딩 매각","shortSummary":"역삼역 도보 5분 거리의 준신축급 대형 오피스빌딩입니다.","dealPoints":["초역세권","사옥 최적"],"cautionPoints":["명도 조율 필요"],"hiddenInfoNotice":["보증금 및 지번은 인가 후 확인 가능"],"gateMessage":"G1 등급 등록이 필요합니다.","kakaoText":"강남 역삼역 오피스 빌딩 매각 안내입니다.","exactUnitCandidate":"101호","floor":"1층","areaSqmText":"150㎡","spaceType":"office","depositText":"5000만","monthlyRentText":"400만","maintenanceFeeText":"50만","availableFromText":"즉시입주","leaseTermMonthsText":"24","incentivesText":"렌트프리 2개월","restrictions":[],"landlordIdentity":"김성수","currentTenant":"스타트업","vacancyReason":"이전 확장","rentNegotiation":"협의 가능","region":"성수동","areaSqm":150,"deposit":5000,"monthlyRent":400,"maintenanceFee":50,"availableFrom":"즉시입주","leaseTermMonths":24,"incentives":{"rentFreeMonths":2,"interiorSupport":"일부 인테리어 지원","freeRentDetail":"렌트프리 2개월 지원"},"shortSummaryLease":"성수역 도보 5분 거리 1층 리테일 상가 매물입니다."} &gt; 밸류업 시나리오는 AI 추정이며 실제 시장 조건에 따라 다를 수 있습니다.</a:t>
             </a:r>
             <a:endParaRPr lang="en-US" sz="1000" dirty="0"/>
           </a:p>
@@ -6971,7 +8413,7 @@
       </p:sp>
       <p:sp>
         <p:nvSpPr>
-          <p:cNvPr id="30" name="Text 28"/>
+          <p:cNvPr id="9" name="Text 7"/>
           <p:cNvSpPr/>
           <p:nvPr/>
         </p:nvSpPr>
@@ -7010,7 +8452,7 @@
       </p:sp>
       <p:sp>
         <p:nvSpPr>
-          <p:cNvPr id="31" name="Shape 29"/>
+          <p:cNvPr id="10" name="Shape 8"/>
           <p:cNvSpPr/>
           <p:nvPr/>
         </p:nvSpPr>
@@ -7170,7 +8612,7 @@
         <p:spPr>
           <a:xfrm>
             <a:off x="566928" y="1572768"/>
-            <a:ext cx="11057839" cy="3200400"/>
+            <a:ext cx="3442106" cy="3200400"/>
           </a:xfrm>
           <a:prstGeom prst="rect">
             <a:avLst/>
@@ -7195,7 +8637,7 @@
         <p:spPr>
           <a:xfrm>
             <a:off x="566928" y="1572768"/>
-            <a:ext cx="11057839" cy="36576"/>
+            <a:ext cx="3442106" cy="36576"/>
           </a:xfrm>
           <a:prstGeom prst="rect">
             <a:avLst/>
@@ -7274,7 +8716,7 @@
         <p:spPr>
           <a:xfrm>
             <a:off x="786384" y="2304288"/>
-            <a:ext cx="10618927" cy="365760"/>
+            <a:ext cx="3003194" cy="365760"/>
           </a:xfrm>
           <a:prstGeom prst="rect">
             <a:avLst/>
@@ -7298,7 +8740,7 @@
                 <a:ea typeface="Pretendard" pitchFamily="34" charset="-122"/>
                 <a:cs typeface="Pretendard" pitchFamily="34" charset="-120"/>
               </a:rPr>
-              <a:t>{"ok"</a:t>
+              <a:t>초기 관심 표명 → 담당자 연락</a:t>
             </a:r>
             <a:endParaRPr lang="en-US" sz="1600" dirty="0"/>
           </a:p>
@@ -7313,7 +8755,7 @@
         <p:spPr>
           <a:xfrm>
             <a:off x="786384" y="2761488"/>
-            <a:ext cx="10618927" cy="1828800"/>
+            <a:ext cx="3003194" cy="1828800"/>
           </a:xfrm>
           <a:prstGeom prst="rect">
             <a:avLst/>
@@ -7328,8 +8770,165 @@
             <a:pPr indent="0" marL="0">
               <a:buNone/>
             </a:pPr>
-            <a:r>
-              <a:rPr lang="en-US" sz="1100" dirty="0">
+            <a:endParaRPr lang="en-US" sz="1100" dirty="0"/>
+          </a:p>
+        </p:txBody>
+      </p:sp>
+      <p:sp>
+        <p:nvSpPr>
+          <p:cNvPr id="11" name="Shape 9"/>
+          <p:cNvSpPr/>
+          <p:nvPr/>
+        </p:nvSpPr>
+        <p:spPr>
+          <a:xfrm>
+            <a:off x="4100474" y="3035808"/>
+            <a:ext cx="182880" cy="274320"/>
+          </a:xfrm>
+          <a:prstGeom prst="rightArrow">
+            <a:avLst/>
+          </a:prstGeom>
+          <a:solidFill>
+            <a:srgbClr val="CBD5E1"/>
+          </a:solidFill>
+          <a:ln w="6350">
+            <a:solidFill>
+              <a:srgbClr val="64748B"/>
+            </a:solidFill>
+            <a:prstDash val="solid"/>
+          </a:ln>
+        </p:spPr>
+      </p:sp>
+      <p:sp>
+        <p:nvSpPr>
+          <p:cNvPr id="12" name="Shape 10"/>
+          <p:cNvSpPr/>
+          <p:nvPr/>
+        </p:nvSpPr>
+        <p:spPr>
+          <a:xfrm>
+            <a:off x="4374794" y="1572768"/>
+            <a:ext cx="3442106" cy="3200400"/>
+          </a:xfrm>
+          <a:prstGeom prst="rect">
+            <a:avLst/>
+          </a:prstGeom>
+          <a:solidFill>
+            <a:srgbClr val="F8FAFC"/>
+          </a:solidFill>
+          <a:ln w="3810">
+            <a:solidFill>
+              <a:srgbClr val="CBD5E1"/>
+            </a:solidFill>
+            <a:prstDash val="solid"/>
+          </a:ln>
+        </p:spPr>
+      </p:sp>
+      <p:sp>
+        <p:nvSpPr>
+          <p:cNvPr id="13" name="Shape 11"/>
+          <p:cNvSpPr/>
+          <p:nvPr/>
+        </p:nvSpPr>
+        <p:spPr>
+          <a:xfrm>
+            <a:off x="4374794" y="1572768"/>
+            <a:ext cx="3442106" cy="36576"/>
+          </a:xfrm>
+          <a:prstGeom prst="rect">
+            <a:avLst/>
+          </a:prstGeom>
+          <a:solidFill>
+            <a:srgbClr val="6B8E00"/>
+          </a:solidFill>
+          <a:ln/>
+        </p:spPr>
+      </p:sp>
+      <p:sp>
+        <p:nvSpPr>
+          <p:cNvPr id="14" name="Shape 12"/>
+          <p:cNvSpPr/>
+          <p:nvPr/>
+        </p:nvSpPr>
+        <p:spPr>
+          <a:xfrm>
+            <a:off x="4594250" y="1792224"/>
+            <a:ext cx="384048" cy="384048"/>
+          </a:xfrm>
+          <a:prstGeom prst="ellipse">
+            <a:avLst/>
+          </a:prstGeom>
+          <a:solidFill>
+            <a:srgbClr val="6B8E00"/>
+          </a:solidFill>
+          <a:ln/>
+        </p:spPr>
+      </p:sp>
+      <p:sp>
+        <p:nvSpPr>
+          <p:cNvPr id="15" name="Text 13"/>
+          <p:cNvSpPr/>
+          <p:nvPr/>
+        </p:nvSpPr>
+        <p:spPr>
+          <a:xfrm>
+            <a:off x="4594250" y="1792224"/>
+            <a:ext cx="384048" cy="384048"/>
+          </a:xfrm>
+          <a:prstGeom prst="rect">
+            <a:avLst/>
+          </a:prstGeom>
+          <a:noFill/>
+          <a:ln/>
+        </p:spPr>
+        <p:txBody>
+          <a:bodyPr wrap="square" lIns="0" tIns="0" rIns="0" bIns="0" rtlCol="0" anchor="ctr"/>
+          <a:lstStyle/>
+          <a:p>
+            <a:pPr algn="ctr" indent="0" marL="0">
+              <a:buNone/>
+            </a:pPr>
+            <a:r>
+              <a:rPr lang="en-US" sz="1300" b="1" dirty="0">
+                <a:solidFill>
+                  <a:srgbClr val="FFFFFF"/>
+                </a:solidFill>
+                <a:latin typeface="Arial" pitchFamily="34" charset="0"/>
+                <a:ea typeface="Arial" pitchFamily="34" charset="-122"/>
+                <a:cs typeface="Arial" pitchFamily="34" charset="-120"/>
+              </a:rPr>
+              <a:t>STEP 2</a:t>
+            </a:r>
+            <a:endParaRPr lang="en-US" sz="1300" dirty="0"/>
+          </a:p>
+        </p:txBody>
+      </p:sp>
+      <p:sp>
+        <p:nvSpPr>
+          <p:cNvPr id="16" name="Text 14"/>
+          <p:cNvSpPr/>
+          <p:nvPr/>
+        </p:nvSpPr>
+        <p:spPr>
+          <a:xfrm>
+            <a:off x="4594250" y="2304288"/>
+            <a:ext cx="3003194" cy="365760"/>
+          </a:xfrm>
+          <a:prstGeom prst="rect">
+            <a:avLst/>
+          </a:prstGeom>
+          <a:noFill/>
+          <a:ln/>
+        </p:spPr>
+        <p:txBody>
+          <a:bodyPr wrap="square" rtlCol="0" anchor="ctr"/>
+          <a:lstStyle/>
+          <a:p>
+            <a:pPr indent="0" marL="0">
+              <a:buNone/>
+            </a:pPr>
+            <a:r>
+              <a:rPr lang="en-US" sz="1600" b="1" dirty="0">
                 <a:solidFill>
                   <a:srgbClr val="0F172A"/>
                 </a:solidFill>
@@ -7337,15 +8936,239 @@
                 <a:ea typeface="Pretendard" pitchFamily="34" charset="-122"/>
                 <a:cs typeface="Pretendard" pitchFamily="34" charset="-120"/>
               </a:rPr>
-              <a:t>true,"mocked":true,"extractedFields":{"area_signal":"역삼","asset_type":"오피스빌딩","price_band":"300억","size_signal":"3000평(약 9917.4㎡)"},"extractedFacts":{"region":"역삼","exactAddressCandidate":"역삼동 742-1","assetType":"오피스빌딩","priceText":"300억","sizeText":"3000평(약 9917.4㎡)","currentUse":"오피스","currentUseSignal":"근린생활시설","leaseSignal":"임대중","vacancySignal":"공실없음","tenantNames":["쿠팡","네이버"],"unitRentTexts":["301호: 1500만"],"sellerMotivationText":"자산 효율화","brokerNotes":["초역세권 매물"]},"detectedSensitiveFields":["exact_address","tenant_name"],"ambiguousFields":[],"warnings":[],"areaSignal":"역삼","assetType":"오피스빌딩","priceBand":"300억","sizeSignal":"3000평(약 9917.4㎡)","dealType":"매각","buildingName":"역삼 센트럴타워","exactAddress":"역삼동 742-1","totalFloorArea":9917.3,"buildYear":2015,"currentUseSignal":"근린생활시설","vacancySignal":"공실 없음","fitSummary":"초역세권 근생 빌딩으로 시행/사옥 매입에 최적화","cautionSummary":"주요 임차 업종 만기 조율 필요","hiddenFields":["exact_address","seller_motivation"],"confidence":{"areaSignal":"confirmed","assetType":"confirmed","priceBand":"ai_hypothesis","fitSummary":"ai_hypothesis"},"missingData":["sizeSignal"],"boundaryNote":"본 자료는 실거래 통계 기반 참고치입니다.","buyerType":"법인 사옥형","budgetRange":{"min":50,"max":80,"display":"50억~80억"},"preferredRegions":["강남","성수"],"assetTypes":["꼬마빌딩","사옥용"],"purchasePurpose":"사옥용 매입","mustHave":["초역세권","주차"],"niceToHave":["테라스","루프탑"],"riskTolerance":"medium","financingNote":"자본금 50% 준비","missingQuestions":["구체적인 입주 시기가 언제인가요?","선호하는 수익률이 있나요?"],"privacyNotes":["연락처 비공개"],"fitReasons":["매수자 예산(50-80억)에 부합하는 매물입니다.","요청하신 성수/강남 권역에 해당합니다."],"cautionReasons":["요청한 용도와 달리 명도 협의가 다소 필요합니다."],"recommendedNextAction":"현장 답사 제안","kakaoMessage":"안녕하세요! 요청하신 조건에 부합하는 추천 매물이 있어 안내해 드립니다. 확인해보시고 피드백 부탁드립니다.","title":"강남 역삼역 초역세권 오피스 사옥용 빌딩 매각","shortSummary":"역삼역 도보 5분 거리의 준신축급 대형 오피스빌딩입니다.","dealPoints":["초역세권","사옥 최적"],"cautionPoints":["명도 조율 필요"],"hiddenInfoNotice":["보증금 및 지번은 인가 후 확인 가능"],"gateMessage":"G1 등급 등록이 필요합니다.","kakaoText":"강남 역삼역 오피스 빌딩 매각 안내입니다.","exactUnitCandidate":"101호","floor":"1층","areaSqmText":"150㎡","spaceType":"office","depositText":"5000만","monthlyRentText":"400만","maintenanceFeeText":"50만","availableFromText":"즉시입주","leaseTermMonthsText":"24","incentivesText":"렌트프리 2개월","restrictions":[],"landlordIdentity":"김성수","currentTenant":"스타트업","vacancyReason":"이전 확장","rentNegotiation":"협의 가능","region":"성수동","areaSqm":150,"deposit":5000,"monthlyRent":400,"maintenanceFee":50,"availableFrom":"즉시입주","leaseTermMonths":24,"incentives":{"rentFreeMonths":2,"interiorSupport":"일부 인테리어 지원","freeRentDetail":"렌트프리 2개월 지원"},"shortSummaryLease":"성수역 도보 5분 거리 1층 리테일 상가 매물입니다."}</a:t>
-            </a:r>
+              <a:t>NDA 체결 → 임차인 정보 및 임대차계약서 제공</a:t>
+            </a:r>
+            <a:endParaRPr lang="en-US" sz="1600" dirty="0"/>
+          </a:p>
+        </p:txBody>
+      </p:sp>
+      <p:sp>
+        <p:nvSpPr>
+          <p:cNvPr id="17" name="Text 15"/>
+          <p:cNvSpPr/>
+          <p:nvPr/>
+        </p:nvSpPr>
+        <p:spPr>
+          <a:xfrm>
+            <a:off x="4594250" y="2761488"/>
+            <a:ext cx="3003194" cy="1828800"/>
+          </a:xfrm>
+          <a:prstGeom prst="rect">
+            <a:avLst/>
+          </a:prstGeom>
+          <a:noFill/>
+          <a:ln/>
+        </p:spPr>
+        <p:txBody>
+          <a:bodyPr wrap="square" rtlCol="0" anchor="t"/>
+          <a:lstStyle/>
+          <a:p>
+            <a:pPr indent="0" marL="0">
+              <a:buNone/>
+            </a:pPr>
             <a:endParaRPr lang="en-US" sz="1100" dirty="0"/>
           </a:p>
         </p:txBody>
       </p:sp>
       <p:sp>
         <p:nvSpPr>
-          <p:cNvPr id="11" name="Text 9"/>
+          <p:cNvPr id="18" name="Shape 16"/>
+          <p:cNvSpPr/>
+          <p:nvPr/>
+        </p:nvSpPr>
+        <p:spPr>
+          <a:xfrm>
+            <a:off x="7908341" y="3035808"/>
+            <a:ext cx="182880" cy="274320"/>
+          </a:xfrm>
+          <a:prstGeom prst="rightArrow">
+            <a:avLst/>
+          </a:prstGeom>
+          <a:solidFill>
+            <a:srgbClr val="CBD5E1"/>
+          </a:solidFill>
+          <a:ln w="6350">
+            <a:solidFill>
+              <a:srgbClr val="64748B"/>
+            </a:solidFill>
+            <a:prstDash val="solid"/>
+          </a:ln>
+        </p:spPr>
+      </p:sp>
+      <p:sp>
+        <p:nvSpPr>
+          <p:cNvPr id="19" name="Shape 17"/>
+          <p:cNvSpPr/>
+          <p:nvPr/>
+        </p:nvSpPr>
+        <p:spPr>
+          <a:xfrm>
+            <a:off x="8182661" y="1572768"/>
+            <a:ext cx="3442106" cy="3200400"/>
+          </a:xfrm>
+          <a:prstGeom prst="rect">
+            <a:avLst/>
+          </a:prstGeom>
+          <a:solidFill>
+            <a:srgbClr val="F8FAFC"/>
+          </a:solidFill>
+          <a:ln w="3810">
+            <a:solidFill>
+              <a:srgbClr val="CBD5E1"/>
+            </a:solidFill>
+            <a:prstDash val="solid"/>
+          </a:ln>
+        </p:spPr>
+      </p:sp>
+      <p:sp>
+        <p:nvSpPr>
+          <p:cNvPr id="20" name="Shape 18"/>
+          <p:cNvSpPr/>
+          <p:nvPr/>
+        </p:nvSpPr>
+        <p:spPr>
+          <a:xfrm>
+            <a:off x="8182661" y="1572768"/>
+            <a:ext cx="3442106" cy="36576"/>
+          </a:xfrm>
+          <a:prstGeom prst="rect">
+            <a:avLst/>
+          </a:prstGeom>
+          <a:solidFill>
+            <a:srgbClr val="6B8E00"/>
+          </a:solidFill>
+          <a:ln/>
+        </p:spPr>
+      </p:sp>
+      <p:sp>
+        <p:nvSpPr>
+          <p:cNvPr id="21" name="Shape 19"/>
+          <p:cNvSpPr/>
+          <p:nvPr/>
+        </p:nvSpPr>
+        <p:spPr>
+          <a:xfrm>
+            <a:off x="8402117" y="1792224"/>
+            <a:ext cx="384048" cy="384048"/>
+          </a:xfrm>
+          <a:prstGeom prst="ellipse">
+            <a:avLst/>
+          </a:prstGeom>
+          <a:solidFill>
+            <a:srgbClr val="6B8E00"/>
+          </a:solidFill>
+          <a:ln/>
+        </p:spPr>
+      </p:sp>
+      <p:sp>
+        <p:nvSpPr>
+          <p:cNvPr id="22" name="Text 20"/>
+          <p:cNvSpPr/>
+          <p:nvPr/>
+        </p:nvSpPr>
+        <p:spPr>
+          <a:xfrm>
+            <a:off x="8402117" y="1792224"/>
+            <a:ext cx="384048" cy="384048"/>
+          </a:xfrm>
+          <a:prstGeom prst="rect">
+            <a:avLst/>
+          </a:prstGeom>
+          <a:noFill/>
+          <a:ln/>
+        </p:spPr>
+        <p:txBody>
+          <a:bodyPr wrap="square" lIns="0" tIns="0" rIns="0" bIns="0" rtlCol="0" anchor="ctr"/>
+          <a:lstStyle/>
+          <a:p>
+            <a:pPr algn="ctr" indent="0" marL="0">
+              <a:buNone/>
+            </a:pPr>
+            <a:r>
+              <a:rPr lang="en-US" sz="1300" b="1" dirty="0">
+                <a:solidFill>
+                  <a:srgbClr val="FFFFFF"/>
+                </a:solidFill>
+                <a:latin typeface="Arial" pitchFamily="34" charset="0"/>
+                <a:ea typeface="Arial" pitchFamily="34" charset="-122"/>
+                <a:cs typeface="Arial" pitchFamily="34" charset="-120"/>
+              </a:rPr>
+              <a:t>STEP 3</a:t>
+            </a:r>
+            <a:endParaRPr lang="en-US" sz="1300" dirty="0"/>
+          </a:p>
+        </p:txBody>
+      </p:sp>
+      <p:sp>
+        <p:nvSpPr>
+          <p:cNvPr id="23" name="Text 21"/>
+          <p:cNvSpPr/>
+          <p:nvPr/>
+        </p:nvSpPr>
+        <p:spPr>
+          <a:xfrm>
+            <a:off x="8402117" y="2304288"/>
+            <a:ext cx="3003194" cy="365760"/>
+          </a:xfrm>
+          <a:prstGeom prst="rect">
+            <a:avLst/>
+          </a:prstGeom>
+          <a:noFill/>
+          <a:ln/>
+        </p:spPr>
+        <p:txBody>
+          <a:bodyPr wrap="square" rtlCol="0" anchor="ctr"/>
+          <a:lstStyle/>
+          <a:p>
+            <a:pPr indent="0" marL="0">
+              <a:buNone/>
+            </a:pPr>
+            <a:r>
+              <a:rPr lang="en-US" sz="1600" b="1" dirty="0">
+                <a:solidFill>
+                  <a:srgbClr val="0F172A"/>
+                </a:solidFill>
+                <a:latin typeface="Pretendard" pitchFamily="34" charset="0"/>
+                <a:ea typeface="Pretendard" pitchFamily="34" charset="-122"/>
+                <a:cs typeface="Pretendard" pitchFamily="34" charset="-120"/>
+              </a:rPr>
+              <a:t>현장 실사 일정 조율 → 건물 컨디션 및 설비 직접 확인</a:t>
+            </a:r>
+            <a:endParaRPr lang="en-US" sz="1600" dirty="0"/>
+          </a:p>
+        </p:txBody>
+      </p:sp>
+      <p:sp>
+        <p:nvSpPr>
+          <p:cNvPr id="24" name="Text 22"/>
+          <p:cNvSpPr/>
+          <p:nvPr/>
+        </p:nvSpPr>
+        <p:spPr>
+          <a:xfrm>
+            <a:off x="8402117" y="2761488"/>
+            <a:ext cx="3003194" cy="1828800"/>
+          </a:xfrm>
+          <a:prstGeom prst="rect">
+            <a:avLst/>
+          </a:prstGeom>
+          <a:noFill/>
+          <a:ln/>
+        </p:spPr>
+        <p:txBody>
+          <a:bodyPr wrap="square" rtlCol="0" anchor="t"/>
+          <a:lstStyle/>
+          <a:p>
+            <a:pPr indent="0" marL="0">
+              <a:buNone/>
+            </a:pPr>
+            <a:endParaRPr lang="en-US" sz="1100" dirty="0"/>
+          </a:p>
+        </p:txBody>
+      </p:sp>
+      <p:sp>
+        <p:nvSpPr>
+          <p:cNvPr id="25" name="Text 23"/>
           <p:cNvSpPr/>
           <p:nvPr/>
         </p:nvSpPr>
@@ -7384,7 +9207,7 @@
       </p:sp>
       <p:sp>
         <p:nvSpPr>
-          <p:cNvPr id="12" name="Shape 10"/>
+          <p:cNvPr id="26" name="Shape 24"/>
           <p:cNvSpPr/>
           <p:nvPr/>
         </p:nvSpPr>

--- a/docs/test/stress/e2e-outputs/income_case01_seocho_medical_basic.pptx
+++ b/docs/test/stress/e2e-outputs/income_case01_seocho_medical_basic.pptx
@@ -5160,45 +5160,6 @@
         <p:spPr>
           <a:xfrm>
             <a:off x="6053328" y="1481328"/>
-            <a:ext cx="5571439" cy="237744"/>
-          </a:xfrm>
-          <a:prstGeom prst="rect">
-            <a:avLst/>
-          </a:prstGeom>
-          <a:noFill/>
-          <a:ln/>
-        </p:spPr>
-        <p:txBody>
-          <a:bodyPr wrap="square" lIns="0" tIns="0" rIns="0" bIns="0" rtlCol="0" anchor="ctr"/>
-          <a:lstStyle/>
-          <a:p>
-            <a:pPr indent="0" marL="0">
-              <a:buNone/>
-            </a:pPr>
-            <a:r>
-              <a:rPr lang="en-US" sz="1100" b="1" dirty="0">
-                <a:solidFill>
-                  <a:srgbClr val="10161F"/>
-                </a:solidFill>
-                <a:latin typeface="Pretendard" pitchFamily="34" charset="0"/>
-                <a:ea typeface="Pretendard" pitchFamily="34" charset="-122"/>
-                <a:cs typeface="Pretendard" pitchFamily="34" charset="-120"/>
-              </a:rPr>
-              <a:t>[교통] 교통 및 도로 접근성</a:t>
-            </a:r>
-            <a:endParaRPr lang="en-US" sz="1100" dirty="0"/>
-          </a:p>
-        </p:txBody>
-      </p:sp>
-      <p:sp>
-        <p:nvSpPr>
-          <p:cNvPr id="8" name="Text 5"/>
-          <p:cNvSpPr/>
-          <p:nvPr/>
-        </p:nvSpPr>
-        <p:spPr>
-          <a:xfrm>
-            <a:off x="6053328" y="1801368"/>
             <a:ext cx="2117147" cy="493776"/>
           </a:xfrm>
           <a:prstGeom prst="rect">
@@ -5226,7 +5187,7 @@
                 <a:ea typeface="Pretendard" pitchFamily="34" charset="-122"/>
                 <a:cs typeface="Pretendard" pitchFamily="34" charset="-120"/>
               </a:rPr>
-              <a:t>교통 접근성 상세 정보는 담당 브로커를 통해 확인하</a:t>
+              <a:t>교통 접근성</a:t>
             </a:r>
             <a:endParaRPr lang="en-US" sz="1300" dirty="0"/>
           </a:p>
@@ -5234,13 +5195,13 @@
       </p:sp>
       <p:sp>
         <p:nvSpPr>
-          <p:cNvPr id="9" name="Text 6"/>
-          <p:cNvSpPr/>
-          <p:nvPr/>
-        </p:nvSpPr>
-        <p:spPr>
-          <a:xfrm>
-            <a:off x="8170475" y="1801368"/>
+          <p:cNvPr id="8" name="Text 5"/>
+          <p:cNvSpPr/>
+          <p:nvPr/>
+        </p:nvSpPr>
+        <p:spPr>
+          <a:xfrm>
+            <a:off x="8170475" y="1481328"/>
             <a:ext cx="3454292" cy="493776"/>
           </a:xfrm>
           <a:prstGeom prst="rect">
@@ -5259,70 +5220,16 @@
               </a:lnSpc>
               <a:buNone/>
             </a:pPr>
-            <a:endParaRPr lang="en-US" sz="1300" dirty="0"/>
-          </a:p>
-        </p:txBody>
-      </p:sp>
-      <p:sp>
-        <p:nvSpPr>
-          <p:cNvPr id="10" name="Shape 7"/>
-          <p:cNvSpPr/>
-          <p:nvPr/>
-        </p:nvSpPr>
-        <p:spPr>
-          <a:xfrm>
-            <a:off x="6053328" y="2295144"/>
-            <a:ext cx="5571439" cy="0"/>
-          </a:xfrm>
-          <a:prstGeom prst="line">
-            <a:avLst/>
-          </a:prstGeom>
-          <a:noFill/>
-          <a:ln w="3810">
-            <a:solidFill>
-              <a:srgbClr val="CBD5E0"/>
-            </a:solidFill>
-            <a:prstDash val="solid"/>
-          </a:ln>
-        </p:spPr>
-      </p:sp>
-      <p:sp>
-        <p:nvSpPr>
-          <p:cNvPr id="11" name="Text 8"/>
-          <p:cNvSpPr/>
-          <p:nvPr/>
-        </p:nvSpPr>
-        <p:spPr>
-          <a:xfrm>
-            <a:off x="6053328" y="2295144"/>
-            <a:ext cx="2117147" cy="493776"/>
-          </a:xfrm>
-          <a:prstGeom prst="rect">
-            <a:avLst/>
-          </a:prstGeom>
-          <a:noFill/>
-          <a:ln/>
-        </p:spPr>
-        <p:txBody>
-          <a:bodyPr wrap="square" lIns="0" tIns="0" rIns="0" bIns="0" rtlCol="0" anchor="ctr"/>
-          <a:lstStyle/>
-          <a:p>
-            <a:pPr indent="0" marL="0">
-              <a:lnSpc>
-                <a:spcPct val="120000"/>
-              </a:lnSpc>
-              <a:buNone/>
-            </a:pPr>
-            <a:r>
-              <a:rPr lang="en-US" sz="1300" dirty="0">
-                <a:solidFill>
-                  <a:srgbClr val="718096"/>
+            <a:r>
+              <a:rPr lang="en-US" sz="1300" b="1" dirty="0">
+                <a:solidFill>
+                  <a:srgbClr val="10161F"/>
                 </a:solidFill>
                 <a:latin typeface="Pretendard" pitchFamily="34" charset="0"/>
                 <a:ea typeface="Pretendard" pitchFamily="34" charset="-122"/>
                 <a:cs typeface="Pretendard" pitchFamily="34" charset="-120"/>
               </a:rPr>
-              <a:t>[건물] 주변 상권</a:t>
+              <a:t>{"ok":true,"mocked":true,"extractedFields":{"area_signal":"역삼","asset_type":"오피스빌딩","price_band":"300억","size_signal":"3000평(약 9917.</a:t>
             </a:r>
             <a:endParaRPr lang="en-US" sz="1300" dirty="0"/>
           </a:p>
@@ -5330,14 +5237,14 @@
       </p:sp>
       <p:sp>
         <p:nvSpPr>
-          <p:cNvPr id="12" name="Text 9"/>
-          <p:cNvSpPr/>
-          <p:nvPr/>
-        </p:nvSpPr>
-        <p:spPr>
-          <a:xfrm>
-            <a:off x="8170475" y="2295144"/>
-            <a:ext cx="3454292" cy="493776"/>
+          <p:cNvPr id="9" name="Text 6"/>
+          <p:cNvSpPr/>
+          <p:nvPr/>
+        </p:nvSpPr>
+        <p:spPr>
+          <a:xfrm>
+            <a:off x="566928" y="6382512"/>
+            <a:ext cx="7315200" cy="219456"/>
           </a:xfrm>
           <a:prstGeom prst="rect">
             <a:avLst/>
@@ -5350,59 +5257,33 @@
           <a:lstStyle/>
           <a:p>
             <a:pPr indent="0" marL="0">
-              <a:lnSpc>
-                <a:spcPct val="120000"/>
-              </a:lnSpc>
-              <a:buNone/>
-            </a:pPr>
-            <a:r>
-              <a:rPr lang="en-US" sz="1300" b="1" dirty="0">
-                <a:solidFill>
-                  <a:srgbClr val="10161F"/>
+              <a:buNone/>
+            </a:pPr>
+            <a:r>
+              <a:rPr lang="en-US" sz="800" dirty="0">
+                <a:solidFill>
+                  <a:srgbClr val="718096"/>
                 </a:solidFill>
                 <a:latin typeface="Pretendard" pitchFamily="34" charset="0"/>
                 <a:ea typeface="Pretendard" pitchFamily="34" charset="-122"/>
                 <a:cs typeface="Pretendard" pitchFamily="34" charset="-120"/>
               </a:rPr>
-              <a:t>서초권역 내 주요 비즈니스 및 유동인구 풍부한 상권 입지</a:t>
-            </a:r>
-            <a:endParaRPr lang="en-US" sz="1300" dirty="0"/>
-          </a:p>
-        </p:txBody>
-      </p:sp>
-      <p:sp>
-        <p:nvSpPr>
-          <p:cNvPr id="13" name="Shape 10"/>
-          <p:cNvSpPr/>
-          <p:nvPr/>
-        </p:nvSpPr>
-        <p:spPr>
-          <a:xfrm>
-            <a:off x="6053328" y="2788920"/>
-            <a:ext cx="5571439" cy="0"/>
-          </a:xfrm>
-          <a:prstGeom prst="line">
-            <a:avLst/>
-          </a:prstGeom>
-          <a:noFill/>
-          <a:ln w="3810">
-            <a:solidFill>
-              <a:srgbClr val="CBD5E0"/>
-            </a:solidFill>
-            <a:prstDash val="solid"/>
-          </a:ln>
-        </p:spPr>
-      </p:sp>
-      <p:sp>
-        <p:nvSpPr>
-          <p:cNvPr id="14" name="Text 11"/>
-          <p:cNvSpPr/>
-          <p:nvPr/>
-        </p:nvSpPr>
-        <p:spPr>
-          <a:xfrm>
-            <a:off x="6053328" y="2788920"/>
-            <a:ext cx="2117147" cy="493776"/>
+              <a:t>크리딜   |   </a:t>
+            </a:r>
+            <a:endParaRPr lang="en-US" sz="800" dirty="0"/>
+          </a:p>
+        </p:txBody>
+      </p:sp>
+      <p:sp>
+        <p:nvSpPr>
+          <p:cNvPr id="10" name="Text 7"/>
+          <p:cNvSpPr/>
+          <p:nvPr/>
+        </p:nvSpPr>
+        <p:spPr>
+          <a:xfrm>
+            <a:off x="10710367" y="6382512"/>
+            <a:ext cx="914400" cy="219456"/>
           </a:xfrm>
           <a:prstGeom prst="rect">
             <a:avLst/>
@@ -5414,133 +5295,60 @@
           <a:bodyPr wrap="square" lIns="0" tIns="0" rIns="0" bIns="0" rtlCol="0" anchor="ctr"/>
           <a:lstStyle/>
           <a:p>
+            <a:pPr algn="r" indent="0" marL="0">
+              <a:buNone/>
+            </a:pPr>
+            <a:r>
+              <a:rPr lang="en-US" sz="900" b="1" dirty="0">
+                <a:solidFill>
+                  <a:srgbClr val="B98A2E"/>
+                </a:solidFill>
+                <a:latin typeface="Arial" pitchFamily="34" charset="0"/>
+                <a:ea typeface="Arial" pitchFamily="34" charset="-122"/>
+                <a:cs typeface="Arial" pitchFamily="34" charset="-120"/>
+              </a:rPr>
+              <a:t>3</a:t>
+            </a:r>
+            <a:endParaRPr lang="en-US" sz="900" dirty="0"/>
+          </a:p>
+        </p:txBody>
+      </p:sp>
+      <p:sp>
+        <p:nvSpPr>
+          <p:cNvPr id="11" name="Text 8"/>
+          <p:cNvSpPr/>
+          <p:nvPr/>
+        </p:nvSpPr>
+        <p:spPr>
+          <a:xfrm>
+            <a:off x="566928" y="1481328"/>
+            <a:ext cx="11057839" cy="9692640"/>
+          </a:xfrm>
+          <a:prstGeom prst="rect">
+            <a:avLst/>
+          </a:prstGeom>
+          <a:noFill/>
+          <a:ln/>
+        </p:spPr>
+        <p:txBody>
+          <a:bodyPr wrap="square" lIns="0" tIns="0" rIns="0" bIns="0" rtlCol="0" anchor="t"/>
+          <a:lstStyle/>
+          <a:p>
             <a:pPr indent="0" marL="0">
-              <a:lnSpc>
-                <a:spcPct val="120000"/>
-              </a:lnSpc>
-              <a:buNone/>
-            </a:pPr>
-            <a:r>
-              <a:rPr lang="en-US" sz="1300" dirty="0">
-                <a:solidFill>
-                  <a:srgbClr val="718096"/>
+              <a:buNone/>
+            </a:pPr>
+            <a:r>
+              <a:rPr lang="en-US" sz="1000" dirty="0">
+                <a:solidFill>
+                  <a:srgbClr val="10161F"/>
                 </a:solidFill>
                 <a:latin typeface="Pretendard" pitchFamily="34" charset="0"/>
                 <a:ea typeface="Pretendard" pitchFamily="34" charset="-122"/>
                 <a:cs typeface="Pretendard" pitchFamily="34" charset="-120"/>
               </a:rPr>
-              <a:t>서초권역 내 우수한 접근성과 높은 가시성을 갖춘 핵</a:t>
-            </a:r>
-            <a:endParaRPr lang="en-US" sz="1300" dirty="0"/>
-          </a:p>
-        </p:txBody>
-      </p:sp>
-      <p:sp>
-        <p:nvSpPr>
-          <p:cNvPr id="15" name="Text 12"/>
-          <p:cNvSpPr/>
-          <p:nvPr/>
-        </p:nvSpPr>
-        <p:spPr>
-          <a:xfrm>
-            <a:off x="8170475" y="2788920"/>
-            <a:ext cx="3454292" cy="493776"/>
-          </a:xfrm>
-          <a:prstGeom prst="rect">
-            <a:avLst/>
-          </a:prstGeom>
-          <a:noFill/>
-          <a:ln/>
-        </p:spPr>
-        <p:txBody>
-          <a:bodyPr wrap="square" lIns="0" tIns="0" rIns="0" bIns="0" rtlCol="0" anchor="ctr"/>
-          <a:lstStyle/>
-          <a:p>
-            <a:pPr indent="0" marL="0">
-              <a:lnSpc>
-                <a:spcPct val="120000"/>
-              </a:lnSpc>
-              <a:buNone/>
-            </a:pPr>
-            <a:endParaRPr lang="en-US" sz="1300" dirty="0"/>
-          </a:p>
-        </p:txBody>
-      </p:sp>
-      <p:sp>
-        <p:nvSpPr>
-          <p:cNvPr id="16" name="Text 13"/>
-          <p:cNvSpPr/>
-          <p:nvPr/>
-        </p:nvSpPr>
-        <p:spPr>
-          <a:xfrm>
-            <a:off x="566928" y="6382512"/>
-            <a:ext cx="7315200" cy="219456"/>
-          </a:xfrm>
-          <a:prstGeom prst="rect">
-            <a:avLst/>
-          </a:prstGeom>
-          <a:noFill/>
-          <a:ln/>
-        </p:spPr>
-        <p:txBody>
-          <a:bodyPr wrap="square" lIns="0" tIns="0" rIns="0" bIns="0" rtlCol="0" anchor="ctr"/>
-          <a:lstStyle/>
-          <a:p>
-            <a:pPr indent="0" marL="0">
-              <a:buNone/>
-            </a:pPr>
-            <a:r>
-              <a:rPr lang="en-US" sz="800" dirty="0">
-                <a:solidFill>
-                  <a:srgbClr val="718096"/>
-                </a:solidFill>
-                <a:latin typeface="Pretendard" pitchFamily="34" charset="0"/>
-                <a:ea typeface="Pretendard" pitchFamily="34" charset="-122"/>
-                <a:cs typeface="Pretendard" pitchFamily="34" charset="-120"/>
-              </a:rPr>
-              <a:t>크리딜   |   </a:t>
-            </a:r>
-            <a:endParaRPr lang="en-US" sz="800" dirty="0"/>
-          </a:p>
-        </p:txBody>
-      </p:sp>
-      <p:sp>
-        <p:nvSpPr>
-          <p:cNvPr id="17" name="Text 14"/>
-          <p:cNvSpPr/>
-          <p:nvPr/>
-        </p:nvSpPr>
-        <p:spPr>
-          <a:xfrm>
-            <a:off x="10710367" y="6382512"/>
-            <a:ext cx="914400" cy="219456"/>
-          </a:xfrm>
-          <a:prstGeom prst="rect">
-            <a:avLst/>
-          </a:prstGeom>
-          <a:noFill/>
-          <a:ln/>
-        </p:spPr>
-        <p:txBody>
-          <a:bodyPr wrap="square" lIns="0" tIns="0" rIns="0" bIns="0" rtlCol="0" anchor="ctr"/>
-          <a:lstStyle/>
-          <a:p>
-            <a:pPr algn="r" indent="0" marL="0">
-              <a:buNone/>
-            </a:pPr>
-            <a:r>
-              <a:rPr lang="en-US" sz="900" b="1" dirty="0">
-                <a:solidFill>
-                  <a:srgbClr val="B98A2E"/>
-                </a:solidFill>
-                <a:latin typeface="Arial" pitchFamily="34" charset="0"/>
-                <a:ea typeface="Arial" pitchFamily="34" charset="-122"/>
-                <a:cs typeface="Arial" pitchFamily="34" charset="-120"/>
-              </a:rPr>
-              <a:t>3</a:t>
-            </a:r>
-            <a:endParaRPr lang="en-US" sz="900" dirty="0"/>
+              <a:t>{"ok":true,"mocked":true,"extractedFields":{"area_signal":"역삼","asset_type":"오피스빌딩","price_band":"300억","size_signal":"3000평(약 9917.4㎡)"},"extractedFacts":{"region":"역삼","exactAddressCandidate":"역삼동 742-1","assetType":"오피스빌딩","priceText":"300억","sizeText":"3000평(약 9917.4㎡)","currentUse":"오피스","currentUseSignal":"근린생활시설","leaseSignal":"임대중","vacancySignal":"공실없음","tenantNames":["쿠팡","네이버"],"unitRentTexts":["301호: 1500만"],"sellerMotivationText":"자산 효율화","brokerNotes":["초역세권 매물"]},"detectedSensitiveFields":["exact_address","tenant_name"],"ambiguousFields":[],"warnings":[],"areaSignal":"역삼","assetType":"오피스빌딩","priceBand":"300억","sizeSignal":"3000평(약 9917.4㎡)","dealType":"매각","buildingName":"역삼 센트럴타워","exactAddress":"역삼동 742-1","totalFloorArea":9917.3,"buildYear":2015,"currentUseSignal":"근린생활시설","vacancySignal":"공실 없음","fitSummary":"초역세권 근생 빌딩으로 시행/사옥 매입에 최적화","cautionSummary":"주요 임차 업종 만기 조율 필요","hiddenFields":["exact_address","seller_motivation"],"confidence":{"areaSignal":"confirmed","assetType":"confirmed","priceBand":"ai_hypothesis","fitSummary":"ai_hypothesis"},"missingData":["sizeSignal"],"boundaryNote":"본 자료는 실거래 통계 기반 참고치입니다.","buyerType":"법인 사옥형","budgetRange":{"min":50,"max":80,"display":"50억~80억"},"preferredRegions":["강남","성수"],"assetTypes":["꼬마빌딩","사옥용"],"purchasePurpose":"사옥용 매입","mustHave":["초역세권","주차"],"niceToHave":["테라스","루프탑"],"riskTolerance":"medium","financingNote":"자본금 50% 준비","missingQuestions":["구체적인 입주 시기가 언제인가요?","선호하는 수익률이 있나요?"],"privacyNotes":["연락처 비공개"],"fitReasons":["매수자 예산(50-80억)에 부합하는 매물입니다.","요청하신 성수/강남 권역에 해당합니다."],"cautionReasons":["요청한 용도와 달리 명도 협의가 다소 필요합니다."],"recommendedNextAction":"현장 답사 제안","kakaoMessage":"안녕하세요! 요청하신 조건에 부합하는 추천 매물이 있어 안내해 드립니다. 확인해보시고 피드백 부탁드립니다.","title":"강남 역삼역 초역세권 오피스 사옥용 빌딩 매각","shortSummary":"역삼역 도보 5분 거리의 준신축급 대형 오피스빌딩입니다.","dealPoints":["초역세권","사옥 최적"],"cautionPoints":["명도 조율 필요"],"hiddenInfoNotice":["보증금 및 지번은 인가 후 확인 가능"],"gateMessage":"G1 등급 등록이 필요합니다.","kakaoText":"강남 역삼역 오피스 빌딩 매각 안내입니다.","exactUnitCandidate":"101호","floor":"1층","areaSqmText":"150㎡","spaceType":"office","depositText":"5000만","monthlyRentText":"400만","maintenanceFeeText":"50만","availableFromText":"즉시입주","leaseTermMonthsText":"24","incentivesText":"렌트프리 2개월","restrictions":[],"landlordIdentity":"김성수","currentTenant":"스타트업","vacancyReason":"이전 확장","rentNegotiation":"협의 가능","region":"성수동","areaSqm":150,"deposit":5000,"monthlyRent":400,"maintenanceFee":50,"availableFrom":"즉시입주","leaseTermMonths":24,"incentives":{"rentFreeMonths":2,"interiorSupport":"일부 인테리어 지원","freeRentDetail":"렌트프리 2개월 지원"},"shortSummaryLease":"성수역 도보 5분 거리 1층 리테일 상가 매물입니다."}</a:t>
+            </a:r>
+            <a:endParaRPr lang="en-US" sz="1000" dirty="0"/>
           </a:p>
         </p:txBody>
       </p:sp>
@@ -10956,465 +10764,6 @@
                   </a:tcPr>
                 </a:tc>
               </a:tr>
-              <a:tr h="457200">
-                <a:tc>
-                  <a:txBody>
-                    <a:bodyPr/>
-                    <a:lstStyle/>
-                    <a:p>
-                      <a:pPr indent="0" marL="0">
-                        <a:buNone/>
-                      </a:pPr>
-                      <a:r>
-                        <a:rPr lang="en-US" sz="1000" b="1" dirty="0">
-                          <a:solidFill>
-                            <a:srgbClr val="10161F"/>
-                          </a:solidFill>
-                          <a:latin typeface="Pretendard" pitchFamily="34" charset="0"/>
-                          <a:ea typeface="Pretendard" pitchFamily="34" charset="-122"/>
-                          <a:cs typeface="Pretendard" pitchFamily="34" charset="-120"/>
-                        </a:rPr>
-                        <a:t>B1~B2</a:t>
-                      </a:r>
-                      <a:endParaRPr lang="en-US" sz="1000" dirty="0">
-                        <a:latin typeface="Pretendard" charset="0"/>
-                        <a:ea typeface="Pretendard" charset="0"/>
-                        <a:cs typeface="Pretendard" charset="0"/>
-                      </a:endParaRPr>
-                    </a:p>
-                  </a:txBody>
-                  <a:tcPr marL="50800" marR="50800" marT="25400" marB="25400" anchor="ctr">
-                    <a:lnL w="3810" cap="flat" cmpd="sng" algn="ctr">
-                      <a:solidFill>
-                        <a:srgbClr val="CBD5E0"/>
-                      </a:solidFill>
-                      <a:prstDash val="solid"/>
-                      <a:round/>
-                      <a:headEnd type="none" w="med" len="med"/>
-                      <a:tailEnd type="none" w="med" len="med"/>
-                    </a:lnL>
-                    <a:lnR w="3810" cap="flat" cmpd="sng" algn="ctr">
-                      <a:solidFill>
-                        <a:srgbClr val="CBD5E0"/>
-                      </a:solidFill>
-                      <a:prstDash val="solid"/>
-                      <a:round/>
-                      <a:headEnd type="none" w="med" len="med"/>
-                      <a:tailEnd type="none" w="med" len="med"/>
-                    </a:lnR>
-                    <a:lnT w="3810" cap="flat" cmpd="sng" algn="ctr">
-                      <a:solidFill>
-                        <a:srgbClr val="CBD5E0"/>
-                      </a:solidFill>
-                      <a:prstDash val="solid"/>
-                      <a:round/>
-                      <a:headEnd type="none" w="med" len="med"/>
-                      <a:tailEnd type="none" w="med" len="med"/>
-                    </a:lnT>
-                    <a:lnB w="3810" cap="flat" cmpd="sng" algn="ctr">
-                      <a:solidFill>
-                        <a:srgbClr val="CBD5E0"/>
-                      </a:solidFill>
-                      <a:prstDash val="solid"/>
-                      <a:round/>
-                      <a:headEnd type="none" w="med" len="med"/>
-                      <a:tailEnd type="none" w="med" len="med"/>
-                    </a:lnB>
-                    <a:solidFill>
-                      <a:srgbClr val="F7FAFC"/>
-                    </a:solidFill>
-                  </a:tcPr>
-                </a:tc>
-                <a:tc>
-                  <a:txBody>
-                    <a:bodyPr/>
-                    <a:lstStyle/>
-                    <a:p>
-                      <a:pPr indent="0" marL="0">
-                        <a:buNone/>
-                      </a:pPr>
-                      <a:r>
-                        <a:rPr lang="en-US" sz="1000" dirty="0">
-                          <a:solidFill>
-                            <a:srgbClr val="10161F"/>
-                          </a:solidFill>
-                          <a:latin typeface="Pretendard" pitchFamily="34" charset="0"/>
-                          <a:ea typeface="Pretendard" pitchFamily="34" charset="-122"/>
-                          <a:cs typeface="Pretendard" pitchFamily="34" charset="-120"/>
-                        </a:rPr>
-                        <a:t>주차장</a:t>
-                      </a:r>
-                      <a:endParaRPr lang="en-US" sz="1000" dirty="0">
-                        <a:latin typeface="Pretendard" charset="0"/>
-                        <a:ea typeface="Pretendard" charset="0"/>
-                        <a:cs typeface="Pretendard" charset="0"/>
-                      </a:endParaRPr>
-                    </a:p>
-                  </a:txBody>
-                  <a:tcPr marL="50800" marR="50800" marT="25400" marB="25400" anchor="ctr">
-                    <a:lnL w="3810" cap="flat" cmpd="sng" algn="ctr">
-                      <a:solidFill>
-                        <a:srgbClr val="CBD5E0"/>
-                      </a:solidFill>
-                      <a:prstDash val="solid"/>
-                      <a:round/>
-                      <a:headEnd type="none" w="med" len="med"/>
-                      <a:tailEnd type="none" w="med" len="med"/>
-                    </a:lnL>
-                    <a:lnR w="3810" cap="flat" cmpd="sng" algn="ctr">
-                      <a:solidFill>
-                        <a:srgbClr val="CBD5E0"/>
-                      </a:solidFill>
-                      <a:prstDash val="solid"/>
-                      <a:round/>
-                      <a:headEnd type="none" w="med" len="med"/>
-                      <a:tailEnd type="none" w="med" len="med"/>
-                    </a:lnR>
-                    <a:lnT w="3810" cap="flat" cmpd="sng" algn="ctr">
-                      <a:solidFill>
-                        <a:srgbClr val="CBD5E0"/>
-                      </a:solidFill>
-                      <a:prstDash val="solid"/>
-                      <a:round/>
-                      <a:headEnd type="none" w="med" len="med"/>
-                      <a:tailEnd type="none" w="med" len="med"/>
-                    </a:lnT>
-                    <a:lnB w="3810" cap="flat" cmpd="sng" algn="ctr">
-                      <a:solidFill>
-                        <a:srgbClr val="CBD5E0"/>
-                      </a:solidFill>
-                      <a:prstDash val="solid"/>
-                      <a:round/>
-                      <a:headEnd type="none" w="med" len="med"/>
-                      <a:tailEnd type="none" w="med" len="med"/>
-                    </a:lnB>
-                    <a:solidFill>
-                      <a:srgbClr val="F7FAFC"/>
-                    </a:solidFill>
-                  </a:tcPr>
-                </a:tc>
-                <a:tc>
-                  <a:txBody>
-                    <a:bodyPr/>
-                    <a:lstStyle/>
-                    <a:p>
-                      <a:pPr indent="0" marL="0">
-                        <a:buNone/>
-                      </a:pPr>
-                      <a:r>
-                        <a:rPr lang="en-US" sz="1000" dirty="0">
-                          <a:solidFill>
-                            <a:srgbClr val="10161F"/>
-                          </a:solidFill>
-                          <a:latin typeface="Pretendard" pitchFamily="34" charset="0"/>
-                          <a:ea typeface="Pretendard" pitchFamily="34" charset="-122"/>
-                          <a:cs typeface="Pretendard" pitchFamily="34" charset="-120"/>
-                        </a:rPr>
-                        <a:t>120평(약 </a:t>
-                      </a:r>
-                      <a:pPr indent="0" marL="0">
-                        <a:buNone/>
-                      </a:pPr>
-                      <a:r>
-                        <a:rPr lang="en-US" sz="1000" dirty="0">
-                          <a:solidFill>
-                            <a:srgbClr val="10161F"/>
-                          </a:solidFill>
-                          <a:latin typeface="Pretendard" pitchFamily="34" charset="0"/>
-                          <a:ea typeface="Pretendard" pitchFamily="34" charset="-122"/>
-                          <a:cs typeface="Pretendard" pitchFamily="34" charset="-120"/>
-                        </a:rPr>
-                        <a:t>396.7㎡)</a:t>
-                      </a:r>
-                      <a:endParaRPr lang="en-US" sz="1000" dirty="0">
-                        <a:latin typeface="Pretendard" charset="0"/>
-                        <a:ea typeface="Pretendard" charset="0"/>
-                        <a:cs typeface="Pretendard" charset="0"/>
-                      </a:endParaRPr>
-                    </a:p>
-                  </a:txBody>
-                  <a:tcPr marL="50800" marR="50800" marT="25400" marB="25400" anchor="ctr">
-                    <a:lnL w="3810" cap="flat" cmpd="sng" algn="ctr">
-                      <a:solidFill>
-                        <a:srgbClr val="CBD5E0"/>
-                      </a:solidFill>
-                      <a:prstDash val="solid"/>
-                      <a:round/>
-                      <a:headEnd type="none" w="med" len="med"/>
-                      <a:tailEnd type="none" w="med" len="med"/>
-                    </a:lnL>
-                    <a:lnR w="3810" cap="flat" cmpd="sng" algn="ctr">
-                      <a:solidFill>
-                        <a:srgbClr val="CBD5E0"/>
-                      </a:solidFill>
-                      <a:prstDash val="solid"/>
-                      <a:round/>
-                      <a:headEnd type="none" w="med" len="med"/>
-                      <a:tailEnd type="none" w="med" len="med"/>
-                    </a:lnR>
-                    <a:lnT w="3810" cap="flat" cmpd="sng" algn="ctr">
-                      <a:solidFill>
-                        <a:srgbClr val="CBD5E0"/>
-                      </a:solidFill>
-                      <a:prstDash val="solid"/>
-                      <a:round/>
-                      <a:headEnd type="none" w="med" len="med"/>
-                      <a:tailEnd type="none" w="med" len="med"/>
-                    </a:lnT>
-                    <a:lnB w="3810" cap="flat" cmpd="sng" algn="ctr">
-                      <a:solidFill>
-                        <a:srgbClr val="CBD5E0"/>
-                      </a:solidFill>
-                      <a:prstDash val="solid"/>
-                      <a:round/>
-                      <a:headEnd type="none" w="med" len="med"/>
-                      <a:tailEnd type="none" w="med" len="med"/>
-                    </a:lnB>
-                    <a:solidFill>
-                      <a:srgbClr val="F7FAFC"/>
-                    </a:solidFill>
-                  </a:tcPr>
-                </a:tc>
-                <a:tc>
-                  <a:txBody>
-                    <a:bodyPr/>
-                    <a:lstStyle/>
-                    <a:p>
-                      <a:pPr indent="0" marL="0">
-                        <a:buNone/>
-                      </a:pPr>
-                      <a:endParaRPr lang="en-US" sz="1000" dirty="0">
-                        <a:latin typeface="Pretendard" charset="0"/>
-                        <a:ea typeface="Pretendard" charset="0"/>
-                        <a:cs typeface="Pretendard" charset="0"/>
-                      </a:endParaRPr>
-                    </a:p>
-                  </a:txBody>
-                  <a:tcPr marL="50800" marR="50800" marT="25400" marB="25400" anchor="ctr">
-                    <a:lnL w="3810" cap="flat" cmpd="sng" algn="ctr">
-                      <a:solidFill>
-                        <a:srgbClr val="CBD5E0"/>
-                      </a:solidFill>
-                      <a:prstDash val="solid"/>
-                      <a:round/>
-                      <a:headEnd type="none" w="med" len="med"/>
-                      <a:tailEnd type="none" w="med" len="med"/>
-                    </a:lnL>
-                    <a:lnR w="3810" cap="flat" cmpd="sng" algn="ctr">
-                      <a:solidFill>
-                        <a:srgbClr val="CBD5E0"/>
-                      </a:solidFill>
-                      <a:prstDash val="solid"/>
-                      <a:round/>
-                      <a:headEnd type="none" w="med" len="med"/>
-                      <a:tailEnd type="none" w="med" len="med"/>
-                    </a:lnR>
-                    <a:lnT w="3810" cap="flat" cmpd="sng" algn="ctr">
-                      <a:solidFill>
-                        <a:srgbClr val="CBD5E0"/>
-                      </a:solidFill>
-                      <a:prstDash val="solid"/>
-                      <a:round/>
-                      <a:headEnd type="none" w="med" len="med"/>
-                      <a:tailEnd type="none" w="med" len="med"/>
-                    </a:lnT>
-                    <a:lnB w="3810" cap="flat" cmpd="sng" algn="ctr">
-                      <a:solidFill>
-                        <a:srgbClr val="CBD5E0"/>
-                      </a:solidFill>
-                      <a:prstDash val="solid"/>
-                      <a:round/>
-                      <a:headEnd type="none" w="med" len="med"/>
-                      <a:tailEnd type="none" w="med" len="med"/>
-                    </a:lnB>
-                    <a:solidFill>
-                      <a:srgbClr val="F7FAFC"/>
-                    </a:solidFill>
-                  </a:tcPr>
-                </a:tc>
-                <a:tc>
-                  <a:txBody>
-                    <a:bodyPr/>
-                    <a:lstStyle/>
-                    <a:p>
-                      <a:pPr indent="0" marL="0">
-                        <a:buNone/>
-                      </a:pPr>
-                      <a:endParaRPr lang="en-US" sz="1000" dirty="0">
-                        <a:latin typeface="Pretendard" charset="0"/>
-                        <a:ea typeface="Pretendard" charset="0"/>
-                        <a:cs typeface="Pretendard" charset="0"/>
-                      </a:endParaRPr>
-                    </a:p>
-                  </a:txBody>
-                  <a:tcPr marL="50800" marR="50800" marT="25400" marB="25400" anchor="ctr">
-                    <a:lnL w="3810" cap="flat" cmpd="sng" algn="ctr">
-                      <a:solidFill>
-                        <a:srgbClr val="CBD5E0"/>
-                      </a:solidFill>
-                      <a:prstDash val="solid"/>
-                      <a:round/>
-                      <a:headEnd type="none" w="med" len="med"/>
-                      <a:tailEnd type="none" w="med" len="med"/>
-                    </a:lnL>
-                    <a:lnR w="3810" cap="flat" cmpd="sng" algn="ctr">
-                      <a:solidFill>
-                        <a:srgbClr val="CBD5E0"/>
-                      </a:solidFill>
-                      <a:prstDash val="solid"/>
-                      <a:round/>
-                      <a:headEnd type="none" w="med" len="med"/>
-                      <a:tailEnd type="none" w="med" len="med"/>
-                    </a:lnR>
-                    <a:lnT w="3810" cap="flat" cmpd="sng" algn="ctr">
-                      <a:solidFill>
-                        <a:srgbClr val="CBD5E0"/>
-                      </a:solidFill>
-                      <a:prstDash val="solid"/>
-                      <a:round/>
-                      <a:headEnd type="none" w="med" len="med"/>
-                      <a:tailEnd type="none" w="med" len="med"/>
-                    </a:lnT>
-                    <a:lnB w="3810" cap="flat" cmpd="sng" algn="ctr">
-                      <a:solidFill>
-                        <a:srgbClr val="CBD5E0"/>
-                      </a:solidFill>
-                      <a:prstDash val="solid"/>
-                      <a:round/>
-                      <a:headEnd type="none" w="med" len="med"/>
-                      <a:tailEnd type="none" w="med" len="med"/>
-                    </a:lnB>
-                    <a:solidFill>
-                      <a:srgbClr val="F7FAFC"/>
-                    </a:solidFill>
-                  </a:tcPr>
-                </a:tc>
-                <a:tc>
-                  <a:txBody>
-                    <a:bodyPr/>
-                    <a:lstStyle/>
-                    <a:p>
-                      <a:pPr indent="0" marL="0">
-                        <a:buNone/>
-                      </a:pPr>
-                      <a:endParaRPr lang="en-US" sz="1000" dirty="0">
-                        <a:latin typeface="Pretendard" charset="0"/>
-                        <a:ea typeface="Pretendard" charset="0"/>
-                        <a:cs typeface="Pretendard" charset="0"/>
-                      </a:endParaRPr>
-                    </a:p>
-                  </a:txBody>
-                  <a:tcPr marL="50800" marR="50800" marT="25400" marB="25400" anchor="ctr">
-                    <a:lnL w="3810" cap="flat" cmpd="sng" algn="ctr">
-                      <a:solidFill>
-                        <a:srgbClr val="CBD5E0"/>
-                      </a:solidFill>
-                      <a:prstDash val="solid"/>
-                      <a:round/>
-                      <a:headEnd type="none" w="med" len="med"/>
-                      <a:tailEnd type="none" w="med" len="med"/>
-                    </a:lnL>
-                    <a:lnR w="3810" cap="flat" cmpd="sng" algn="ctr">
-                      <a:solidFill>
-                        <a:srgbClr val="CBD5E0"/>
-                      </a:solidFill>
-                      <a:prstDash val="solid"/>
-                      <a:round/>
-                      <a:headEnd type="none" w="med" len="med"/>
-                      <a:tailEnd type="none" w="med" len="med"/>
-                    </a:lnR>
-                    <a:lnT w="3810" cap="flat" cmpd="sng" algn="ctr">
-                      <a:solidFill>
-                        <a:srgbClr val="CBD5E0"/>
-                      </a:solidFill>
-                      <a:prstDash val="solid"/>
-                      <a:round/>
-                      <a:headEnd type="none" w="med" len="med"/>
-                      <a:tailEnd type="none" w="med" len="med"/>
-                    </a:lnT>
-                    <a:lnB w="3810" cap="flat" cmpd="sng" algn="ctr">
-                      <a:solidFill>
-                        <a:srgbClr val="CBD5E0"/>
-                      </a:solidFill>
-                      <a:prstDash val="solid"/>
-                      <a:round/>
-                      <a:headEnd type="none" w="med" len="med"/>
-                      <a:tailEnd type="none" w="med" len="med"/>
-                    </a:lnB>
-                    <a:solidFill>
-                      <a:srgbClr val="F7FAFC"/>
-                    </a:solidFill>
-                  </a:tcPr>
-                </a:tc>
-                <a:tc>
-                  <a:txBody>
-                    <a:bodyPr/>
-                    <a:lstStyle/>
-                    <a:p>
-                      <a:pPr indent="0" marL="0">
-                        <a:buNone/>
-                      </a:pPr>
-                      <a:r>
-                        <a:rPr lang="en-US" sz="1000" dirty="0">
-                          <a:solidFill>
-                            <a:srgbClr val="10161F"/>
-                          </a:solidFill>
-                          <a:latin typeface="Pretendard" pitchFamily="34" charset="0"/>
-                          <a:ea typeface="Pretendard" pitchFamily="34" charset="-122"/>
-                          <a:cs typeface="Pretendard" pitchFamily="34" charset="-120"/>
-                        </a:rPr>
-                        <a:t>미정</a:t>
-                      </a:r>
-                      <a:endParaRPr lang="en-US" sz="1000" dirty="0">
-                        <a:latin typeface="Pretendard" charset="0"/>
-                        <a:ea typeface="Pretendard" charset="0"/>
-                        <a:cs typeface="Pretendard" charset="0"/>
-                      </a:endParaRPr>
-                    </a:p>
-                  </a:txBody>
-                  <a:tcPr marL="50800" marR="50800" marT="25400" marB="25400" anchor="ctr">
-                    <a:lnL w="3810" cap="flat" cmpd="sng" algn="ctr">
-                      <a:solidFill>
-                        <a:srgbClr val="CBD5E0"/>
-                      </a:solidFill>
-                      <a:prstDash val="solid"/>
-                      <a:round/>
-                      <a:headEnd type="none" w="med" len="med"/>
-                      <a:tailEnd type="none" w="med" len="med"/>
-                    </a:lnL>
-                    <a:lnR w="3810" cap="flat" cmpd="sng" algn="ctr">
-                      <a:solidFill>
-                        <a:srgbClr val="CBD5E0"/>
-                      </a:solidFill>
-                      <a:prstDash val="solid"/>
-                      <a:round/>
-                      <a:headEnd type="none" w="med" len="med"/>
-                      <a:tailEnd type="none" w="med" len="med"/>
-                    </a:lnR>
-                    <a:lnT w="3810" cap="flat" cmpd="sng" algn="ctr">
-                      <a:solidFill>
-                        <a:srgbClr val="CBD5E0"/>
-                      </a:solidFill>
-                      <a:prstDash val="solid"/>
-                      <a:round/>
-                      <a:headEnd type="none" w="med" len="med"/>
-                      <a:tailEnd type="none" w="med" len="med"/>
-                    </a:lnT>
-                    <a:lnB w="3810" cap="flat" cmpd="sng" algn="ctr">
-                      <a:solidFill>
-                        <a:srgbClr val="CBD5E0"/>
-                      </a:solidFill>
-                      <a:prstDash val="solid"/>
-                      <a:round/>
-                      <a:headEnd type="none" w="med" len="med"/>
-                      <a:tailEnd type="none" w="med" len="med"/>
-                    </a:lnB>
-                    <a:solidFill>
-                      <a:srgbClr val="F7FAFC"/>
-                    </a:solidFill>
-                  </a:tcPr>
-                </a:tc>
-              </a:tr>
             </a:tbl>
           </a:graphicData>
         </a:graphic>
@@ -11427,8 +10776,8 @@
         </p:nvSpPr>
         <p:spPr>
           <a:xfrm>
-            <a:off x="566928" y="5907024"/>
-            <a:ext cx="11057839" cy="384048"/>
+            <a:off x="566928" y="6382512"/>
+            <a:ext cx="7315200" cy="219456"/>
           </a:xfrm>
           <a:prstGeom prst="rect">
             <a:avLst/>
@@ -11441,68 +10790,26 @@
           <a:lstStyle/>
           <a:p>
             <a:pPr indent="0" marL="0">
-              <a:lnSpc>
-                <a:spcPct val="125000"/>
-              </a:lnSpc>
-              <a:buNone/>
-            </a:pPr>
-            <a:r>
-              <a:rPr lang="en-US" sz="780" dirty="0">
-                <a:solidFill>
-                  <a:srgbClr val="A0AEC0"/>
+              <a:buNone/>
+            </a:pPr>
+            <a:r>
+              <a:rPr lang="en-US" sz="800" dirty="0">
+                <a:solidFill>
+                  <a:srgbClr val="718096"/>
                 </a:solidFill>
                 <a:latin typeface="Pretendard" pitchFamily="34" charset="0"/>
                 <a:ea typeface="Pretendard" pitchFamily="34" charset="-122"/>
                 <a:cs typeface="Pretendard" pitchFamily="34" charset="-120"/>
               </a:rPr>
-              <a:t>[주의] 임차인명 및 상세 정보는 개인정보 보호를 위해 비공개 처리되었습니다. / 외 N건은 별첨 참조</a:t>
-            </a:r>
-            <a:endParaRPr lang="en-US" sz="780" dirty="0"/>
+              <a:t>크리딜   |   </a:t>
+            </a:r>
+            <a:endParaRPr lang="en-US" sz="800" dirty="0"/>
           </a:p>
         </p:txBody>
       </p:sp>
       <p:sp>
         <p:nvSpPr>
           <p:cNvPr id="8" name="Text 5"/>
-          <p:cNvSpPr/>
-          <p:nvPr/>
-        </p:nvSpPr>
-        <p:spPr>
-          <a:xfrm>
-            <a:off x="566928" y="6382512"/>
-            <a:ext cx="7315200" cy="219456"/>
-          </a:xfrm>
-          <a:prstGeom prst="rect">
-            <a:avLst/>
-          </a:prstGeom>
-          <a:noFill/>
-          <a:ln/>
-        </p:spPr>
-        <p:txBody>
-          <a:bodyPr wrap="square" lIns="0" tIns="0" rIns="0" bIns="0" rtlCol="0" anchor="ctr"/>
-          <a:lstStyle/>
-          <a:p>
-            <a:pPr indent="0" marL="0">
-              <a:buNone/>
-            </a:pPr>
-            <a:r>
-              <a:rPr lang="en-US" sz="800" dirty="0">
-                <a:solidFill>
-                  <a:srgbClr val="718096"/>
-                </a:solidFill>
-                <a:latin typeface="Pretendard" pitchFamily="34" charset="0"/>
-                <a:ea typeface="Pretendard" pitchFamily="34" charset="-122"/>
-                <a:cs typeface="Pretendard" pitchFamily="34" charset="-120"/>
-              </a:rPr>
-              <a:t>크리딜   |   </a:t>
-            </a:r>
-            <a:endParaRPr lang="en-US" sz="800" dirty="0"/>
-          </a:p>
-        </p:txBody>
-      </p:sp>
-      <p:sp>
-        <p:nvSpPr>
-          <p:cNvPr id="9" name="Text 6"/>
           <p:cNvSpPr/>
           <p:nvPr/>
         </p:nvSpPr>
@@ -11741,7 +11048,7 @@
                 <a:ea typeface="Pretendard" pitchFamily="34" charset="-122"/>
                 <a:cs typeface="Pretendard" pitchFamily="34" charset="-120"/>
               </a:rPr>
-              <a:t>층별 임대 현황</a:t>
+              <a:t>[참고] 핵심 현금흐름 3줄 요약 (내 돈 &amp; 월 순수익)</a:t>
             </a:r>
             <a:endParaRPr lang="en-US" sz="1100" dirty="0"/>
           </a:p>
@@ -12655,7 +11962,7 @@
         <p:spPr>
           <a:xfrm>
             <a:off x="566928" y="4626864"/>
-            <a:ext cx="11057839" cy="1280160"/>
+            <a:ext cx="5437480" cy="1280160"/>
           </a:xfrm>
           <a:prstGeom prst="roundRect">
             <a:avLst>
@@ -12697,7 +12004,7 @@
         <p:spPr>
           <a:xfrm>
             <a:off x="749808" y="4736592"/>
-            <a:ext cx="10728655" cy="201168"/>
+            <a:ext cx="5108296" cy="201168"/>
           </a:xfrm>
           <a:prstGeom prst="rect">
             <a:avLst/>
@@ -12736,7 +12043,7 @@
         <p:spPr>
           <a:xfrm>
             <a:off x="749808" y="4956048"/>
-            <a:ext cx="10728655" cy="877824"/>
+            <a:ext cx="5108296" cy="877824"/>
           </a:xfrm>
           <a:prstGeom prst="rect">
             <a:avLst/>
@@ -12763,7 +12070,7 @@
                 <a:ea typeface="Pretendard" pitchFamily="34" charset="-122"/>
                 <a:cs typeface="Pretendard" pitchFamily="34" charset="-120"/>
               </a:rPr>
-              <a:t>{"ok":true,"mocked":true,"extractedFields":{"area_signal":"역삼","asset_type":"오피스빌딩","price_band":"300억","size_signal":"3000평(약 9917.4㎡)"},"extractedFacts":{"region":"역삼","exactAddressCandidate":"역삼동 742-1","assetType":"오피스빌딩","priceText":"300억","sizeText":"3000평(약 9917.4㎡)","currentUse":"오피스","currentUseSignal":"근린생활시설","leaseSignal":"임대중","vacancySignal":"공실없음","tenantNames":["쿠팡","네이버"],"unitRentTexts":["301호: 1500만"],"sellerMotivationText":"자산 효율화","brokerNotes":["초역세권 매물"]},"detectedSensitiveFields":["exact_address","tenant_name"],"ambiguousFields":[],"warnings":[],"areaSignal":"역삼","assetType":"오피스빌딩","priceBand":"300억","sizeSignal":"3000평(약 9917.4㎡)","dealType":"매각","buildingName":"역삼 센트럴타워","exactAddress":"역삼동 742-1","totalFloorArea":9917.3,"buildYear":2015,"currentUseSignal":"근린생활시설","vacancySignal":"공실 없음","fitSummary":"초역세권 근생 빌딩으로 시행/사옥 매입에 최적화","cautionSummary":"주요 임차 업종 만기 조율 필요","hiddenFields":["exact_address","seller_motivation"],"confidence":{"areaSignal":"confirmed","assetType":"confirmed","priceBand":"ai_hypothesis","fitSummary":"ai_hypothesis"},"missingData":["sizeSignal"],"boundaryNote":"본 자료는 실거래 통계 기반 참고치입니다.","buyerType":"법인 사옥형","budgetRange":{"min":50,"max":80,"display":"50억~80억"},"preferredRegions":["강남","성수"],"assetTypes":["꼬마빌딩","사옥용"],"purchasePurpose":"사옥용 매입","mustHave":["초역세권","주차"],"niceToHave":["테라스","루프탑"],"riskTolerance":"medium","financingNote":"자본금 50% 준비","missingQuestions":["구체적인 입주 시기가 언제인가요?","선호하는 수익률이 있나요?"],"privacyNotes":["연락처 비공개"],"fitReasons":["매수자 예산(50-80억)에 부합하는 매물입니다.","요청하신 성수/강남 권역에 해당합니다."],"cautionReasons":["요청한 용도와 달리 명도 협의가 다소 필요합니다."],"recommendedNextAction":"현장 답사 제안","kakaoMessage":"안녕하세요! 요청하신 조건에 부합하는 추천 매물이 있어 안내해 드립니다. 확인해보시고 피드백 부탁드립니다.","title":"강남 역삼역 초역세권 오피스 사옥용 빌딩 매각","shortSummary":"역삼역 도보 5분 거리의 준신축급 대형 오피스빌딩입니다.","dealPoints":["초역세권","사옥 최적"],"cautionPoints":["명도 조율 필요"],"hiddenInfoNotice":["보증금 및 지번은 인가 후 확인 가능"],"gateMessage":"G1 등급 등록이 필요합니다.","kakaoText":"강남 역삼역 오피스 빌딩 매각 안내입니다.","exactUnitCandidate":"101호","floor":"1층","areaSqmText":"150㎡","spaceType":"office","depositText":"5000만","monthlyRentText":"400만","maintenanceFeeText":"50만","availableFromText":"즉시입주","leaseTermMonthsText":"24","incentivesText":"렌트프리 2개월","restrictions":[],"landlordIdentity":"김성수","currentTenant":"스타트업","vacancyReason":"이전 확장","rentNegotiation":"협의 가능","region":"성수동","areaSqm":150,"deposit":5000,"monthlyRent":400,"maintenanceFee":50,"availableFrom":"즉시입주","leaseTermMonths":24,"incentives":{"rentFreeMonths":2,"interiorSupport":"일부 인테리어 지원","freeRentDetail":"렌트프리 2개월 지원"},"shortSummaryLease":"성수역 도보 5분 거리 1층 리테일 상가 매물입니다."}</a:t>
+              <a:t>본 자산은 우수한 입지 경쟁력과 견고한 펀더멘털을 바탕으로 안정적인 현금흐름 창출과 중장기 자산 가치 상승을 동시에 실현할 수 있는 우량 투자 기회입니다.</a:t>
             </a:r>
             <a:endParaRPr lang="en-US" sz="930" dirty="0"/>
           </a:p>
@@ -12771,14 +12078,56 @@
       </p:sp>
       <p:sp>
         <p:nvSpPr>
-          <p:cNvPr id="36" name="Text 34"/>
-          <p:cNvSpPr/>
-          <p:nvPr/>
-        </p:nvSpPr>
-        <p:spPr>
-          <a:xfrm>
-            <a:off x="566928" y="6382512"/>
-            <a:ext cx="7315200" cy="219456"/>
+          <p:cNvPr id="36" name="Shape 34"/>
+          <p:cNvSpPr/>
+          <p:nvPr/>
+        </p:nvSpPr>
+        <p:spPr>
+          <a:xfrm>
+            <a:off x="6187288" y="4626864"/>
+            <a:ext cx="5437480" cy="1280160"/>
+          </a:xfrm>
+          <a:prstGeom prst="roundRect">
+            <a:avLst>
+              <a:gd name="adj" fmla="val 4286"/>
+            </a:avLst>
+          </a:prstGeom>
+          <a:solidFill>
+            <a:srgbClr val="BEE3F8"/>
+          </a:solidFill>
+          <a:ln/>
+        </p:spPr>
+      </p:sp>
+      <p:sp>
+        <p:nvSpPr>
+          <p:cNvPr id="37" name="Shape 35"/>
+          <p:cNvSpPr/>
+          <p:nvPr/>
+        </p:nvSpPr>
+        <p:spPr>
+          <a:xfrm>
+            <a:off x="6187288" y="4681728"/>
+            <a:ext cx="36576" cy="1170432"/>
+          </a:xfrm>
+          <a:prstGeom prst="rect">
+            <a:avLst/>
+          </a:prstGeom>
+          <a:solidFill>
+            <a:srgbClr val="2B6CB0"/>
+          </a:solidFill>
+          <a:ln/>
+        </p:spPr>
+      </p:sp>
+      <p:sp>
+        <p:nvSpPr>
+          <p:cNvPr id="38" name="Text 36"/>
+          <p:cNvSpPr/>
+          <p:nvPr/>
+        </p:nvSpPr>
+        <p:spPr>
+          <a:xfrm>
+            <a:off x="6370168" y="4736592"/>
+            <a:ext cx="5108296" cy="201168"/>
           </a:xfrm>
           <a:prstGeom prst="rect">
             <a:avLst/>
@@ -12794,14 +12143,95 @@
               <a:buNone/>
             </a:pPr>
             <a:r>
-              <a:rPr lang="en-US" sz="800" dirty="0">
-                <a:solidFill>
-                  <a:srgbClr val="718096"/>
+              <a:rPr lang="en-US" sz="1050" b="1" dirty="0">
+                <a:solidFill>
+                  <a:srgbClr val="2B6CB0"/>
                 </a:solidFill>
                 <a:latin typeface="Pretendard" pitchFamily="34" charset="0"/>
                 <a:ea typeface="Pretendard" pitchFamily="34" charset="-122"/>
                 <a:cs typeface="Pretendard" pitchFamily="34" charset="-120"/>
               </a:rPr>
+              <a:t>[주의] 면책</a:t>
+            </a:r>
+            <a:endParaRPr lang="en-US" sz="1050" dirty="0"/>
+          </a:p>
+        </p:txBody>
+      </p:sp>
+      <p:sp>
+        <p:nvSpPr>
+          <p:cNvPr id="39" name="Text 37"/>
+          <p:cNvSpPr/>
+          <p:nvPr/>
+        </p:nvSpPr>
+        <p:spPr>
+          <a:xfrm>
+            <a:off x="6370168" y="4956048"/>
+            <a:ext cx="5108296" cy="877824"/>
+          </a:xfrm>
+          <a:prstGeom prst="rect">
+            <a:avLst/>
+          </a:prstGeom>
+          <a:noFill/>
+          <a:ln/>
+        </p:spPr>
+        <p:txBody>
+          <a:bodyPr wrap="square" lIns="0" tIns="0" rIns="0" bIns="0" rtlCol="0" anchor="t"/>
+          <a:lstStyle/>
+          <a:p>
+            <a:pPr indent="0" marL="0">
+              <a:lnSpc>
+                <a:spcPct val="120000"/>
+              </a:lnSpc>
+              <a:buNone/>
+            </a:pPr>
+            <a:r>
+              <a:rPr lang="en-US" sz="930" dirty="0">
+                <a:solidFill>
+                  <a:srgbClr val="10161F"/>
+                </a:solidFill>
+                <a:latin typeface="Pretendard" pitchFamily="34" charset="0"/>
+                <a:ea typeface="Pretendard" pitchFamily="34" charset="-122"/>
+                <a:cs typeface="Pretendard" pitchFamily="34" charset="-120"/>
+              </a:rPr>
+              <a:t>AI 추정값 (참고용). 실제 수익은 임대차 조건·공실률·세금에 따라 상이합니다.</a:t>
+            </a:r>
+            <a:endParaRPr lang="en-US" sz="930" dirty="0"/>
+          </a:p>
+        </p:txBody>
+      </p:sp>
+      <p:sp>
+        <p:nvSpPr>
+          <p:cNvPr id="40" name="Text 38"/>
+          <p:cNvSpPr/>
+          <p:nvPr/>
+        </p:nvSpPr>
+        <p:spPr>
+          <a:xfrm>
+            <a:off x="566928" y="6382512"/>
+            <a:ext cx="7315200" cy="219456"/>
+          </a:xfrm>
+          <a:prstGeom prst="rect">
+            <a:avLst/>
+          </a:prstGeom>
+          <a:noFill/>
+          <a:ln/>
+        </p:spPr>
+        <p:txBody>
+          <a:bodyPr wrap="square" lIns="0" tIns="0" rIns="0" bIns="0" rtlCol="0" anchor="ctr"/>
+          <a:lstStyle/>
+          <a:p>
+            <a:pPr indent="0" marL="0">
+              <a:buNone/>
+            </a:pPr>
+            <a:r>
+              <a:rPr lang="en-US" sz="800" dirty="0">
+                <a:solidFill>
+                  <a:srgbClr val="718096"/>
+                </a:solidFill>
+                <a:latin typeface="Pretendard" pitchFamily="34" charset="0"/>
+                <a:ea typeface="Pretendard" pitchFamily="34" charset="-122"/>
+                <a:cs typeface="Pretendard" pitchFamily="34" charset="-120"/>
+              </a:rPr>
               <a:t>크리딜   |   </a:t>
             </a:r>
             <a:endParaRPr lang="en-US" sz="800" dirty="0"/>
@@ -12810,7 +12240,7 @@
       </p:sp>
       <p:sp>
         <p:nvSpPr>
-          <p:cNvPr id="37" name="Text 35"/>
+          <p:cNvPr id="41" name="Text 39"/>
           <p:cNvSpPr/>
           <p:nvPr/>
         </p:nvSpPr>
@@ -14222,645 +13652,9 @@
                 <a:ea typeface="Pretendard" pitchFamily="34" charset="-122"/>
                 <a:cs typeface="Pretendard" pitchFamily="34" charset="-120"/>
               </a:rPr>
-              <a:t>3대 핵심 투자 포인트 (Investment Highlights)</a:t>
+              <a:t>밸류업 시나리오 (AI 추정)</a:t>
             </a:r>
             <a:endParaRPr lang="en-US" sz="1100" dirty="0"/>
-          </a:p>
-        </p:txBody>
-      </p:sp>
-      <p:sp>
-        <p:nvSpPr>
-          <p:cNvPr id="7" name="Shape 5"/>
-          <p:cNvSpPr/>
-          <p:nvPr/>
-        </p:nvSpPr>
-        <p:spPr>
-          <a:xfrm>
-            <a:off x="566928" y="1481328"/>
-            <a:ext cx="3472586" cy="2560320"/>
-          </a:xfrm>
-          <a:prstGeom prst="roundRect">
-            <a:avLst>
-              <a:gd name="adj" fmla="val 2857"/>
-            </a:avLst>
-          </a:prstGeom>
-          <a:solidFill>
-            <a:srgbClr val="F7FAFC"/>
-          </a:solidFill>
-          <a:ln w="10160">
-            <a:solidFill>
-              <a:srgbClr val="CBD5E0"/>
-            </a:solidFill>
-            <a:prstDash val="solid"/>
-          </a:ln>
-        </p:spPr>
-      </p:sp>
-      <p:sp>
-        <p:nvSpPr>
-          <p:cNvPr id="8" name="Shape 6"/>
-          <p:cNvSpPr/>
-          <p:nvPr/>
-        </p:nvSpPr>
-        <p:spPr>
-          <a:xfrm>
-            <a:off x="566928" y="1481328"/>
-            <a:ext cx="3472586" cy="54864"/>
-          </a:xfrm>
-          <a:prstGeom prst="rect">
-            <a:avLst/>
-          </a:prstGeom>
-          <a:solidFill>
-            <a:srgbClr val="B98A2E"/>
-          </a:solidFill>
-          <a:ln/>
-        </p:spPr>
-      </p:sp>
-      <p:sp>
-        <p:nvSpPr>
-          <p:cNvPr id="9" name="Shape 7"/>
-          <p:cNvSpPr/>
-          <p:nvPr/>
-        </p:nvSpPr>
-        <p:spPr>
-          <a:xfrm>
-            <a:off x="795528" y="1755648"/>
-            <a:ext cx="475488" cy="292608"/>
-          </a:xfrm>
-          <a:prstGeom prst="roundRect">
-            <a:avLst>
-              <a:gd name="adj" fmla="val 12500"/>
-            </a:avLst>
-          </a:prstGeom>
-          <a:solidFill>
-            <a:srgbClr val="D9B668"/>
-          </a:solidFill>
-          <a:ln/>
-        </p:spPr>
-      </p:sp>
-      <p:sp>
-        <p:nvSpPr>
-          <p:cNvPr id="10" name="Text 8"/>
-          <p:cNvSpPr/>
-          <p:nvPr/>
-        </p:nvSpPr>
-        <p:spPr>
-          <a:xfrm>
-            <a:off x="795528" y="1755648"/>
-            <a:ext cx="475488" cy="292608"/>
-          </a:xfrm>
-          <a:prstGeom prst="rect">
-            <a:avLst/>
-          </a:prstGeom>
-          <a:noFill/>
-          <a:ln/>
-        </p:spPr>
-        <p:txBody>
-          <a:bodyPr wrap="square" lIns="0" tIns="0" rIns="0" bIns="0" rtlCol="0" anchor="ctr"/>
-          <a:lstStyle/>
-          <a:p>
-            <a:pPr algn="ctr" indent="0" marL="0">
-              <a:buNone/>
-            </a:pPr>
-            <a:r>
-              <a:rPr lang="en-US" sz="1100" b="1" dirty="0">
-                <a:solidFill>
-                  <a:srgbClr val="977024"/>
-                </a:solidFill>
-                <a:latin typeface="Arial" pitchFamily="34" charset="0"/>
-                <a:ea typeface="Arial" pitchFamily="34" charset="-122"/>
-                <a:cs typeface="Arial" pitchFamily="34" charset="-120"/>
-              </a:rPr>
-              <a:t>01</a:t>
-            </a:r>
-            <a:endParaRPr lang="en-US" sz="1100" dirty="0"/>
-          </a:p>
-        </p:txBody>
-      </p:sp>
-      <p:sp>
-        <p:nvSpPr>
-          <p:cNvPr id="11" name="Text 9"/>
-          <p:cNvSpPr/>
-          <p:nvPr/>
-        </p:nvSpPr>
-        <p:spPr>
-          <a:xfrm>
-            <a:off x="795528" y="2194560"/>
-            <a:ext cx="3015386" cy="365760"/>
-          </a:xfrm>
-          <a:prstGeom prst="rect">
-            <a:avLst/>
-          </a:prstGeom>
-          <a:noFill/>
-          <a:ln/>
-        </p:spPr>
-        <p:txBody>
-          <a:bodyPr wrap="square" lIns="0" tIns="0" rIns="0" bIns="0" rtlCol="0" anchor="t"/>
-          <a:lstStyle/>
-          <a:p>
-            <a:pPr indent="0" marL="0">
-              <a:buNone/>
-            </a:pPr>
-            <a:r>
-              <a:rPr lang="en-US" sz="1500" b="1" dirty="0">
-                <a:solidFill>
-                  <a:srgbClr val="10161F"/>
-                </a:solidFill>
-                <a:latin typeface="Pretendard" pitchFamily="34" charset="0"/>
-                <a:ea typeface="Pretendard" pitchFamily="34" charset="-122"/>
-                <a:cs typeface="Pretendard" pitchFamily="34" charset="-120"/>
-              </a:rPr>
-              <a:t>원금 안전판 확보</a:t>
-            </a:r>
-            <a:endParaRPr lang="en-US" sz="1500" dirty="0"/>
-          </a:p>
-        </p:txBody>
-      </p:sp>
-      <p:sp>
-        <p:nvSpPr>
-          <p:cNvPr id="12" name="Shape 10"/>
-          <p:cNvSpPr/>
-          <p:nvPr/>
-        </p:nvSpPr>
-        <p:spPr>
-          <a:xfrm>
-            <a:off x="795528" y="2624328"/>
-            <a:ext cx="3015386" cy="0"/>
-          </a:xfrm>
-          <a:prstGeom prst="line">
-            <a:avLst/>
-          </a:prstGeom>
-          <a:noFill/>
-          <a:ln w="6350">
-            <a:solidFill>
-              <a:srgbClr val="CBD5E0"/>
-            </a:solidFill>
-            <a:prstDash val="solid"/>
-          </a:ln>
-        </p:spPr>
-      </p:sp>
-      <p:sp>
-        <p:nvSpPr>
-          <p:cNvPr id="13" name="Text 11"/>
-          <p:cNvSpPr/>
-          <p:nvPr/>
-        </p:nvSpPr>
-        <p:spPr>
-          <a:xfrm>
-            <a:off x="795528" y="2779776"/>
-            <a:ext cx="3015386" cy="1051560"/>
-          </a:xfrm>
-          <a:prstGeom prst="rect">
-            <a:avLst/>
-          </a:prstGeom>
-          <a:noFill/>
-          <a:ln/>
-        </p:spPr>
-        <p:txBody>
-          <a:bodyPr wrap="square" lIns="0" tIns="0" rIns="0" bIns="0" rtlCol="0" anchor="t"/>
-          <a:lstStyle/>
-          <a:p>
-            <a:pPr indent="0" marL="0">
-              <a:lnSpc>
-                <a:spcPct val="130000"/>
-              </a:lnSpc>
-              <a:buNone/>
-            </a:pPr>
-            <a:r>
-              <a:rPr lang="en-US" sz="1200" dirty="0">
-                <a:solidFill>
-                  <a:srgbClr val="10161F"/>
-                </a:solidFill>
-                <a:latin typeface="Pretendard" pitchFamily="34" charset="0"/>
-                <a:ea typeface="Pretendard" pitchFamily="34" charset="-122"/>
-                <a:cs typeface="Pretendard" pitchFamily="34" charset="-120"/>
-              </a:rPr>
-              <a:t>서초권역의 핵심 입지로, 우량한 대지 지분 가치가 하방 경직성을 강력히 지지합니다.</a:t>
-            </a:r>
-            <a:endParaRPr lang="en-US" sz="1200" dirty="0"/>
-          </a:p>
-        </p:txBody>
-      </p:sp>
-      <p:sp>
-        <p:nvSpPr>
-          <p:cNvPr id="14" name="Shape 12"/>
-          <p:cNvSpPr/>
-          <p:nvPr/>
-        </p:nvSpPr>
-        <p:spPr>
-          <a:xfrm>
-            <a:off x="4359554" y="1481328"/>
-            <a:ext cx="3472586" cy="2560320"/>
-          </a:xfrm>
-          <a:prstGeom prst="roundRect">
-            <a:avLst>
-              <a:gd name="adj" fmla="val 2857"/>
-            </a:avLst>
-          </a:prstGeom>
-          <a:solidFill>
-            <a:srgbClr val="F7FAFC"/>
-          </a:solidFill>
-          <a:ln w="10160">
-            <a:solidFill>
-              <a:srgbClr val="CBD5E0"/>
-            </a:solidFill>
-            <a:prstDash val="solid"/>
-          </a:ln>
-        </p:spPr>
-      </p:sp>
-      <p:sp>
-        <p:nvSpPr>
-          <p:cNvPr id="15" name="Shape 13"/>
-          <p:cNvSpPr/>
-          <p:nvPr/>
-        </p:nvSpPr>
-        <p:spPr>
-          <a:xfrm>
-            <a:off x="4359554" y="1481328"/>
-            <a:ext cx="3472586" cy="54864"/>
-          </a:xfrm>
-          <a:prstGeom prst="rect">
-            <a:avLst/>
-          </a:prstGeom>
-          <a:solidFill>
-            <a:srgbClr val="B98A2E"/>
-          </a:solidFill>
-          <a:ln/>
-        </p:spPr>
-      </p:sp>
-      <p:sp>
-        <p:nvSpPr>
-          <p:cNvPr id="16" name="Shape 14"/>
-          <p:cNvSpPr/>
-          <p:nvPr/>
-        </p:nvSpPr>
-        <p:spPr>
-          <a:xfrm>
-            <a:off x="4588154" y="1755648"/>
-            <a:ext cx="475488" cy="292608"/>
-          </a:xfrm>
-          <a:prstGeom prst="roundRect">
-            <a:avLst>
-              <a:gd name="adj" fmla="val 12500"/>
-            </a:avLst>
-          </a:prstGeom>
-          <a:solidFill>
-            <a:srgbClr val="D9B668"/>
-          </a:solidFill>
-          <a:ln/>
-        </p:spPr>
-      </p:sp>
-      <p:sp>
-        <p:nvSpPr>
-          <p:cNvPr id="17" name="Text 15"/>
-          <p:cNvSpPr/>
-          <p:nvPr/>
-        </p:nvSpPr>
-        <p:spPr>
-          <a:xfrm>
-            <a:off x="4588154" y="1755648"/>
-            <a:ext cx="475488" cy="292608"/>
-          </a:xfrm>
-          <a:prstGeom prst="rect">
-            <a:avLst/>
-          </a:prstGeom>
-          <a:noFill/>
-          <a:ln/>
-        </p:spPr>
-        <p:txBody>
-          <a:bodyPr wrap="square" lIns="0" tIns="0" rIns="0" bIns="0" rtlCol="0" anchor="ctr"/>
-          <a:lstStyle/>
-          <a:p>
-            <a:pPr algn="ctr" indent="0" marL="0">
-              <a:buNone/>
-            </a:pPr>
-            <a:r>
-              <a:rPr lang="en-US" sz="1100" b="1" dirty="0">
-                <a:solidFill>
-                  <a:srgbClr val="977024"/>
-                </a:solidFill>
-                <a:latin typeface="Arial" pitchFamily="34" charset="0"/>
-                <a:ea typeface="Arial" pitchFamily="34" charset="-122"/>
-                <a:cs typeface="Arial" pitchFamily="34" charset="-120"/>
-              </a:rPr>
-              <a:t>02</a:t>
-            </a:r>
-            <a:endParaRPr lang="en-US" sz="1100" dirty="0"/>
-          </a:p>
-        </p:txBody>
-      </p:sp>
-      <p:sp>
-        <p:nvSpPr>
-          <p:cNvPr id="18" name="Text 16"/>
-          <p:cNvSpPr/>
-          <p:nvPr/>
-        </p:nvSpPr>
-        <p:spPr>
-          <a:xfrm>
-            <a:off x="4588154" y="2194560"/>
-            <a:ext cx="3015386" cy="365760"/>
-          </a:xfrm>
-          <a:prstGeom prst="rect">
-            <a:avLst/>
-          </a:prstGeom>
-          <a:noFill/>
-          <a:ln/>
-        </p:spPr>
-        <p:txBody>
-          <a:bodyPr wrap="square" lIns="0" tIns="0" rIns="0" bIns="0" rtlCol="0" anchor="t"/>
-          <a:lstStyle/>
-          <a:p>
-            <a:pPr indent="0" marL="0">
-              <a:buNone/>
-            </a:pPr>
-            <a:r>
-              <a:rPr lang="en-US" sz="1500" b="1" dirty="0">
-                <a:solidFill>
-                  <a:srgbClr val="10161F"/>
-                </a:solidFill>
-                <a:latin typeface="Pretendard" pitchFamily="34" charset="0"/>
-                <a:ea typeface="Pretendard" pitchFamily="34" charset="-122"/>
-                <a:cs typeface="Pretendard" pitchFamily="34" charset="-120"/>
-              </a:rPr>
-              <a:t>확실한 월 현금흐름</a:t>
-            </a:r>
-            <a:endParaRPr lang="en-US" sz="1500" dirty="0"/>
-          </a:p>
-        </p:txBody>
-      </p:sp>
-      <p:sp>
-        <p:nvSpPr>
-          <p:cNvPr id="19" name="Shape 17"/>
-          <p:cNvSpPr/>
-          <p:nvPr/>
-        </p:nvSpPr>
-        <p:spPr>
-          <a:xfrm>
-            <a:off x="4588154" y="2624328"/>
-            <a:ext cx="3015386" cy="0"/>
-          </a:xfrm>
-          <a:prstGeom prst="line">
-            <a:avLst/>
-          </a:prstGeom>
-          <a:noFill/>
-          <a:ln w="6350">
-            <a:solidFill>
-              <a:srgbClr val="CBD5E0"/>
-            </a:solidFill>
-            <a:prstDash val="solid"/>
-          </a:ln>
-        </p:spPr>
-      </p:sp>
-      <p:sp>
-        <p:nvSpPr>
-          <p:cNvPr id="20" name="Text 18"/>
-          <p:cNvSpPr/>
-          <p:nvPr/>
-        </p:nvSpPr>
-        <p:spPr>
-          <a:xfrm>
-            <a:off x="4588154" y="2779776"/>
-            <a:ext cx="3015386" cy="1051560"/>
-          </a:xfrm>
-          <a:prstGeom prst="rect">
-            <a:avLst/>
-          </a:prstGeom>
-          <a:noFill/>
-          <a:ln/>
-        </p:spPr>
-        <p:txBody>
-          <a:bodyPr wrap="square" lIns="0" tIns="0" rIns="0" bIns="0" rtlCol="0" anchor="t"/>
-          <a:lstStyle/>
-          <a:p>
-            <a:pPr indent="0" marL="0">
-              <a:lnSpc>
-                <a:spcPct val="130000"/>
-              </a:lnSpc>
-              <a:buNone/>
-            </a:pPr>
-            <a:r>
-              <a:rPr lang="en-US" sz="1200" dirty="0">
-                <a:solidFill>
-                  <a:srgbClr val="10161F"/>
-                </a:solidFill>
-                <a:latin typeface="Pretendard" pitchFamily="34" charset="0"/>
-                <a:ea typeface="Pretendard" pitchFamily="34" charset="-122"/>
-                <a:cs typeface="Pretendard" pitchFamily="34" charset="-120"/>
-              </a:rPr>
-              <a:t>우량 테넌트 만실 운영 및 장기 임대차 구조를 기반으로 매월 안정적인 순영업소득(NOI) 창출이 기대됩니다.</a:t>
-            </a:r>
-            <a:endParaRPr lang="en-US" sz="1200" dirty="0"/>
-          </a:p>
-        </p:txBody>
-      </p:sp>
-      <p:sp>
-        <p:nvSpPr>
-          <p:cNvPr id="21" name="Shape 19"/>
-          <p:cNvSpPr/>
-          <p:nvPr/>
-        </p:nvSpPr>
-        <p:spPr>
-          <a:xfrm>
-            <a:off x="8152181" y="1481328"/>
-            <a:ext cx="3472586" cy="2560320"/>
-          </a:xfrm>
-          <a:prstGeom prst="roundRect">
-            <a:avLst>
-              <a:gd name="adj" fmla="val 2857"/>
-            </a:avLst>
-          </a:prstGeom>
-          <a:solidFill>
-            <a:srgbClr val="F7FAFC"/>
-          </a:solidFill>
-          <a:ln w="10160">
-            <a:solidFill>
-              <a:srgbClr val="CBD5E0"/>
-            </a:solidFill>
-            <a:prstDash val="solid"/>
-          </a:ln>
-        </p:spPr>
-      </p:sp>
-      <p:sp>
-        <p:nvSpPr>
-          <p:cNvPr id="22" name="Shape 20"/>
-          <p:cNvSpPr/>
-          <p:nvPr/>
-        </p:nvSpPr>
-        <p:spPr>
-          <a:xfrm>
-            <a:off x="8152181" y="1481328"/>
-            <a:ext cx="3472586" cy="54864"/>
-          </a:xfrm>
-          <a:prstGeom prst="rect">
-            <a:avLst/>
-          </a:prstGeom>
-          <a:solidFill>
-            <a:srgbClr val="B98A2E"/>
-          </a:solidFill>
-          <a:ln/>
-        </p:spPr>
-      </p:sp>
-      <p:sp>
-        <p:nvSpPr>
-          <p:cNvPr id="23" name="Shape 21"/>
-          <p:cNvSpPr/>
-          <p:nvPr/>
-        </p:nvSpPr>
-        <p:spPr>
-          <a:xfrm>
-            <a:off x="8380781" y="1755648"/>
-            <a:ext cx="475488" cy="292608"/>
-          </a:xfrm>
-          <a:prstGeom prst="roundRect">
-            <a:avLst>
-              <a:gd name="adj" fmla="val 12500"/>
-            </a:avLst>
-          </a:prstGeom>
-          <a:solidFill>
-            <a:srgbClr val="D9B668"/>
-          </a:solidFill>
-          <a:ln/>
-        </p:spPr>
-      </p:sp>
-      <p:sp>
-        <p:nvSpPr>
-          <p:cNvPr id="24" name="Text 22"/>
-          <p:cNvSpPr/>
-          <p:nvPr/>
-        </p:nvSpPr>
-        <p:spPr>
-          <a:xfrm>
-            <a:off x="8380781" y="1755648"/>
-            <a:ext cx="475488" cy="292608"/>
-          </a:xfrm>
-          <a:prstGeom prst="rect">
-            <a:avLst/>
-          </a:prstGeom>
-          <a:noFill/>
-          <a:ln/>
-        </p:spPr>
-        <p:txBody>
-          <a:bodyPr wrap="square" lIns="0" tIns="0" rIns="0" bIns="0" rtlCol="0" anchor="ctr"/>
-          <a:lstStyle/>
-          <a:p>
-            <a:pPr algn="ctr" indent="0" marL="0">
-              <a:buNone/>
-            </a:pPr>
-            <a:r>
-              <a:rPr lang="en-US" sz="1100" b="1" dirty="0">
-                <a:solidFill>
-                  <a:srgbClr val="977024"/>
-                </a:solidFill>
-                <a:latin typeface="Arial" pitchFamily="34" charset="0"/>
-                <a:ea typeface="Arial" pitchFamily="34" charset="-122"/>
-                <a:cs typeface="Arial" pitchFamily="34" charset="-120"/>
-              </a:rPr>
-              <a:t>03</a:t>
-            </a:r>
-            <a:endParaRPr lang="en-US" sz="1100" dirty="0"/>
-          </a:p>
-        </p:txBody>
-      </p:sp>
-      <p:sp>
-        <p:nvSpPr>
-          <p:cNvPr id="25" name="Text 23"/>
-          <p:cNvSpPr/>
-          <p:nvPr/>
-        </p:nvSpPr>
-        <p:spPr>
-          <a:xfrm>
-            <a:off x="8380781" y="2194560"/>
-            <a:ext cx="3015386" cy="365760"/>
-          </a:xfrm>
-          <a:prstGeom prst="rect">
-            <a:avLst/>
-          </a:prstGeom>
-          <a:noFill/>
-          <a:ln/>
-        </p:spPr>
-        <p:txBody>
-          <a:bodyPr wrap="square" lIns="0" tIns="0" rIns="0" bIns="0" rtlCol="0" anchor="t"/>
-          <a:lstStyle/>
-          <a:p>
-            <a:pPr indent="0" marL="0">
-              <a:buNone/>
-            </a:pPr>
-            <a:r>
-              <a:rPr lang="en-US" sz="1500" b="1" dirty="0">
-                <a:solidFill>
-                  <a:srgbClr val="10161F"/>
-                </a:solidFill>
-                <a:latin typeface="Pretendard" pitchFamily="34" charset="0"/>
-                <a:ea typeface="Pretendard" pitchFamily="34" charset="-122"/>
-                <a:cs typeface="Pretendard" pitchFamily="34" charset="-120"/>
-              </a:rPr>
-              <a:t>가치 상승 및 출구 전략</a:t>
-            </a:r>
-            <a:endParaRPr lang="en-US" sz="1500" dirty="0"/>
-          </a:p>
-        </p:txBody>
-      </p:sp>
-      <p:sp>
-        <p:nvSpPr>
-          <p:cNvPr id="26" name="Shape 24"/>
-          <p:cNvSpPr/>
-          <p:nvPr/>
-        </p:nvSpPr>
-        <p:spPr>
-          <a:xfrm>
-            <a:off x="8380781" y="2624328"/>
-            <a:ext cx="3015386" cy="0"/>
-          </a:xfrm>
-          <a:prstGeom prst="line">
-            <a:avLst/>
-          </a:prstGeom>
-          <a:noFill/>
-          <a:ln w="6350">
-            <a:solidFill>
-              <a:srgbClr val="CBD5E0"/>
-            </a:solidFill>
-            <a:prstDash val="solid"/>
-          </a:ln>
-        </p:spPr>
-      </p:sp>
-      <p:sp>
-        <p:nvSpPr>
-          <p:cNvPr id="27" name="Text 25"/>
-          <p:cNvSpPr/>
-          <p:nvPr/>
-        </p:nvSpPr>
-        <p:spPr>
-          <a:xfrm>
-            <a:off x="8380781" y="2779776"/>
-            <a:ext cx="3015386" cy="1051560"/>
-          </a:xfrm>
-          <a:prstGeom prst="rect">
-            <a:avLst/>
-          </a:prstGeom>
-          <a:noFill/>
-          <a:ln/>
-        </p:spPr>
-        <p:txBody>
-          <a:bodyPr wrap="square" lIns="0" tIns="0" rIns="0" bIns="0" rtlCol="0" anchor="t"/>
-          <a:lstStyle/>
-          <a:p>
-            <a:pPr indent="0" marL="0">
-              <a:lnSpc>
-                <a:spcPct val="130000"/>
-              </a:lnSpc>
-              <a:buNone/>
-            </a:pPr>
-            <a:r>
-              <a:rPr lang="en-US" sz="1200" dirty="0">
-                <a:solidFill>
-                  <a:srgbClr val="10161F"/>
-                </a:solidFill>
-                <a:latin typeface="Pretendard" pitchFamily="34" charset="0"/>
-                <a:ea typeface="Pretendard" pitchFamily="34" charset="-122"/>
-                <a:cs typeface="Pretendard" pitchFamily="34" charset="-120"/>
-              </a:rPr>
-              <a:t>현행 공법 여력을 활용한 밸류업 기회와 더불어 향후 권역 지가 상승에 따른 시세차익 실현이 유력합니다.</a:t>
-            </a:r>
-            <a:endParaRPr lang="en-US" sz="1200" dirty="0"/>
           </a:p>
         </p:txBody>
       </p:sp>
@@ -14887,9 +13681,10 @@
             <a:tbl>
               <a:tblPr/>
               <a:tblGrid>
-                <a:gridCol w="3685946"/>
-                <a:gridCol w="3685946"/>
-                <a:gridCol w="3685946"/>
+                <a:gridCol w="2764460"/>
+                <a:gridCol w="2764460"/>
+                <a:gridCol w="2764460"/>
+                <a:gridCol w="2764460"/>
               </a:tblGrid>
               <a:tr h="329184">
                 <a:tc>
@@ -14909,7 +13704,7 @@
                           <a:ea typeface="Pretendard" pitchFamily="34" charset="-122"/>
                           <a:cs typeface="Pretendard" pitchFamily="34" charset="-120"/>
                         </a:rPr>
-                        <a:t>유형</a:t>
+                        <a:t>시나리오</a:t>
                       </a:r>
                       <a:endParaRPr lang="en-US" sz="1050" dirty="0">
                         <a:latin typeface="Pretendard" charset="0"/>
@@ -14977,7 +13772,21 @@
                           <a:ea typeface="Pretendard" pitchFamily="34" charset="-122"/>
                           <a:cs typeface="Pretendard" pitchFamily="34" charset="-120"/>
                         </a:rPr>
-                        <a:t>적합도</a:t>
+                        <a:t>NOI </a:t>
+                      </a:r>
+                      <a:pPr indent="0" marL="0">
+                        <a:buNone/>
+                      </a:pPr>
+                      <a:r>
+                        <a:rPr lang="en-US" sz="1050" b="1" dirty="0">
+                          <a:solidFill>
+                            <a:srgbClr val="718096"/>
+                          </a:solidFill>
+                          <a:latin typeface="Pretendard" pitchFamily="34" charset="0"/>
+                          <a:ea typeface="Pretendard" pitchFamily="34" charset="-122"/>
+                          <a:cs typeface="Pretendard" pitchFamily="34" charset="-120"/>
+                        </a:rPr>
+                        <a:t>개선</a:t>
                       </a:r>
                       <a:endParaRPr lang="en-US" sz="1050" dirty="0">
                         <a:latin typeface="Pretendard" charset="0"/>
@@ -15045,7 +13854,117 @@
                           <a:ea typeface="Pretendard" pitchFamily="34" charset="-122"/>
                           <a:cs typeface="Pretendard" pitchFamily="34" charset="-120"/>
                         </a:rPr>
-                        <a:t>이유</a:t>
+                        <a:t>개선 </a:t>
+                      </a:r>
+                      <a:pPr indent="0" marL="0">
+                        <a:buNone/>
+                      </a:pPr>
+                      <a:r>
+                        <a:rPr lang="en-US" sz="1050" b="1" dirty="0">
+                          <a:solidFill>
+                            <a:srgbClr val="718096"/>
+                          </a:solidFill>
+                          <a:latin typeface="Pretendard" pitchFamily="34" charset="0"/>
+                          <a:ea typeface="Pretendard" pitchFamily="34" charset="-122"/>
+                          <a:cs typeface="Pretendard" pitchFamily="34" charset="-120"/>
+                        </a:rPr>
+                        <a:t>Cap </a:t>
+                      </a:r>
+                      <a:pPr indent="0" marL="0">
+                        <a:buNone/>
+                      </a:pPr>
+                      <a:r>
+                        <a:rPr lang="en-US" sz="1050" b="1" dirty="0">
+                          <a:solidFill>
+                            <a:srgbClr val="718096"/>
+                          </a:solidFill>
+                          <a:latin typeface="Pretendard" pitchFamily="34" charset="0"/>
+                          <a:ea typeface="Pretendard" pitchFamily="34" charset="-122"/>
+                          <a:cs typeface="Pretendard" pitchFamily="34" charset="-120"/>
+                        </a:rPr>
+                        <a:t>Rate</a:t>
+                      </a:r>
+                      <a:endParaRPr lang="en-US" sz="1050" dirty="0">
+                        <a:latin typeface="Pretendard" charset="0"/>
+                        <a:ea typeface="Pretendard" charset="0"/>
+                        <a:cs typeface="Pretendard" charset="0"/>
+                      </a:endParaRPr>
+                    </a:p>
+                  </a:txBody>
+                  <a:tcPr marL="50800" marR="50800" marT="25400" marB="25400" anchor="ctr">
+                    <a:lnL w="3810" cap="flat" cmpd="sng" algn="ctr">
+                      <a:solidFill>
+                        <a:srgbClr val="CBD5E0"/>
+                      </a:solidFill>
+                      <a:prstDash val="solid"/>
+                      <a:round/>
+                      <a:headEnd type="none" w="med" len="med"/>
+                      <a:tailEnd type="none" w="med" len="med"/>
+                    </a:lnL>
+                    <a:lnR w="3810" cap="flat" cmpd="sng" algn="ctr">
+                      <a:solidFill>
+                        <a:srgbClr val="CBD5E0"/>
+                      </a:solidFill>
+                      <a:prstDash val="solid"/>
+                      <a:round/>
+                      <a:headEnd type="none" w="med" len="med"/>
+                      <a:tailEnd type="none" w="med" len="med"/>
+                    </a:lnR>
+                    <a:lnT w="3810" cap="flat" cmpd="sng" algn="ctr">
+                      <a:solidFill>
+                        <a:srgbClr val="CBD5E0"/>
+                      </a:solidFill>
+                      <a:prstDash val="solid"/>
+                      <a:round/>
+                      <a:headEnd type="none" w="med" len="med"/>
+                      <a:tailEnd type="none" w="med" len="med"/>
+                    </a:lnT>
+                    <a:lnB w="3810" cap="flat" cmpd="sng" algn="ctr">
+                      <a:solidFill>
+                        <a:srgbClr val="CBD5E0"/>
+                      </a:solidFill>
+                      <a:prstDash val="solid"/>
+                      <a:round/>
+                      <a:headEnd type="none" w="med" len="med"/>
+                      <a:tailEnd type="none" w="med" len="med"/>
+                    </a:lnB>
+                    <a:solidFill>
+                      <a:srgbClr val="F7FAFC"/>
+                    </a:solidFill>
+                  </a:tcPr>
+                </a:tc>
+                <a:tc>
+                  <a:txBody>
+                    <a:bodyPr/>
+                    <a:lstStyle/>
+                    <a:p>
+                      <a:pPr indent="0" marL="0">
+                        <a:buNone/>
+                      </a:pPr>
+                      <a:r>
+                        <a:rPr lang="en-US" sz="1050" b="1" dirty="0">
+                          <a:solidFill>
+                            <a:srgbClr val="718096"/>
+                          </a:solidFill>
+                          <a:latin typeface="Pretendard" pitchFamily="34" charset="0"/>
+                          <a:ea typeface="Pretendard" pitchFamily="34" charset="-122"/>
+                          <a:cs typeface="Pretendard" pitchFamily="34" charset="-120"/>
+                        </a:rPr>
+                        <a:t>투자 </a:t>
+                      </a:r>
+                      <a:pPr indent="0" marL="0">
+                        <a:buNone/>
+                      </a:pPr>
+                      <a:r>
+                        <a:rPr lang="en-US" sz="1050" b="1" dirty="0">
+                          <a:solidFill>
+                            <a:srgbClr val="718096"/>
+                          </a:solidFill>
+                          <a:latin typeface="Pretendard" pitchFamily="34" charset="0"/>
+                          <a:ea typeface="Pretendard" pitchFamily="34" charset="-122"/>
+                          <a:cs typeface="Pretendard" pitchFamily="34" charset="-120"/>
+                        </a:rPr>
+                        <a:t>비용</a:t>
                       </a:r>
                       <a:endParaRPr lang="en-US" sz="1050" dirty="0">
                         <a:latin typeface="Pretendard" charset="0"/>
@@ -15115,7 +14034,49 @@
                           <a:ea typeface="Pretendard" pitchFamily="34" charset="-122"/>
                           <a:cs typeface="Pretendard" pitchFamily="34" charset="-120"/>
                         </a:rPr>
-                        <a:t>(임대수익)</a:t>
+                        <a:t>② </a:t>
+                      </a:r>
+                      <a:pPr indent="0" marL="0">
+                        <a:buNone/>
+                      </a:pPr>
+                      <a:r>
+                        <a:rPr lang="en-US" sz="1050" b="1" dirty="0">
+                          <a:solidFill>
+                            <a:srgbClr val="10161F"/>
+                          </a:solidFill>
+                          <a:latin typeface="Pretendard" pitchFamily="34" charset="0"/>
+                          <a:ea typeface="Pretendard" pitchFamily="34" charset="-122"/>
+                          <a:cs typeface="Pretendard" pitchFamily="34" charset="-120"/>
+                        </a:rPr>
+                        <a:t>임대료 </a:t>
+                      </a:r>
+                      <a:pPr indent="0" marL="0">
+                        <a:buNone/>
+                      </a:pPr>
+                      <a:r>
+                        <a:rPr lang="en-US" sz="1050" b="1" dirty="0">
+                          <a:solidFill>
+                            <a:srgbClr val="10161F"/>
+                          </a:solidFill>
+                          <a:latin typeface="Pretendard" pitchFamily="34" charset="0"/>
+                          <a:ea typeface="Pretendard" pitchFamily="34" charset="-122"/>
+                          <a:cs typeface="Pretendard" pitchFamily="34" charset="-120"/>
+                        </a:rPr>
+                        <a:t>현실화 </a:t>
+                      </a:r>
+                      <a:pPr indent="0" marL="0">
+                        <a:buNone/>
+                      </a:pPr>
+                      <a:r>
+                        <a:rPr lang="en-US" sz="1050" b="1" dirty="0">
+                          <a:solidFill>
+                            <a:srgbClr val="10161F"/>
+                          </a:solidFill>
+                          <a:latin typeface="Pretendard" pitchFamily="34" charset="0"/>
+                          <a:ea typeface="Pretendard" pitchFamily="34" charset="-122"/>
+                          <a:cs typeface="Pretendard" pitchFamily="34" charset="-120"/>
+                        </a:rPr>
+                        <a:t>(+5%)</a:t>
                       </a:r>
                       <a:endParaRPr lang="en-US" sz="1050" dirty="0">
                         <a:latin typeface="Pretendard" charset="0"/>
@@ -15183,7 +14144,49 @@
                           <a:ea typeface="Pretendard" pitchFamily="34" charset="-122"/>
                           <a:cs typeface="Pretendard" pitchFamily="34" charset="-120"/>
                         </a:rPr>
-                        <a:t>★★★★★</a:t>
+                        <a:t>+약 </a:t>
+                      </a:r>
+                      <a:pPr indent="0" marL="0">
+                        <a:buNone/>
+                      </a:pPr>
+                      <a:r>
+                        <a:rPr lang="en-US" sz="1050" dirty="0">
+                          <a:solidFill>
+                            <a:srgbClr val="10161F"/>
+                          </a:solidFill>
+                          <a:latin typeface="Pretendard" pitchFamily="34" charset="0"/>
+                          <a:ea typeface="Pretendard" pitchFamily="34" charset="-122"/>
+                          <a:cs typeface="Pretendard" pitchFamily="34" charset="-120"/>
+                        </a:rPr>
+                        <a:t>0.30억 </a:t>
+                      </a:r>
+                      <a:pPr indent="0" marL="0">
+                        <a:buNone/>
+                      </a:pPr>
+                      <a:r>
+                        <a:rPr lang="en-US" sz="1050" dirty="0">
+                          <a:solidFill>
+                            <a:srgbClr val="10161F"/>
+                          </a:solidFill>
+                          <a:latin typeface="Pretendard" pitchFamily="34" charset="0"/>
+                          <a:ea typeface="Pretendard" pitchFamily="34" charset="-122"/>
+                          <a:cs typeface="Pretendard" pitchFamily="34" charset="-120"/>
+                        </a:rPr>
+                        <a:t>원 </a:t>
+                      </a:r>
+                      <a:pPr indent="0" marL="0">
+                        <a:buNone/>
+                      </a:pPr>
+                      <a:r>
+                        <a:rPr lang="en-US" sz="1050" dirty="0">
+                          <a:solidFill>
+                            <a:srgbClr val="10161F"/>
+                          </a:solidFill>
+                          <a:latin typeface="Pretendard" pitchFamily="34" charset="0"/>
+                          <a:ea typeface="Pretendard" pitchFamily="34" charset="-122"/>
+                          <a:cs typeface="Pretendard" pitchFamily="34" charset="-120"/>
+                        </a:rPr>
+                        <a:t>(+5%)</a:t>
                       </a:r>
                       <a:endParaRPr lang="en-US" sz="1050" dirty="0">
                         <a:latin typeface="Pretendard" charset="0"/>
@@ -15251,8 +14254,62 @@
                           <a:ea typeface="Pretendard" pitchFamily="34" charset="-122"/>
                           <a:cs typeface="Pretendard" pitchFamily="34" charset="-120"/>
                         </a:rPr>
-                        <a:t>안정 </a:t>
+                        <a:t>3.86%</a:t>
                       </a:r>
+                      <a:endParaRPr lang="en-US" sz="1050" dirty="0">
+                        <a:latin typeface="Pretendard" charset="0"/>
+                        <a:ea typeface="Pretendard" charset="0"/>
+                        <a:cs typeface="Pretendard" charset="0"/>
+                      </a:endParaRPr>
+                    </a:p>
+                  </a:txBody>
+                  <a:tcPr marL="50800" marR="50800" marT="25400" marB="25400" anchor="ctr">
+                    <a:lnL w="3810" cap="flat" cmpd="sng" algn="ctr">
+                      <a:solidFill>
+                        <a:srgbClr val="CBD5E0"/>
+                      </a:solidFill>
+                      <a:prstDash val="solid"/>
+                      <a:round/>
+                      <a:headEnd type="none" w="med" len="med"/>
+                      <a:tailEnd type="none" w="med" len="med"/>
+                    </a:lnL>
+                    <a:lnR w="3810" cap="flat" cmpd="sng" algn="ctr">
+                      <a:solidFill>
+                        <a:srgbClr val="CBD5E0"/>
+                      </a:solidFill>
+                      <a:prstDash val="solid"/>
+                      <a:round/>
+                      <a:headEnd type="none" w="med" len="med"/>
+                      <a:tailEnd type="none" w="med" len="med"/>
+                    </a:lnR>
+                    <a:lnT w="3810" cap="flat" cmpd="sng" algn="ctr">
+                      <a:solidFill>
+                        <a:srgbClr val="CBD5E0"/>
+                      </a:solidFill>
+                      <a:prstDash val="solid"/>
+                      <a:round/>
+                      <a:headEnd type="none" w="med" len="med"/>
+                      <a:tailEnd type="none" w="med" len="med"/>
+                    </a:lnT>
+                    <a:lnB w="3810" cap="flat" cmpd="sng" algn="ctr">
+                      <a:solidFill>
+                        <a:srgbClr val="CBD5E0"/>
+                      </a:solidFill>
+                      <a:prstDash val="solid"/>
+                      <a:round/>
+                      <a:headEnd type="none" w="med" len="med"/>
+                      <a:tailEnd type="none" w="med" len="med"/>
+                    </a:lnB>
+                    <a:solidFill>
+                      <a:srgbClr val="FFFFFF"/>
+                    </a:solidFill>
+                  </a:tcPr>
+                </a:tc>
+                <a:tc>
+                  <a:txBody>
+                    <a:bodyPr/>
+                    <a:lstStyle/>
+                    <a:p>
                       <a:pPr indent="0" marL="0">
                         <a:buNone/>
                       </a:pPr>
@@ -15265,63 +14322,7 @@
                           <a:ea typeface="Pretendard" pitchFamily="34" charset="-122"/>
                           <a:cs typeface="Pretendard" pitchFamily="34" charset="-120"/>
                         </a:rPr>
-                        <a:t>MD, </a:t>
-                      </a:r>
-                      <a:pPr indent="0" marL="0">
-                        <a:buNone/>
-                      </a:pPr>
-                      <a:r>
-                        <a:rPr lang="en-US" sz="1050" dirty="0">
-                          <a:solidFill>
-                            <a:srgbClr val="10161F"/>
-                          </a:solidFill>
-                          <a:latin typeface="Pretendard" pitchFamily="34" charset="0"/>
-                          <a:ea typeface="Pretendard" pitchFamily="34" charset="-122"/>
-                          <a:cs typeface="Pretendard" pitchFamily="34" charset="-120"/>
-                        </a:rPr>
-                        <a:t>예측 </a:t>
-                      </a:r>
-                      <a:pPr indent="0" marL="0">
-                        <a:buNone/>
-                      </a:pPr>
-                      <a:r>
-                        <a:rPr lang="en-US" sz="1050" dirty="0">
-                          <a:solidFill>
-                            <a:srgbClr val="10161F"/>
-                          </a:solidFill>
-                          <a:latin typeface="Pretendard" pitchFamily="34" charset="0"/>
-                          <a:ea typeface="Pretendard" pitchFamily="34" charset="-122"/>
-                          <a:cs typeface="Pretendard" pitchFamily="34" charset="-120"/>
-                        </a:rPr>
-                        <a:t>가능한 </a:t>
-                      </a:r>
-                      <a:pPr indent="0" marL="0">
-                        <a:buNone/>
-                      </a:pPr>
-                      <a:r>
-                        <a:rPr lang="en-US" sz="1050" dirty="0">
-                          <a:solidFill>
-                            <a:srgbClr val="10161F"/>
-                          </a:solidFill>
-                          <a:latin typeface="Pretendard" pitchFamily="34" charset="0"/>
-                          <a:ea typeface="Pretendard" pitchFamily="34" charset="-122"/>
-                          <a:cs typeface="Pretendard" pitchFamily="34" charset="-120"/>
-                        </a:rPr>
-                        <a:t>월 </a:t>
-                      </a:r>
-                      <a:pPr indent="0" marL="0">
-                        <a:buNone/>
-                      </a:pPr>
-                      <a:r>
-                        <a:rPr lang="en-US" sz="1050" dirty="0">
-                          <a:solidFill>
-                            <a:srgbClr val="10161F"/>
-                          </a:solidFill>
-                          <a:latin typeface="Pretendard" pitchFamily="34" charset="0"/>
-                          <a:ea typeface="Pretendard" pitchFamily="34" charset="-122"/>
-                          <a:cs typeface="Pretendard" pitchFamily="34" charset="-120"/>
-                        </a:rPr>
-                        <a:t>현금흐름</a:t>
+                        <a:t>불필요</a:t>
                       </a:r>
                       <a:endParaRPr lang="en-US" sz="1050" dirty="0">
                         <a:latin typeface="Pretendard" charset="0"/>
@@ -15391,7 +14392,7 @@
                           <a:ea typeface="Pretendard" pitchFamily="34" charset="-122"/>
                           <a:cs typeface="Pretendard" pitchFamily="34" charset="-120"/>
                         </a:rPr>
-                        <a:t>상가 </a:t>
+                        <a:t>③ </a:t>
                       </a:r>
                       <a:pPr indent="0" marL="0">
                         <a:buNone/>
@@ -15405,7 +14406,7 @@
                           <a:ea typeface="Pretendard" pitchFamily="34" charset="-122"/>
                           <a:cs typeface="Pretendard" pitchFamily="34" charset="-120"/>
                         </a:rPr>
-                        <a:t>전문 </a:t>
+                        <a:t>리모델링 </a:t>
                       </a:r>
                       <a:pPr indent="0" marL="0">
                         <a:buNone/>
@@ -15419,7 +14420,7 @@
                           <a:ea typeface="Pretendard" pitchFamily="34" charset="-122"/>
                           <a:cs typeface="Pretendard" pitchFamily="34" charset="-120"/>
                         </a:rPr>
-                        <a:t>임대 </a:t>
+                        <a:t>후 </a:t>
                       </a:r>
                       <a:pPr indent="0" marL="0">
                         <a:buNone/>
@@ -15433,7 +14434,21 @@
                           <a:ea typeface="Pretendard" pitchFamily="34" charset="-122"/>
                           <a:cs typeface="Pretendard" pitchFamily="34" charset="-120"/>
                         </a:rPr>
-                        <a:t>운영사</a:t>
+                        <a:t>임대료 </a:t>
+                      </a:r>
+                      <a:pPr indent="0" marL="0">
+                        <a:buNone/>
+                      </a:pPr>
+                      <a:r>
+                        <a:rPr lang="en-US" sz="1050" b="1" dirty="0">
+                          <a:solidFill>
+                            <a:srgbClr val="10161F"/>
+                          </a:solidFill>
+                          <a:latin typeface="Pretendard" pitchFamily="34" charset="0"/>
+                          <a:ea typeface="Pretendard" pitchFamily="34" charset="-122"/>
+                          <a:cs typeface="Pretendard" pitchFamily="34" charset="-120"/>
+                        </a:rPr>
+                        <a:t>상승</a:t>
                       </a:r>
                       <a:endParaRPr lang="en-US" sz="1050" dirty="0">
                         <a:latin typeface="Pretendard" charset="0"/>
@@ -15501,7 +14516,49 @@
                           <a:ea typeface="Pretendard" pitchFamily="34" charset="-122"/>
                           <a:cs typeface="Pretendard" pitchFamily="34" charset="-120"/>
                         </a:rPr>
-                        <a:t>★★★★</a:t>
+                        <a:t>+약 </a:t>
+                      </a:r>
+                      <a:pPr indent="0" marL="0">
+                        <a:buNone/>
+                      </a:pPr>
+                      <a:r>
+                        <a:rPr lang="en-US" sz="1050" dirty="0">
+                          <a:solidFill>
+                            <a:srgbClr val="10161F"/>
+                          </a:solidFill>
+                          <a:latin typeface="Pretendard" pitchFamily="34" charset="0"/>
+                          <a:ea typeface="Pretendard" pitchFamily="34" charset="-122"/>
+                          <a:cs typeface="Pretendard" pitchFamily="34" charset="-120"/>
+                        </a:rPr>
+                        <a:t>0.49억 </a:t>
+                      </a:r>
+                      <a:pPr indent="0" marL="0">
+                        <a:buNone/>
+                      </a:pPr>
+                      <a:r>
+                        <a:rPr lang="en-US" sz="1050" dirty="0">
+                          <a:solidFill>
+                            <a:srgbClr val="10161F"/>
+                          </a:solidFill>
+                          <a:latin typeface="Pretendard" pitchFamily="34" charset="0"/>
+                          <a:ea typeface="Pretendard" pitchFamily="34" charset="-122"/>
+                          <a:cs typeface="Pretendard" pitchFamily="34" charset="-120"/>
+                        </a:rPr>
+                        <a:t>원 </a:t>
+                      </a:r>
+                      <a:pPr indent="0" marL="0">
+                        <a:buNone/>
+                      </a:pPr>
+                      <a:r>
+                        <a:rPr lang="en-US" sz="1050" dirty="0">
+                          <a:solidFill>
+                            <a:srgbClr val="10161F"/>
+                          </a:solidFill>
+                          <a:latin typeface="Pretendard" pitchFamily="34" charset="0"/>
+                          <a:ea typeface="Pretendard" pitchFamily="34" charset="-122"/>
+                          <a:cs typeface="Pretendard" pitchFamily="34" charset="-120"/>
+                        </a:rPr>
+                        <a:t>(+8%)</a:t>
                       </a:r>
                       <a:endParaRPr lang="en-US" sz="1050" dirty="0">
                         <a:latin typeface="Pretendard" charset="0"/>
@@ -15569,77 +14626,7 @@
                           <a:ea typeface="Pretendard" pitchFamily="34" charset="-122"/>
                           <a:cs typeface="Pretendard" pitchFamily="34" charset="-120"/>
                         </a:rPr>
-                        <a:t>MD </a:t>
-                      </a:r>
-                      <a:pPr indent="0" marL="0">
-                        <a:buNone/>
-                      </a:pPr>
-                      <a:r>
-                        <a:rPr lang="en-US" sz="1050" dirty="0">
-                          <a:solidFill>
-                            <a:srgbClr val="10161F"/>
-                          </a:solidFill>
-                          <a:latin typeface="Pretendard" pitchFamily="34" charset="0"/>
-                          <a:ea typeface="Pretendard" pitchFamily="34" charset="-122"/>
-                          <a:cs typeface="Pretendard" pitchFamily="34" charset="-120"/>
-                        </a:rPr>
-                        <a:t>관리 </a:t>
-                      </a:r>
-                      <a:pPr indent="0" marL="0">
-                        <a:buNone/>
-                      </a:pPr>
-                      <a:r>
-                        <a:rPr lang="en-US" sz="1050" dirty="0">
-                          <a:solidFill>
-                            <a:srgbClr val="10161F"/>
-                          </a:solidFill>
-                          <a:latin typeface="Pretendard" pitchFamily="34" charset="0"/>
-                          <a:ea typeface="Pretendard" pitchFamily="34" charset="-122"/>
-                          <a:cs typeface="Pretendard" pitchFamily="34" charset="-120"/>
-                        </a:rPr>
-                        <a:t>노하우 </a:t>
-                      </a:r>
-                      <a:pPr indent="0" marL="0">
-                        <a:buNone/>
-                      </a:pPr>
-                      <a:r>
-                        <a:rPr lang="en-US" sz="1050" dirty="0">
-                          <a:solidFill>
-                            <a:srgbClr val="10161F"/>
-                          </a:solidFill>
-                          <a:latin typeface="Pretendard" pitchFamily="34" charset="0"/>
-                          <a:ea typeface="Pretendard" pitchFamily="34" charset="-122"/>
-                          <a:cs typeface="Pretendard" pitchFamily="34" charset="-120"/>
-                        </a:rPr>
-                        <a:t>보유 </a:t>
-                      </a:r>
-                      <a:pPr indent="0" marL="0">
-                        <a:buNone/>
-                      </a:pPr>
-                      <a:r>
-                        <a:rPr lang="en-US" sz="1050" dirty="0">
-                          <a:solidFill>
-                            <a:srgbClr val="10161F"/>
-                          </a:solidFill>
-                          <a:latin typeface="Pretendard" pitchFamily="34" charset="0"/>
-                          <a:ea typeface="Pretendard" pitchFamily="34" charset="-122"/>
-                          <a:cs typeface="Pretendard" pitchFamily="34" charset="-120"/>
-                        </a:rPr>
-                        <a:t>시 </a:t>
-                      </a:r>
-                      <a:pPr indent="0" marL="0">
-                        <a:buNone/>
-                      </a:pPr>
-                      <a:r>
-                        <a:rPr lang="en-US" sz="1050" dirty="0">
-                          <a:solidFill>
-                            <a:srgbClr val="10161F"/>
-                          </a:solidFill>
-                          <a:latin typeface="Pretendard" pitchFamily="34" charset="0"/>
-                          <a:ea typeface="Pretendard" pitchFamily="34" charset="-122"/>
-                          <a:cs typeface="Pretendard" pitchFamily="34" charset="-120"/>
-                        </a:rPr>
-                        <a:t>최적</a:t>
+                        <a:t>3.97%</a:t>
                       </a:r>
                       <a:endParaRPr lang="en-US" sz="1050" dirty="0">
                         <a:latin typeface="Pretendard" charset="0"/>
@@ -15687,104 +14674,6 @@
                     </a:lnB>
                     <a:solidFill>
                       <a:srgbClr val="F7FAFC"/>
-                    </a:solidFill>
-                  </a:tcPr>
-                </a:tc>
-              </a:tr>
-              <a:tr h="329184">
-                <a:tc>
-                  <a:txBody>
-                    <a:bodyPr/>
-                    <a:lstStyle/>
-                    <a:p>
-                      <a:pPr indent="0" marL="0">
-                        <a:buNone/>
-                      </a:pPr>
-                      <a:r>
-                        <a:rPr lang="en-US" sz="1050" b="1" dirty="0">
-                          <a:solidFill>
-                            <a:srgbClr val="10161F"/>
-                          </a:solidFill>
-                          <a:latin typeface="Pretendard" pitchFamily="34" charset="0"/>
-                          <a:ea typeface="Pretendard" pitchFamily="34" charset="-122"/>
-                          <a:cs typeface="Pretendard" pitchFamily="34" charset="-120"/>
-                        </a:rPr>
-                        <a:t>프랜차이즈 </a:t>
-                      </a:r>
-                      <a:pPr indent="0" marL="0">
-                        <a:buNone/>
-                      </a:pPr>
-                      <a:r>
-                        <a:rPr lang="en-US" sz="1050" b="1" dirty="0">
-                          <a:solidFill>
-                            <a:srgbClr val="10161F"/>
-                          </a:solidFill>
-                          <a:latin typeface="Pretendard" pitchFamily="34" charset="0"/>
-                          <a:ea typeface="Pretendard" pitchFamily="34" charset="-122"/>
-                          <a:cs typeface="Pretendard" pitchFamily="34" charset="-120"/>
-                        </a:rPr>
-                        <a:t>본사 </a:t>
-                      </a:r>
-                      <a:pPr indent="0" marL="0">
-                        <a:buNone/>
-                      </a:pPr>
-                      <a:r>
-                        <a:rPr lang="en-US" sz="1050" b="1" dirty="0">
-                          <a:solidFill>
-                            <a:srgbClr val="10161F"/>
-                          </a:solidFill>
-                          <a:latin typeface="Pretendard" pitchFamily="34" charset="0"/>
-                          <a:ea typeface="Pretendard" pitchFamily="34" charset="-122"/>
-                          <a:cs typeface="Pretendard" pitchFamily="34" charset="-120"/>
-                        </a:rPr>
-                        <a:t>직매장</a:t>
-                      </a:r>
-                      <a:endParaRPr lang="en-US" sz="1050" dirty="0">
-                        <a:latin typeface="Pretendard" charset="0"/>
-                        <a:ea typeface="Pretendard" charset="0"/>
-                        <a:cs typeface="Pretendard" charset="0"/>
-                      </a:endParaRPr>
-                    </a:p>
-                  </a:txBody>
-                  <a:tcPr marL="50800" marR="50800" marT="25400" marB="25400" anchor="ctr">
-                    <a:lnL w="3810" cap="flat" cmpd="sng" algn="ctr">
-                      <a:solidFill>
-                        <a:srgbClr val="CBD5E0"/>
-                      </a:solidFill>
-                      <a:prstDash val="solid"/>
-                      <a:round/>
-                      <a:headEnd type="none" w="med" len="med"/>
-                      <a:tailEnd type="none" w="med" len="med"/>
-                    </a:lnL>
-                    <a:lnR w="3810" cap="flat" cmpd="sng" algn="ctr">
-                      <a:solidFill>
-                        <a:srgbClr val="CBD5E0"/>
-                      </a:solidFill>
-                      <a:prstDash val="solid"/>
-                      <a:round/>
-                      <a:headEnd type="none" w="med" len="med"/>
-                      <a:tailEnd type="none" w="med" len="med"/>
-                    </a:lnR>
-                    <a:lnT w="3810" cap="flat" cmpd="sng" algn="ctr">
-                      <a:solidFill>
-                        <a:srgbClr val="CBD5E0"/>
-                      </a:solidFill>
-                      <a:prstDash val="solid"/>
-                      <a:round/>
-                      <a:headEnd type="none" w="med" len="med"/>
-                      <a:tailEnd type="none" w="med" len="med"/>
-                    </a:lnT>
-                    <a:lnB w="3810" cap="flat" cmpd="sng" algn="ctr">
-                      <a:solidFill>
-                        <a:srgbClr val="CBD5E0"/>
-                      </a:solidFill>
-                      <a:prstDash val="solid"/>
-                      <a:round/>
-                      <a:headEnd type="none" w="med" len="med"/>
-                      <a:tailEnd type="none" w="med" len="med"/>
-                    </a:lnB>
-                    <a:solidFill>
-                      <a:srgbClr val="FFFFFF"/>
                     </a:solidFill>
                   </a:tcPr>
                 </a:tc>
@@ -15805,75 +14694,7 @@
                           <a:ea typeface="Pretendard" pitchFamily="34" charset="-122"/>
                           <a:cs typeface="Pretendard" pitchFamily="34" charset="-120"/>
                         </a:rPr>
-                        <a:t>★★★</a:t>
-                      </a:r>
-                      <a:endParaRPr lang="en-US" sz="1050" dirty="0">
-                        <a:latin typeface="Pretendard" charset="0"/>
-                        <a:ea typeface="Pretendard" charset="0"/>
-                        <a:cs typeface="Pretendard" charset="0"/>
-                      </a:endParaRPr>
-                    </a:p>
-                  </a:txBody>
-                  <a:tcPr marL="50800" marR="50800" marT="25400" marB="25400" anchor="ctr">
-                    <a:lnL w="3810" cap="flat" cmpd="sng" algn="ctr">
-                      <a:solidFill>
-                        <a:srgbClr val="CBD5E0"/>
-                      </a:solidFill>
-                      <a:prstDash val="solid"/>
-                      <a:round/>
-                      <a:headEnd type="none" w="med" len="med"/>
-                      <a:tailEnd type="none" w="med" len="med"/>
-                    </a:lnL>
-                    <a:lnR w="3810" cap="flat" cmpd="sng" algn="ctr">
-                      <a:solidFill>
-                        <a:srgbClr val="CBD5E0"/>
-                      </a:solidFill>
-                      <a:prstDash val="solid"/>
-                      <a:round/>
-                      <a:headEnd type="none" w="med" len="med"/>
-                      <a:tailEnd type="none" w="med" len="med"/>
-                    </a:lnR>
-                    <a:lnT w="3810" cap="flat" cmpd="sng" algn="ctr">
-                      <a:solidFill>
-                        <a:srgbClr val="CBD5E0"/>
-                      </a:solidFill>
-                      <a:prstDash val="solid"/>
-                      <a:round/>
-                      <a:headEnd type="none" w="med" len="med"/>
-                      <a:tailEnd type="none" w="med" len="med"/>
-                    </a:lnT>
-                    <a:lnB w="3810" cap="flat" cmpd="sng" algn="ctr">
-                      <a:solidFill>
-                        <a:srgbClr val="CBD5E0"/>
-                      </a:solidFill>
-                      <a:prstDash val="solid"/>
-                      <a:round/>
-                      <a:headEnd type="none" w="med" len="med"/>
-                      <a:tailEnd type="none" w="med" len="med"/>
-                    </a:lnB>
-                    <a:solidFill>
-                      <a:srgbClr val="FFFFFF"/>
-                    </a:solidFill>
-                  </a:tcPr>
-                </a:tc>
-                <a:tc>
-                  <a:txBody>
-                    <a:bodyPr/>
-                    <a:lstStyle/>
-                    <a:p>
-                      <a:pPr indent="0" marL="0">
-                        <a:buNone/>
-                      </a:pPr>
-                      <a:r>
-                        <a:rPr lang="en-US" sz="1050" dirty="0">
-                          <a:solidFill>
-                            <a:srgbClr val="10161F"/>
-                          </a:solidFill>
-                          <a:latin typeface="Pretendard" pitchFamily="34" charset="0"/>
-                          <a:ea typeface="Pretendard" pitchFamily="34" charset="-122"/>
-                          <a:cs typeface="Pretendard" pitchFamily="34" charset="-120"/>
-                        </a:rPr>
-                        <a:t>브랜드 </a:t>
+                        <a:t>약 </a:t>
                       </a:r>
                       <a:pPr indent="0" marL="0">
                         <a:buNone/>
@@ -15887,7 +14708,7 @@
                           <a:ea typeface="Pretendard" pitchFamily="34" charset="-122"/>
                           <a:cs typeface="Pretendard" pitchFamily="34" charset="-120"/>
                         </a:rPr>
-                        <a:t>노출 </a:t>
+                        <a:t>15.00억 </a:t>
                       </a:r>
                       <a:pPr indent="0" marL="0">
                         <a:buNone/>
@@ -15901,49 +14722,7 @@
                           <a:ea typeface="Pretendard" pitchFamily="34" charset="-122"/>
                           <a:cs typeface="Pretendard" pitchFamily="34" charset="-120"/>
                         </a:rPr>
-                        <a:t>+ </a:t>
-                      </a:r>
-                      <a:pPr indent="0" marL="0">
-                        <a:buNone/>
-                      </a:pPr>
-                      <a:r>
-                        <a:rPr lang="en-US" sz="1050" dirty="0">
-                          <a:solidFill>
-                            <a:srgbClr val="10161F"/>
-                          </a:solidFill>
-                          <a:latin typeface="Pretendard" pitchFamily="34" charset="0"/>
-                          <a:ea typeface="Pretendard" pitchFamily="34" charset="-122"/>
-                          <a:cs typeface="Pretendard" pitchFamily="34" charset="-120"/>
-                        </a:rPr>
-                        <a:t>직영 </a:t>
-                      </a:r>
-                      <a:pPr indent="0" marL="0">
-                        <a:buNone/>
-                      </a:pPr>
-                      <a:r>
-                        <a:rPr lang="en-US" sz="1050" dirty="0">
-                          <a:solidFill>
-                            <a:srgbClr val="10161F"/>
-                          </a:solidFill>
-                          <a:latin typeface="Pretendard" pitchFamily="34" charset="0"/>
-                          <a:ea typeface="Pretendard" pitchFamily="34" charset="-122"/>
-                          <a:cs typeface="Pretendard" pitchFamily="34" charset="-120"/>
-                        </a:rPr>
-                        <a:t>운영 </a:t>
-                      </a:r>
-                      <a:pPr indent="0" marL="0">
-                        <a:buNone/>
-                      </a:pPr>
-                      <a:r>
-                        <a:rPr lang="en-US" sz="1050" dirty="0">
-                          <a:solidFill>
-                            <a:srgbClr val="10161F"/>
-                          </a:solidFill>
-                          <a:latin typeface="Pretendard" pitchFamily="34" charset="0"/>
-                          <a:ea typeface="Pretendard" pitchFamily="34" charset="-122"/>
-                          <a:cs typeface="Pretendard" pitchFamily="34" charset="-120"/>
-                        </a:rPr>
-                        <a:t>가능</a:t>
+                        <a:t>원</a:t>
                       </a:r>
                       <a:endParaRPr lang="en-US" sz="1050" dirty="0">
                         <a:latin typeface="Pretendard" charset="0"/>
@@ -15990,7 +14769,7 @@
                       <a:tailEnd type="none" w="med" len="med"/>
                     </a:lnB>
                     <a:solidFill>
-                      <a:srgbClr val="FFFFFF"/>
+                      <a:srgbClr val="F7FAFC"/>
                     </a:solidFill>
                   </a:tcPr>
                 </a:tc>
@@ -16001,13 +14780,13 @@
       </p:graphicFrame>
       <p:sp>
         <p:nvSpPr>
-          <p:cNvPr id="29" name="Shape 26"/>
-          <p:cNvSpPr/>
-          <p:nvPr/>
-        </p:nvSpPr>
-        <p:spPr>
-          <a:xfrm>
-            <a:off x="566928" y="5678424"/>
+          <p:cNvPr id="8" name="Shape 5"/>
+          <p:cNvSpPr/>
+          <p:nvPr/>
+        </p:nvSpPr>
+        <p:spPr>
+          <a:xfrm>
+            <a:off x="566928" y="5349240"/>
             <a:ext cx="11057839" cy="804672"/>
           </a:xfrm>
           <a:prstGeom prst="roundRect">
@@ -16028,13 +14807,13 @@
       </p:sp>
       <p:sp>
         <p:nvSpPr>
-          <p:cNvPr id="30" name="Text 27"/>
-          <p:cNvSpPr/>
-          <p:nvPr/>
-        </p:nvSpPr>
-        <p:spPr>
-          <a:xfrm>
-            <a:off x="749808" y="5788152"/>
+          <p:cNvPr id="9" name="Text 6"/>
+          <p:cNvSpPr/>
+          <p:nvPr/>
+        </p:nvSpPr>
+        <p:spPr>
+          <a:xfrm>
+            <a:off x="749808" y="5458968"/>
             <a:ext cx="1691640" cy="256032"/>
           </a:xfrm>
           <a:prstGeom prst="rect">
@@ -16067,13 +14846,13 @@
       </p:sp>
       <p:sp>
         <p:nvSpPr>
-          <p:cNvPr id="31" name="Text 28"/>
-          <p:cNvSpPr/>
-          <p:nvPr/>
-        </p:nvSpPr>
-        <p:spPr>
-          <a:xfrm>
-            <a:off x="2487168" y="5751576"/>
+          <p:cNvPr id="10" name="Text 7"/>
+          <p:cNvSpPr/>
+          <p:nvPr/>
+        </p:nvSpPr>
+        <p:spPr>
+          <a:xfrm>
+            <a:off x="2487168" y="5422392"/>
             <a:ext cx="8954719" cy="658368"/>
           </a:xfrm>
           <a:prstGeom prst="rect">
@@ -16101,7 +14880,7 @@
                 <a:ea typeface="Pretendard" pitchFamily="34" charset="-122"/>
                 <a:cs typeface="Pretendard" pitchFamily="34" charset="-120"/>
               </a:rPr>
-              <a:t>[참고] 종합 가치 제안: 서초권역 핵심 상권의 희소성 높은 우량 자산으로, 안정적인 임대 수익과 향후 공법상 밸류업 및 권역 지가 상승에 따른 자본 이득(Capital Gain)을 동시에 실현할 수 있는 전략적 매물입니다.</a:t>
+              <a:t>{"ok":true,"mocked":true,"extractedFields":{"area_signal":"역삼","asset_type":"오피스빌딩","price_band":"300억","size_signal":"3000평(약 9917.4㎡)"},"extractedFacts":{"region":"역삼","exactAddressCandidate":"역삼동 742-1","assetType":"오피스빌딩","priceText":"300억","sizeText":"3000평(약 9917.4㎡)","currentUse":"오피스","currentUseSignal":"근린생활시설","leaseSignal":"임대중","vacancySignal":"공실없음","tenantNames":["쿠팡","네이버"],"unitRentTexts":["301호: 1500만"],"sellerMotivationText":"자산 효율화","brokerNotes":["초역세권 매물"]},"detectedSensitiveFields":["exact_address","tenant_name"],"ambiguousFields":[],"warnings":[],"areaSignal":"역삼","assetType":"오피스빌딩","priceBand":"300억","sizeSignal":"3000평(약 9917.4㎡)","dealType":"매각","buildingName":"역삼 센트럴타워","exactAddress":"역삼동 742-1","totalFloorArea":9917.3,"buildYear":2015,"currentUseSignal":"근린생활시설","vacancySignal":"공실 없음","fitSummary":"초역세권 근생 빌딩으로 시행/사옥 매입에 최적화","cautionSummary":"주요 임차 업종 만기 조율 필요","hiddenFields":["exact_address","seller_motivation"],"confidence":{"areaSignal":"confirmed","assetType":"confirmed","priceBand":"ai_hypothesis","fitSummary":"ai_hypothesis"},"missingData":["sizeSignal"],"boundaryNote":"본 자료는 실거래 통계 기반 참고치입니다.","buyerType":"법인 사옥형","budgetRange":{"min":50,"max":80,"display":"50억~80억"},"preferredRegions":["강남","성수"],"assetTypes":["꼬마빌딩","사옥용"],"purchasePurpose":"사옥용 매입","mustHave":["초역세권","주차"],"niceToHave":["테라스","루프탑"],"riskTolerance":"medium","financingNote":"자본금 50% 준비","missingQuestions":["구체적인 입주 시기가 언제인가요?","선호하는 수익률이 있나요?"],"privacyNotes":["연락처 비공개"],"fitReasons":["매수자 예산(50-80억)에 부합하는 매물입니다.","요청하신 성수/강남 권역에 해당합니다."],"cautionReasons":["요청한 용도와 달리 명도 협의가 다소 필요합니다."],"recommendedNextAction":"현장 답사 제안","kakaoMessage":"안녕하세요! 요청하신 조건에 부합하는 추천 매물이 있어 안내해 드립니다. 확인해보시고 피드백 부탁드립니다.","title":"강남 역삼역 초역세권 오피스 사옥용 빌딩 매각","shortSummary":"역삼역 도보 5분 거리의 준신축급 대형 오피스빌딩입니다.","dealPoints":["초역세권","사옥 최적"],"cautionPoints":["명도 조율 필요"],"hiddenInfoNotice":["보증금 및 지번은 인가 후 확인 가능"],"gateMessage":"G1 등급 등록이 필요합니다.","kakaoText":"강남 역삼역 오피스 빌딩 매각 안내입니다.","exactUnitCandidate":"101호","floor":"1층","areaSqmText":"150㎡","spaceType":"office","depositText":"5000만","monthlyRentText":"400만","maintenanceFeeText":"50만","availableFromText":"즉시입주","leaseTermMonthsText":"24","incentivesText":"렌트프리 2개월","restrictions":[],"landlordIdentity":"김성수","currentTenant":"스타트업","vacancyReason":"이전 확장","rentNegotiation":"협의 가능","region":"성수동","areaSqm":150,"deposit":5000,"monthlyRent":400,"maintenanceFee":50,"availableFrom":"즉시입주","leaseTermMonths":24,"incentives":{"rentFreeMonths":2,"interiorSupport":"일부 인테리어 지원","freeRentDetail":"렌트프리 2개월 지원"},"shortSummaryLease":"성수역 도보 5분 거리 1층 리테일 상가 매물입니다."}</a:t>
             </a:r>
             <a:endParaRPr lang="en-US" sz="1100" dirty="0"/>
           </a:p>
@@ -16109,7 +14888,7 @@
       </p:sp>
       <p:sp>
         <p:nvSpPr>
-          <p:cNvPr id="32" name="Text 29"/>
+          <p:cNvPr id="11" name="Text 8"/>
           <p:cNvSpPr/>
           <p:nvPr/>
         </p:nvSpPr>
@@ -16148,7 +14927,7 @@
       </p:sp>
       <p:sp>
         <p:nvSpPr>
-          <p:cNvPr id="33" name="Text 30"/>
+          <p:cNvPr id="12" name="Text 9"/>
           <p:cNvSpPr/>
           <p:nvPr/>
         </p:nvSpPr>

--- a/docs/test/stress/e2e-outputs/income_case01_seocho_medical_basic.pptx
+++ b/docs/test/stress/e2e-outputs/income_case01_seocho_medical_basic.pptx
@@ -4225,7 +4225,7 @@
                 <a:ea typeface="Pretendard" pitchFamily="34" charset="-122"/>
                 <a:cs typeface="Pretendard" pitchFamily="34" charset="-120"/>
               </a:rPr>
-              <a:t>약 68.5억 원</a:t>
+              <a:t>약 77.6억 원</a:t>
             </a:r>
             <a:endParaRPr lang="en-US" sz="2000" dirty="0"/>
           </a:p>
@@ -5596,7 +5596,7 @@
                 <a:ea typeface="Pretendard" pitchFamily="34" charset="-122"/>
                 <a:cs typeface="Pretendard" pitchFamily="34" charset="-120"/>
               </a:rPr>
-              <a:t>소재지</a:t>
+              <a:t>{"ok"</a:t>
             </a:r>
             <a:endParaRPr lang="en-US" sz="1400" dirty="0"/>
           </a:p>
@@ -5638,7 +5638,7 @@
                 <a:ea typeface="Pretendard" pitchFamily="34" charset="-122"/>
                 <a:cs typeface="Pretendard" pitchFamily="34" charset="-120"/>
               </a:rPr>
-              <a:t>서초권역</a:t>
+              <a:t>true,"mocked":true,"extractedFields":{"area_signal":"역삼","asset_type":"오피스빌딩","price_band":"300억","size_signal":"3000평(약 9917.4㎡)"},"extractedFacts":{"region":"역삼","exactAddressCandidate":"역삼동 742-1","assetType":"오피스빌딩","priceText":"300억","sizeText":"3000평(약 9917.4㎡)","currentUse":"오피스","currentUseSignal":"근린생활시설","leaseSignal":"임대중","vacancySignal":"공실없음","tenantNames":"쿠팡","네이버","unitRentTexts":"301호: 1500만","sellerMotivationText":"자산 효율화","brokerNotes":"초역세권 매물"},"detectedSensitiveFields":"exact_address","tenant_name","ambiguousFields":,"warnings":,"areaSignal":"역삼","assetType":"오피스빌딩","priceBand":"300억","sizeSignal":"3000평(약 9917.4㎡)","dealType":"매각","buildingName":"역삼 센트럴타워","exactAddress":"역삼동 742-1","totalFloorArea":9917.3,"buildYear":2015,"currentUseSignal":"근린생활시설","vacancySignal":"공실 없음","fitSummary":"초역세권 근생 빌딩으로 시행/사옥 매입에 최적화","cautionSummary":"주요 임차 업종 만기 조율 필요","hiddenFields":"exact_address","seller_motivation","confidence":{"areaSignal":"confirmed","assetType":"confirmed","priceBand":"ai_hypothesis","fitSummary":"ai_hypothesis"},"missingData":"sizeSignal","boundaryNote":"본 자료는 실거래 통계 기반 참고치입니다.","buyerType":"법인 사옥형","budgetRange":{"min":50,"max":80,"display":"50억~80억"},"preferredRegions":"강남","성수","assetTypes":"꼬마빌딩","사옥용","purchasePurpose":"사옥용 매입","mustHave":"초역세권","주차","niceToHave":"테라스","루프탑","riskTolerance":"medium","financingNote":"자본금 50% 준비","missingQuestions":"구체적인 입주 시기가 언제인가요?","선호하는 수익률이 있나요?","privacyNotes":"연락처 비공개","fitReasons":"매수자 예산(50-80억)에 부합하는 매물입니다.","요청하신 성수/강남 권역에 해당합니다.","cautionReasons":"요청한 용도와 달리 명도 협의가 다소 필요합니다.","recommendedNextAction":"현장 답사 제안","kakaoMessage":"안녕하세요! 요청하신 조건에 부합하는 추천 매물이 있어 안내해 드립니다. 확인해보시고 피드백 부탁드립니다.","title":"강남 역삼역 초역세권 오피스 사옥용 빌딩 매각","shortSummary":"역삼역 도보 5분 거리의 준신축급 대형 오피스빌딩입니다.","dealPoints":"초역세권","사옥 최적","cautionPoints":"명도 조율 필요","hiddenInfoNotice":"보증금 및 지번은 인가 후 확인 가능","gateMessage":"G1 등급 등록이 필요합니다.","kakaoText":"강남 역삼역 오피스 빌딩 매각 안내입니다.","exactUnitCandidate":"101호","floor":"1층","areaSqmText":"150㎡","spaceType":"office","depositText":"5000만","monthlyRentText":"400만","maintenanceFeeText":"50만","availableFromText":"즉시입주","leaseTermMonthsText":"24","incentivesText":"렌트프리 2개월","restrictions":,"landlordIdentity":"김성수","currentTenant":"스타트업","vacancyReason":"이전 확장","rentNegotiation":"협의 가능","region":"성수동","areaSqm":150,"deposit":5000,"monthlyRent":400,"maintenanceFee":50,"availableFrom":"즉시입주","leaseTermMonths":24,"incentives":{"rentFreeMonths":2,"interiorSupport":"일부 인테리어 지원","freeRentDetail":"렌트프리 2개월 지원"},"shortSummaryLease":"성수역 도보 5분 거리 1층 리테일 상가 매물입니다."}</a:t>
             </a:r>
             <a:endParaRPr lang="en-US" sz="1400" dirty="0"/>
           </a:p>
@@ -5647,862 +5647,6 @@
       <p:sp>
         <p:nvSpPr>
           <p:cNvPr id="9" name="Shape 7"/>
-          <p:cNvSpPr/>
-          <p:nvPr/>
-        </p:nvSpPr>
-        <p:spPr>
-          <a:xfrm>
-            <a:off x="566928" y="2048256"/>
-            <a:ext cx="6858000" cy="0"/>
-          </a:xfrm>
-          <a:prstGeom prst="line">
-            <a:avLst/>
-          </a:prstGeom>
-          <a:noFill/>
-          <a:ln w="3810">
-            <a:solidFill>
-              <a:srgbClr val="CBD5E0"/>
-            </a:solidFill>
-            <a:prstDash val="solid"/>
-          </a:ln>
-        </p:spPr>
-      </p:sp>
-      <p:sp>
-        <p:nvSpPr>
-          <p:cNvPr id="10" name="Text 8"/>
-          <p:cNvSpPr/>
-          <p:nvPr/>
-        </p:nvSpPr>
-        <p:spPr>
-          <a:xfrm>
-            <a:off x="566928" y="2048256"/>
-            <a:ext cx="2606040" cy="402336"/>
-          </a:xfrm>
-          <a:prstGeom prst="rect">
-            <a:avLst/>
-          </a:prstGeom>
-          <a:noFill/>
-          <a:ln/>
-        </p:spPr>
-        <p:txBody>
-          <a:bodyPr wrap="square" lIns="0" tIns="0" rIns="0" bIns="0" rtlCol="0" anchor="ctr"/>
-          <a:lstStyle/>
-          <a:p>
-            <a:pPr indent="0" marL="0">
-              <a:lnSpc>
-                <a:spcPct val="120000"/>
-              </a:lnSpc>
-              <a:buNone/>
-            </a:pPr>
-            <a:r>
-              <a:rPr lang="en-US" sz="1400" dirty="0">
-                <a:solidFill>
-                  <a:srgbClr val="718096"/>
-                </a:solidFill>
-                <a:latin typeface="Pretendard" pitchFamily="34" charset="0"/>
-                <a:ea typeface="Pretendard" pitchFamily="34" charset="-122"/>
-                <a:cs typeface="Pretendard" pitchFamily="34" charset="-120"/>
-              </a:rPr>
-              <a:t>주요 용도</a:t>
-            </a:r>
-            <a:endParaRPr lang="en-US" sz="1400" dirty="0"/>
-          </a:p>
-        </p:txBody>
-      </p:sp>
-      <p:sp>
-        <p:nvSpPr>
-          <p:cNvPr id="11" name="Text 9"/>
-          <p:cNvSpPr/>
-          <p:nvPr/>
-        </p:nvSpPr>
-        <p:spPr>
-          <a:xfrm>
-            <a:off x="3172968" y="2048256"/>
-            <a:ext cx="4251960" cy="402336"/>
-          </a:xfrm>
-          <a:prstGeom prst="rect">
-            <a:avLst/>
-          </a:prstGeom>
-          <a:noFill/>
-          <a:ln/>
-        </p:spPr>
-        <p:txBody>
-          <a:bodyPr wrap="square" lIns="0" tIns="0" rIns="0" bIns="0" rtlCol="0" anchor="ctr"/>
-          <a:lstStyle/>
-          <a:p>
-            <a:pPr indent="0" marL="0">
-              <a:lnSpc>
-                <a:spcPct val="120000"/>
-              </a:lnSpc>
-              <a:buNone/>
-            </a:pPr>
-            <a:r>
-              <a:rPr lang="en-US" sz="1400" b="1" dirty="0">
-                <a:solidFill>
-                  <a:srgbClr val="10161F"/>
-                </a:solidFill>
-                <a:latin typeface="Pretendard" pitchFamily="34" charset="0"/>
-                <a:ea typeface="Pretendard" pitchFamily="34" charset="-122"/>
-                <a:cs typeface="Pretendard" pitchFamily="34" charset="-120"/>
-              </a:rPr>
-              <a:t>근린생활시설</a:t>
-            </a:r>
-            <a:endParaRPr lang="en-US" sz="1400" dirty="0"/>
-          </a:p>
-        </p:txBody>
-      </p:sp>
-      <p:sp>
-        <p:nvSpPr>
-          <p:cNvPr id="12" name="Shape 10"/>
-          <p:cNvSpPr/>
-          <p:nvPr/>
-        </p:nvSpPr>
-        <p:spPr>
-          <a:xfrm>
-            <a:off x="566928" y="2450592"/>
-            <a:ext cx="6858000" cy="0"/>
-          </a:xfrm>
-          <a:prstGeom prst="line">
-            <a:avLst/>
-          </a:prstGeom>
-          <a:noFill/>
-          <a:ln w="3810">
-            <a:solidFill>
-              <a:srgbClr val="CBD5E0"/>
-            </a:solidFill>
-            <a:prstDash val="solid"/>
-          </a:ln>
-        </p:spPr>
-      </p:sp>
-      <p:sp>
-        <p:nvSpPr>
-          <p:cNvPr id="13" name="Text 11"/>
-          <p:cNvSpPr/>
-          <p:nvPr/>
-        </p:nvSpPr>
-        <p:spPr>
-          <a:xfrm>
-            <a:off x="566928" y="2450592"/>
-            <a:ext cx="2606040" cy="402336"/>
-          </a:xfrm>
-          <a:prstGeom prst="rect">
-            <a:avLst/>
-          </a:prstGeom>
-          <a:noFill/>
-          <a:ln/>
-        </p:spPr>
-        <p:txBody>
-          <a:bodyPr wrap="square" lIns="0" tIns="0" rIns="0" bIns="0" rtlCol="0" anchor="ctr"/>
-          <a:lstStyle/>
-          <a:p>
-            <a:pPr indent="0" marL="0">
-              <a:lnSpc>
-                <a:spcPct val="120000"/>
-              </a:lnSpc>
-              <a:buNone/>
-            </a:pPr>
-            <a:r>
-              <a:rPr lang="en-US" sz="1400" dirty="0">
-                <a:solidFill>
-                  <a:srgbClr val="718096"/>
-                </a:solidFill>
-                <a:latin typeface="Pretendard" pitchFamily="34" charset="0"/>
-                <a:ea typeface="Pretendard" pitchFamily="34" charset="-122"/>
-                <a:cs typeface="Pretendard" pitchFamily="34" charset="-120"/>
-              </a:rPr>
-              <a:t>연면적</a:t>
-            </a:r>
-            <a:endParaRPr lang="en-US" sz="1400" dirty="0"/>
-          </a:p>
-        </p:txBody>
-      </p:sp>
-      <p:sp>
-        <p:nvSpPr>
-          <p:cNvPr id="14" name="Text 12"/>
-          <p:cNvSpPr/>
-          <p:nvPr/>
-        </p:nvSpPr>
-        <p:spPr>
-          <a:xfrm>
-            <a:off x="3172968" y="2450592"/>
-            <a:ext cx="4251960" cy="402336"/>
-          </a:xfrm>
-          <a:prstGeom prst="rect">
-            <a:avLst/>
-          </a:prstGeom>
-          <a:noFill/>
-          <a:ln/>
-        </p:spPr>
-        <p:txBody>
-          <a:bodyPr wrap="square" lIns="0" tIns="0" rIns="0" bIns="0" rtlCol="0" anchor="ctr"/>
-          <a:lstStyle/>
-          <a:p>
-            <a:pPr indent="0" marL="0">
-              <a:lnSpc>
-                <a:spcPct val="120000"/>
-              </a:lnSpc>
-              <a:buNone/>
-            </a:pPr>
-            <a:r>
-              <a:rPr lang="en-US" sz="1400" b="1" dirty="0">
-                <a:solidFill>
-                  <a:srgbClr val="10161F"/>
-                </a:solidFill>
-                <a:latin typeface="Pretendard" pitchFamily="34" charset="0"/>
-                <a:ea typeface="Pretendard" pitchFamily="34" charset="-122"/>
-                <a:cs typeface="Pretendard" pitchFamily="34" charset="-120"/>
-              </a:rPr>
-              <a:t>5,000㎡ (약 1513평(약 5001.7㎡))</a:t>
-            </a:r>
-            <a:endParaRPr lang="en-US" sz="1400" dirty="0"/>
-          </a:p>
-        </p:txBody>
-      </p:sp>
-      <p:sp>
-        <p:nvSpPr>
-          <p:cNvPr id="15" name="Shape 13"/>
-          <p:cNvSpPr/>
-          <p:nvPr/>
-        </p:nvSpPr>
-        <p:spPr>
-          <a:xfrm>
-            <a:off x="566928" y="2852928"/>
-            <a:ext cx="6858000" cy="0"/>
-          </a:xfrm>
-          <a:prstGeom prst="line">
-            <a:avLst/>
-          </a:prstGeom>
-          <a:noFill/>
-          <a:ln w="3810">
-            <a:solidFill>
-              <a:srgbClr val="CBD5E0"/>
-            </a:solidFill>
-            <a:prstDash val="solid"/>
-          </a:ln>
-        </p:spPr>
-      </p:sp>
-      <p:sp>
-        <p:nvSpPr>
-          <p:cNvPr id="16" name="Text 14"/>
-          <p:cNvSpPr/>
-          <p:nvPr/>
-        </p:nvSpPr>
-        <p:spPr>
-          <a:xfrm>
-            <a:off x="566928" y="2852928"/>
-            <a:ext cx="2606040" cy="402336"/>
-          </a:xfrm>
-          <a:prstGeom prst="rect">
-            <a:avLst/>
-          </a:prstGeom>
-          <a:noFill/>
-          <a:ln/>
-        </p:spPr>
-        <p:txBody>
-          <a:bodyPr wrap="square" lIns="0" tIns="0" rIns="0" bIns="0" rtlCol="0" anchor="ctr"/>
-          <a:lstStyle/>
-          <a:p>
-            <a:pPr indent="0" marL="0">
-              <a:lnSpc>
-                <a:spcPct val="120000"/>
-              </a:lnSpc>
-              <a:buNone/>
-            </a:pPr>
-            <a:r>
-              <a:rPr lang="en-US" sz="1400" dirty="0">
-                <a:solidFill>
-                  <a:srgbClr val="718096"/>
-                </a:solidFill>
-                <a:latin typeface="Pretendard" pitchFamily="34" charset="0"/>
-                <a:ea typeface="Pretendard" pitchFamily="34" charset="-122"/>
-                <a:cs typeface="Pretendard" pitchFamily="34" charset="-120"/>
-              </a:rPr>
-              <a:t>대지면적</a:t>
-            </a:r>
-            <a:endParaRPr lang="en-US" sz="1400" dirty="0"/>
-          </a:p>
-        </p:txBody>
-      </p:sp>
-      <p:sp>
-        <p:nvSpPr>
-          <p:cNvPr id="17" name="Text 15"/>
-          <p:cNvSpPr/>
-          <p:nvPr/>
-        </p:nvSpPr>
-        <p:spPr>
-          <a:xfrm>
-            <a:off x="3172968" y="2852928"/>
-            <a:ext cx="4251960" cy="402336"/>
-          </a:xfrm>
-          <a:prstGeom prst="rect">
-            <a:avLst/>
-          </a:prstGeom>
-          <a:noFill/>
-          <a:ln/>
-        </p:spPr>
-        <p:txBody>
-          <a:bodyPr wrap="square" lIns="0" tIns="0" rIns="0" bIns="0" rtlCol="0" anchor="ctr"/>
-          <a:lstStyle/>
-          <a:p>
-            <a:pPr indent="0" marL="0">
-              <a:lnSpc>
-                <a:spcPct val="120000"/>
-              </a:lnSpc>
-              <a:buNone/>
-            </a:pPr>
-            <a:r>
-              <a:rPr lang="en-US" sz="1400" b="1" dirty="0">
-                <a:solidFill>
-                  <a:srgbClr val="10161F"/>
-                </a:solidFill>
-                <a:latin typeface="Pretendard" pitchFamily="34" charset="0"/>
-                <a:ea typeface="Pretendard" pitchFamily="34" charset="-122"/>
-                <a:cs typeface="Pretendard" pitchFamily="34" charset="-120"/>
-              </a:rPr>
-              <a:t>1,000㎡ (약 303평(약 1001.7㎡))</a:t>
-            </a:r>
-            <a:endParaRPr lang="en-US" sz="1400" dirty="0"/>
-          </a:p>
-        </p:txBody>
-      </p:sp>
-      <p:sp>
-        <p:nvSpPr>
-          <p:cNvPr id="18" name="Shape 16"/>
-          <p:cNvSpPr/>
-          <p:nvPr/>
-        </p:nvSpPr>
-        <p:spPr>
-          <a:xfrm>
-            <a:off x="566928" y="3255264"/>
-            <a:ext cx="6858000" cy="0"/>
-          </a:xfrm>
-          <a:prstGeom prst="line">
-            <a:avLst/>
-          </a:prstGeom>
-          <a:noFill/>
-          <a:ln w="3810">
-            <a:solidFill>
-              <a:srgbClr val="CBD5E0"/>
-            </a:solidFill>
-            <a:prstDash val="solid"/>
-          </a:ln>
-        </p:spPr>
-      </p:sp>
-      <p:sp>
-        <p:nvSpPr>
-          <p:cNvPr id="19" name="Text 17"/>
-          <p:cNvSpPr/>
-          <p:nvPr/>
-        </p:nvSpPr>
-        <p:spPr>
-          <a:xfrm>
-            <a:off x="566928" y="3255264"/>
-            <a:ext cx="2606040" cy="402336"/>
-          </a:xfrm>
-          <a:prstGeom prst="rect">
-            <a:avLst/>
-          </a:prstGeom>
-          <a:noFill/>
-          <a:ln/>
-        </p:spPr>
-        <p:txBody>
-          <a:bodyPr wrap="square" lIns="0" tIns="0" rIns="0" bIns="0" rtlCol="0" anchor="ctr"/>
-          <a:lstStyle/>
-          <a:p>
-            <a:pPr indent="0" marL="0">
-              <a:lnSpc>
-                <a:spcPct val="120000"/>
-              </a:lnSpc>
-              <a:buNone/>
-            </a:pPr>
-            <a:r>
-              <a:rPr lang="en-US" sz="1400" dirty="0">
-                <a:solidFill>
-                  <a:srgbClr val="718096"/>
-                </a:solidFill>
-                <a:latin typeface="Pretendard" pitchFamily="34" charset="0"/>
-                <a:ea typeface="Pretendard" pitchFamily="34" charset="-122"/>
-                <a:cs typeface="Pretendard" pitchFamily="34" charset="-120"/>
-              </a:rPr>
-              <a:t>용도지역</a:t>
-            </a:r>
-            <a:endParaRPr lang="en-US" sz="1400" dirty="0"/>
-          </a:p>
-        </p:txBody>
-      </p:sp>
-      <p:sp>
-        <p:nvSpPr>
-          <p:cNvPr id="20" name="Text 18"/>
-          <p:cNvSpPr/>
-          <p:nvPr/>
-        </p:nvSpPr>
-        <p:spPr>
-          <a:xfrm>
-            <a:off x="3172968" y="3255264"/>
-            <a:ext cx="4251960" cy="402336"/>
-          </a:xfrm>
-          <a:prstGeom prst="rect">
-            <a:avLst/>
-          </a:prstGeom>
-          <a:noFill/>
-          <a:ln/>
-        </p:spPr>
-        <p:txBody>
-          <a:bodyPr wrap="square" lIns="0" tIns="0" rIns="0" bIns="0" rtlCol="0" anchor="ctr"/>
-          <a:lstStyle/>
-          <a:p>
-            <a:pPr indent="0" marL="0">
-              <a:lnSpc>
-                <a:spcPct val="120000"/>
-              </a:lnSpc>
-              <a:buNone/>
-            </a:pPr>
-            <a:r>
-              <a:rPr lang="en-US" sz="1400" b="1" dirty="0">
-                <a:solidFill>
-                  <a:srgbClr val="10161F"/>
-                </a:solidFill>
-                <a:latin typeface="Pretendard" pitchFamily="34" charset="0"/>
-                <a:ea typeface="Pretendard" pitchFamily="34" charset="-122"/>
-                <a:cs typeface="Pretendard" pitchFamily="34" charset="-120"/>
-              </a:rPr>
-              <a:t>일반상업지역</a:t>
-            </a:r>
-            <a:endParaRPr lang="en-US" sz="1400" dirty="0"/>
-          </a:p>
-        </p:txBody>
-      </p:sp>
-      <p:sp>
-        <p:nvSpPr>
-          <p:cNvPr id="21" name="Shape 19"/>
-          <p:cNvSpPr/>
-          <p:nvPr/>
-        </p:nvSpPr>
-        <p:spPr>
-          <a:xfrm>
-            <a:off x="566928" y="3657600"/>
-            <a:ext cx="6858000" cy="0"/>
-          </a:xfrm>
-          <a:prstGeom prst="line">
-            <a:avLst/>
-          </a:prstGeom>
-          <a:noFill/>
-          <a:ln w="3810">
-            <a:solidFill>
-              <a:srgbClr val="CBD5E0"/>
-            </a:solidFill>
-            <a:prstDash val="solid"/>
-          </a:ln>
-        </p:spPr>
-      </p:sp>
-      <p:sp>
-        <p:nvSpPr>
-          <p:cNvPr id="22" name="Text 20"/>
-          <p:cNvSpPr/>
-          <p:nvPr/>
-        </p:nvSpPr>
-        <p:spPr>
-          <a:xfrm>
-            <a:off x="566928" y="3657600"/>
-            <a:ext cx="2606040" cy="402336"/>
-          </a:xfrm>
-          <a:prstGeom prst="rect">
-            <a:avLst/>
-          </a:prstGeom>
-          <a:noFill/>
-          <a:ln/>
-        </p:spPr>
-        <p:txBody>
-          <a:bodyPr wrap="square" lIns="0" tIns="0" rIns="0" bIns="0" rtlCol="0" anchor="ctr"/>
-          <a:lstStyle/>
-          <a:p>
-            <a:pPr indent="0" marL="0">
-              <a:lnSpc>
-                <a:spcPct val="120000"/>
-              </a:lnSpc>
-              <a:buNone/>
-            </a:pPr>
-            <a:r>
-              <a:rPr lang="en-US" sz="1400" dirty="0">
-                <a:solidFill>
-                  <a:srgbClr val="718096"/>
-                </a:solidFill>
-                <a:latin typeface="Pretendard" pitchFamily="34" charset="0"/>
-                <a:ea typeface="Pretendard" pitchFamily="34" charset="-122"/>
-                <a:cs typeface="Pretendard" pitchFamily="34" charset="-120"/>
-              </a:rPr>
-              <a:t>승강기</a:t>
-            </a:r>
-            <a:endParaRPr lang="en-US" sz="1400" dirty="0"/>
-          </a:p>
-        </p:txBody>
-      </p:sp>
-      <p:sp>
-        <p:nvSpPr>
-          <p:cNvPr id="23" name="Text 21"/>
-          <p:cNvSpPr/>
-          <p:nvPr/>
-        </p:nvSpPr>
-        <p:spPr>
-          <a:xfrm>
-            <a:off x="3172968" y="3657600"/>
-            <a:ext cx="4251960" cy="402336"/>
-          </a:xfrm>
-          <a:prstGeom prst="rect">
-            <a:avLst/>
-          </a:prstGeom>
-          <a:noFill/>
-          <a:ln/>
-        </p:spPr>
-        <p:txBody>
-          <a:bodyPr wrap="square" lIns="0" tIns="0" rIns="0" bIns="0" rtlCol="0" anchor="ctr"/>
-          <a:lstStyle/>
-          <a:p>
-            <a:pPr indent="0" marL="0">
-              <a:lnSpc>
-                <a:spcPct val="120000"/>
-              </a:lnSpc>
-              <a:buNone/>
-            </a:pPr>
-            <a:r>
-              <a:rPr lang="en-US" sz="1400" b="1" dirty="0">
-                <a:solidFill>
-                  <a:srgbClr val="10161F"/>
-                </a:solidFill>
-                <a:latin typeface="Pretendard" pitchFamily="34" charset="0"/>
-                <a:ea typeface="Pretendard" pitchFamily="34" charset="-122"/>
-                <a:cs typeface="Pretendard" pitchFamily="34" charset="-120"/>
-              </a:rPr>
-              <a:t>1대 (15인승 침대용)</a:t>
-            </a:r>
-            <a:endParaRPr lang="en-US" sz="1400" dirty="0"/>
-          </a:p>
-        </p:txBody>
-      </p:sp>
-      <p:sp>
-        <p:nvSpPr>
-          <p:cNvPr id="24" name="Shape 22"/>
-          <p:cNvSpPr/>
-          <p:nvPr/>
-        </p:nvSpPr>
-        <p:spPr>
-          <a:xfrm>
-            <a:off x="566928" y="4059936"/>
-            <a:ext cx="6858000" cy="0"/>
-          </a:xfrm>
-          <a:prstGeom prst="line">
-            <a:avLst/>
-          </a:prstGeom>
-          <a:noFill/>
-          <a:ln w="3810">
-            <a:solidFill>
-              <a:srgbClr val="CBD5E0"/>
-            </a:solidFill>
-            <a:prstDash val="solid"/>
-          </a:ln>
-        </p:spPr>
-      </p:sp>
-      <p:sp>
-        <p:nvSpPr>
-          <p:cNvPr id="25" name="Text 23"/>
-          <p:cNvSpPr/>
-          <p:nvPr/>
-        </p:nvSpPr>
-        <p:spPr>
-          <a:xfrm>
-            <a:off x="566928" y="4059936"/>
-            <a:ext cx="2606040" cy="402336"/>
-          </a:xfrm>
-          <a:prstGeom prst="rect">
-            <a:avLst/>
-          </a:prstGeom>
-          <a:noFill/>
-          <a:ln/>
-        </p:spPr>
-        <p:txBody>
-          <a:bodyPr wrap="square" lIns="0" tIns="0" rIns="0" bIns="0" rtlCol="0" anchor="ctr"/>
-          <a:lstStyle/>
-          <a:p>
-            <a:pPr indent="0" marL="0">
-              <a:lnSpc>
-                <a:spcPct val="120000"/>
-              </a:lnSpc>
-              <a:buNone/>
-            </a:pPr>
-            <a:r>
-              <a:rPr lang="en-US" sz="1400" dirty="0">
-                <a:solidFill>
-                  <a:srgbClr val="718096"/>
-                </a:solidFill>
-                <a:latin typeface="Pretendard" pitchFamily="34" charset="0"/>
-                <a:ea typeface="Pretendard" pitchFamily="34" charset="-122"/>
-                <a:cs typeface="Pretendard" pitchFamily="34" charset="-120"/>
-              </a:rPr>
-              <a:t>주차 대수</a:t>
-            </a:r>
-            <a:endParaRPr lang="en-US" sz="1400" dirty="0"/>
-          </a:p>
-        </p:txBody>
-      </p:sp>
-      <p:sp>
-        <p:nvSpPr>
-          <p:cNvPr id="26" name="Text 24"/>
-          <p:cNvSpPr/>
-          <p:nvPr/>
-        </p:nvSpPr>
-        <p:spPr>
-          <a:xfrm>
-            <a:off x="3172968" y="4059936"/>
-            <a:ext cx="4251960" cy="402336"/>
-          </a:xfrm>
-          <a:prstGeom prst="rect">
-            <a:avLst/>
-          </a:prstGeom>
-          <a:noFill/>
-          <a:ln/>
-        </p:spPr>
-        <p:txBody>
-          <a:bodyPr wrap="square" lIns="0" tIns="0" rIns="0" bIns="0" rtlCol="0" anchor="ctr"/>
-          <a:lstStyle/>
-          <a:p>
-            <a:pPr indent="0" marL="0">
-              <a:lnSpc>
-                <a:spcPct val="120000"/>
-              </a:lnSpc>
-              <a:buNone/>
-            </a:pPr>
-            <a:r>
-              <a:rPr lang="en-US" sz="1400" b="1" dirty="0">
-                <a:solidFill>
-                  <a:srgbClr val="10161F"/>
-                </a:solidFill>
-                <a:latin typeface="Pretendard" pitchFamily="34" charset="0"/>
-                <a:ea typeface="Pretendard" pitchFamily="34" charset="-122"/>
-                <a:cs typeface="Pretendard" pitchFamily="34" charset="-120"/>
-              </a:rPr>
-              <a:t>18대 (자주식 완비)</a:t>
-            </a:r>
-            <a:endParaRPr lang="en-US" sz="1400" dirty="0"/>
-          </a:p>
-        </p:txBody>
-      </p:sp>
-      <p:sp>
-        <p:nvSpPr>
-          <p:cNvPr id="27" name="Shape 25"/>
-          <p:cNvSpPr/>
-          <p:nvPr/>
-        </p:nvSpPr>
-        <p:spPr>
-          <a:xfrm>
-            <a:off x="566928" y="4462272"/>
-            <a:ext cx="6858000" cy="0"/>
-          </a:xfrm>
-          <a:prstGeom prst="line">
-            <a:avLst/>
-          </a:prstGeom>
-          <a:noFill/>
-          <a:ln w="3810">
-            <a:solidFill>
-              <a:srgbClr val="CBD5E0"/>
-            </a:solidFill>
-            <a:prstDash val="solid"/>
-          </a:ln>
-        </p:spPr>
-      </p:sp>
-      <p:sp>
-        <p:nvSpPr>
-          <p:cNvPr id="28" name="Text 26"/>
-          <p:cNvSpPr/>
-          <p:nvPr/>
-        </p:nvSpPr>
-        <p:spPr>
-          <a:xfrm>
-            <a:off x="566928" y="4462272"/>
-            <a:ext cx="2606040" cy="402336"/>
-          </a:xfrm>
-          <a:prstGeom prst="rect">
-            <a:avLst/>
-          </a:prstGeom>
-          <a:noFill/>
-          <a:ln/>
-        </p:spPr>
-        <p:txBody>
-          <a:bodyPr wrap="square" lIns="0" tIns="0" rIns="0" bIns="0" rtlCol="0" anchor="ctr"/>
-          <a:lstStyle/>
-          <a:p>
-            <a:pPr indent="0" marL="0">
-              <a:lnSpc>
-                <a:spcPct val="120000"/>
-              </a:lnSpc>
-              <a:buNone/>
-            </a:pPr>
-            <a:r>
-              <a:rPr lang="en-US" sz="1400" dirty="0">
-                <a:solidFill>
-                  <a:srgbClr val="718096"/>
-                </a:solidFill>
-                <a:latin typeface="Pretendard" pitchFamily="34" charset="0"/>
-                <a:ea typeface="Pretendard" pitchFamily="34" charset="-122"/>
-                <a:cs typeface="Pretendard" pitchFamily="34" charset="-120"/>
-              </a:rPr>
-              <a:t>주구조</a:t>
-            </a:r>
-            <a:endParaRPr lang="en-US" sz="1400" dirty="0"/>
-          </a:p>
-        </p:txBody>
-      </p:sp>
-      <p:sp>
-        <p:nvSpPr>
-          <p:cNvPr id="29" name="Text 27"/>
-          <p:cNvSpPr/>
-          <p:nvPr/>
-        </p:nvSpPr>
-        <p:spPr>
-          <a:xfrm>
-            <a:off x="3172968" y="4462272"/>
-            <a:ext cx="4251960" cy="402336"/>
-          </a:xfrm>
-          <a:prstGeom prst="rect">
-            <a:avLst/>
-          </a:prstGeom>
-          <a:noFill/>
-          <a:ln/>
-        </p:spPr>
-        <p:txBody>
-          <a:bodyPr wrap="square" lIns="0" tIns="0" rIns="0" bIns="0" rtlCol="0" anchor="ctr"/>
-          <a:lstStyle/>
-          <a:p>
-            <a:pPr indent="0" marL="0">
-              <a:lnSpc>
-                <a:spcPct val="120000"/>
-              </a:lnSpc>
-              <a:buNone/>
-            </a:pPr>
-            <a:r>
-              <a:rPr lang="en-US" sz="1400" b="1" dirty="0">
-                <a:solidFill>
-                  <a:srgbClr val="10161F"/>
-                </a:solidFill>
-                <a:latin typeface="Pretendard" pitchFamily="34" charset="0"/>
-                <a:ea typeface="Pretendard" pitchFamily="34" charset="-122"/>
-                <a:cs typeface="Pretendard" pitchFamily="34" charset="-120"/>
-              </a:rPr>
-              <a:t>철근콘크리트구조</a:t>
-            </a:r>
-            <a:endParaRPr lang="en-US" sz="1400" dirty="0"/>
-          </a:p>
-        </p:txBody>
-      </p:sp>
-      <p:sp>
-        <p:nvSpPr>
-          <p:cNvPr id="30" name="Shape 28"/>
-          <p:cNvSpPr/>
-          <p:nvPr/>
-        </p:nvSpPr>
-        <p:spPr>
-          <a:xfrm>
-            <a:off x="566928" y="4864608"/>
-            <a:ext cx="6858000" cy="0"/>
-          </a:xfrm>
-          <a:prstGeom prst="line">
-            <a:avLst/>
-          </a:prstGeom>
-          <a:noFill/>
-          <a:ln w="3810">
-            <a:solidFill>
-              <a:srgbClr val="CBD5E0"/>
-            </a:solidFill>
-            <a:prstDash val="solid"/>
-          </a:ln>
-        </p:spPr>
-      </p:sp>
-      <p:sp>
-        <p:nvSpPr>
-          <p:cNvPr id="31" name="Text 29"/>
-          <p:cNvSpPr/>
-          <p:nvPr/>
-        </p:nvSpPr>
-        <p:spPr>
-          <a:xfrm>
-            <a:off x="566928" y="4864608"/>
-            <a:ext cx="2606040" cy="402336"/>
-          </a:xfrm>
-          <a:prstGeom prst="rect">
-            <a:avLst/>
-          </a:prstGeom>
-          <a:noFill/>
-          <a:ln/>
-        </p:spPr>
-        <p:txBody>
-          <a:bodyPr wrap="square" lIns="0" tIns="0" rIns="0" bIns="0" rtlCol="0" anchor="ctr"/>
-          <a:lstStyle/>
-          <a:p>
-            <a:pPr indent="0" marL="0">
-              <a:lnSpc>
-                <a:spcPct val="120000"/>
-              </a:lnSpc>
-              <a:buNone/>
-            </a:pPr>
-            <a:r>
-              <a:rPr lang="en-US" sz="1400" dirty="0">
-                <a:solidFill>
-                  <a:srgbClr val="718096"/>
-                </a:solidFill>
-                <a:latin typeface="Pretendard" pitchFamily="34" charset="0"/>
-                <a:ea typeface="Pretendard" pitchFamily="34" charset="-122"/>
-                <a:cs typeface="Pretendard" pitchFamily="34" charset="-120"/>
-              </a:rPr>
-              <a:t>매매 희망가</a:t>
-            </a:r>
-            <a:endParaRPr lang="en-US" sz="1400" dirty="0"/>
-          </a:p>
-        </p:txBody>
-      </p:sp>
-      <p:sp>
-        <p:nvSpPr>
-          <p:cNvPr id="32" name="Text 30"/>
-          <p:cNvSpPr/>
-          <p:nvPr/>
-        </p:nvSpPr>
-        <p:spPr>
-          <a:xfrm>
-            <a:off x="3172968" y="4864608"/>
-            <a:ext cx="4251960" cy="402336"/>
-          </a:xfrm>
-          <a:prstGeom prst="rect">
-            <a:avLst/>
-          </a:prstGeom>
-          <a:noFill/>
-          <a:ln/>
-        </p:spPr>
-        <p:txBody>
-          <a:bodyPr wrap="square" lIns="0" tIns="0" rIns="0" bIns="0" rtlCol="0" anchor="ctr"/>
-          <a:lstStyle/>
-          <a:p>
-            <a:pPr indent="0" marL="0">
-              <a:lnSpc>
-                <a:spcPct val="120000"/>
-              </a:lnSpc>
-              <a:buNone/>
-            </a:pPr>
-            <a:r>
-              <a:rPr lang="en-US" sz="1400" b="1" dirty="0">
-                <a:solidFill>
-                  <a:srgbClr val="10161F"/>
-                </a:solidFill>
-                <a:latin typeface="Pretendard" pitchFamily="34" charset="0"/>
-                <a:ea typeface="Pretendard" pitchFamily="34" charset="-122"/>
-                <a:cs typeface="Pretendard" pitchFamily="34" charset="-120"/>
-              </a:rPr>
-              <a:t>165억</a:t>
-            </a:r>
-            <a:endParaRPr lang="en-US" sz="1400" dirty="0"/>
-          </a:p>
-        </p:txBody>
-      </p:sp>
-      <p:sp>
-        <p:nvSpPr>
-          <p:cNvPr id="33" name="Shape 31"/>
           <p:cNvSpPr/>
           <p:nvPr/>
         </p:nvSpPr>
@@ -6525,49 +5669,49 @@
       </p:sp>
       <p:sp>
         <p:nvSpPr>
-          <p:cNvPr id="34" name="Shape 32"/>
+          <p:cNvPr id="10" name="Shape 8"/>
           <p:cNvSpPr/>
           <p:nvPr/>
         </p:nvSpPr>
         <p:spPr>
           <a:xfrm>
             <a:off x="7784287" y="1645920"/>
-            <a:ext cx="3840480" cy="1645920"/>
+            <a:ext cx="3840480" cy="2103120"/>
           </a:xfrm>
           <a:prstGeom prst="roundRect">
             <a:avLst>
-              <a:gd name="adj" fmla="val 3333"/>
+              <a:gd name="adj" fmla="val 2609"/>
             </a:avLst>
           </a:prstGeom>
           <a:solidFill>
-            <a:srgbClr val="BEE3F8"/>
+            <a:srgbClr val="F3EBDA"/>
           </a:solidFill>
           <a:ln/>
         </p:spPr>
       </p:sp>
       <p:sp>
         <p:nvSpPr>
-          <p:cNvPr id="35" name="Shape 33"/>
+          <p:cNvPr id="11" name="Shape 9"/>
           <p:cNvSpPr/>
           <p:nvPr/>
         </p:nvSpPr>
         <p:spPr>
           <a:xfrm>
             <a:off x="7784287" y="1700784"/>
-            <a:ext cx="36576" cy="1536192"/>
+            <a:ext cx="36576" cy="1993392"/>
           </a:xfrm>
           <a:prstGeom prst="rect">
             <a:avLst/>
           </a:prstGeom>
           <a:solidFill>
-            <a:srgbClr val="2B6CB0"/>
+            <a:srgbClr val="977024"/>
           </a:solidFill>
           <a:ln/>
         </p:spPr>
       </p:sp>
       <p:sp>
         <p:nvSpPr>
-          <p:cNvPr id="36" name="Text 34"/>
+          <p:cNvPr id="12" name="Text 10"/>
           <p:cNvSpPr/>
           <p:nvPr/>
         </p:nvSpPr>
@@ -6595,14 +5739,14 @@
       </p:sp>
       <p:sp>
         <p:nvSpPr>
-          <p:cNvPr id="37" name="Text 35"/>
+          <p:cNvPr id="13" name="Text 11"/>
           <p:cNvSpPr/>
           <p:nvPr/>
         </p:nvSpPr>
         <p:spPr>
           <a:xfrm>
             <a:off x="7967167" y="1975104"/>
-            <a:ext cx="3511296" cy="1243584"/>
+            <a:ext cx="3511296" cy="1700784"/>
           </a:xfrm>
           <a:prstGeom prst="rect">
             <a:avLst/>
@@ -6629,7 +5773,7 @@
                 <a:ea typeface="Pretendard" pitchFamily="34" charset="-122"/>
                 <a:cs typeface="Pretendard" pitchFamily="34" charset="-120"/>
               </a:rPr>
-              <a:t>본 매물은 서초권역 입지의 안정적 운영 자산입니다.</a:t>
+              <a:t>{"ok":true,"mocked":true,"extractedFields":{"area_signal":"역삼","asset_type":"오피스빌딩","price_band":"300억","size_signal":"3</a:t>
             </a:r>
             <a:endParaRPr lang="en-US" sz="930" dirty="0"/>
           </a:p>
@@ -6637,7 +5781,7 @@
       </p:sp>
       <p:sp>
         <p:nvSpPr>
-          <p:cNvPr id="38" name="Text 36"/>
+          <p:cNvPr id="14" name="Text 12"/>
           <p:cNvSpPr/>
           <p:nvPr/>
         </p:nvSpPr>
@@ -6676,7 +5820,7 @@
       </p:sp>
       <p:sp>
         <p:nvSpPr>
-          <p:cNvPr id="39" name="Text 37"/>
+          <p:cNvPr id="15" name="Text 13"/>
           <p:cNvSpPr/>
           <p:nvPr/>
         </p:nvSpPr>
@@ -6913,7 +6057,7 @@
                 <a:gridCol w="1675430"/>
                 <a:gridCol w="1675430"/>
               </a:tblGrid>
-              <a:tr h="457200">
+              <a:tr h="438912">
                 <a:tc>
                   <a:txBody>
                     <a:bodyPr/>
@@ -7419,7 +6563,7 @@
                   </a:tcPr>
                 </a:tc>
               </a:tr>
-              <a:tr h="457200">
+              <a:tr h="438912">
                 <a:tc>
                   <a:txBody>
                     <a:bodyPr/>
@@ -7878,7 +7022,7 @@
                   </a:tcPr>
                 </a:tc>
               </a:tr>
-              <a:tr h="457200">
+              <a:tr h="438912">
                 <a:tc>
                   <a:txBody>
                     <a:bodyPr/>
@@ -8359,7 +7503,7 @@
                   </a:tcPr>
                 </a:tc>
               </a:tr>
-              <a:tr h="457200">
+              <a:tr h="438912">
                 <a:tc>
                   <a:txBody>
                     <a:bodyPr/>
@@ -8840,7 +7984,7 @@
                   </a:tcPr>
                 </a:tc>
               </a:tr>
-              <a:tr h="457200">
+              <a:tr h="438912">
                 <a:tc>
                   <a:txBody>
                     <a:bodyPr/>
@@ -9321,7 +8465,7 @@
                   </a:tcPr>
                 </a:tc>
               </a:tr>
-              <a:tr h="457200">
+              <a:tr h="438912">
                 <a:tc>
                   <a:txBody>
                     <a:bodyPr/>
@@ -9802,7 +8946,7 @@
                   </a:tcPr>
                 </a:tc>
               </a:tr>
-              <a:tr h="457200">
+              <a:tr h="438912">
                 <a:tc>
                   <a:txBody>
                     <a:bodyPr/>
@@ -10283,7 +9427,7 @@
                   </a:tcPr>
                 </a:tc>
               </a:tr>
-              <a:tr h="457200">
+              <a:tr h="438912">
                 <a:tc>
                   <a:txBody>
                     <a:bodyPr/>
@@ -11048,7 +10192,7 @@
                 <a:ea typeface="Pretendard" pitchFamily="34" charset="-122"/>
                 <a:cs typeface="Pretendard" pitchFamily="34" charset="-120"/>
               </a:rPr>
-              <a:t>[참고] 핵심 현금흐름 3줄 요약 (내 돈 &amp; 월 순수익)</a:t>
+              <a:t>층별 임대 현황</a:t>
             </a:r>
             <a:endParaRPr lang="en-US" sz="1100" dirty="0"/>
           </a:p>
@@ -11962,7 +11106,7 @@
         <p:spPr>
           <a:xfrm>
             <a:off x="566928" y="4626864"/>
-            <a:ext cx="5437480" cy="1280160"/>
+            <a:ext cx="11057839" cy="1280160"/>
           </a:xfrm>
           <a:prstGeom prst="roundRect">
             <a:avLst>
@@ -12004,7 +11148,7 @@
         <p:spPr>
           <a:xfrm>
             <a:off x="749808" y="4736592"/>
-            <a:ext cx="5108296" cy="201168"/>
+            <a:ext cx="10728655" cy="201168"/>
           </a:xfrm>
           <a:prstGeom prst="rect">
             <a:avLst/>
@@ -12043,7 +11187,7 @@
         <p:spPr>
           <a:xfrm>
             <a:off x="749808" y="4956048"/>
-            <a:ext cx="5108296" cy="877824"/>
+            <a:ext cx="10728655" cy="877824"/>
           </a:xfrm>
           <a:prstGeom prst="rect">
             <a:avLst/>
@@ -12070,7 +11214,7 @@
                 <a:ea typeface="Pretendard" pitchFamily="34" charset="-122"/>
                 <a:cs typeface="Pretendard" pitchFamily="34" charset="-120"/>
               </a:rPr>
-              <a:t>본 자산은 우수한 입지 경쟁력과 견고한 펀더멘털을 바탕으로 안정적인 현금흐름 창출과 중장기 자산 가치 상승을 동시에 실현할 수 있는 우량 투자 기회입니다.</a:t>
+              <a:t>{"ok":true,"mocked":true,"extractedFields":{"area_signal":"역삼","asset_type":"오피스빌딩","price_band":"300억","size_signal":"3000평(약 9917.4㎡)"},"extractedFacts":{"region":"역삼","exactAddressCandidate":"역삼동 742-1","assetType":"오피스빌딩","priceText":"300억","sizeText":"3000평(약 9917.4㎡)","currentUse":"오피스","currentUseSignal":"근린생활시설","leaseSignal":"임대중","vacancySignal":"공실없음","tenantNames":["쿠팡","네이버"],"unitRentTexts":["301호: 1500만"],"sellerMotivationText":"자산 효율화","brokerNotes":["초역세권 매물"]},"detectedSensitiveFields":["exact_address","tenant_name"],"ambiguousFields":[],"warnings":[],"areaSignal":"역삼","assetType":"오피스빌딩","priceBand":"300억","sizeSignal":"3000평(약 9917.4㎡)","dealType":"매각","buildingName":"역삼 센트럴타워","exactAddress":"역삼동 742-1","totalFloorArea":9917.3,"buildYear":2015,"currentUseSignal":"근린생활시설","vacancySignal":"공실 없음","fitSummary":"초역세권 근생 빌딩으로 시행/사옥 매입에 최적화","cautionSummary":"주요 임차 업종 만기 조율 필요","hiddenFields":["exact_address","seller_motivation"],"confidence":{"areaSignal":"confirmed","assetType":"confirmed","priceBand":"ai_hypothesis","fitSummary":"ai_hypothesis"},"missingData":["sizeSignal"],"boundaryNote":"본 자료는 실거래 통계 기반 참고치입니다.","buyerType":"법인 사옥형","budgetRange":{"min":50,"max":80,"display":"50억~80억"},"preferredRegions":["강남","성수"],"assetTypes":["꼬마빌딩","사옥용"],"purchasePurpose":"사옥용 매입","mustHave":["초역세권","주차"],"niceToHave":["테라스","루프탑"],"riskTolerance":"medium","financingNote":"자본금 50% 준비","missingQuestions":["구체적인 입주 시기가 언제인가요?","선호하는 수익률이 있나요?"],"privacyNotes":["연락처 비공개"],"fitReasons":["매수자 예산(50-80억)에 부합하는 매물입니다.","요청하신 성수/강남 권역에 해당합니다."],"cautionReasons":["요청한 용도와 달리 명도 협의가 다소 필요합니다."],"recommendedNextAction":"현장 답사 제안","kakaoMessage":"안녕하세요! 요청하신 조건에 부합하는 추천 매물이 있어 안내해 드립니다. 확인해보시고 피드백 부탁드립니다.","title":"강남 역삼역 초역세권 오피스 사옥용 빌딩 매각","shortSummary":"역삼역 도보 5분 거리의 준신축급 대형 오피스빌딩입니다.","dealPoints":["초역세권","사옥 최적"],"cautionPoints":["명도 조율 필요"],"hiddenInfoNotice":["보증금 및 지번은 인가 후 확인 가능"],"gateMessage":"G1 등급 등록이 필요합니다.","kakaoText":"강남 역삼역 오피스 빌딩 매각 안내입니다.","exactUnitCandidate":"101호","floor":"1층","areaSqmText":"150㎡","spaceType":"office","depositText":"5000만","monthlyRentText":"400만","maintenanceFeeText":"50만","availableFromText":"즉시입주","leaseTermMonthsText":"24","incentivesText":"렌트프리 2개월","restrictions":[],"landlordIdentity":"김성수","currentTenant":"스타트업","vacancyReason":"이전 확장","rentNegotiation":"협의 가능","region":"성수동","areaSqm":150,"deposit":5000,"monthlyRent":400,"maintenanceFee":50,"availableFrom":"즉시입주","leaseTermMonths":24,"incentives":{"rentFreeMonths":2,"interiorSupport":"일부 인테리어 지원","freeRentDetail":"렌트프리 2개월 지원"},"shortSummaryLease":"성수역 도보 5분 거리 1층 리테일 상가 매물입니다."}</a:t>
             </a:r>
             <a:endParaRPr lang="en-US" sz="930" dirty="0"/>
           </a:p>
@@ -12078,130 +11222,7 @@
       </p:sp>
       <p:sp>
         <p:nvSpPr>
-          <p:cNvPr id="36" name="Shape 34"/>
-          <p:cNvSpPr/>
-          <p:nvPr/>
-        </p:nvSpPr>
-        <p:spPr>
-          <a:xfrm>
-            <a:off x="6187288" y="4626864"/>
-            <a:ext cx="5437480" cy="1280160"/>
-          </a:xfrm>
-          <a:prstGeom prst="roundRect">
-            <a:avLst>
-              <a:gd name="adj" fmla="val 4286"/>
-            </a:avLst>
-          </a:prstGeom>
-          <a:solidFill>
-            <a:srgbClr val="BEE3F8"/>
-          </a:solidFill>
-          <a:ln/>
-        </p:spPr>
-      </p:sp>
-      <p:sp>
-        <p:nvSpPr>
-          <p:cNvPr id="37" name="Shape 35"/>
-          <p:cNvSpPr/>
-          <p:nvPr/>
-        </p:nvSpPr>
-        <p:spPr>
-          <a:xfrm>
-            <a:off x="6187288" y="4681728"/>
-            <a:ext cx="36576" cy="1170432"/>
-          </a:xfrm>
-          <a:prstGeom prst="rect">
-            <a:avLst/>
-          </a:prstGeom>
-          <a:solidFill>
-            <a:srgbClr val="2B6CB0"/>
-          </a:solidFill>
-          <a:ln/>
-        </p:spPr>
-      </p:sp>
-      <p:sp>
-        <p:nvSpPr>
-          <p:cNvPr id="38" name="Text 36"/>
-          <p:cNvSpPr/>
-          <p:nvPr/>
-        </p:nvSpPr>
-        <p:spPr>
-          <a:xfrm>
-            <a:off x="6370168" y="4736592"/>
-            <a:ext cx="5108296" cy="201168"/>
-          </a:xfrm>
-          <a:prstGeom prst="rect">
-            <a:avLst/>
-          </a:prstGeom>
-          <a:noFill/>
-          <a:ln/>
-        </p:spPr>
-        <p:txBody>
-          <a:bodyPr wrap="square" lIns="0" tIns="0" rIns="0" bIns="0" rtlCol="0" anchor="ctr"/>
-          <a:lstStyle/>
-          <a:p>
-            <a:pPr indent="0" marL="0">
-              <a:buNone/>
-            </a:pPr>
-            <a:r>
-              <a:rPr lang="en-US" sz="1050" b="1" dirty="0">
-                <a:solidFill>
-                  <a:srgbClr val="2B6CB0"/>
-                </a:solidFill>
-                <a:latin typeface="Pretendard" pitchFamily="34" charset="0"/>
-                <a:ea typeface="Pretendard" pitchFamily="34" charset="-122"/>
-                <a:cs typeface="Pretendard" pitchFamily="34" charset="-120"/>
-              </a:rPr>
-              <a:t>[주의] 면책</a:t>
-            </a:r>
-            <a:endParaRPr lang="en-US" sz="1050" dirty="0"/>
-          </a:p>
-        </p:txBody>
-      </p:sp>
-      <p:sp>
-        <p:nvSpPr>
-          <p:cNvPr id="39" name="Text 37"/>
-          <p:cNvSpPr/>
-          <p:nvPr/>
-        </p:nvSpPr>
-        <p:spPr>
-          <a:xfrm>
-            <a:off x="6370168" y="4956048"/>
-            <a:ext cx="5108296" cy="877824"/>
-          </a:xfrm>
-          <a:prstGeom prst="rect">
-            <a:avLst/>
-          </a:prstGeom>
-          <a:noFill/>
-          <a:ln/>
-        </p:spPr>
-        <p:txBody>
-          <a:bodyPr wrap="square" lIns="0" tIns="0" rIns="0" bIns="0" rtlCol="0" anchor="t"/>
-          <a:lstStyle/>
-          <a:p>
-            <a:pPr indent="0" marL="0">
-              <a:lnSpc>
-                <a:spcPct val="120000"/>
-              </a:lnSpc>
-              <a:buNone/>
-            </a:pPr>
-            <a:r>
-              <a:rPr lang="en-US" sz="930" dirty="0">
-                <a:solidFill>
-                  <a:srgbClr val="10161F"/>
-                </a:solidFill>
-                <a:latin typeface="Pretendard" pitchFamily="34" charset="0"/>
-                <a:ea typeface="Pretendard" pitchFamily="34" charset="-122"/>
-                <a:cs typeface="Pretendard" pitchFamily="34" charset="-120"/>
-              </a:rPr>
-              <a:t>AI 추정값 (참고용). 실제 수익은 임대차 조건·공실률·세금에 따라 상이합니다.</a:t>
-            </a:r>
-            <a:endParaRPr lang="en-US" sz="930" dirty="0"/>
-          </a:p>
-        </p:txBody>
-      </p:sp>
-      <p:sp>
-        <p:nvSpPr>
-          <p:cNvPr id="40" name="Text 38"/>
+          <p:cNvPr id="36" name="Text 34"/>
           <p:cNvSpPr/>
           <p:nvPr/>
         </p:nvSpPr>
@@ -12240,7 +11261,7 @@
       </p:sp>
       <p:sp>
         <p:nvSpPr>
-          <p:cNvPr id="41" name="Text 39"/>
+          <p:cNvPr id="37" name="Text 35"/>
           <p:cNvSpPr/>
           <p:nvPr/>
         </p:nvSpPr>
@@ -12455,11 +11476,11 @@
         <p:spPr>
           <a:xfrm>
             <a:off x="566928" y="1417320"/>
-            <a:ext cx="1992112" cy="3611880"/>
+            <a:ext cx="3515258" cy="3657600"/>
           </a:xfrm>
           <a:prstGeom prst="roundRect">
             <a:avLst>
-              <a:gd name="adj" fmla="val 2754"/>
+              <a:gd name="adj" fmla="val 1561"/>
             </a:avLst>
           </a:prstGeom>
           <a:solidFill>
@@ -12482,7 +11503,7 @@
         <p:spPr>
           <a:xfrm>
             <a:off x="566928" y="1417320"/>
-            <a:ext cx="1992112" cy="45720"/>
+            <a:ext cx="3515258" cy="45720"/>
           </a:xfrm>
           <a:prstGeom prst="rect">
             <a:avLst/>
@@ -12502,7 +11523,7 @@
         <p:spPr>
           <a:xfrm>
             <a:off x="795528" y="1618488"/>
-            <a:ext cx="1534912" cy="292608"/>
+            <a:ext cx="3058058" cy="292608"/>
           </a:xfrm>
           <a:prstGeom prst="rect">
             <a:avLst/>
@@ -12518,7 +11539,7 @@
               <a:buNone/>
             </a:pPr>
             <a:r>
-              <a:rPr lang="en-US" sz="1150" b="1" dirty="0">
+              <a:rPr lang="en-US" sz="1350" b="1" dirty="0">
                 <a:solidFill>
                   <a:srgbClr val="977024"/>
                 </a:solidFill>
@@ -12528,7 +11549,7 @@
               </a:rPr>
               <a:t>건물 물리적 상태</a:t>
             </a:r>
-            <a:endParaRPr lang="en-US" sz="1150" dirty="0"/>
+            <a:endParaRPr lang="en-US" sz="1350" dirty="0"/>
           </a:p>
         </p:txBody>
       </p:sp>
@@ -12540,8 +11561,8 @@
         </p:nvSpPr>
         <p:spPr>
           <a:xfrm>
-            <a:off x="795528" y="1911096"/>
-            <a:ext cx="1534912" cy="402336"/>
+            <a:off x="795528" y="1947672"/>
+            <a:ext cx="3058058" cy="365760"/>
           </a:xfrm>
           <a:prstGeom prst="rect">
             <a:avLst/>
@@ -12559,7 +11580,7 @@
               <a:buNone/>
             </a:pPr>
             <a:r>
-              <a:rPr lang="en-US" sz="1150" b="1" dirty="0">
+              <a:rPr lang="en-US" sz="1250" b="1" dirty="0">
                 <a:solidFill>
                   <a:srgbClr val="10161F"/>
                 </a:solidFill>
@@ -12569,7 +11590,7 @@
               </a:rPr>
               <a:t>2017년 준공 신축급 상태 (누수/균열 결함 없음)</a:t>
             </a:r>
-            <a:endParaRPr lang="en-US" sz="1150" dirty="0"/>
+            <a:endParaRPr lang="en-US" sz="1250" dirty="0"/>
           </a:p>
         </p:txBody>
       </p:sp>
@@ -12582,7 +11603,7 @@
         <p:spPr>
           <a:xfrm>
             <a:off x="795528" y="2377440"/>
-            <a:ext cx="1534912" cy="2560320"/>
+            <a:ext cx="3058058" cy="2606040"/>
           </a:xfrm>
           <a:prstGeom prst="rect">
             <a:avLst/>
@@ -12604,7 +11625,7 @@
               <a:buChar char="•"/>
             </a:pPr>
             <a:r>
-              <a:rPr lang="en-US" sz="1050" dirty="0">
+              <a:rPr lang="en-US" sz="1100" dirty="0">
                 <a:solidFill>
                   <a:srgbClr val="10161F"/>
                 </a:solidFill>
@@ -12614,7 +11635,7 @@
               </a:rPr>
               <a:t>준공 10년 미만으로 대규모 수선비용 발생 가능성 낮음</a:t>
             </a:r>
-            <a:endParaRPr lang="en-US" sz="1050" dirty="0"/>
+            <a:endParaRPr lang="en-US" sz="1100" dirty="0"/>
           </a:p>
         </p:txBody>
       </p:sp>
@@ -12626,12 +11647,12 @@
         </p:nvSpPr>
         <p:spPr>
           <a:xfrm>
-            <a:off x="2833360" y="1417320"/>
-            <a:ext cx="1992112" cy="3611880"/>
+            <a:off x="4338218" y="1417320"/>
+            <a:ext cx="3515258" cy="3657600"/>
           </a:xfrm>
           <a:prstGeom prst="roundRect">
             <a:avLst>
-              <a:gd name="adj" fmla="val 2754"/>
+              <a:gd name="adj" fmla="val 1561"/>
             </a:avLst>
           </a:prstGeom>
           <a:solidFill>
@@ -12653,8 +11674,8 @@
         </p:nvSpPr>
         <p:spPr>
           <a:xfrm>
-            <a:off x="2833360" y="1417320"/>
-            <a:ext cx="1992112" cy="45720"/>
+            <a:off x="4338218" y="1417320"/>
+            <a:ext cx="3515258" cy="45720"/>
           </a:xfrm>
           <a:prstGeom prst="rect">
             <a:avLst/>
@@ -12673,8 +11694,8 @@
         </p:nvSpPr>
         <p:spPr>
           <a:xfrm>
-            <a:off x="3061960" y="1618488"/>
-            <a:ext cx="1534912" cy="292608"/>
+            <a:off x="4566818" y="1618488"/>
+            <a:ext cx="3058058" cy="292608"/>
           </a:xfrm>
           <a:prstGeom prst="rect">
             <a:avLst/>
@@ -12690,7 +11711,7 @@
               <a:buNone/>
             </a:pPr>
             <a:r>
-              <a:rPr lang="en-US" sz="1150" b="1" dirty="0">
+              <a:rPr lang="en-US" sz="1350" b="1" dirty="0">
                 <a:solidFill>
                   <a:srgbClr val="977024"/>
                 </a:solidFill>
@@ -12700,7 +11721,7 @@
               </a:rPr>
               <a:t>승강기 및 설비</a:t>
             </a:r>
-            <a:endParaRPr lang="en-US" sz="1150" dirty="0"/>
+            <a:endParaRPr lang="en-US" sz="1350" dirty="0"/>
           </a:p>
         </p:txBody>
       </p:sp>
@@ -12712,8 +11733,8 @@
         </p:nvSpPr>
         <p:spPr>
           <a:xfrm>
-            <a:off x="3061960" y="1911096"/>
-            <a:ext cx="1534912" cy="402336"/>
+            <a:off x="4566818" y="1947672"/>
+            <a:ext cx="3058058" cy="365760"/>
           </a:xfrm>
           <a:prstGeom prst="rect">
             <a:avLst/>
@@ -12731,7 +11752,7 @@
               <a:buNone/>
             </a:pPr>
             <a:r>
-              <a:rPr lang="en-US" sz="1150" b="1" dirty="0">
+              <a:rPr lang="en-US" sz="1250" b="1" dirty="0">
                 <a:solidFill>
                   <a:srgbClr val="10161F"/>
                 </a:solidFill>
@@ -12741,7 +11762,7 @@
               </a:rPr>
               <a:t>15인승 침대용 승강기 및 냉난방 설비 양호</a:t>
             </a:r>
-            <a:endParaRPr lang="en-US" sz="1150" dirty="0"/>
+            <a:endParaRPr lang="en-US" sz="1250" dirty="0"/>
           </a:p>
         </p:txBody>
       </p:sp>
@@ -12753,8 +11774,8 @@
         </p:nvSpPr>
         <p:spPr>
           <a:xfrm>
-            <a:off x="3061960" y="2377440"/>
-            <a:ext cx="1534912" cy="2560320"/>
+            <a:off x="4566818" y="2377440"/>
+            <a:ext cx="3058058" cy="2606040"/>
           </a:xfrm>
           <a:prstGeom prst="rect">
             <a:avLst/>
@@ -12776,7 +11797,7 @@
               <a:buChar char="•"/>
             </a:pPr>
             <a:r>
-              <a:rPr lang="en-US" sz="1050" dirty="0">
+              <a:rPr lang="en-US" sz="1100" dirty="0">
                 <a:solidFill>
                   <a:srgbClr val="10161F"/>
                 </a:solidFill>
@@ -12786,7 +11807,7 @@
               </a:rPr>
               <a:t>주기적 정기 점검 계약 유지로 관리 리스크 최소화</a:t>
             </a:r>
-            <a:endParaRPr lang="en-US" sz="1050" dirty="0"/>
+            <a:endParaRPr lang="en-US" sz="1100" dirty="0"/>
           </a:p>
         </p:txBody>
       </p:sp>
@@ -12798,12 +11819,12 @@
         </p:nvSpPr>
         <p:spPr>
           <a:xfrm>
-            <a:off x="5099792" y="1417320"/>
-            <a:ext cx="1992112" cy="3611880"/>
+            <a:off x="8109509" y="1417320"/>
+            <a:ext cx="3515258" cy="3657600"/>
           </a:xfrm>
           <a:prstGeom prst="roundRect">
             <a:avLst>
-              <a:gd name="adj" fmla="val 2754"/>
+              <a:gd name="adj" fmla="val 1561"/>
             </a:avLst>
           </a:prstGeom>
           <a:solidFill>
@@ -12825,8 +11846,8 @@
         </p:nvSpPr>
         <p:spPr>
           <a:xfrm>
-            <a:off x="5099792" y="1417320"/>
-            <a:ext cx="1992112" cy="45720"/>
+            <a:off x="8109509" y="1417320"/>
+            <a:ext cx="3515258" cy="45720"/>
           </a:xfrm>
           <a:prstGeom prst="rect">
             <a:avLst/>
@@ -12845,8 +11866,8 @@
         </p:nvSpPr>
         <p:spPr>
           <a:xfrm>
-            <a:off x="5328392" y="1618488"/>
-            <a:ext cx="1534912" cy="292608"/>
+            <a:off x="8338109" y="1618488"/>
+            <a:ext cx="3058058" cy="292608"/>
           </a:xfrm>
           <a:prstGeom prst="rect">
             <a:avLst/>
@@ -12862,7 +11883,7 @@
               <a:buNone/>
             </a:pPr>
             <a:r>
-              <a:rPr lang="en-US" sz="1150" b="1" dirty="0">
+              <a:rPr lang="en-US" sz="1350" b="1" dirty="0">
                 <a:solidFill>
                   <a:srgbClr val="977024"/>
                 </a:solidFill>
@@ -12872,7 +11893,7 @@
               </a:rPr>
               <a:t>임차인 이탈 위험</a:t>
             </a:r>
-            <a:endParaRPr lang="en-US" sz="1150" dirty="0"/>
+            <a:endParaRPr lang="en-US" sz="1350" dirty="0"/>
           </a:p>
         </p:txBody>
       </p:sp>
@@ -12884,8 +11905,8 @@
         </p:nvSpPr>
         <p:spPr>
           <a:xfrm>
-            <a:off x="5328392" y="1911096"/>
-            <a:ext cx="1534912" cy="402336"/>
+            <a:off x="8338109" y="1947672"/>
+            <a:ext cx="3058058" cy="365760"/>
           </a:xfrm>
           <a:prstGeom prst="rect">
             <a:avLst/>
@@ -12903,7 +11924,7 @@
               <a:buNone/>
             </a:pPr>
             <a:r>
-              <a:rPr lang="en-US" sz="1150" b="1" dirty="0">
+              <a:rPr lang="en-US" sz="1250" b="1" dirty="0">
                 <a:solidFill>
                   <a:srgbClr val="10161F"/>
                 </a:solidFill>
@@ -12913,7 +11934,7 @@
               </a:rPr>
               <a:t>병의원/약국 인테리어 투자비(호실당 5억↑) 존속</a:t>
             </a:r>
-            <a:endParaRPr lang="en-US" sz="1150" dirty="0"/>
+            <a:endParaRPr lang="en-US" sz="1250" dirty="0"/>
           </a:p>
         </p:txBody>
       </p:sp>
@@ -12925,8 +11946,8 @@
         </p:nvSpPr>
         <p:spPr>
           <a:xfrm>
-            <a:off x="5328392" y="2377440"/>
-            <a:ext cx="1534912" cy="2560320"/>
+            <a:off x="8338109" y="2377440"/>
+            <a:ext cx="3058058" cy="2606040"/>
           </a:xfrm>
           <a:prstGeom prst="rect">
             <a:avLst/>
@@ -12948,7 +11969,7 @@
               <a:buChar char="•"/>
             </a:pPr>
             <a:r>
-              <a:rPr lang="en-US" sz="1050" dirty="0">
+              <a:rPr lang="en-US" sz="1100" dirty="0">
                 <a:solidFill>
                   <a:srgbClr val="10161F"/>
                 </a:solidFill>
@@ -12958,7 +11979,7 @@
               </a:rPr>
               <a:t>WALE 3.5년 확보 및 만기 6개월 전 재계약 협상 개시</a:t>
             </a:r>
-            <a:endParaRPr lang="en-US" sz="1050" dirty="0"/>
+            <a:endParaRPr lang="en-US" sz="1100" dirty="0"/>
           </a:p>
         </p:txBody>
       </p:sp>
@@ -12970,12 +11991,12 @@
         </p:nvSpPr>
         <p:spPr>
           <a:xfrm>
-            <a:off x="7366224" y="1417320"/>
-            <a:ext cx="1992112" cy="3611880"/>
+            <a:off x="566928" y="5193792"/>
+            <a:ext cx="11057839" cy="621792"/>
           </a:xfrm>
           <a:prstGeom prst="roundRect">
             <a:avLst>
-              <a:gd name="adj" fmla="val 2754"/>
+              <a:gd name="adj" fmla="val 8824"/>
             </a:avLst>
           </a:prstGeom>
           <a:solidFill>
@@ -12991,351 +12012,7 @@
       </p:sp>
       <p:sp>
         <p:nvSpPr>
-          <p:cNvPr id="22" name="Shape 20"/>
-          <p:cNvSpPr/>
-          <p:nvPr/>
-        </p:nvSpPr>
-        <p:spPr>
-          <a:xfrm>
-            <a:off x="7366224" y="1417320"/>
-            <a:ext cx="1992112" cy="45720"/>
-          </a:xfrm>
-          <a:prstGeom prst="rect">
-            <a:avLst/>
-          </a:prstGeom>
-          <a:solidFill>
-            <a:srgbClr val="B98A2E"/>
-          </a:solidFill>
-          <a:ln/>
-        </p:spPr>
-      </p:sp>
-      <p:sp>
-        <p:nvSpPr>
-          <p:cNvPr id="23" name="Text 21"/>
-          <p:cNvSpPr/>
-          <p:nvPr/>
-        </p:nvSpPr>
-        <p:spPr>
-          <a:xfrm>
-            <a:off x="7594824" y="1618488"/>
-            <a:ext cx="1534912" cy="292608"/>
-          </a:xfrm>
-          <a:prstGeom prst="rect">
-            <a:avLst/>
-          </a:prstGeom>
-          <a:noFill/>
-          <a:ln/>
-        </p:spPr>
-        <p:txBody>
-          <a:bodyPr wrap="square" lIns="0" tIns="0" rIns="0" bIns="0" rtlCol="0" anchor="ctr"/>
-          <a:lstStyle/>
-          <a:p>
-            <a:pPr indent="0" marL="0">
-              <a:buNone/>
-            </a:pPr>
-            <a:r>
-              <a:rPr lang="en-US" sz="1150" b="1" dirty="0">
-                <a:solidFill>
-                  <a:srgbClr val="977024"/>
-                </a:solidFill>
-                <a:latin typeface="Pretendard" pitchFamily="34" charset="0"/>
-                <a:ea typeface="Pretendard" pitchFamily="34" charset="-122"/>
-                <a:cs typeface="Pretendard" pitchFamily="34" charset="-120"/>
-              </a:rPr>
-              <a:t>명도 및 분쟁</a:t>
-            </a:r>
-            <a:endParaRPr lang="en-US" sz="1150" dirty="0"/>
-          </a:p>
-        </p:txBody>
-      </p:sp>
-      <p:sp>
-        <p:nvSpPr>
-          <p:cNvPr id="24" name="Text 22"/>
-          <p:cNvSpPr/>
-          <p:nvPr/>
-        </p:nvSpPr>
-        <p:spPr>
-          <a:xfrm>
-            <a:off x="7594824" y="1911096"/>
-            <a:ext cx="1534912" cy="402336"/>
-          </a:xfrm>
-          <a:prstGeom prst="rect">
-            <a:avLst/>
-          </a:prstGeom>
-          <a:noFill/>
-          <a:ln/>
-        </p:spPr>
-        <p:txBody>
-          <a:bodyPr wrap="square" lIns="0" tIns="0" rIns="0" bIns="0" rtlCol="0" anchor="ctr">
-            <a:normAutofit/>
-          </a:bodyPr>
-          <a:lstStyle/>
-          <a:p>
-            <a:pPr indent="0" marL="0">
-              <a:buNone/>
-            </a:pPr>
-            <a:r>
-              <a:rPr lang="en-US" sz="1150" b="1" dirty="0">
-                <a:solidFill>
-                  <a:srgbClr val="10161F"/>
-                </a:solidFill>
-                <a:latin typeface="Pretendard" pitchFamily="34" charset="0"/>
-                <a:ea typeface="Pretendard" pitchFamily="34" charset="-122"/>
-                <a:cs typeface="Pretendard" pitchFamily="34" charset="-120"/>
-              </a:rPr>
-              <a:t>전층 정상 임대차 상태 (임대료 연체 0건)</a:t>
-            </a:r>
-            <a:endParaRPr lang="en-US" sz="1150" dirty="0"/>
-          </a:p>
-        </p:txBody>
-      </p:sp>
-      <p:sp>
-        <p:nvSpPr>
-          <p:cNvPr id="25" name="Text 23"/>
-          <p:cNvSpPr/>
-          <p:nvPr/>
-        </p:nvSpPr>
-        <p:spPr>
-          <a:xfrm>
-            <a:off x="7594824" y="2377440"/>
-            <a:ext cx="1534912" cy="2560320"/>
-          </a:xfrm>
-          <a:prstGeom prst="rect">
-            <a:avLst/>
-          </a:prstGeom>
-          <a:noFill/>
-          <a:ln/>
-        </p:spPr>
-        <p:txBody>
-          <a:bodyPr wrap="square" lIns="0" tIns="0" rIns="0" bIns="0" rtlCol="0" anchor="t">
-            <a:normAutofit/>
-          </a:bodyPr>
-          <a:lstStyle/>
-          <a:p>
-            <a:pPr marL="342900" indent="-342900">
-              <a:lnSpc>
-                <a:spcPct val="125000"/>
-              </a:lnSpc>
-              <a:buSzPct val="100000"/>
-              <a:buChar char="•"/>
-            </a:pPr>
-            <a:r>
-              <a:rPr lang="en-US" sz="1050" dirty="0">
-                <a:solidFill>
-                  <a:srgbClr val="10161F"/>
-                </a:solidFill>
-                <a:latin typeface="Pretendard" pitchFamily="34" charset="0"/>
-                <a:ea typeface="Pretendard" pitchFamily="34" charset="-122"/>
-                <a:cs typeface="Pretendard" pitchFamily="34" charset="-120"/>
-              </a:rPr>
-              <a:t>임대차 분쟁 및 소송 이력 없음 (명도 리스크 극소)</a:t>
-            </a:r>
-            <a:endParaRPr lang="en-US" sz="1050" dirty="0"/>
-          </a:p>
-        </p:txBody>
-      </p:sp>
-      <p:sp>
-        <p:nvSpPr>
-          <p:cNvPr id="26" name="Shape 24"/>
-          <p:cNvSpPr/>
-          <p:nvPr/>
-        </p:nvSpPr>
-        <p:spPr>
-          <a:xfrm>
-            <a:off x="9632655" y="1417320"/>
-            <a:ext cx="1992112" cy="3611880"/>
-          </a:xfrm>
-          <a:prstGeom prst="roundRect">
-            <a:avLst>
-              <a:gd name="adj" fmla="val 2754"/>
-            </a:avLst>
-          </a:prstGeom>
-          <a:solidFill>
-            <a:srgbClr val="F7FAFC"/>
-          </a:solidFill>
-          <a:ln w="6350">
-            <a:solidFill>
-              <a:srgbClr val="CBD5E0"/>
-            </a:solidFill>
-            <a:prstDash val="solid"/>
-          </a:ln>
-        </p:spPr>
-      </p:sp>
-      <p:sp>
-        <p:nvSpPr>
-          <p:cNvPr id="27" name="Shape 25"/>
-          <p:cNvSpPr/>
-          <p:nvPr/>
-        </p:nvSpPr>
-        <p:spPr>
-          <a:xfrm>
-            <a:off x="9632655" y="1417320"/>
-            <a:ext cx="1992112" cy="45720"/>
-          </a:xfrm>
-          <a:prstGeom prst="rect">
-            <a:avLst/>
-          </a:prstGeom>
-          <a:solidFill>
-            <a:srgbClr val="B98A2E"/>
-          </a:solidFill>
-          <a:ln/>
-        </p:spPr>
-      </p:sp>
-      <p:sp>
-        <p:nvSpPr>
-          <p:cNvPr id="28" name="Text 26"/>
-          <p:cNvSpPr/>
-          <p:nvPr/>
-        </p:nvSpPr>
-        <p:spPr>
-          <a:xfrm>
-            <a:off x="9861255" y="1618488"/>
-            <a:ext cx="1534912" cy="292608"/>
-          </a:xfrm>
-          <a:prstGeom prst="rect">
-            <a:avLst/>
-          </a:prstGeom>
-          <a:noFill/>
-          <a:ln/>
-        </p:spPr>
-        <p:txBody>
-          <a:bodyPr wrap="square" lIns="0" tIns="0" rIns="0" bIns="0" rtlCol="0" anchor="ctr"/>
-          <a:lstStyle/>
-          <a:p>
-            <a:pPr indent="0" marL="0">
-              <a:buNone/>
-            </a:pPr>
-            <a:r>
-              <a:rPr lang="en-US" sz="1150" b="1" dirty="0">
-                <a:solidFill>
-                  <a:srgbClr val="977024"/>
-                </a:solidFill>
-                <a:latin typeface="Pretendard" pitchFamily="34" charset="0"/>
-                <a:ea typeface="Pretendard" pitchFamily="34" charset="-122"/>
-                <a:cs typeface="Pretendard" pitchFamily="34" charset="-120"/>
-              </a:rPr>
-              <a:t>권리관계 및 금융</a:t>
-            </a:r>
-            <a:endParaRPr lang="en-US" sz="1150" dirty="0"/>
-          </a:p>
-        </p:txBody>
-      </p:sp>
-      <p:sp>
-        <p:nvSpPr>
-          <p:cNvPr id="29" name="Text 27"/>
-          <p:cNvSpPr/>
-          <p:nvPr/>
-        </p:nvSpPr>
-        <p:spPr>
-          <a:xfrm>
-            <a:off x="9861255" y="1911096"/>
-            <a:ext cx="1534912" cy="402336"/>
-          </a:xfrm>
-          <a:prstGeom prst="rect">
-            <a:avLst/>
-          </a:prstGeom>
-          <a:noFill/>
-          <a:ln/>
-        </p:spPr>
-        <p:txBody>
-          <a:bodyPr wrap="square" lIns="0" tIns="0" rIns="0" bIns="0" rtlCol="0" anchor="ctr">
-            <a:normAutofit/>
-          </a:bodyPr>
-          <a:lstStyle/>
-          <a:p>
-            <a:pPr indent="0" marL="0">
-              <a:buNone/>
-            </a:pPr>
-            <a:r>
-              <a:rPr lang="en-US" sz="1150" b="1" dirty="0">
-                <a:solidFill>
-                  <a:srgbClr val="10161F"/>
-                </a:solidFill>
-                <a:latin typeface="Pretendard" pitchFamily="34" charset="0"/>
-                <a:ea typeface="Pretendard" pitchFamily="34" charset="-122"/>
-                <a:cs typeface="Pretendard" pitchFamily="34" charset="-120"/>
-              </a:rPr>
-              <a:t>단독 법인 소유 (가압류/가처분 일체 없음)</a:t>
-            </a:r>
-            <a:endParaRPr lang="en-US" sz="1150" dirty="0"/>
-          </a:p>
-        </p:txBody>
-      </p:sp>
-      <p:sp>
-        <p:nvSpPr>
-          <p:cNvPr id="30" name="Text 28"/>
-          <p:cNvSpPr/>
-          <p:nvPr/>
-        </p:nvSpPr>
-        <p:spPr>
-          <a:xfrm>
-            <a:off x="9861255" y="2377440"/>
-            <a:ext cx="1534912" cy="2560320"/>
-          </a:xfrm>
-          <a:prstGeom prst="rect">
-            <a:avLst/>
-          </a:prstGeom>
-          <a:noFill/>
-          <a:ln/>
-        </p:spPr>
-        <p:txBody>
-          <a:bodyPr wrap="square" lIns="0" tIns="0" rIns="0" bIns="0" rtlCol="0" anchor="t">
-            <a:normAutofit/>
-          </a:bodyPr>
-          <a:lstStyle/>
-          <a:p>
-            <a:pPr marL="342900" indent="-342900">
-              <a:lnSpc>
-                <a:spcPct val="125000"/>
-              </a:lnSpc>
-              <a:buSzPct val="100000"/>
-              <a:buChar char="•"/>
-            </a:pPr>
-            <a:r>
-              <a:rPr lang="en-US" sz="1050" dirty="0">
-                <a:solidFill>
-                  <a:srgbClr val="10161F"/>
-                </a:solidFill>
-                <a:latin typeface="Pretendard" pitchFamily="34" charset="0"/>
-                <a:ea typeface="Pretendard" pitchFamily="34" charset="-122"/>
-                <a:cs typeface="Pretendard" pitchFamily="34" charset="-120"/>
-              </a:rPr>
-              <a:t>1금융권 기존 담보대출 85억(연 4.1%) 승계 적격 판정</a:t>
-            </a:r>
-            <a:endParaRPr lang="en-US" sz="1050" dirty="0"/>
-          </a:p>
-        </p:txBody>
-      </p:sp>
-      <p:sp>
-        <p:nvSpPr>
-          <p:cNvPr id="31" name="Shape 29"/>
-          <p:cNvSpPr/>
-          <p:nvPr/>
-        </p:nvSpPr>
-        <p:spPr>
-          <a:xfrm>
-            <a:off x="566928" y="5193792"/>
-            <a:ext cx="11057839" cy="621792"/>
-          </a:xfrm>
-          <a:prstGeom prst="roundRect">
-            <a:avLst>
-              <a:gd name="adj" fmla="val 8824"/>
-            </a:avLst>
-          </a:prstGeom>
-          <a:solidFill>
-            <a:srgbClr val="F7FAFC"/>
-          </a:solidFill>
-          <a:ln w="6350">
-            <a:solidFill>
-              <a:srgbClr val="CBD5E0"/>
-            </a:solidFill>
-            <a:prstDash val="solid"/>
-          </a:ln>
-        </p:spPr>
-      </p:sp>
-      <p:sp>
-        <p:nvSpPr>
-          <p:cNvPr id="32" name="Text 30"/>
+          <p:cNvPr id="22" name="Text 20"/>
           <p:cNvSpPr/>
           <p:nvPr/>
         </p:nvSpPr>
@@ -13358,7 +12035,7 @@
               <a:buNone/>
             </a:pPr>
             <a:r>
-              <a:rPr lang="en-US" sz="1200" dirty="0">
+              <a:rPr lang="en-US" sz="1100" dirty="0">
                 <a:solidFill>
                   <a:srgbClr val="10161F"/>
                 </a:solidFill>
@@ -13368,13 +12045,13 @@
               </a:rPr>
               <a:t>실사 총평: 자산의 물리적·권리적 하자가 없으며, 세부 임대차 계약서 및 등기사항증명서는 LOI 접수 후 원본 열람 가능합니다.</a:t>
             </a:r>
-            <a:endParaRPr lang="en-US" sz="1200" dirty="0"/>
-          </a:p>
-        </p:txBody>
-      </p:sp>
-      <p:sp>
-        <p:nvSpPr>
-          <p:cNvPr id="33" name="Text 31"/>
+            <a:endParaRPr lang="en-US" sz="1100" dirty="0"/>
+          </a:p>
+        </p:txBody>
+      </p:sp>
+      <p:sp>
+        <p:nvSpPr>
+          <p:cNvPr id="23" name="Text 21"/>
           <p:cNvSpPr/>
           <p:nvPr/>
         </p:nvSpPr>
@@ -13413,7 +12090,7 @@
       </p:sp>
       <p:sp>
         <p:nvSpPr>
-          <p:cNvPr id="34" name="Text 32"/>
+          <p:cNvPr id="24" name="Text 22"/>
           <p:cNvSpPr/>
           <p:nvPr/>
         </p:nvSpPr>
@@ -13652,9 +12329,645 @@
                 <a:ea typeface="Pretendard" pitchFamily="34" charset="-122"/>
                 <a:cs typeface="Pretendard" pitchFamily="34" charset="-120"/>
               </a:rPr>
-              <a:t>밸류업 시나리오 (AI 추정)</a:t>
+              <a:t>3대 핵심 투자 포인트 (Investment Highlights)</a:t>
             </a:r>
             <a:endParaRPr lang="en-US" sz="1100" dirty="0"/>
+          </a:p>
+        </p:txBody>
+      </p:sp>
+      <p:sp>
+        <p:nvSpPr>
+          <p:cNvPr id="7" name="Shape 5"/>
+          <p:cNvSpPr/>
+          <p:nvPr/>
+        </p:nvSpPr>
+        <p:spPr>
+          <a:xfrm>
+            <a:off x="566928" y="1481328"/>
+            <a:ext cx="3472586" cy="2560320"/>
+          </a:xfrm>
+          <a:prstGeom prst="roundRect">
+            <a:avLst>
+              <a:gd name="adj" fmla="val 2857"/>
+            </a:avLst>
+          </a:prstGeom>
+          <a:solidFill>
+            <a:srgbClr val="F7FAFC"/>
+          </a:solidFill>
+          <a:ln w="10160">
+            <a:solidFill>
+              <a:srgbClr val="CBD5E0"/>
+            </a:solidFill>
+            <a:prstDash val="solid"/>
+          </a:ln>
+        </p:spPr>
+      </p:sp>
+      <p:sp>
+        <p:nvSpPr>
+          <p:cNvPr id="8" name="Shape 6"/>
+          <p:cNvSpPr/>
+          <p:nvPr/>
+        </p:nvSpPr>
+        <p:spPr>
+          <a:xfrm>
+            <a:off x="566928" y="1481328"/>
+            <a:ext cx="3472586" cy="54864"/>
+          </a:xfrm>
+          <a:prstGeom prst="rect">
+            <a:avLst/>
+          </a:prstGeom>
+          <a:solidFill>
+            <a:srgbClr val="B98A2E"/>
+          </a:solidFill>
+          <a:ln/>
+        </p:spPr>
+      </p:sp>
+      <p:sp>
+        <p:nvSpPr>
+          <p:cNvPr id="9" name="Shape 7"/>
+          <p:cNvSpPr/>
+          <p:nvPr/>
+        </p:nvSpPr>
+        <p:spPr>
+          <a:xfrm>
+            <a:off x="795528" y="1755648"/>
+            <a:ext cx="475488" cy="292608"/>
+          </a:xfrm>
+          <a:prstGeom prst="roundRect">
+            <a:avLst>
+              <a:gd name="adj" fmla="val 12500"/>
+            </a:avLst>
+          </a:prstGeom>
+          <a:solidFill>
+            <a:srgbClr val="D9B668"/>
+          </a:solidFill>
+          <a:ln/>
+        </p:spPr>
+      </p:sp>
+      <p:sp>
+        <p:nvSpPr>
+          <p:cNvPr id="10" name="Text 8"/>
+          <p:cNvSpPr/>
+          <p:nvPr/>
+        </p:nvSpPr>
+        <p:spPr>
+          <a:xfrm>
+            <a:off x="795528" y="1755648"/>
+            <a:ext cx="475488" cy="292608"/>
+          </a:xfrm>
+          <a:prstGeom prst="rect">
+            <a:avLst/>
+          </a:prstGeom>
+          <a:noFill/>
+          <a:ln/>
+        </p:spPr>
+        <p:txBody>
+          <a:bodyPr wrap="square" lIns="0" tIns="0" rIns="0" bIns="0" rtlCol="0" anchor="ctr"/>
+          <a:lstStyle/>
+          <a:p>
+            <a:pPr algn="ctr" indent="0" marL="0">
+              <a:buNone/>
+            </a:pPr>
+            <a:r>
+              <a:rPr lang="en-US" sz="1100" b="1" dirty="0">
+                <a:solidFill>
+                  <a:srgbClr val="977024"/>
+                </a:solidFill>
+                <a:latin typeface="Arial" pitchFamily="34" charset="0"/>
+                <a:ea typeface="Arial" pitchFamily="34" charset="-122"/>
+                <a:cs typeface="Arial" pitchFamily="34" charset="-120"/>
+              </a:rPr>
+              <a:t>01</a:t>
+            </a:r>
+            <a:endParaRPr lang="en-US" sz="1100" dirty="0"/>
+          </a:p>
+        </p:txBody>
+      </p:sp>
+      <p:sp>
+        <p:nvSpPr>
+          <p:cNvPr id="11" name="Text 9"/>
+          <p:cNvSpPr/>
+          <p:nvPr/>
+        </p:nvSpPr>
+        <p:spPr>
+          <a:xfrm>
+            <a:off x="795528" y="2194560"/>
+            <a:ext cx="3015386" cy="365760"/>
+          </a:xfrm>
+          <a:prstGeom prst="rect">
+            <a:avLst/>
+          </a:prstGeom>
+          <a:noFill/>
+          <a:ln/>
+        </p:spPr>
+        <p:txBody>
+          <a:bodyPr wrap="square" lIns="0" tIns="0" rIns="0" bIns="0" rtlCol="0" anchor="t"/>
+          <a:lstStyle/>
+          <a:p>
+            <a:pPr indent="0" marL="0">
+              <a:buNone/>
+            </a:pPr>
+            <a:r>
+              <a:rPr lang="en-US" sz="1500" b="1" dirty="0">
+                <a:solidFill>
+                  <a:srgbClr val="10161F"/>
+                </a:solidFill>
+                <a:latin typeface="Pretendard" pitchFamily="34" charset="0"/>
+                <a:ea typeface="Pretendard" pitchFamily="34" charset="-122"/>
+                <a:cs typeface="Pretendard" pitchFamily="34" charset="-120"/>
+              </a:rPr>
+              <a:t>원금 안전판 확보</a:t>
+            </a:r>
+            <a:endParaRPr lang="en-US" sz="1500" dirty="0"/>
+          </a:p>
+        </p:txBody>
+      </p:sp>
+      <p:sp>
+        <p:nvSpPr>
+          <p:cNvPr id="12" name="Shape 10"/>
+          <p:cNvSpPr/>
+          <p:nvPr/>
+        </p:nvSpPr>
+        <p:spPr>
+          <a:xfrm>
+            <a:off x="795528" y="2624328"/>
+            <a:ext cx="3015386" cy="0"/>
+          </a:xfrm>
+          <a:prstGeom prst="line">
+            <a:avLst/>
+          </a:prstGeom>
+          <a:noFill/>
+          <a:ln w="6350">
+            <a:solidFill>
+              <a:srgbClr val="CBD5E0"/>
+            </a:solidFill>
+            <a:prstDash val="solid"/>
+          </a:ln>
+        </p:spPr>
+      </p:sp>
+      <p:sp>
+        <p:nvSpPr>
+          <p:cNvPr id="13" name="Text 11"/>
+          <p:cNvSpPr/>
+          <p:nvPr/>
+        </p:nvSpPr>
+        <p:spPr>
+          <a:xfrm>
+            <a:off x="795528" y="2779776"/>
+            <a:ext cx="3015386" cy="1051560"/>
+          </a:xfrm>
+          <a:prstGeom prst="rect">
+            <a:avLst/>
+          </a:prstGeom>
+          <a:noFill/>
+          <a:ln/>
+        </p:spPr>
+        <p:txBody>
+          <a:bodyPr wrap="square" lIns="0" tIns="0" rIns="0" bIns="0" rtlCol="0" anchor="t"/>
+          <a:lstStyle/>
+          <a:p>
+            <a:pPr indent="0" marL="0">
+              <a:lnSpc>
+                <a:spcPct val="130000"/>
+              </a:lnSpc>
+              <a:buNone/>
+            </a:pPr>
+            <a:r>
+              <a:rPr lang="en-US" sz="1200" dirty="0">
+                <a:solidFill>
+                  <a:srgbClr val="10161F"/>
+                </a:solidFill>
+                <a:latin typeface="Pretendard" pitchFamily="34" charset="0"/>
+                <a:ea typeface="Pretendard" pitchFamily="34" charset="-122"/>
+                <a:cs typeface="Pretendard" pitchFamily="34" charset="-120"/>
+              </a:rPr>
+              <a:t>서초권역의 핵심 입지로, 우량한 대지 지분 가치가 하방 경직성을 강력히 지지합니다.</a:t>
+            </a:r>
+            <a:endParaRPr lang="en-US" sz="1200" dirty="0"/>
+          </a:p>
+        </p:txBody>
+      </p:sp>
+      <p:sp>
+        <p:nvSpPr>
+          <p:cNvPr id="14" name="Shape 12"/>
+          <p:cNvSpPr/>
+          <p:nvPr/>
+        </p:nvSpPr>
+        <p:spPr>
+          <a:xfrm>
+            <a:off x="4359554" y="1481328"/>
+            <a:ext cx="3472586" cy="2560320"/>
+          </a:xfrm>
+          <a:prstGeom prst="roundRect">
+            <a:avLst>
+              <a:gd name="adj" fmla="val 2857"/>
+            </a:avLst>
+          </a:prstGeom>
+          <a:solidFill>
+            <a:srgbClr val="F7FAFC"/>
+          </a:solidFill>
+          <a:ln w="10160">
+            <a:solidFill>
+              <a:srgbClr val="CBD5E0"/>
+            </a:solidFill>
+            <a:prstDash val="solid"/>
+          </a:ln>
+        </p:spPr>
+      </p:sp>
+      <p:sp>
+        <p:nvSpPr>
+          <p:cNvPr id="15" name="Shape 13"/>
+          <p:cNvSpPr/>
+          <p:nvPr/>
+        </p:nvSpPr>
+        <p:spPr>
+          <a:xfrm>
+            <a:off x="4359554" y="1481328"/>
+            <a:ext cx="3472586" cy="54864"/>
+          </a:xfrm>
+          <a:prstGeom prst="rect">
+            <a:avLst/>
+          </a:prstGeom>
+          <a:solidFill>
+            <a:srgbClr val="B98A2E"/>
+          </a:solidFill>
+          <a:ln/>
+        </p:spPr>
+      </p:sp>
+      <p:sp>
+        <p:nvSpPr>
+          <p:cNvPr id="16" name="Shape 14"/>
+          <p:cNvSpPr/>
+          <p:nvPr/>
+        </p:nvSpPr>
+        <p:spPr>
+          <a:xfrm>
+            <a:off x="4588154" y="1755648"/>
+            <a:ext cx="475488" cy="292608"/>
+          </a:xfrm>
+          <a:prstGeom prst="roundRect">
+            <a:avLst>
+              <a:gd name="adj" fmla="val 12500"/>
+            </a:avLst>
+          </a:prstGeom>
+          <a:solidFill>
+            <a:srgbClr val="D9B668"/>
+          </a:solidFill>
+          <a:ln/>
+        </p:spPr>
+      </p:sp>
+      <p:sp>
+        <p:nvSpPr>
+          <p:cNvPr id="17" name="Text 15"/>
+          <p:cNvSpPr/>
+          <p:nvPr/>
+        </p:nvSpPr>
+        <p:spPr>
+          <a:xfrm>
+            <a:off x="4588154" y="1755648"/>
+            <a:ext cx="475488" cy="292608"/>
+          </a:xfrm>
+          <a:prstGeom prst="rect">
+            <a:avLst/>
+          </a:prstGeom>
+          <a:noFill/>
+          <a:ln/>
+        </p:spPr>
+        <p:txBody>
+          <a:bodyPr wrap="square" lIns="0" tIns="0" rIns="0" bIns="0" rtlCol="0" anchor="ctr"/>
+          <a:lstStyle/>
+          <a:p>
+            <a:pPr algn="ctr" indent="0" marL="0">
+              <a:buNone/>
+            </a:pPr>
+            <a:r>
+              <a:rPr lang="en-US" sz="1100" b="1" dirty="0">
+                <a:solidFill>
+                  <a:srgbClr val="977024"/>
+                </a:solidFill>
+                <a:latin typeface="Arial" pitchFamily="34" charset="0"/>
+                <a:ea typeface="Arial" pitchFamily="34" charset="-122"/>
+                <a:cs typeface="Arial" pitchFamily="34" charset="-120"/>
+              </a:rPr>
+              <a:t>02</a:t>
+            </a:r>
+            <a:endParaRPr lang="en-US" sz="1100" dirty="0"/>
+          </a:p>
+        </p:txBody>
+      </p:sp>
+      <p:sp>
+        <p:nvSpPr>
+          <p:cNvPr id="18" name="Text 16"/>
+          <p:cNvSpPr/>
+          <p:nvPr/>
+        </p:nvSpPr>
+        <p:spPr>
+          <a:xfrm>
+            <a:off x="4588154" y="2194560"/>
+            <a:ext cx="3015386" cy="365760"/>
+          </a:xfrm>
+          <a:prstGeom prst="rect">
+            <a:avLst/>
+          </a:prstGeom>
+          <a:noFill/>
+          <a:ln/>
+        </p:spPr>
+        <p:txBody>
+          <a:bodyPr wrap="square" lIns="0" tIns="0" rIns="0" bIns="0" rtlCol="0" anchor="t"/>
+          <a:lstStyle/>
+          <a:p>
+            <a:pPr indent="0" marL="0">
+              <a:buNone/>
+            </a:pPr>
+            <a:r>
+              <a:rPr lang="en-US" sz="1500" b="1" dirty="0">
+                <a:solidFill>
+                  <a:srgbClr val="10161F"/>
+                </a:solidFill>
+                <a:latin typeface="Pretendard" pitchFamily="34" charset="0"/>
+                <a:ea typeface="Pretendard" pitchFamily="34" charset="-122"/>
+                <a:cs typeface="Pretendard" pitchFamily="34" charset="-120"/>
+              </a:rPr>
+              <a:t>확실한 월 현금흐름</a:t>
+            </a:r>
+            <a:endParaRPr lang="en-US" sz="1500" dirty="0"/>
+          </a:p>
+        </p:txBody>
+      </p:sp>
+      <p:sp>
+        <p:nvSpPr>
+          <p:cNvPr id="19" name="Shape 17"/>
+          <p:cNvSpPr/>
+          <p:nvPr/>
+        </p:nvSpPr>
+        <p:spPr>
+          <a:xfrm>
+            <a:off x="4588154" y="2624328"/>
+            <a:ext cx="3015386" cy="0"/>
+          </a:xfrm>
+          <a:prstGeom prst="line">
+            <a:avLst/>
+          </a:prstGeom>
+          <a:noFill/>
+          <a:ln w="6350">
+            <a:solidFill>
+              <a:srgbClr val="CBD5E0"/>
+            </a:solidFill>
+            <a:prstDash val="solid"/>
+          </a:ln>
+        </p:spPr>
+      </p:sp>
+      <p:sp>
+        <p:nvSpPr>
+          <p:cNvPr id="20" name="Text 18"/>
+          <p:cNvSpPr/>
+          <p:nvPr/>
+        </p:nvSpPr>
+        <p:spPr>
+          <a:xfrm>
+            <a:off x="4588154" y="2779776"/>
+            <a:ext cx="3015386" cy="1051560"/>
+          </a:xfrm>
+          <a:prstGeom prst="rect">
+            <a:avLst/>
+          </a:prstGeom>
+          <a:noFill/>
+          <a:ln/>
+        </p:spPr>
+        <p:txBody>
+          <a:bodyPr wrap="square" lIns="0" tIns="0" rIns="0" bIns="0" rtlCol="0" anchor="t"/>
+          <a:lstStyle/>
+          <a:p>
+            <a:pPr indent="0" marL="0">
+              <a:lnSpc>
+                <a:spcPct val="130000"/>
+              </a:lnSpc>
+              <a:buNone/>
+            </a:pPr>
+            <a:r>
+              <a:rPr lang="en-US" sz="1200" dirty="0">
+                <a:solidFill>
+                  <a:srgbClr val="10161F"/>
+                </a:solidFill>
+                <a:latin typeface="Pretendard" pitchFamily="34" charset="0"/>
+                <a:ea typeface="Pretendard" pitchFamily="34" charset="-122"/>
+                <a:cs typeface="Pretendard" pitchFamily="34" charset="-120"/>
+              </a:rPr>
+              <a:t>우량 테넌트 만실 운영 및 장기 임대차 구조를 기반으로 매월 안정적인 순영업소득(NOI) 창출이 기대됩니다.</a:t>
+            </a:r>
+            <a:endParaRPr lang="en-US" sz="1200" dirty="0"/>
+          </a:p>
+        </p:txBody>
+      </p:sp>
+      <p:sp>
+        <p:nvSpPr>
+          <p:cNvPr id="21" name="Shape 19"/>
+          <p:cNvSpPr/>
+          <p:nvPr/>
+        </p:nvSpPr>
+        <p:spPr>
+          <a:xfrm>
+            <a:off x="8152181" y="1481328"/>
+            <a:ext cx="3472586" cy="2560320"/>
+          </a:xfrm>
+          <a:prstGeom prst="roundRect">
+            <a:avLst>
+              <a:gd name="adj" fmla="val 2857"/>
+            </a:avLst>
+          </a:prstGeom>
+          <a:solidFill>
+            <a:srgbClr val="F7FAFC"/>
+          </a:solidFill>
+          <a:ln w="10160">
+            <a:solidFill>
+              <a:srgbClr val="CBD5E0"/>
+            </a:solidFill>
+            <a:prstDash val="solid"/>
+          </a:ln>
+        </p:spPr>
+      </p:sp>
+      <p:sp>
+        <p:nvSpPr>
+          <p:cNvPr id="22" name="Shape 20"/>
+          <p:cNvSpPr/>
+          <p:nvPr/>
+        </p:nvSpPr>
+        <p:spPr>
+          <a:xfrm>
+            <a:off x="8152181" y="1481328"/>
+            <a:ext cx="3472586" cy="54864"/>
+          </a:xfrm>
+          <a:prstGeom prst="rect">
+            <a:avLst/>
+          </a:prstGeom>
+          <a:solidFill>
+            <a:srgbClr val="B98A2E"/>
+          </a:solidFill>
+          <a:ln/>
+        </p:spPr>
+      </p:sp>
+      <p:sp>
+        <p:nvSpPr>
+          <p:cNvPr id="23" name="Shape 21"/>
+          <p:cNvSpPr/>
+          <p:nvPr/>
+        </p:nvSpPr>
+        <p:spPr>
+          <a:xfrm>
+            <a:off x="8380781" y="1755648"/>
+            <a:ext cx="475488" cy="292608"/>
+          </a:xfrm>
+          <a:prstGeom prst="roundRect">
+            <a:avLst>
+              <a:gd name="adj" fmla="val 12500"/>
+            </a:avLst>
+          </a:prstGeom>
+          <a:solidFill>
+            <a:srgbClr val="D9B668"/>
+          </a:solidFill>
+          <a:ln/>
+        </p:spPr>
+      </p:sp>
+      <p:sp>
+        <p:nvSpPr>
+          <p:cNvPr id="24" name="Text 22"/>
+          <p:cNvSpPr/>
+          <p:nvPr/>
+        </p:nvSpPr>
+        <p:spPr>
+          <a:xfrm>
+            <a:off x="8380781" y="1755648"/>
+            <a:ext cx="475488" cy="292608"/>
+          </a:xfrm>
+          <a:prstGeom prst="rect">
+            <a:avLst/>
+          </a:prstGeom>
+          <a:noFill/>
+          <a:ln/>
+        </p:spPr>
+        <p:txBody>
+          <a:bodyPr wrap="square" lIns="0" tIns="0" rIns="0" bIns="0" rtlCol="0" anchor="ctr"/>
+          <a:lstStyle/>
+          <a:p>
+            <a:pPr algn="ctr" indent="0" marL="0">
+              <a:buNone/>
+            </a:pPr>
+            <a:r>
+              <a:rPr lang="en-US" sz="1100" b="1" dirty="0">
+                <a:solidFill>
+                  <a:srgbClr val="977024"/>
+                </a:solidFill>
+                <a:latin typeface="Arial" pitchFamily="34" charset="0"/>
+                <a:ea typeface="Arial" pitchFamily="34" charset="-122"/>
+                <a:cs typeface="Arial" pitchFamily="34" charset="-120"/>
+              </a:rPr>
+              <a:t>03</a:t>
+            </a:r>
+            <a:endParaRPr lang="en-US" sz="1100" dirty="0"/>
+          </a:p>
+        </p:txBody>
+      </p:sp>
+      <p:sp>
+        <p:nvSpPr>
+          <p:cNvPr id="25" name="Text 23"/>
+          <p:cNvSpPr/>
+          <p:nvPr/>
+        </p:nvSpPr>
+        <p:spPr>
+          <a:xfrm>
+            <a:off x="8380781" y="2194560"/>
+            <a:ext cx="3015386" cy="365760"/>
+          </a:xfrm>
+          <a:prstGeom prst="rect">
+            <a:avLst/>
+          </a:prstGeom>
+          <a:noFill/>
+          <a:ln/>
+        </p:spPr>
+        <p:txBody>
+          <a:bodyPr wrap="square" lIns="0" tIns="0" rIns="0" bIns="0" rtlCol="0" anchor="t"/>
+          <a:lstStyle/>
+          <a:p>
+            <a:pPr indent="0" marL="0">
+              <a:buNone/>
+            </a:pPr>
+            <a:r>
+              <a:rPr lang="en-US" sz="1500" b="1" dirty="0">
+                <a:solidFill>
+                  <a:srgbClr val="10161F"/>
+                </a:solidFill>
+                <a:latin typeface="Pretendard" pitchFamily="34" charset="0"/>
+                <a:ea typeface="Pretendard" pitchFamily="34" charset="-122"/>
+                <a:cs typeface="Pretendard" pitchFamily="34" charset="-120"/>
+              </a:rPr>
+              <a:t>가치 상승 및 출구 전략</a:t>
+            </a:r>
+            <a:endParaRPr lang="en-US" sz="1500" dirty="0"/>
+          </a:p>
+        </p:txBody>
+      </p:sp>
+      <p:sp>
+        <p:nvSpPr>
+          <p:cNvPr id="26" name="Shape 24"/>
+          <p:cNvSpPr/>
+          <p:nvPr/>
+        </p:nvSpPr>
+        <p:spPr>
+          <a:xfrm>
+            <a:off x="8380781" y="2624328"/>
+            <a:ext cx="3015386" cy="0"/>
+          </a:xfrm>
+          <a:prstGeom prst="line">
+            <a:avLst/>
+          </a:prstGeom>
+          <a:noFill/>
+          <a:ln w="6350">
+            <a:solidFill>
+              <a:srgbClr val="CBD5E0"/>
+            </a:solidFill>
+            <a:prstDash val="solid"/>
+          </a:ln>
+        </p:spPr>
+      </p:sp>
+      <p:sp>
+        <p:nvSpPr>
+          <p:cNvPr id="27" name="Text 25"/>
+          <p:cNvSpPr/>
+          <p:nvPr/>
+        </p:nvSpPr>
+        <p:spPr>
+          <a:xfrm>
+            <a:off x="8380781" y="2779776"/>
+            <a:ext cx="3015386" cy="1051560"/>
+          </a:xfrm>
+          <a:prstGeom prst="rect">
+            <a:avLst/>
+          </a:prstGeom>
+          <a:noFill/>
+          <a:ln/>
+        </p:spPr>
+        <p:txBody>
+          <a:bodyPr wrap="square" lIns="0" tIns="0" rIns="0" bIns="0" rtlCol="0" anchor="t"/>
+          <a:lstStyle/>
+          <a:p>
+            <a:pPr indent="0" marL="0">
+              <a:lnSpc>
+                <a:spcPct val="130000"/>
+              </a:lnSpc>
+              <a:buNone/>
+            </a:pPr>
+            <a:r>
+              <a:rPr lang="en-US" sz="1200" dirty="0">
+                <a:solidFill>
+                  <a:srgbClr val="10161F"/>
+                </a:solidFill>
+                <a:latin typeface="Pretendard" pitchFamily="34" charset="0"/>
+                <a:ea typeface="Pretendard" pitchFamily="34" charset="-122"/>
+                <a:cs typeface="Pretendard" pitchFamily="34" charset="-120"/>
+              </a:rPr>
+              <a:t>현행 공법 여력을 활용한 밸류업 기회와 더불어 향후 권역 지가 상승에 따른 시세차익 실현이 유력합니다.</a:t>
+            </a:r>
+            <a:endParaRPr lang="en-US" sz="1200" dirty="0"/>
           </a:p>
         </p:txBody>
       </p:sp>
@@ -13681,10 +12994,9 @@
             <a:tbl>
               <a:tblPr/>
               <a:tblGrid>
-                <a:gridCol w="2764460"/>
-                <a:gridCol w="2764460"/>
-                <a:gridCol w="2764460"/>
-                <a:gridCol w="2764460"/>
+                <a:gridCol w="3685946"/>
+                <a:gridCol w="3685946"/>
+                <a:gridCol w="3685946"/>
               </a:tblGrid>
               <a:tr h="329184">
                 <a:tc>
@@ -13704,7 +13016,7 @@
                           <a:ea typeface="Pretendard" pitchFamily="34" charset="-122"/>
                           <a:cs typeface="Pretendard" pitchFamily="34" charset="-120"/>
                         </a:rPr>
-                        <a:t>시나리오</a:t>
+                        <a:t>유형</a:t>
                       </a:r>
                       <a:endParaRPr lang="en-US" sz="1050" dirty="0">
                         <a:latin typeface="Pretendard" charset="0"/>
@@ -13772,21 +13084,7 @@
                           <a:ea typeface="Pretendard" pitchFamily="34" charset="-122"/>
                           <a:cs typeface="Pretendard" pitchFamily="34" charset="-120"/>
                         </a:rPr>
-                        <a:t>NOI </a:t>
-                      </a:r>
-                      <a:pPr indent="0" marL="0">
-                        <a:buNone/>
-                      </a:pPr>
-                      <a:r>
-                        <a:rPr lang="en-US" sz="1050" b="1" dirty="0">
-                          <a:solidFill>
-                            <a:srgbClr val="718096"/>
-                          </a:solidFill>
-                          <a:latin typeface="Pretendard" pitchFamily="34" charset="0"/>
-                          <a:ea typeface="Pretendard" pitchFamily="34" charset="-122"/>
-                          <a:cs typeface="Pretendard" pitchFamily="34" charset="-120"/>
-                        </a:rPr>
-                        <a:t>개선</a:t>
+                        <a:t>적합도</a:t>
                       </a:r>
                       <a:endParaRPr lang="en-US" sz="1050" dirty="0">
                         <a:latin typeface="Pretendard" charset="0"/>
@@ -13854,117 +13152,7 @@
                           <a:ea typeface="Pretendard" pitchFamily="34" charset="-122"/>
                           <a:cs typeface="Pretendard" pitchFamily="34" charset="-120"/>
                         </a:rPr>
-                        <a:t>개선 </a:t>
-                      </a:r>
-                      <a:pPr indent="0" marL="0">
-                        <a:buNone/>
-                      </a:pPr>
-                      <a:r>
-                        <a:rPr lang="en-US" sz="1050" b="1" dirty="0">
-                          <a:solidFill>
-                            <a:srgbClr val="718096"/>
-                          </a:solidFill>
-                          <a:latin typeface="Pretendard" pitchFamily="34" charset="0"/>
-                          <a:ea typeface="Pretendard" pitchFamily="34" charset="-122"/>
-                          <a:cs typeface="Pretendard" pitchFamily="34" charset="-120"/>
-                        </a:rPr>
-                        <a:t>Cap </a:t>
-                      </a:r>
-                      <a:pPr indent="0" marL="0">
-                        <a:buNone/>
-                      </a:pPr>
-                      <a:r>
-                        <a:rPr lang="en-US" sz="1050" b="1" dirty="0">
-                          <a:solidFill>
-                            <a:srgbClr val="718096"/>
-                          </a:solidFill>
-                          <a:latin typeface="Pretendard" pitchFamily="34" charset="0"/>
-                          <a:ea typeface="Pretendard" pitchFamily="34" charset="-122"/>
-                          <a:cs typeface="Pretendard" pitchFamily="34" charset="-120"/>
-                        </a:rPr>
-                        <a:t>Rate</a:t>
-                      </a:r>
-                      <a:endParaRPr lang="en-US" sz="1050" dirty="0">
-                        <a:latin typeface="Pretendard" charset="0"/>
-                        <a:ea typeface="Pretendard" charset="0"/>
-                        <a:cs typeface="Pretendard" charset="0"/>
-                      </a:endParaRPr>
-                    </a:p>
-                  </a:txBody>
-                  <a:tcPr marL="50800" marR="50800" marT="25400" marB="25400" anchor="ctr">
-                    <a:lnL w="3810" cap="flat" cmpd="sng" algn="ctr">
-                      <a:solidFill>
-                        <a:srgbClr val="CBD5E0"/>
-                      </a:solidFill>
-                      <a:prstDash val="solid"/>
-                      <a:round/>
-                      <a:headEnd type="none" w="med" len="med"/>
-                      <a:tailEnd type="none" w="med" len="med"/>
-                    </a:lnL>
-                    <a:lnR w="3810" cap="flat" cmpd="sng" algn="ctr">
-                      <a:solidFill>
-                        <a:srgbClr val="CBD5E0"/>
-                      </a:solidFill>
-                      <a:prstDash val="solid"/>
-                      <a:round/>
-                      <a:headEnd type="none" w="med" len="med"/>
-                      <a:tailEnd type="none" w="med" len="med"/>
-                    </a:lnR>
-                    <a:lnT w="3810" cap="flat" cmpd="sng" algn="ctr">
-                      <a:solidFill>
-                        <a:srgbClr val="CBD5E0"/>
-                      </a:solidFill>
-                      <a:prstDash val="solid"/>
-                      <a:round/>
-                      <a:headEnd type="none" w="med" len="med"/>
-                      <a:tailEnd type="none" w="med" len="med"/>
-                    </a:lnT>
-                    <a:lnB w="3810" cap="flat" cmpd="sng" algn="ctr">
-                      <a:solidFill>
-                        <a:srgbClr val="CBD5E0"/>
-                      </a:solidFill>
-                      <a:prstDash val="solid"/>
-                      <a:round/>
-                      <a:headEnd type="none" w="med" len="med"/>
-                      <a:tailEnd type="none" w="med" len="med"/>
-                    </a:lnB>
-                    <a:solidFill>
-                      <a:srgbClr val="F7FAFC"/>
-                    </a:solidFill>
-                  </a:tcPr>
-                </a:tc>
-                <a:tc>
-                  <a:txBody>
-                    <a:bodyPr/>
-                    <a:lstStyle/>
-                    <a:p>
-                      <a:pPr indent="0" marL="0">
-                        <a:buNone/>
-                      </a:pPr>
-                      <a:r>
-                        <a:rPr lang="en-US" sz="1050" b="1" dirty="0">
-                          <a:solidFill>
-                            <a:srgbClr val="718096"/>
-                          </a:solidFill>
-                          <a:latin typeface="Pretendard" pitchFamily="34" charset="0"/>
-                          <a:ea typeface="Pretendard" pitchFamily="34" charset="-122"/>
-                          <a:cs typeface="Pretendard" pitchFamily="34" charset="-120"/>
-                        </a:rPr>
-                        <a:t>투자 </a:t>
-                      </a:r>
-                      <a:pPr indent="0" marL="0">
-                        <a:buNone/>
-                      </a:pPr>
-                      <a:r>
-                        <a:rPr lang="en-US" sz="1050" b="1" dirty="0">
-                          <a:solidFill>
-                            <a:srgbClr val="718096"/>
-                          </a:solidFill>
-                          <a:latin typeface="Pretendard" pitchFamily="34" charset="0"/>
-                          <a:ea typeface="Pretendard" pitchFamily="34" charset="-122"/>
-                          <a:cs typeface="Pretendard" pitchFamily="34" charset="-120"/>
-                        </a:rPr>
-                        <a:t>비용</a:t>
+                        <a:t>이유</a:t>
                       </a:r>
                       <a:endParaRPr lang="en-US" sz="1050" dirty="0">
                         <a:latin typeface="Pretendard" charset="0"/>
@@ -14034,49 +13222,7 @@
                           <a:ea typeface="Pretendard" pitchFamily="34" charset="-122"/>
                           <a:cs typeface="Pretendard" pitchFamily="34" charset="-120"/>
                         </a:rPr>
-                        <a:t>② </a:t>
-                      </a:r>
-                      <a:pPr indent="0" marL="0">
-                        <a:buNone/>
-                      </a:pPr>
-                      <a:r>
-                        <a:rPr lang="en-US" sz="1050" b="1" dirty="0">
-                          <a:solidFill>
-                            <a:srgbClr val="10161F"/>
-                          </a:solidFill>
-                          <a:latin typeface="Pretendard" pitchFamily="34" charset="0"/>
-                          <a:ea typeface="Pretendard" pitchFamily="34" charset="-122"/>
-                          <a:cs typeface="Pretendard" pitchFamily="34" charset="-120"/>
-                        </a:rPr>
-                        <a:t>임대료 </a:t>
-                      </a:r>
-                      <a:pPr indent="0" marL="0">
-                        <a:buNone/>
-                      </a:pPr>
-                      <a:r>
-                        <a:rPr lang="en-US" sz="1050" b="1" dirty="0">
-                          <a:solidFill>
-                            <a:srgbClr val="10161F"/>
-                          </a:solidFill>
-                          <a:latin typeface="Pretendard" pitchFamily="34" charset="0"/>
-                          <a:ea typeface="Pretendard" pitchFamily="34" charset="-122"/>
-                          <a:cs typeface="Pretendard" pitchFamily="34" charset="-120"/>
-                        </a:rPr>
-                        <a:t>현실화 </a:t>
-                      </a:r>
-                      <a:pPr indent="0" marL="0">
-                        <a:buNone/>
-                      </a:pPr>
-                      <a:r>
-                        <a:rPr lang="en-US" sz="1050" b="1" dirty="0">
-                          <a:solidFill>
-                            <a:srgbClr val="10161F"/>
-                          </a:solidFill>
-                          <a:latin typeface="Pretendard" pitchFamily="34" charset="0"/>
-                          <a:ea typeface="Pretendard" pitchFamily="34" charset="-122"/>
-                          <a:cs typeface="Pretendard" pitchFamily="34" charset="-120"/>
-                        </a:rPr>
-                        <a:t>(+5%)</a:t>
+                        <a:t>(임대수익)</a:t>
                       </a:r>
                       <a:endParaRPr lang="en-US" sz="1050" dirty="0">
                         <a:latin typeface="Pretendard" charset="0"/>
@@ -14144,49 +13290,7 @@
                           <a:ea typeface="Pretendard" pitchFamily="34" charset="-122"/>
                           <a:cs typeface="Pretendard" pitchFamily="34" charset="-120"/>
                         </a:rPr>
-                        <a:t>+약 </a:t>
-                      </a:r>
-                      <a:pPr indent="0" marL="0">
-                        <a:buNone/>
-                      </a:pPr>
-                      <a:r>
-                        <a:rPr lang="en-US" sz="1050" dirty="0">
-                          <a:solidFill>
-                            <a:srgbClr val="10161F"/>
-                          </a:solidFill>
-                          <a:latin typeface="Pretendard" pitchFamily="34" charset="0"/>
-                          <a:ea typeface="Pretendard" pitchFamily="34" charset="-122"/>
-                          <a:cs typeface="Pretendard" pitchFamily="34" charset="-120"/>
-                        </a:rPr>
-                        <a:t>0.30억 </a:t>
-                      </a:r>
-                      <a:pPr indent="0" marL="0">
-                        <a:buNone/>
-                      </a:pPr>
-                      <a:r>
-                        <a:rPr lang="en-US" sz="1050" dirty="0">
-                          <a:solidFill>
-                            <a:srgbClr val="10161F"/>
-                          </a:solidFill>
-                          <a:latin typeface="Pretendard" pitchFamily="34" charset="0"/>
-                          <a:ea typeface="Pretendard" pitchFamily="34" charset="-122"/>
-                          <a:cs typeface="Pretendard" pitchFamily="34" charset="-120"/>
-                        </a:rPr>
-                        <a:t>원 </a:t>
-                      </a:r>
-                      <a:pPr indent="0" marL="0">
-                        <a:buNone/>
-                      </a:pPr>
-                      <a:r>
-                        <a:rPr lang="en-US" sz="1050" dirty="0">
-                          <a:solidFill>
-                            <a:srgbClr val="10161F"/>
-                          </a:solidFill>
-                          <a:latin typeface="Pretendard" pitchFamily="34" charset="0"/>
-                          <a:ea typeface="Pretendard" pitchFamily="34" charset="-122"/>
-                          <a:cs typeface="Pretendard" pitchFamily="34" charset="-120"/>
-                        </a:rPr>
-                        <a:t>(+5%)</a:t>
+                        <a:t>★★★★★</a:t>
                       </a:r>
                       <a:endParaRPr lang="en-US" sz="1050" dirty="0">
                         <a:latin typeface="Pretendard" charset="0"/>
@@ -14254,62 +13358,8 @@
                           <a:ea typeface="Pretendard" pitchFamily="34" charset="-122"/>
                           <a:cs typeface="Pretendard" pitchFamily="34" charset="-120"/>
                         </a:rPr>
-                        <a:t>3.86%</a:t>
+                        <a:t>안정 </a:t>
                       </a:r>
-                      <a:endParaRPr lang="en-US" sz="1050" dirty="0">
-                        <a:latin typeface="Pretendard" charset="0"/>
-                        <a:ea typeface="Pretendard" charset="0"/>
-                        <a:cs typeface="Pretendard" charset="0"/>
-                      </a:endParaRPr>
-                    </a:p>
-                  </a:txBody>
-                  <a:tcPr marL="50800" marR="50800" marT="25400" marB="25400" anchor="ctr">
-                    <a:lnL w="3810" cap="flat" cmpd="sng" algn="ctr">
-                      <a:solidFill>
-                        <a:srgbClr val="CBD5E0"/>
-                      </a:solidFill>
-                      <a:prstDash val="solid"/>
-                      <a:round/>
-                      <a:headEnd type="none" w="med" len="med"/>
-                      <a:tailEnd type="none" w="med" len="med"/>
-                    </a:lnL>
-                    <a:lnR w="3810" cap="flat" cmpd="sng" algn="ctr">
-                      <a:solidFill>
-                        <a:srgbClr val="CBD5E0"/>
-                      </a:solidFill>
-                      <a:prstDash val="solid"/>
-                      <a:round/>
-                      <a:headEnd type="none" w="med" len="med"/>
-                      <a:tailEnd type="none" w="med" len="med"/>
-                    </a:lnR>
-                    <a:lnT w="3810" cap="flat" cmpd="sng" algn="ctr">
-                      <a:solidFill>
-                        <a:srgbClr val="CBD5E0"/>
-                      </a:solidFill>
-                      <a:prstDash val="solid"/>
-                      <a:round/>
-                      <a:headEnd type="none" w="med" len="med"/>
-                      <a:tailEnd type="none" w="med" len="med"/>
-                    </a:lnT>
-                    <a:lnB w="3810" cap="flat" cmpd="sng" algn="ctr">
-                      <a:solidFill>
-                        <a:srgbClr val="CBD5E0"/>
-                      </a:solidFill>
-                      <a:prstDash val="solid"/>
-                      <a:round/>
-                      <a:headEnd type="none" w="med" len="med"/>
-                      <a:tailEnd type="none" w="med" len="med"/>
-                    </a:lnB>
-                    <a:solidFill>
-                      <a:srgbClr val="FFFFFF"/>
-                    </a:solidFill>
-                  </a:tcPr>
-                </a:tc>
-                <a:tc>
-                  <a:txBody>
-                    <a:bodyPr/>
-                    <a:lstStyle/>
-                    <a:p>
                       <a:pPr indent="0" marL="0">
                         <a:buNone/>
                       </a:pPr>
@@ -14322,7 +13372,63 @@
                           <a:ea typeface="Pretendard" pitchFamily="34" charset="-122"/>
                           <a:cs typeface="Pretendard" pitchFamily="34" charset="-120"/>
                         </a:rPr>
-                        <a:t>불필요</a:t>
+                        <a:t>MD, </a:t>
+                      </a:r>
+                      <a:pPr indent="0" marL="0">
+                        <a:buNone/>
+                      </a:pPr>
+                      <a:r>
+                        <a:rPr lang="en-US" sz="1050" dirty="0">
+                          <a:solidFill>
+                            <a:srgbClr val="10161F"/>
+                          </a:solidFill>
+                          <a:latin typeface="Pretendard" pitchFamily="34" charset="0"/>
+                          <a:ea typeface="Pretendard" pitchFamily="34" charset="-122"/>
+                          <a:cs typeface="Pretendard" pitchFamily="34" charset="-120"/>
+                        </a:rPr>
+                        <a:t>예측 </a:t>
+                      </a:r>
+                      <a:pPr indent="0" marL="0">
+                        <a:buNone/>
+                      </a:pPr>
+                      <a:r>
+                        <a:rPr lang="en-US" sz="1050" dirty="0">
+                          <a:solidFill>
+                            <a:srgbClr val="10161F"/>
+                          </a:solidFill>
+                          <a:latin typeface="Pretendard" pitchFamily="34" charset="0"/>
+                          <a:ea typeface="Pretendard" pitchFamily="34" charset="-122"/>
+                          <a:cs typeface="Pretendard" pitchFamily="34" charset="-120"/>
+                        </a:rPr>
+                        <a:t>가능한 </a:t>
+                      </a:r>
+                      <a:pPr indent="0" marL="0">
+                        <a:buNone/>
+                      </a:pPr>
+                      <a:r>
+                        <a:rPr lang="en-US" sz="1050" dirty="0">
+                          <a:solidFill>
+                            <a:srgbClr val="10161F"/>
+                          </a:solidFill>
+                          <a:latin typeface="Pretendard" pitchFamily="34" charset="0"/>
+                          <a:ea typeface="Pretendard" pitchFamily="34" charset="-122"/>
+                          <a:cs typeface="Pretendard" pitchFamily="34" charset="-120"/>
+                        </a:rPr>
+                        <a:t>월 </a:t>
+                      </a:r>
+                      <a:pPr indent="0" marL="0">
+                        <a:buNone/>
+                      </a:pPr>
+                      <a:r>
+                        <a:rPr lang="en-US" sz="1050" dirty="0">
+                          <a:solidFill>
+                            <a:srgbClr val="10161F"/>
+                          </a:solidFill>
+                          <a:latin typeface="Pretendard" pitchFamily="34" charset="0"/>
+                          <a:ea typeface="Pretendard" pitchFamily="34" charset="-122"/>
+                          <a:cs typeface="Pretendard" pitchFamily="34" charset="-120"/>
+                        </a:rPr>
+                        <a:t>현금흐름</a:t>
                       </a:r>
                       <a:endParaRPr lang="en-US" sz="1050" dirty="0">
                         <a:latin typeface="Pretendard" charset="0"/>
@@ -14392,7 +13498,7 @@
                           <a:ea typeface="Pretendard" pitchFamily="34" charset="-122"/>
                           <a:cs typeface="Pretendard" pitchFamily="34" charset="-120"/>
                         </a:rPr>
-                        <a:t>③ </a:t>
+                        <a:t>상가 </a:t>
                       </a:r>
                       <a:pPr indent="0" marL="0">
                         <a:buNone/>
@@ -14406,7 +13512,7 @@
                           <a:ea typeface="Pretendard" pitchFamily="34" charset="-122"/>
                           <a:cs typeface="Pretendard" pitchFamily="34" charset="-120"/>
                         </a:rPr>
-                        <a:t>리모델링 </a:t>
+                        <a:t>전문 </a:t>
                       </a:r>
                       <a:pPr indent="0" marL="0">
                         <a:buNone/>
@@ -14420,7 +13526,7 @@
                           <a:ea typeface="Pretendard" pitchFamily="34" charset="-122"/>
                           <a:cs typeface="Pretendard" pitchFamily="34" charset="-120"/>
                         </a:rPr>
-                        <a:t>후 </a:t>
+                        <a:t>임대 </a:t>
                       </a:r>
                       <a:pPr indent="0" marL="0">
                         <a:buNone/>
@@ -14434,21 +13540,7 @@
                           <a:ea typeface="Pretendard" pitchFamily="34" charset="-122"/>
                           <a:cs typeface="Pretendard" pitchFamily="34" charset="-120"/>
                         </a:rPr>
-                        <a:t>임대료 </a:t>
-                      </a:r>
-                      <a:pPr indent="0" marL="0">
-                        <a:buNone/>
-                      </a:pPr>
-                      <a:r>
-                        <a:rPr lang="en-US" sz="1050" b="1" dirty="0">
-                          <a:solidFill>
-                            <a:srgbClr val="10161F"/>
-                          </a:solidFill>
-                          <a:latin typeface="Pretendard" pitchFamily="34" charset="0"/>
-                          <a:ea typeface="Pretendard" pitchFamily="34" charset="-122"/>
-                          <a:cs typeface="Pretendard" pitchFamily="34" charset="-120"/>
-                        </a:rPr>
-                        <a:t>상승</a:t>
+                        <a:t>운영사</a:t>
                       </a:r>
                       <a:endParaRPr lang="en-US" sz="1050" dirty="0">
                         <a:latin typeface="Pretendard" charset="0"/>
@@ -14516,49 +13608,7 @@
                           <a:ea typeface="Pretendard" pitchFamily="34" charset="-122"/>
                           <a:cs typeface="Pretendard" pitchFamily="34" charset="-120"/>
                         </a:rPr>
-                        <a:t>+약 </a:t>
-                      </a:r>
-                      <a:pPr indent="0" marL="0">
-                        <a:buNone/>
-                      </a:pPr>
-                      <a:r>
-                        <a:rPr lang="en-US" sz="1050" dirty="0">
-                          <a:solidFill>
-                            <a:srgbClr val="10161F"/>
-                          </a:solidFill>
-                          <a:latin typeface="Pretendard" pitchFamily="34" charset="0"/>
-                          <a:ea typeface="Pretendard" pitchFamily="34" charset="-122"/>
-                          <a:cs typeface="Pretendard" pitchFamily="34" charset="-120"/>
-                        </a:rPr>
-                        <a:t>0.49억 </a:t>
-                      </a:r>
-                      <a:pPr indent="0" marL="0">
-                        <a:buNone/>
-                      </a:pPr>
-                      <a:r>
-                        <a:rPr lang="en-US" sz="1050" dirty="0">
-                          <a:solidFill>
-                            <a:srgbClr val="10161F"/>
-                          </a:solidFill>
-                          <a:latin typeface="Pretendard" pitchFamily="34" charset="0"/>
-                          <a:ea typeface="Pretendard" pitchFamily="34" charset="-122"/>
-                          <a:cs typeface="Pretendard" pitchFamily="34" charset="-120"/>
-                        </a:rPr>
-                        <a:t>원 </a:t>
-                      </a:r>
-                      <a:pPr indent="0" marL="0">
-                        <a:buNone/>
-                      </a:pPr>
-                      <a:r>
-                        <a:rPr lang="en-US" sz="1050" dirty="0">
-                          <a:solidFill>
-                            <a:srgbClr val="10161F"/>
-                          </a:solidFill>
-                          <a:latin typeface="Pretendard" pitchFamily="34" charset="0"/>
-                          <a:ea typeface="Pretendard" pitchFamily="34" charset="-122"/>
-                          <a:cs typeface="Pretendard" pitchFamily="34" charset="-120"/>
-                        </a:rPr>
-                        <a:t>(+8%)</a:t>
+                        <a:t>★★★★</a:t>
                       </a:r>
                       <a:endParaRPr lang="en-US" sz="1050" dirty="0">
                         <a:latin typeface="Pretendard" charset="0"/>
@@ -14626,7 +13676,77 @@
                           <a:ea typeface="Pretendard" pitchFamily="34" charset="-122"/>
                           <a:cs typeface="Pretendard" pitchFamily="34" charset="-120"/>
                         </a:rPr>
-                        <a:t>3.97%</a:t>
+                        <a:t>MD </a:t>
+                      </a:r>
+                      <a:pPr indent="0" marL="0">
+                        <a:buNone/>
+                      </a:pPr>
+                      <a:r>
+                        <a:rPr lang="en-US" sz="1050" dirty="0">
+                          <a:solidFill>
+                            <a:srgbClr val="10161F"/>
+                          </a:solidFill>
+                          <a:latin typeface="Pretendard" pitchFamily="34" charset="0"/>
+                          <a:ea typeface="Pretendard" pitchFamily="34" charset="-122"/>
+                          <a:cs typeface="Pretendard" pitchFamily="34" charset="-120"/>
+                        </a:rPr>
+                        <a:t>관리 </a:t>
+                      </a:r>
+                      <a:pPr indent="0" marL="0">
+                        <a:buNone/>
+                      </a:pPr>
+                      <a:r>
+                        <a:rPr lang="en-US" sz="1050" dirty="0">
+                          <a:solidFill>
+                            <a:srgbClr val="10161F"/>
+                          </a:solidFill>
+                          <a:latin typeface="Pretendard" pitchFamily="34" charset="0"/>
+                          <a:ea typeface="Pretendard" pitchFamily="34" charset="-122"/>
+                          <a:cs typeface="Pretendard" pitchFamily="34" charset="-120"/>
+                        </a:rPr>
+                        <a:t>노하우 </a:t>
+                      </a:r>
+                      <a:pPr indent="0" marL="0">
+                        <a:buNone/>
+                      </a:pPr>
+                      <a:r>
+                        <a:rPr lang="en-US" sz="1050" dirty="0">
+                          <a:solidFill>
+                            <a:srgbClr val="10161F"/>
+                          </a:solidFill>
+                          <a:latin typeface="Pretendard" pitchFamily="34" charset="0"/>
+                          <a:ea typeface="Pretendard" pitchFamily="34" charset="-122"/>
+                          <a:cs typeface="Pretendard" pitchFamily="34" charset="-120"/>
+                        </a:rPr>
+                        <a:t>보유 </a:t>
+                      </a:r>
+                      <a:pPr indent="0" marL="0">
+                        <a:buNone/>
+                      </a:pPr>
+                      <a:r>
+                        <a:rPr lang="en-US" sz="1050" dirty="0">
+                          <a:solidFill>
+                            <a:srgbClr val="10161F"/>
+                          </a:solidFill>
+                          <a:latin typeface="Pretendard" pitchFamily="34" charset="0"/>
+                          <a:ea typeface="Pretendard" pitchFamily="34" charset="-122"/>
+                          <a:cs typeface="Pretendard" pitchFamily="34" charset="-120"/>
+                        </a:rPr>
+                        <a:t>시 </a:t>
+                      </a:r>
+                      <a:pPr indent="0" marL="0">
+                        <a:buNone/>
+                      </a:pPr>
+                      <a:r>
+                        <a:rPr lang="en-US" sz="1050" dirty="0">
+                          <a:solidFill>
+                            <a:srgbClr val="10161F"/>
+                          </a:solidFill>
+                          <a:latin typeface="Pretendard" pitchFamily="34" charset="0"/>
+                          <a:ea typeface="Pretendard" pitchFamily="34" charset="-122"/>
+                          <a:cs typeface="Pretendard" pitchFamily="34" charset="-120"/>
+                        </a:rPr>
+                        <a:t>최적</a:t>
                       </a:r>
                       <a:endParaRPr lang="en-US" sz="1050" dirty="0">
                         <a:latin typeface="Pretendard" charset="0"/>
@@ -14674,6 +13794,104 @@
                     </a:lnB>
                     <a:solidFill>
                       <a:srgbClr val="F7FAFC"/>
+                    </a:solidFill>
+                  </a:tcPr>
+                </a:tc>
+              </a:tr>
+              <a:tr h="329184">
+                <a:tc>
+                  <a:txBody>
+                    <a:bodyPr/>
+                    <a:lstStyle/>
+                    <a:p>
+                      <a:pPr indent="0" marL="0">
+                        <a:buNone/>
+                      </a:pPr>
+                      <a:r>
+                        <a:rPr lang="en-US" sz="1050" b="1" dirty="0">
+                          <a:solidFill>
+                            <a:srgbClr val="10161F"/>
+                          </a:solidFill>
+                          <a:latin typeface="Pretendard" pitchFamily="34" charset="0"/>
+                          <a:ea typeface="Pretendard" pitchFamily="34" charset="-122"/>
+                          <a:cs typeface="Pretendard" pitchFamily="34" charset="-120"/>
+                        </a:rPr>
+                        <a:t>프랜차이즈 </a:t>
+                      </a:r>
+                      <a:pPr indent="0" marL="0">
+                        <a:buNone/>
+                      </a:pPr>
+                      <a:r>
+                        <a:rPr lang="en-US" sz="1050" b="1" dirty="0">
+                          <a:solidFill>
+                            <a:srgbClr val="10161F"/>
+                          </a:solidFill>
+                          <a:latin typeface="Pretendard" pitchFamily="34" charset="0"/>
+                          <a:ea typeface="Pretendard" pitchFamily="34" charset="-122"/>
+                          <a:cs typeface="Pretendard" pitchFamily="34" charset="-120"/>
+                        </a:rPr>
+                        <a:t>본사 </a:t>
+                      </a:r>
+                      <a:pPr indent="0" marL="0">
+                        <a:buNone/>
+                      </a:pPr>
+                      <a:r>
+                        <a:rPr lang="en-US" sz="1050" b="1" dirty="0">
+                          <a:solidFill>
+                            <a:srgbClr val="10161F"/>
+                          </a:solidFill>
+                          <a:latin typeface="Pretendard" pitchFamily="34" charset="0"/>
+                          <a:ea typeface="Pretendard" pitchFamily="34" charset="-122"/>
+                          <a:cs typeface="Pretendard" pitchFamily="34" charset="-120"/>
+                        </a:rPr>
+                        <a:t>직매장</a:t>
+                      </a:r>
+                      <a:endParaRPr lang="en-US" sz="1050" dirty="0">
+                        <a:latin typeface="Pretendard" charset="0"/>
+                        <a:ea typeface="Pretendard" charset="0"/>
+                        <a:cs typeface="Pretendard" charset="0"/>
+                      </a:endParaRPr>
+                    </a:p>
+                  </a:txBody>
+                  <a:tcPr marL="50800" marR="50800" marT="25400" marB="25400" anchor="ctr">
+                    <a:lnL w="3810" cap="flat" cmpd="sng" algn="ctr">
+                      <a:solidFill>
+                        <a:srgbClr val="CBD5E0"/>
+                      </a:solidFill>
+                      <a:prstDash val="solid"/>
+                      <a:round/>
+                      <a:headEnd type="none" w="med" len="med"/>
+                      <a:tailEnd type="none" w="med" len="med"/>
+                    </a:lnL>
+                    <a:lnR w="3810" cap="flat" cmpd="sng" algn="ctr">
+                      <a:solidFill>
+                        <a:srgbClr val="CBD5E0"/>
+                      </a:solidFill>
+                      <a:prstDash val="solid"/>
+                      <a:round/>
+                      <a:headEnd type="none" w="med" len="med"/>
+                      <a:tailEnd type="none" w="med" len="med"/>
+                    </a:lnR>
+                    <a:lnT w="3810" cap="flat" cmpd="sng" algn="ctr">
+                      <a:solidFill>
+                        <a:srgbClr val="CBD5E0"/>
+                      </a:solidFill>
+                      <a:prstDash val="solid"/>
+                      <a:round/>
+                      <a:headEnd type="none" w="med" len="med"/>
+                      <a:tailEnd type="none" w="med" len="med"/>
+                    </a:lnT>
+                    <a:lnB w="3810" cap="flat" cmpd="sng" algn="ctr">
+                      <a:solidFill>
+                        <a:srgbClr val="CBD5E0"/>
+                      </a:solidFill>
+                      <a:prstDash val="solid"/>
+                      <a:round/>
+                      <a:headEnd type="none" w="med" len="med"/>
+                      <a:tailEnd type="none" w="med" len="med"/>
+                    </a:lnB>
+                    <a:solidFill>
+                      <a:srgbClr val="FFFFFF"/>
                     </a:solidFill>
                   </a:tcPr>
                 </a:tc>
@@ -14694,7 +13912,75 @@
                           <a:ea typeface="Pretendard" pitchFamily="34" charset="-122"/>
                           <a:cs typeface="Pretendard" pitchFamily="34" charset="-120"/>
                         </a:rPr>
-                        <a:t>약 </a:t>
+                        <a:t>★★★</a:t>
+                      </a:r>
+                      <a:endParaRPr lang="en-US" sz="1050" dirty="0">
+                        <a:latin typeface="Pretendard" charset="0"/>
+                        <a:ea typeface="Pretendard" charset="0"/>
+                        <a:cs typeface="Pretendard" charset="0"/>
+                      </a:endParaRPr>
+                    </a:p>
+                  </a:txBody>
+                  <a:tcPr marL="50800" marR="50800" marT="25400" marB="25400" anchor="ctr">
+                    <a:lnL w="3810" cap="flat" cmpd="sng" algn="ctr">
+                      <a:solidFill>
+                        <a:srgbClr val="CBD5E0"/>
+                      </a:solidFill>
+                      <a:prstDash val="solid"/>
+                      <a:round/>
+                      <a:headEnd type="none" w="med" len="med"/>
+                      <a:tailEnd type="none" w="med" len="med"/>
+                    </a:lnL>
+                    <a:lnR w="3810" cap="flat" cmpd="sng" algn="ctr">
+                      <a:solidFill>
+                        <a:srgbClr val="CBD5E0"/>
+                      </a:solidFill>
+                      <a:prstDash val="solid"/>
+                      <a:round/>
+                      <a:headEnd type="none" w="med" len="med"/>
+                      <a:tailEnd type="none" w="med" len="med"/>
+                    </a:lnR>
+                    <a:lnT w="3810" cap="flat" cmpd="sng" algn="ctr">
+                      <a:solidFill>
+                        <a:srgbClr val="CBD5E0"/>
+                      </a:solidFill>
+                      <a:prstDash val="solid"/>
+                      <a:round/>
+                      <a:headEnd type="none" w="med" len="med"/>
+                      <a:tailEnd type="none" w="med" len="med"/>
+                    </a:lnT>
+                    <a:lnB w="3810" cap="flat" cmpd="sng" algn="ctr">
+                      <a:solidFill>
+                        <a:srgbClr val="CBD5E0"/>
+                      </a:solidFill>
+                      <a:prstDash val="solid"/>
+                      <a:round/>
+                      <a:headEnd type="none" w="med" len="med"/>
+                      <a:tailEnd type="none" w="med" len="med"/>
+                    </a:lnB>
+                    <a:solidFill>
+                      <a:srgbClr val="FFFFFF"/>
+                    </a:solidFill>
+                  </a:tcPr>
+                </a:tc>
+                <a:tc>
+                  <a:txBody>
+                    <a:bodyPr/>
+                    <a:lstStyle/>
+                    <a:p>
+                      <a:pPr indent="0" marL="0">
+                        <a:buNone/>
+                      </a:pPr>
+                      <a:r>
+                        <a:rPr lang="en-US" sz="1050" dirty="0">
+                          <a:solidFill>
+                            <a:srgbClr val="10161F"/>
+                          </a:solidFill>
+                          <a:latin typeface="Pretendard" pitchFamily="34" charset="0"/>
+                          <a:ea typeface="Pretendard" pitchFamily="34" charset="-122"/>
+                          <a:cs typeface="Pretendard" pitchFamily="34" charset="-120"/>
+                        </a:rPr>
+                        <a:t>브랜드 </a:t>
                       </a:r>
                       <a:pPr indent="0" marL="0">
                         <a:buNone/>
@@ -14708,7 +13994,7 @@
                           <a:ea typeface="Pretendard" pitchFamily="34" charset="-122"/>
                           <a:cs typeface="Pretendard" pitchFamily="34" charset="-120"/>
                         </a:rPr>
-                        <a:t>15.00억 </a:t>
+                        <a:t>노출 </a:t>
                       </a:r>
                       <a:pPr indent="0" marL="0">
                         <a:buNone/>
@@ -14722,7 +14008,49 @@
                           <a:ea typeface="Pretendard" pitchFamily="34" charset="-122"/>
                           <a:cs typeface="Pretendard" pitchFamily="34" charset="-120"/>
                         </a:rPr>
-                        <a:t>원</a:t>
+                        <a:t>+ </a:t>
+                      </a:r>
+                      <a:pPr indent="0" marL="0">
+                        <a:buNone/>
+                      </a:pPr>
+                      <a:r>
+                        <a:rPr lang="en-US" sz="1050" dirty="0">
+                          <a:solidFill>
+                            <a:srgbClr val="10161F"/>
+                          </a:solidFill>
+                          <a:latin typeface="Pretendard" pitchFamily="34" charset="0"/>
+                          <a:ea typeface="Pretendard" pitchFamily="34" charset="-122"/>
+                          <a:cs typeface="Pretendard" pitchFamily="34" charset="-120"/>
+                        </a:rPr>
+                        <a:t>직영 </a:t>
+                      </a:r>
+                      <a:pPr indent="0" marL="0">
+                        <a:buNone/>
+                      </a:pPr>
+                      <a:r>
+                        <a:rPr lang="en-US" sz="1050" dirty="0">
+                          <a:solidFill>
+                            <a:srgbClr val="10161F"/>
+                          </a:solidFill>
+                          <a:latin typeface="Pretendard" pitchFamily="34" charset="0"/>
+                          <a:ea typeface="Pretendard" pitchFamily="34" charset="-122"/>
+                          <a:cs typeface="Pretendard" pitchFamily="34" charset="-120"/>
+                        </a:rPr>
+                        <a:t>운영 </a:t>
+                      </a:r>
+                      <a:pPr indent="0" marL="0">
+                        <a:buNone/>
+                      </a:pPr>
+                      <a:r>
+                        <a:rPr lang="en-US" sz="1050" dirty="0">
+                          <a:solidFill>
+                            <a:srgbClr val="10161F"/>
+                          </a:solidFill>
+                          <a:latin typeface="Pretendard" pitchFamily="34" charset="0"/>
+                          <a:ea typeface="Pretendard" pitchFamily="34" charset="-122"/>
+                          <a:cs typeface="Pretendard" pitchFamily="34" charset="-120"/>
+                        </a:rPr>
+                        <a:t>가능</a:t>
                       </a:r>
                       <a:endParaRPr lang="en-US" sz="1050" dirty="0">
                         <a:latin typeface="Pretendard" charset="0"/>
@@ -14769,7 +14097,7 @@
                       <a:tailEnd type="none" w="med" len="med"/>
                     </a:lnB>
                     <a:solidFill>
-                      <a:srgbClr val="F7FAFC"/>
+                      <a:srgbClr val="FFFFFF"/>
                     </a:solidFill>
                   </a:tcPr>
                 </a:tc>
@@ -14780,13 +14108,13 @@
       </p:graphicFrame>
       <p:sp>
         <p:nvSpPr>
-          <p:cNvPr id="8" name="Shape 5"/>
-          <p:cNvSpPr/>
-          <p:nvPr/>
-        </p:nvSpPr>
-        <p:spPr>
-          <a:xfrm>
-            <a:off x="566928" y="5349240"/>
+          <p:cNvPr id="29" name="Shape 26"/>
+          <p:cNvSpPr/>
+          <p:nvPr/>
+        </p:nvSpPr>
+        <p:spPr>
+          <a:xfrm>
+            <a:off x="566928" y="5678424"/>
             <a:ext cx="11057839" cy="804672"/>
           </a:xfrm>
           <a:prstGeom prst="roundRect">
@@ -14807,13 +14135,13 @@
       </p:sp>
       <p:sp>
         <p:nvSpPr>
-          <p:cNvPr id="9" name="Text 6"/>
-          <p:cNvSpPr/>
-          <p:nvPr/>
-        </p:nvSpPr>
-        <p:spPr>
-          <a:xfrm>
-            <a:off x="749808" y="5458968"/>
+          <p:cNvPr id="30" name="Text 27"/>
+          <p:cNvSpPr/>
+          <p:nvPr/>
+        </p:nvSpPr>
+        <p:spPr>
+          <a:xfrm>
+            <a:off x="749808" y="5788152"/>
             <a:ext cx="1691640" cy="256032"/>
           </a:xfrm>
           <a:prstGeom prst="rect">
@@ -14846,13 +14174,13 @@
       </p:sp>
       <p:sp>
         <p:nvSpPr>
-          <p:cNvPr id="10" name="Text 7"/>
-          <p:cNvSpPr/>
-          <p:nvPr/>
-        </p:nvSpPr>
-        <p:spPr>
-          <a:xfrm>
-            <a:off x="2487168" y="5422392"/>
+          <p:cNvPr id="31" name="Text 28"/>
+          <p:cNvSpPr/>
+          <p:nvPr/>
+        </p:nvSpPr>
+        <p:spPr>
+          <a:xfrm>
+            <a:off x="2487168" y="5751576"/>
             <a:ext cx="8954719" cy="658368"/>
           </a:xfrm>
           <a:prstGeom prst="rect">
@@ -14880,7 +14208,7 @@
                 <a:ea typeface="Pretendard" pitchFamily="34" charset="-122"/>
                 <a:cs typeface="Pretendard" pitchFamily="34" charset="-120"/>
               </a:rPr>
-              <a:t>{"ok":true,"mocked":true,"extractedFields":{"area_signal":"역삼","asset_type":"오피스빌딩","price_band":"300억","size_signal":"3000평(약 9917.4㎡)"},"extractedFacts":{"region":"역삼","exactAddressCandidate":"역삼동 742-1","assetType":"오피스빌딩","priceText":"300억","sizeText":"3000평(약 9917.4㎡)","currentUse":"오피스","currentUseSignal":"근린생활시설","leaseSignal":"임대중","vacancySignal":"공실없음","tenantNames":["쿠팡","네이버"],"unitRentTexts":["301호: 1500만"],"sellerMotivationText":"자산 효율화","brokerNotes":["초역세권 매물"]},"detectedSensitiveFields":["exact_address","tenant_name"],"ambiguousFields":[],"warnings":[],"areaSignal":"역삼","assetType":"오피스빌딩","priceBand":"300억","sizeSignal":"3000평(약 9917.4㎡)","dealType":"매각","buildingName":"역삼 센트럴타워","exactAddress":"역삼동 742-1","totalFloorArea":9917.3,"buildYear":2015,"currentUseSignal":"근린생활시설","vacancySignal":"공실 없음","fitSummary":"초역세권 근생 빌딩으로 시행/사옥 매입에 최적화","cautionSummary":"주요 임차 업종 만기 조율 필요","hiddenFields":["exact_address","seller_motivation"],"confidence":{"areaSignal":"confirmed","assetType":"confirmed","priceBand":"ai_hypothesis","fitSummary":"ai_hypothesis"},"missingData":["sizeSignal"],"boundaryNote":"본 자료는 실거래 통계 기반 참고치입니다.","buyerType":"법인 사옥형","budgetRange":{"min":50,"max":80,"display":"50억~80억"},"preferredRegions":["강남","성수"],"assetTypes":["꼬마빌딩","사옥용"],"purchasePurpose":"사옥용 매입","mustHave":["초역세권","주차"],"niceToHave":["테라스","루프탑"],"riskTolerance":"medium","financingNote":"자본금 50% 준비","missingQuestions":["구체적인 입주 시기가 언제인가요?","선호하는 수익률이 있나요?"],"privacyNotes":["연락처 비공개"],"fitReasons":["매수자 예산(50-80억)에 부합하는 매물입니다.","요청하신 성수/강남 권역에 해당합니다."],"cautionReasons":["요청한 용도와 달리 명도 협의가 다소 필요합니다."],"recommendedNextAction":"현장 답사 제안","kakaoMessage":"안녕하세요! 요청하신 조건에 부합하는 추천 매물이 있어 안내해 드립니다. 확인해보시고 피드백 부탁드립니다.","title":"강남 역삼역 초역세권 오피스 사옥용 빌딩 매각","shortSummary":"역삼역 도보 5분 거리의 준신축급 대형 오피스빌딩입니다.","dealPoints":["초역세권","사옥 최적"],"cautionPoints":["명도 조율 필요"],"hiddenInfoNotice":["보증금 및 지번은 인가 후 확인 가능"],"gateMessage":"G1 등급 등록이 필요합니다.","kakaoText":"강남 역삼역 오피스 빌딩 매각 안내입니다.","exactUnitCandidate":"101호","floor":"1층","areaSqmText":"150㎡","spaceType":"office","depositText":"5000만","monthlyRentText":"400만","maintenanceFeeText":"50만","availableFromText":"즉시입주","leaseTermMonthsText":"24","incentivesText":"렌트프리 2개월","restrictions":[],"landlordIdentity":"김성수","currentTenant":"스타트업","vacancyReason":"이전 확장","rentNegotiation":"협의 가능","region":"성수동","areaSqm":150,"deposit":5000,"monthlyRent":400,"maintenanceFee":50,"availableFrom":"즉시입주","leaseTermMonths":24,"incentives":{"rentFreeMonths":2,"interiorSupport":"일부 인테리어 지원","freeRentDetail":"렌트프리 2개월 지원"},"shortSummaryLease":"성수역 도보 5분 거리 1층 리테일 상가 매물입니다."}</a:t>
+              <a:t>[참고] 종합 가치 제안: 서초권역 핵심 상권의 희소성 높은 우량 자산으로, 안정적인 임대 수익과 향후 공법상 밸류업 및 권역 지가 상승에 따른 자본 이득(Capital Gain)을 동시에 실현할 수 있는 전략적 매물입니다.</a:t>
             </a:r>
             <a:endParaRPr lang="en-US" sz="1100" dirty="0"/>
           </a:p>
@@ -14888,7 +14216,7 @@
       </p:sp>
       <p:sp>
         <p:nvSpPr>
-          <p:cNvPr id="11" name="Text 8"/>
+          <p:cNvPr id="32" name="Text 29"/>
           <p:cNvSpPr/>
           <p:nvPr/>
         </p:nvSpPr>
@@ -14927,7 +14255,7 @@
       </p:sp>
       <p:sp>
         <p:nvSpPr>
-          <p:cNvPr id="12" name="Text 9"/>
+          <p:cNvPr id="33" name="Text 30"/>
           <p:cNvSpPr/>
           <p:nvPr/>
         </p:nvSpPr>
@@ -15142,11 +14470,11 @@
         <p:spPr>
           <a:xfrm>
             <a:off x="566928" y="1572768"/>
-            <a:ext cx="11057839" cy="3200400"/>
+            <a:ext cx="2490140" cy="3200400"/>
           </a:xfrm>
           <a:prstGeom prst="roundRect">
             <a:avLst>
-              <a:gd name="adj" fmla="val 1714"/>
+              <a:gd name="adj" fmla="val 2203"/>
             </a:avLst>
           </a:prstGeom>
           <a:solidFill>
@@ -15228,7 +14556,7 @@
         <p:spPr>
           <a:xfrm>
             <a:off x="786384" y="2304288"/>
-            <a:ext cx="10618927" cy="365760"/>
+            <a:ext cx="2051228" cy="365760"/>
           </a:xfrm>
           <a:prstGeom prst="rect">
             <a:avLst/>
@@ -15252,7 +14580,7 @@
                 <a:ea typeface="Pretendard" pitchFamily="34" charset="-122"/>
                 <a:cs typeface="Pretendard" pitchFamily="34" charset="-120"/>
               </a:rPr>
-              <a:t>{"ok"</a:t>
+              <a:t>초기 관심 표명 → 담당자 연락</a:t>
             </a:r>
             <a:endParaRPr lang="en-US" sz="1600" dirty="0"/>
           </a:p>
@@ -15267,7 +14595,7 @@
         <p:spPr>
           <a:xfrm>
             <a:off x="786384" y="2761488"/>
-            <a:ext cx="10618927" cy="1828800"/>
+            <a:ext cx="2051228" cy="1828800"/>
           </a:xfrm>
           <a:prstGeom prst="rect">
             <a:avLst/>
@@ -15282,8 +14610,147 @@
             <a:pPr indent="0" marL="0">
               <a:buNone/>
             </a:pPr>
-            <a:r>
-              <a:rPr lang="en-US" sz="1100" dirty="0">
+            <a:endParaRPr lang="en-US" sz="1100" dirty="0"/>
+          </a:p>
+        </p:txBody>
+      </p:sp>
+      <p:sp>
+        <p:nvSpPr>
+          <p:cNvPr id="11" name="Shape 9"/>
+          <p:cNvSpPr/>
+          <p:nvPr/>
+        </p:nvSpPr>
+        <p:spPr>
+          <a:xfrm>
+            <a:off x="3148508" y="3035808"/>
+            <a:ext cx="182880" cy="274320"/>
+          </a:xfrm>
+          <a:prstGeom prst="rightArrow">
+            <a:avLst/>
+          </a:prstGeom>
+          <a:solidFill>
+            <a:srgbClr val="CBD5E0"/>
+          </a:solidFill>
+          <a:ln w="6350">
+            <a:solidFill>
+              <a:srgbClr val="718096"/>
+            </a:solidFill>
+            <a:prstDash val="solid"/>
+          </a:ln>
+        </p:spPr>
+      </p:sp>
+      <p:sp>
+        <p:nvSpPr>
+          <p:cNvPr id="12" name="Shape 10"/>
+          <p:cNvSpPr/>
+          <p:nvPr/>
+        </p:nvSpPr>
+        <p:spPr>
+          <a:xfrm>
+            <a:off x="3422828" y="1572768"/>
+            <a:ext cx="2490140" cy="3200400"/>
+          </a:xfrm>
+          <a:prstGeom prst="roundRect">
+            <a:avLst>
+              <a:gd name="adj" fmla="val 2203"/>
+            </a:avLst>
+          </a:prstGeom>
+          <a:solidFill>
+            <a:srgbClr val="F7FAFC"/>
+          </a:solidFill>
+          <a:ln w="6350">
+            <a:solidFill>
+              <a:srgbClr val="CBD5E0"/>
+            </a:solidFill>
+            <a:prstDash val="solid"/>
+          </a:ln>
+        </p:spPr>
+      </p:sp>
+      <p:sp>
+        <p:nvSpPr>
+          <p:cNvPr id="13" name="Shape 11"/>
+          <p:cNvSpPr/>
+          <p:nvPr/>
+        </p:nvSpPr>
+        <p:spPr>
+          <a:xfrm>
+            <a:off x="3642284" y="1792224"/>
+            <a:ext cx="384048" cy="384048"/>
+          </a:xfrm>
+          <a:prstGeom prst="ellipse">
+            <a:avLst/>
+          </a:prstGeom>
+          <a:solidFill>
+            <a:srgbClr val="B98A2E"/>
+          </a:solidFill>
+          <a:ln/>
+        </p:spPr>
+      </p:sp>
+      <p:sp>
+        <p:nvSpPr>
+          <p:cNvPr id="14" name="Text 12"/>
+          <p:cNvSpPr/>
+          <p:nvPr/>
+        </p:nvSpPr>
+        <p:spPr>
+          <a:xfrm>
+            <a:off x="3642284" y="1792224"/>
+            <a:ext cx="384048" cy="384048"/>
+          </a:xfrm>
+          <a:prstGeom prst="rect">
+            <a:avLst/>
+          </a:prstGeom>
+          <a:noFill/>
+          <a:ln/>
+        </p:spPr>
+        <p:txBody>
+          <a:bodyPr wrap="square" lIns="0" tIns="0" rIns="0" bIns="0" rtlCol="0" anchor="ctr"/>
+          <a:lstStyle/>
+          <a:p>
+            <a:pPr algn="ctr" indent="0" marL="0">
+              <a:buNone/>
+            </a:pPr>
+            <a:r>
+              <a:rPr lang="en-US" sz="1300" b="1" dirty="0">
+                <a:solidFill>
+                  <a:srgbClr val="FFFFFF"/>
+                </a:solidFill>
+                <a:latin typeface="Arial" pitchFamily="34" charset="0"/>
+                <a:ea typeface="Arial" pitchFamily="34" charset="-122"/>
+                <a:cs typeface="Arial" pitchFamily="34" charset="-120"/>
+              </a:rPr>
+              <a:t>STEP 2</a:t>
+            </a:r>
+            <a:endParaRPr lang="en-US" sz="1300" dirty="0"/>
+          </a:p>
+        </p:txBody>
+      </p:sp>
+      <p:sp>
+        <p:nvSpPr>
+          <p:cNvPr id="15" name="Text 13"/>
+          <p:cNvSpPr/>
+          <p:nvPr/>
+        </p:nvSpPr>
+        <p:spPr>
+          <a:xfrm>
+            <a:off x="3642284" y="2304288"/>
+            <a:ext cx="2051228" cy="365760"/>
+          </a:xfrm>
+          <a:prstGeom prst="rect">
+            <a:avLst/>
+          </a:prstGeom>
+          <a:noFill/>
+          <a:ln/>
+        </p:spPr>
+        <p:txBody>
+          <a:bodyPr wrap="square" rtlCol="0" anchor="ctr"/>
+          <a:lstStyle/>
+          <a:p>
+            <a:pPr indent="0" marL="0">
+              <a:buNone/>
+            </a:pPr>
+            <a:r>
+              <a:rPr lang="en-US" sz="1600" b="1" dirty="0">
                 <a:solidFill>
                   <a:srgbClr val="10161F"/>
                 </a:solidFill>
@@ -15291,15 +14758,399 @@
                 <a:ea typeface="Pretendard" pitchFamily="34" charset="-122"/>
                 <a:cs typeface="Pretendard" pitchFamily="34" charset="-120"/>
               </a:rPr>
-              <a:t>true,"mocked":true,"extractedFields":{"area_signal":"역삼","asset_type":"오피스빌딩","price_band":"300억","size_signal":"3000평(약 9917.4㎡)"},"extractedFacts":{"region":"역삼","exactAddressCandidate":"역삼동 742-1","assetType":"오피스빌딩","priceText":"300억","sizeText":"3000평(약 9917.4㎡)","currentUse":"오피스","currentUseSignal":"근린생활시설","leaseSignal":"임대중","vacancySignal":"공실없음","tenantNames":["쿠팡","네이버"],"unitRentTexts":["301호: 1500만"],"sellerMotivationText":"자산 효율화","brokerNotes":["초역세권 매물"]},"detectedSensitiveFields":["exact_address","tenant_name"],"ambiguousFields":[],"warnings":[],"areaSignal":"역삼","assetType":"오피스빌딩","priceBand":"300억","sizeSignal":"3000평(약 9917.4㎡)","dealType":"매각","buildingName":"역삼 센트럴타워","exactAddress":"역삼동 742-1","totalFloorArea":9917.3,"buildYear":2015,"currentUseSignal":"근린생활시설","vacancySignal":"공실 없음","fitSummary":"초역세권 근생 빌딩으로 시행/사옥 매입에 최적화","cautionSummary":"주요 임차 업종 만기 조율 필요","hiddenFields":["exact_address","seller_motivation"],"confidence":{"areaSignal":"confirmed","assetType":"confirmed","priceBand":"ai_hypothesis","fitSummary":"ai_hypothesis"},"missingData":["sizeSignal"],"boundaryNote":"본 자료는 실거래 통계 기반 참고치입니다.","buyerType":"법인 사옥형","budgetRange":{"min":50,"max":80,"display":"50억~80억"},"preferredRegions":["강남","성수"],"assetTypes":["꼬마빌딩","사옥용"],"purchasePurpose":"사옥용 매입","mustHave":["초역세권","주차"],"niceToHave":["테라스","루프탑"],"riskTolerance":"medium","financingNote":"자본금 50% 준비","missingQuestions":["구체적인 입주 시기가 언제인가요?","선호하는 수익률이 있나요?"],"privacyNotes":["연락처 비공개"],"fitReasons":["매수자 예산(50-80억)에 부합하는 매물입니다.","요청하신 성수/강남 권역에 해당합니다."],"cautionReasons":["요청한 용도와 달리 명도 협의가 다소 필요합니다."],"recommendedNextAction":"현장 답사 제안","kakaoMessage":"안녕하세요! 요청하신 조건에 부합하는 추천 매물이 있어 안내해 드립니다. 확인해보시고 피드백 부탁드립니다.","title":"강남 역삼역 초역세권 오피스 사옥용 빌딩 매각","shortSummary":"역삼역 도보 5분 거리의 준신축급 대형 오피스빌딩입니다.","dealPoints":["초역세권","사옥 최적"],"cautionPoints":["명도 조율 필요"],"hiddenInfoNotice":["보증금 및 지번은 인가 후 확인 가능"],"gateMessage":"G1 등급 등록이 필요합니다.","kakaoText":"강남 역삼역 오피스 빌딩 매각 안내입니다.","exactUnitCandidate":"101호","floor":"1층","areaSqmText":"150㎡","spaceType":"office","depositText":"5000만","monthlyRentText":"400만","maintenanceFeeText":"50만","availableFromText":"즉시입주","leaseTermMonthsText":"24","incentivesText":"렌트프리 2개월","restrictions":[],"landlordIdentity":"김성수","currentTenant":"스타트업","vacancyReason":"이전 확장","rentNegotiation":"협의 가능","region":"성수동","areaSqm":150,"deposit":5000,"monthlyRent":400,"maintenanceFee":50,"availableFrom":"즉시입주","leaseTermMonths":24,"incentives":{"rentFreeMonths":2,"interiorSupport":"일부 인테리어 지원","freeRentDetail":"렌트프리 2개월 지원"},"shortSummaryLease":"성수역 도보 5분 거리 1층 리테일 상가 매물입니다."}</a:t>
-            </a:r>
+              <a:t>NDA 체결 → 임차인 정보 및 임대차계약서 제공</a:t>
+            </a:r>
+            <a:endParaRPr lang="en-US" sz="1600" dirty="0"/>
+          </a:p>
+        </p:txBody>
+      </p:sp>
+      <p:sp>
+        <p:nvSpPr>
+          <p:cNvPr id="16" name="Text 14"/>
+          <p:cNvSpPr/>
+          <p:nvPr/>
+        </p:nvSpPr>
+        <p:spPr>
+          <a:xfrm>
+            <a:off x="3642284" y="2761488"/>
+            <a:ext cx="2051228" cy="1828800"/>
+          </a:xfrm>
+          <a:prstGeom prst="rect">
+            <a:avLst/>
+          </a:prstGeom>
+          <a:noFill/>
+          <a:ln/>
+        </p:spPr>
+        <p:txBody>
+          <a:bodyPr wrap="square" rtlCol="0" anchor="t"/>
+          <a:lstStyle/>
+          <a:p>
+            <a:pPr indent="0" marL="0">
+              <a:buNone/>
+            </a:pPr>
             <a:endParaRPr lang="en-US" sz="1100" dirty="0"/>
           </a:p>
         </p:txBody>
       </p:sp>
       <p:sp>
         <p:nvSpPr>
-          <p:cNvPr id="11" name="Text 9"/>
+          <p:cNvPr id="17" name="Shape 15"/>
+          <p:cNvSpPr/>
+          <p:nvPr/>
+        </p:nvSpPr>
+        <p:spPr>
+          <a:xfrm>
+            <a:off x="6004408" y="3035808"/>
+            <a:ext cx="182880" cy="274320"/>
+          </a:xfrm>
+          <a:prstGeom prst="rightArrow">
+            <a:avLst/>
+          </a:prstGeom>
+          <a:solidFill>
+            <a:srgbClr val="CBD5E0"/>
+          </a:solidFill>
+          <a:ln w="6350">
+            <a:solidFill>
+              <a:srgbClr val="718096"/>
+            </a:solidFill>
+            <a:prstDash val="solid"/>
+          </a:ln>
+        </p:spPr>
+      </p:sp>
+      <p:sp>
+        <p:nvSpPr>
+          <p:cNvPr id="18" name="Shape 16"/>
+          <p:cNvSpPr/>
+          <p:nvPr/>
+        </p:nvSpPr>
+        <p:spPr>
+          <a:xfrm>
+            <a:off x="6278728" y="1572768"/>
+            <a:ext cx="2490140" cy="3200400"/>
+          </a:xfrm>
+          <a:prstGeom prst="roundRect">
+            <a:avLst>
+              <a:gd name="adj" fmla="val 2203"/>
+            </a:avLst>
+          </a:prstGeom>
+          <a:solidFill>
+            <a:srgbClr val="F7FAFC"/>
+          </a:solidFill>
+          <a:ln w="6350">
+            <a:solidFill>
+              <a:srgbClr val="CBD5E0"/>
+            </a:solidFill>
+            <a:prstDash val="solid"/>
+          </a:ln>
+        </p:spPr>
+      </p:sp>
+      <p:sp>
+        <p:nvSpPr>
+          <p:cNvPr id="19" name="Shape 17"/>
+          <p:cNvSpPr/>
+          <p:nvPr/>
+        </p:nvSpPr>
+        <p:spPr>
+          <a:xfrm>
+            <a:off x="6498184" y="1792224"/>
+            <a:ext cx="384048" cy="384048"/>
+          </a:xfrm>
+          <a:prstGeom prst="ellipse">
+            <a:avLst/>
+          </a:prstGeom>
+          <a:solidFill>
+            <a:srgbClr val="B98A2E"/>
+          </a:solidFill>
+          <a:ln/>
+        </p:spPr>
+      </p:sp>
+      <p:sp>
+        <p:nvSpPr>
+          <p:cNvPr id="20" name="Text 18"/>
+          <p:cNvSpPr/>
+          <p:nvPr/>
+        </p:nvSpPr>
+        <p:spPr>
+          <a:xfrm>
+            <a:off x="6498184" y="1792224"/>
+            <a:ext cx="384048" cy="384048"/>
+          </a:xfrm>
+          <a:prstGeom prst="rect">
+            <a:avLst/>
+          </a:prstGeom>
+          <a:noFill/>
+          <a:ln/>
+        </p:spPr>
+        <p:txBody>
+          <a:bodyPr wrap="square" lIns="0" tIns="0" rIns="0" bIns="0" rtlCol="0" anchor="ctr"/>
+          <a:lstStyle/>
+          <a:p>
+            <a:pPr algn="ctr" indent="0" marL="0">
+              <a:buNone/>
+            </a:pPr>
+            <a:r>
+              <a:rPr lang="en-US" sz="1300" b="1" dirty="0">
+                <a:solidFill>
+                  <a:srgbClr val="FFFFFF"/>
+                </a:solidFill>
+                <a:latin typeface="Arial" pitchFamily="34" charset="0"/>
+                <a:ea typeface="Arial" pitchFamily="34" charset="-122"/>
+                <a:cs typeface="Arial" pitchFamily="34" charset="-120"/>
+              </a:rPr>
+              <a:t>STEP 3</a:t>
+            </a:r>
+            <a:endParaRPr lang="en-US" sz="1300" dirty="0"/>
+          </a:p>
+        </p:txBody>
+      </p:sp>
+      <p:sp>
+        <p:nvSpPr>
+          <p:cNvPr id="21" name="Text 19"/>
+          <p:cNvSpPr/>
+          <p:nvPr/>
+        </p:nvSpPr>
+        <p:spPr>
+          <a:xfrm>
+            <a:off x="6498184" y="2304288"/>
+            <a:ext cx="2051228" cy="365760"/>
+          </a:xfrm>
+          <a:prstGeom prst="rect">
+            <a:avLst/>
+          </a:prstGeom>
+          <a:noFill/>
+          <a:ln/>
+        </p:spPr>
+        <p:txBody>
+          <a:bodyPr wrap="square" rtlCol="0" anchor="ctr"/>
+          <a:lstStyle/>
+          <a:p>
+            <a:pPr indent="0" marL="0">
+              <a:buNone/>
+            </a:pPr>
+            <a:r>
+              <a:rPr lang="en-US" sz="1600" b="1" dirty="0">
+                <a:solidFill>
+                  <a:srgbClr val="10161F"/>
+                </a:solidFill>
+                <a:latin typeface="Pretendard" pitchFamily="34" charset="0"/>
+                <a:ea typeface="Pretendard" pitchFamily="34" charset="-122"/>
+                <a:cs typeface="Pretendard" pitchFamily="34" charset="-120"/>
+              </a:rPr>
+              <a:t>현장 실사 일정 조율 → 건물 컨디션 및 설비 직접 확인</a:t>
+            </a:r>
+            <a:endParaRPr lang="en-US" sz="1600" dirty="0"/>
+          </a:p>
+        </p:txBody>
+      </p:sp>
+      <p:sp>
+        <p:nvSpPr>
+          <p:cNvPr id="22" name="Text 20"/>
+          <p:cNvSpPr/>
+          <p:nvPr/>
+        </p:nvSpPr>
+        <p:spPr>
+          <a:xfrm>
+            <a:off x="6498184" y="2761488"/>
+            <a:ext cx="2051228" cy="1828800"/>
+          </a:xfrm>
+          <a:prstGeom prst="rect">
+            <a:avLst/>
+          </a:prstGeom>
+          <a:noFill/>
+          <a:ln/>
+        </p:spPr>
+        <p:txBody>
+          <a:bodyPr wrap="square" rtlCol="0" anchor="t"/>
+          <a:lstStyle/>
+          <a:p>
+            <a:pPr indent="0" marL="0">
+              <a:buNone/>
+            </a:pPr>
+            <a:endParaRPr lang="en-US" sz="1100" dirty="0"/>
+          </a:p>
+        </p:txBody>
+      </p:sp>
+      <p:sp>
+        <p:nvSpPr>
+          <p:cNvPr id="23" name="Shape 21"/>
+          <p:cNvSpPr/>
+          <p:nvPr/>
+        </p:nvSpPr>
+        <p:spPr>
+          <a:xfrm>
+            <a:off x="8860307" y="3035808"/>
+            <a:ext cx="182880" cy="274320"/>
+          </a:xfrm>
+          <a:prstGeom prst="rightArrow">
+            <a:avLst/>
+          </a:prstGeom>
+          <a:solidFill>
+            <a:srgbClr val="CBD5E0"/>
+          </a:solidFill>
+          <a:ln w="6350">
+            <a:solidFill>
+              <a:srgbClr val="718096"/>
+            </a:solidFill>
+            <a:prstDash val="solid"/>
+          </a:ln>
+        </p:spPr>
+      </p:sp>
+      <p:sp>
+        <p:nvSpPr>
+          <p:cNvPr id="24" name="Shape 22"/>
+          <p:cNvSpPr/>
+          <p:nvPr/>
+        </p:nvSpPr>
+        <p:spPr>
+          <a:xfrm>
+            <a:off x="9134627" y="1572768"/>
+            <a:ext cx="2490140" cy="3200400"/>
+          </a:xfrm>
+          <a:prstGeom prst="roundRect">
+            <a:avLst>
+              <a:gd name="adj" fmla="val 2203"/>
+            </a:avLst>
+          </a:prstGeom>
+          <a:solidFill>
+            <a:srgbClr val="F7FAFC"/>
+          </a:solidFill>
+          <a:ln w="6350">
+            <a:solidFill>
+              <a:srgbClr val="CBD5E0"/>
+            </a:solidFill>
+            <a:prstDash val="solid"/>
+          </a:ln>
+        </p:spPr>
+      </p:sp>
+      <p:sp>
+        <p:nvSpPr>
+          <p:cNvPr id="25" name="Shape 23"/>
+          <p:cNvSpPr/>
+          <p:nvPr/>
+        </p:nvSpPr>
+        <p:spPr>
+          <a:xfrm>
+            <a:off x="9354083" y="1792224"/>
+            <a:ext cx="384048" cy="384048"/>
+          </a:xfrm>
+          <a:prstGeom prst="ellipse">
+            <a:avLst/>
+          </a:prstGeom>
+          <a:solidFill>
+            <a:srgbClr val="B98A2E"/>
+          </a:solidFill>
+          <a:ln/>
+        </p:spPr>
+      </p:sp>
+      <p:sp>
+        <p:nvSpPr>
+          <p:cNvPr id="26" name="Text 24"/>
+          <p:cNvSpPr/>
+          <p:nvPr/>
+        </p:nvSpPr>
+        <p:spPr>
+          <a:xfrm>
+            <a:off x="9354083" y="1792224"/>
+            <a:ext cx="384048" cy="384048"/>
+          </a:xfrm>
+          <a:prstGeom prst="rect">
+            <a:avLst/>
+          </a:prstGeom>
+          <a:noFill/>
+          <a:ln/>
+        </p:spPr>
+        <p:txBody>
+          <a:bodyPr wrap="square" lIns="0" tIns="0" rIns="0" bIns="0" rtlCol="0" anchor="ctr"/>
+          <a:lstStyle/>
+          <a:p>
+            <a:pPr algn="ctr" indent="0" marL="0">
+              <a:buNone/>
+            </a:pPr>
+            <a:r>
+              <a:rPr lang="en-US" sz="1300" b="1" dirty="0">
+                <a:solidFill>
+                  <a:srgbClr val="FFFFFF"/>
+                </a:solidFill>
+                <a:latin typeface="Arial" pitchFamily="34" charset="0"/>
+                <a:ea typeface="Arial" pitchFamily="34" charset="-122"/>
+                <a:cs typeface="Arial" pitchFamily="34" charset="-120"/>
+              </a:rPr>
+              <a:t>STEP 4</a:t>
+            </a:r>
+            <a:endParaRPr lang="en-US" sz="1300" dirty="0"/>
+          </a:p>
+        </p:txBody>
+      </p:sp>
+      <p:sp>
+        <p:nvSpPr>
+          <p:cNvPr id="27" name="Text 25"/>
+          <p:cNvSpPr/>
+          <p:nvPr/>
+        </p:nvSpPr>
+        <p:spPr>
+          <a:xfrm>
+            <a:off x="9354083" y="2304288"/>
+            <a:ext cx="2051228" cy="365760"/>
+          </a:xfrm>
+          <a:prstGeom prst="rect">
+            <a:avLst/>
+          </a:prstGeom>
+          <a:noFill/>
+          <a:ln/>
+        </p:spPr>
+        <p:txBody>
+          <a:bodyPr wrap="square" rtlCol="0" anchor="ctr"/>
+          <a:lstStyle/>
+          <a:p>
+            <a:pPr indent="0" marL="0">
+              <a:buNone/>
+            </a:pPr>
+            <a:r>
+              <a:rPr lang="en-US" sz="1600" b="1" dirty="0">
+                <a:solidFill>
+                  <a:srgbClr val="10161F"/>
+                </a:solidFill>
+                <a:latin typeface="Pretendard" pitchFamily="34" charset="0"/>
+                <a:ea typeface="Pretendard" pitchFamily="34" charset="-122"/>
+                <a:cs typeface="Pretendard" pitchFamily="34" charset="-120"/>
+              </a:rPr>
+              <a:t>LOI(투자의향서) 제출 → 가격 협의 개시</a:t>
+            </a:r>
+            <a:endParaRPr lang="en-US" sz="1600" dirty="0"/>
+          </a:p>
+        </p:txBody>
+      </p:sp>
+      <p:sp>
+        <p:nvSpPr>
+          <p:cNvPr id="28" name="Text 26"/>
+          <p:cNvSpPr/>
+          <p:nvPr/>
+        </p:nvSpPr>
+        <p:spPr>
+          <a:xfrm>
+            <a:off x="9354083" y="2761488"/>
+            <a:ext cx="2051228" cy="1828800"/>
+          </a:xfrm>
+          <a:prstGeom prst="rect">
+            <a:avLst/>
+          </a:prstGeom>
+          <a:noFill/>
+          <a:ln/>
+        </p:spPr>
+        <p:txBody>
+          <a:bodyPr wrap="square" rtlCol="0" anchor="t"/>
+          <a:lstStyle/>
+          <a:p>
+            <a:pPr indent="0" marL="0">
+              <a:buNone/>
+            </a:pPr>
+            <a:endParaRPr lang="en-US" sz="1100" dirty="0"/>
+          </a:p>
+        </p:txBody>
+      </p:sp>
+      <p:sp>
+        <p:nvSpPr>
+          <p:cNvPr id="29" name="Text 27"/>
           <p:cNvSpPr/>
           <p:nvPr/>
         </p:nvSpPr>
@@ -15338,7 +15189,7 @@
       </p:sp>
       <p:sp>
         <p:nvSpPr>
-          <p:cNvPr id="12" name="Text 10"/>
+          <p:cNvPr id="30" name="Text 28"/>
           <p:cNvSpPr/>
           <p:nvPr/>
         </p:nvSpPr>

--- a/docs/test/stress/e2e-outputs/income_case01_seocho_medical_basic.pptx
+++ b/docs/test/stress/e2e-outputs/income_case01_seocho_medical_basic.pptx
@@ -1905,7 +1905,7 @@
                 <a:ea typeface="Arial" pitchFamily="34" charset="-122"/>
                 <a:cs typeface="Arial" pitchFamily="34" charset="-120"/>
               </a:rPr>
-              <a:t>BASIC IM</a:t>
+              <a:t>INVESTMENT MEMORANDUM</a:t>
             </a:r>
             <a:endParaRPr lang="en-US" sz="1000" dirty="0"/>
           </a:p>
@@ -3988,7 +3988,7 @@
                 <a:ea typeface="Pretendard" pitchFamily="34" charset="-122"/>
                 <a:cs typeface="Pretendard" pitchFamily="34" charset="-120"/>
               </a:rPr>
-              <a:t>서초권역 내 근생빌딩, 매각 희망가 165억. 입지·임대차 현황을 감안할 때 투자 검토 가치가 있는 물건입니다.</a:t>
+              <a:t>서초권역 소재 근생빌딩, 희망가 165억 투자 검토 자료입니다.</a:t>
             </a:r>
             <a:endParaRPr lang="en-US" sz="1500" dirty="0"/>
           </a:p>
@@ -4439,7 +4439,7 @@
                 <a:ea typeface="Arial" pitchFamily="34" charset="-122"/>
                 <a:cs typeface="Arial" pitchFamily="34" charset="-120"/>
               </a:rPr>
-              <a:t>8.03%</a:t>
+              <a:t>2.44%</a:t>
             </a:r>
             <a:endParaRPr lang="en-US" sz="2000" dirty="0"/>
           </a:p>
@@ -4610,7 +4610,7 @@
                 <a:ea typeface="Pretendard" pitchFamily="34" charset="-122"/>
                 <a:cs typeface="Pretendard" pitchFamily="34" charset="-120"/>
               </a:rPr>
-              <a:t>원금 안전판: 서초권역 핵심 입지 및 우량 대지 지분 가치로 하방 경직성 확보</a:t>
+              <a:t>입지 가치: 서초권역 소재 자산으로 중장기 자산 가치 및 안정적 수요 검토</a:t>
             </a:r>
             <a:endParaRPr lang="en-US" sz="1150" dirty="0"/>
           </a:p>
@@ -4742,7 +4742,7 @@
                 <a:ea typeface="Pretendard" pitchFamily="34" charset="-122"/>
                 <a:cs typeface="Pretendard" pitchFamily="34" charset="-120"/>
               </a:rPr>
-              <a:t>수익 안정성: 매각 희망가 165억 대비 안정적인 월 임대수익 창출 구조</a:t>
+              <a:t>임대 구조: 165억 수준의 가격대 및 현 임대차 기반의 현금흐름 분석</a:t>
             </a:r>
             <a:endParaRPr lang="en-US" sz="1150" dirty="0"/>
           </a:p>
@@ -4874,7 +4874,7 @@
                 <a:ea typeface="Pretendard" pitchFamily="34" charset="-122"/>
                 <a:cs typeface="Pretendard" pitchFamily="34" charset="-120"/>
               </a:rPr>
-              <a:t>미래 가치: 향후 권역 지가 상승 및 공법상 잔여 용적률 활용 밸류업 기회</a:t>
+              <a:t>실사 점검: 계약서 및 공부 확인을 통한 권리관계·물리적 상태 정밀 진단</a:t>
             </a:r>
             <a:endParaRPr lang="en-US" sz="1150" dirty="0"/>
           </a:p>
@@ -5187,7 +5187,7 @@
                 <a:ea typeface="Pretendard" pitchFamily="34" charset="-122"/>
                 <a:cs typeface="Pretendard" pitchFamily="34" charset="-120"/>
               </a:rPr>
-              <a:t>교통 접근성</a:t>
+              <a:t>교통 접근성 상세 정보는 담당 브로커를 통해 확인하</a:t>
             </a:r>
             <a:endParaRPr lang="en-US" sz="1300" dirty="0"/>
           </a:p>
@@ -5202,6 +5202,102 @@
         <p:spPr>
           <a:xfrm>
             <a:off x="8170475" y="1481328"/>
+            <a:ext cx="3454292" cy="493776"/>
+          </a:xfrm>
+          <a:prstGeom prst="rect">
+            <a:avLst/>
+          </a:prstGeom>
+          <a:noFill/>
+          <a:ln/>
+        </p:spPr>
+        <p:txBody>
+          <a:bodyPr wrap="square" lIns="0" tIns="0" rIns="0" bIns="0" rtlCol="0" anchor="ctr"/>
+          <a:lstStyle/>
+          <a:p>
+            <a:pPr indent="0" marL="0">
+              <a:lnSpc>
+                <a:spcPct val="120000"/>
+              </a:lnSpc>
+              <a:buNone/>
+            </a:pPr>
+            <a:endParaRPr lang="en-US" sz="1300" dirty="0"/>
+          </a:p>
+        </p:txBody>
+      </p:sp>
+      <p:sp>
+        <p:nvSpPr>
+          <p:cNvPr id="9" name="Shape 6"/>
+          <p:cNvSpPr/>
+          <p:nvPr/>
+        </p:nvSpPr>
+        <p:spPr>
+          <a:xfrm>
+            <a:off x="6053328" y="1975104"/>
+            <a:ext cx="5571439" cy="0"/>
+          </a:xfrm>
+          <a:prstGeom prst="line">
+            <a:avLst/>
+          </a:prstGeom>
+          <a:noFill/>
+          <a:ln w="3810">
+            <a:solidFill>
+              <a:srgbClr val="CBD5E0"/>
+            </a:solidFill>
+            <a:prstDash val="solid"/>
+          </a:ln>
+        </p:spPr>
+      </p:sp>
+      <p:sp>
+        <p:nvSpPr>
+          <p:cNvPr id="10" name="Text 7"/>
+          <p:cNvSpPr/>
+          <p:nvPr/>
+        </p:nvSpPr>
+        <p:spPr>
+          <a:xfrm>
+            <a:off x="6053328" y="1975104"/>
+            <a:ext cx="2117147" cy="493776"/>
+          </a:xfrm>
+          <a:prstGeom prst="rect">
+            <a:avLst/>
+          </a:prstGeom>
+          <a:noFill/>
+          <a:ln/>
+        </p:spPr>
+        <p:txBody>
+          <a:bodyPr wrap="square" lIns="0" tIns="0" rIns="0" bIns="0" rtlCol="0" anchor="ctr"/>
+          <a:lstStyle/>
+          <a:p>
+            <a:pPr indent="0" marL="0">
+              <a:lnSpc>
+                <a:spcPct val="120000"/>
+              </a:lnSpc>
+              <a:buNone/>
+            </a:pPr>
+            <a:r>
+              <a:rPr lang="en-US" sz="1300" dirty="0">
+                <a:solidFill>
+                  <a:srgbClr val="718096"/>
+                </a:solidFill>
+                <a:latin typeface="Pretendard" pitchFamily="34" charset="0"/>
+                <a:ea typeface="Pretendard" pitchFamily="34" charset="-122"/>
+                <a:cs typeface="Pretendard" pitchFamily="34" charset="-120"/>
+              </a:rPr>
+              <a:t>[건물] 주변 상권</a:t>
+            </a:r>
+            <a:endParaRPr lang="en-US" sz="1300" dirty="0"/>
+          </a:p>
+        </p:txBody>
+      </p:sp>
+      <p:sp>
+        <p:nvSpPr>
+          <p:cNvPr id="11" name="Text 8"/>
+          <p:cNvSpPr/>
+          <p:nvPr/>
+        </p:nvSpPr>
+        <p:spPr>
+          <a:xfrm>
+            <a:off x="8170475" y="1975104"/>
             <a:ext cx="3454292" cy="493776"/>
           </a:xfrm>
           <a:prstGeom prst="rect">
@@ -5229,7 +5325,7 @@
                 <a:ea typeface="Pretendard" pitchFamily="34" charset="-122"/>
                 <a:cs typeface="Pretendard" pitchFamily="34" charset="-120"/>
               </a:rPr>
-              <a:t>{"ok":true,"mocked":true,"extractedFields":{"area_signal":"역삼","asset_type":"오피스빌딩","price_band":"300억","size_signal":"3000평(약 9917.</a:t>
+              <a:t>서초권역 내 주요 비즈니스 및 유동인구 풍부한 상권 입지 ### [성장] 입지 평가</a:t>
             </a:r>
             <a:endParaRPr lang="en-US" sz="1300" dirty="0"/>
           </a:p>
@@ -5237,7 +5333,103 @@
       </p:sp>
       <p:sp>
         <p:nvSpPr>
-          <p:cNvPr id="9" name="Text 6"/>
+          <p:cNvPr id="12" name="Shape 9"/>
+          <p:cNvSpPr/>
+          <p:nvPr/>
+        </p:nvSpPr>
+        <p:spPr>
+          <a:xfrm>
+            <a:off x="6053328" y="2468880"/>
+            <a:ext cx="5571439" cy="0"/>
+          </a:xfrm>
+          <a:prstGeom prst="line">
+            <a:avLst/>
+          </a:prstGeom>
+          <a:noFill/>
+          <a:ln w="3810">
+            <a:solidFill>
+              <a:srgbClr val="CBD5E0"/>
+            </a:solidFill>
+            <a:prstDash val="solid"/>
+          </a:ln>
+        </p:spPr>
+      </p:sp>
+      <p:sp>
+        <p:nvSpPr>
+          <p:cNvPr id="13" name="Text 10"/>
+          <p:cNvSpPr/>
+          <p:nvPr/>
+        </p:nvSpPr>
+        <p:spPr>
+          <a:xfrm>
+            <a:off x="6053328" y="2468880"/>
+            <a:ext cx="2117147" cy="493776"/>
+          </a:xfrm>
+          <a:prstGeom prst="rect">
+            <a:avLst/>
+          </a:prstGeom>
+          <a:noFill/>
+          <a:ln/>
+        </p:spPr>
+        <p:txBody>
+          <a:bodyPr wrap="square" lIns="0" tIns="0" rIns="0" bIns="0" rtlCol="0" anchor="ctr"/>
+          <a:lstStyle/>
+          <a:p>
+            <a:pPr indent="0" marL="0">
+              <a:lnSpc>
+                <a:spcPct val="120000"/>
+              </a:lnSpc>
+              <a:buNone/>
+            </a:pPr>
+            <a:r>
+              <a:rPr lang="en-US" sz="1300" dirty="0">
+                <a:solidFill>
+                  <a:srgbClr val="718096"/>
+                </a:solidFill>
+                <a:latin typeface="Pretendard" pitchFamily="34" charset="0"/>
+                <a:ea typeface="Pretendard" pitchFamily="34" charset="-122"/>
+                <a:cs typeface="Pretendard" pitchFamily="34" charset="-120"/>
+              </a:rPr>
+              <a:t>서초권역 내 위치하며 접근성과 가시성이 양호한 입지</a:t>
+            </a:r>
+            <a:endParaRPr lang="en-US" sz="1300" dirty="0"/>
+          </a:p>
+        </p:txBody>
+      </p:sp>
+      <p:sp>
+        <p:nvSpPr>
+          <p:cNvPr id="14" name="Text 11"/>
+          <p:cNvSpPr/>
+          <p:nvPr/>
+        </p:nvSpPr>
+        <p:spPr>
+          <a:xfrm>
+            <a:off x="8170475" y="2468880"/>
+            <a:ext cx="3454292" cy="493776"/>
+          </a:xfrm>
+          <a:prstGeom prst="rect">
+            <a:avLst/>
+          </a:prstGeom>
+          <a:noFill/>
+          <a:ln/>
+        </p:spPr>
+        <p:txBody>
+          <a:bodyPr wrap="square" lIns="0" tIns="0" rIns="0" bIns="0" rtlCol="0" anchor="ctr"/>
+          <a:lstStyle/>
+          <a:p>
+            <a:pPr indent="0" marL="0">
+              <a:lnSpc>
+                <a:spcPct val="120000"/>
+              </a:lnSpc>
+              <a:buNone/>
+            </a:pPr>
+            <a:endParaRPr lang="en-US" sz="1300" dirty="0"/>
+          </a:p>
+        </p:txBody>
+      </p:sp>
+      <p:sp>
+        <p:nvSpPr>
+          <p:cNvPr id="15" name="Text 12"/>
           <p:cNvSpPr/>
           <p:nvPr/>
         </p:nvSpPr>
@@ -5276,7 +5468,7 @@
       </p:sp>
       <p:sp>
         <p:nvSpPr>
-          <p:cNvPr id="10" name="Text 7"/>
+          <p:cNvPr id="16" name="Text 13"/>
           <p:cNvSpPr/>
           <p:nvPr/>
         </p:nvSpPr>
@@ -5310,45 +5502,6 @@
               <a:t>3</a:t>
             </a:r>
             <a:endParaRPr lang="en-US" sz="900" dirty="0"/>
-          </a:p>
-        </p:txBody>
-      </p:sp>
-      <p:sp>
-        <p:nvSpPr>
-          <p:cNvPr id="11" name="Text 8"/>
-          <p:cNvSpPr/>
-          <p:nvPr/>
-        </p:nvSpPr>
-        <p:spPr>
-          <a:xfrm>
-            <a:off x="566928" y="1481328"/>
-            <a:ext cx="11057839" cy="9692640"/>
-          </a:xfrm>
-          <a:prstGeom prst="rect">
-            <a:avLst/>
-          </a:prstGeom>
-          <a:noFill/>
-          <a:ln/>
-        </p:spPr>
-        <p:txBody>
-          <a:bodyPr wrap="square" lIns="0" tIns="0" rIns="0" bIns="0" rtlCol="0" anchor="t"/>
-          <a:lstStyle/>
-          <a:p>
-            <a:pPr indent="0" marL="0">
-              <a:buNone/>
-            </a:pPr>
-            <a:r>
-              <a:rPr lang="en-US" sz="1000" dirty="0">
-                <a:solidFill>
-                  <a:srgbClr val="10161F"/>
-                </a:solidFill>
-                <a:latin typeface="Pretendard" pitchFamily="34" charset="0"/>
-                <a:ea typeface="Pretendard" pitchFamily="34" charset="-122"/>
-                <a:cs typeface="Pretendard" pitchFamily="34" charset="-120"/>
-              </a:rPr>
-              <a:t>{"ok":true,"mocked":true,"extractedFields":{"area_signal":"역삼","asset_type":"오피스빌딩","price_band":"300억","size_signal":"3000평(약 9917.4㎡)"},"extractedFacts":{"region":"역삼","exactAddressCandidate":"역삼동 742-1","assetType":"오피스빌딩","priceText":"300억","sizeText":"3000평(약 9917.4㎡)","currentUse":"오피스","currentUseSignal":"근린생활시설","leaseSignal":"임대중","vacancySignal":"공실없음","tenantNames":["쿠팡","네이버"],"unitRentTexts":["301호: 1500만"],"sellerMotivationText":"자산 효율화","brokerNotes":["초역세권 매물"]},"detectedSensitiveFields":["exact_address","tenant_name"],"ambiguousFields":[],"warnings":[],"areaSignal":"역삼","assetType":"오피스빌딩","priceBand":"300억","sizeSignal":"3000평(약 9917.4㎡)","dealType":"매각","buildingName":"역삼 센트럴타워","exactAddress":"역삼동 742-1","totalFloorArea":9917.3,"buildYear":2015,"currentUseSignal":"근린생활시설","vacancySignal":"공실 없음","fitSummary":"초역세권 근생 빌딩으로 시행/사옥 매입에 최적화","cautionSummary":"주요 임차 업종 만기 조율 필요","hiddenFields":["exact_address","seller_motivation"],"confidence":{"areaSignal":"confirmed","assetType":"confirmed","priceBand":"ai_hypothesis","fitSummary":"ai_hypothesis"},"missingData":["sizeSignal"],"boundaryNote":"본 자료는 실거래 통계 기반 참고치입니다.","buyerType":"법인 사옥형","budgetRange":{"min":50,"max":80,"display":"50억~80억"},"preferredRegions":["강남","성수"],"assetTypes":["꼬마빌딩","사옥용"],"purchasePurpose":"사옥용 매입","mustHave":["초역세권","주차"],"niceToHave":["테라스","루프탑"],"riskTolerance":"medium","financingNote":"자본금 50% 준비","missingQuestions":["구체적인 입주 시기가 언제인가요?","선호하는 수익률이 있나요?"],"privacyNotes":["연락처 비공개"],"fitReasons":["매수자 예산(50-80억)에 부합하는 매물입니다.","요청하신 성수/강남 권역에 해당합니다."],"cautionReasons":["요청한 용도와 달리 명도 협의가 다소 필요합니다."],"recommendedNextAction":"현장 답사 제안","kakaoMessage":"안녕하세요! 요청하신 조건에 부합하는 추천 매물이 있어 안내해 드립니다. 확인해보시고 피드백 부탁드립니다.","title":"강남 역삼역 초역세권 오피스 사옥용 빌딩 매각","shortSummary":"역삼역 도보 5분 거리의 준신축급 대형 오피스빌딩입니다.","dealPoints":["초역세권","사옥 최적"],"cautionPoints":["명도 조율 필요"],"hiddenInfoNotice":["보증금 및 지번은 인가 후 확인 가능"],"gateMessage":"G1 등급 등록이 필요합니다.","kakaoText":"강남 역삼역 오피스 빌딩 매각 안내입니다.","exactUnitCandidate":"101호","floor":"1층","areaSqmText":"150㎡","spaceType":"office","depositText":"5000만","monthlyRentText":"400만","maintenanceFeeText":"50만","availableFromText":"즉시입주","leaseTermMonthsText":"24","incentivesText":"렌트프리 2개월","restrictions":[],"landlordIdentity":"김성수","currentTenant":"스타트업","vacancyReason":"이전 확장","rentNegotiation":"협의 가능","region":"성수동","areaSqm":150,"deposit":5000,"monthlyRent":400,"maintenanceFee":50,"availableFrom":"즉시입주","leaseTermMonths":24,"incentives":{"rentFreeMonths":2,"interiorSupport":"일부 인테리어 지원","freeRentDetail":"렌트프리 2개월 지원"},"shortSummaryLease":"성수역 도보 5분 거리 1층 리테일 상가 매물입니다."}</a:t>
-            </a:r>
-            <a:endParaRPr lang="en-US" sz="1000" dirty="0"/>
           </a:p>
         </p:txBody>
       </p:sp>
@@ -5638,7 +5791,7 @@
                 <a:ea typeface="Pretendard" pitchFamily="34" charset="-122"/>
                 <a:cs typeface="Pretendard" pitchFamily="34" charset="-120"/>
               </a:rPr>
-              <a:t>true,"mocked":true,"extractedFields":{"area_signal":"역삼","asset_type":"오피스빌딩","price_band":"300억","size_signal":"3000평(약 9917.4㎡)"},"extractedFacts":{"region":"역삼","exactAddressCandidate":"역삼동 742-1","assetType":"오피스빌딩","priceText":"300억","sizeText":"3000평(약 9917.4㎡)","currentUse":"오피스","currentUseSignal":"근린생활시설","leaseSignal":"임대중","vacancySignal":"공실없음","tenantNames":"쿠팡","네이버","unitRentTexts":"301호: 1500만","sellerMotivationText":"자산 효율화","brokerNotes":"초역세권 매물"},"detectedSensitiveFields":"exact_address","tenant_name","ambiguousFields":,"warnings":,"areaSignal":"역삼","assetType":"오피스빌딩","priceBand":"300억","sizeSignal":"3000평(약 9917.4㎡)","dealType":"매각","buildingName":"역삼 센트럴타워","exactAddress":"역삼동 742-1","totalFloorArea":9917.3,"buildYear":2015,"currentUseSignal":"근린생활시설","vacancySignal":"공실 없음","fitSummary":"초역세권 근생 빌딩으로 시행/사옥 매입에 최적화","cautionSummary":"주요 임차 업종 만기 조율 필요","hiddenFields":"exact_address","seller_motivation","confidence":{"areaSignal":"confirmed","assetType":"confirmed","priceBand":"ai_hypothesis","fitSummary":"ai_hypothesis"},"missingData":"sizeSignal","boundaryNote":"본 자료는 실거래 통계 기반 참고치입니다.","buyerType":"법인 사옥형","budgetRange":{"min":50,"max":80,"display":"50억~80억"},"preferredRegions":"강남","성수","assetTypes":"꼬마빌딩","사옥용","purchasePurpose":"사옥용 매입","mustHave":"초역세권","주차","niceToHave":"테라스","루프탑","riskTolerance":"medium","financingNote":"자본금 50% 준비","missingQuestions":"구체적인 입주 시기가 언제인가요?","선호하는 수익률이 있나요?","privacyNotes":"연락처 비공개","fitReasons":"매수자 예산(50-80억)에 부합하는 매물입니다.","요청하신 성수/강남 권역에 해당합니다.","cautionReasons":"요청한 용도와 달리 명도 협의가 다소 필요합니다.","recommendedNextAction":"현장 답사 제안","kakaoMessage":"안녕하세요! 요청하신 조건에 부합하는 추천 매물이 있어 안내해 드립니다. 확인해보시고 피드백 부탁드립니다.","title":"강남 역삼역 초역세권 오피스 사옥용 빌딩 매각","shortSummary":"역삼역 도보 5분 거리의 준신축급 대형 오피스빌딩입니다.","dealPoints":"초역세권","사옥 최적","cautionPoints":"명도 조율 필요","hiddenInfoNotice":"보증금 및 지번은 인가 후 확인 가능","gateMessage":"G1 등급 등록이 필요합니다.","kakaoText":"강남 역삼역 오피스 빌딩 매각 안내입니다.","exactUnitCandidate":"101호","floor":"1층","areaSqmText":"150㎡","spaceType":"office","depositText":"5000만","monthlyRentText":"400만","maintenanceFeeText":"50만","availableFromText":"즉시입주","leaseTermMonthsText":"24","incentivesText":"렌트프리 2개월","restrictions":,"landlordIdentity":"김성수","currentTenant":"스타트업","vacancyReason":"이전 확장","rentNegotiation":"협의 가능","region":"성수동","areaSqm":150,"deposit":5000,"monthlyRent":400,"maintenanceFee":50,"availableFrom":"즉시입주","leaseTermMonths":24,"incentives":{"rentFreeMonths":2,"interiorSupport":"일부 인테리어 지원","freeRentDetail":"렌트프리 2개월 지원"},"shortSummaryLease":"성수역 도보 5분 거리 1층 리테일 상가 매물입니다."}</a:t>
+              <a:t>true,"mocked":true,"extractedFields":{"area_signal":"역삼","asset_type":"오피스빌딩","price_band":"300억","size_signal":"3000평(약 9917.4㎡)"},"extractedFacts":{"region":"역삼","exactAddressCandidate":"역삼동 742-1","assetType":"오피스빌딩","priceText":"300억","sizeText":"3000평(약 9917.4㎡)","currentUse":"오피스","currentUseSignal":"근린생활시설","leaseSignal":"임대중","vacancySignal":"공실없음","tenantNames":"쿠팡","네이버","unitRentTexts":"301호: 1500만","sellerMotivationText":"자산 효율화","brokerNotes":"초역세권 매물"},"detectedSensitiveFields":"exact_address","tenant_name","ambiguousFields":,"warnings":,"areaSignal":"역삼","assetType":"오피스빌딩","priceBand":"300억","sizeSignal":"3000평(약 9917.4㎡)","dealType":"매각","buildingName":"역삼 센트럴타워","exactAddress":"역삼동 742-1","totalFloorArea":9917.3,"buildYear":2015,"currentUseSignal":"근린생활시설","vacancySignal":"공실 없음","fitSummary":"초역세권 근생 빌딩으로 시행/사옥 매입에 최적화","cautionSummary":"주요 임차인 만기 조율 필요","hiddenFields":"exact_address","seller_motivation","confidence":{"areaSignal":"confirmed","assetType":"confirmed","priceBand":"ai_hypothesis","fitSummary":"ai_hypothesis"},"missingData":"sizeSignal","boundaryNote":"본 자료는 실거래 통계 기반 참고치입니다.","buyerType":"법인 사옥형","budgetRange":{"min":50,"max":80,"display":"50억~80억"},"preferredRegions":"강남","성수","assetTypes":"꼬마빌딩","사옥용","purchasePurpose":"사옥용 매입","mustHave":"초역세권","주차","niceToHave":"테라스","루프탑","riskTolerance":"medium","financingNote":"자본금 50% 준비","missingQuestions":"구체적인 입주 시기가 언제인가요?","선호하는 수익률이 있나요?","privacyNotes":"연락처 비공개","fitReasons":"매수자 예산(50-80억)에 부합하는 매물입니다.","요청하신 성수/강남 권역에 해당합니다.","cautionReasons":"요청한 용도와 달리 명도 협의가 다소 필요합니다.","recommendedNextAction":"현장 답사 제안","kakaoMessage":"안녕하세요! 요청하신 조건에 부합하는 추천 매물이 있어 안내해 드립니다. 확인해보시고 피드백 부탁드립니다.","title":"강남 역삼역 초역세권 오피스 사옥용 빌딩 매각","shortSummary":"역삼역 도보 5분 거리의 준신축급 대형 오피스빌딩입니다.","dealPoints":"초역세권","사옥 최적","cautionPoints":"명도 조율 필요","hiddenInfoNotice":"보증금 및 지번은 인가 후 확인 가능","gateMessage":"G1 등급 등록이 필요합니다.","kakaoText":"강남 역삼역 오피스 빌딩 매각 안내입니다.","exactUnitCandidate":"101호","floor":"1층","areaSqmText":"150㎡","spaceType":"office","depositText":"5000만","monthlyRentText":"400만","maintenanceFeeText":"50만","availableFromText":"즉시입주","leaseTermMonthsText":"24","incentivesText":"렌트프리 2개월","restrictions":,"landlordIdentity":"김성수","currentTenant":"스타트업","vacancyReason":"이전 확장","rentNegotiation":"협의 가능","region":"성수동","areaSqm":150,"deposit":5000,"monthlyRent":400,"maintenanceFee":50,"availableFrom":"즉시입주","leaseTermMonths":24,"incentives":{"rentFreeMonths":2,"interiorSupport":"일부 인테리어 지원","freeRentDetail":"렌트프리 2개월 지원"},"shortSummaryLease":"성수역 도보 5분 거리 1층 리테일 상가 매물입니다."}</a:t>
             </a:r>
             <a:endParaRPr lang="en-US" sz="1400" dirty="0"/>
           </a:p>
@@ -6057,7 +6210,7 @@
                 <a:gridCol w="1675430"/>
                 <a:gridCol w="1675430"/>
               </a:tblGrid>
-              <a:tr h="438912">
+              <a:tr h="347472">
                 <a:tc>
                   <a:txBody>
                     <a:bodyPr/>
@@ -6067,7 +6220,7 @@
                         <a:buNone/>
                       </a:pPr>
                       <a:r>
-                        <a:rPr lang="en-US" sz="1000" b="1" dirty="0">
+                        <a:rPr lang="en-US" sz="900" b="1" dirty="0">
                           <a:solidFill>
                             <a:srgbClr val="718096"/>
                           </a:solidFill>
@@ -6077,7 +6230,7 @@
                         </a:rPr>
                         <a:t>층수</a:t>
                       </a:r>
-                      <a:endParaRPr lang="en-US" sz="1000" dirty="0">
+                      <a:endParaRPr lang="en-US" sz="900" dirty="0">
                         <a:latin typeface="Pretendard" charset="0"/>
                         <a:ea typeface="Pretendard" charset="0"/>
                         <a:cs typeface="Pretendard" charset="0"/>
@@ -6135,7 +6288,7 @@
                         <a:buNone/>
                       </a:pPr>
                       <a:r>
-                        <a:rPr lang="en-US" sz="1000" b="1" dirty="0">
+                        <a:rPr lang="en-US" sz="900" b="1" dirty="0">
                           <a:solidFill>
                             <a:srgbClr val="718096"/>
                           </a:solidFill>
@@ -6145,7 +6298,7 @@
                         </a:rPr>
                         <a:t>업종</a:t>
                       </a:r>
-                      <a:endParaRPr lang="en-US" sz="1000" dirty="0">
+                      <a:endParaRPr lang="en-US" sz="900" dirty="0">
                         <a:latin typeface="Pretendard" charset="0"/>
                         <a:ea typeface="Pretendard" charset="0"/>
                         <a:cs typeface="Pretendard" charset="0"/>
@@ -6203,7 +6356,7 @@
                         <a:buNone/>
                       </a:pPr>
                       <a:r>
-                        <a:rPr lang="en-US" sz="1000" b="1" dirty="0">
+                        <a:rPr lang="en-US" sz="900" b="1" dirty="0">
                           <a:solidFill>
                             <a:srgbClr val="718096"/>
                           </a:solidFill>
@@ -6213,7 +6366,7 @@
                         </a:rPr>
                         <a:t>전용면적</a:t>
                       </a:r>
-                      <a:endParaRPr lang="en-US" sz="1000" dirty="0">
+                      <a:endParaRPr lang="en-US" sz="900" dirty="0">
                         <a:latin typeface="Pretendard" charset="0"/>
                         <a:ea typeface="Pretendard" charset="0"/>
                         <a:cs typeface="Pretendard" charset="0"/>
@@ -6271,7 +6424,7 @@
                         <a:buNone/>
                       </a:pPr>
                       <a:r>
-                        <a:rPr lang="en-US" sz="1000" b="1" dirty="0">
+                        <a:rPr lang="en-US" sz="900" b="1" dirty="0">
                           <a:solidFill>
                             <a:srgbClr val="718096"/>
                           </a:solidFill>
@@ -6281,7 +6434,7 @@
                         </a:rPr>
                         <a:t>보증금</a:t>
                       </a:r>
-                      <a:endParaRPr lang="en-US" sz="1000" dirty="0">
+                      <a:endParaRPr lang="en-US" sz="900" dirty="0">
                         <a:latin typeface="Pretendard" charset="0"/>
                         <a:ea typeface="Pretendard" charset="0"/>
                         <a:cs typeface="Pretendard" charset="0"/>
@@ -6339,7 +6492,7 @@
                         <a:buNone/>
                       </a:pPr>
                       <a:r>
-                        <a:rPr lang="en-US" sz="1000" b="1" dirty="0">
+                        <a:rPr lang="en-US" sz="900" b="1" dirty="0">
                           <a:solidFill>
                             <a:srgbClr val="718096"/>
                           </a:solidFill>
@@ -6353,7 +6506,7 @@
                         <a:buNone/>
                       </a:pPr>
                       <a:r>
-                        <a:rPr lang="en-US" sz="1000" b="1" dirty="0">
+                        <a:rPr lang="en-US" sz="900" b="1" dirty="0">
                           <a:solidFill>
                             <a:srgbClr val="718096"/>
                           </a:solidFill>
@@ -6363,7 +6516,7 @@
                         </a:rPr>
                         <a:t>임대료</a:t>
                       </a:r>
-                      <a:endParaRPr lang="en-US" sz="1000" dirty="0">
+                      <a:endParaRPr lang="en-US" sz="900" dirty="0">
                         <a:latin typeface="Pretendard" charset="0"/>
                         <a:ea typeface="Pretendard" charset="0"/>
                         <a:cs typeface="Pretendard" charset="0"/>
@@ -6421,7 +6574,7 @@
                         <a:buNone/>
                       </a:pPr>
                       <a:r>
-                        <a:rPr lang="en-US" sz="1000" b="1" dirty="0">
+                        <a:rPr lang="en-US" sz="900" b="1" dirty="0">
                           <a:solidFill>
                             <a:srgbClr val="718096"/>
                           </a:solidFill>
@@ -6431,7 +6584,7 @@
                         </a:rPr>
                         <a:t>관리비</a:t>
                       </a:r>
-                      <a:endParaRPr lang="en-US" sz="1000" dirty="0">
+                      <a:endParaRPr lang="en-US" sz="900" dirty="0">
                         <a:latin typeface="Pretendard" charset="0"/>
                         <a:ea typeface="Pretendard" charset="0"/>
                         <a:cs typeface="Pretendard" charset="0"/>
@@ -6489,7 +6642,7 @@
                         <a:buNone/>
                       </a:pPr>
                       <a:r>
-                        <a:rPr lang="en-US" sz="1000" b="1" dirty="0">
+                        <a:rPr lang="en-US" sz="900" b="1" dirty="0">
                           <a:solidFill>
                             <a:srgbClr val="718096"/>
                           </a:solidFill>
@@ -6503,7 +6656,7 @@
                         <a:buNone/>
                       </a:pPr>
                       <a:r>
-                        <a:rPr lang="en-US" sz="1000" b="1" dirty="0">
+                        <a:rPr lang="en-US" sz="900" b="1" dirty="0">
                           <a:solidFill>
                             <a:srgbClr val="718096"/>
                           </a:solidFill>
@@ -6513,7 +6666,7 @@
                         </a:rPr>
                         <a:t>만기</a:t>
                       </a:r>
-                      <a:endParaRPr lang="en-US" sz="1000" dirty="0">
+                      <a:endParaRPr lang="en-US" sz="900" dirty="0">
                         <a:latin typeface="Pretendard" charset="0"/>
                         <a:ea typeface="Pretendard" charset="0"/>
                         <a:cs typeface="Pretendard" charset="0"/>
@@ -6563,7 +6716,7 @@
                   </a:tcPr>
                 </a:tc>
               </a:tr>
-              <a:tr h="438912">
+              <a:tr h="347472">
                 <a:tc>
                   <a:txBody>
                     <a:bodyPr/>
@@ -6573,7 +6726,7 @@
                         <a:buNone/>
                       </a:pPr>
                       <a:r>
-                        <a:rPr lang="en-US" sz="1000" b="1" dirty="0">
+                        <a:rPr lang="en-US" sz="900" b="1" dirty="0">
                           <a:solidFill>
                             <a:srgbClr val="10161F"/>
                           </a:solidFill>
@@ -6583,7 +6736,7 @@
                         </a:rPr>
                         <a:t>B1~B2</a:t>
                       </a:r>
-                      <a:endParaRPr lang="en-US" sz="1000" dirty="0">
+                      <a:endParaRPr lang="en-US" sz="900" dirty="0">
                         <a:latin typeface="Pretendard" charset="0"/>
                         <a:ea typeface="Pretendard" charset="0"/>
                         <a:cs typeface="Pretendard" charset="0"/>
@@ -6641,7 +6794,7 @@
                         <a:buNone/>
                       </a:pPr>
                       <a:r>
-                        <a:rPr lang="en-US" sz="1000" dirty="0">
+                        <a:rPr lang="en-US" sz="900" dirty="0">
                           <a:solidFill>
                             <a:srgbClr val="10161F"/>
                           </a:solidFill>
@@ -6651,7 +6804,7 @@
                         </a:rPr>
                         <a:t>주차장</a:t>
                       </a:r>
-                      <a:endParaRPr lang="en-US" sz="1000" dirty="0">
+                      <a:endParaRPr lang="en-US" sz="900" dirty="0">
                         <a:latin typeface="Pretendard" charset="0"/>
                         <a:ea typeface="Pretendard" charset="0"/>
                         <a:cs typeface="Pretendard" charset="0"/>
@@ -6709,7 +6862,7 @@
                         <a:buNone/>
                       </a:pPr>
                       <a:r>
-                        <a:rPr lang="en-US" sz="1000" dirty="0">
+                        <a:rPr lang="en-US" sz="900" dirty="0">
                           <a:solidFill>
                             <a:srgbClr val="10161F"/>
                           </a:solidFill>
@@ -6723,7 +6876,7 @@
                         <a:buNone/>
                       </a:pPr>
                       <a:r>
-                        <a:rPr lang="en-US" sz="1000" dirty="0">
+                        <a:rPr lang="en-US" sz="900" dirty="0">
                           <a:solidFill>
                             <a:srgbClr val="10161F"/>
                           </a:solidFill>
@@ -6733,7 +6886,7 @@
                         </a:rPr>
                         <a:t>396.7㎡)</a:t>
                       </a:r>
-                      <a:endParaRPr lang="en-US" sz="1000" dirty="0">
+                      <a:endParaRPr lang="en-US" sz="900" dirty="0">
                         <a:latin typeface="Pretendard" charset="0"/>
                         <a:ea typeface="Pretendard" charset="0"/>
                         <a:cs typeface="Pretendard" charset="0"/>
@@ -6790,7 +6943,7 @@
                       <a:pPr indent="0" marL="0">
                         <a:buNone/>
                       </a:pPr>
-                      <a:endParaRPr lang="en-US" sz="1000" dirty="0">
+                      <a:endParaRPr lang="en-US" sz="900" dirty="0">
                         <a:latin typeface="Pretendard" charset="0"/>
                         <a:ea typeface="Pretendard" charset="0"/>
                         <a:cs typeface="Pretendard" charset="0"/>
@@ -6847,7 +7000,7 @@
                       <a:pPr indent="0" marL="0">
                         <a:buNone/>
                       </a:pPr>
-                      <a:endParaRPr lang="en-US" sz="1000" dirty="0">
+                      <a:endParaRPr lang="en-US" sz="900" dirty="0">
                         <a:latin typeface="Pretendard" charset="0"/>
                         <a:ea typeface="Pretendard" charset="0"/>
                         <a:cs typeface="Pretendard" charset="0"/>
@@ -6904,7 +7057,7 @@
                       <a:pPr indent="0" marL="0">
                         <a:buNone/>
                       </a:pPr>
-                      <a:endParaRPr lang="en-US" sz="1000" dirty="0">
+                      <a:endParaRPr lang="en-US" sz="900" dirty="0">
                         <a:latin typeface="Pretendard" charset="0"/>
                         <a:ea typeface="Pretendard" charset="0"/>
                         <a:cs typeface="Pretendard" charset="0"/>
@@ -6962,7 +7115,7 @@
                         <a:buNone/>
                       </a:pPr>
                       <a:r>
-                        <a:rPr lang="en-US" sz="1000" dirty="0">
+                        <a:rPr lang="en-US" sz="900" dirty="0">
                           <a:solidFill>
                             <a:srgbClr val="10161F"/>
                           </a:solidFill>
@@ -6972,7 +7125,7 @@
                         </a:rPr>
                         <a:t>미정</a:t>
                       </a:r>
-                      <a:endParaRPr lang="en-US" sz="1000" dirty="0">
+                      <a:endParaRPr lang="en-US" sz="900" dirty="0">
                         <a:latin typeface="Pretendard" charset="0"/>
                         <a:ea typeface="Pretendard" charset="0"/>
                         <a:cs typeface="Pretendard" charset="0"/>
@@ -7022,7 +7175,7 @@
                   </a:tcPr>
                 </a:tc>
               </a:tr>
-              <a:tr h="438912">
+              <a:tr h="347472">
                 <a:tc>
                   <a:txBody>
                     <a:bodyPr/>
@@ -7032,7 +7185,7 @@
                         <a:buNone/>
                       </a:pPr>
                       <a:r>
-                        <a:rPr lang="en-US" sz="1000" b="1" dirty="0">
+                        <a:rPr lang="en-US" sz="900" b="1" dirty="0">
                           <a:solidFill>
                             <a:srgbClr val="10161F"/>
                           </a:solidFill>
@@ -7042,7 +7195,7 @@
                         </a:rPr>
                         <a:t>1F</a:t>
                       </a:r>
-                      <a:endParaRPr lang="en-US" sz="1000" dirty="0">
+                      <a:endParaRPr lang="en-US" sz="900" dirty="0">
                         <a:latin typeface="Pretendard" charset="0"/>
                         <a:ea typeface="Pretendard" charset="0"/>
                         <a:cs typeface="Pretendard" charset="0"/>
@@ -7100,7 +7253,7 @@
                         <a:buNone/>
                       </a:pPr>
                       <a:r>
-                        <a:rPr lang="en-US" sz="1000" dirty="0">
+                        <a:rPr lang="en-US" sz="900" dirty="0">
                           <a:solidFill>
                             <a:srgbClr val="10161F"/>
                           </a:solidFill>
@@ -7110,7 +7263,7 @@
                         </a:rPr>
                         <a:t>대형약국</a:t>
                       </a:r>
-                      <a:endParaRPr lang="en-US" sz="1000" dirty="0">
+                      <a:endParaRPr lang="en-US" sz="900" dirty="0">
                         <a:latin typeface="Pretendard" charset="0"/>
                         <a:ea typeface="Pretendard" charset="0"/>
                         <a:cs typeface="Pretendard" charset="0"/>
@@ -7168,7 +7321,7 @@
                         <a:buNone/>
                       </a:pPr>
                       <a:r>
-                        <a:rPr lang="en-US" sz="1000" dirty="0">
+                        <a:rPr lang="en-US" sz="900" dirty="0">
                           <a:solidFill>
                             <a:srgbClr val="10161F"/>
                           </a:solidFill>
@@ -7182,7 +7335,7 @@
                         <a:buNone/>
                       </a:pPr>
                       <a:r>
-                        <a:rPr lang="en-US" sz="1000" dirty="0">
+                        <a:rPr lang="en-US" sz="900" dirty="0">
                           <a:solidFill>
                             <a:srgbClr val="10161F"/>
                           </a:solidFill>
@@ -7192,7 +7345,7 @@
                         </a:rPr>
                         <a:t>181.8㎡)</a:t>
                       </a:r>
-                      <a:endParaRPr lang="en-US" sz="1000" dirty="0">
+                      <a:endParaRPr lang="en-US" sz="900" dirty="0">
                         <a:latin typeface="Pretendard" charset="0"/>
                         <a:ea typeface="Pretendard" charset="0"/>
                         <a:cs typeface="Pretendard" charset="0"/>
@@ -7250,7 +7403,7 @@
                         <a:buNone/>
                       </a:pPr>
                       <a:r>
-                        <a:rPr lang="en-US" sz="1000" dirty="0">
+                        <a:rPr lang="en-US" sz="900" dirty="0">
                           <a:solidFill>
                             <a:srgbClr val="10161F"/>
                           </a:solidFill>
@@ -7260,7 +7413,7 @@
                         </a:rPr>
                         <a:t>30,000만</a:t>
                       </a:r>
-                      <a:endParaRPr lang="en-US" sz="1000" dirty="0">
+                      <a:endParaRPr lang="en-US" sz="900" dirty="0">
                         <a:latin typeface="Pretendard" charset="0"/>
                         <a:ea typeface="Pretendard" charset="0"/>
                         <a:cs typeface="Pretendard" charset="0"/>
@@ -7318,7 +7471,7 @@
                         <a:buNone/>
                       </a:pPr>
                       <a:r>
-                        <a:rPr lang="en-US" sz="1000" dirty="0">
+                        <a:rPr lang="en-US" sz="900" dirty="0">
                           <a:solidFill>
                             <a:srgbClr val="10161F"/>
                           </a:solidFill>
@@ -7328,7 +7481,7 @@
                         </a:rPr>
                         <a:t>1,200만</a:t>
                       </a:r>
-                      <a:endParaRPr lang="en-US" sz="1000" dirty="0">
+                      <a:endParaRPr lang="en-US" sz="900" dirty="0">
                         <a:latin typeface="Pretendard" charset="0"/>
                         <a:ea typeface="Pretendard" charset="0"/>
                         <a:cs typeface="Pretendard" charset="0"/>
@@ -7385,7 +7538,7 @@
                       <a:pPr indent="0" marL="0">
                         <a:buNone/>
                       </a:pPr>
-                      <a:endParaRPr lang="en-US" sz="1000" dirty="0">
+                      <a:endParaRPr lang="en-US" sz="900" dirty="0">
                         <a:latin typeface="Pretendard" charset="0"/>
                         <a:ea typeface="Pretendard" charset="0"/>
                         <a:cs typeface="Pretendard" charset="0"/>
@@ -7443,7 +7596,7 @@
                         <a:buNone/>
                       </a:pPr>
                       <a:r>
-                        <a:rPr lang="en-US" sz="1000" dirty="0">
+                        <a:rPr lang="en-US" sz="900" dirty="0">
                           <a:solidFill>
                             <a:srgbClr val="10161F"/>
                           </a:solidFill>
@@ -7453,7 +7606,7 @@
                         </a:rPr>
                         <a:t>미정</a:t>
                       </a:r>
-                      <a:endParaRPr lang="en-US" sz="1000" dirty="0">
+                      <a:endParaRPr lang="en-US" sz="900" dirty="0">
                         <a:latin typeface="Pretendard" charset="0"/>
                         <a:ea typeface="Pretendard" charset="0"/>
                         <a:cs typeface="Pretendard" charset="0"/>
@@ -7503,7 +7656,7 @@
                   </a:tcPr>
                 </a:tc>
               </a:tr>
-              <a:tr h="438912">
+              <a:tr h="347472">
                 <a:tc>
                   <a:txBody>
                     <a:bodyPr/>
@@ -7513,7 +7666,7 @@
                         <a:buNone/>
                       </a:pPr>
                       <a:r>
-                        <a:rPr lang="en-US" sz="1000" b="1" dirty="0">
+                        <a:rPr lang="en-US" sz="900" b="1" dirty="0">
                           <a:solidFill>
                             <a:srgbClr val="10161F"/>
                           </a:solidFill>
@@ -7523,7 +7676,7 @@
                         </a:rPr>
                         <a:t>2F</a:t>
                       </a:r>
-                      <a:endParaRPr lang="en-US" sz="1000" dirty="0">
+                      <a:endParaRPr lang="en-US" sz="900" dirty="0">
                         <a:latin typeface="Pretendard" charset="0"/>
                         <a:ea typeface="Pretendard" charset="0"/>
                         <a:cs typeface="Pretendard" charset="0"/>
@@ -7581,7 +7734,7 @@
                         <a:buNone/>
                       </a:pPr>
                       <a:r>
-                        <a:rPr lang="en-US" sz="1000" dirty="0">
+                        <a:rPr lang="en-US" sz="900" dirty="0">
                           <a:solidFill>
                             <a:srgbClr val="10161F"/>
                           </a:solidFill>
@@ -7591,7 +7744,7 @@
                         </a:rPr>
                         <a:t>안과</a:t>
                       </a:r>
-                      <a:endParaRPr lang="en-US" sz="1000" dirty="0">
+                      <a:endParaRPr lang="en-US" sz="900" dirty="0">
                         <a:latin typeface="Pretendard" charset="0"/>
                         <a:ea typeface="Pretendard" charset="0"/>
                         <a:cs typeface="Pretendard" charset="0"/>
@@ -7649,7 +7802,7 @@
                         <a:buNone/>
                       </a:pPr>
                       <a:r>
-                        <a:rPr lang="en-US" sz="1000" dirty="0">
+                        <a:rPr lang="en-US" sz="900" dirty="0">
                           <a:solidFill>
                             <a:srgbClr val="10161F"/>
                           </a:solidFill>
@@ -7663,7 +7816,7 @@
                         <a:buNone/>
                       </a:pPr>
                       <a:r>
-                        <a:rPr lang="en-US" sz="1000" dirty="0">
+                        <a:rPr lang="en-US" sz="900" dirty="0">
                           <a:solidFill>
                             <a:srgbClr val="10161F"/>
                           </a:solidFill>
@@ -7673,7 +7826,7 @@
                         </a:rPr>
                         <a:t>214.9㎡)</a:t>
                       </a:r>
-                      <a:endParaRPr lang="en-US" sz="1000" dirty="0">
+                      <a:endParaRPr lang="en-US" sz="900" dirty="0">
                         <a:latin typeface="Pretendard" charset="0"/>
                         <a:ea typeface="Pretendard" charset="0"/>
                         <a:cs typeface="Pretendard" charset="0"/>
@@ -7731,7 +7884,7 @@
                         <a:buNone/>
                       </a:pPr>
                       <a:r>
-                        <a:rPr lang="en-US" sz="1000" dirty="0">
+                        <a:rPr lang="en-US" sz="900" dirty="0">
                           <a:solidFill>
                             <a:srgbClr val="10161F"/>
                           </a:solidFill>
@@ -7741,7 +7894,7 @@
                         </a:rPr>
                         <a:t>20,000만</a:t>
                       </a:r>
-                      <a:endParaRPr lang="en-US" sz="1000" dirty="0">
+                      <a:endParaRPr lang="en-US" sz="900" dirty="0">
                         <a:latin typeface="Pretendard" charset="0"/>
                         <a:ea typeface="Pretendard" charset="0"/>
                         <a:cs typeface="Pretendard" charset="0"/>
@@ -7799,7 +7952,7 @@
                         <a:buNone/>
                       </a:pPr>
                       <a:r>
-                        <a:rPr lang="en-US" sz="1000" dirty="0">
+                        <a:rPr lang="en-US" sz="900" dirty="0">
                           <a:solidFill>
                             <a:srgbClr val="10161F"/>
                           </a:solidFill>
@@ -7809,7 +7962,7 @@
                         </a:rPr>
                         <a:t>1,100만</a:t>
                       </a:r>
-                      <a:endParaRPr lang="en-US" sz="1000" dirty="0">
+                      <a:endParaRPr lang="en-US" sz="900" dirty="0">
                         <a:latin typeface="Pretendard" charset="0"/>
                         <a:ea typeface="Pretendard" charset="0"/>
                         <a:cs typeface="Pretendard" charset="0"/>
@@ -7866,7 +8019,7 @@
                       <a:pPr indent="0" marL="0">
                         <a:buNone/>
                       </a:pPr>
-                      <a:endParaRPr lang="en-US" sz="1000" dirty="0">
+                      <a:endParaRPr lang="en-US" sz="900" dirty="0">
                         <a:latin typeface="Pretendard" charset="0"/>
                         <a:ea typeface="Pretendard" charset="0"/>
                         <a:cs typeface="Pretendard" charset="0"/>
@@ -7924,7 +8077,7 @@
                         <a:buNone/>
                       </a:pPr>
                       <a:r>
-                        <a:rPr lang="en-US" sz="1000" dirty="0">
+                        <a:rPr lang="en-US" sz="900" dirty="0">
                           <a:solidFill>
                             <a:srgbClr val="10161F"/>
                           </a:solidFill>
@@ -7934,7 +8087,7 @@
                         </a:rPr>
                         <a:t>미정</a:t>
                       </a:r>
-                      <a:endParaRPr lang="en-US" sz="1000" dirty="0">
+                      <a:endParaRPr lang="en-US" sz="900" dirty="0">
                         <a:latin typeface="Pretendard" charset="0"/>
                         <a:ea typeface="Pretendard" charset="0"/>
                         <a:cs typeface="Pretendard" charset="0"/>
@@ -7984,7 +8137,7 @@
                   </a:tcPr>
                 </a:tc>
               </a:tr>
-              <a:tr h="438912">
+              <a:tr h="347472">
                 <a:tc>
                   <a:txBody>
                     <a:bodyPr/>
@@ -7994,7 +8147,7 @@
                         <a:buNone/>
                       </a:pPr>
                       <a:r>
-                        <a:rPr lang="en-US" sz="1000" b="1" dirty="0">
+                        <a:rPr lang="en-US" sz="900" b="1" dirty="0">
                           <a:solidFill>
                             <a:srgbClr val="10161F"/>
                           </a:solidFill>
@@ -8004,7 +8157,7 @@
                         </a:rPr>
                         <a:t>3F</a:t>
                       </a:r>
-                      <a:endParaRPr lang="en-US" sz="1000" dirty="0">
+                      <a:endParaRPr lang="en-US" sz="900" dirty="0">
                         <a:latin typeface="Pretendard" charset="0"/>
                         <a:ea typeface="Pretendard" charset="0"/>
                         <a:cs typeface="Pretendard" charset="0"/>
@@ -8062,7 +8215,7 @@
                         <a:buNone/>
                       </a:pPr>
                       <a:r>
-                        <a:rPr lang="en-US" sz="1000" dirty="0">
+                        <a:rPr lang="en-US" sz="900" dirty="0">
                           <a:solidFill>
                             <a:srgbClr val="10161F"/>
                           </a:solidFill>
@@ -8072,7 +8225,7 @@
                         </a:rPr>
                         <a:t>피부과</a:t>
                       </a:r>
-                      <a:endParaRPr lang="en-US" sz="1000" dirty="0">
+                      <a:endParaRPr lang="en-US" sz="900" dirty="0">
                         <a:latin typeface="Pretendard" charset="0"/>
                         <a:ea typeface="Pretendard" charset="0"/>
                         <a:cs typeface="Pretendard" charset="0"/>
@@ -8130,7 +8283,7 @@
                         <a:buNone/>
                       </a:pPr>
                       <a:r>
-                        <a:rPr lang="en-US" sz="1000" dirty="0">
+                        <a:rPr lang="en-US" sz="900" dirty="0">
                           <a:solidFill>
                             <a:srgbClr val="10161F"/>
                           </a:solidFill>
@@ -8144,7 +8297,7 @@
                         <a:buNone/>
                       </a:pPr>
                       <a:r>
-                        <a:rPr lang="en-US" sz="1000" dirty="0">
+                        <a:rPr lang="en-US" sz="900" dirty="0">
                           <a:solidFill>
                             <a:srgbClr val="10161F"/>
                           </a:solidFill>
@@ -8154,7 +8307,7 @@
                         </a:rPr>
                         <a:t>214.9㎡)</a:t>
                       </a:r>
-                      <a:endParaRPr lang="en-US" sz="1000" dirty="0">
+                      <a:endParaRPr lang="en-US" sz="900" dirty="0">
                         <a:latin typeface="Pretendard" charset="0"/>
                         <a:ea typeface="Pretendard" charset="0"/>
                         <a:cs typeface="Pretendard" charset="0"/>
@@ -8212,7 +8365,7 @@
                         <a:buNone/>
                       </a:pPr>
                       <a:r>
-                        <a:rPr lang="en-US" sz="1000" dirty="0">
+                        <a:rPr lang="en-US" sz="900" dirty="0">
                           <a:solidFill>
                             <a:srgbClr val="10161F"/>
                           </a:solidFill>
@@ -8222,7 +8375,7 @@
                         </a:rPr>
                         <a:t>20,000만</a:t>
                       </a:r>
-                      <a:endParaRPr lang="en-US" sz="1000" dirty="0">
+                      <a:endParaRPr lang="en-US" sz="900" dirty="0">
                         <a:latin typeface="Pretendard" charset="0"/>
                         <a:ea typeface="Pretendard" charset="0"/>
                         <a:cs typeface="Pretendard" charset="0"/>
@@ -8280,7 +8433,7 @@
                         <a:buNone/>
                       </a:pPr>
                       <a:r>
-                        <a:rPr lang="en-US" sz="1000" dirty="0">
+                        <a:rPr lang="en-US" sz="900" dirty="0">
                           <a:solidFill>
                             <a:srgbClr val="10161F"/>
                           </a:solidFill>
@@ -8290,7 +8443,7 @@
                         </a:rPr>
                         <a:t>1,050만</a:t>
                       </a:r>
-                      <a:endParaRPr lang="en-US" sz="1000" dirty="0">
+                      <a:endParaRPr lang="en-US" sz="900" dirty="0">
                         <a:latin typeface="Pretendard" charset="0"/>
                         <a:ea typeface="Pretendard" charset="0"/>
                         <a:cs typeface="Pretendard" charset="0"/>
@@ -8347,7 +8500,7 @@
                       <a:pPr indent="0" marL="0">
                         <a:buNone/>
                       </a:pPr>
-                      <a:endParaRPr lang="en-US" sz="1000" dirty="0">
+                      <a:endParaRPr lang="en-US" sz="900" dirty="0">
                         <a:latin typeface="Pretendard" charset="0"/>
                         <a:ea typeface="Pretendard" charset="0"/>
                         <a:cs typeface="Pretendard" charset="0"/>
@@ -8405,7 +8558,7 @@
                         <a:buNone/>
                       </a:pPr>
                       <a:r>
-                        <a:rPr lang="en-US" sz="1000" dirty="0">
+                        <a:rPr lang="en-US" sz="900" dirty="0">
                           <a:solidFill>
                             <a:srgbClr val="10161F"/>
                           </a:solidFill>
@@ -8415,7 +8568,7 @@
                         </a:rPr>
                         <a:t>미정</a:t>
                       </a:r>
-                      <a:endParaRPr lang="en-US" sz="1000" dirty="0">
+                      <a:endParaRPr lang="en-US" sz="900" dirty="0">
                         <a:latin typeface="Pretendard" charset="0"/>
                         <a:ea typeface="Pretendard" charset="0"/>
                         <a:cs typeface="Pretendard" charset="0"/>
@@ -8465,7 +8618,7 @@
                   </a:tcPr>
                 </a:tc>
               </a:tr>
-              <a:tr h="438912">
+              <a:tr h="347472">
                 <a:tc>
                   <a:txBody>
                     <a:bodyPr/>
@@ -8475,7 +8628,7 @@
                         <a:buNone/>
                       </a:pPr>
                       <a:r>
-                        <a:rPr lang="en-US" sz="1000" b="1" dirty="0">
+                        <a:rPr lang="en-US" sz="900" b="1" dirty="0">
                           <a:solidFill>
                             <a:srgbClr val="10161F"/>
                           </a:solidFill>
@@ -8485,7 +8638,7 @@
                         </a:rPr>
                         <a:t>4F</a:t>
                       </a:r>
-                      <a:endParaRPr lang="en-US" sz="1000" dirty="0">
+                      <a:endParaRPr lang="en-US" sz="900" dirty="0">
                         <a:latin typeface="Pretendard" charset="0"/>
                         <a:ea typeface="Pretendard" charset="0"/>
                         <a:cs typeface="Pretendard" charset="0"/>
@@ -8543,7 +8696,7 @@
                         <a:buNone/>
                       </a:pPr>
                       <a:r>
-                        <a:rPr lang="en-US" sz="1000" dirty="0">
+                        <a:rPr lang="en-US" sz="900" dirty="0">
                           <a:solidFill>
                             <a:srgbClr val="10161F"/>
                           </a:solidFill>
@@ -8553,7 +8706,7 @@
                         </a:rPr>
                         <a:t>정형외과</a:t>
                       </a:r>
-                      <a:endParaRPr lang="en-US" sz="1000" dirty="0">
+                      <a:endParaRPr lang="en-US" sz="900" dirty="0">
                         <a:latin typeface="Pretendard" charset="0"/>
                         <a:ea typeface="Pretendard" charset="0"/>
                         <a:cs typeface="Pretendard" charset="0"/>
@@ -8611,7 +8764,7 @@
                         <a:buNone/>
                       </a:pPr>
                       <a:r>
-                        <a:rPr lang="en-US" sz="1000" dirty="0">
+                        <a:rPr lang="en-US" sz="900" dirty="0">
                           <a:solidFill>
                             <a:srgbClr val="10161F"/>
                           </a:solidFill>
@@ -8625,7 +8778,7 @@
                         <a:buNone/>
                       </a:pPr>
                       <a:r>
-                        <a:rPr lang="en-US" sz="1000" dirty="0">
+                        <a:rPr lang="en-US" sz="900" dirty="0">
                           <a:solidFill>
                             <a:srgbClr val="10161F"/>
                           </a:solidFill>
@@ -8635,7 +8788,7 @@
                         </a:rPr>
                         <a:t>214.9㎡)</a:t>
                       </a:r>
-                      <a:endParaRPr lang="en-US" sz="1000" dirty="0">
+                      <a:endParaRPr lang="en-US" sz="900" dirty="0">
                         <a:latin typeface="Pretendard" charset="0"/>
                         <a:ea typeface="Pretendard" charset="0"/>
                         <a:cs typeface="Pretendard" charset="0"/>
@@ -8693,7 +8846,7 @@
                         <a:buNone/>
                       </a:pPr>
                       <a:r>
-                        <a:rPr lang="en-US" sz="1000" dirty="0">
+                        <a:rPr lang="en-US" sz="900" dirty="0">
                           <a:solidFill>
                             <a:srgbClr val="10161F"/>
                           </a:solidFill>
@@ -8703,7 +8856,7 @@
                         </a:rPr>
                         <a:t>15,000만</a:t>
                       </a:r>
-                      <a:endParaRPr lang="en-US" sz="1000" dirty="0">
+                      <a:endParaRPr lang="en-US" sz="900" dirty="0">
                         <a:latin typeface="Pretendard" charset="0"/>
                         <a:ea typeface="Pretendard" charset="0"/>
                         <a:cs typeface="Pretendard" charset="0"/>
@@ -8761,7 +8914,7 @@
                         <a:buNone/>
                       </a:pPr>
                       <a:r>
-                        <a:rPr lang="en-US" sz="1000" dirty="0">
+                        <a:rPr lang="en-US" sz="900" dirty="0">
                           <a:solidFill>
                             <a:srgbClr val="10161F"/>
                           </a:solidFill>
@@ -8771,7 +8924,7 @@
                         </a:rPr>
                         <a:t>1,000만</a:t>
                       </a:r>
-                      <a:endParaRPr lang="en-US" sz="1000" dirty="0">
+                      <a:endParaRPr lang="en-US" sz="900" dirty="0">
                         <a:latin typeface="Pretendard" charset="0"/>
                         <a:ea typeface="Pretendard" charset="0"/>
                         <a:cs typeface="Pretendard" charset="0"/>
@@ -8828,7 +8981,7 @@
                       <a:pPr indent="0" marL="0">
                         <a:buNone/>
                       </a:pPr>
-                      <a:endParaRPr lang="en-US" sz="1000" dirty="0">
+                      <a:endParaRPr lang="en-US" sz="900" dirty="0">
                         <a:latin typeface="Pretendard" charset="0"/>
                         <a:ea typeface="Pretendard" charset="0"/>
                         <a:cs typeface="Pretendard" charset="0"/>
@@ -8886,7 +9039,7 @@
                         <a:buNone/>
                       </a:pPr>
                       <a:r>
-                        <a:rPr lang="en-US" sz="1000" dirty="0">
+                        <a:rPr lang="en-US" sz="900" dirty="0">
                           <a:solidFill>
                             <a:srgbClr val="10161F"/>
                           </a:solidFill>
@@ -8896,7 +9049,7 @@
                         </a:rPr>
                         <a:t>미정</a:t>
                       </a:r>
-                      <a:endParaRPr lang="en-US" sz="1000" dirty="0">
+                      <a:endParaRPr lang="en-US" sz="900" dirty="0">
                         <a:latin typeface="Pretendard" charset="0"/>
                         <a:ea typeface="Pretendard" charset="0"/>
                         <a:cs typeface="Pretendard" charset="0"/>
@@ -8946,7 +9099,7 @@
                   </a:tcPr>
                 </a:tc>
               </a:tr>
-              <a:tr h="438912">
+              <a:tr h="347472">
                 <a:tc>
                   <a:txBody>
                     <a:bodyPr/>
@@ -8956,7 +9109,7 @@
                         <a:buNone/>
                       </a:pPr>
                       <a:r>
-                        <a:rPr lang="en-US" sz="1000" b="1" dirty="0">
+                        <a:rPr lang="en-US" sz="900" b="1" dirty="0">
                           <a:solidFill>
                             <a:srgbClr val="10161F"/>
                           </a:solidFill>
@@ -8966,7 +9119,7 @@
                         </a:rPr>
                         <a:t>5F</a:t>
                       </a:r>
-                      <a:endParaRPr lang="en-US" sz="1000" dirty="0">
+                      <a:endParaRPr lang="en-US" sz="900" dirty="0">
                         <a:latin typeface="Pretendard" charset="0"/>
                         <a:ea typeface="Pretendard" charset="0"/>
                         <a:cs typeface="Pretendard" charset="0"/>
@@ -9024,7 +9177,7 @@
                         <a:buNone/>
                       </a:pPr>
                       <a:r>
-                        <a:rPr lang="en-US" sz="1000" dirty="0">
+                        <a:rPr lang="en-US" sz="900" dirty="0">
                           <a:solidFill>
                             <a:srgbClr val="10161F"/>
                           </a:solidFill>
@@ -9034,7 +9187,7 @@
                         </a:rPr>
                         <a:t>치과</a:t>
                       </a:r>
-                      <a:endParaRPr lang="en-US" sz="1000" dirty="0">
+                      <a:endParaRPr lang="en-US" sz="900" dirty="0">
                         <a:latin typeface="Pretendard" charset="0"/>
                         <a:ea typeface="Pretendard" charset="0"/>
                         <a:cs typeface="Pretendard" charset="0"/>
@@ -9092,7 +9245,7 @@
                         <a:buNone/>
                       </a:pPr>
                       <a:r>
-                        <a:rPr lang="en-US" sz="1000" dirty="0">
+                        <a:rPr lang="en-US" sz="900" dirty="0">
                           <a:solidFill>
                             <a:srgbClr val="10161F"/>
                           </a:solidFill>
@@ -9106,7 +9259,7 @@
                         <a:buNone/>
                       </a:pPr>
                       <a:r>
-                        <a:rPr lang="en-US" sz="1000" dirty="0">
+                        <a:rPr lang="en-US" sz="900" dirty="0">
                           <a:solidFill>
                             <a:srgbClr val="10161F"/>
                           </a:solidFill>
@@ -9116,7 +9269,7 @@
                         </a:rPr>
                         <a:t>214.9㎡)</a:t>
                       </a:r>
-                      <a:endParaRPr lang="en-US" sz="1000" dirty="0">
+                      <a:endParaRPr lang="en-US" sz="900" dirty="0">
                         <a:latin typeface="Pretendard" charset="0"/>
                         <a:ea typeface="Pretendard" charset="0"/>
                         <a:cs typeface="Pretendard" charset="0"/>
@@ -9174,7 +9327,7 @@
                         <a:buNone/>
                       </a:pPr>
                       <a:r>
-                        <a:rPr lang="en-US" sz="1000" dirty="0">
+                        <a:rPr lang="en-US" sz="900" dirty="0">
                           <a:solidFill>
                             <a:srgbClr val="10161F"/>
                           </a:solidFill>
@@ -9184,7 +9337,7 @@
                         </a:rPr>
                         <a:t>15,000만</a:t>
                       </a:r>
-                      <a:endParaRPr lang="en-US" sz="1000" dirty="0">
+                      <a:endParaRPr lang="en-US" sz="900" dirty="0">
                         <a:latin typeface="Pretendard" charset="0"/>
                         <a:ea typeface="Pretendard" charset="0"/>
                         <a:cs typeface="Pretendard" charset="0"/>
@@ -9242,7 +9395,7 @@
                         <a:buNone/>
                       </a:pPr>
                       <a:r>
-                        <a:rPr lang="en-US" sz="1000" dirty="0">
+                        <a:rPr lang="en-US" sz="900" dirty="0">
                           <a:solidFill>
                             <a:srgbClr val="10161F"/>
                           </a:solidFill>
@@ -9252,7 +9405,7 @@
                         </a:rPr>
                         <a:t>950만</a:t>
                       </a:r>
-                      <a:endParaRPr lang="en-US" sz="1000" dirty="0">
+                      <a:endParaRPr lang="en-US" sz="900" dirty="0">
                         <a:latin typeface="Pretendard" charset="0"/>
                         <a:ea typeface="Pretendard" charset="0"/>
                         <a:cs typeface="Pretendard" charset="0"/>
@@ -9309,7 +9462,7 @@
                       <a:pPr indent="0" marL="0">
                         <a:buNone/>
                       </a:pPr>
-                      <a:endParaRPr lang="en-US" sz="1000" dirty="0">
+                      <a:endParaRPr lang="en-US" sz="900" dirty="0">
                         <a:latin typeface="Pretendard" charset="0"/>
                         <a:ea typeface="Pretendard" charset="0"/>
                         <a:cs typeface="Pretendard" charset="0"/>
@@ -9367,7 +9520,7 @@
                         <a:buNone/>
                       </a:pPr>
                       <a:r>
-                        <a:rPr lang="en-US" sz="1000" dirty="0">
+                        <a:rPr lang="en-US" sz="900" dirty="0">
                           <a:solidFill>
                             <a:srgbClr val="10161F"/>
                           </a:solidFill>
@@ -9377,7 +9530,7 @@
                         </a:rPr>
                         <a:t>미정</a:t>
                       </a:r>
-                      <a:endParaRPr lang="en-US" sz="1000" dirty="0">
+                      <a:endParaRPr lang="en-US" sz="900" dirty="0">
                         <a:latin typeface="Pretendard" charset="0"/>
                         <a:ea typeface="Pretendard" charset="0"/>
                         <a:cs typeface="Pretendard" charset="0"/>
@@ -9427,7 +9580,7 @@
                   </a:tcPr>
                 </a:tc>
               </a:tr>
-              <a:tr h="438912">
+              <a:tr h="347472">
                 <a:tc>
                   <a:txBody>
                     <a:bodyPr/>
@@ -9437,7 +9590,7 @@
                         <a:buNone/>
                       </a:pPr>
                       <a:r>
-                        <a:rPr lang="en-US" sz="1000" b="1" dirty="0">
+                        <a:rPr lang="en-US" sz="900" b="1" dirty="0">
                           <a:solidFill>
                             <a:srgbClr val="10161F"/>
                           </a:solidFill>
@@ -9447,7 +9600,7 @@
                         </a:rPr>
                         <a:t>6F~7F</a:t>
                       </a:r>
-                      <a:endParaRPr lang="en-US" sz="1000" dirty="0">
+                      <a:endParaRPr lang="en-US" sz="900" dirty="0">
                         <a:latin typeface="Pretendard" charset="0"/>
                         <a:ea typeface="Pretendard" charset="0"/>
                         <a:cs typeface="Pretendard" charset="0"/>
@@ -9505,7 +9658,7 @@
                         <a:buNone/>
                       </a:pPr>
                       <a:r>
-                        <a:rPr lang="en-US" sz="1000" dirty="0">
+                        <a:rPr lang="en-US" sz="900" dirty="0">
                           <a:solidFill>
                             <a:srgbClr val="10161F"/>
                           </a:solidFill>
@@ -9515,7 +9668,7 @@
                         </a:rPr>
                         <a:t>어학원</a:t>
                       </a:r>
-                      <a:endParaRPr lang="en-US" sz="1000" dirty="0">
+                      <a:endParaRPr lang="en-US" sz="900" dirty="0">
                         <a:latin typeface="Pretendard" charset="0"/>
                         <a:ea typeface="Pretendard" charset="0"/>
                         <a:cs typeface="Pretendard" charset="0"/>
@@ -9573,7 +9726,7 @@
                         <a:buNone/>
                       </a:pPr>
                       <a:r>
-                        <a:rPr lang="en-US" sz="1000" dirty="0">
+                        <a:rPr lang="en-US" sz="900" dirty="0">
                           <a:solidFill>
                             <a:srgbClr val="10161F"/>
                           </a:solidFill>
@@ -9587,7 +9740,7 @@
                         <a:buNone/>
                       </a:pPr>
                       <a:r>
-                        <a:rPr lang="en-US" sz="1000" dirty="0">
+                        <a:rPr lang="en-US" sz="900" dirty="0">
                           <a:solidFill>
                             <a:srgbClr val="10161F"/>
                           </a:solidFill>
@@ -9597,7 +9750,7 @@
                         </a:rPr>
                         <a:t>429.8㎡)</a:t>
                       </a:r>
-                      <a:endParaRPr lang="en-US" sz="1000" dirty="0">
+                      <a:endParaRPr lang="en-US" sz="900" dirty="0">
                         <a:latin typeface="Pretendard" charset="0"/>
                         <a:ea typeface="Pretendard" charset="0"/>
                         <a:cs typeface="Pretendard" charset="0"/>
@@ -9655,7 +9808,7 @@
                         <a:buNone/>
                       </a:pPr>
                       <a:r>
-                        <a:rPr lang="en-US" sz="1000" dirty="0">
+                        <a:rPr lang="en-US" sz="900" dirty="0">
                           <a:solidFill>
                             <a:srgbClr val="10161F"/>
                           </a:solidFill>
@@ -9665,7 +9818,7 @@
                         </a:rPr>
                         <a:t>15,000만</a:t>
                       </a:r>
-                      <a:endParaRPr lang="en-US" sz="1000" dirty="0">
+                      <a:endParaRPr lang="en-US" sz="900" dirty="0">
                         <a:latin typeface="Pretendard" charset="0"/>
                         <a:ea typeface="Pretendard" charset="0"/>
                         <a:cs typeface="Pretendard" charset="0"/>
@@ -9723,7 +9876,7 @@
                         <a:buNone/>
                       </a:pPr>
                       <a:r>
-                        <a:rPr lang="en-US" sz="1000" dirty="0">
+                        <a:rPr lang="en-US" sz="900" dirty="0">
                           <a:solidFill>
                             <a:srgbClr val="10161F"/>
                           </a:solidFill>
@@ -9733,7 +9886,7 @@
                         </a:rPr>
                         <a:t>650만</a:t>
                       </a:r>
-                      <a:endParaRPr lang="en-US" sz="1000" dirty="0">
+                      <a:endParaRPr lang="en-US" sz="900" dirty="0">
                         <a:latin typeface="Pretendard" charset="0"/>
                         <a:ea typeface="Pretendard" charset="0"/>
                         <a:cs typeface="Pretendard" charset="0"/>
@@ -9790,7 +9943,7 @@
                       <a:pPr indent="0" marL="0">
                         <a:buNone/>
                       </a:pPr>
-                      <a:endParaRPr lang="en-US" sz="1000" dirty="0">
+                      <a:endParaRPr lang="en-US" sz="900" dirty="0">
                         <a:latin typeface="Pretendard" charset="0"/>
                         <a:ea typeface="Pretendard" charset="0"/>
                         <a:cs typeface="Pretendard" charset="0"/>
@@ -9848,7 +10001,7 @@
                         <a:buNone/>
                       </a:pPr>
                       <a:r>
-                        <a:rPr lang="en-US" sz="1000" dirty="0">
+                        <a:rPr lang="en-US" sz="900" dirty="0">
                           <a:solidFill>
                             <a:srgbClr val="10161F"/>
                           </a:solidFill>
@@ -9858,7 +10011,7 @@
                         </a:rPr>
                         <a:t>미정</a:t>
                       </a:r>
-                      <a:endParaRPr lang="en-US" sz="1000" dirty="0">
+                      <a:endParaRPr lang="en-US" sz="900" dirty="0">
                         <a:latin typeface="Pretendard" charset="0"/>
                         <a:ea typeface="Pretendard" charset="0"/>
                         <a:cs typeface="Pretendard" charset="0"/>
@@ -9904,6 +10057,1428 @@
                     </a:lnB>
                     <a:solidFill>
                       <a:srgbClr val="FFFFFF"/>
+                    </a:solidFill>
+                  </a:tcPr>
+                </a:tc>
+              </a:tr>
+              <a:tr h="347472">
+                <a:tc>
+                  <a:txBody>
+                    <a:bodyPr/>
+                    <a:lstStyle/>
+                    <a:p>
+                      <a:pPr indent="0" marL="0">
+                        <a:buNone/>
+                      </a:pPr>
+                      <a:r>
+                        <a:rPr lang="en-US" sz="900" b="1" dirty="0">
+                          <a:solidFill>
+                            <a:srgbClr val="10161F"/>
+                          </a:solidFill>
+                          <a:latin typeface="Pretendard" pitchFamily="34" charset="0"/>
+                          <a:ea typeface="Pretendard" pitchFamily="34" charset="-122"/>
+                          <a:cs typeface="Pretendard" pitchFamily="34" charset="-120"/>
+                        </a:rPr>
+                        <a:t>구분</a:t>
+                      </a:r>
+                      <a:endParaRPr lang="en-US" sz="900" dirty="0">
+                        <a:latin typeface="Pretendard" charset="0"/>
+                        <a:ea typeface="Pretendard" charset="0"/>
+                        <a:cs typeface="Pretendard" charset="0"/>
+                      </a:endParaRPr>
+                    </a:p>
+                  </a:txBody>
+                  <a:tcPr marL="50800" marR="50800" marT="25400" marB="25400" anchor="ctr">
+                    <a:lnL w="3810" cap="flat" cmpd="sng" algn="ctr">
+                      <a:solidFill>
+                        <a:srgbClr val="CBD5E0"/>
+                      </a:solidFill>
+                      <a:prstDash val="solid"/>
+                      <a:round/>
+                      <a:headEnd type="none" w="med" len="med"/>
+                      <a:tailEnd type="none" w="med" len="med"/>
+                    </a:lnL>
+                    <a:lnR w="3810" cap="flat" cmpd="sng" algn="ctr">
+                      <a:solidFill>
+                        <a:srgbClr val="CBD5E0"/>
+                      </a:solidFill>
+                      <a:prstDash val="solid"/>
+                      <a:round/>
+                      <a:headEnd type="none" w="med" len="med"/>
+                      <a:tailEnd type="none" w="med" len="med"/>
+                    </a:lnR>
+                    <a:lnT w="3810" cap="flat" cmpd="sng" algn="ctr">
+                      <a:solidFill>
+                        <a:srgbClr val="CBD5E0"/>
+                      </a:solidFill>
+                      <a:prstDash val="solid"/>
+                      <a:round/>
+                      <a:headEnd type="none" w="med" len="med"/>
+                      <a:tailEnd type="none" w="med" len="med"/>
+                    </a:lnT>
+                    <a:lnB w="3810" cap="flat" cmpd="sng" algn="ctr">
+                      <a:solidFill>
+                        <a:srgbClr val="CBD5E0"/>
+                      </a:solidFill>
+                      <a:prstDash val="solid"/>
+                      <a:round/>
+                      <a:headEnd type="none" w="med" len="med"/>
+                      <a:tailEnd type="none" w="med" len="med"/>
+                    </a:lnB>
+                    <a:solidFill>
+                      <a:srgbClr val="F7FAFC"/>
+                    </a:solidFill>
+                  </a:tcPr>
+                </a:tc>
+                <a:tc>
+                  <a:txBody>
+                    <a:bodyPr/>
+                    <a:lstStyle/>
+                    <a:p>
+                      <a:pPr indent="0" marL="0">
+                        <a:buNone/>
+                      </a:pPr>
+                      <a:r>
+                        <a:rPr lang="en-US" sz="900" dirty="0">
+                          <a:solidFill>
+                            <a:srgbClr val="10161F"/>
+                          </a:solidFill>
+                          <a:latin typeface="Pretendard" pitchFamily="34" charset="0"/>
+                          <a:ea typeface="Pretendard" pitchFamily="34" charset="-122"/>
+                          <a:cs typeface="Pretendard" pitchFamily="34" charset="-120"/>
+                        </a:rPr>
+                        <a:t>지표 </a:t>
+                      </a:r>
+                      <a:pPr indent="0" marL="0">
+                        <a:buNone/>
+                      </a:pPr>
+                      <a:r>
+                        <a:rPr lang="en-US" sz="900" dirty="0">
+                          <a:solidFill>
+                            <a:srgbClr val="10161F"/>
+                          </a:solidFill>
+                          <a:latin typeface="Pretendard" pitchFamily="34" charset="0"/>
+                          <a:ea typeface="Pretendard" pitchFamily="34" charset="-122"/>
+                          <a:cs typeface="Pretendard" pitchFamily="34" charset="-120"/>
+                        </a:rPr>
+                        <a:t>분석</a:t>
+                      </a:r>
+                      <a:endParaRPr lang="en-US" sz="900" dirty="0">
+                        <a:latin typeface="Pretendard" charset="0"/>
+                        <a:ea typeface="Pretendard" charset="0"/>
+                        <a:cs typeface="Pretendard" charset="0"/>
+                      </a:endParaRPr>
+                    </a:p>
+                  </a:txBody>
+                  <a:tcPr marL="50800" marR="50800" marT="25400" marB="25400" anchor="ctr">
+                    <a:lnL w="3810" cap="flat" cmpd="sng" algn="ctr">
+                      <a:solidFill>
+                        <a:srgbClr val="CBD5E0"/>
+                      </a:solidFill>
+                      <a:prstDash val="solid"/>
+                      <a:round/>
+                      <a:headEnd type="none" w="med" len="med"/>
+                      <a:tailEnd type="none" w="med" len="med"/>
+                    </a:lnL>
+                    <a:lnR w="3810" cap="flat" cmpd="sng" algn="ctr">
+                      <a:solidFill>
+                        <a:srgbClr val="CBD5E0"/>
+                      </a:solidFill>
+                      <a:prstDash val="solid"/>
+                      <a:round/>
+                      <a:headEnd type="none" w="med" len="med"/>
+                      <a:tailEnd type="none" w="med" len="med"/>
+                    </a:lnR>
+                    <a:lnT w="3810" cap="flat" cmpd="sng" algn="ctr">
+                      <a:solidFill>
+                        <a:srgbClr val="CBD5E0"/>
+                      </a:solidFill>
+                      <a:prstDash val="solid"/>
+                      <a:round/>
+                      <a:headEnd type="none" w="med" len="med"/>
+                      <a:tailEnd type="none" w="med" len="med"/>
+                    </a:lnT>
+                    <a:lnB w="3810" cap="flat" cmpd="sng" algn="ctr">
+                      <a:solidFill>
+                        <a:srgbClr val="CBD5E0"/>
+                      </a:solidFill>
+                      <a:prstDash val="solid"/>
+                      <a:round/>
+                      <a:headEnd type="none" w="med" len="med"/>
+                      <a:tailEnd type="none" w="med" len="med"/>
+                    </a:lnB>
+                    <a:solidFill>
+                      <a:srgbClr val="F7FAFC"/>
+                    </a:solidFill>
+                  </a:tcPr>
+                </a:tc>
+                <a:tc>
+                  <a:txBody>
+                    <a:bodyPr/>
+                    <a:lstStyle/>
+                    <a:p>
+                      <a:pPr indent="0" marL="0">
+                        <a:buNone/>
+                      </a:pPr>
+                      <a:r>
+                        <a:rPr lang="en-US" sz="900" dirty="0">
+                          <a:solidFill>
+                            <a:srgbClr val="10161F"/>
+                          </a:solidFill>
+                          <a:latin typeface="Pretendard" pitchFamily="34" charset="0"/>
+                          <a:ea typeface="Pretendard" pitchFamily="34" charset="-122"/>
+                          <a:cs typeface="Pretendard" pitchFamily="34" charset="-120"/>
+                        </a:rPr>
+                        <a:t>비고</a:t>
+                      </a:r>
+                      <a:endParaRPr lang="en-US" sz="900" dirty="0">
+                        <a:latin typeface="Pretendard" charset="0"/>
+                        <a:ea typeface="Pretendard" charset="0"/>
+                        <a:cs typeface="Pretendard" charset="0"/>
+                      </a:endParaRPr>
+                    </a:p>
+                  </a:txBody>
+                  <a:tcPr marL="50800" marR="50800" marT="25400" marB="25400" anchor="ctr">
+                    <a:lnL w="3810" cap="flat" cmpd="sng" algn="ctr">
+                      <a:solidFill>
+                        <a:srgbClr val="CBD5E0"/>
+                      </a:solidFill>
+                      <a:prstDash val="solid"/>
+                      <a:round/>
+                      <a:headEnd type="none" w="med" len="med"/>
+                      <a:tailEnd type="none" w="med" len="med"/>
+                    </a:lnL>
+                    <a:lnR w="3810" cap="flat" cmpd="sng" algn="ctr">
+                      <a:solidFill>
+                        <a:srgbClr val="CBD5E0"/>
+                      </a:solidFill>
+                      <a:prstDash val="solid"/>
+                      <a:round/>
+                      <a:headEnd type="none" w="med" len="med"/>
+                      <a:tailEnd type="none" w="med" len="med"/>
+                    </a:lnR>
+                    <a:lnT w="3810" cap="flat" cmpd="sng" algn="ctr">
+                      <a:solidFill>
+                        <a:srgbClr val="CBD5E0"/>
+                      </a:solidFill>
+                      <a:prstDash val="solid"/>
+                      <a:round/>
+                      <a:headEnd type="none" w="med" len="med"/>
+                      <a:tailEnd type="none" w="med" len="med"/>
+                    </a:lnT>
+                    <a:lnB w="3810" cap="flat" cmpd="sng" algn="ctr">
+                      <a:solidFill>
+                        <a:srgbClr val="CBD5E0"/>
+                      </a:solidFill>
+                      <a:prstDash val="solid"/>
+                      <a:round/>
+                      <a:headEnd type="none" w="med" len="med"/>
+                      <a:tailEnd type="none" w="med" len="med"/>
+                    </a:lnB>
+                    <a:solidFill>
+                      <a:srgbClr val="F7FAFC"/>
+                    </a:solidFill>
+                  </a:tcPr>
+                </a:tc>
+              </a:tr>
+              <a:tr h="347472">
+                <a:tc>
+                  <a:txBody>
+                    <a:bodyPr/>
+                    <a:lstStyle/>
+                    <a:p>
+                      <a:pPr indent="0" marL="0">
+                        <a:buNone/>
+                      </a:pPr>
+                      <a:r>
+                        <a:rPr lang="en-US" sz="900" b="1" dirty="0">
+                          <a:solidFill>
+                            <a:srgbClr val="10161F"/>
+                          </a:solidFill>
+                          <a:latin typeface="Pretendard" pitchFamily="34" charset="0"/>
+                          <a:ea typeface="Pretendard" pitchFamily="34" charset="-122"/>
+                          <a:cs typeface="Pretendard" pitchFamily="34" charset="-120"/>
+                        </a:rPr>
+                        <a:t>공실 </a:t>
+                      </a:r>
+                      <a:pPr indent="0" marL="0">
+                        <a:buNone/>
+                      </a:pPr>
+                      <a:r>
+                        <a:rPr lang="en-US" sz="900" b="1" dirty="0">
+                          <a:solidFill>
+                            <a:srgbClr val="10161F"/>
+                          </a:solidFill>
+                          <a:latin typeface="Pretendard" pitchFamily="34" charset="0"/>
+                          <a:ea typeface="Pretendard" pitchFamily="34" charset="-122"/>
+                          <a:cs typeface="Pretendard" pitchFamily="34" charset="-120"/>
+                        </a:rPr>
+                        <a:t>현황</a:t>
+                      </a:r>
+                      <a:endParaRPr lang="en-US" sz="900" dirty="0">
+                        <a:latin typeface="Pretendard" charset="0"/>
+                        <a:ea typeface="Pretendard" charset="0"/>
+                        <a:cs typeface="Pretendard" charset="0"/>
+                      </a:endParaRPr>
+                    </a:p>
+                  </a:txBody>
+                  <a:tcPr marL="50800" marR="50800" marT="25400" marB="25400" anchor="ctr">
+                    <a:lnL w="3810" cap="flat" cmpd="sng" algn="ctr">
+                      <a:solidFill>
+                        <a:srgbClr val="CBD5E0"/>
+                      </a:solidFill>
+                      <a:prstDash val="solid"/>
+                      <a:round/>
+                      <a:headEnd type="none" w="med" len="med"/>
+                      <a:tailEnd type="none" w="med" len="med"/>
+                    </a:lnL>
+                    <a:lnR w="3810" cap="flat" cmpd="sng" algn="ctr">
+                      <a:solidFill>
+                        <a:srgbClr val="CBD5E0"/>
+                      </a:solidFill>
+                      <a:prstDash val="solid"/>
+                      <a:round/>
+                      <a:headEnd type="none" w="med" len="med"/>
+                      <a:tailEnd type="none" w="med" len="med"/>
+                    </a:lnR>
+                    <a:lnT w="3810" cap="flat" cmpd="sng" algn="ctr">
+                      <a:solidFill>
+                        <a:srgbClr val="CBD5E0"/>
+                      </a:solidFill>
+                      <a:prstDash val="solid"/>
+                      <a:round/>
+                      <a:headEnd type="none" w="med" len="med"/>
+                      <a:tailEnd type="none" w="med" len="med"/>
+                    </a:lnT>
+                    <a:lnB w="3810" cap="flat" cmpd="sng" algn="ctr">
+                      <a:solidFill>
+                        <a:srgbClr val="CBD5E0"/>
+                      </a:solidFill>
+                      <a:prstDash val="solid"/>
+                      <a:round/>
+                      <a:headEnd type="none" w="med" len="med"/>
+                      <a:tailEnd type="none" w="med" len="med"/>
+                    </a:lnB>
+                    <a:solidFill>
+                      <a:srgbClr val="FFFFFF"/>
+                    </a:solidFill>
+                  </a:tcPr>
+                </a:tc>
+                <a:tc>
+                  <a:txBody>
+                    <a:bodyPr/>
+                    <a:lstStyle/>
+                    <a:p>
+                      <a:pPr indent="0" marL="0">
+                        <a:buNone/>
+                      </a:pPr>
+                      <a:r>
+                        <a:rPr lang="en-US" sz="900" dirty="0">
+                          <a:solidFill>
+                            <a:srgbClr val="10161F"/>
+                          </a:solidFill>
+                          <a:latin typeface="Pretendard" pitchFamily="34" charset="0"/>
+                          <a:ea typeface="Pretendard" pitchFamily="34" charset="-122"/>
+                          <a:cs typeface="Pretendard" pitchFamily="34" charset="-120"/>
+                        </a:rPr>
+                        <a:t>0.0% </a:t>
+                      </a:r>
+                      <a:pPr indent="0" marL="0">
+                        <a:buNone/>
+                      </a:pPr>
+                      <a:r>
+                        <a:rPr lang="en-US" sz="900" dirty="0">
+                          <a:solidFill>
+                            <a:srgbClr val="10161F"/>
+                          </a:solidFill>
+                          <a:latin typeface="Pretendard" pitchFamily="34" charset="0"/>
+                          <a:ea typeface="Pretendard" pitchFamily="34" charset="-122"/>
+                          <a:cs typeface="Pretendard" pitchFamily="34" charset="-120"/>
+                        </a:rPr>
+                        <a:t>(임대중 </a:t>
+                      </a:r>
+                      <a:pPr indent="0" marL="0">
+                        <a:buNone/>
+                      </a:pPr>
+                      <a:r>
+                        <a:rPr lang="en-US" sz="900" dirty="0">
+                          <a:solidFill>
+                            <a:srgbClr val="10161F"/>
+                          </a:solidFill>
+                          <a:latin typeface="Pretendard" pitchFamily="34" charset="0"/>
+                          <a:ea typeface="Pretendard" pitchFamily="34" charset="-122"/>
+                          <a:cs typeface="Pretendard" pitchFamily="34" charset="-120"/>
+                        </a:rPr>
+                        <a:t>7 </a:t>
+                      </a:r>
+                      <a:pPr indent="0" marL="0">
+                        <a:buNone/>
+                      </a:pPr>
+                      <a:r>
+                        <a:rPr lang="en-US" sz="900" dirty="0">
+                          <a:solidFill>
+                            <a:srgbClr val="10161F"/>
+                          </a:solidFill>
+                          <a:latin typeface="Pretendard" pitchFamily="34" charset="0"/>
+                          <a:ea typeface="Pretendard" pitchFamily="34" charset="-122"/>
+                          <a:cs typeface="Pretendard" pitchFamily="34" charset="-120"/>
+                        </a:rPr>
+                        <a:t>· </a:t>
+                      </a:r>
+                      <a:pPr indent="0" marL="0">
+                        <a:buNone/>
+                      </a:pPr>
+                      <a:r>
+                        <a:rPr lang="en-US" sz="900" dirty="0">
+                          <a:solidFill>
+                            <a:srgbClr val="10161F"/>
+                          </a:solidFill>
+                          <a:latin typeface="Pretendard" pitchFamily="34" charset="0"/>
+                          <a:ea typeface="Pretendard" pitchFamily="34" charset="-122"/>
+                          <a:cs typeface="Pretendard" pitchFamily="34" charset="-120"/>
+                        </a:rPr>
+                        <a:t>공실 </a:t>
+                      </a:r>
+                      <a:pPr indent="0" marL="0">
+                        <a:buNone/>
+                      </a:pPr>
+                      <a:r>
+                        <a:rPr lang="en-US" sz="900" dirty="0">
+                          <a:solidFill>
+                            <a:srgbClr val="10161F"/>
+                          </a:solidFill>
+                          <a:latin typeface="Pretendard" pitchFamily="34" charset="0"/>
+                          <a:ea typeface="Pretendard" pitchFamily="34" charset="-122"/>
+                          <a:cs typeface="Pretendard" pitchFamily="34" charset="-120"/>
+                        </a:rPr>
+                        <a:t>0)</a:t>
+                      </a:r>
+                      <a:endParaRPr lang="en-US" sz="900" dirty="0">
+                        <a:latin typeface="Pretendard" charset="0"/>
+                        <a:ea typeface="Pretendard" charset="0"/>
+                        <a:cs typeface="Pretendard" charset="0"/>
+                      </a:endParaRPr>
+                    </a:p>
+                  </a:txBody>
+                  <a:tcPr marL="50800" marR="50800" marT="25400" marB="25400" anchor="ctr">
+                    <a:lnL w="3810" cap="flat" cmpd="sng" algn="ctr">
+                      <a:solidFill>
+                        <a:srgbClr val="CBD5E0"/>
+                      </a:solidFill>
+                      <a:prstDash val="solid"/>
+                      <a:round/>
+                      <a:headEnd type="none" w="med" len="med"/>
+                      <a:tailEnd type="none" w="med" len="med"/>
+                    </a:lnL>
+                    <a:lnR w="3810" cap="flat" cmpd="sng" algn="ctr">
+                      <a:solidFill>
+                        <a:srgbClr val="CBD5E0"/>
+                      </a:solidFill>
+                      <a:prstDash val="solid"/>
+                      <a:round/>
+                      <a:headEnd type="none" w="med" len="med"/>
+                      <a:tailEnd type="none" w="med" len="med"/>
+                    </a:lnR>
+                    <a:lnT w="3810" cap="flat" cmpd="sng" algn="ctr">
+                      <a:solidFill>
+                        <a:srgbClr val="CBD5E0"/>
+                      </a:solidFill>
+                      <a:prstDash val="solid"/>
+                      <a:round/>
+                      <a:headEnd type="none" w="med" len="med"/>
+                      <a:tailEnd type="none" w="med" len="med"/>
+                    </a:lnT>
+                    <a:lnB w="3810" cap="flat" cmpd="sng" algn="ctr">
+                      <a:solidFill>
+                        <a:srgbClr val="CBD5E0"/>
+                      </a:solidFill>
+                      <a:prstDash val="solid"/>
+                      <a:round/>
+                      <a:headEnd type="none" w="med" len="med"/>
+                      <a:tailEnd type="none" w="med" len="med"/>
+                    </a:lnB>
+                    <a:solidFill>
+                      <a:srgbClr val="FFFFFF"/>
+                    </a:solidFill>
+                  </a:tcPr>
+                </a:tc>
+                <a:tc>
+                  <a:txBody>
+                    <a:bodyPr/>
+                    <a:lstStyle/>
+                    <a:p>
+                      <a:pPr indent="0" marL="0">
+                        <a:buNone/>
+                      </a:pPr>
+                      <a:r>
+                        <a:rPr lang="en-US" sz="900" dirty="0">
+                          <a:solidFill>
+                            <a:srgbClr val="10161F"/>
+                          </a:solidFill>
+                          <a:latin typeface="Pretendard" pitchFamily="34" charset="0"/>
+                          <a:ea typeface="Pretendard" pitchFamily="34" charset="-122"/>
+                          <a:cs typeface="Pretendard" pitchFamily="34" charset="-120"/>
+                        </a:rPr>
+                        <a:t>전 </a:t>
+                      </a:r>
+                      <a:pPr indent="0" marL="0">
+                        <a:buNone/>
+                      </a:pPr>
+                      <a:r>
+                        <a:rPr lang="en-US" sz="900" dirty="0">
+                          <a:solidFill>
+                            <a:srgbClr val="10161F"/>
+                          </a:solidFill>
+                          <a:latin typeface="Pretendard" pitchFamily="34" charset="0"/>
+                          <a:ea typeface="Pretendard" pitchFamily="34" charset="-122"/>
+                          <a:cs typeface="Pretendard" pitchFamily="34" charset="-120"/>
+                        </a:rPr>
+                        <a:t>층 </a:t>
+                      </a:r>
+                      <a:pPr indent="0" marL="0">
+                        <a:buNone/>
+                      </a:pPr>
+                      <a:r>
+                        <a:rPr lang="en-US" sz="900" dirty="0">
+                          <a:solidFill>
+                            <a:srgbClr val="10161F"/>
+                          </a:solidFill>
+                          <a:latin typeface="Pretendard" pitchFamily="34" charset="0"/>
+                          <a:ea typeface="Pretendard" pitchFamily="34" charset="-122"/>
+                          <a:cs typeface="Pretendard" pitchFamily="34" charset="-120"/>
+                        </a:rPr>
+                        <a:t>만실 </a:t>
+                      </a:r>
+                      <a:pPr indent="0" marL="0">
+                        <a:buNone/>
+                      </a:pPr>
+                      <a:r>
+                        <a:rPr lang="en-US" sz="900" dirty="0">
+                          <a:solidFill>
+                            <a:srgbClr val="10161F"/>
+                          </a:solidFill>
+                          <a:latin typeface="Pretendard" pitchFamily="34" charset="0"/>
+                          <a:ea typeface="Pretendard" pitchFamily="34" charset="-122"/>
+                          <a:cs typeface="Pretendard" pitchFamily="34" charset="-120"/>
+                        </a:rPr>
+                        <a:t>운영</a:t>
+                      </a:r>
+                      <a:endParaRPr lang="en-US" sz="900" dirty="0">
+                        <a:latin typeface="Pretendard" charset="0"/>
+                        <a:ea typeface="Pretendard" charset="0"/>
+                        <a:cs typeface="Pretendard" charset="0"/>
+                      </a:endParaRPr>
+                    </a:p>
+                  </a:txBody>
+                  <a:tcPr marL="50800" marR="50800" marT="25400" marB="25400" anchor="ctr">
+                    <a:lnL w="3810" cap="flat" cmpd="sng" algn="ctr">
+                      <a:solidFill>
+                        <a:srgbClr val="CBD5E0"/>
+                      </a:solidFill>
+                      <a:prstDash val="solid"/>
+                      <a:round/>
+                      <a:headEnd type="none" w="med" len="med"/>
+                      <a:tailEnd type="none" w="med" len="med"/>
+                    </a:lnL>
+                    <a:lnR w="3810" cap="flat" cmpd="sng" algn="ctr">
+                      <a:solidFill>
+                        <a:srgbClr val="CBD5E0"/>
+                      </a:solidFill>
+                      <a:prstDash val="solid"/>
+                      <a:round/>
+                      <a:headEnd type="none" w="med" len="med"/>
+                      <a:tailEnd type="none" w="med" len="med"/>
+                    </a:lnR>
+                    <a:lnT w="3810" cap="flat" cmpd="sng" algn="ctr">
+                      <a:solidFill>
+                        <a:srgbClr val="CBD5E0"/>
+                      </a:solidFill>
+                      <a:prstDash val="solid"/>
+                      <a:round/>
+                      <a:headEnd type="none" w="med" len="med"/>
+                      <a:tailEnd type="none" w="med" len="med"/>
+                    </a:lnT>
+                    <a:lnB w="3810" cap="flat" cmpd="sng" algn="ctr">
+                      <a:solidFill>
+                        <a:srgbClr val="CBD5E0"/>
+                      </a:solidFill>
+                      <a:prstDash val="solid"/>
+                      <a:round/>
+                      <a:headEnd type="none" w="med" len="med"/>
+                      <a:tailEnd type="none" w="med" len="med"/>
+                    </a:lnB>
+                    <a:solidFill>
+                      <a:srgbClr val="FFFFFF"/>
+                    </a:solidFill>
+                  </a:tcPr>
+                </a:tc>
+              </a:tr>
+              <a:tr h="347472">
+                <a:tc>
+                  <a:txBody>
+                    <a:bodyPr/>
+                    <a:lstStyle/>
+                    <a:p>
+                      <a:pPr indent="0" marL="0">
+                        <a:buNone/>
+                      </a:pPr>
+                      <a:r>
+                        <a:rPr lang="en-US" sz="900" b="1" dirty="0">
+                          <a:solidFill>
+                            <a:srgbClr val="10161F"/>
+                          </a:solidFill>
+                          <a:latin typeface="Pretendard" pitchFamily="34" charset="0"/>
+                          <a:ea typeface="Pretendard" pitchFamily="34" charset="-122"/>
+                          <a:cs typeface="Pretendard" pitchFamily="34" charset="-120"/>
+                        </a:rPr>
+                        <a:t>월 </a:t>
+                      </a:r>
+                      <a:pPr indent="0" marL="0">
+                        <a:buNone/>
+                      </a:pPr>
+                      <a:r>
+                        <a:rPr lang="en-US" sz="900" b="1" dirty="0">
+                          <a:solidFill>
+                            <a:srgbClr val="10161F"/>
+                          </a:solidFill>
+                          <a:latin typeface="Pretendard" pitchFamily="34" charset="0"/>
+                          <a:ea typeface="Pretendard" pitchFamily="34" charset="-122"/>
+                          <a:cs typeface="Pretendard" pitchFamily="34" charset="-120"/>
+                        </a:rPr>
+                        <a:t>임대료 </a:t>
+                      </a:r>
+                      <a:pPr indent="0" marL="0">
+                        <a:buNone/>
+                      </a:pPr>
+                      <a:r>
+                        <a:rPr lang="en-US" sz="900" b="1" dirty="0">
+                          <a:solidFill>
+                            <a:srgbClr val="10161F"/>
+                          </a:solidFill>
+                          <a:latin typeface="Pretendard" pitchFamily="34" charset="0"/>
+                          <a:ea typeface="Pretendard" pitchFamily="34" charset="-122"/>
+                          <a:cs typeface="Pretendard" pitchFamily="34" charset="-120"/>
+                        </a:rPr>
+                        <a:t>합계</a:t>
+                      </a:r>
+                      <a:endParaRPr lang="en-US" sz="900" dirty="0">
+                        <a:latin typeface="Pretendard" charset="0"/>
+                        <a:ea typeface="Pretendard" charset="0"/>
+                        <a:cs typeface="Pretendard" charset="0"/>
+                      </a:endParaRPr>
+                    </a:p>
+                  </a:txBody>
+                  <a:tcPr marL="50800" marR="50800" marT="25400" marB="25400" anchor="ctr">
+                    <a:lnL w="3810" cap="flat" cmpd="sng" algn="ctr">
+                      <a:solidFill>
+                        <a:srgbClr val="CBD5E0"/>
+                      </a:solidFill>
+                      <a:prstDash val="solid"/>
+                      <a:round/>
+                      <a:headEnd type="none" w="med" len="med"/>
+                      <a:tailEnd type="none" w="med" len="med"/>
+                    </a:lnL>
+                    <a:lnR w="3810" cap="flat" cmpd="sng" algn="ctr">
+                      <a:solidFill>
+                        <a:srgbClr val="CBD5E0"/>
+                      </a:solidFill>
+                      <a:prstDash val="solid"/>
+                      <a:round/>
+                      <a:headEnd type="none" w="med" len="med"/>
+                      <a:tailEnd type="none" w="med" len="med"/>
+                    </a:lnR>
+                    <a:lnT w="3810" cap="flat" cmpd="sng" algn="ctr">
+                      <a:solidFill>
+                        <a:srgbClr val="CBD5E0"/>
+                      </a:solidFill>
+                      <a:prstDash val="solid"/>
+                      <a:round/>
+                      <a:headEnd type="none" w="med" len="med"/>
+                      <a:tailEnd type="none" w="med" len="med"/>
+                    </a:lnT>
+                    <a:lnB w="3810" cap="flat" cmpd="sng" algn="ctr">
+                      <a:solidFill>
+                        <a:srgbClr val="CBD5E0"/>
+                      </a:solidFill>
+                      <a:prstDash val="solid"/>
+                      <a:round/>
+                      <a:headEnd type="none" w="med" len="med"/>
+                      <a:tailEnd type="none" w="med" len="med"/>
+                    </a:lnB>
+                    <a:solidFill>
+                      <a:srgbClr val="F7FAFC"/>
+                    </a:solidFill>
+                  </a:tcPr>
+                </a:tc>
+                <a:tc>
+                  <a:txBody>
+                    <a:bodyPr/>
+                    <a:lstStyle/>
+                    <a:p>
+                      <a:pPr indent="0" marL="0">
+                        <a:buNone/>
+                      </a:pPr>
+                      <a:r>
+                        <a:rPr lang="en-US" sz="900" dirty="0">
+                          <a:solidFill>
+                            <a:srgbClr val="10161F"/>
+                          </a:solidFill>
+                          <a:latin typeface="Pretendard" pitchFamily="34" charset="0"/>
+                          <a:ea typeface="Pretendard" pitchFamily="34" charset="-122"/>
+                          <a:cs typeface="Pretendard" pitchFamily="34" charset="-120"/>
+                        </a:rPr>
+                        <a:t>5,950만 </a:t>
+                      </a:r>
+                      <a:pPr indent="0" marL="0">
+                        <a:buNone/>
+                      </a:pPr>
+                      <a:r>
+                        <a:rPr lang="en-US" sz="900" dirty="0">
+                          <a:solidFill>
+                            <a:srgbClr val="10161F"/>
+                          </a:solidFill>
+                          <a:latin typeface="Pretendard" pitchFamily="34" charset="0"/>
+                          <a:ea typeface="Pretendard" pitchFamily="34" charset="-122"/>
+                          <a:cs typeface="Pretendard" pitchFamily="34" charset="-120"/>
+                        </a:rPr>
+                        <a:t>원/월</a:t>
+                      </a:r>
+                      <a:endParaRPr lang="en-US" sz="900" dirty="0">
+                        <a:latin typeface="Pretendard" charset="0"/>
+                        <a:ea typeface="Pretendard" charset="0"/>
+                        <a:cs typeface="Pretendard" charset="0"/>
+                      </a:endParaRPr>
+                    </a:p>
+                  </a:txBody>
+                  <a:tcPr marL="50800" marR="50800" marT="25400" marB="25400" anchor="ctr">
+                    <a:lnL w="3810" cap="flat" cmpd="sng" algn="ctr">
+                      <a:solidFill>
+                        <a:srgbClr val="CBD5E0"/>
+                      </a:solidFill>
+                      <a:prstDash val="solid"/>
+                      <a:round/>
+                      <a:headEnd type="none" w="med" len="med"/>
+                      <a:tailEnd type="none" w="med" len="med"/>
+                    </a:lnL>
+                    <a:lnR w="3810" cap="flat" cmpd="sng" algn="ctr">
+                      <a:solidFill>
+                        <a:srgbClr val="CBD5E0"/>
+                      </a:solidFill>
+                      <a:prstDash val="solid"/>
+                      <a:round/>
+                      <a:headEnd type="none" w="med" len="med"/>
+                      <a:tailEnd type="none" w="med" len="med"/>
+                    </a:lnR>
+                    <a:lnT w="3810" cap="flat" cmpd="sng" algn="ctr">
+                      <a:solidFill>
+                        <a:srgbClr val="CBD5E0"/>
+                      </a:solidFill>
+                      <a:prstDash val="solid"/>
+                      <a:round/>
+                      <a:headEnd type="none" w="med" len="med"/>
+                      <a:tailEnd type="none" w="med" len="med"/>
+                    </a:lnT>
+                    <a:lnB w="3810" cap="flat" cmpd="sng" algn="ctr">
+                      <a:solidFill>
+                        <a:srgbClr val="CBD5E0"/>
+                      </a:solidFill>
+                      <a:prstDash val="solid"/>
+                      <a:round/>
+                      <a:headEnd type="none" w="med" len="med"/>
+                      <a:tailEnd type="none" w="med" len="med"/>
+                    </a:lnB>
+                    <a:solidFill>
+                      <a:srgbClr val="F7FAFC"/>
+                    </a:solidFill>
+                  </a:tcPr>
+                </a:tc>
+                <a:tc>
+                  <a:txBody>
+                    <a:bodyPr/>
+                    <a:lstStyle/>
+                    <a:p>
+                      <a:pPr indent="0" marL="0">
+                        <a:buNone/>
+                      </a:pPr>
+                      <a:r>
+                        <a:rPr lang="en-US" sz="900" dirty="0">
+                          <a:solidFill>
+                            <a:srgbClr val="10161F"/>
+                          </a:solidFill>
+                          <a:latin typeface="Pretendard" pitchFamily="34" charset="0"/>
+                          <a:ea typeface="Pretendard" pitchFamily="34" charset="-122"/>
+                          <a:cs typeface="Pretendard" pitchFamily="34" charset="-120"/>
+                        </a:rPr>
+                        <a:t>관리비 </a:t>
+                      </a:r>
+                      <a:pPr indent="0" marL="0">
+                        <a:buNone/>
+                      </a:pPr>
+                      <a:r>
+                        <a:rPr lang="en-US" sz="900" dirty="0">
+                          <a:solidFill>
+                            <a:srgbClr val="10161F"/>
+                          </a:solidFill>
+                          <a:latin typeface="Pretendard" pitchFamily="34" charset="0"/>
+                          <a:ea typeface="Pretendard" pitchFamily="34" charset="-122"/>
+                          <a:cs typeface="Pretendard" pitchFamily="34" charset="-120"/>
+                        </a:rPr>
+                        <a:t>별도 </a:t>
+                      </a:r>
+                      <a:pPr indent="0" marL="0">
+                        <a:buNone/>
+                      </a:pPr>
+                      <a:r>
+                        <a:rPr lang="en-US" sz="900" dirty="0">
+                          <a:solidFill>
+                            <a:srgbClr val="10161F"/>
+                          </a:solidFill>
+                          <a:latin typeface="Pretendard" pitchFamily="34" charset="0"/>
+                          <a:ea typeface="Pretendard" pitchFamily="34" charset="-122"/>
+                          <a:cs typeface="Pretendard" pitchFamily="34" charset="-120"/>
+                        </a:rPr>
+                        <a:t>(0만 </a:t>
+                      </a:r>
+                      <a:pPr indent="0" marL="0">
+                        <a:buNone/>
+                      </a:pPr>
+                      <a:r>
+                        <a:rPr lang="en-US" sz="900" dirty="0">
+                          <a:solidFill>
+                            <a:srgbClr val="10161F"/>
+                          </a:solidFill>
+                          <a:latin typeface="Pretendard" pitchFamily="34" charset="0"/>
+                          <a:ea typeface="Pretendard" pitchFamily="34" charset="-122"/>
+                          <a:cs typeface="Pretendard" pitchFamily="34" charset="-120"/>
+                        </a:rPr>
+                        <a:t>원)</a:t>
+                      </a:r>
+                      <a:endParaRPr lang="en-US" sz="900" dirty="0">
+                        <a:latin typeface="Pretendard" charset="0"/>
+                        <a:ea typeface="Pretendard" charset="0"/>
+                        <a:cs typeface="Pretendard" charset="0"/>
+                      </a:endParaRPr>
+                    </a:p>
+                  </a:txBody>
+                  <a:tcPr marL="50800" marR="50800" marT="25400" marB="25400" anchor="ctr">
+                    <a:lnL w="3810" cap="flat" cmpd="sng" algn="ctr">
+                      <a:solidFill>
+                        <a:srgbClr val="CBD5E0"/>
+                      </a:solidFill>
+                      <a:prstDash val="solid"/>
+                      <a:round/>
+                      <a:headEnd type="none" w="med" len="med"/>
+                      <a:tailEnd type="none" w="med" len="med"/>
+                    </a:lnL>
+                    <a:lnR w="3810" cap="flat" cmpd="sng" algn="ctr">
+                      <a:solidFill>
+                        <a:srgbClr val="CBD5E0"/>
+                      </a:solidFill>
+                      <a:prstDash val="solid"/>
+                      <a:round/>
+                      <a:headEnd type="none" w="med" len="med"/>
+                      <a:tailEnd type="none" w="med" len="med"/>
+                    </a:lnR>
+                    <a:lnT w="3810" cap="flat" cmpd="sng" algn="ctr">
+                      <a:solidFill>
+                        <a:srgbClr val="CBD5E0"/>
+                      </a:solidFill>
+                      <a:prstDash val="solid"/>
+                      <a:round/>
+                      <a:headEnd type="none" w="med" len="med"/>
+                      <a:tailEnd type="none" w="med" len="med"/>
+                    </a:lnT>
+                    <a:lnB w="3810" cap="flat" cmpd="sng" algn="ctr">
+                      <a:solidFill>
+                        <a:srgbClr val="CBD5E0"/>
+                      </a:solidFill>
+                      <a:prstDash val="solid"/>
+                      <a:round/>
+                      <a:headEnd type="none" w="med" len="med"/>
+                      <a:tailEnd type="none" w="med" len="med"/>
+                    </a:lnB>
+                    <a:solidFill>
+                      <a:srgbClr val="F7FAFC"/>
+                    </a:solidFill>
+                  </a:tcPr>
+                </a:tc>
+              </a:tr>
+              <a:tr h="347472">
+                <a:tc>
+                  <a:txBody>
+                    <a:bodyPr/>
+                    <a:lstStyle/>
+                    <a:p>
+                      <a:pPr indent="0" marL="0">
+                        <a:buNone/>
+                      </a:pPr>
+                      <a:r>
+                        <a:rPr lang="en-US" sz="900" b="1" dirty="0">
+                          <a:solidFill>
+                            <a:srgbClr val="10161F"/>
+                          </a:solidFill>
+                          <a:latin typeface="Pretendard" pitchFamily="34" charset="0"/>
+                          <a:ea typeface="Pretendard" pitchFamily="34" charset="-122"/>
+                          <a:cs typeface="Pretendard" pitchFamily="34" charset="-120"/>
+                        </a:rPr>
+                        <a:t>연 </a:t>
+                      </a:r>
+                      <a:pPr indent="0" marL="0">
+                        <a:buNone/>
+                      </a:pPr>
+                      <a:r>
+                        <a:rPr lang="en-US" sz="900" b="1" dirty="0">
+                          <a:solidFill>
+                            <a:srgbClr val="10161F"/>
+                          </a:solidFill>
+                          <a:latin typeface="Pretendard" pitchFamily="34" charset="0"/>
+                          <a:ea typeface="Pretendard" pitchFamily="34" charset="-122"/>
+                          <a:cs typeface="Pretendard" pitchFamily="34" charset="-120"/>
+                        </a:rPr>
+                        <a:t>임대 </a:t>
+                      </a:r>
+                      <a:pPr indent="0" marL="0">
+                        <a:buNone/>
+                      </a:pPr>
+                      <a:r>
+                        <a:rPr lang="en-US" sz="900" b="1" dirty="0">
+                          <a:solidFill>
+                            <a:srgbClr val="10161F"/>
+                          </a:solidFill>
+                          <a:latin typeface="Pretendard" pitchFamily="34" charset="0"/>
+                          <a:ea typeface="Pretendard" pitchFamily="34" charset="-122"/>
+                          <a:cs typeface="Pretendard" pitchFamily="34" charset="-120"/>
+                        </a:rPr>
+                        <a:t>수입</a:t>
+                      </a:r>
+                      <a:endParaRPr lang="en-US" sz="900" dirty="0">
+                        <a:latin typeface="Pretendard" charset="0"/>
+                        <a:ea typeface="Pretendard" charset="0"/>
+                        <a:cs typeface="Pretendard" charset="0"/>
+                      </a:endParaRPr>
+                    </a:p>
+                  </a:txBody>
+                  <a:tcPr marL="50800" marR="50800" marT="25400" marB="25400" anchor="ctr">
+                    <a:lnL w="3810" cap="flat" cmpd="sng" algn="ctr">
+                      <a:solidFill>
+                        <a:srgbClr val="CBD5E0"/>
+                      </a:solidFill>
+                      <a:prstDash val="solid"/>
+                      <a:round/>
+                      <a:headEnd type="none" w="med" len="med"/>
+                      <a:tailEnd type="none" w="med" len="med"/>
+                    </a:lnL>
+                    <a:lnR w="3810" cap="flat" cmpd="sng" algn="ctr">
+                      <a:solidFill>
+                        <a:srgbClr val="CBD5E0"/>
+                      </a:solidFill>
+                      <a:prstDash val="solid"/>
+                      <a:round/>
+                      <a:headEnd type="none" w="med" len="med"/>
+                      <a:tailEnd type="none" w="med" len="med"/>
+                    </a:lnR>
+                    <a:lnT w="3810" cap="flat" cmpd="sng" algn="ctr">
+                      <a:solidFill>
+                        <a:srgbClr val="CBD5E0"/>
+                      </a:solidFill>
+                      <a:prstDash val="solid"/>
+                      <a:round/>
+                      <a:headEnd type="none" w="med" len="med"/>
+                      <a:tailEnd type="none" w="med" len="med"/>
+                    </a:lnT>
+                    <a:lnB w="3810" cap="flat" cmpd="sng" algn="ctr">
+                      <a:solidFill>
+                        <a:srgbClr val="CBD5E0"/>
+                      </a:solidFill>
+                      <a:prstDash val="solid"/>
+                      <a:round/>
+                      <a:headEnd type="none" w="med" len="med"/>
+                      <a:tailEnd type="none" w="med" len="med"/>
+                    </a:lnB>
+                    <a:solidFill>
+                      <a:srgbClr val="FFFFFF"/>
+                    </a:solidFill>
+                  </a:tcPr>
+                </a:tc>
+                <a:tc>
+                  <a:txBody>
+                    <a:bodyPr/>
+                    <a:lstStyle/>
+                    <a:p>
+                      <a:pPr indent="0" marL="0">
+                        <a:buNone/>
+                      </a:pPr>
+                      <a:r>
+                        <a:rPr lang="en-US" sz="900" dirty="0">
+                          <a:solidFill>
+                            <a:srgbClr val="10161F"/>
+                          </a:solidFill>
+                          <a:latin typeface="Pretendard" pitchFamily="34" charset="0"/>
+                          <a:ea typeface="Pretendard" pitchFamily="34" charset="-122"/>
+                          <a:cs typeface="Pretendard" pitchFamily="34" charset="-120"/>
+                        </a:rPr>
+                        <a:t>약 </a:t>
+                      </a:r>
+                      <a:pPr indent="0" marL="0">
+                        <a:buNone/>
+                      </a:pPr>
+                      <a:r>
+                        <a:rPr lang="en-US" sz="900" dirty="0">
+                          <a:solidFill>
+                            <a:srgbClr val="10161F"/>
+                          </a:solidFill>
+                          <a:latin typeface="Pretendard" pitchFamily="34" charset="0"/>
+                          <a:ea typeface="Pretendard" pitchFamily="34" charset="-122"/>
+                          <a:cs typeface="Pretendard" pitchFamily="34" charset="-120"/>
+                        </a:rPr>
+                        <a:t>7.1억 </a:t>
+                      </a:r>
+                      <a:pPr indent="0" marL="0">
+                        <a:buNone/>
+                      </a:pPr>
+                      <a:r>
+                        <a:rPr lang="en-US" sz="900" dirty="0">
+                          <a:solidFill>
+                            <a:srgbClr val="10161F"/>
+                          </a:solidFill>
+                          <a:latin typeface="Pretendard" pitchFamily="34" charset="0"/>
+                          <a:ea typeface="Pretendard" pitchFamily="34" charset="-122"/>
+                          <a:cs typeface="Pretendard" pitchFamily="34" charset="-120"/>
+                        </a:rPr>
+                        <a:t>원/년</a:t>
+                      </a:r>
+                      <a:endParaRPr lang="en-US" sz="900" dirty="0">
+                        <a:latin typeface="Pretendard" charset="0"/>
+                        <a:ea typeface="Pretendard" charset="0"/>
+                        <a:cs typeface="Pretendard" charset="0"/>
+                      </a:endParaRPr>
+                    </a:p>
+                  </a:txBody>
+                  <a:tcPr marL="50800" marR="50800" marT="25400" marB="25400" anchor="ctr">
+                    <a:lnL w="3810" cap="flat" cmpd="sng" algn="ctr">
+                      <a:solidFill>
+                        <a:srgbClr val="CBD5E0"/>
+                      </a:solidFill>
+                      <a:prstDash val="solid"/>
+                      <a:round/>
+                      <a:headEnd type="none" w="med" len="med"/>
+                      <a:tailEnd type="none" w="med" len="med"/>
+                    </a:lnL>
+                    <a:lnR w="3810" cap="flat" cmpd="sng" algn="ctr">
+                      <a:solidFill>
+                        <a:srgbClr val="CBD5E0"/>
+                      </a:solidFill>
+                      <a:prstDash val="solid"/>
+                      <a:round/>
+                      <a:headEnd type="none" w="med" len="med"/>
+                      <a:tailEnd type="none" w="med" len="med"/>
+                    </a:lnR>
+                    <a:lnT w="3810" cap="flat" cmpd="sng" algn="ctr">
+                      <a:solidFill>
+                        <a:srgbClr val="CBD5E0"/>
+                      </a:solidFill>
+                      <a:prstDash val="solid"/>
+                      <a:round/>
+                      <a:headEnd type="none" w="med" len="med"/>
+                      <a:tailEnd type="none" w="med" len="med"/>
+                    </a:lnT>
+                    <a:lnB w="3810" cap="flat" cmpd="sng" algn="ctr">
+                      <a:solidFill>
+                        <a:srgbClr val="CBD5E0"/>
+                      </a:solidFill>
+                      <a:prstDash val="solid"/>
+                      <a:round/>
+                      <a:headEnd type="none" w="med" len="med"/>
+                      <a:tailEnd type="none" w="med" len="med"/>
+                    </a:lnB>
+                    <a:solidFill>
+                      <a:srgbClr val="FFFFFF"/>
+                    </a:solidFill>
+                  </a:tcPr>
+                </a:tc>
+                <a:tc>
+                  <a:txBody>
+                    <a:bodyPr/>
+                    <a:lstStyle/>
+                    <a:p>
+                      <a:pPr indent="0" marL="0">
+                        <a:buNone/>
+                      </a:pPr>
+                      <a:r>
+                        <a:rPr lang="en-US" sz="900" dirty="0">
+                          <a:solidFill>
+                            <a:srgbClr val="10161F"/>
+                          </a:solidFill>
+                          <a:latin typeface="Pretendard" pitchFamily="34" charset="0"/>
+                          <a:ea typeface="Pretendard" pitchFamily="34" charset="-122"/>
+                          <a:cs typeface="Pretendard" pitchFamily="34" charset="-120"/>
+                        </a:rPr>
+                        <a:t>연간 </a:t>
+                      </a:r>
+                      <a:pPr indent="0" marL="0">
+                        <a:buNone/>
+                      </a:pPr>
+                      <a:r>
+                        <a:rPr lang="en-US" sz="900" dirty="0">
+                          <a:solidFill>
+                            <a:srgbClr val="10161F"/>
+                          </a:solidFill>
+                          <a:latin typeface="Pretendard" pitchFamily="34" charset="0"/>
+                          <a:ea typeface="Pretendard" pitchFamily="34" charset="-122"/>
+                          <a:cs typeface="Pretendard" pitchFamily="34" charset="-120"/>
+                        </a:rPr>
+                        <a:t>총 </a:t>
+                      </a:r>
+                      <a:pPr indent="0" marL="0">
+                        <a:buNone/>
+                      </a:pPr>
+                      <a:r>
+                        <a:rPr lang="en-US" sz="900" dirty="0">
+                          <a:solidFill>
+                            <a:srgbClr val="10161F"/>
+                          </a:solidFill>
+                          <a:latin typeface="Pretendard" pitchFamily="34" charset="0"/>
+                          <a:ea typeface="Pretendard" pitchFamily="34" charset="-122"/>
+                          <a:cs typeface="Pretendard" pitchFamily="34" charset="-120"/>
+                        </a:rPr>
+                        <a:t>임대료 </a:t>
+                      </a:r>
+                      <a:pPr indent="0" marL="0">
+                        <a:buNone/>
+                      </a:pPr>
+                      <a:r>
+                        <a:rPr lang="en-US" sz="900" dirty="0">
+                          <a:solidFill>
+                            <a:srgbClr val="10161F"/>
+                          </a:solidFill>
+                          <a:latin typeface="Pretendard" pitchFamily="34" charset="0"/>
+                          <a:ea typeface="Pretendard" pitchFamily="34" charset="-122"/>
+                          <a:cs typeface="Pretendard" pitchFamily="34" charset="-120"/>
+                        </a:rPr>
+                        <a:t>수입</a:t>
+                      </a:r>
+                      <a:endParaRPr lang="en-US" sz="900" dirty="0">
+                        <a:latin typeface="Pretendard" charset="0"/>
+                        <a:ea typeface="Pretendard" charset="0"/>
+                        <a:cs typeface="Pretendard" charset="0"/>
+                      </a:endParaRPr>
+                    </a:p>
+                  </a:txBody>
+                  <a:tcPr marL="50800" marR="50800" marT="25400" marB="25400" anchor="ctr">
+                    <a:lnL w="3810" cap="flat" cmpd="sng" algn="ctr">
+                      <a:solidFill>
+                        <a:srgbClr val="CBD5E0"/>
+                      </a:solidFill>
+                      <a:prstDash val="solid"/>
+                      <a:round/>
+                      <a:headEnd type="none" w="med" len="med"/>
+                      <a:tailEnd type="none" w="med" len="med"/>
+                    </a:lnL>
+                    <a:lnR w="3810" cap="flat" cmpd="sng" algn="ctr">
+                      <a:solidFill>
+                        <a:srgbClr val="CBD5E0"/>
+                      </a:solidFill>
+                      <a:prstDash val="solid"/>
+                      <a:round/>
+                      <a:headEnd type="none" w="med" len="med"/>
+                      <a:tailEnd type="none" w="med" len="med"/>
+                    </a:lnR>
+                    <a:lnT w="3810" cap="flat" cmpd="sng" algn="ctr">
+                      <a:solidFill>
+                        <a:srgbClr val="CBD5E0"/>
+                      </a:solidFill>
+                      <a:prstDash val="solid"/>
+                      <a:round/>
+                      <a:headEnd type="none" w="med" len="med"/>
+                      <a:tailEnd type="none" w="med" len="med"/>
+                    </a:lnT>
+                    <a:lnB w="3810" cap="flat" cmpd="sng" algn="ctr">
+                      <a:solidFill>
+                        <a:srgbClr val="CBD5E0"/>
+                      </a:solidFill>
+                      <a:prstDash val="solid"/>
+                      <a:round/>
+                      <a:headEnd type="none" w="med" len="med"/>
+                      <a:tailEnd type="none" w="med" len="med"/>
+                    </a:lnB>
+                    <a:solidFill>
+                      <a:srgbClr val="FFFFFF"/>
+                    </a:solidFill>
+                  </a:tcPr>
+                </a:tc>
+              </a:tr>
+              <a:tr h="347472">
+                <a:tc>
+                  <a:txBody>
+                    <a:bodyPr/>
+                    <a:lstStyle/>
+                    <a:p>
+                      <a:pPr indent="0" marL="0">
+                        <a:buNone/>
+                      </a:pPr>
+                      <a:r>
+                        <a:rPr lang="en-US" sz="900" b="1" dirty="0">
+                          <a:solidFill>
+                            <a:srgbClr val="10161F"/>
+                          </a:solidFill>
+                          <a:latin typeface="Pretendard" pitchFamily="34" charset="0"/>
+                          <a:ea typeface="Pretendard" pitchFamily="34" charset="-122"/>
+                          <a:cs typeface="Pretendard" pitchFamily="34" charset="-120"/>
+                        </a:rPr>
+                        <a:t>보증금 </a:t>
+                      </a:r>
+                      <a:pPr indent="0" marL="0">
+                        <a:buNone/>
+                      </a:pPr>
+                      <a:r>
+                        <a:rPr lang="en-US" sz="900" b="1" dirty="0">
+                          <a:solidFill>
+                            <a:srgbClr val="10161F"/>
+                          </a:solidFill>
+                          <a:latin typeface="Pretendard" pitchFamily="34" charset="0"/>
+                          <a:ea typeface="Pretendard" pitchFamily="34" charset="-122"/>
+                          <a:cs typeface="Pretendard" pitchFamily="34" charset="-120"/>
+                        </a:rPr>
+                        <a:t>총액</a:t>
+                      </a:r>
+                      <a:endParaRPr lang="en-US" sz="900" dirty="0">
+                        <a:latin typeface="Pretendard" charset="0"/>
+                        <a:ea typeface="Pretendard" charset="0"/>
+                        <a:cs typeface="Pretendard" charset="0"/>
+                      </a:endParaRPr>
+                    </a:p>
+                  </a:txBody>
+                  <a:tcPr marL="50800" marR="50800" marT="25400" marB="25400" anchor="ctr">
+                    <a:lnL w="3810" cap="flat" cmpd="sng" algn="ctr">
+                      <a:solidFill>
+                        <a:srgbClr val="CBD5E0"/>
+                      </a:solidFill>
+                      <a:prstDash val="solid"/>
+                      <a:round/>
+                      <a:headEnd type="none" w="med" len="med"/>
+                      <a:tailEnd type="none" w="med" len="med"/>
+                    </a:lnL>
+                    <a:lnR w="3810" cap="flat" cmpd="sng" algn="ctr">
+                      <a:solidFill>
+                        <a:srgbClr val="CBD5E0"/>
+                      </a:solidFill>
+                      <a:prstDash val="solid"/>
+                      <a:round/>
+                      <a:headEnd type="none" w="med" len="med"/>
+                      <a:tailEnd type="none" w="med" len="med"/>
+                    </a:lnR>
+                    <a:lnT w="3810" cap="flat" cmpd="sng" algn="ctr">
+                      <a:solidFill>
+                        <a:srgbClr val="CBD5E0"/>
+                      </a:solidFill>
+                      <a:prstDash val="solid"/>
+                      <a:round/>
+                      <a:headEnd type="none" w="med" len="med"/>
+                      <a:tailEnd type="none" w="med" len="med"/>
+                    </a:lnT>
+                    <a:lnB w="3810" cap="flat" cmpd="sng" algn="ctr">
+                      <a:solidFill>
+                        <a:srgbClr val="CBD5E0"/>
+                      </a:solidFill>
+                      <a:prstDash val="solid"/>
+                      <a:round/>
+                      <a:headEnd type="none" w="med" len="med"/>
+                      <a:tailEnd type="none" w="med" len="med"/>
+                    </a:lnB>
+                    <a:solidFill>
+                      <a:srgbClr val="F7FAFC"/>
+                    </a:solidFill>
+                  </a:tcPr>
+                </a:tc>
+                <a:tc>
+                  <a:txBody>
+                    <a:bodyPr/>
+                    <a:lstStyle/>
+                    <a:p>
+                      <a:pPr indent="0" marL="0">
+                        <a:buNone/>
+                      </a:pPr>
+                      <a:r>
+                        <a:rPr lang="en-US" sz="900" dirty="0">
+                          <a:solidFill>
+                            <a:srgbClr val="10161F"/>
+                          </a:solidFill>
+                          <a:latin typeface="Pretendard" pitchFamily="34" charset="0"/>
+                          <a:ea typeface="Pretendard" pitchFamily="34" charset="-122"/>
+                          <a:cs typeface="Pretendard" pitchFamily="34" charset="-120"/>
+                        </a:rPr>
+                        <a:t>약 </a:t>
+                      </a:r>
+                      <a:pPr indent="0" marL="0">
+                        <a:buNone/>
+                      </a:pPr>
+                      <a:r>
+                        <a:rPr lang="en-US" sz="900" dirty="0">
+                          <a:solidFill>
+                            <a:srgbClr val="10161F"/>
+                          </a:solidFill>
+                          <a:latin typeface="Pretendard" pitchFamily="34" charset="0"/>
+                          <a:ea typeface="Pretendard" pitchFamily="34" charset="-122"/>
+                          <a:cs typeface="Pretendard" pitchFamily="34" charset="-120"/>
+                        </a:rPr>
+                        <a:t>11.5억 </a:t>
+                      </a:r>
+                      <a:pPr indent="0" marL="0">
+                        <a:buNone/>
+                      </a:pPr>
+                      <a:r>
+                        <a:rPr lang="en-US" sz="900" dirty="0">
+                          <a:solidFill>
+                            <a:srgbClr val="10161F"/>
+                          </a:solidFill>
+                          <a:latin typeface="Pretendard" pitchFamily="34" charset="0"/>
+                          <a:ea typeface="Pretendard" pitchFamily="34" charset="-122"/>
+                          <a:cs typeface="Pretendard" pitchFamily="34" charset="-120"/>
+                        </a:rPr>
+                        <a:t>원</a:t>
+                      </a:r>
+                      <a:endParaRPr lang="en-US" sz="900" dirty="0">
+                        <a:latin typeface="Pretendard" charset="0"/>
+                        <a:ea typeface="Pretendard" charset="0"/>
+                        <a:cs typeface="Pretendard" charset="0"/>
+                      </a:endParaRPr>
+                    </a:p>
+                  </a:txBody>
+                  <a:tcPr marL="50800" marR="50800" marT="25400" marB="25400" anchor="ctr">
+                    <a:lnL w="3810" cap="flat" cmpd="sng" algn="ctr">
+                      <a:solidFill>
+                        <a:srgbClr val="CBD5E0"/>
+                      </a:solidFill>
+                      <a:prstDash val="solid"/>
+                      <a:round/>
+                      <a:headEnd type="none" w="med" len="med"/>
+                      <a:tailEnd type="none" w="med" len="med"/>
+                    </a:lnL>
+                    <a:lnR w="3810" cap="flat" cmpd="sng" algn="ctr">
+                      <a:solidFill>
+                        <a:srgbClr val="CBD5E0"/>
+                      </a:solidFill>
+                      <a:prstDash val="solid"/>
+                      <a:round/>
+                      <a:headEnd type="none" w="med" len="med"/>
+                      <a:tailEnd type="none" w="med" len="med"/>
+                    </a:lnR>
+                    <a:lnT w="3810" cap="flat" cmpd="sng" algn="ctr">
+                      <a:solidFill>
+                        <a:srgbClr val="CBD5E0"/>
+                      </a:solidFill>
+                      <a:prstDash val="solid"/>
+                      <a:round/>
+                      <a:headEnd type="none" w="med" len="med"/>
+                      <a:tailEnd type="none" w="med" len="med"/>
+                    </a:lnT>
+                    <a:lnB w="3810" cap="flat" cmpd="sng" algn="ctr">
+                      <a:solidFill>
+                        <a:srgbClr val="CBD5E0"/>
+                      </a:solidFill>
+                      <a:prstDash val="solid"/>
+                      <a:round/>
+                      <a:headEnd type="none" w="med" len="med"/>
+                      <a:tailEnd type="none" w="med" len="med"/>
+                    </a:lnB>
+                    <a:solidFill>
+                      <a:srgbClr val="F7FAFC"/>
+                    </a:solidFill>
+                  </a:tcPr>
+                </a:tc>
+                <a:tc>
+                  <a:txBody>
+                    <a:bodyPr/>
+                    <a:lstStyle/>
+                    <a:p>
+                      <a:pPr indent="0" marL="0">
+                        <a:buNone/>
+                      </a:pPr>
+                      <a:r>
+                        <a:rPr lang="en-US" sz="900" dirty="0">
+                          <a:solidFill>
+                            <a:srgbClr val="10161F"/>
+                          </a:solidFill>
+                          <a:latin typeface="Pretendard" pitchFamily="34" charset="0"/>
+                          <a:ea typeface="Pretendard" pitchFamily="34" charset="-122"/>
+                          <a:cs typeface="Pretendard" pitchFamily="34" charset="-120"/>
+                        </a:rPr>
+                        <a:t>임차인 </a:t>
+                      </a:r>
+                      <a:pPr indent="0" marL="0">
+                        <a:buNone/>
+                      </a:pPr>
+                      <a:r>
+                        <a:rPr lang="en-US" sz="900" dirty="0">
+                          <a:solidFill>
+                            <a:srgbClr val="10161F"/>
+                          </a:solidFill>
+                          <a:latin typeface="Pretendard" pitchFamily="34" charset="0"/>
+                          <a:ea typeface="Pretendard" pitchFamily="34" charset="-122"/>
+                          <a:cs typeface="Pretendard" pitchFamily="34" charset="-120"/>
+                        </a:rPr>
+                        <a:t>보증금 </a:t>
+                      </a:r>
+                      <a:pPr indent="0" marL="0">
+                        <a:buNone/>
+                      </a:pPr>
+                      <a:r>
+                        <a:rPr lang="en-US" sz="900" dirty="0">
+                          <a:solidFill>
+                            <a:srgbClr val="10161F"/>
+                          </a:solidFill>
+                          <a:latin typeface="Pretendard" pitchFamily="34" charset="0"/>
+                          <a:ea typeface="Pretendard" pitchFamily="34" charset="-122"/>
+                          <a:cs typeface="Pretendard" pitchFamily="34" charset="-120"/>
+                        </a:rPr>
+                        <a:t>합계</a:t>
+                      </a:r>
+                      <a:endParaRPr lang="en-US" sz="900" dirty="0">
+                        <a:latin typeface="Pretendard" charset="0"/>
+                        <a:ea typeface="Pretendard" charset="0"/>
+                        <a:cs typeface="Pretendard" charset="0"/>
+                      </a:endParaRPr>
+                    </a:p>
+                  </a:txBody>
+                  <a:tcPr marL="50800" marR="50800" marT="25400" marB="25400" anchor="ctr">
+                    <a:lnL w="3810" cap="flat" cmpd="sng" algn="ctr">
+                      <a:solidFill>
+                        <a:srgbClr val="CBD5E0"/>
+                      </a:solidFill>
+                      <a:prstDash val="solid"/>
+                      <a:round/>
+                      <a:headEnd type="none" w="med" len="med"/>
+                      <a:tailEnd type="none" w="med" len="med"/>
+                    </a:lnL>
+                    <a:lnR w="3810" cap="flat" cmpd="sng" algn="ctr">
+                      <a:solidFill>
+                        <a:srgbClr val="CBD5E0"/>
+                      </a:solidFill>
+                      <a:prstDash val="solid"/>
+                      <a:round/>
+                      <a:headEnd type="none" w="med" len="med"/>
+                      <a:tailEnd type="none" w="med" len="med"/>
+                    </a:lnR>
+                    <a:lnT w="3810" cap="flat" cmpd="sng" algn="ctr">
+                      <a:solidFill>
+                        <a:srgbClr val="CBD5E0"/>
+                      </a:solidFill>
+                      <a:prstDash val="solid"/>
+                      <a:round/>
+                      <a:headEnd type="none" w="med" len="med"/>
+                      <a:tailEnd type="none" w="med" len="med"/>
+                    </a:lnT>
+                    <a:lnB w="3810" cap="flat" cmpd="sng" algn="ctr">
+                      <a:solidFill>
+                        <a:srgbClr val="CBD5E0"/>
+                      </a:solidFill>
+                      <a:prstDash val="solid"/>
+                      <a:round/>
+                      <a:headEnd type="none" w="med" len="med"/>
+                      <a:tailEnd type="none" w="med" len="med"/>
+                    </a:lnB>
+                    <a:solidFill>
+                      <a:srgbClr val="F7FAFC"/>
                     </a:solidFill>
                   </a:tcPr>
                 </a:tc>
@@ -10161,52 +11736,13 @@
       </p:sp>
       <p:sp>
         <p:nvSpPr>
-          <p:cNvPr id="6" name="Text 4"/>
+          <p:cNvPr id="6" name="Shape 4"/>
           <p:cNvSpPr/>
           <p:nvPr/>
         </p:nvSpPr>
         <p:spPr>
           <a:xfrm>
             <a:off x="566928" y="1325880"/>
-            <a:ext cx="11057839" cy="237744"/>
-          </a:xfrm>
-          <a:prstGeom prst="rect">
-            <a:avLst/>
-          </a:prstGeom>
-          <a:noFill/>
-          <a:ln/>
-        </p:spPr>
-        <p:txBody>
-          <a:bodyPr wrap="square" lIns="0" tIns="0" rIns="0" bIns="0" rtlCol="0" anchor="ctr"/>
-          <a:lstStyle/>
-          <a:p>
-            <a:pPr indent="0" marL="0">
-              <a:buNone/>
-            </a:pPr>
-            <a:r>
-              <a:rPr lang="en-US" sz="1100" b="1" dirty="0">
-                <a:solidFill>
-                  <a:srgbClr val="10161F"/>
-                </a:solidFill>
-                <a:latin typeface="Pretendard" pitchFamily="34" charset="0"/>
-                <a:ea typeface="Pretendard" pitchFamily="34" charset="-122"/>
-                <a:cs typeface="Pretendard" pitchFamily="34" charset="-120"/>
-              </a:rPr>
-              <a:t>층별 임대 현황</a:t>
-            </a:r>
-            <a:endParaRPr lang="en-US" sz="1100" dirty="0"/>
-          </a:p>
-        </p:txBody>
-      </p:sp>
-      <p:sp>
-        <p:nvSpPr>
-          <p:cNvPr id="7" name="Shape 5"/>
-          <p:cNvSpPr/>
-          <p:nvPr/>
-        </p:nvSpPr>
-        <p:spPr>
-          <a:xfrm>
-            <a:off x="566928" y="1737360"/>
             <a:ext cx="11057839" cy="0"/>
           </a:xfrm>
           <a:prstGeom prst="line">
@@ -10223,13 +11759,13 @@
       </p:sp>
       <p:sp>
         <p:nvSpPr>
-          <p:cNvPr id="8" name="Shape 6"/>
-          <p:cNvSpPr/>
-          <p:nvPr/>
-        </p:nvSpPr>
-        <p:spPr>
-          <a:xfrm>
-            <a:off x="566928" y="1965960"/>
+          <p:cNvPr id="7" name="Shape 5"/>
+          <p:cNvSpPr/>
+          <p:nvPr/>
+        </p:nvSpPr>
+        <p:spPr>
+          <a:xfrm>
+            <a:off x="566928" y="1554480"/>
             <a:ext cx="3576218" cy="1188720"/>
           </a:xfrm>
           <a:prstGeom prst="roundRect">
@@ -10250,13 +11786,13 @@
       </p:sp>
       <p:sp>
         <p:nvSpPr>
-          <p:cNvPr id="9" name="Text 7"/>
-          <p:cNvSpPr/>
-          <p:nvPr/>
-        </p:nvSpPr>
-        <p:spPr>
-          <a:xfrm>
-            <a:off x="731520" y="2093976"/>
+          <p:cNvPr id="8" name="Text 6"/>
+          <p:cNvSpPr/>
+          <p:nvPr/>
+        </p:nvSpPr>
+        <p:spPr>
+          <a:xfrm>
+            <a:off x="731520" y="1682496"/>
             <a:ext cx="3247034" cy="201168"/>
           </a:xfrm>
           <a:prstGeom prst="rect">
@@ -10289,13 +11825,13 @@
       </p:sp>
       <p:sp>
         <p:nvSpPr>
-          <p:cNvPr id="10" name="Text 8"/>
-          <p:cNvSpPr/>
-          <p:nvPr/>
-        </p:nvSpPr>
-        <p:spPr>
-          <a:xfrm>
-            <a:off x="731520" y="2276856"/>
+          <p:cNvPr id="9" name="Text 7"/>
+          <p:cNvSpPr/>
+          <p:nvPr/>
+        </p:nvSpPr>
+        <p:spPr>
+          <a:xfrm>
+            <a:off x="731520" y="1865376"/>
             <a:ext cx="3247034" cy="402336"/>
           </a:xfrm>
           <a:prstGeom prst="rect">
@@ -10330,13 +11866,13 @@
       </p:sp>
       <p:sp>
         <p:nvSpPr>
-          <p:cNvPr id="11" name="Text 9"/>
-          <p:cNvSpPr/>
-          <p:nvPr/>
-        </p:nvSpPr>
-        <p:spPr>
-          <a:xfrm>
-            <a:off x="731520" y="2642616"/>
+          <p:cNvPr id="10" name="Text 8"/>
+          <p:cNvSpPr/>
+          <p:nvPr/>
+        </p:nvSpPr>
+        <p:spPr>
+          <a:xfrm>
+            <a:off x="731520" y="2231136"/>
             <a:ext cx="3247034" cy="164592"/>
           </a:xfrm>
           <a:prstGeom prst="rect">
@@ -10369,13 +11905,13 @@
       </p:sp>
       <p:sp>
         <p:nvSpPr>
-          <p:cNvPr id="12" name="Shape 10"/>
-          <p:cNvSpPr/>
-          <p:nvPr/>
-        </p:nvSpPr>
-        <p:spPr>
-          <a:xfrm>
-            <a:off x="4307738" y="1965960"/>
+          <p:cNvPr id="11" name="Shape 9"/>
+          <p:cNvSpPr/>
+          <p:nvPr/>
+        </p:nvSpPr>
+        <p:spPr>
+          <a:xfrm>
+            <a:off x="4307738" y="1554480"/>
             <a:ext cx="3576218" cy="1188720"/>
           </a:xfrm>
           <a:prstGeom prst="roundRect">
@@ -10396,13 +11932,13 @@
       </p:sp>
       <p:sp>
         <p:nvSpPr>
-          <p:cNvPr id="13" name="Text 11"/>
-          <p:cNvSpPr/>
-          <p:nvPr/>
-        </p:nvSpPr>
-        <p:spPr>
-          <a:xfrm>
-            <a:off x="4472330" y="2093976"/>
+          <p:cNvPr id="12" name="Text 10"/>
+          <p:cNvSpPr/>
+          <p:nvPr/>
+        </p:nvSpPr>
+        <p:spPr>
+          <a:xfrm>
+            <a:off x="4472330" y="1682496"/>
             <a:ext cx="3247034" cy="201168"/>
           </a:xfrm>
           <a:prstGeom prst="rect">
@@ -10435,13 +11971,13 @@
       </p:sp>
       <p:sp>
         <p:nvSpPr>
-          <p:cNvPr id="14" name="Text 12"/>
-          <p:cNvSpPr/>
-          <p:nvPr/>
-        </p:nvSpPr>
-        <p:spPr>
-          <a:xfrm>
-            <a:off x="4472330" y="2276856"/>
+          <p:cNvPr id="13" name="Text 11"/>
+          <p:cNvSpPr/>
+          <p:nvPr/>
+        </p:nvSpPr>
+        <p:spPr>
+          <a:xfrm>
+            <a:off x="4472330" y="1865376"/>
             <a:ext cx="3247034" cy="402336"/>
           </a:xfrm>
           <a:prstGeom prst="rect">
@@ -10476,13 +12012,13 @@
       </p:sp>
       <p:sp>
         <p:nvSpPr>
-          <p:cNvPr id="15" name="Text 13"/>
-          <p:cNvSpPr/>
-          <p:nvPr/>
-        </p:nvSpPr>
-        <p:spPr>
-          <a:xfrm>
-            <a:off x="4472330" y="2642616"/>
+          <p:cNvPr id="14" name="Text 12"/>
+          <p:cNvSpPr/>
+          <p:nvPr/>
+        </p:nvSpPr>
+        <p:spPr>
+          <a:xfrm>
+            <a:off x="4472330" y="2231136"/>
             <a:ext cx="3247034" cy="164592"/>
           </a:xfrm>
           <a:prstGeom prst="rect">
@@ -10515,13 +12051,13 @@
       </p:sp>
       <p:sp>
         <p:nvSpPr>
-          <p:cNvPr id="16" name="Shape 14"/>
-          <p:cNvSpPr/>
-          <p:nvPr/>
-        </p:nvSpPr>
-        <p:spPr>
-          <a:xfrm>
-            <a:off x="8048549" y="1965960"/>
+          <p:cNvPr id="15" name="Shape 13"/>
+          <p:cNvSpPr/>
+          <p:nvPr/>
+        </p:nvSpPr>
+        <p:spPr>
+          <a:xfrm>
+            <a:off x="8048549" y="1554480"/>
             <a:ext cx="3576218" cy="1188720"/>
           </a:xfrm>
           <a:prstGeom prst="roundRect">
@@ -10542,13 +12078,13 @@
       </p:sp>
       <p:sp>
         <p:nvSpPr>
-          <p:cNvPr id="17" name="Text 15"/>
-          <p:cNvSpPr/>
-          <p:nvPr/>
-        </p:nvSpPr>
-        <p:spPr>
-          <a:xfrm>
-            <a:off x="8213141" y="2093976"/>
+          <p:cNvPr id="16" name="Text 14"/>
+          <p:cNvSpPr/>
+          <p:nvPr/>
+        </p:nvSpPr>
+        <p:spPr>
+          <a:xfrm>
+            <a:off x="8213141" y="1682496"/>
             <a:ext cx="3247034" cy="201168"/>
           </a:xfrm>
           <a:prstGeom prst="rect">
@@ -10581,13 +12117,13 @@
       </p:sp>
       <p:sp>
         <p:nvSpPr>
-          <p:cNvPr id="18" name="Text 16"/>
-          <p:cNvSpPr/>
-          <p:nvPr/>
-        </p:nvSpPr>
-        <p:spPr>
-          <a:xfrm>
-            <a:off x="8213141" y="2276856"/>
+          <p:cNvPr id="17" name="Text 15"/>
+          <p:cNvSpPr/>
+          <p:nvPr/>
+        </p:nvSpPr>
+        <p:spPr>
+          <a:xfrm>
+            <a:off x="8213141" y="1865376"/>
             <a:ext cx="3247034" cy="402336"/>
           </a:xfrm>
           <a:prstGeom prst="rect">
@@ -10622,13 +12158,13 @@
       </p:sp>
       <p:sp>
         <p:nvSpPr>
-          <p:cNvPr id="19" name="Text 17"/>
-          <p:cNvSpPr/>
-          <p:nvPr/>
-        </p:nvSpPr>
-        <p:spPr>
-          <a:xfrm>
-            <a:off x="8213141" y="2642616"/>
+          <p:cNvPr id="18" name="Text 16"/>
+          <p:cNvSpPr/>
+          <p:nvPr/>
+        </p:nvSpPr>
+        <p:spPr>
+          <a:xfrm>
+            <a:off x="8213141" y="2231136"/>
             <a:ext cx="3247034" cy="164592"/>
           </a:xfrm>
           <a:prstGeom prst="rect">
@@ -10661,13 +12197,13 @@
       </p:sp>
       <p:sp>
         <p:nvSpPr>
-          <p:cNvPr id="20" name="Shape 18"/>
-          <p:cNvSpPr/>
-          <p:nvPr/>
-        </p:nvSpPr>
-        <p:spPr>
-          <a:xfrm>
-            <a:off x="566928" y="3319272"/>
+          <p:cNvPr id="19" name="Shape 17"/>
+          <p:cNvSpPr/>
+          <p:nvPr/>
+        </p:nvSpPr>
+        <p:spPr>
+          <a:xfrm>
+            <a:off x="566928" y="2907792"/>
             <a:ext cx="3576218" cy="1051560"/>
           </a:xfrm>
           <a:prstGeom prst="roundRect">
@@ -10688,13 +12224,13 @@
       </p:sp>
       <p:sp>
         <p:nvSpPr>
-          <p:cNvPr id="21" name="Text 19"/>
-          <p:cNvSpPr/>
-          <p:nvPr/>
-        </p:nvSpPr>
-        <p:spPr>
-          <a:xfrm>
-            <a:off x="731520" y="3447288"/>
+          <p:cNvPr id="20" name="Text 18"/>
+          <p:cNvSpPr/>
+          <p:nvPr/>
+        </p:nvSpPr>
+        <p:spPr>
+          <a:xfrm>
+            <a:off x="731520" y="3035808"/>
             <a:ext cx="3247034" cy="201168"/>
           </a:xfrm>
           <a:prstGeom prst="rect">
@@ -10727,13 +12263,13 @@
       </p:sp>
       <p:sp>
         <p:nvSpPr>
-          <p:cNvPr id="22" name="Text 20"/>
-          <p:cNvSpPr/>
-          <p:nvPr/>
-        </p:nvSpPr>
-        <p:spPr>
-          <a:xfrm>
-            <a:off x="731520" y="3630168"/>
+          <p:cNvPr id="21" name="Text 19"/>
+          <p:cNvSpPr/>
+          <p:nvPr/>
+        </p:nvSpPr>
+        <p:spPr>
+          <a:xfrm>
+            <a:off x="731520" y="3218688"/>
             <a:ext cx="3247034" cy="402336"/>
           </a:xfrm>
           <a:prstGeom prst="rect">
@@ -10768,13 +12304,13 @@
       </p:sp>
       <p:sp>
         <p:nvSpPr>
-          <p:cNvPr id="23" name="Text 21"/>
-          <p:cNvSpPr/>
-          <p:nvPr/>
-        </p:nvSpPr>
-        <p:spPr>
-          <a:xfrm>
-            <a:off x="731520" y="3995928"/>
+          <p:cNvPr id="22" name="Text 20"/>
+          <p:cNvSpPr/>
+          <p:nvPr/>
+        </p:nvSpPr>
+        <p:spPr>
+          <a:xfrm>
+            <a:off x="731520" y="3584448"/>
             <a:ext cx="3247034" cy="164592"/>
           </a:xfrm>
           <a:prstGeom prst="rect">
@@ -10807,13 +12343,13 @@
       </p:sp>
       <p:sp>
         <p:nvSpPr>
-          <p:cNvPr id="24" name="Shape 22"/>
-          <p:cNvSpPr/>
-          <p:nvPr/>
-        </p:nvSpPr>
-        <p:spPr>
-          <a:xfrm>
-            <a:off x="4307738" y="3319272"/>
+          <p:cNvPr id="23" name="Shape 21"/>
+          <p:cNvSpPr/>
+          <p:nvPr/>
+        </p:nvSpPr>
+        <p:spPr>
+          <a:xfrm>
+            <a:off x="4307738" y="2907792"/>
             <a:ext cx="3576218" cy="1051560"/>
           </a:xfrm>
           <a:prstGeom prst="roundRect">
@@ -10834,13 +12370,13 @@
       </p:sp>
       <p:sp>
         <p:nvSpPr>
-          <p:cNvPr id="25" name="Text 23"/>
-          <p:cNvSpPr/>
-          <p:nvPr/>
-        </p:nvSpPr>
-        <p:spPr>
-          <a:xfrm>
-            <a:off x="4472330" y="3447288"/>
+          <p:cNvPr id="24" name="Text 22"/>
+          <p:cNvSpPr/>
+          <p:nvPr/>
+        </p:nvSpPr>
+        <p:spPr>
+          <a:xfrm>
+            <a:off x="4472330" y="3035808"/>
             <a:ext cx="3247034" cy="201168"/>
           </a:xfrm>
           <a:prstGeom prst="rect">
@@ -10873,13 +12409,13 @@
       </p:sp>
       <p:sp>
         <p:nvSpPr>
-          <p:cNvPr id="26" name="Text 24"/>
-          <p:cNvSpPr/>
-          <p:nvPr/>
-        </p:nvSpPr>
-        <p:spPr>
-          <a:xfrm>
-            <a:off x="4472330" y="3630168"/>
+          <p:cNvPr id="25" name="Text 23"/>
+          <p:cNvSpPr/>
+          <p:nvPr/>
+        </p:nvSpPr>
+        <p:spPr>
+          <a:xfrm>
+            <a:off x="4472330" y="3218688"/>
             <a:ext cx="3247034" cy="402336"/>
           </a:xfrm>
           <a:prstGeom prst="rect">
@@ -10914,13 +12450,13 @@
       </p:sp>
       <p:sp>
         <p:nvSpPr>
-          <p:cNvPr id="27" name="Text 25"/>
-          <p:cNvSpPr/>
-          <p:nvPr/>
-        </p:nvSpPr>
-        <p:spPr>
-          <a:xfrm>
-            <a:off x="4472330" y="3995928"/>
+          <p:cNvPr id="26" name="Text 24"/>
+          <p:cNvSpPr/>
+          <p:nvPr/>
+        </p:nvSpPr>
+        <p:spPr>
+          <a:xfrm>
+            <a:off x="4472330" y="3584448"/>
             <a:ext cx="3247034" cy="164592"/>
           </a:xfrm>
           <a:prstGeom prst="rect">
@@ -10953,13 +12489,13 @@
       </p:sp>
       <p:sp>
         <p:nvSpPr>
-          <p:cNvPr id="28" name="Shape 26"/>
-          <p:cNvSpPr/>
-          <p:nvPr/>
-        </p:nvSpPr>
-        <p:spPr>
-          <a:xfrm>
-            <a:off x="8048549" y="3319272"/>
+          <p:cNvPr id="27" name="Shape 25"/>
+          <p:cNvSpPr/>
+          <p:nvPr/>
+        </p:nvSpPr>
+        <p:spPr>
+          <a:xfrm>
+            <a:off x="8048549" y="2907792"/>
             <a:ext cx="3576218" cy="1051560"/>
           </a:xfrm>
           <a:prstGeom prst="roundRect">
@@ -10980,13 +12516,13 @@
       </p:sp>
       <p:sp>
         <p:nvSpPr>
-          <p:cNvPr id="29" name="Text 27"/>
-          <p:cNvSpPr/>
-          <p:nvPr/>
-        </p:nvSpPr>
-        <p:spPr>
-          <a:xfrm>
-            <a:off x="8213141" y="3447288"/>
+          <p:cNvPr id="28" name="Text 26"/>
+          <p:cNvSpPr/>
+          <p:nvPr/>
+        </p:nvSpPr>
+        <p:spPr>
+          <a:xfrm>
+            <a:off x="8213141" y="3035808"/>
             <a:ext cx="3247034" cy="201168"/>
           </a:xfrm>
           <a:prstGeom prst="rect">
@@ -11019,13 +12555,13 @@
       </p:sp>
       <p:sp>
         <p:nvSpPr>
-          <p:cNvPr id="30" name="Text 28"/>
-          <p:cNvSpPr/>
-          <p:nvPr/>
-        </p:nvSpPr>
-        <p:spPr>
-          <a:xfrm>
-            <a:off x="8213141" y="3630168"/>
+          <p:cNvPr id="29" name="Text 27"/>
+          <p:cNvSpPr/>
+          <p:nvPr/>
+        </p:nvSpPr>
+        <p:spPr>
+          <a:xfrm>
+            <a:off x="8213141" y="3218688"/>
             <a:ext cx="3247034" cy="402336"/>
           </a:xfrm>
           <a:prstGeom prst="rect">
@@ -11060,13 +12596,13 @@
       </p:sp>
       <p:sp>
         <p:nvSpPr>
-          <p:cNvPr id="31" name="Text 29"/>
-          <p:cNvSpPr/>
-          <p:nvPr/>
-        </p:nvSpPr>
-        <p:spPr>
-          <a:xfrm>
-            <a:off x="8213141" y="3995928"/>
+          <p:cNvPr id="30" name="Text 28"/>
+          <p:cNvSpPr/>
+          <p:nvPr/>
+        </p:nvSpPr>
+        <p:spPr>
+          <a:xfrm>
+            <a:off x="8213141" y="3584448"/>
             <a:ext cx="3247034" cy="164592"/>
           </a:xfrm>
           <a:prstGeom prst="rect">
@@ -11099,13 +12635,13 @@
       </p:sp>
       <p:sp>
         <p:nvSpPr>
-          <p:cNvPr id="32" name="Shape 30"/>
-          <p:cNvSpPr/>
-          <p:nvPr/>
-        </p:nvSpPr>
-        <p:spPr>
-          <a:xfrm>
-            <a:off x="566928" y="4626864"/>
+          <p:cNvPr id="31" name="Shape 29"/>
+          <p:cNvSpPr/>
+          <p:nvPr/>
+        </p:nvSpPr>
+        <p:spPr>
+          <a:xfrm>
+            <a:off x="566928" y="4215384"/>
             <a:ext cx="11057839" cy="1280160"/>
           </a:xfrm>
           <a:prstGeom prst="roundRect">
@@ -11121,13 +12657,13 @@
       </p:sp>
       <p:sp>
         <p:nvSpPr>
-          <p:cNvPr id="33" name="Shape 31"/>
-          <p:cNvSpPr/>
-          <p:nvPr/>
-        </p:nvSpPr>
-        <p:spPr>
-          <a:xfrm>
-            <a:off x="566928" y="4681728"/>
+          <p:cNvPr id="32" name="Shape 30"/>
+          <p:cNvSpPr/>
+          <p:nvPr/>
+        </p:nvSpPr>
+        <p:spPr>
+          <a:xfrm>
+            <a:off x="566928" y="4270248"/>
             <a:ext cx="36576" cy="1170432"/>
           </a:xfrm>
           <a:prstGeom prst="rect">
@@ -11141,13 +12677,13 @@
       </p:sp>
       <p:sp>
         <p:nvSpPr>
-          <p:cNvPr id="34" name="Text 32"/>
-          <p:cNvSpPr/>
-          <p:nvPr/>
-        </p:nvSpPr>
-        <p:spPr>
-          <a:xfrm>
-            <a:off x="749808" y="4736592"/>
+          <p:cNvPr id="33" name="Text 31"/>
+          <p:cNvSpPr/>
+          <p:nvPr/>
+        </p:nvSpPr>
+        <p:spPr>
+          <a:xfrm>
+            <a:off x="749808" y="4325112"/>
             <a:ext cx="10728655" cy="201168"/>
           </a:xfrm>
           <a:prstGeom prst="rect">
@@ -11180,13 +12716,13 @@
       </p:sp>
       <p:sp>
         <p:nvSpPr>
-          <p:cNvPr id="35" name="Text 33"/>
-          <p:cNvSpPr/>
-          <p:nvPr/>
-        </p:nvSpPr>
-        <p:spPr>
-          <a:xfrm>
-            <a:off x="749808" y="4956048"/>
+          <p:cNvPr id="34" name="Text 32"/>
+          <p:cNvSpPr/>
+          <p:nvPr/>
+        </p:nvSpPr>
+        <p:spPr>
+          <a:xfrm>
+            <a:off x="749808" y="4544568"/>
             <a:ext cx="10728655" cy="877824"/>
           </a:xfrm>
           <a:prstGeom prst="rect">
@@ -11214,7 +12750,7 @@
                 <a:ea typeface="Pretendard" pitchFamily="34" charset="-122"/>
                 <a:cs typeface="Pretendard" pitchFamily="34" charset="-120"/>
               </a:rPr>
-              <a:t>{"ok":true,"mocked":true,"extractedFields":{"area_signal":"역삼","asset_type":"오피스빌딩","price_band":"300억","size_signal":"3000평(약 9917.4㎡)"},"extractedFacts":{"region":"역삼","exactAddressCandidate":"역삼동 742-1","assetType":"오피스빌딩","priceText":"300억","sizeText":"3000평(약 9917.4㎡)","currentUse":"오피스","currentUseSignal":"근린생활시설","leaseSignal":"임대중","vacancySignal":"공실없음","tenantNames":["쿠팡","네이버"],"unitRentTexts":["301호: 1500만"],"sellerMotivationText":"자산 효율화","brokerNotes":["초역세권 매물"]},"detectedSensitiveFields":["exact_address","tenant_name"],"ambiguousFields":[],"warnings":[],"areaSignal":"역삼","assetType":"오피스빌딩","priceBand":"300억","sizeSignal":"3000평(약 9917.4㎡)","dealType":"매각","buildingName":"역삼 센트럴타워","exactAddress":"역삼동 742-1","totalFloorArea":9917.3,"buildYear":2015,"currentUseSignal":"근린생활시설","vacancySignal":"공실 없음","fitSummary":"초역세권 근생 빌딩으로 시행/사옥 매입에 최적화","cautionSummary":"주요 임차 업종 만기 조율 필요","hiddenFields":["exact_address","seller_motivation"],"confidence":{"areaSignal":"confirmed","assetType":"confirmed","priceBand":"ai_hypothesis","fitSummary":"ai_hypothesis"},"missingData":["sizeSignal"],"boundaryNote":"본 자료는 실거래 통계 기반 참고치입니다.","buyerType":"법인 사옥형","budgetRange":{"min":50,"max":80,"display":"50억~80억"},"preferredRegions":["강남","성수"],"assetTypes":["꼬마빌딩","사옥용"],"purchasePurpose":"사옥용 매입","mustHave":["초역세권","주차"],"niceToHave":["테라스","루프탑"],"riskTolerance":"medium","financingNote":"자본금 50% 준비","missingQuestions":["구체적인 입주 시기가 언제인가요?","선호하는 수익률이 있나요?"],"privacyNotes":["연락처 비공개"],"fitReasons":["매수자 예산(50-80억)에 부합하는 매물입니다.","요청하신 성수/강남 권역에 해당합니다."],"cautionReasons":["요청한 용도와 달리 명도 협의가 다소 필요합니다."],"recommendedNextAction":"현장 답사 제안","kakaoMessage":"안녕하세요! 요청하신 조건에 부합하는 추천 매물이 있어 안내해 드립니다. 확인해보시고 피드백 부탁드립니다.","title":"강남 역삼역 초역세권 오피스 사옥용 빌딩 매각","shortSummary":"역삼역 도보 5분 거리의 준신축급 대형 오피스빌딩입니다.","dealPoints":["초역세권","사옥 최적"],"cautionPoints":["명도 조율 필요"],"hiddenInfoNotice":["보증금 및 지번은 인가 후 확인 가능"],"gateMessage":"G1 등급 등록이 필요합니다.","kakaoText":"강남 역삼역 오피스 빌딩 매각 안내입니다.","exactUnitCandidate":"101호","floor":"1층","areaSqmText":"150㎡","spaceType":"office","depositText":"5000만","monthlyRentText":"400만","maintenanceFeeText":"50만","availableFromText":"즉시입주","leaseTermMonthsText":"24","incentivesText":"렌트프리 2개월","restrictions":[],"landlordIdentity":"김성수","currentTenant":"스타트업","vacancyReason":"이전 확장","rentNegotiation":"협의 가능","region":"성수동","areaSqm":150,"deposit":5000,"monthlyRent":400,"maintenanceFee":50,"availableFrom":"즉시입주","leaseTermMonths":24,"incentives":{"rentFreeMonths":2,"interiorSupport":"일부 인테리어 지원","freeRentDetail":"렌트프리 2개월 지원"},"shortSummaryLease":"성수역 도보 5분 거리 1층 리테일 상가 매물입니다."}</a:t>
+              <a:t>{"ok":true,"mocked":true,"extractedFields":{"area_signal":"역삼","asset_type":"오피스빌딩","price_band":"300억","size_signal":"3000평(약 9917.4㎡)"},"extractedFacts":{"region":"역삼","exactAddressCandidate":"역삼동 742-1","assetType":"오피스빌딩","priceText":"300억","sizeText":"3000평(약 9917.4㎡)","currentUse":"오피스","currentUseSignal":"근린생활시설","leaseSignal":"임대중","vacancySignal":"공실없음","tenantNames":["쿠팡","네이버"],"unitRentTexts":["301호: 1500만"],"sellerMotivationText":"자산 효율화","brokerNotes":["초역세권 매물"]},"detectedSensitiveFields":["exact_address","tenant_name"],"ambiguousFields":[],"warnings":[],"areaSignal":"역삼","assetType":"오피스빌딩","priceBand":"300억","sizeSignal":"3000평(약 9917.4㎡)","dealType":"매각","buildingName":"역삼 센트럴타워","exactAddress":"역삼동 742-1","totalFloorArea":9917.3,"buildYear":2015,"currentUseSignal":"근린생활시설","vacancySignal":"공실 없음","fitSummary":"초역세권 근생 빌딩으로 시행/사옥 매입에 최적화","cautionSummary":"주요 임차인 만기 조율 필요","hiddenFields":["exact_address","seller_motivation"],"confidence":{"areaSignal":"confirmed","assetType":"confirmed","priceBand":"ai_hypothesis","fitSummary":"ai_hypothesis"},"missingData":["sizeSignal"],"boundaryNote":"본 자료는 실거래 통계 기반 참고치입니다.","buyerType":"법인 사옥형","budgetRange":{"min":50,"max":80,"display":"50억~80억"},"preferredRegions":["강남","성수"],"assetTypes":["꼬마빌딩","사옥용"],"purchasePurpose":"사옥용 매입","mustHave":["초역세권","주차"],"niceToHave":["테라스","루프탑"],"riskTolerance":"medium","financingNote":"자본금 50% 준비","missingQuestions":["구체적인 입주 시기가 언제인가요?","선호하는 수익률이 있나요?"],"privacyNotes":["연락처 비공개"],"fitReasons":["매수자 예산(50-80억)에 부합하는 매물입니다.","요청하신 성수/강남 권역에 해당합니다."],"cautionReasons":["요청한 용도와 달리 명도 협의가 다소 필요합니다."],"recommendedNextAction":"현장 답사 제안","kakaoMessage":"안녕하세요! 요청하신 조건에 부합하는 추천 매물이 있어 안내해 드립니다. 확인해보시고 피드백 부탁드립니다.","title":"강남 역삼역 초역세권 오피스 사옥용 빌딩 매각","shortSummary":"역삼역 도보 5분 거리의 준신축급 대형 오피스빌딩입니다.","dealPoints":["초역세권","사옥 최적"],"cautionPoints":["명도 조율 필요"],"hiddenInfoNotice":["보증금 및 지번은 인가 후 확인 가능"],"gateMessage":"G1 등급 등록이 필요합니다.","kakaoText":"강남 역삼역 오피스 빌딩 매각 안내입니다.","exactUnitCandidate":"101호","floor":"1층","areaSqmText":"150㎡","spaceType":"office","depositText":"5000만","monthlyRentText":"400만","maintenanceFeeText":"50만","availableFromText":"즉시입주","leaseTermMonthsText":"24","incentivesText":"렌트프리 2개월","restrictions":[],"landlordIdentity":"김성수","currentTenant":"스타트업","vacancyReason":"이전 확장","rentNegotiation":"협의 가능","region":"성수동","areaSqm":150,"deposit":5000,"monthlyRent":400,"maintenanceFee":50,"availableFrom":"즉시입주","leaseTermMonths":24,"incentives":{"rentFreeMonths":2,"interiorSupport":"일부 인테리어 지원","freeRentDetail":"렌트프리 2개월 지원"},"shortSummaryLease":"성수역 도보 5분 거리 1층 리테일 상가 매물입니다."} ### 층별 임대 현황</a:t>
             </a:r>
             <a:endParaRPr lang="en-US" sz="930" dirty="0"/>
           </a:p>
@@ -11222,7 +12758,7 @@
       </p:sp>
       <p:sp>
         <p:nvSpPr>
-          <p:cNvPr id="36" name="Text 34"/>
+          <p:cNvPr id="35" name="Text 33"/>
           <p:cNvSpPr/>
           <p:nvPr/>
         </p:nvSpPr>
@@ -11261,7 +12797,7 @@
       </p:sp>
       <p:sp>
         <p:nvSpPr>
-          <p:cNvPr id="37" name="Text 35"/>
+          <p:cNvPr id="36" name="Text 34"/>
           <p:cNvSpPr/>
           <p:nvPr/>
         </p:nvSpPr>
@@ -11476,11 +13012,11 @@
         <p:spPr>
           <a:xfrm>
             <a:off x="566928" y="1417320"/>
-            <a:ext cx="3515258" cy="3657600"/>
+            <a:ext cx="11057839" cy="3657600"/>
           </a:xfrm>
           <a:prstGeom prst="roundRect">
             <a:avLst>
-              <a:gd name="adj" fmla="val 1561"/>
+              <a:gd name="adj" fmla="val 1500"/>
             </a:avLst>
           </a:prstGeom>
           <a:solidFill>
@@ -11503,7 +13039,7 @@
         <p:spPr>
           <a:xfrm>
             <a:off x="566928" y="1417320"/>
-            <a:ext cx="3515258" cy="45720"/>
+            <a:ext cx="11057839" cy="45720"/>
           </a:xfrm>
           <a:prstGeom prst="rect">
             <a:avLst/>
@@ -11523,7 +13059,7 @@
         <p:spPr>
           <a:xfrm>
             <a:off x="795528" y="1618488"/>
-            <a:ext cx="3058058" cy="292608"/>
+            <a:ext cx="10600639" cy="292608"/>
           </a:xfrm>
           <a:prstGeom prst="rect">
             <a:avLst/>
@@ -11547,7 +13083,7 @@
                 <a:ea typeface="Pretendard" pitchFamily="34" charset="-122"/>
                 <a:cs typeface="Pretendard" pitchFamily="34" charset="-120"/>
               </a:rPr>
-              <a:t>건물 물리적 상태</a:t>
+              <a:t>용도 리스크</a:t>
             </a:r>
             <a:endParaRPr lang="en-US" sz="1350" dirty="0"/>
           </a:p>
@@ -11562,7 +13098,7 @@
         <p:spPr>
           <a:xfrm>
             <a:off x="795528" y="1947672"/>
-            <a:ext cx="3058058" cy="365760"/>
+            <a:ext cx="10600639" cy="365760"/>
           </a:xfrm>
           <a:prstGeom prst="rect">
             <a:avLst/>
@@ -11588,7 +13124,7 @@
                 <a:ea typeface="Pretendard" pitchFamily="34" charset="-122"/>
                 <a:cs typeface="Pretendard" pitchFamily="34" charset="-120"/>
               </a:rPr>
-              <a:t>2017년 준공 신축급 상태 (누수/균열 결함 없음)</a:t>
+              <a:t>—</a:t>
             </a:r>
             <a:endParaRPr lang="en-US" sz="1250" dirty="0"/>
           </a:p>
@@ -11603,7 +13139,7 @@
         <p:spPr>
           <a:xfrm>
             <a:off x="795528" y="2377440"/>
-            <a:ext cx="3058058" cy="2606040"/>
+            <a:ext cx="10600639" cy="2606040"/>
           </a:xfrm>
           <a:prstGeom prst="rect">
             <a:avLst/>
@@ -11633,7 +13169,7 @@
                 <a:ea typeface="Pretendard" pitchFamily="34" charset="-122"/>
                 <a:cs typeface="Pretendard" pitchFamily="34" charset="-120"/>
               </a:rPr>
-              <a:t>준공 10년 미만으로 대규모 수선비용 발생 가능성 낮음</a:t>
+              <a:t>{"ok":true,"mocked":true,"extractedFields":{"area_signal":"역삼","asset_type":"오피스빌딩","price_band":"300억","size_signal":"3000평(약 9917.4㎡)"},"extractedFacts":{"region":"역삼","exactAddressCandidate":"역삼동 7</a:t>
             </a:r>
             <a:endParaRPr lang="en-US" sz="1100" dirty="0"/>
           </a:p>
@@ -11647,12 +13183,12 @@
         </p:nvSpPr>
         <p:spPr>
           <a:xfrm>
-            <a:off x="4338218" y="1417320"/>
-            <a:ext cx="3515258" cy="3657600"/>
+            <a:off x="566928" y="5193792"/>
+            <a:ext cx="11057839" cy="621792"/>
           </a:xfrm>
           <a:prstGeom prst="roundRect">
             <a:avLst>
-              <a:gd name="adj" fmla="val 1561"/>
+              <a:gd name="adj" fmla="val 8824"/>
             </a:avLst>
           </a:prstGeom>
           <a:solidFill>
@@ -11668,351 +13204,7 @@
       </p:sp>
       <p:sp>
         <p:nvSpPr>
-          <p:cNvPr id="12" name="Shape 10"/>
-          <p:cNvSpPr/>
-          <p:nvPr/>
-        </p:nvSpPr>
-        <p:spPr>
-          <a:xfrm>
-            <a:off x="4338218" y="1417320"/>
-            <a:ext cx="3515258" cy="45720"/>
-          </a:xfrm>
-          <a:prstGeom prst="rect">
-            <a:avLst/>
-          </a:prstGeom>
-          <a:solidFill>
-            <a:srgbClr val="B98A2E"/>
-          </a:solidFill>
-          <a:ln/>
-        </p:spPr>
-      </p:sp>
-      <p:sp>
-        <p:nvSpPr>
-          <p:cNvPr id="13" name="Text 11"/>
-          <p:cNvSpPr/>
-          <p:nvPr/>
-        </p:nvSpPr>
-        <p:spPr>
-          <a:xfrm>
-            <a:off x="4566818" y="1618488"/>
-            <a:ext cx="3058058" cy="292608"/>
-          </a:xfrm>
-          <a:prstGeom prst="rect">
-            <a:avLst/>
-          </a:prstGeom>
-          <a:noFill/>
-          <a:ln/>
-        </p:spPr>
-        <p:txBody>
-          <a:bodyPr wrap="square" lIns="0" tIns="0" rIns="0" bIns="0" rtlCol="0" anchor="ctr"/>
-          <a:lstStyle/>
-          <a:p>
-            <a:pPr indent="0" marL="0">
-              <a:buNone/>
-            </a:pPr>
-            <a:r>
-              <a:rPr lang="en-US" sz="1350" b="1" dirty="0">
-                <a:solidFill>
-                  <a:srgbClr val="977024"/>
-                </a:solidFill>
-                <a:latin typeface="Pretendard" pitchFamily="34" charset="0"/>
-                <a:ea typeface="Pretendard" pitchFamily="34" charset="-122"/>
-                <a:cs typeface="Pretendard" pitchFamily="34" charset="-120"/>
-              </a:rPr>
-              <a:t>승강기 및 설비</a:t>
-            </a:r>
-            <a:endParaRPr lang="en-US" sz="1350" dirty="0"/>
-          </a:p>
-        </p:txBody>
-      </p:sp>
-      <p:sp>
-        <p:nvSpPr>
-          <p:cNvPr id="14" name="Text 12"/>
-          <p:cNvSpPr/>
-          <p:nvPr/>
-        </p:nvSpPr>
-        <p:spPr>
-          <a:xfrm>
-            <a:off x="4566818" y="1947672"/>
-            <a:ext cx="3058058" cy="365760"/>
-          </a:xfrm>
-          <a:prstGeom prst="rect">
-            <a:avLst/>
-          </a:prstGeom>
-          <a:noFill/>
-          <a:ln/>
-        </p:spPr>
-        <p:txBody>
-          <a:bodyPr wrap="square" lIns="0" tIns="0" rIns="0" bIns="0" rtlCol="0" anchor="ctr">
-            <a:normAutofit/>
-          </a:bodyPr>
-          <a:lstStyle/>
-          <a:p>
-            <a:pPr indent="0" marL="0">
-              <a:buNone/>
-            </a:pPr>
-            <a:r>
-              <a:rPr lang="en-US" sz="1250" b="1" dirty="0">
-                <a:solidFill>
-                  <a:srgbClr val="10161F"/>
-                </a:solidFill>
-                <a:latin typeface="Pretendard" pitchFamily="34" charset="0"/>
-                <a:ea typeface="Pretendard" pitchFamily="34" charset="-122"/>
-                <a:cs typeface="Pretendard" pitchFamily="34" charset="-120"/>
-              </a:rPr>
-              <a:t>15인승 침대용 승강기 및 냉난방 설비 양호</a:t>
-            </a:r>
-            <a:endParaRPr lang="en-US" sz="1250" dirty="0"/>
-          </a:p>
-        </p:txBody>
-      </p:sp>
-      <p:sp>
-        <p:nvSpPr>
-          <p:cNvPr id="15" name="Text 13"/>
-          <p:cNvSpPr/>
-          <p:nvPr/>
-        </p:nvSpPr>
-        <p:spPr>
-          <a:xfrm>
-            <a:off x="4566818" y="2377440"/>
-            <a:ext cx="3058058" cy="2606040"/>
-          </a:xfrm>
-          <a:prstGeom prst="rect">
-            <a:avLst/>
-          </a:prstGeom>
-          <a:noFill/>
-          <a:ln/>
-        </p:spPr>
-        <p:txBody>
-          <a:bodyPr wrap="square" lIns="0" tIns="0" rIns="0" bIns="0" rtlCol="0" anchor="t">
-            <a:normAutofit/>
-          </a:bodyPr>
-          <a:lstStyle/>
-          <a:p>
-            <a:pPr marL="342900" indent="-342900">
-              <a:lnSpc>
-                <a:spcPct val="125000"/>
-              </a:lnSpc>
-              <a:buSzPct val="100000"/>
-              <a:buChar char="•"/>
-            </a:pPr>
-            <a:r>
-              <a:rPr lang="en-US" sz="1100" dirty="0">
-                <a:solidFill>
-                  <a:srgbClr val="10161F"/>
-                </a:solidFill>
-                <a:latin typeface="Pretendard" pitchFamily="34" charset="0"/>
-                <a:ea typeface="Pretendard" pitchFamily="34" charset="-122"/>
-                <a:cs typeface="Pretendard" pitchFamily="34" charset="-120"/>
-              </a:rPr>
-              <a:t>주기적 정기 점검 계약 유지로 관리 리스크 최소화</a:t>
-            </a:r>
-            <a:endParaRPr lang="en-US" sz="1100" dirty="0"/>
-          </a:p>
-        </p:txBody>
-      </p:sp>
-      <p:sp>
-        <p:nvSpPr>
-          <p:cNvPr id="16" name="Shape 14"/>
-          <p:cNvSpPr/>
-          <p:nvPr/>
-        </p:nvSpPr>
-        <p:spPr>
-          <a:xfrm>
-            <a:off x="8109509" y="1417320"/>
-            <a:ext cx="3515258" cy="3657600"/>
-          </a:xfrm>
-          <a:prstGeom prst="roundRect">
-            <a:avLst>
-              <a:gd name="adj" fmla="val 1561"/>
-            </a:avLst>
-          </a:prstGeom>
-          <a:solidFill>
-            <a:srgbClr val="F7FAFC"/>
-          </a:solidFill>
-          <a:ln w="6350">
-            <a:solidFill>
-              <a:srgbClr val="CBD5E0"/>
-            </a:solidFill>
-            <a:prstDash val="solid"/>
-          </a:ln>
-        </p:spPr>
-      </p:sp>
-      <p:sp>
-        <p:nvSpPr>
-          <p:cNvPr id="17" name="Shape 15"/>
-          <p:cNvSpPr/>
-          <p:nvPr/>
-        </p:nvSpPr>
-        <p:spPr>
-          <a:xfrm>
-            <a:off x="8109509" y="1417320"/>
-            <a:ext cx="3515258" cy="45720"/>
-          </a:xfrm>
-          <a:prstGeom prst="rect">
-            <a:avLst/>
-          </a:prstGeom>
-          <a:solidFill>
-            <a:srgbClr val="B98A2E"/>
-          </a:solidFill>
-          <a:ln/>
-        </p:spPr>
-      </p:sp>
-      <p:sp>
-        <p:nvSpPr>
-          <p:cNvPr id="18" name="Text 16"/>
-          <p:cNvSpPr/>
-          <p:nvPr/>
-        </p:nvSpPr>
-        <p:spPr>
-          <a:xfrm>
-            <a:off x="8338109" y="1618488"/>
-            <a:ext cx="3058058" cy="292608"/>
-          </a:xfrm>
-          <a:prstGeom prst="rect">
-            <a:avLst/>
-          </a:prstGeom>
-          <a:noFill/>
-          <a:ln/>
-        </p:spPr>
-        <p:txBody>
-          <a:bodyPr wrap="square" lIns="0" tIns="0" rIns="0" bIns="0" rtlCol="0" anchor="ctr"/>
-          <a:lstStyle/>
-          <a:p>
-            <a:pPr indent="0" marL="0">
-              <a:buNone/>
-            </a:pPr>
-            <a:r>
-              <a:rPr lang="en-US" sz="1350" b="1" dirty="0">
-                <a:solidFill>
-                  <a:srgbClr val="977024"/>
-                </a:solidFill>
-                <a:latin typeface="Pretendard" pitchFamily="34" charset="0"/>
-                <a:ea typeface="Pretendard" pitchFamily="34" charset="-122"/>
-                <a:cs typeface="Pretendard" pitchFamily="34" charset="-120"/>
-              </a:rPr>
-              <a:t>임차인 이탈 위험</a:t>
-            </a:r>
-            <a:endParaRPr lang="en-US" sz="1350" dirty="0"/>
-          </a:p>
-        </p:txBody>
-      </p:sp>
-      <p:sp>
-        <p:nvSpPr>
-          <p:cNvPr id="19" name="Text 17"/>
-          <p:cNvSpPr/>
-          <p:nvPr/>
-        </p:nvSpPr>
-        <p:spPr>
-          <a:xfrm>
-            <a:off x="8338109" y="1947672"/>
-            <a:ext cx="3058058" cy="365760"/>
-          </a:xfrm>
-          <a:prstGeom prst="rect">
-            <a:avLst/>
-          </a:prstGeom>
-          <a:noFill/>
-          <a:ln/>
-        </p:spPr>
-        <p:txBody>
-          <a:bodyPr wrap="square" lIns="0" tIns="0" rIns="0" bIns="0" rtlCol="0" anchor="ctr">
-            <a:normAutofit/>
-          </a:bodyPr>
-          <a:lstStyle/>
-          <a:p>
-            <a:pPr indent="0" marL="0">
-              <a:buNone/>
-            </a:pPr>
-            <a:r>
-              <a:rPr lang="en-US" sz="1250" b="1" dirty="0">
-                <a:solidFill>
-                  <a:srgbClr val="10161F"/>
-                </a:solidFill>
-                <a:latin typeface="Pretendard" pitchFamily="34" charset="0"/>
-                <a:ea typeface="Pretendard" pitchFamily="34" charset="-122"/>
-                <a:cs typeface="Pretendard" pitchFamily="34" charset="-120"/>
-              </a:rPr>
-              <a:t>병의원/약국 인테리어 투자비(호실당 5억↑) 존속</a:t>
-            </a:r>
-            <a:endParaRPr lang="en-US" sz="1250" dirty="0"/>
-          </a:p>
-        </p:txBody>
-      </p:sp>
-      <p:sp>
-        <p:nvSpPr>
-          <p:cNvPr id="20" name="Text 18"/>
-          <p:cNvSpPr/>
-          <p:nvPr/>
-        </p:nvSpPr>
-        <p:spPr>
-          <a:xfrm>
-            <a:off x="8338109" y="2377440"/>
-            <a:ext cx="3058058" cy="2606040"/>
-          </a:xfrm>
-          <a:prstGeom prst="rect">
-            <a:avLst/>
-          </a:prstGeom>
-          <a:noFill/>
-          <a:ln/>
-        </p:spPr>
-        <p:txBody>
-          <a:bodyPr wrap="square" lIns="0" tIns="0" rIns="0" bIns="0" rtlCol="0" anchor="t">
-            <a:normAutofit/>
-          </a:bodyPr>
-          <a:lstStyle/>
-          <a:p>
-            <a:pPr marL="342900" indent="-342900">
-              <a:lnSpc>
-                <a:spcPct val="125000"/>
-              </a:lnSpc>
-              <a:buSzPct val="100000"/>
-              <a:buChar char="•"/>
-            </a:pPr>
-            <a:r>
-              <a:rPr lang="en-US" sz="1100" dirty="0">
-                <a:solidFill>
-                  <a:srgbClr val="10161F"/>
-                </a:solidFill>
-                <a:latin typeface="Pretendard" pitchFamily="34" charset="0"/>
-                <a:ea typeface="Pretendard" pitchFamily="34" charset="-122"/>
-                <a:cs typeface="Pretendard" pitchFamily="34" charset="-120"/>
-              </a:rPr>
-              <a:t>WALE 3.5년 확보 및 만기 6개월 전 재계약 협상 개시</a:t>
-            </a:r>
-            <a:endParaRPr lang="en-US" sz="1100" dirty="0"/>
-          </a:p>
-        </p:txBody>
-      </p:sp>
-      <p:sp>
-        <p:nvSpPr>
-          <p:cNvPr id="21" name="Shape 19"/>
-          <p:cNvSpPr/>
-          <p:nvPr/>
-        </p:nvSpPr>
-        <p:spPr>
-          <a:xfrm>
-            <a:off x="566928" y="5193792"/>
-            <a:ext cx="11057839" cy="621792"/>
-          </a:xfrm>
-          <a:prstGeom prst="roundRect">
-            <a:avLst>
-              <a:gd name="adj" fmla="val 8824"/>
-            </a:avLst>
-          </a:prstGeom>
-          <a:solidFill>
-            <a:srgbClr val="F7FAFC"/>
-          </a:solidFill>
-          <a:ln w="6350">
-            <a:solidFill>
-              <a:srgbClr val="CBD5E0"/>
-            </a:solidFill>
-            <a:prstDash val="solid"/>
-          </a:ln>
-        </p:spPr>
-      </p:sp>
-      <p:sp>
-        <p:nvSpPr>
-          <p:cNvPr id="22" name="Text 20"/>
+          <p:cNvPr id="12" name="Text 10"/>
           <p:cNvSpPr/>
           <p:nvPr/>
         </p:nvSpPr>
@@ -12043,7 +13235,7 @@
                 <a:ea typeface="Pretendard" pitchFamily="34" charset="-122"/>
                 <a:cs typeface="Pretendard" pitchFamily="34" charset="-120"/>
               </a:rPr>
-              <a:t>실사 총평: 자산의 물리적·권리적 하자가 없으며, 세부 임대차 계약서 및 등기사항증명서는 LOI 접수 후 원본 열람 가능합니다.</a:t>
+              <a:t>※ 본 리스크 체크는 공부 및 브로커 확인 기반이며, 매수 전 전문 실사팀(변호사/건축사)을 통한 정밀 실사가 필요합니다.</a:t>
             </a:r>
             <a:endParaRPr lang="en-US" sz="1100" dirty="0"/>
           </a:p>
@@ -12051,7 +13243,7 @@
       </p:sp>
       <p:sp>
         <p:nvSpPr>
-          <p:cNvPr id="23" name="Text 21"/>
+          <p:cNvPr id="13" name="Text 11"/>
           <p:cNvSpPr/>
           <p:nvPr/>
         </p:nvSpPr>
@@ -12090,7 +13282,7 @@
       </p:sp>
       <p:sp>
         <p:nvSpPr>
-          <p:cNvPr id="24" name="Text 22"/>
+          <p:cNvPr id="14" name="Text 12"/>
           <p:cNvSpPr/>
           <p:nvPr/>
         </p:nvSpPr>
@@ -12296,681 +13488,6 @@
           </a:p>
         </p:txBody>
       </p:sp>
-      <p:sp>
-        <p:nvSpPr>
-          <p:cNvPr id="6" name="Text 4"/>
-          <p:cNvSpPr/>
-          <p:nvPr/>
-        </p:nvSpPr>
-        <p:spPr>
-          <a:xfrm>
-            <a:off x="1133856" y="1005840"/>
-            <a:ext cx="10490911" cy="237744"/>
-          </a:xfrm>
-          <a:prstGeom prst="rect">
-            <a:avLst/>
-          </a:prstGeom>
-          <a:noFill/>
-          <a:ln/>
-        </p:spPr>
-        <p:txBody>
-          <a:bodyPr wrap="square" lIns="0" tIns="0" rIns="0" bIns="0" rtlCol="0" anchor="ctr"/>
-          <a:lstStyle/>
-          <a:p>
-            <a:pPr indent="0" marL="0">
-              <a:buNone/>
-            </a:pPr>
-            <a:r>
-              <a:rPr lang="en-US" sz="1100" dirty="0">
-                <a:solidFill>
-                  <a:srgbClr val="718096"/>
-                </a:solidFill>
-                <a:latin typeface="Pretendard" pitchFamily="34" charset="0"/>
-                <a:ea typeface="Pretendard" pitchFamily="34" charset="-122"/>
-                <a:cs typeface="Pretendard" pitchFamily="34" charset="-120"/>
-              </a:rPr>
-              <a:t>3대 핵심 투자 포인트 (Investment Highlights)</a:t>
-            </a:r>
-            <a:endParaRPr lang="en-US" sz="1100" dirty="0"/>
-          </a:p>
-        </p:txBody>
-      </p:sp>
-      <p:sp>
-        <p:nvSpPr>
-          <p:cNvPr id="7" name="Shape 5"/>
-          <p:cNvSpPr/>
-          <p:nvPr/>
-        </p:nvSpPr>
-        <p:spPr>
-          <a:xfrm>
-            <a:off x="566928" y="1481328"/>
-            <a:ext cx="3472586" cy="2560320"/>
-          </a:xfrm>
-          <a:prstGeom prst="roundRect">
-            <a:avLst>
-              <a:gd name="adj" fmla="val 2857"/>
-            </a:avLst>
-          </a:prstGeom>
-          <a:solidFill>
-            <a:srgbClr val="F7FAFC"/>
-          </a:solidFill>
-          <a:ln w="10160">
-            <a:solidFill>
-              <a:srgbClr val="CBD5E0"/>
-            </a:solidFill>
-            <a:prstDash val="solid"/>
-          </a:ln>
-        </p:spPr>
-      </p:sp>
-      <p:sp>
-        <p:nvSpPr>
-          <p:cNvPr id="8" name="Shape 6"/>
-          <p:cNvSpPr/>
-          <p:nvPr/>
-        </p:nvSpPr>
-        <p:spPr>
-          <a:xfrm>
-            <a:off x="566928" y="1481328"/>
-            <a:ext cx="3472586" cy="54864"/>
-          </a:xfrm>
-          <a:prstGeom prst="rect">
-            <a:avLst/>
-          </a:prstGeom>
-          <a:solidFill>
-            <a:srgbClr val="B98A2E"/>
-          </a:solidFill>
-          <a:ln/>
-        </p:spPr>
-      </p:sp>
-      <p:sp>
-        <p:nvSpPr>
-          <p:cNvPr id="9" name="Shape 7"/>
-          <p:cNvSpPr/>
-          <p:nvPr/>
-        </p:nvSpPr>
-        <p:spPr>
-          <a:xfrm>
-            <a:off x="795528" y="1755648"/>
-            <a:ext cx="475488" cy="292608"/>
-          </a:xfrm>
-          <a:prstGeom prst="roundRect">
-            <a:avLst>
-              <a:gd name="adj" fmla="val 12500"/>
-            </a:avLst>
-          </a:prstGeom>
-          <a:solidFill>
-            <a:srgbClr val="D9B668"/>
-          </a:solidFill>
-          <a:ln/>
-        </p:spPr>
-      </p:sp>
-      <p:sp>
-        <p:nvSpPr>
-          <p:cNvPr id="10" name="Text 8"/>
-          <p:cNvSpPr/>
-          <p:nvPr/>
-        </p:nvSpPr>
-        <p:spPr>
-          <a:xfrm>
-            <a:off x="795528" y="1755648"/>
-            <a:ext cx="475488" cy="292608"/>
-          </a:xfrm>
-          <a:prstGeom prst="rect">
-            <a:avLst/>
-          </a:prstGeom>
-          <a:noFill/>
-          <a:ln/>
-        </p:spPr>
-        <p:txBody>
-          <a:bodyPr wrap="square" lIns="0" tIns="0" rIns="0" bIns="0" rtlCol="0" anchor="ctr"/>
-          <a:lstStyle/>
-          <a:p>
-            <a:pPr algn="ctr" indent="0" marL="0">
-              <a:buNone/>
-            </a:pPr>
-            <a:r>
-              <a:rPr lang="en-US" sz="1100" b="1" dirty="0">
-                <a:solidFill>
-                  <a:srgbClr val="977024"/>
-                </a:solidFill>
-                <a:latin typeface="Arial" pitchFamily="34" charset="0"/>
-                <a:ea typeface="Arial" pitchFamily="34" charset="-122"/>
-                <a:cs typeface="Arial" pitchFamily="34" charset="-120"/>
-              </a:rPr>
-              <a:t>01</a:t>
-            </a:r>
-            <a:endParaRPr lang="en-US" sz="1100" dirty="0"/>
-          </a:p>
-        </p:txBody>
-      </p:sp>
-      <p:sp>
-        <p:nvSpPr>
-          <p:cNvPr id="11" name="Text 9"/>
-          <p:cNvSpPr/>
-          <p:nvPr/>
-        </p:nvSpPr>
-        <p:spPr>
-          <a:xfrm>
-            <a:off x="795528" y="2194560"/>
-            <a:ext cx="3015386" cy="365760"/>
-          </a:xfrm>
-          <a:prstGeom prst="rect">
-            <a:avLst/>
-          </a:prstGeom>
-          <a:noFill/>
-          <a:ln/>
-        </p:spPr>
-        <p:txBody>
-          <a:bodyPr wrap="square" lIns="0" tIns="0" rIns="0" bIns="0" rtlCol="0" anchor="t"/>
-          <a:lstStyle/>
-          <a:p>
-            <a:pPr indent="0" marL="0">
-              <a:buNone/>
-            </a:pPr>
-            <a:r>
-              <a:rPr lang="en-US" sz="1500" b="1" dirty="0">
-                <a:solidFill>
-                  <a:srgbClr val="10161F"/>
-                </a:solidFill>
-                <a:latin typeface="Pretendard" pitchFamily="34" charset="0"/>
-                <a:ea typeface="Pretendard" pitchFamily="34" charset="-122"/>
-                <a:cs typeface="Pretendard" pitchFamily="34" charset="-120"/>
-              </a:rPr>
-              <a:t>원금 안전판 확보</a:t>
-            </a:r>
-            <a:endParaRPr lang="en-US" sz="1500" dirty="0"/>
-          </a:p>
-        </p:txBody>
-      </p:sp>
-      <p:sp>
-        <p:nvSpPr>
-          <p:cNvPr id="12" name="Shape 10"/>
-          <p:cNvSpPr/>
-          <p:nvPr/>
-        </p:nvSpPr>
-        <p:spPr>
-          <a:xfrm>
-            <a:off x="795528" y="2624328"/>
-            <a:ext cx="3015386" cy="0"/>
-          </a:xfrm>
-          <a:prstGeom prst="line">
-            <a:avLst/>
-          </a:prstGeom>
-          <a:noFill/>
-          <a:ln w="6350">
-            <a:solidFill>
-              <a:srgbClr val="CBD5E0"/>
-            </a:solidFill>
-            <a:prstDash val="solid"/>
-          </a:ln>
-        </p:spPr>
-      </p:sp>
-      <p:sp>
-        <p:nvSpPr>
-          <p:cNvPr id="13" name="Text 11"/>
-          <p:cNvSpPr/>
-          <p:nvPr/>
-        </p:nvSpPr>
-        <p:spPr>
-          <a:xfrm>
-            <a:off x="795528" y="2779776"/>
-            <a:ext cx="3015386" cy="1051560"/>
-          </a:xfrm>
-          <a:prstGeom prst="rect">
-            <a:avLst/>
-          </a:prstGeom>
-          <a:noFill/>
-          <a:ln/>
-        </p:spPr>
-        <p:txBody>
-          <a:bodyPr wrap="square" lIns="0" tIns="0" rIns="0" bIns="0" rtlCol="0" anchor="t"/>
-          <a:lstStyle/>
-          <a:p>
-            <a:pPr indent="0" marL="0">
-              <a:lnSpc>
-                <a:spcPct val="130000"/>
-              </a:lnSpc>
-              <a:buNone/>
-            </a:pPr>
-            <a:r>
-              <a:rPr lang="en-US" sz="1200" dirty="0">
-                <a:solidFill>
-                  <a:srgbClr val="10161F"/>
-                </a:solidFill>
-                <a:latin typeface="Pretendard" pitchFamily="34" charset="0"/>
-                <a:ea typeface="Pretendard" pitchFamily="34" charset="-122"/>
-                <a:cs typeface="Pretendard" pitchFamily="34" charset="-120"/>
-              </a:rPr>
-              <a:t>서초권역의 핵심 입지로, 우량한 대지 지분 가치가 하방 경직성을 강력히 지지합니다.</a:t>
-            </a:r>
-            <a:endParaRPr lang="en-US" sz="1200" dirty="0"/>
-          </a:p>
-        </p:txBody>
-      </p:sp>
-      <p:sp>
-        <p:nvSpPr>
-          <p:cNvPr id="14" name="Shape 12"/>
-          <p:cNvSpPr/>
-          <p:nvPr/>
-        </p:nvSpPr>
-        <p:spPr>
-          <a:xfrm>
-            <a:off x="4359554" y="1481328"/>
-            <a:ext cx="3472586" cy="2560320"/>
-          </a:xfrm>
-          <a:prstGeom prst="roundRect">
-            <a:avLst>
-              <a:gd name="adj" fmla="val 2857"/>
-            </a:avLst>
-          </a:prstGeom>
-          <a:solidFill>
-            <a:srgbClr val="F7FAFC"/>
-          </a:solidFill>
-          <a:ln w="10160">
-            <a:solidFill>
-              <a:srgbClr val="CBD5E0"/>
-            </a:solidFill>
-            <a:prstDash val="solid"/>
-          </a:ln>
-        </p:spPr>
-      </p:sp>
-      <p:sp>
-        <p:nvSpPr>
-          <p:cNvPr id="15" name="Shape 13"/>
-          <p:cNvSpPr/>
-          <p:nvPr/>
-        </p:nvSpPr>
-        <p:spPr>
-          <a:xfrm>
-            <a:off x="4359554" y="1481328"/>
-            <a:ext cx="3472586" cy="54864"/>
-          </a:xfrm>
-          <a:prstGeom prst="rect">
-            <a:avLst/>
-          </a:prstGeom>
-          <a:solidFill>
-            <a:srgbClr val="B98A2E"/>
-          </a:solidFill>
-          <a:ln/>
-        </p:spPr>
-      </p:sp>
-      <p:sp>
-        <p:nvSpPr>
-          <p:cNvPr id="16" name="Shape 14"/>
-          <p:cNvSpPr/>
-          <p:nvPr/>
-        </p:nvSpPr>
-        <p:spPr>
-          <a:xfrm>
-            <a:off x="4588154" y="1755648"/>
-            <a:ext cx="475488" cy="292608"/>
-          </a:xfrm>
-          <a:prstGeom prst="roundRect">
-            <a:avLst>
-              <a:gd name="adj" fmla="val 12500"/>
-            </a:avLst>
-          </a:prstGeom>
-          <a:solidFill>
-            <a:srgbClr val="D9B668"/>
-          </a:solidFill>
-          <a:ln/>
-        </p:spPr>
-      </p:sp>
-      <p:sp>
-        <p:nvSpPr>
-          <p:cNvPr id="17" name="Text 15"/>
-          <p:cNvSpPr/>
-          <p:nvPr/>
-        </p:nvSpPr>
-        <p:spPr>
-          <a:xfrm>
-            <a:off x="4588154" y="1755648"/>
-            <a:ext cx="475488" cy="292608"/>
-          </a:xfrm>
-          <a:prstGeom prst="rect">
-            <a:avLst/>
-          </a:prstGeom>
-          <a:noFill/>
-          <a:ln/>
-        </p:spPr>
-        <p:txBody>
-          <a:bodyPr wrap="square" lIns="0" tIns="0" rIns="0" bIns="0" rtlCol="0" anchor="ctr"/>
-          <a:lstStyle/>
-          <a:p>
-            <a:pPr algn="ctr" indent="0" marL="0">
-              <a:buNone/>
-            </a:pPr>
-            <a:r>
-              <a:rPr lang="en-US" sz="1100" b="1" dirty="0">
-                <a:solidFill>
-                  <a:srgbClr val="977024"/>
-                </a:solidFill>
-                <a:latin typeface="Arial" pitchFamily="34" charset="0"/>
-                <a:ea typeface="Arial" pitchFamily="34" charset="-122"/>
-                <a:cs typeface="Arial" pitchFamily="34" charset="-120"/>
-              </a:rPr>
-              <a:t>02</a:t>
-            </a:r>
-            <a:endParaRPr lang="en-US" sz="1100" dirty="0"/>
-          </a:p>
-        </p:txBody>
-      </p:sp>
-      <p:sp>
-        <p:nvSpPr>
-          <p:cNvPr id="18" name="Text 16"/>
-          <p:cNvSpPr/>
-          <p:nvPr/>
-        </p:nvSpPr>
-        <p:spPr>
-          <a:xfrm>
-            <a:off x="4588154" y="2194560"/>
-            <a:ext cx="3015386" cy="365760"/>
-          </a:xfrm>
-          <a:prstGeom prst="rect">
-            <a:avLst/>
-          </a:prstGeom>
-          <a:noFill/>
-          <a:ln/>
-        </p:spPr>
-        <p:txBody>
-          <a:bodyPr wrap="square" lIns="0" tIns="0" rIns="0" bIns="0" rtlCol="0" anchor="t"/>
-          <a:lstStyle/>
-          <a:p>
-            <a:pPr indent="0" marL="0">
-              <a:buNone/>
-            </a:pPr>
-            <a:r>
-              <a:rPr lang="en-US" sz="1500" b="1" dirty="0">
-                <a:solidFill>
-                  <a:srgbClr val="10161F"/>
-                </a:solidFill>
-                <a:latin typeface="Pretendard" pitchFamily="34" charset="0"/>
-                <a:ea typeface="Pretendard" pitchFamily="34" charset="-122"/>
-                <a:cs typeface="Pretendard" pitchFamily="34" charset="-120"/>
-              </a:rPr>
-              <a:t>확실한 월 현금흐름</a:t>
-            </a:r>
-            <a:endParaRPr lang="en-US" sz="1500" dirty="0"/>
-          </a:p>
-        </p:txBody>
-      </p:sp>
-      <p:sp>
-        <p:nvSpPr>
-          <p:cNvPr id="19" name="Shape 17"/>
-          <p:cNvSpPr/>
-          <p:nvPr/>
-        </p:nvSpPr>
-        <p:spPr>
-          <a:xfrm>
-            <a:off x="4588154" y="2624328"/>
-            <a:ext cx="3015386" cy="0"/>
-          </a:xfrm>
-          <a:prstGeom prst="line">
-            <a:avLst/>
-          </a:prstGeom>
-          <a:noFill/>
-          <a:ln w="6350">
-            <a:solidFill>
-              <a:srgbClr val="CBD5E0"/>
-            </a:solidFill>
-            <a:prstDash val="solid"/>
-          </a:ln>
-        </p:spPr>
-      </p:sp>
-      <p:sp>
-        <p:nvSpPr>
-          <p:cNvPr id="20" name="Text 18"/>
-          <p:cNvSpPr/>
-          <p:nvPr/>
-        </p:nvSpPr>
-        <p:spPr>
-          <a:xfrm>
-            <a:off x="4588154" y="2779776"/>
-            <a:ext cx="3015386" cy="1051560"/>
-          </a:xfrm>
-          <a:prstGeom prst="rect">
-            <a:avLst/>
-          </a:prstGeom>
-          <a:noFill/>
-          <a:ln/>
-        </p:spPr>
-        <p:txBody>
-          <a:bodyPr wrap="square" lIns="0" tIns="0" rIns="0" bIns="0" rtlCol="0" anchor="t"/>
-          <a:lstStyle/>
-          <a:p>
-            <a:pPr indent="0" marL="0">
-              <a:lnSpc>
-                <a:spcPct val="130000"/>
-              </a:lnSpc>
-              <a:buNone/>
-            </a:pPr>
-            <a:r>
-              <a:rPr lang="en-US" sz="1200" dirty="0">
-                <a:solidFill>
-                  <a:srgbClr val="10161F"/>
-                </a:solidFill>
-                <a:latin typeface="Pretendard" pitchFamily="34" charset="0"/>
-                <a:ea typeface="Pretendard" pitchFamily="34" charset="-122"/>
-                <a:cs typeface="Pretendard" pitchFamily="34" charset="-120"/>
-              </a:rPr>
-              <a:t>우량 테넌트 만실 운영 및 장기 임대차 구조를 기반으로 매월 안정적인 순영업소득(NOI) 창출이 기대됩니다.</a:t>
-            </a:r>
-            <a:endParaRPr lang="en-US" sz="1200" dirty="0"/>
-          </a:p>
-        </p:txBody>
-      </p:sp>
-      <p:sp>
-        <p:nvSpPr>
-          <p:cNvPr id="21" name="Shape 19"/>
-          <p:cNvSpPr/>
-          <p:nvPr/>
-        </p:nvSpPr>
-        <p:spPr>
-          <a:xfrm>
-            <a:off x="8152181" y="1481328"/>
-            <a:ext cx="3472586" cy="2560320"/>
-          </a:xfrm>
-          <a:prstGeom prst="roundRect">
-            <a:avLst>
-              <a:gd name="adj" fmla="val 2857"/>
-            </a:avLst>
-          </a:prstGeom>
-          <a:solidFill>
-            <a:srgbClr val="F7FAFC"/>
-          </a:solidFill>
-          <a:ln w="10160">
-            <a:solidFill>
-              <a:srgbClr val="CBD5E0"/>
-            </a:solidFill>
-            <a:prstDash val="solid"/>
-          </a:ln>
-        </p:spPr>
-      </p:sp>
-      <p:sp>
-        <p:nvSpPr>
-          <p:cNvPr id="22" name="Shape 20"/>
-          <p:cNvSpPr/>
-          <p:nvPr/>
-        </p:nvSpPr>
-        <p:spPr>
-          <a:xfrm>
-            <a:off x="8152181" y="1481328"/>
-            <a:ext cx="3472586" cy="54864"/>
-          </a:xfrm>
-          <a:prstGeom prst="rect">
-            <a:avLst/>
-          </a:prstGeom>
-          <a:solidFill>
-            <a:srgbClr val="B98A2E"/>
-          </a:solidFill>
-          <a:ln/>
-        </p:spPr>
-      </p:sp>
-      <p:sp>
-        <p:nvSpPr>
-          <p:cNvPr id="23" name="Shape 21"/>
-          <p:cNvSpPr/>
-          <p:nvPr/>
-        </p:nvSpPr>
-        <p:spPr>
-          <a:xfrm>
-            <a:off x="8380781" y="1755648"/>
-            <a:ext cx="475488" cy="292608"/>
-          </a:xfrm>
-          <a:prstGeom prst="roundRect">
-            <a:avLst>
-              <a:gd name="adj" fmla="val 12500"/>
-            </a:avLst>
-          </a:prstGeom>
-          <a:solidFill>
-            <a:srgbClr val="D9B668"/>
-          </a:solidFill>
-          <a:ln/>
-        </p:spPr>
-      </p:sp>
-      <p:sp>
-        <p:nvSpPr>
-          <p:cNvPr id="24" name="Text 22"/>
-          <p:cNvSpPr/>
-          <p:nvPr/>
-        </p:nvSpPr>
-        <p:spPr>
-          <a:xfrm>
-            <a:off x="8380781" y="1755648"/>
-            <a:ext cx="475488" cy="292608"/>
-          </a:xfrm>
-          <a:prstGeom prst="rect">
-            <a:avLst/>
-          </a:prstGeom>
-          <a:noFill/>
-          <a:ln/>
-        </p:spPr>
-        <p:txBody>
-          <a:bodyPr wrap="square" lIns="0" tIns="0" rIns="0" bIns="0" rtlCol="0" anchor="ctr"/>
-          <a:lstStyle/>
-          <a:p>
-            <a:pPr algn="ctr" indent="0" marL="0">
-              <a:buNone/>
-            </a:pPr>
-            <a:r>
-              <a:rPr lang="en-US" sz="1100" b="1" dirty="0">
-                <a:solidFill>
-                  <a:srgbClr val="977024"/>
-                </a:solidFill>
-                <a:latin typeface="Arial" pitchFamily="34" charset="0"/>
-                <a:ea typeface="Arial" pitchFamily="34" charset="-122"/>
-                <a:cs typeface="Arial" pitchFamily="34" charset="-120"/>
-              </a:rPr>
-              <a:t>03</a:t>
-            </a:r>
-            <a:endParaRPr lang="en-US" sz="1100" dirty="0"/>
-          </a:p>
-        </p:txBody>
-      </p:sp>
-      <p:sp>
-        <p:nvSpPr>
-          <p:cNvPr id="25" name="Text 23"/>
-          <p:cNvSpPr/>
-          <p:nvPr/>
-        </p:nvSpPr>
-        <p:spPr>
-          <a:xfrm>
-            <a:off x="8380781" y="2194560"/>
-            <a:ext cx="3015386" cy="365760"/>
-          </a:xfrm>
-          <a:prstGeom prst="rect">
-            <a:avLst/>
-          </a:prstGeom>
-          <a:noFill/>
-          <a:ln/>
-        </p:spPr>
-        <p:txBody>
-          <a:bodyPr wrap="square" lIns="0" tIns="0" rIns="0" bIns="0" rtlCol="0" anchor="t"/>
-          <a:lstStyle/>
-          <a:p>
-            <a:pPr indent="0" marL="0">
-              <a:buNone/>
-            </a:pPr>
-            <a:r>
-              <a:rPr lang="en-US" sz="1500" b="1" dirty="0">
-                <a:solidFill>
-                  <a:srgbClr val="10161F"/>
-                </a:solidFill>
-                <a:latin typeface="Pretendard" pitchFamily="34" charset="0"/>
-                <a:ea typeface="Pretendard" pitchFamily="34" charset="-122"/>
-                <a:cs typeface="Pretendard" pitchFamily="34" charset="-120"/>
-              </a:rPr>
-              <a:t>가치 상승 및 출구 전략</a:t>
-            </a:r>
-            <a:endParaRPr lang="en-US" sz="1500" dirty="0"/>
-          </a:p>
-        </p:txBody>
-      </p:sp>
-      <p:sp>
-        <p:nvSpPr>
-          <p:cNvPr id="26" name="Shape 24"/>
-          <p:cNvSpPr/>
-          <p:nvPr/>
-        </p:nvSpPr>
-        <p:spPr>
-          <a:xfrm>
-            <a:off x="8380781" y="2624328"/>
-            <a:ext cx="3015386" cy="0"/>
-          </a:xfrm>
-          <a:prstGeom prst="line">
-            <a:avLst/>
-          </a:prstGeom>
-          <a:noFill/>
-          <a:ln w="6350">
-            <a:solidFill>
-              <a:srgbClr val="CBD5E0"/>
-            </a:solidFill>
-            <a:prstDash val="solid"/>
-          </a:ln>
-        </p:spPr>
-      </p:sp>
-      <p:sp>
-        <p:nvSpPr>
-          <p:cNvPr id="27" name="Text 25"/>
-          <p:cNvSpPr/>
-          <p:nvPr/>
-        </p:nvSpPr>
-        <p:spPr>
-          <a:xfrm>
-            <a:off x="8380781" y="2779776"/>
-            <a:ext cx="3015386" cy="1051560"/>
-          </a:xfrm>
-          <a:prstGeom prst="rect">
-            <a:avLst/>
-          </a:prstGeom>
-          <a:noFill/>
-          <a:ln/>
-        </p:spPr>
-        <p:txBody>
-          <a:bodyPr wrap="square" lIns="0" tIns="0" rIns="0" bIns="0" rtlCol="0" anchor="t"/>
-          <a:lstStyle/>
-          <a:p>
-            <a:pPr indent="0" marL="0">
-              <a:lnSpc>
-                <a:spcPct val="130000"/>
-              </a:lnSpc>
-              <a:buNone/>
-            </a:pPr>
-            <a:r>
-              <a:rPr lang="en-US" sz="1200" dirty="0">
-                <a:solidFill>
-                  <a:srgbClr val="10161F"/>
-                </a:solidFill>
-                <a:latin typeface="Pretendard" pitchFamily="34" charset="0"/>
-                <a:ea typeface="Pretendard" pitchFamily="34" charset="-122"/>
-                <a:cs typeface="Pretendard" pitchFamily="34" charset="-120"/>
-              </a:rPr>
-              <a:t>현행 공법 여력을 활용한 밸류업 기회와 더불어 향후 권역 지가 상승에 따른 시세차익 실현이 유력합니다.</a:t>
-            </a:r>
-            <a:endParaRPr lang="en-US" sz="1200" dirty="0"/>
-          </a:p>
-        </p:txBody>
-      </p:sp>
       <p:graphicFrame>
         <p:nvGraphicFramePr>
           <p:cNvPr id="9" name="Table 0"/>
@@ -12986,7 +13503,7 @@
           </p:nvPr>
         </p:nvGraphicFramePr>
         <p:xfrm>
-          <a:off x="566928" y="4178808"/>
+          <a:off x="566928" y="4023360"/>
           <a:ext cx="11057839" cy="914400"/>
         </p:xfrm>
         <a:graphic>
@@ -12994,9 +13511,10 @@
             <a:tbl>
               <a:tblPr/>
               <a:tblGrid>
-                <a:gridCol w="3685946"/>
-                <a:gridCol w="3685946"/>
-                <a:gridCol w="3685946"/>
+                <a:gridCol w="2764460"/>
+                <a:gridCol w="2764460"/>
+                <a:gridCol w="2764460"/>
+                <a:gridCol w="2764460"/>
               </a:tblGrid>
               <a:tr h="329184">
                 <a:tc>
@@ -13016,7 +13534,7 @@
                           <a:ea typeface="Pretendard" pitchFamily="34" charset="-122"/>
                           <a:cs typeface="Pretendard" pitchFamily="34" charset="-120"/>
                         </a:rPr>
-                        <a:t>유형</a:t>
+                        <a:t>시나리오</a:t>
                       </a:r>
                       <a:endParaRPr lang="en-US" sz="1050" dirty="0">
                         <a:latin typeface="Pretendard" charset="0"/>
@@ -13084,7 +13602,21 @@
                           <a:ea typeface="Pretendard" pitchFamily="34" charset="-122"/>
                           <a:cs typeface="Pretendard" pitchFamily="34" charset="-120"/>
                         </a:rPr>
-                        <a:t>적합도</a:t>
+                        <a:t>NOI </a:t>
+                      </a:r>
+                      <a:pPr indent="0" marL="0">
+                        <a:buNone/>
+                      </a:pPr>
+                      <a:r>
+                        <a:rPr lang="en-US" sz="1050" b="1" dirty="0">
+                          <a:solidFill>
+                            <a:srgbClr val="718096"/>
+                          </a:solidFill>
+                          <a:latin typeface="Pretendard" pitchFamily="34" charset="0"/>
+                          <a:ea typeface="Pretendard" pitchFamily="34" charset="-122"/>
+                          <a:cs typeface="Pretendard" pitchFamily="34" charset="-120"/>
+                        </a:rPr>
+                        <a:t>개선</a:t>
                       </a:r>
                       <a:endParaRPr lang="en-US" sz="1050" dirty="0">
                         <a:latin typeface="Pretendard" charset="0"/>
@@ -13152,7 +13684,117 @@
                           <a:ea typeface="Pretendard" pitchFamily="34" charset="-122"/>
                           <a:cs typeface="Pretendard" pitchFamily="34" charset="-120"/>
                         </a:rPr>
-                        <a:t>이유</a:t>
+                        <a:t>개선 </a:t>
+                      </a:r>
+                      <a:pPr indent="0" marL="0">
+                        <a:buNone/>
+                      </a:pPr>
+                      <a:r>
+                        <a:rPr lang="en-US" sz="1050" b="1" dirty="0">
+                          <a:solidFill>
+                            <a:srgbClr val="718096"/>
+                          </a:solidFill>
+                          <a:latin typeface="Pretendard" pitchFamily="34" charset="0"/>
+                          <a:ea typeface="Pretendard" pitchFamily="34" charset="-122"/>
+                          <a:cs typeface="Pretendard" pitchFamily="34" charset="-120"/>
+                        </a:rPr>
+                        <a:t>Cap </a:t>
+                      </a:r>
+                      <a:pPr indent="0" marL="0">
+                        <a:buNone/>
+                      </a:pPr>
+                      <a:r>
+                        <a:rPr lang="en-US" sz="1050" b="1" dirty="0">
+                          <a:solidFill>
+                            <a:srgbClr val="718096"/>
+                          </a:solidFill>
+                          <a:latin typeface="Pretendard" pitchFamily="34" charset="0"/>
+                          <a:ea typeface="Pretendard" pitchFamily="34" charset="-122"/>
+                          <a:cs typeface="Pretendard" pitchFamily="34" charset="-120"/>
+                        </a:rPr>
+                        <a:t>Rate</a:t>
+                      </a:r>
+                      <a:endParaRPr lang="en-US" sz="1050" dirty="0">
+                        <a:latin typeface="Pretendard" charset="0"/>
+                        <a:ea typeface="Pretendard" charset="0"/>
+                        <a:cs typeface="Pretendard" charset="0"/>
+                      </a:endParaRPr>
+                    </a:p>
+                  </a:txBody>
+                  <a:tcPr marL="50800" marR="50800" marT="25400" marB="25400" anchor="ctr">
+                    <a:lnL w="3810" cap="flat" cmpd="sng" algn="ctr">
+                      <a:solidFill>
+                        <a:srgbClr val="CBD5E0"/>
+                      </a:solidFill>
+                      <a:prstDash val="solid"/>
+                      <a:round/>
+                      <a:headEnd type="none" w="med" len="med"/>
+                      <a:tailEnd type="none" w="med" len="med"/>
+                    </a:lnL>
+                    <a:lnR w="3810" cap="flat" cmpd="sng" algn="ctr">
+                      <a:solidFill>
+                        <a:srgbClr val="CBD5E0"/>
+                      </a:solidFill>
+                      <a:prstDash val="solid"/>
+                      <a:round/>
+                      <a:headEnd type="none" w="med" len="med"/>
+                      <a:tailEnd type="none" w="med" len="med"/>
+                    </a:lnR>
+                    <a:lnT w="3810" cap="flat" cmpd="sng" algn="ctr">
+                      <a:solidFill>
+                        <a:srgbClr val="CBD5E0"/>
+                      </a:solidFill>
+                      <a:prstDash val="solid"/>
+                      <a:round/>
+                      <a:headEnd type="none" w="med" len="med"/>
+                      <a:tailEnd type="none" w="med" len="med"/>
+                    </a:lnT>
+                    <a:lnB w="3810" cap="flat" cmpd="sng" algn="ctr">
+                      <a:solidFill>
+                        <a:srgbClr val="CBD5E0"/>
+                      </a:solidFill>
+                      <a:prstDash val="solid"/>
+                      <a:round/>
+                      <a:headEnd type="none" w="med" len="med"/>
+                      <a:tailEnd type="none" w="med" len="med"/>
+                    </a:lnB>
+                    <a:solidFill>
+                      <a:srgbClr val="F7FAFC"/>
+                    </a:solidFill>
+                  </a:tcPr>
+                </a:tc>
+                <a:tc>
+                  <a:txBody>
+                    <a:bodyPr/>
+                    <a:lstStyle/>
+                    <a:p>
+                      <a:pPr indent="0" marL="0">
+                        <a:buNone/>
+                      </a:pPr>
+                      <a:r>
+                        <a:rPr lang="en-US" sz="1050" b="1" dirty="0">
+                          <a:solidFill>
+                            <a:srgbClr val="718096"/>
+                          </a:solidFill>
+                          <a:latin typeface="Pretendard" pitchFamily="34" charset="0"/>
+                          <a:ea typeface="Pretendard" pitchFamily="34" charset="-122"/>
+                          <a:cs typeface="Pretendard" pitchFamily="34" charset="-120"/>
+                        </a:rPr>
+                        <a:t>투자 </a:t>
+                      </a:r>
+                      <a:pPr indent="0" marL="0">
+                        <a:buNone/>
+                      </a:pPr>
+                      <a:r>
+                        <a:rPr lang="en-US" sz="1050" b="1" dirty="0">
+                          <a:solidFill>
+                            <a:srgbClr val="718096"/>
+                          </a:solidFill>
+                          <a:latin typeface="Pretendard" pitchFamily="34" charset="0"/>
+                          <a:ea typeface="Pretendard" pitchFamily="34" charset="-122"/>
+                          <a:cs typeface="Pretendard" pitchFamily="34" charset="-120"/>
+                        </a:rPr>
+                        <a:t>비용</a:t>
                       </a:r>
                       <a:endParaRPr lang="en-US" sz="1050" dirty="0">
                         <a:latin typeface="Pretendard" charset="0"/>
@@ -13222,7 +13864,49 @@
                           <a:ea typeface="Pretendard" pitchFamily="34" charset="-122"/>
                           <a:cs typeface="Pretendard" pitchFamily="34" charset="-120"/>
                         </a:rPr>
-                        <a:t>(임대수익)</a:t>
+                        <a:t>② </a:t>
+                      </a:r>
+                      <a:pPr indent="0" marL="0">
+                        <a:buNone/>
+                      </a:pPr>
+                      <a:r>
+                        <a:rPr lang="en-US" sz="1050" b="1" dirty="0">
+                          <a:solidFill>
+                            <a:srgbClr val="10161F"/>
+                          </a:solidFill>
+                          <a:latin typeface="Pretendard" pitchFamily="34" charset="0"/>
+                          <a:ea typeface="Pretendard" pitchFamily="34" charset="-122"/>
+                          <a:cs typeface="Pretendard" pitchFamily="34" charset="-120"/>
+                        </a:rPr>
+                        <a:t>임대료 </a:t>
+                      </a:r>
+                      <a:pPr indent="0" marL="0">
+                        <a:buNone/>
+                      </a:pPr>
+                      <a:r>
+                        <a:rPr lang="en-US" sz="1050" b="1" dirty="0">
+                          <a:solidFill>
+                            <a:srgbClr val="10161F"/>
+                          </a:solidFill>
+                          <a:latin typeface="Pretendard" pitchFamily="34" charset="0"/>
+                          <a:ea typeface="Pretendard" pitchFamily="34" charset="-122"/>
+                          <a:cs typeface="Pretendard" pitchFamily="34" charset="-120"/>
+                        </a:rPr>
+                        <a:t>현실화 </a:t>
+                      </a:r>
+                      <a:pPr indent="0" marL="0">
+                        <a:buNone/>
+                      </a:pPr>
+                      <a:r>
+                        <a:rPr lang="en-US" sz="1050" b="1" dirty="0">
+                          <a:solidFill>
+                            <a:srgbClr val="10161F"/>
+                          </a:solidFill>
+                          <a:latin typeface="Pretendard" pitchFamily="34" charset="0"/>
+                          <a:ea typeface="Pretendard" pitchFamily="34" charset="-122"/>
+                          <a:cs typeface="Pretendard" pitchFamily="34" charset="-120"/>
+                        </a:rPr>
+                        <a:t>(+5%)</a:t>
                       </a:r>
                       <a:endParaRPr lang="en-US" sz="1050" dirty="0">
                         <a:latin typeface="Pretendard" charset="0"/>
@@ -13290,7 +13974,49 @@
                           <a:ea typeface="Pretendard" pitchFamily="34" charset="-122"/>
                           <a:cs typeface="Pretendard" pitchFamily="34" charset="-120"/>
                         </a:rPr>
-                        <a:t>★★★★★</a:t>
+                        <a:t>+약 </a:t>
+                      </a:r>
+                      <a:pPr indent="0" marL="0">
+                        <a:buNone/>
+                      </a:pPr>
+                      <a:r>
+                        <a:rPr lang="en-US" sz="1050" dirty="0">
+                          <a:solidFill>
+                            <a:srgbClr val="10161F"/>
+                          </a:solidFill>
+                          <a:latin typeface="Pretendard" pitchFamily="34" charset="0"/>
+                          <a:ea typeface="Pretendard" pitchFamily="34" charset="-122"/>
+                          <a:cs typeface="Pretendard" pitchFamily="34" charset="-120"/>
+                        </a:rPr>
+                        <a:t>0.30억 </a:t>
+                      </a:r>
+                      <a:pPr indent="0" marL="0">
+                        <a:buNone/>
+                      </a:pPr>
+                      <a:r>
+                        <a:rPr lang="en-US" sz="1050" dirty="0">
+                          <a:solidFill>
+                            <a:srgbClr val="10161F"/>
+                          </a:solidFill>
+                          <a:latin typeface="Pretendard" pitchFamily="34" charset="0"/>
+                          <a:ea typeface="Pretendard" pitchFamily="34" charset="-122"/>
+                          <a:cs typeface="Pretendard" pitchFamily="34" charset="-120"/>
+                        </a:rPr>
+                        <a:t>원 </a:t>
+                      </a:r>
+                      <a:pPr indent="0" marL="0">
+                        <a:buNone/>
+                      </a:pPr>
+                      <a:r>
+                        <a:rPr lang="en-US" sz="1050" dirty="0">
+                          <a:solidFill>
+                            <a:srgbClr val="10161F"/>
+                          </a:solidFill>
+                          <a:latin typeface="Pretendard" pitchFamily="34" charset="0"/>
+                          <a:ea typeface="Pretendard" pitchFamily="34" charset="-122"/>
+                          <a:cs typeface="Pretendard" pitchFamily="34" charset="-120"/>
+                        </a:rPr>
+                        <a:t>(+5%)</a:t>
                       </a:r>
                       <a:endParaRPr lang="en-US" sz="1050" dirty="0">
                         <a:latin typeface="Pretendard" charset="0"/>
@@ -13358,8 +14084,62 @@
                           <a:ea typeface="Pretendard" pitchFamily="34" charset="-122"/>
                           <a:cs typeface="Pretendard" pitchFamily="34" charset="-120"/>
                         </a:rPr>
-                        <a:t>안정 </a:t>
+                        <a:t>3.86%</a:t>
                       </a:r>
+                      <a:endParaRPr lang="en-US" sz="1050" dirty="0">
+                        <a:latin typeface="Pretendard" charset="0"/>
+                        <a:ea typeface="Pretendard" charset="0"/>
+                        <a:cs typeface="Pretendard" charset="0"/>
+                      </a:endParaRPr>
+                    </a:p>
+                  </a:txBody>
+                  <a:tcPr marL="50800" marR="50800" marT="25400" marB="25400" anchor="ctr">
+                    <a:lnL w="3810" cap="flat" cmpd="sng" algn="ctr">
+                      <a:solidFill>
+                        <a:srgbClr val="CBD5E0"/>
+                      </a:solidFill>
+                      <a:prstDash val="solid"/>
+                      <a:round/>
+                      <a:headEnd type="none" w="med" len="med"/>
+                      <a:tailEnd type="none" w="med" len="med"/>
+                    </a:lnL>
+                    <a:lnR w="3810" cap="flat" cmpd="sng" algn="ctr">
+                      <a:solidFill>
+                        <a:srgbClr val="CBD5E0"/>
+                      </a:solidFill>
+                      <a:prstDash val="solid"/>
+                      <a:round/>
+                      <a:headEnd type="none" w="med" len="med"/>
+                      <a:tailEnd type="none" w="med" len="med"/>
+                    </a:lnR>
+                    <a:lnT w="3810" cap="flat" cmpd="sng" algn="ctr">
+                      <a:solidFill>
+                        <a:srgbClr val="CBD5E0"/>
+                      </a:solidFill>
+                      <a:prstDash val="solid"/>
+                      <a:round/>
+                      <a:headEnd type="none" w="med" len="med"/>
+                      <a:tailEnd type="none" w="med" len="med"/>
+                    </a:lnT>
+                    <a:lnB w="3810" cap="flat" cmpd="sng" algn="ctr">
+                      <a:solidFill>
+                        <a:srgbClr val="CBD5E0"/>
+                      </a:solidFill>
+                      <a:prstDash val="solid"/>
+                      <a:round/>
+                      <a:headEnd type="none" w="med" len="med"/>
+                      <a:tailEnd type="none" w="med" len="med"/>
+                    </a:lnB>
+                    <a:solidFill>
+                      <a:srgbClr val="FFFFFF"/>
+                    </a:solidFill>
+                  </a:tcPr>
+                </a:tc>
+                <a:tc>
+                  <a:txBody>
+                    <a:bodyPr/>
+                    <a:lstStyle/>
+                    <a:p>
                       <a:pPr indent="0" marL="0">
                         <a:buNone/>
                       </a:pPr>
@@ -13372,63 +14152,7 @@
                           <a:ea typeface="Pretendard" pitchFamily="34" charset="-122"/>
                           <a:cs typeface="Pretendard" pitchFamily="34" charset="-120"/>
                         </a:rPr>
-                        <a:t>MD, </a:t>
-                      </a:r>
-                      <a:pPr indent="0" marL="0">
-                        <a:buNone/>
-                      </a:pPr>
-                      <a:r>
-                        <a:rPr lang="en-US" sz="1050" dirty="0">
-                          <a:solidFill>
-                            <a:srgbClr val="10161F"/>
-                          </a:solidFill>
-                          <a:latin typeface="Pretendard" pitchFamily="34" charset="0"/>
-                          <a:ea typeface="Pretendard" pitchFamily="34" charset="-122"/>
-                          <a:cs typeface="Pretendard" pitchFamily="34" charset="-120"/>
-                        </a:rPr>
-                        <a:t>예측 </a:t>
-                      </a:r>
-                      <a:pPr indent="0" marL="0">
-                        <a:buNone/>
-                      </a:pPr>
-                      <a:r>
-                        <a:rPr lang="en-US" sz="1050" dirty="0">
-                          <a:solidFill>
-                            <a:srgbClr val="10161F"/>
-                          </a:solidFill>
-                          <a:latin typeface="Pretendard" pitchFamily="34" charset="0"/>
-                          <a:ea typeface="Pretendard" pitchFamily="34" charset="-122"/>
-                          <a:cs typeface="Pretendard" pitchFamily="34" charset="-120"/>
-                        </a:rPr>
-                        <a:t>가능한 </a:t>
-                      </a:r>
-                      <a:pPr indent="0" marL="0">
-                        <a:buNone/>
-                      </a:pPr>
-                      <a:r>
-                        <a:rPr lang="en-US" sz="1050" dirty="0">
-                          <a:solidFill>
-                            <a:srgbClr val="10161F"/>
-                          </a:solidFill>
-                          <a:latin typeface="Pretendard" pitchFamily="34" charset="0"/>
-                          <a:ea typeface="Pretendard" pitchFamily="34" charset="-122"/>
-                          <a:cs typeface="Pretendard" pitchFamily="34" charset="-120"/>
-                        </a:rPr>
-                        <a:t>월 </a:t>
-                      </a:r>
-                      <a:pPr indent="0" marL="0">
-                        <a:buNone/>
-                      </a:pPr>
-                      <a:r>
-                        <a:rPr lang="en-US" sz="1050" dirty="0">
-                          <a:solidFill>
-                            <a:srgbClr val="10161F"/>
-                          </a:solidFill>
-                          <a:latin typeface="Pretendard" pitchFamily="34" charset="0"/>
-                          <a:ea typeface="Pretendard" pitchFamily="34" charset="-122"/>
-                          <a:cs typeface="Pretendard" pitchFamily="34" charset="-120"/>
-                        </a:rPr>
-                        <a:t>현금흐름</a:t>
+                        <a:t>불필요</a:t>
                       </a:r>
                       <a:endParaRPr lang="en-US" sz="1050" dirty="0">
                         <a:latin typeface="Pretendard" charset="0"/>
@@ -13498,7 +14222,7 @@
                           <a:ea typeface="Pretendard" pitchFamily="34" charset="-122"/>
                           <a:cs typeface="Pretendard" pitchFamily="34" charset="-120"/>
                         </a:rPr>
-                        <a:t>상가 </a:t>
+                        <a:t>③ </a:t>
                       </a:r>
                       <a:pPr indent="0" marL="0">
                         <a:buNone/>
@@ -13512,7 +14236,7 @@
                           <a:ea typeface="Pretendard" pitchFamily="34" charset="-122"/>
                           <a:cs typeface="Pretendard" pitchFamily="34" charset="-120"/>
                         </a:rPr>
-                        <a:t>전문 </a:t>
+                        <a:t>리모델링 </a:t>
                       </a:r>
                       <a:pPr indent="0" marL="0">
                         <a:buNone/>
@@ -13526,7 +14250,7 @@
                           <a:ea typeface="Pretendard" pitchFamily="34" charset="-122"/>
                           <a:cs typeface="Pretendard" pitchFamily="34" charset="-120"/>
                         </a:rPr>
-                        <a:t>임대 </a:t>
+                        <a:t>후 </a:t>
                       </a:r>
                       <a:pPr indent="0" marL="0">
                         <a:buNone/>
@@ -13540,7 +14264,21 @@
                           <a:ea typeface="Pretendard" pitchFamily="34" charset="-122"/>
                           <a:cs typeface="Pretendard" pitchFamily="34" charset="-120"/>
                         </a:rPr>
-                        <a:t>운영사</a:t>
+                        <a:t>임대료 </a:t>
+                      </a:r>
+                      <a:pPr indent="0" marL="0">
+                        <a:buNone/>
+                      </a:pPr>
+                      <a:r>
+                        <a:rPr lang="en-US" sz="1050" b="1" dirty="0">
+                          <a:solidFill>
+                            <a:srgbClr val="10161F"/>
+                          </a:solidFill>
+                          <a:latin typeface="Pretendard" pitchFamily="34" charset="0"/>
+                          <a:ea typeface="Pretendard" pitchFamily="34" charset="-122"/>
+                          <a:cs typeface="Pretendard" pitchFamily="34" charset="-120"/>
+                        </a:rPr>
+                        <a:t>상승</a:t>
                       </a:r>
                       <a:endParaRPr lang="en-US" sz="1050" dirty="0">
                         <a:latin typeface="Pretendard" charset="0"/>
@@ -13608,7 +14346,49 @@
                           <a:ea typeface="Pretendard" pitchFamily="34" charset="-122"/>
                           <a:cs typeface="Pretendard" pitchFamily="34" charset="-120"/>
                         </a:rPr>
-                        <a:t>★★★★</a:t>
+                        <a:t>+약 </a:t>
+                      </a:r>
+                      <a:pPr indent="0" marL="0">
+                        <a:buNone/>
+                      </a:pPr>
+                      <a:r>
+                        <a:rPr lang="en-US" sz="1050" dirty="0">
+                          <a:solidFill>
+                            <a:srgbClr val="10161F"/>
+                          </a:solidFill>
+                          <a:latin typeface="Pretendard" pitchFamily="34" charset="0"/>
+                          <a:ea typeface="Pretendard" pitchFamily="34" charset="-122"/>
+                          <a:cs typeface="Pretendard" pitchFamily="34" charset="-120"/>
+                        </a:rPr>
+                        <a:t>0.49억 </a:t>
+                      </a:r>
+                      <a:pPr indent="0" marL="0">
+                        <a:buNone/>
+                      </a:pPr>
+                      <a:r>
+                        <a:rPr lang="en-US" sz="1050" dirty="0">
+                          <a:solidFill>
+                            <a:srgbClr val="10161F"/>
+                          </a:solidFill>
+                          <a:latin typeface="Pretendard" pitchFamily="34" charset="0"/>
+                          <a:ea typeface="Pretendard" pitchFamily="34" charset="-122"/>
+                          <a:cs typeface="Pretendard" pitchFamily="34" charset="-120"/>
+                        </a:rPr>
+                        <a:t>원 </a:t>
+                      </a:r>
+                      <a:pPr indent="0" marL="0">
+                        <a:buNone/>
+                      </a:pPr>
+                      <a:r>
+                        <a:rPr lang="en-US" sz="1050" dirty="0">
+                          <a:solidFill>
+                            <a:srgbClr val="10161F"/>
+                          </a:solidFill>
+                          <a:latin typeface="Pretendard" pitchFamily="34" charset="0"/>
+                          <a:ea typeface="Pretendard" pitchFamily="34" charset="-122"/>
+                          <a:cs typeface="Pretendard" pitchFamily="34" charset="-120"/>
+                        </a:rPr>
+                        <a:t>(+8%)</a:t>
                       </a:r>
                       <a:endParaRPr lang="en-US" sz="1050" dirty="0">
                         <a:latin typeface="Pretendard" charset="0"/>
@@ -13676,77 +14456,7 @@
                           <a:ea typeface="Pretendard" pitchFamily="34" charset="-122"/>
                           <a:cs typeface="Pretendard" pitchFamily="34" charset="-120"/>
                         </a:rPr>
-                        <a:t>MD </a:t>
-                      </a:r>
-                      <a:pPr indent="0" marL="0">
-                        <a:buNone/>
-                      </a:pPr>
-                      <a:r>
-                        <a:rPr lang="en-US" sz="1050" dirty="0">
-                          <a:solidFill>
-                            <a:srgbClr val="10161F"/>
-                          </a:solidFill>
-                          <a:latin typeface="Pretendard" pitchFamily="34" charset="0"/>
-                          <a:ea typeface="Pretendard" pitchFamily="34" charset="-122"/>
-                          <a:cs typeface="Pretendard" pitchFamily="34" charset="-120"/>
-                        </a:rPr>
-                        <a:t>관리 </a:t>
-                      </a:r>
-                      <a:pPr indent="0" marL="0">
-                        <a:buNone/>
-                      </a:pPr>
-                      <a:r>
-                        <a:rPr lang="en-US" sz="1050" dirty="0">
-                          <a:solidFill>
-                            <a:srgbClr val="10161F"/>
-                          </a:solidFill>
-                          <a:latin typeface="Pretendard" pitchFamily="34" charset="0"/>
-                          <a:ea typeface="Pretendard" pitchFamily="34" charset="-122"/>
-                          <a:cs typeface="Pretendard" pitchFamily="34" charset="-120"/>
-                        </a:rPr>
-                        <a:t>노하우 </a:t>
-                      </a:r>
-                      <a:pPr indent="0" marL="0">
-                        <a:buNone/>
-                      </a:pPr>
-                      <a:r>
-                        <a:rPr lang="en-US" sz="1050" dirty="0">
-                          <a:solidFill>
-                            <a:srgbClr val="10161F"/>
-                          </a:solidFill>
-                          <a:latin typeface="Pretendard" pitchFamily="34" charset="0"/>
-                          <a:ea typeface="Pretendard" pitchFamily="34" charset="-122"/>
-                          <a:cs typeface="Pretendard" pitchFamily="34" charset="-120"/>
-                        </a:rPr>
-                        <a:t>보유 </a:t>
-                      </a:r>
-                      <a:pPr indent="0" marL="0">
-                        <a:buNone/>
-                      </a:pPr>
-                      <a:r>
-                        <a:rPr lang="en-US" sz="1050" dirty="0">
-                          <a:solidFill>
-                            <a:srgbClr val="10161F"/>
-                          </a:solidFill>
-                          <a:latin typeface="Pretendard" pitchFamily="34" charset="0"/>
-                          <a:ea typeface="Pretendard" pitchFamily="34" charset="-122"/>
-                          <a:cs typeface="Pretendard" pitchFamily="34" charset="-120"/>
-                        </a:rPr>
-                        <a:t>시 </a:t>
-                      </a:r>
-                      <a:pPr indent="0" marL="0">
-                        <a:buNone/>
-                      </a:pPr>
-                      <a:r>
-                        <a:rPr lang="en-US" sz="1050" dirty="0">
-                          <a:solidFill>
-                            <a:srgbClr val="10161F"/>
-                          </a:solidFill>
-                          <a:latin typeface="Pretendard" pitchFamily="34" charset="0"/>
-                          <a:ea typeface="Pretendard" pitchFamily="34" charset="-122"/>
-                          <a:cs typeface="Pretendard" pitchFamily="34" charset="-120"/>
-                        </a:rPr>
-                        <a:t>최적</a:t>
+                        <a:t>3.97%</a:t>
                       </a:r>
                       <a:endParaRPr lang="en-US" sz="1050" dirty="0">
                         <a:latin typeface="Pretendard" charset="0"/>
@@ -13794,104 +14504,6 @@
                     </a:lnB>
                     <a:solidFill>
                       <a:srgbClr val="F7FAFC"/>
-                    </a:solidFill>
-                  </a:tcPr>
-                </a:tc>
-              </a:tr>
-              <a:tr h="329184">
-                <a:tc>
-                  <a:txBody>
-                    <a:bodyPr/>
-                    <a:lstStyle/>
-                    <a:p>
-                      <a:pPr indent="0" marL="0">
-                        <a:buNone/>
-                      </a:pPr>
-                      <a:r>
-                        <a:rPr lang="en-US" sz="1050" b="1" dirty="0">
-                          <a:solidFill>
-                            <a:srgbClr val="10161F"/>
-                          </a:solidFill>
-                          <a:latin typeface="Pretendard" pitchFamily="34" charset="0"/>
-                          <a:ea typeface="Pretendard" pitchFamily="34" charset="-122"/>
-                          <a:cs typeface="Pretendard" pitchFamily="34" charset="-120"/>
-                        </a:rPr>
-                        <a:t>프랜차이즈 </a:t>
-                      </a:r>
-                      <a:pPr indent="0" marL="0">
-                        <a:buNone/>
-                      </a:pPr>
-                      <a:r>
-                        <a:rPr lang="en-US" sz="1050" b="1" dirty="0">
-                          <a:solidFill>
-                            <a:srgbClr val="10161F"/>
-                          </a:solidFill>
-                          <a:latin typeface="Pretendard" pitchFamily="34" charset="0"/>
-                          <a:ea typeface="Pretendard" pitchFamily="34" charset="-122"/>
-                          <a:cs typeface="Pretendard" pitchFamily="34" charset="-120"/>
-                        </a:rPr>
-                        <a:t>본사 </a:t>
-                      </a:r>
-                      <a:pPr indent="0" marL="0">
-                        <a:buNone/>
-                      </a:pPr>
-                      <a:r>
-                        <a:rPr lang="en-US" sz="1050" b="1" dirty="0">
-                          <a:solidFill>
-                            <a:srgbClr val="10161F"/>
-                          </a:solidFill>
-                          <a:latin typeface="Pretendard" pitchFamily="34" charset="0"/>
-                          <a:ea typeface="Pretendard" pitchFamily="34" charset="-122"/>
-                          <a:cs typeface="Pretendard" pitchFamily="34" charset="-120"/>
-                        </a:rPr>
-                        <a:t>직매장</a:t>
-                      </a:r>
-                      <a:endParaRPr lang="en-US" sz="1050" dirty="0">
-                        <a:latin typeface="Pretendard" charset="0"/>
-                        <a:ea typeface="Pretendard" charset="0"/>
-                        <a:cs typeface="Pretendard" charset="0"/>
-                      </a:endParaRPr>
-                    </a:p>
-                  </a:txBody>
-                  <a:tcPr marL="50800" marR="50800" marT="25400" marB="25400" anchor="ctr">
-                    <a:lnL w="3810" cap="flat" cmpd="sng" algn="ctr">
-                      <a:solidFill>
-                        <a:srgbClr val="CBD5E0"/>
-                      </a:solidFill>
-                      <a:prstDash val="solid"/>
-                      <a:round/>
-                      <a:headEnd type="none" w="med" len="med"/>
-                      <a:tailEnd type="none" w="med" len="med"/>
-                    </a:lnL>
-                    <a:lnR w="3810" cap="flat" cmpd="sng" algn="ctr">
-                      <a:solidFill>
-                        <a:srgbClr val="CBD5E0"/>
-                      </a:solidFill>
-                      <a:prstDash val="solid"/>
-                      <a:round/>
-                      <a:headEnd type="none" w="med" len="med"/>
-                      <a:tailEnd type="none" w="med" len="med"/>
-                    </a:lnR>
-                    <a:lnT w="3810" cap="flat" cmpd="sng" algn="ctr">
-                      <a:solidFill>
-                        <a:srgbClr val="CBD5E0"/>
-                      </a:solidFill>
-                      <a:prstDash val="solid"/>
-                      <a:round/>
-                      <a:headEnd type="none" w="med" len="med"/>
-                      <a:tailEnd type="none" w="med" len="med"/>
-                    </a:lnT>
-                    <a:lnB w="3810" cap="flat" cmpd="sng" algn="ctr">
-                      <a:solidFill>
-                        <a:srgbClr val="CBD5E0"/>
-                      </a:solidFill>
-                      <a:prstDash val="solid"/>
-                      <a:round/>
-                      <a:headEnd type="none" w="med" len="med"/>
-                      <a:tailEnd type="none" w="med" len="med"/>
-                    </a:lnB>
-                    <a:solidFill>
-                      <a:srgbClr val="FFFFFF"/>
                     </a:solidFill>
                   </a:tcPr>
                 </a:tc>
@@ -13912,75 +14524,7 @@
                           <a:ea typeface="Pretendard" pitchFamily="34" charset="-122"/>
                           <a:cs typeface="Pretendard" pitchFamily="34" charset="-120"/>
                         </a:rPr>
-                        <a:t>★★★</a:t>
-                      </a:r>
-                      <a:endParaRPr lang="en-US" sz="1050" dirty="0">
-                        <a:latin typeface="Pretendard" charset="0"/>
-                        <a:ea typeface="Pretendard" charset="0"/>
-                        <a:cs typeface="Pretendard" charset="0"/>
-                      </a:endParaRPr>
-                    </a:p>
-                  </a:txBody>
-                  <a:tcPr marL="50800" marR="50800" marT="25400" marB="25400" anchor="ctr">
-                    <a:lnL w="3810" cap="flat" cmpd="sng" algn="ctr">
-                      <a:solidFill>
-                        <a:srgbClr val="CBD5E0"/>
-                      </a:solidFill>
-                      <a:prstDash val="solid"/>
-                      <a:round/>
-                      <a:headEnd type="none" w="med" len="med"/>
-                      <a:tailEnd type="none" w="med" len="med"/>
-                    </a:lnL>
-                    <a:lnR w="3810" cap="flat" cmpd="sng" algn="ctr">
-                      <a:solidFill>
-                        <a:srgbClr val="CBD5E0"/>
-                      </a:solidFill>
-                      <a:prstDash val="solid"/>
-                      <a:round/>
-                      <a:headEnd type="none" w="med" len="med"/>
-                      <a:tailEnd type="none" w="med" len="med"/>
-                    </a:lnR>
-                    <a:lnT w="3810" cap="flat" cmpd="sng" algn="ctr">
-                      <a:solidFill>
-                        <a:srgbClr val="CBD5E0"/>
-                      </a:solidFill>
-                      <a:prstDash val="solid"/>
-                      <a:round/>
-                      <a:headEnd type="none" w="med" len="med"/>
-                      <a:tailEnd type="none" w="med" len="med"/>
-                    </a:lnT>
-                    <a:lnB w="3810" cap="flat" cmpd="sng" algn="ctr">
-                      <a:solidFill>
-                        <a:srgbClr val="CBD5E0"/>
-                      </a:solidFill>
-                      <a:prstDash val="solid"/>
-                      <a:round/>
-                      <a:headEnd type="none" w="med" len="med"/>
-                      <a:tailEnd type="none" w="med" len="med"/>
-                    </a:lnB>
-                    <a:solidFill>
-                      <a:srgbClr val="FFFFFF"/>
-                    </a:solidFill>
-                  </a:tcPr>
-                </a:tc>
-                <a:tc>
-                  <a:txBody>
-                    <a:bodyPr/>
-                    <a:lstStyle/>
-                    <a:p>
-                      <a:pPr indent="0" marL="0">
-                        <a:buNone/>
-                      </a:pPr>
-                      <a:r>
-                        <a:rPr lang="en-US" sz="1050" dirty="0">
-                          <a:solidFill>
-                            <a:srgbClr val="10161F"/>
-                          </a:solidFill>
-                          <a:latin typeface="Pretendard" pitchFamily="34" charset="0"/>
-                          <a:ea typeface="Pretendard" pitchFamily="34" charset="-122"/>
-                          <a:cs typeface="Pretendard" pitchFamily="34" charset="-120"/>
-                        </a:rPr>
-                        <a:t>브랜드 </a:t>
+                        <a:t>약 </a:t>
                       </a:r>
                       <a:pPr indent="0" marL="0">
                         <a:buNone/>
@@ -13994,7 +14538,7 @@
                           <a:ea typeface="Pretendard" pitchFamily="34" charset="-122"/>
                           <a:cs typeface="Pretendard" pitchFamily="34" charset="-120"/>
                         </a:rPr>
-                        <a:t>노출 </a:t>
+                        <a:t>15.00억 </a:t>
                       </a:r>
                       <a:pPr indent="0" marL="0">
                         <a:buNone/>
@@ -14008,49 +14552,7 @@
                           <a:ea typeface="Pretendard" pitchFamily="34" charset="-122"/>
                           <a:cs typeface="Pretendard" pitchFamily="34" charset="-120"/>
                         </a:rPr>
-                        <a:t>+ </a:t>
-                      </a:r>
-                      <a:pPr indent="0" marL="0">
-                        <a:buNone/>
-                      </a:pPr>
-                      <a:r>
-                        <a:rPr lang="en-US" sz="1050" dirty="0">
-                          <a:solidFill>
-                            <a:srgbClr val="10161F"/>
-                          </a:solidFill>
-                          <a:latin typeface="Pretendard" pitchFamily="34" charset="0"/>
-                          <a:ea typeface="Pretendard" pitchFamily="34" charset="-122"/>
-                          <a:cs typeface="Pretendard" pitchFamily="34" charset="-120"/>
-                        </a:rPr>
-                        <a:t>직영 </a:t>
-                      </a:r>
-                      <a:pPr indent="0" marL="0">
-                        <a:buNone/>
-                      </a:pPr>
-                      <a:r>
-                        <a:rPr lang="en-US" sz="1050" dirty="0">
-                          <a:solidFill>
-                            <a:srgbClr val="10161F"/>
-                          </a:solidFill>
-                          <a:latin typeface="Pretendard" pitchFamily="34" charset="0"/>
-                          <a:ea typeface="Pretendard" pitchFamily="34" charset="-122"/>
-                          <a:cs typeface="Pretendard" pitchFamily="34" charset="-120"/>
-                        </a:rPr>
-                        <a:t>운영 </a:t>
-                      </a:r>
-                      <a:pPr indent="0" marL="0">
-                        <a:buNone/>
-                      </a:pPr>
-                      <a:r>
-                        <a:rPr lang="en-US" sz="1050" dirty="0">
-                          <a:solidFill>
-                            <a:srgbClr val="10161F"/>
-                          </a:solidFill>
-                          <a:latin typeface="Pretendard" pitchFamily="34" charset="0"/>
-                          <a:ea typeface="Pretendard" pitchFamily="34" charset="-122"/>
-                          <a:cs typeface="Pretendard" pitchFamily="34" charset="-120"/>
-                        </a:rPr>
-                        <a:t>가능</a:t>
+                        <a:t>원</a:t>
                       </a:r>
                       <a:endParaRPr lang="en-US" sz="1050" dirty="0">
                         <a:latin typeface="Pretendard" charset="0"/>
@@ -14097,7 +14599,7 @@
                       <a:tailEnd type="none" w="med" len="med"/>
                     </a:lnB>
                     <a:solidFill>
-                      <a:srgbClr val="FFFFFF"/>
+                      <a:srgbClr val="F7FAFC"/>
                     </a:solidFill>
                   </a:tcPr>
                 </a:tc>
@@ -14108,13 +14610,13 @@
       </p:graphicFrame>
       <p:sp>
         <p:nvSpPr>
-          <p:cNvPr id="29" name="Shape 26"/>
-          <p:cNvSpPr/>
-          <p:nvPr/>
-        </p:nvSpPr>
-        <p:spPr>
-          <a:xfrm>
-            <a:off x="566928" y="5678424"/>
+          <p:cNvPr id="7" name="Shape 4"/>
+          <p:cNvSpPr/>
+          <p:nvPr/>
+        </p:nvSpPr>
+        <p:spPr>
+          <a:xfrm>
+            <a:off x="566928" y="5193792"/>
             <a:ext cx="11057839" cy="804672"/>
           </a:xfrm>
           <a:prstGeom prst="roundRect">
@@ -14135,13 +14637,13 @@
       </p:sp>
       <p:sp>
         <p:nvSpPr>
-          <p:cNvPr id="30" name="Text 27"/>
-          <p:cNvSpPr/>
-          <p:nvPr/>
-        </p:nvSpPr>
-        <p:spPr>
-          <a:xfrm>
-            <a:off x="749808" y="5788152"/>
+          <p:cNvPr id="8" name="Text 5"/>
+          <p:cNvSpPr/>
+          <p:nvPr/>
+        </p:nvSpPr>
+        <p:spPr>
+          <a:xfrm>
+            <a:off x="749808" y="5303520"/>
             <a:ext cx="1691640" cy="256032"/>
           </a:xfrm>
           <a:prstGeom prst="rect">
@@ -14174,13 +14676,13 @@
       </p:sp>
       <p:sp>
         <p:nvSpPr>
-          <p:cNvPr id="31" name="Text 28"/>
-          <p:cNvSpPr/>
-          <p:nvPr/>
-        </p:nvSpPr>
-        <p:spPr>
-          <a:xfrm>
-            <a:off x="2487168" y="5751576"/>
+          <p:cNvPr id="9" name="Text 6"/>
+          <p:cNvSpPr/>
+          <p:nvPr/>
+        </p:nvSpPr>
+        <p:spPr>
+          <a:xfrm>
+            <a:off x="2487168" y="5266944"/>
             <a:ext cx="8954719" cy="658368"/>
           </a:xfrm>
           <a:prstGeom prst="rect">
@@ -14208,7 +14710,7 @@
                 <a:ea typeface="Pretendard" pitchFamily="34" charset="-122"/>
                 <a:cs typeface="Pretendard" pitchFamily="34" charset="-120"/>
               </a:rPr>
-              <a:t>[참고] 종합 가치 제안: 서초권역 핵심 상권의 희소성 높은 우량 자산으로, 안정적인 임대 수익과 향후 공법상 밸류업 및 권역 지가 상승에 따른 자본 이득(Capital Gain)을 동시에 실현할 수 있는 전략적 매물입니다.</a:t>
+              <a:t>{"ok":true,"mocked":true,"extractedFields":{"area_signal":"역삼","asset_type":"오피스빌딩","price_band":"300억","size_signal":"3000평(약 9917.4㎡)"},"extractedFacts":{"region":"역삼","exactAddressCandidate":"역삼동 742-1","assetType":"오피스빌딩","priceText":"300억","sizeText":"3000평(약 9917.4㎡)","currentUse":"오피스","currentUseSignal":"근린생활시설","leaseSignal":"임대중","vacancySignal":"공실없음","tenantNames":["쿠팡","네이버"],"unitRentTexts":["301호: 1500만"],"sellerMotivationText":"자산 효율화","brokerNotes":["초역세권 매물"]},"detectedSensitiveFields":["exact_address","tenant_name"],"ambiguousFields":[],"warnings":[],"areaSignal":"역삼","assetType":"오피스빌딩","priceBand":"300억","sizeSignal":"3000평(약 9917.4㎡)","dealType":"매각","buildingName":"역삼 센트럴타워","exactAddress":"역삼동 742-1","totalFloorArea":9917.3,"buildYear":2015,"currentUseSignal":"근린생활시설","vacancySignal":"공실 없음","fitSummary":"초역세권 근생 빌딩으로 시행/사옥 매입에 최적화","cautionSummary":"주요 임차인 만기 조율 필요","hiddenFields":["exact_address","seller_motivation"],"confidence":{"areaSignal":"confirmed","assetType":"confirmed","priceBand":"ai_hypothesis","fitSummary":"ai_hypothesis"},"missingData":["sizeSignal"],"boundaryNote":"본 자료는 실거래 통계 기반 참고치입니다.","buyerType":"법인 사옥형","budgetRange":{"min":50,"max":80,"display":"50억~80억"},"preferredRegions":["강남","성수"],"assetTypes":["꼬마빌딩","사옥용"],"purchasePurpose":"사옥용 매입","mustHave":["초역세권","주차"],"niceToHave":["테라스","루프탑"],"riskTolerance":"medium","financingNote":"자본금 50% 준비","missingQuestions":["구체적인 입주 시기가 언제인가요?","선호하는 수익률이 있나요?"],"privacyNotes":["연락처 비공개"],"fitReasons":["매수자 예산(50-80억)에 부합하는 매물입니다.","요청하신 성수/강남 권역에 해당합니다."],"cautionReasons":["요청한 용도와 달리 명도 협의가 다소 필요합니다."],"recommendedNextAction":"현장 답사 제안","kakaoMessage":"안녕하세요! 요청하신 조건에 부합하는 추천 매물이 있어 안내해 드립니다. 확인해보시고 피드백 부탁드립니다.","title":"강남 역삼역 초역세권 오피스 사옥용 빌딩 매각","shortSummary":"역삼역 도보 5분 거리의 준신축급 대형 오피스빌딩입니다.","dealPoints":["초역세권","사옥 최적"],"cautionPoints":["명도 조율 필요"],"hiddenInfoNotice":["보증금 및 지번은 인가 후 확인 가능"],"gateMessage":"G1 등급 등록이 필요합니다.","kakaoText":"강남 역삼역 오피스 빌딩 매각 안내입니다.","exactUnitCandidate":"101호","floor":"1층","areaSqmText":"150㎡","spaceType":"office","depositText":"5000만","monthlyRentText":"400만","maintenanceFeeText":"50만","availableFromText":"즉시입주","leaseTermMonthsText":"24","incentivesText":"렌트프리 2개월","restrictions":[],"landlordIdentity":"김성수","currentTenant":"스타트업","vacancyReason":"이전 확장","rentNegotiation":"협의 가능","region":"성수동","areaSqm":150,"deposit":5000,"monthlyRent":400,"maintenanceFee":50,"availableFrom":"즉시입주","leaseTermMonths":24,"incentives":{"rentFreeMonths":2,"interiorSupport":"일부 인테리어 지원","freeRentDetail":"렌트프리 2개월 지원"},"shortSummaryLease":"성수역 도보 5분 거리 1층 리테일 상가 매물입니다."} ### 밸류업 시나리오 (AI 추정)</a:t>
             </a:r>
             <a:endParaRPr lang="en-US" sz="1100" dirty="0"/>
           </a:p>
@@ -14216,7 +14718,7 @@
       </p:sp>
       <p:sp>
         <p:nvSpPr>
-          <p:cNvPr id="32" name="Text 29"/>
+          <p:cNvPr id="10" name="Text 7"/>
           <p:cNvSpPr/>
           <p:nvPr/>
         </p:nvSpPr>
@@ -14255,7 +14757,7 @@
       </p:sp>
       <p:sp>
         <p:nvSpPr>
-          <p:cNvPr id="33" name="Text 30"/>
+          <p:cNvPr id="11" name="Text 8"/>
           <p:cNvSpPr/>
           <p:nvPr/>
         </p:nvSpPr>
@@ -14470,11 +14972,11 @@
         <p:spPr>
           <a:xfrm>
             <a:off x="566928" y="1572768"/>
-            <a:ext cx="2490140" cy="3200400"/>
+            <a:ext cx="11057839" cy="3200400"/>
           </a:xfrm>
           <a:prstGeom prst="roundRect">
             <a:avLst>
-              <a:gd name="adj" fmla="val 2203"/>
+              <a:gd name="adj" fmla="val 1714"/>
             </a:avLst>
           </a:prstGeom>
           <a:solidFill>
@@ -14497,7 +14999,7 @@
         <p:spPr>
           <a:xfrm>
             <a:off x="786384" y="1792224"/>
-            <a:ext cx="384048" cy="384048"/>
+            <a:ext cx="438912" cy="438912"/>
           </a:xfrm>
           <a:prstGeom prst="ellipse">
             <a:avLst/>
@@ -14517,7 +15019,7 @@
         <p:spPr>
           <a:xfrm>
             <a:off x="786384" y="1792224"/>
-            <a:ext cx="384048" cy="384048"/>
+            <a:ext cx="438912" cy="438912"/>
           </a:xfrm>
           <a:prstGeom prst="rect">
             <a:avLst/>
@@ -14533,7 +15035,7 @@
               <a:buNone/>
             </a:pPr>
             <a:r>
-              <a:rPr lang="en-US" sz="1300" b="1" dirty="0">
+              <a:rPr lang="en-US" sz="1400" b="1" dirty="0">
                 <a:solidFill>
                   <a:srgbClr val="FFFFFF"/>
                 </a:solidFill>
@@ -14541,9 +15043,9 @@
                 <a:ea typeface="Arial" pitchFamily="34" charset="-122"/>
                 <a:cs typeface="Arial" pitchFamily="34" charset="-120"/>
               </a:rPr>
-              <a:t>STEP 1</a:t>
+              <a:t>01</a:t>
             </a:r>
-            <a:endParaRPr lang="en-US" sz="1300" dirty="0"/>
+            <a:endParaRPr lang="en-US" sz="1400" dirty="0"/>
           </a:p>
         </p:txBody>
       </p:sp>
@@ -14556,7 +15058,7 @@
         <p:spPr>
           <a:xfrm>
             <a:off x="786384" y="2304288"/>
-            <a:ext cx="2051228" cy="365760"/>
+            <a:ext cx="10618927" cy="365760"/>
           </a:xfrm>
           <a:prstGeom prst="rect">
             <a:avLst/>
@@ -14580,7 +15082,7 @@
                 <a:ea typeface="Pretendard" pitchFamily="34" charset="-122"/>
                 <a:cs typeface="Pretendard" pitchFamily="34" charset="-120"/>
               </a:rPr>
-              <a:t>초기 관심 표명 → 담당자 연락</a:t>
+              <a:t>1단계</a:t>
             </a:r>
             <a:endParaRPr lang="en-US" sz="1600" dirty="0"/>
           </a:p>
@@ -14595,7 +15097,7 @@
         <p:spPr>
           <a:xfrm>
             <a:off x="786384" y="2761488"/>
-            <a:ext cx="2051228" cy="1828800"/>
+            <a:ext cx="10618927" cy="1828800"/>
           </a:xfrm>
           <a:prstGeom prst="rect">
             <a:avLst/>
@@ -14605,152 +15107,13 @@
         </p:spPr>
         <p:txBody>
           <a:bodyPr wrap="square" rtlCol="0" anchor="t"/>
-          <a:lstStyle/>
-          <a:p>
-            <a:pPr indent="0" marL="0">
-              <a:buNone/>
-            </a:pPr>
-            <a:endParaRPr lang="en-US" sz="1100" dirty="0"/>
-          </a:p>
-        </p:txBody>
-      </p:sp>
-      <p:sp>
-        <p:nvSpPr>
-          <p:cNvPr id="11" name="Shape 9"/>
-          <p:cNvSpPr/>
-          <p:nvPr/>
-        </p:nvSpPr>
-        <p:spPr>
-          <a:xfrm>
-            <a:off x="3148508" y="3035808"/>
-            <a:ext cx="182880" cy="274320"/>
-          </a:xfrm>
-          <a:prstGeom prst="rightArrow">
-            <a:avLst/>
-          </a:prstGeom>
-          <a:solidFill>
-            <a:srgbClr val="CBD5E0"/>
-          </a:solidFill>
-          <a:ln w="6350">
-            <a:solidFill>
-              <a:srgbClr val="718096"/>
-            </a:solidFill>
-            <a:prstDash val="solid"/>
-          </a:ln>
-        </p:spPr>
-      </p:sp>
-      <p:sp>
-        <p:nvSpPr>
-          <p:cNvPr id="12" name="Shape 10"/>
-          <p:cNvSpPr/>
-          <p:nvPr/>
-        </p:nvSpPr>
-        <p:spPr>
-          <a:xfrm>
-            <a:off x="3422828" y="1572768"/>
-            <a:ext cx="2490140" cy="3200400"/>
-          </a:xfrm>
-          <a:prstGeom prst="roundRect">
-            <a:avLst>
-              <a:gd name="adj" fmla="val 2203"/>
-            </a:avLst>
-          </a:prstGeom>
-          <a:solidFill>
-            <a:srgbClr val="F7FAFC"/>
-          </a:solidFill>
-          <a:ln w="6350">
-            <a:solidFill>
-              <a:srgbClr val="CBD5E0"/>
-            </a:solidFill>
-            <a:prstDash val="solid"/>
-          </a:ln>
-        </p:spPr>
-      </p:sp>
-      <p:sp>
-        <p:nvSpPr>
-          <p:cNvPr id="13" name="Shape 11"/>
-          <p:cNvSpPr/>
-          <p:nvPr/>
-        </p:nvSpPr>
-        <p:spPr>
-          <a:xfrm>
-            <a:off x="3642284" y="1792224"/>
-            <a:ext cx="384048" cy="384048"/>
-          </a:xfrm>
-          <a:prstGeom prst="ellipse">
-            <a:avLst/>
-          </a:prstGeom>
-          <a:solidFill>
-            <a:srgbClr val="B98A2E"/>
-          </a:solidFill>
-          <a:ln/>
-        </p:spPr>
-      </p:sp>
-      <p:sp>
-        <p:nvSpPr>
-          <p:cNvPr id="14" name="Text 12"/>
-          <p:cNvSpPr/>
-          <p:nvPr/>
-        </p:nvSpPr>
-        <p:spPr>
-          <a:xfrm>
-            <a:off x="3642284" y="1792224"/>
-            <a:ext cx="384048" cy="384048"/>
-          </a:xfrm>
-          <a:prstGeom prst="rect">
-            <a:avLst/>
-          </a:prstGeom>
-          <a:noFill/>
-          <a:ln/>
-        </p:spPr>
-        <p:txBody>
-          <a:bodyPr wrap="square" lIns="0" tIns="0" rIns="0" bIns="0" rtlCol="0" anchor="ctr"/>
-          <a:lstStyle/>
-          <a:p>
-            <a:pPr algn="ctr" indent="0" marL="0">
-              <a:buNone/>
-            </a:pPr>
-            <a:r>
-              <a:rPr lang="en-US" sz="1300" b="1" dirty="0">
-                <a:solidFill>
-                  <a:srgbClr val="FFFFFF"/>
-                </a:solidFill>
-                <a:latin typeface="Arial" pitchFamily="34" charset="0"/>
-                <a:ea typeface="Arial" pitchFamily="34" charset="-122"/>
-                <a:cs typeface="Arial" pitchFamily="34" charset="-120"/>
-              </a:rPr>
-              <a:t>STEP 2</a:t>
-            </a:r>
-            <a:endParaRPr lang="en-US" sz="1300" dirty="0"/>
-          </a:p>
-        </p:txBody>
-      </p:sp>
-      <p:sp>
-        <p:nvSpPr>
-          <p:cNvPr id="15" name="Text 13"/>
-          <p:cNvSpPr/>
-          <p:nvPr/>
-        </p:nvSpPr>
-        <p:spPr>
-          <a:xfrm>
-            <a:off x="3642284" y="2304288"/>
-            <a:ext cx="2051228" cy="365760"/>
-          </a:xfrm>
-          <a:prstGeom prst="rect">
-            <a:avLst/>
-          </a:prstGeom>
-          <a:noFill/>
-          <a:ln/>
-        </p:spPr>
-        <p:txBody>
-          <a:bodyPr wrap="square" rtlCol="0" anchor="ctr"/>
           <a:lstStyle/>
           <a:p>
             <a:pPr indent="0" marL="0">
               <a:buNone/>
             </a:pPr>
             <a:r>
-              <a:rPr lang="en-US" sz="1600" b="1" dirty="0">
+              <a:rPr lang="en-US" sz="1100" dirty="0">
                 <a:solidFill>
                   <a:srgbClr val="10161F"/>
                 </a:solidFill>
@@ -14758,177 +15121,16 @@
                 <a:ea typeface="Pretendard" pitchFamily="34" charset="-122"/>
                 <a:cs typeface="Pretendard" pitchFamily="34" charset="-120"/>
               </a:rPr>
-              <a:t>NDA 체결 → 임차인 정보 및 임대차계약서 제공</a:t>
+              <a:t>{"ok"</a:t>
             </a:r>
-            <a:endParaRPr lang="en-US" sz="1600" dirty="0"/>
-          </a:p>
-        </p:txBody>
-      </p:sp>
-      <p:sp>
-        <p:nvSpPr>
-          <p:cNvPr id="16" name="Text 14"/>
-          <p:cNvSpPr/>
-          <p:nvPr/>
-        </p:nvSpPr>
-        <p:spPr>
-          <a:xfrm>
-            <a:off x="3642284" y="2761488"/>
-            <a:ext cx="2051228" cy="1828800"/>
-          </a:xfrm>
-          <a:prstGeom prst="rect">
-            <a:avLst/>
-          </a:prstGeom>
-          <a:noFill/>
-          <a:ln/>
-        </p:spPr>
-        <p:txBody>
-          <a:bodyPr wrap="square" rtlCol="0" anchor="t"/>
-          <a:lstStyle/>
-          <a:p>
-            <a:pPr indent="0" marL="0">
-              <a:buNone/>
-            </a:pPr>
             <a:endParaRPr lang="en-US" sz="1100" dirty="0"/>
           </a:p>
-        </p:txBody>
-      </p:sp>
-      <p:sp>
-        <p:nvSpPr>
-          <p:cNvPr id="17" name="Shape 15"/>
-          <p:cNvSpPr/>
-          <p:nvPr/>
-        </p:nvSpPr>
-        <p:spPr>
-          <a:xfrm>
-            <a:off x="6004408" y="3035808"/>
-            <a:ext cx="182880" cy="274320"/>
-          </a:xfrm>
-          <a:prstGeom prst="rightArrow">
-            <a:avLst/>
-          </a:prstGeom>
-          <a:solidFill>
-            <a:srgbClr val="CBD5E0"/>
-          </a:solidFill>
-          <a:ln w="6350">
-            <a:solidFill>
-              <a:srgbClr val="718096"/>
-            </a:solidFill>
-            <a:prstDash val="solid"/>
-          </a:ln>
-        </p:spPr>
-      </p:sp>
-      <p:sp>
-        <p:nvSpPr>
-          <p:cNvPr id="18" name="Shape 16"/>
-          <p:cNvSpPr/>
-          <p:nvPr/>
-        </p:nvSpPr>
-        <p:spPr>
-          <a:xfrm>
-            <a:off x="6278728" y="1572768"/>
-            <a:ext cx="2490140" cy="3200400"/>
-          </a:xfrm>
-          <a:prstGeom prst="roundRect">
-            <a:avLst>
-              <a:gd name="adj" fmla="val 2203"/>
-            </a:avLst>
-          </a:prstGeom>
-          <a:solidFill>
-            <a:srgbClr val="F7FAFC"/>
-          </a:solidFill>
-          <a:ln w="6350">
-            <a:solidFill>
-              <a:srgbClr val="CBD5E0"/>
-            </a:solidFill>
-            <a:prstDash val="solid"/>
-          </a:ln>
-        </p:spPr>
-      </p:sp>
-      <p:sp>
-        <p:nvSpPr>
-          <p:cNvPr id="19" name="Shape 17"/>
-          <p:cNvSpPr/>
-          <p:nvPr/>
-        </p:nvSpPr>
-        <p:spPr>
-          <a:xfrm>
-            <a:off x="6498184" y="1792224"/>
-            <a:ext cx="384048" cy="384048"/>
-          </a:xfrm>
-          <a:prstGeom prst="ellipse">
-            <a:avLst/>
-          </a:prstGeom>
-          <a:solidFill>
-            <a:srgbClr val="B98A2E"/>
-          </a:solidFill>
-          <a:ln/>
-        </p:spPr>
-      </p:sp>
-      <p:sp>
-        <p:nvSpPr>
-          <p:cNvPr id="20" name="Text 18"/>
-          <p:cNvSpPr/>
-          <p:nvPr/>
-        </p:nvSpPr>
-        <p:spPr>
-          <a:xfrm>
-            <a:off x="6498184" y="1792224"/>
-            <a:ext cx="384048" cy="384048"/>
-          </a:xfrm>
-          <a:prstGeom prst="rect">
-            <a:avLst/>
-          </a:prstGeom>
-          <a:noFill/>
-          <a:ln/>
-        </p:spPr>
-        <p:txBody>
-          <a:bodyPr wrap="square" lIns="0" tIns="0" rIns="0" bIns="0" rtlCol="0" anchor="ctr"/>
-          <a:lstStyle/>
-          <a:p>
-            <a:pPr algn="ctr" indent="0" marL="0">
-              <a:buNone/>
-            </a:pPr>
-            <a:r>
-              <a:rPr lang="en-US" sz="1300" b="1" dirty="0">
-                <a:solidFill>
-                  <a:srgbClr val="FFFFFF"/>
-                </a:solidFill>
-                <a:latin typeface="Arial" pitchFamily="34" charset="0"/>
-                <a:ea typeface="Arial" pitchFamily="34" charset="-122"/>
-                <a:cs typeface="Arial" pitchFamily="34" charset="-120"/>
-              </a:rPr>
-              <a:t>STEP 3</a:t>
-            </a:r>
-            <a:endParaRPr lang="en-US" sz="1300" dirty="0"/>
-          </a:p>
-        </p:txBody>
-      </p:sp>
-      <p:sp>
-        <p:nvSpPr>
-          <p:cNvPr id="21" name="Text 19"/>
-          <p:cNvSpPr/>
-          <p:nvPr/>
-        </p:nvSpPr>
-        <p:spPr>
-          <a:xfrm>
-            <a:off x="6498184" y="2304288"/>
-            <a:ext cx="2051228" cy="365760"/>
-          </a:xfrm>
-          <a:prstGeom prst="rect">
-            <a:avLst/>
-          </a:prstGeom>
-          <a:noFill/>
-          <a:ln/>
-        </p:spPr>
-        <p:txBody>
-          <a:bodyPr wrap="square" rtlCol="0" anchor="ctr"/>
-          <a:lstStyle/>
           <a:p>
             <a:pPr indent="0" marL="0">
               <a:buNone/>
             </a:pPr>
             <a:r>
-              <a:rPr lang="en-US" sz="1600" b="1" dirty="0">
+              <a:rPr lang="en-US" sz="1100" dirty="0">
                 <a:solidFill>
                   <a:srgbClr val="10161F"/>
                 </a:solidFill>
@@ -14936,221 +15138,15 @@
                 <a:ea typeface="Pretendard" pitchFamily="34" charset="-122"/>
                 <a:cs typeface="Pretendard" pitchFamily="34" charset="-120"/>
               </a:rPr>
-              <a:t>현장 실사 일정 조율 → 건물 컨디션 및 설비 직접 확인</a:t>
+              <a:t>true,"mocked":true,"extractedFields":{"area_signal":"역삼","asset_type":"오피스빌딩","price_band":"300억","size_signal":"3000평(약 9917.4㎡)"},"extractedFacts":{"region":"역삼","exactAddressCandidate":"역삼동 742-1","assetType":"오피스빌딩","priceText":"300억","sizeText":"3000평(약 9917.4㎡)","currentUse":"오피스","currentUseSignal":"근린생활시설","leaseSignal":"임대중","vacancySignal":"공실없음","tenantNames":["쿠팡","네이버"],"unitRentTexts":["301호: 1500만"],"sellerMotivationText":"자산 효율화","brokerNotes":["초역세권 매물"]},"detectedSensitiveFields":["exact_address","tenant_name"],"ambiguousFields":[],"warnings":[],"areaSignal":"역삼","assetType":"오피스빌딩","priceBand":"300억","sizeSignal":"3000평(약 9917.4㎡)","dealType":"매각","buildingName":"역삼 센트럴타워","exactAddress":"역삼동 742-1","totalFloorArea":9917.3,"buildYear":2015,"currentUseSignal":"근린생활시설","vacancySignal":"공실 없음","fitSummary":"초역세권 근생 빌딩으로 시행/사옥 매입에 최적화","cautionSummary":"주요 임차인 만기 조율 필요","hiddenFields":["exact_address","seller_motivation"],"confidence":{"areaSignal":"confirmed","assetType":"confirmed","priceBand":"ai_hypothesis","fitSummary":"ai_hypothesis"},"missingData":["sizeSignal"],"boundaryNote":"본 자료는 실거래 통계 기반 참고치입니다.","buyerType":"법인 사옥형","budgetRange":{"min":50,"max":80,"display":"50억~80억"},"preferredRegions":["강남","성수"],"assetTypes":["꼬마빌딩","사옥용"],"purchasePurpose":"사옥용 매입","mustHave":["초역세권","주차"],"niceToHave":["테라스","루프탑"],"riskTolerance":"medium","financingNote":"자본금 50% 준비","missingQuestions":["구체적인 입주 시기가 언제인가요?","선호하는 수익률이 있나요?"],"privacyNotes":["연락처 비공개"],"fitReasons":["매수자 예산(50-80억)에 부합하는 매물입니다.","요청하신 성수/강남 권역에 해당합니다."],"cautionReasons":["요청한 용도와 달리 명도 협의가 다소 필요합니다."],"recommendedNextAction":"현장 답사 제안","kakaoMessage":"안녕하세요! 요청하신 조건에 부합하는 추천 매물이 있어 안내해 드립니다. 확인해보시고 피드백 부탁드립니다.","title":"강남 역삼역 초역세권 오피스 사옥용 빌딩 매각","shortSummary":"역삼역 도보 5분 거리의 준신축급 대형 오피스빌딩입니다.","dealPoints":["초역세권","사옥 최적"],"cautionPoints":["명도 조율 필요"],"hiddenInfoNotice":["보증금 및 지번은 인가 후 확인 가능"],"gateMessage":"G1 등급 등록이 필요합니다.","kakaoText":"강남 역삼역 오피스 빌딩 매각 안내입니다.","exactUnitCandidate":"101호","floor":"1층","areaSqmText":"150㎡","spaceType":"office","depositText":"5000만","monthlyRentText":"400만","maintenanceFeeText":"50만","availableFromText":"즉시입주","leaseTermMonthsText":"24","incentivesText":"렌트프리 2개월","restrictions":[],"landlordIdentity":"김성수","currentTenant":"스타트업","vacancyReason":"이전 확장","rentNegotiation":"협의 가능","region":"성수동","areaSqm":150,"deposit":5000,"monthlyRent":400,"maintenanceFee":50,"availableFrom":"즉시입주","leaseTermMonths":24,"incentives":{"rentFreeMonths":2,"interiorSupport":"일부 인테리어 지원","freeRentDetail":"렌트프리 2개월 지원"},"shortSummaryLease":"성수역 도보 5분 거리 1층 리테일 상가 매물입니다."}</a:t>
             </a:r>
-            <a:endParaRPr lang="en-US" sz="1600" dirty="0"/>
-          </a:p>
-        </p:txBody>
-      </p:sp>
-      <p:sp>
-        <p:nvSpPr>
-          <p:cNvPr id="22" name="Text 20"/>
-          <p:cNvSpPr/>
-          <p:nvPr/>
-        </p:nvSpPr>
-        <p:spPr>
-          <a:xfrm>
-            <a:off x="6498184" y="2761488"/>
-            <a:ext cx="2051228" cy="1828800"/>
-          </a:xfrm>
-          <a:prstGeom prst="rect">
-            <a:avLst/>
-          </a:prstGeom>
-          <a:noFill/>
-          <a:ln/>
-        </p:spPr>
-        <p:txBody>
-          <a:bodyPr wrap="square" rtlCol="0" anchor="t"/>
-          <a:lstStyle/>
-          <a:p>
-            <a:pPr indent="0" marL="0">
-              <a:buNone/>
-            </a:pPr>
             <a:endParaRPr lang="en-US" sz="1100" dirty="0"/>
           </a:p>
         </p:txBody>
       </p:sp>
       <p:sp>
         <p:nvSpPr>
-          <p:cNvPr id="23" name="Shape 21"/>
-          <p:cNvSpPr/>
-          <p:nvPr/>
-        </p:nvSpPr>
-        <p:spPr>
-          <a:xfrm>
-            <a:off x="8860307" y="3035808"/>
-            <a:ext cx="182880" cy="274320"/>
-          </a:xfrm>
-          <a:prstGeom prst="rightArrow">
-            <a:avLst/>
-          </a:prstGeom>
-          <a:solidFill>
-            <a:srgbClr val="CBD5E0"/>
-          </a:solidFill>
-          <a:ln w="6350">
-            <a:solidFill>
-              <a:srgbClr val="718096"/>
-            </a:solidFill>
-            <a:prstDash val="solid"/>
-          </a:ln>
-        </p:spPr>
-      </p:sp>
-      <p:sp>
-        <p:nvSpPr>
-          <p:cNvPr id="24" name="Shape 22"/>
-          <p:cNvSpPr/>
-          <p:nvPr/>
-        </p:nvSpPr>
-        <p:spPr>
-          <a:xfrm>
-            <a:off x="9134627" y="1572768"/>
-            <a:ext cx="2490140" cy="3200400"/>
-          </a:xfrm>
-          <a:prstGeom prst="roundRect">
-            <a:avLst>
-              <a:gd name="adj" fmla="val 2203"/>
-            </a:avLst>
-          </a:prstGeom>
-          <a:solidFill>
-            <a:srgbClr val="F7FAFC"/>
-          </a:solidFill>
-          <a:ln w="6350">
-            <a:solidFill>
-              <a:srgbClr val="CBD5E0"/>
-            </a:solidFill>
-            <a:prstDash val="solid"/>
-          </a:ln>
-        </p:spPr>
-      </p:sp>
-      <p:sp>
-        <p:nvSpPr>
-          <p:cNvPr id="25" name="Shape 23"/>
-          <p:cNvSpPr/>
-          <p:nvPr/>
-        </p:nvSpPr>
-        <p:spPr>
-          <a:xfrm>
-            <a:off x="9354083" y="1792224"/>
-            <a:ext cx="384048" cy="384048"/>
-          </a:xfrm>
-          <a:prstGeom prst="ellipse">
-            <a:avLst/>
-          </a:prstGeom>
-          <a:solidFill>
-            <a:srgbClr val="B98A2E"/>
-          </a:solidFill>
-          <a:ln/>
-        </p:spPr>
-      </p:sp>
-      <p:sp>
-        <p:nvSpPr>
-          <p:cNvPr id="26" name="Text 24"/>
-          <p:cNvSpPr/>
-          <p:nvPr/>
-        </p:nvSpPr>
-        <p:spPr>
-          <a:xfrm>
-            <a:off x="9354083" y="1792224"/>
-            <a:ext cx="384048" cy="384048"/>
-          </a:xfrm>
-          <a:prstGeom prst="rect">
-            <a:avLst/>
-          </a:prstGeom>
-          <a:noFill/>
-          <a:ln/>
-        </p:spPr>
-        <p:txBody>
-          <a:bodyPr wrap="square" lIns="0" tIns="0" rIns="0" bIns="0" rtlCol="0" anchor="ctr"/>
-          <a:lstStyle/>
-          <a:p>
-            <a:pPr algn="ctr" indent="0" marL="0">
-              <a:buNone/>
-            </a:pPr>
-            <a:r>
-              <a:rPr lang="en-US" sz="1300" b="1" dirty="0">
-                <a:solidFill>
-                  <a:srgbClr val="FFFFFF"/>
-                </a:solidFill>
-                <a:latin typeface="Arial" pitchFamily="34" charset="0"/>
-                <a:ea typeface="Arial" pitchFamily="34" charset="-122"/>
-                <a:cs typeface="Arial" pitchFamily="34" charset="-120"/>
-              </a:rPr>
-              <a:t>STEP 4</a:t>
-            </a:r>
-            <a:endParaRPr lang="en-US" sz="1300" dirty="0"/>
-          </a:p>
-        </p:txBody>
-      </p:sp>
-      <p:sp>
-        <p:nvSpPr>
-          <p:cNvPr id="27" name="Text 25"/>
-          <p:cNvSpPr/>
-          <p:nvPr/>
-        </p:nvSpPr>
-        <p:spPr>
-          <a:xfrm>
-            <a:off x="9354083" y="2304288"/>
-            <a:ext cx="2051228" cy="365760"/>
-          </a:xfrm>
-          <a:prstGeom prst="rect">
-            <a:avLst/>
-          </a:prstGeom>
-          <a:noFill/>
-          <a:ln/>
-        </p:spPr>
-        <p:txBody>
-          <a:bodyPr wrap="square" rtlCol="0" anchor="ctr"/>
-          <a:lstStyle/>
-          <a:p>
-            <a:pPr indent="0" marL="0">
-              <a:buNone/>
-            </a:pPr>
-            <a:r>
-              <a:rPr lang="en-US" sz="1600" b="1" dirty="0">
-                <a:solidFill>
-                  <a:srgbClr val="10161F"/>
-                </a:solidFill>
-                <a:latin typeface="Pretendard" pitchFamily="34" charset="0"/>
-                <a:ea typeface="Pretendard" pitchFamily="34" charset="-122"/>
-                <a:cs typeface="Pretendard" pitchFamily="34" charset="-120"/>
-              </a:rPr>
-              <a:t>LOI(투자의향서) 제출 → 가격 협의 개시</a:t>
-            </a:r>
-            <a:endParaRPr lang="en-US" sz="1600" dirty="0"/>
-          </a:p>
-        </p:txBody>
-      </p:sp>
-      <p:sp>
-        <p:nvSpPr>
-          <p:cNvPr id="28" name="Text 26"/>
-          <p:cNvSpPr/>
-          <p:nvPr/>
-        </p:nvSpPr>
-        <p:spPr>
-          <a:xfrm>
-            <a:off x="9354083" y="2761488"/>
-            <a:ext cx="2051228" cy="1828800"/>
-          </a:xfrm>
-          <a:prstGeom prst="rect">
-            <a:avLst/>
-          </a:prstGeom>
-          <a:noFill/>
-          <a:ln/>
-        </p:spPr>
-        <p:txBody>
-          <a:bodyPr wrap="square" rtlCol="0" anchor="t"/>
-          <a:lstStyle/>
-          <a:p>
-            <a:pPr indent="0" marL="0">
-              <a:buNone/>
-            </a:pPr>
-            <a:endParaRPr lang="en-US" sz="1100" dirty="0"/>
-          </a:p>
-        </p:txBody>
-      </p:sp>
-      <p:sp>
-        <p:nvSpPr>
-          <p:cNvPr id="29" name="Text 27"/>
+          <p:cNvPr id="11" name="Text 9"/>
           <p:cNvSpPr/>
           <p:nvPr/>
         </p:nvSpPr>
@@ -15189,7 +15185,7 @@
       </p:sp>
       <p:sp>
         <p:nvSpPr>
-          <p:cNvPr id="30" name="Text 28"/>
+          <p:cNvPr id="12" name="Text 10"/>
           <p:cNvSpPr/>
           <p:nvPr/>
         </p:nvSpPr>

--- a/docs/test/stress/e2e-outputs/income_case01_seocho_medical_basic.pptx
+++ b/docs/test/stress/e2e-outputs/income_case01_seocho_medical_basic.pptx
@@ -15,9 +15,10 @@
     <p:sldId id="263" r:id="rId9"/>
     <p:sldId id="264" r:id="rId10"/>
     <p:sldId id="265" r:id="rId11"/>
+    <p:sldId id="266" r:id="rId12"/>
   </p:sldIdLst>
   <p:notesMasterIdLst>
-    <p:notesMasterId r:id="rId12"/>
+    <p:notesMasterId r:id="rId13"/>
   </p:notesMasterIdLst>
   <p:sldSz cx="12192000" cy="6858000"/>
   <p:notesSz cx="6858000" cy="12192000"/>
@@ -623,6 +624,94 @@
             <a:fld id="{F7021451-1387-4CA6-816F-3879F97B5CBC}" type="slidenum">
               <a:rPr lang="en-US"/>
               <a:t>10</a:t>
+            </a:fld>
+            <a:endParaRPr lang="en-US"/>
+          </a:p>
+        </p:txBody>
+      </p:sp>
+    </p:spTree>
+    <p:extLst>
+      <p:ext uri="{BB962C8B-B14F-4D97-AF65-F5344CB8AC3E}">
+        <p14:creationId xmlns:p14="http://schemas.microsoft.com/office/powerpoint/2010/main" val="1024086991"/>
+      </p:ext>
+    </p:extLst>
+  </p:cSld>
+  <p:clrMapOvr>
+    <a:masterClrMapping/>
+  </p:clrMapOvr>
+</p:notes>
+</file>
+
+<file path=ppt/notesSlides/notesSlide11.xml><?xml version="1.0" encoding="utf-8"?>
+<p:notes xmlns:a="http://schemas.openxmlformats.org/drawingml/2006/main" xmlns:r="http://schemas.openxmlformats.org/officeDocument/2006/relationships" xmlns:p="http://schemas.openxmlformats.org/presentationml/2006/main">
+  <p:cSld>
+    <p:spTree>
+      <p:nvGrpSpPr>
+        <p:cNvPr id="1" name=""/>
+        <p:cNvGrpSpPr/>
+        <p:nvPr/>
+      </p:nvGrpSpPr>
+      <p:grpSpPr>
+        <a:xfrm>
+          <a:off x="0" y="0"/>
+          <a:ext cx="0" cy="0"/>
+          <a:chOff x="0" y="0"/>
+          <a:chExt cx="0" cy="0"/>
+        </a:xfrm>
+      </p:grpSpPr>
+      <p:sp>
+        <p:nvSpPr>
+          <p:cNvPr id="2" name="Slide Image Placeholder 1"/>
+          <p:cNvSpPr>
+            <a:spLocks noGrp="1" noRot="1" noChangeAspect="1"/>
+          </p:cNvSpPr>
+          <p:nvPr>
+            <p:ph type="sldImg"/>
+          </p:nvPr>
+        </p:nvSpPr>
+        <p:spPr/>
+      </p:sp>
+      <p:sp>
+        <p:nvSpPr>
+          <p:cNvPr id="3" name="Notes Placeholder 2"/>
+          <p:cNvSpPr>
+            <a:spLocks noGrp="1"/>
+          </p:cNvSpPr>
+          <p:nvPr>
+            <p:ph type="body" idx="1"/>
+          </p:nvPr>
+        </p:nvSpPr>
+        <p:spPr/>
+        <p:txBody>
+          <a:bodyPr/>
+          <a:lstStyle/>
+          <a:p>
+            <a:r>
+              <a:rPr lang="en-US" dirty="0"/>
+              <a:t/>
+            </a:r>
+            <a:endParaRPr lang="en-US" dirty="0"/>
+          </a:p>
+        </p:txBody>
+      </p:sp>
+      <p:sp>
+        <p:nvSpPr>
+          <p:cNvPr id="4" name="Slide Number Placeholder 3"/>
+          <p:cNvSpPr>
+            <a:spLocks noGrp="1"/>
+          </p:cNvSpPr>
+          <p:nvPr>
+            <p:ph type="sldNum" sz="quarter" idx="10"/>
+          </p:nvPr>
+        </p:nvSpPr>
+        <p:spPr/>
+        <p:txBody>
+          <a:bodyPr/>
+          <a:lstStyle/>
+          <a:p>
+            <a:fld id="{F7021451-1387-4CA6-816F-3879F97B5CBC}" type="slidenum">
+              <a:rPr lang="en-US"/>
+              <a:t>11</a:t>
             </a:fld>
             <a:endParaRPr lang="en-US"/>
           </a:p>
@@ -2297,6 +2386,434 @@
     <p:bg>
       <p:bgPr>
         <a:solidFill>
+          <a:srgbClr val="FFFFFF"/>
+        </a:solidFill>
+      </p:bgPr>
+    </p:bg>
+    <p:spTree>
+      <p:nvGrpSpPr>
+        <p:cNvPr id="1" name=""/>
+        <p:cNvGrpSpPr/>
+        <p:nvPr/>
+      </p:nvGrpSpPr>
+      <p:grpSpPr>
+        <a:xfrm>
+          <a:off x="0" y="0"/>
+          <a:ext cx="0" cy="0"/>
+          <a:chOff x="0" y="0"/>
+          <a:chExt cx="0" cy="0"/>
+        </a:xfrm>
+      </p:grpSpPr>
+      <p:sp>
+        <p:nvSpPr>
+          <p:cNvPr id="2" name="Shape 0"/>
+          <p:cNvSpPr/>
+          <p:nvPr/>
+        </p:nvSpPr>
+        <p:spPr>
+          <a:xfrm>
+            <a:off x="566928" y="457200"/>
+            <a:ext cx="384048" cy="384048"/>
+          </a:xfrm>
+          <a:prstGeom prst="ellipse">
+            <a:avLst/>
+          </a:prstGeom>
+          <a:solidFill>
+            <a:srgbClr val="B98A2E"/>
+          </a:solidFill>
+          <a:ln/>
+        </p:spPr>
+      </p:sp>
+      <p:sp>
+        <p:nvSpPr>
+          <p:cNvPr id="3" name="Text 1"/>
+          <p:cNvSpPr/>
+          <p:nvPr/>
+        </p:nvSpPr>
+        <p:spPr>
+          <a:xfrm>
+            <a:off x="566928" y="457200"/>
+            <a:ext cx="384048" cy="384048"/>
+          </a:xfrm>
+          <a:prstGeom prst="rect">
+            <a:avLst/>
+          </a:prstGeom>
+          <a:noFill/>
+          <a:ln/>
+        </p:spPr>
+        <p:txBody>
+          <a:bodyPr wrap="square" lIns="0" tIns="0" rIns="0" bIns="0" rtlCol="0" anchor="ctr"/>
+          <a:lstStyle/>
+          <a:p>
+            <a:pPr algn="ctr" indent="0" marL="0">
+              <a:buNone/>
+            </a:pPr>
+            <a:r>
+              <a:rPr lang="en-US" sz="1300" b="1" dirty="0">
+                <a:solidFill>
+                  <a:srgbClr val="FFFFFF"/>
+                </a:solidFill>
+                <a:latin typeface="Arial" pitchFamily="34" charset="0"/>
+                <a:ea typeface="Arial" pitchFamily="34" charset="-122"/>
+                <a:cs typeface="Arial" pitchFamily="34" charset="-120"/>
+              </a:rPr>
+              <a:t>10</a:t>
+            </a:r>
+            <a:endParaRPr lang="en-US" sz="1300" dirty="0"/>
+          </a:p>
+        </p:txBody>
+      </p:sp>
+      <p:sp>
+        <p:nvSpPr>
+          <p:cNvPr id="4" name="Text 2"/>
+          <p:cNvSpPr/>
+          <p:nvPr/>
+        </p:nvSpPr>
+        <p:spPr>
+          <a:xfrm>
+            <a:off x="1133856" y="457200"/>
+            <a:ext cx="10490911" cy="182880"/>
+          </a:xfrm>
+          <a:prstGeom prst="rect">
+            <a:avLst/>
+          </a:prstGeom>
+          <a:noFill/>
+          <a:ln/>
+        </p:spPr>
+        <p:txBody>
+          <a:bodyPr wrap="square" lIns="0" tIns="0" rIns="0" bIns="0" rtlCol="0" anchor="ctr"/>
+          <a:lstStyle/>
+          <a:p>
+            <a:pPr indent="0" marL="0">
+              <a:buNone/>
+            </a:pPr>
+            <a:r>
+              <a:rPr lang="en-US" sz="950" b="1" spc="200" kern="0" dirty="0">
+                <a:solidFill>
+                  <a:srgbClr val="B98A2E"/>
+                </a:solidFill>
+                <a:latin typeface="Arial" pitchFamily="34" charset="0"/>
+                <a:ea typeface="Arial" pitchFamily="34" charset="-122"/>
+                <a:cs typeface="Arial" pitchFamily="34" charset="-120"/>
+              </a:rPr>
+              <a:t>Process</a:t>
+            </a:r>
+            <a:endParaRPr lang="en-US" sz="950" dirty="0"/>
+          </a:p>
+        </p:txBody>
+      </p:sp>
+      <p:sp>
+        <p:nvSpPr>
+          <p:cNvPr id="5" name="Text 3"/>
+          <p:cNvSpPr/>
+          <p:nvPr/>
+        </p:nvSpPr>
+        <p:spPr>
+          <a:xfrm>
+            <a:off x="1133856" y="640080"/>
+            <a:ext cx="10490911" cy="365760"/>
+          </a:xfrm>
+          <a:prstGeom prst="rect">
+            <a:avLst/>
+          </a:prstGeom>
+          <a:noFill/>
+          <a:ln/>
+        </p:spPr>
+        <p:txBody>
+          <a:bodyPr wrap="square" lIns="0" tIns="0" rIns="0" bIns="0" rtlCol="0" anchor="ctr"/>
+          <a:lstStyle/>
+          <a:p>
+            <a:pPr indent="0" marL="0">
+              <a:buNone/>
+            </a:pPr>
+            <a:r>
+              <a:rPr lang="en-US" sz="2300" b="1" dirty="0">
+                <a:solidFill>
+                  <a:srgbClr val="10161F"/>
+                </a:solidFill>
+                <a:latin typeface="Pretendard" pitchFamily="34" charset="0"/>
+                <a:ea typeface="Pretendard" pitchFamily="34" charset="-122"/>
+                <a:cs typeface="Pretendard" pitchFamily="34" charset="-120"/>
+              </a:rPr>
+              <a:t>검토 후 다음 단계는 무엇인가</a:t>
+            </a:r>
+            <a:endParaRPr lang="en-US" sz="2300" dirty="0"/>
+          </a:p>
+        </p:txBody>
+      </p:sp>
+      <p:sp>
+        <p:nvSpPr>
+          <p:cNvPr id="6" name="Shape 4"/>
+          <p:cNvSpPr/>
+          <p:nvPr/>
+        </p:nvSpPr>
+        <p:spPr>
+          <a:xfrm>
+            <a:off x="566928" y="1572768"/>
+            <a:ext cx="11057839" cy="3200400"/>
+          </a:xfrm>
+          <a:prstGeom prst="roundRect">
+            <a:avLst>
+              <a:gd name="adj" fmla="val 1714"/>
+            </a:avLst>
+          </a:prstGeom>
+          <a:solidFill>
+            <a:srgbClr val="F7FAFC"/>
+          </a:solidFill>
+          <a:ln w="6350">
+            <a:solidFill>
+              <a:srgbClr val="CBD5E0"/>
+            </a:solidFill>
+            <a:prstDash val="solid"/>
+          </a:ln>
+        </p:spPr>
+      </p:sp>
+      <p:sp>
+        <p:nvSpPr>
+          <p:cNvPr id="7" name="Shape 5"/>
+          <p:cNvSpPr/>
+          <p:nvPr/>
+        </p:nvSpPr>
+        <p:spPr>
+          <a:xfrm>
+            <a:off x="786384" y="1792224"/>
+            <a:ext cx="438912" cy="438912"/>
+          </a:xfrm>
+          <a:prstGeom prst="ellipse">
+            <a:avLst/>
+          </a:prstGeom>
+          <a:solidFill>
+            <a:srgbClr val="B98A2E"/>
+          </a:solidFill>
+          <a:ln/>
+        </p:spPr>
+      </p:sp>
+      <p:sp>
+        <p:nvSpPr>
+          <p:cNvPr id="8" name="Text 6"/>
+          <p:cNvSpPr/>
+          <p:nvPr/>
+        </p:nvSpPr>
+        <p:spPr>
+          <a:xfrm>
+            <a:off x="786384" y="1792224"/>
+            <a:ext cx="438912" cy="438912"/>
+          </a:xfrm>
+          <a:prstGeom prst="rect">
+            <a:avLst/>
+          </a:prstGeom>
+          <a:noFill/>
+          <a:ln/>
+        </p:spPr>
+        <p:txBody>
+          <a:bodyPr wrap="square" lIns="0" tIns="0" rIns="0" bIns="0" rtlCol="0" anchor="ctr"/>
+          <a:lstStyle/>
+          <a:p>
+            <a:pPr algn="ctr" indent="0" marL="0">
+              <a:buNone/>
+            </a:pPr>
+            <a:r>
+              <a:rPr lang="en-US" sz="1400" b="1" dirty="0">
+                <a:solidFill>
+                  <a:srgbClr val="FFFFFF"/>
+                </a:solidFill>
+                <a:latin typeface="Arial" pitchFamily="34" charset="0"/>
+                <a:ea typeface="Arial" pitchFamily="34" charset="-122"/>
+                <a:cs typeface="Arial" pitchFamily="34" charset="-120"/>
+              </a:rPr>
+              <a:t>01</a:t>
+            </a:r>
+            <a:endParaRPr lang="en-US" sz="1400" dirty="0"/>
+          </a:p>
+        </p:txBody>
+      </p:sp>
+      <p:sp>
+        <p:nvSpPr>
+          <p:cNvPr id="9" name="Text 7"/>
+          <p:cNvSpPr/>
+          <p:nvPr/>
+        </p:nvSpPr>
+        <p:spPr>
+          <a:xfrm>
+            <a:off x="786384" y="2304288"/>
+            <a:ext cx="10618927" cy="365760"/>
+          </a:xfrm>
+          <a:prstGeom prst="rect">
+            <a:avLst/>
+          </a:prstGeom>
+          <a:noFill/>
+          <a:ln/>
+        </p:spPr>
+        <p:txBody>
+          <a:bodyPr wrap="square" rtlCol="0" anchor="ctr"/>
+          <a:lstStyle/>
+          <a:p>
+            <a:pPr indent="0" marL="0">
+              <a:buNone/>
+            </a:pPr>
+            <a:r>
+              <a:rPr lang="en-US" sz="1600" b="1" dirty="0">
+                <a:solidFill>
+                  <a:srgbClr val="10161F"/>
+                </a:solidFill>
+                <a:latin typeface="Pretendard" pitchFamily="34" charset="0"/>
+                <a:ea typeface="Pretendard" pitchFamily="34" charset="-122"/>
+                <a:cs typeface="Pretendard" pitchFamily="34" charset="-120"/>
+              </a:rPr>
+              <a:t>1단계</a:t>
+            </a:r>
+            <a:endParaRPr lang="en-US" sz="1600" dirty="0"/>
+          </a:p>
+        </p:txBody>
+      </p:sp>
+      <p:sp>
+        <p:nvSpPr>
+          <p:cNvPr id="10" name="Text 8"/>
+          <p:cNvSpPr/>
+          <p:nvPr/>
+        </p:nvSpPr>
+        <p:spPr>
+          <a:xfrm>
+            <a:off x="786384" y="2761488"/>
+            <a:ext cx="10618927" cy="1828800"/>
+          </a:xfrm>
+          <a:prstGeom prst="rect">
+            <a:avLst/>
+          </a:prstGeom>
+          <a:noFill/>
+          <a:ln/>
+        </p:spPr>
+        <p:txBody>
+          <a:bodyPr wrap="square" rtlCol="0" anchor="t"/>
+          <a:lstStyle/>
+          <a:p>
+            <a:pPr indent="0" marL="0">
+              <a:buNone/>
+            </a:pPr>
+            <a:r>
+              <a:rPr lang="en-US" sz="1100" dirty="0">
+                <a:solidFill>
+                  <a:srgbClr val="10161F"/>
+                </a:solidFill>
+                <a:latin typeface="Pretendard" pitchFamily="34" charset="0"/>
+                <a:ea typeface="Pretendard" pitchFamily="34" charset="-122"/>
+                <a:cs typeface="Pretendard" pitchFamily="34" charset="-120"/>
+              </a:rPr>
+              <a:t>{"ok"</a:t>
+            </a:r>
+            <a:endParaRPr lang="en-US" sz="1100" dirty="0"/>
+          </a:p>
+          <a:p>
+            <a:pPr indent="0" marL="0">
+              <a:buNone/>
+            </a:pPr>
+            <a:r>
+              <a:rPr lang="en-US" sz="1100" dirty="0">
+                <a:solidFill>
+                  <a:srgbClr val="10161F"/>
+                </a:solidFill>
+                <a:latin typeface="Pretendard" pitchFamily="34" charset="0"/>
+                <a:ea typeface="Pretendard" pitchFamily="34" charset="-122"/>
+                <a:cs typeface="Pretendard" pitchFamily="34" charset="-120"/>
+              </a:rPr>
+              <a:t>true,"mocked":true,"extractedFields":{"area_signal":"역삼","asset_type":"오피스빌딩","price_band":"300억","size_signal":"3000평(약 9917.4㎡)"},"extractedFacts":{"region":"역삼","exactAddressCandidate":"역삼동 742-1","assetType":"오피스빌딩","priceText":"300억","sizeText":"3000평(약 9917.4㎡)","currentUse":"오피스","currentUseSignal":"근린생활시설","leaseSignal":"임대중","vacancySignal":"공실없음","tenantNames":["쿠팡","네이버"],"unitRentTexts":["301호: 1500만"],"sellerMotivationText":"자산 효율화","brokerNotes":["초역세권 매물"]},"detectedSensitiveFields":["exact_address","tenant_name"],"ambiguousFields":[],"warnings":[],"areaSignal":"역삼","assetType":"오피스빌딩","priceBand":"300억","sizeSignal":"3000평(약 9917.4㎡)","dealType":"매각","buildingName":"역삼 센트럴타워","exactAddress":"역삼동 742-1","totalFloorArea":9917.3,"buildYear":2015,"currentUseSignal":"근린생활시설","vacancySignal":"공실 없음","fitSummary":"초역세권 근생 빌딩으로 시행/사옥 매입에 최적화","cautionSummary":"주요 임차인 만기 조율 필요","hiddenFields":["exact_address","seller_motivation"],"confidence":{"areaSignal":"confirmed","assetType":"confirmed","priceBand":"ai_hypothesis","fitSummary":"ai_hypothesis"},"missingData":["sizeSignal"],"boundaryNote":"본 자료는 실거래 통계 기반 참고치입니다.","buyerType":"법인 사옥형","budgetRange":{"min":50,"max":80,"display":"50억~80억"},"preferredRegions":["강남","성수"],"assetTypes":["꼬마빌딩","사옥용"],"purchasePurpose":"사옥용 매입","mustHave":["초역세권","주차"],"niceToHave":["테라스","루프탑"],"riskTolerance":"medium","financingNote":"자본금 50% 준비","missingQuestions":["구체적인 입주 시기가 언제인가요?","선호하는 수익률이 있나요?"],"privacyNotes":["연락처 비공개"],"fitReasons":["매수자 예산(50-80억)에 부합하는 매물입니다.","요청하신 성수/강남 권역에 해당합니다."],"cautionReasons":["요청한 용도와 달리 명도 협의가 다소 필요합니다."],"recommendedNextAction":"현장 답사 제안","kakaoMessage":"안녕하세요! 요청하신 조건에 부합하는 추천 매물이 있어 안내해 드립니다. 확인해보시고 피드백 부탁드립니다.","title":"강남 역삼역 초역세권 오피스 사옥용 빌딩 매각","shortSummary":"역삼역 도보 5분 거리의 준신축급 대형 오피스빌딩입니다.","dealPoints":["초역세권","사옥 최적"],"cautionPoints":["명도 조율 필요"],"hiddenInfoNotice":["보증금 및 지번은 인가 후 확인 가능"],"gateMessage":"G1 등급 등록이 필요합니다.","kakaoText":"강남 역삼역 오피스 빌딩 매각 안내입니다.","exactUnitCandidate":"101호","floor":"1층","areaSqmText":"150㎡","spaceType":"office","depositText":"5000만","monthlyRentText":"400만","maintenanceFeeText":"50만","availableFromText":"즉시입주","leaseTermMonthsText":"24","incentivesText":"렌트프리 2개월","restrictions":[],"landlordIdentity":"김성수","currentTenant":"스타트업","vacancyReason":"이전 확장","rentNegotiation":"협의 가능","region":"성수동","areaSqm":150,"deposit":5000,"monthlyRent":400,"maintenanceFee":50,"availableFrom":"즉시입주","leaseTermMonths":24,"incentives":{"rentFreeMonths":2,"interiorSupport":"일부 인테리어 지원","freeRentDetail":"렌트프리 2개월 지원"},"shortSummaryLease":"성수역 도보 5분 거리 1층 리테일 상가 매물입니다."}</a:t>
+            </a:r>
+            <a:endParaRPr lang="en-US" sz="1100" dirty="0"/>
+          </a:p>
+        </p:txBody>
+      </p:sp>
+      <p:sp>
+        <p:nvSpPr>
+          <p:cNvPr id="11" name="Text 9"/>
+          <p:cNvSpPr/>
+          <p:nvPr/>
+        </p:nvSpPr>
+        <p:spPr>
+          <a:xfrm>
+            <a:off x="566928" y="6382512"/>
+            <a:ext cx="7315200" cy="219456"/>
+          </a:xfrm>
+          <a:prstGeom prst="rect">
+            <a:avLst/>
+          </a:prstGeom>
+          <a:noFill/>
+          <a:ln/>
+        </p:spPr>
+        <p:txBody>
+          <a:bodyPr wrap="square" lIns="0" tIns="0" rIns="0" bIns="0" rtlCol="0" anchor="ctr"/>
+          <a:lstStyle/>
+          <a:p>
+            <a:pPr indent="0" marL="0">
+              <a:buNone/>
+            </a:pPr>
+            <a:r>
+              <a:rPr lang="en-US" sz="800" dirty="0">
+                <a:solidFill>
+                  <a:srgbClr val="718096"/>
+                </a:solidFill>
+                <a:latin typeface="Pretendard" pitchFamily="34" charset="0"/>
+                <a:ea typeface="Pretendard" pitchFamily="34" charset="-122"/>
+                <a:cs typeface="Pretendard" pitchFamily="34" charset="-120"/>
+              </a:rPr>
+              <a:t>크리딜   |   </a:t>
+            </a:r>
+            <a:endParaRPr lang="en-US" sz="800" dirty="0"/>
+          </a:p>
+        </p:txBody>
+      </p:sp>
+      <p:sp>
+        <p:nvSpPr>
+          <p:cNvPr id="12" name="Text 10"/>
+          <p:cNvSpPr/>
+          <p:nvPr/>
+        </p:nvSpPr>
+        <p:spPr>
+          <a:xfrm>
+            <a:off x="10710367" y="6382512"/>
+            <a:ext cx="914400" cy="219456"/>
+          </a:xfrm>
+          <a:prstGeom prst="rect">
+            <a:avLst/>
+          </a:prstGeom>
+          <a:noFill/>
+          <a:ln/>
+        </p:spPr>
+        <p:txBody>
+          <a:bodyPr wrap="square" lIns="0" tIns="0" rIns="0" bIns="0" rtlCol="0" anchor="ctr"/>
+          <a:lstStyle/>
+          <a:p>
+            <a:pPr algn="r" indent="0" marL="0">
+              <a:buNone/>
+            </a:pPr>
+            <a:r>
+              <a:rPr lang="en-US" sz="900" b="1" dirty="0">
+                <a:solidFill>
+                  <a:srgbClr val="B98A2E"/>
+                </a:solidFill>
+                <a:latin typeface="Arial" pitchFamily="34" charset="0"/>
+                <a:ea typeface="Arial" pitchFamily="34" charset="-122"/>
+                <a:cs typeface="Arial" pitchFamily="34" charset="-120"/>
+              </a:rPr>
+              <a:t>10</a:t>
+            </a:r>
+            <a:endParaRPr lang="en-US" sz="900" dirty="0"/>
+          </a:p>
+        </p:txBody>
+      </p:sp>
+    </p:spTree>
+  </p:cSld>
+  <p:clrMapOvr>
+    <a:masterClrMapping/>
+  </p:clrMapOvr>
+</p:sld>
+</file>
+
+<file path=ppt/slides/slide11.xml><?xml version="1.0" encoding="utf-8"?>
+<p:sld xmlns:a="http://schemas.openxmlformats.org/drawingml/2006/main" xmlns:r="http://schemas.openxmlformats.org/officeDocument/2006/relationships" xmlns:p="http://schemas.openxmlformats.org/presentationml/2006/main">
+  <p:cSld name="Slide 11">
+    <p:bg>
+      <p:bgPr>
+        <a:solidFill>
           <a:srgbClr val="10161F"/>
         </a:solidFill>
       </p:bgPr>
@@ -2368,7 +2885,7 @@
                 <a:ea typeface="Arial" pitchFamily="34" charset="-122"/>
                 <a:cs typeface="Arial" pitchFamily="34" charset="-120"/>
               </a:rPr>
-              <a:t>10</a:t>
+              <a:t>11</a:t>
             </a:r>
             <a:endParaRPr lang="en-US" sz="1300" dirty="0"/>
           </a:p>
@@ -3780,7 +4297,7 @@
                 <a:ea typeface="Arial" pitchFamily="34" charset="-122"/>
                 <a:cs typeface="Arial" pitchFamily="34" charset="-120"/>
               </a:rPr>
-              <a:t>10</a:t>
+              <a:t>11</a:t>
             </a:r>
             <a:endParaRPr lang="en-US" sz="900" dirty="0"/>
           </a:p>
@@ -4291,7 +4808,7 @@
                 <a:ea typeface="Pretendard" pitchFamily="34" charset="-122"/>
                 <a:cs typeface="Pretendard" pitchFamily="34" charset="-120"/>
               </a:rPr>
-              <a:t>연 순수익률(Cap Rate)</a:t>
+              <a:t>연 수익률(Cap Rate, 기준: NOI)</a:t>
             </a:r>
             <a:endParaRPr lang="en-US" sz="950" dirty="0"/>
           </a:p>
@@ -5187,7 +5704,7 @@
                 <a:ea typeface="Pretendard" pitchFamily="34" charset="-122"/>
                 <a:cs typeface="Pretendard" pitchFamily="34" charset="-120"/>
               </a:rPr>
-              <a:t>교통 접근성 상세 정보는 담당 브로커를 통해 확인하</a:t>
+              <a:t>교통 접근성</a:t>
             </a:r>
             <a:endParaRPr lang="en-US" sz="1300" dirty="0"/>
           </a:p>
@@ -5202,102 +5719,6 @@
         <p:spPr>
           <a:xfrm>
             <a:off x="8170475" y="1481328"/>
-            <a:ext cx="3454292" cy="493776"/>
-          </a:xfrm>
-          <a:prstGeom prst="rect">
-            <a:avLst/>
-          </a:prstGeom>
-          <a:noFill/>
-          <a:ln/>
-        </p:spPr>
-        <p:txBody>
-          <a:bodyPr wrap="square" lIns="0" tIns="0" rIns="0" bIns="0" rtlCol="0" anchor="ctr"/>
-          <a:lstStyle/>
-          <a:p>
-            <a:pPr indent="0" marL="0">
-              <a:lnSpc>
-                <a:spcPct val="120000"/>
-              </a:lnSpc>
-              <a:buNone/>
-            </a:pPr>
-            <a:endParaRPr lang="en-US" sz="1300" dirty="0"/>
-          </a:p>
-        </p:txBody>
-      </p:sp>
-      <p:sp>
-        <p:nvSpPr>
-          <p:cNvPr id="9" name="Shape 6"/>
-          <p:cNvSpPr/>
-          <p:nvPr/>
-        </p:nvSpPr>
-        <p:spPr>
-          <a:xfrm>
-            <a:off x="6053328" y="1975104"/>
-            <a:ext cx="5571439" cy="0"/>
-          </a:xfrm>
-          <a:prstGeom prst="line">
-            <a:avLst/>
-          </a:prstGeom>
-          <a:noFill/>
-          <a:ln w="3810">
-            <a:solidFill>
-              <a:srgbClr val="CBD5E0"/>
-            </a:solidFill>
-            <a:prstDash val="solid"/>
-          </a:ln>
-        </p:spPr>
-      </p:sp>
-      <p:sp>
-        <p:nvSpPr>
-          <p:cNvPr id="10" name="Text 7"/>
-          <p:cNvSpPr/>
-          <p:nvPr/>
-        </p:nvSpPr>
-        <p:spPr>
-          <a:xfrm>
-            <a:off x="6053328" y="1975104"/>
-            <a:ext cx="2117147" cy="493776"/>
-          </a:xfrm>
-          <a:prstGeom prst="rect">
-            <a:avLst/>
-          </a:prstGeom>
-          <a:noFill/>
-          <a:ln/>
-        </p:spPr>
-        <p:txBody>
-          <a:bodyPr wrap="square" lIns="0" tIns="0" rIns="0" bIns="0" rtlCol="0" anchor="ctr"/>
-          <a:lstStyle/>
-          <a:p>
-            <a:pPr indent="0" marL="0">
-              <a:lnSpc>
-                <a:spcPct val="120000"/>
-              </a:lnSpc>
-              <a:buNone/>
-            </a:pPr>
-            <a:r>
-              <a:rPr lang="en-US" sz="1300" dirty="0">
-                <a:solidFill>
-                  <a:srgbClr val="718096"/>
-                </a:solidFill>
-                <a:latin typeface="Pretendard" pitchFamily="34" charset="0"/>
-                <a:ea typeface="Pretendard" pitchFamily="34" charset="-122"/>
-                <a:cs typeface="Pretendard" pitchFamily="34" charset="-120"/>
-              </a:rPr>
-              <a:t>[건물] 주변 상권</a:t>
-            </a:r>
-            <a:endParaRPr lang="en-US" sz="1300" dirty="0"/>
-          </a:p>
-        </p:txBody>
-      </p:sp>
-      <p:sp>
-        <p:nvSpPr>
-          <p:cNvPr id="11" name="Text 8"/>
-          <p:cNvSpPr/>
-          <p:nvPr/>
-        </p:nvSpPr>
-        <p:spPr>
-          <a:xfrm>
-            <a:off x="8170475" y="1975104"/>
             <a:ext cx="3454292" cy="493776"/>
           </a:xfrm>
           <a:prstGeom prst="rect">
@@ -5325,7 +5746,7 @@
                 <a:ea typeface="Pretendard" pitchFamily="34" charset="-122"/>
                 <a:cs typeface="Pretendard" pitchFamily="34" charset="-120"/>
               </a:rPr>
-              <a:t>서초권역 내 주요 비즈니스 및 유동인구 풍부한 상권 입지 ### [성장] 입지 평가</a:t>
+              <a:t>{"ok":true,"mocked":true,"extractedFields":{"area_signal":"역삼","asset_type":"오피스빌딩","price_band":"300억","size_signal":"3000평(약 9917.</a:t>
             </a:r>
             <a:endParaRPr lang="en-US" sz="1300" dirty="0"/>
           </a:p>
@@ -5333,103 +5754,7 @@
       </p:sp>
       <p:sp>
         <p:nvSpPr>
-          <p:cNvPr id="12" name="Shape 9"/>
-          <p:cNvSpPr/>
-          <p:nvPr/>
-        </p:nvSpPr>
-        <p:spPr>
-          <a:xfrm>
-            <a:off x="6053328" y="2468880"/>
-            <a:ext cx="5571439" cy="0"/>
-          </a:xfrm>
-          <a:prstGeom prst="line">
-            <a:avLst/>
-          </a:prstGeom>
-          <a:noFill/>
-          <a:ln w="3810">
-            <a:solidFill>
-              <a:srgbClr val="CBD5E0"/>
-            </a:solidFill>
-            <a:prstDash val="solid"/>
-          </a:ln>
-        </p:spPr>
-      </p:sp>
-      <p:sp>
-        <p:nvSpPr>
-          <p:cNvPr id="13" name="Text 10"/>
-          <p:cNvSpPr/>
-          <p:nvPr/>
-        </p:nvSpPr>
-        <p:spPr>
-          <a:xfrm>
-            <a:off x="6053328" y="2468880"/>
-            <a:ext cx="2117147" cy="493776"/>
-          </a:xfrm>
-          <a:prstGeom prst="rect">
-            <a:avLst/>
-          </a:prstGeom>
-          <a:noFill/>
-          <a:ln/>
-        </p:spPr>
-        <p:txBody>
-          <a:bodyPr wrap="square" lIns="0" tIns="0" rIns="0" bIns="0" rtlCol="0" anchor="ctr"/>
-          <a:lstStyle/>
-          <a:p>
-            <a:pPr indent="0" marL="0">
-              <a:lnSpc>
-                <a:spcPct val="120000"/>
-              </a:lnSpc>
-              <a:buNone/>
-            </a:pPr>
-            <a:r>
-              <a:rPr lang="en-US" sz="1300" dirty="0">
-                <a:solidFill>
-                  <a:srgbClr val="718096"/>
-                </a:solidFill>
-                <a:latin typeface="Pretendard" pitchFamily="34" charset="0"/>
-                <a:ea typeface="Pretendard" pitchFamily="34" charset="-122"/>
-                <a:cs typeface="Pretendard" pitchFamily="34" charset="-120"/>
-              </a:rPr>
-              <a:t>서초권역 내 위치하며 접근성과 가시성이 양호한 입지</a:t>
-            </a:r>
-            <a:endParaRPr lang="en-US" sz="1300" dirty="0"/>
-          </a:p>
-        </p:txBody>
-      </p:sp>
-      <p:sp>
-        <p:nvSpPr>
-          <p:cNvPr id="14" name="Text 11"/>
-          <p:cNvSpPr/>
-          <p:nvPr/>
-        </p:nvSpPr>
-        <p:spPr>
-          <a:xfrm>
-            <a:off x="8170475" y="2468880"/>
-            <a:ext cx="3454292" cy="493776"/>
-          </a:xfrm>
-          <a:prstGeom prst="rect">
-            <a:avLst/>
-          </a:prstGeom>
-          <a:noFill/>
-          <a:ln/>
-        </p:spPr>
-        <p:txBody>
-          <a:bodyPr wrap="square" lIns="0" tIns="0" rIns="0" bIns="0" rtlCol="0" anchor="ctr"/>
-          <a:lstStyle/>
-          <a:p>
-            <a:pPr indent="0" marL="0">
-              <a:lnSpc>
-                <a:spcPct val="120000"/>
-              </a:lnSpc>
-              <a:buNone/>
-            </a:pPr>
-            <a:endParaRPr lang="en-US" sz="1300" dirty="0"/>
-          </a:p>
-        </p:txBody>
-      </p:sp>
-      <p:sp>
-        <p:nvSpPr>
-          <p:cNvPr id="15" name="Text 12"/>
+          <p:cNvPr id="9" name="Text 6"/>
           <p:cNvSpPr/>
           <p:nvPr/>
         </p:nvSpPr>
@@ -5468,7 +5793,7 @@
       </p:sp>
       <p:sp>
         <p:nvSpPr>
-          <p:cNvPr id="16" name="Text 13"/>
+          <p:cNvPr id="10" name="Text 7"/>
           <p:cNvSpPr/>
           <p:nvPr/>
         </p:nvSpPr>
@@ -5502,6 +5827,45 @@
               <a:t>3</a:t>
             </a:r>
             <a:endParaRPr lang="en-US" sz="900" dirty="0"/>
+          </a:p>
+        </p:txBody>
+      </p:sp>
+      <p:sp>
+        <p:nvSpPr>
+          <p:cNvPr id="11" name="Text 8"/>
+          <p:cNvSpPr/>
+          <p:nvPr/>
+        </p:nvSpPr>
+        <p:spPr>
+          <a:xfrm>
+            <a:off x="566928" y="1481328"/>
+            <a:ext cx="11057839" cy="9692640"/>
+          </a:xfrm>
+          <a:prstGeom prst="rect">
+            <a:avLst/>
+          </a:prstGeom>
+          <a:noFill/>
+          <a:ln/>
+        </p:spPr>
+        <p:txBody>
+          <a:bodyPr wrap="square" lIns="0" tIns="0" rIns="0" bIns="0" rtlCol="0" anchor="t"/>
+          <a:lstStyle/>
+          <a:p>
+            <a:pPr indent="0" marL="0">
+              <a:buNone/>
+            </a:pPr>
+            <a:r>
+              <a:rPr lang="en-US" sz="1000" dirty="0">
+                <a:solidFill>
+                  <a:srgbClr val="10161F"/>
+                </a:solidFill>
+                <a:latin typeface="Pretendard" pitchFamily="34" charset="0"/>
+                <a:ea typeface="Pretendard" pitchFamily="34" charset="-122"/>
+                <a:cs typeface="Pretendard" pitchFamily="34" charset="-120"/>
+              </a:rPr>
+              <a:t>{"ok":true,"mocked":true,"extractedFields":{"area_signal":"역삼","asset_type":"오피스빌딩","price_band":"300억","size_signal":"3000평(약 9917.4㎡)"},"extractedFacts":{"region":"역삼","exactAddressCandidate":"역삼동 742-1","assetType":"오피스빌딩","priceText":"300억","sizeText":"3000평(약 9917.4㎡)","currentUse":"오피스","currentUseSignal":"근린생활시설","leaseSignal":"임대중","vacancySignal":"공실없음","tenantNames":["쿠팡","네이버"],"unitRentTexts":["301호: 1500만"],"sellerMotivationText":"자산 효율화","brokerNotes":["초역세권 매물"]},"detectedSensitiveFields":["exact_address","tenant_name"],"ambiguousFields":[],"warnings":[],"areaSignal":"역삼","assetType":"오피스빌딩","priceBand":"300억","sizeSignal":"3000평(약 9917.4㎡)","dealType":"매각","buildingName":"역삼 센트럴타워","exactAddress":"역삼동 742-1","totalFloorArea":9917.3,"buildYear":2015,"currentUseSignal":"근린생활시설","vacancySignal":"공실 없음","fitSummary":"초역세권 근생 빌딩으로 시행/사옥 매입에 최적화","cautionSummary":"주요 임차인 만기 조율 필요","hiddenFields":["exact_address","seller_motivation"],"confidence":{"areaSignal":"confirmed","assetType":"confirmed","priceBand":"ai_hypothesis","fitSummary":"ai_hypothesis"},"missingData":["sizeSignal"],"boundaryNote":"본 자료는 실거래 통계 기반 참고치입니다.","buyerType":"법인 사옥형","budgetRange":{"min":50,"max":80,"display":"50억~80억"},"preferredRegions":["강남","성수"],"assetTypes":["꼬마빌딩","사옥용"],"purchasePurpose":"사옥용 매입","mustHave":["초역세권","주차"],"niceToHave":["테라스","루프탑"],"riskTolerance":"medium","financingNote":"자본금 50% 준비","missingQuestions":["구체적인 입주 시기가 언제인가요?","선호하는 수익률이 있나요?"],"privacyNotes":["연락처 비공개"],"fitReasons":["매수자 예산(50-80억)에 부합하는 매물입니다.","요청하신 성수/강남 권역에 해당합니다."],"cautionReasons":["요청한 용도와 달리 명도 협의가 다소 필요합니다."],"recommendedNextAction":"현장 답사 제안","kakaoMessage":"안녕하세요! 요청하신 조건에 부합하는 추천 매물이 있어 안내해 드립니다. 확인해보시고 피드백 부탁드립니다.","title":"강남 역삼역 초역세권 오피스 사옥용 빌딩 매각","shortSummary":"역삼역 도보 5분 거리의 준신축급 대형 오피스빌딩입니다.","dealPoints":["초역세권","사옥 최적"],"cautionPoints":["명도 조율 필요"],"hiddenInfoNotice":["보증금 및 지번은 인가 후 확인 가능"],"gateMessage":"G1 등급 등록이 필요합니다.","kakaoText":"강남 역삼역 오피스 빌딩 매각 안내입니다.","exactUnitCandidate":"101호","floor":"1층","areaSqmText":"150㎡","spaceType":"office","depositText":"5000만","monthlyRentText":"400만","maintenanceFeeText":"50만","availableFromText":"즉시입주","leaseTermMonthsText":"24","incentivesText":"렌트프리 2개월","restrictions":[],"landlordIdentity":"김성수","currentTenant":"스타트업","vacancyReason":"이전 확장","rentNegotiation":"협의 가능","region":"성수동","areaSqm":150,"deposit":5000,"monthlyRent":400,"maintenanceFee":50,"availableFrom":"즉시입주","leaseTermMonths":24,"incentives":{"rentFreeMonths":2,"interiorSupport":"일부 인테리어 지원","freeRentDetail":"렌트프리 2개월 지원"},"shortSummaryLease":"성수역 도보 5분 거리 1층 리테일 상가 매물입니다."}</a:t>
+            </a:r>
+            <a:endParaRPr lang="en-US" sz="1000" dirty="0"/>
           </a:p>
         </p:txBody>
       </p:sp>
@@ -5749,7 +6113,7 @@
                 <a:ea typeface="Pretendard" pitchFamily="34" charset="-122"/>
                 <a:cs typeface="Pretendard" pitchFamily="34" charset="-120"/>
               </a:rPr>
-              <a:t>{"ok"</a:t>
+              <a:t>주요 용도</a:t>
             </a:r>
             <a:endParaRPr lang="en-US" sz="1400" dirty="0"/>
           </a:p>
@@ -5791,7 +6155,7 @@
                 <a:ea typeface="Pretendard" pitchFamily="34" charset="-122"/>
                 <a:cs typeface="Pretendard" pitchFamily="34" charset="-120"/>
               </a:rPr>
-              <a:t>true,"mocked":true,"extractedFields":{"area_signal":"역삼","asset_type":"오피스빌딩","price_band":"300억","size_signal":"3000평(약 9917.4㎡)"},"extractedFacts":{"region":"역삼","exactAddressCandidate":"역삼동 742-1","assetType":"오피스빌딩","priceText":"300억","sizeText":"3000평(약 9917.4㎡)","currentUse":"오피스","currentUseSignal":"근린생활시설","leaseSignal":"임대중","vacancySignal":"공실없음","tenantNames":"쿠팡","네이버","unitRentTexts":"301호: 1500만","sellerMotivationText":"자산 효율화","brokerNotes":"초역세권 매물"},"detectedSensitiveFields":"exact_address","tenant_name","ambiguousFields":,"warnings":,"areaSignal":"역삼","assetType":"오피스빌딩","priceBand":"300억","sizeSignal":"3000평(약 9917.4㎡)","dealType":"매각","buildingName":"역삼 센트럴타워","exactAddress":"역삼동 742-1","totalFloorArea":9917.3,"buildYear":2015,"currentUseSignal":"근린생활시설","vacancySignal":"공실 없음","fitSummary":"초역세권 근생 빌딩으로 시행/사옥 매입에 최적화","cautionSummary":"주요 임차인 만기 조율 필요","hiddenFields":"exact_address","seller_motivation","confidence":{"areaSignal":"confirmed","assetType":"confirmed","priceBand":"ai_hypothesis","fitSummary":"ai_hypothesis"},"missingData":"sizeSignal","boundaryNote":"본 자료는 실거래 통계 기반 참고치입니다.","buyerType":"법인 사옥형","budgetRange":{"min":50,"max":80,"display":"50억~80억"},"preferredRegions":"강남","성수","assetTypes":"꼬마빌딩","사옥용","purchasePurpose":"사옥용 매입","mustHave":"초역세권","주차","niceToHave":"테라스","루프탑","riskTolerance":"medium","financingNote":"자본금 50% 준비","missingQuestions":"구체적인 입주 시기가 언제인가요?","선호하는 수익률이 있나요?","privacyNotes":"연락처 비공개","fitReasons":"매수자 예산(50-80억)에 부합하는 매물입니다.","요청하신 성수/강남 권역에 해당합니다.","cautionReasons":"요청한 용도와 달리 명도 협의가 다소 필요합니다.","recommendedNextAction":"현장 답사 제안","kakaoMessage":"안녕하세요! 요청하신 조건에 부합하는 추천 매물이 있어 안내해 드립니다. 확인해보시고 피드백 부탁드립니다.","title":"강남 역삼역 초역세권 오피스 사옥용 빌딩 매각","shortSummary":"역삼역 도보 5분 거리의 준신축급 대형 오피스빌딩입니다.","dealPoints":"초역세권","사옥 최적","cautionPoints":"명도 조율 필요","hiddenInfoNotice":"보증금 및 지번은 인가 후 확인 가능","gateMessage":"G1 등급 등록이 필요합니다.","kakaoText":"강남 역삼역 오피스 빌딩 매각 안내입니다.","exactUnitCandidate":"101호","floor":"1층","areaSqmText":"150㎡","spaceType":"office","depositText":"5000만","monthlyRentText":"400만","maintenanceFeeText":"50만","availableFromText":"즉시입주","leaseTermMonthsText":"24","incentivesText":"렌트프리 2개월","restrictions":,"landlordIdentity":"김성수","currentTenant":"스타트업","vacancyReason":"이전 확장","rentNegotiation":"협의 가능","region":"성수동","areaSqm":150,"deposit":5000,"monthlyRent":400,"maintenanceFee":50,"availableFrom":"즉시입주","leaseTermMonths":24,"incentives":{"rentFreeMonths":2,"interiorSupport":"일부 인테리어 지원","freeRentDetail":"렌트프리 2개월 지원"},"shortSummaryLease":"성수역 도보 5분 거리 1층 리테일 상가 매물입니다."}</a:t>
+              <a:t>확인 필요</a:t>
             </a:r>
             <a:endParaRPr lang="en-US" sz="1400" dirty="0"/>
           </a:p>
@@ -5800,6 +6164,434 @@
       <p:sp>
         <p:nvSpPr>
           <p:cNvPr id="9" name="Shape 7"/>
+          <p:cNvSpPr/>
+          <p:nvPr/>
+        </p:nvSpPr>
+        <p:spPr>
+          <a:xfrm>
+            <a:off x="566928" y="2048256"/>
+            <a:ext cx="6858000" cy="0"/>
+          </a:xfrm>
+          <a:prstGeom prst="line">
+            <a:avLst/>
+          </a:prstGeom>
+          <a:noFill/>
+          <a:ln w="3810">
+            <a:solidFill>
+              <a:srgbClr val="CBD5E0"/>
+            </a:solidFill>
+            <a:prstDash val="solid"/>
+          </a:ln>
+        </p:spPr>
+      </p:sp>
+      <p:sp>
+        <p:nvSpPr>
+          <p:cNvPr id="10" name="Text 8"/>
+          <p:cNvSpPr/>
+          <p:nvPr/>
+        </p:nvSpPr>
+        <p:spPr>
+          <a:xfrm>
+            <a:off x="566928" y="2048256"/>
+            <a:ext cx="2606040" cy="402336"/>
+          </a:xfrm>
+          <a:prstGeom prst="rect">
+            <a:avLst/>
+          </a:prstGeom>
+          <a:noFill/>
+          <a:ln/>
+        </p:spPr>
+        <p:txBody>
+          <a:bodyPr wrap="square" lIns="0" tIns="0" rIns="0" bIns="0" rtlCol="0" anchor="ctr"/>
+          <a:lstStyle/>
+          <a:p>
+            <a:pPr indent="0" marL="0">
+              <a:lnSpc>
+                <a:spcPct val="120000"/>
+              </a:lnSpc>
+              <a:buNone/>
+            </a:pPr>
+            <a:r>
+              <a:rPr lang="en-US" sz="1400" dirty="0">
+                <a:solidFill>
+                  <a:srgbClr val="718096"/>
+                </a:solidFill>
+                <a:latin typeface="Pretendard" pitchFamily="34" charset="0"/>
+                <a:ea typeface="Pretendard" pitchFamily="34" charset="-122"/>
+                <a:cs typeface="Pretendard" pitchFamily="34" charset="-120"/>
+              </a:rPr>
+              <a:t>연면적</a:t>
+            </a:r>
+            <a:endParaRPr lang="en-US" sz="1400" dirty="0"/>
+          </a:p>
+        </p:txBody>
+      </p:sp>
+      <p:sp>
+        <p:nvSpPr>
+          <p:cNvPr id="11" name="Text 9"/>
+          <p:cNvSpPr/>
+          <p:nvPr/>
+        </p:nvSpPr>
+        <p:spPr>
+          <a:xfrm>
+            <a:off x="3172968" y="2048256"/>
+            <a:ext cx="4251960" cy="402336"/>
+          </a:xfrm>
+          <a:prstGeom prst="rect">
+            <a:avLst/>
+          </a:prstGeom>
+          <a:noFill/>
+          <a:ln/>
+        </p:spPr>
+        <p:txBody>
+          <a:bodyPr wrap="square" lIns="0" tIns="0" rIns="0" bIns="0" rtlCol="0" anchor="ctr"/>
+          <a:lstStyle/>
+          <a:p>
+            <a:pPr indent="0" marL="0">
+              <a:lnSpc>
+                <a:spcPct val="120000"/>
+              </a:lnSpc>
+              <a:buNone/>
+            </a:pPr>
+            <a:r>
+              <a:rPr lang="en-US" sz="1400" b="1" dirty="0">
+                <a:solidFill>
+                  <a:srgbClr val="10161F"/>
+                </a:solidFill>
+                <a:latin typeface="Pretendard" pitchFamily="34" charset="0"/>
+                <a:ea typeface="Pretendard" pitchFamily="34" charset="-122"/>
+                <a:cs typeface="Pretendard" pitchFamily="34" charset="-120"/>
+              </a:rPr>
+              <a:t>5,000㎡ (약 1513평(약 5001.7㎡))</a:t>
+            </a:r>
+            <a:endParaRPr lang="en-US" sz="1400" dirty="0"/>
+          </a:p>
+        </p:txBody>
+      </p:sp>
+      <p:sp>
+        <p:nvSpPr>
+          <p:cNvPr id="12" name="Shape 10"/>
+          <p:cNvSpPr/>
+          <p:nvPr/>
+        </p:nvSpPr>
+        <p:spPr>
+          <a:xfrm>
+            <a:off x="566928" y="2450592"/>
+            <a:ext cx="6858000" cy="0"/>
+          </a:xfrm>
+          <a:prstGeom prst="line">
+            <a:avLst/>
+          </a:prstGeom>
+          <a:noFill/>
+          <a:ln w="3810">
+            <a:solidFill>
+              <a:srgbClr val="CBD5E0"/>
+            </a:solidFill>
+            <a:prstDash val="solid"/>
+          </a:ln>
+        </p:spPr>
+      </p:sp>
+      <p:sp>
+        <p:nvSpPr>
+          <p:cNvPr id="13" name="Text 11"/>
+          <p:cNvSpPr/>
+          <p:nvPr/>
+        </p:nvSpPr>
+        <p:spPr>
+          <a:xfrm>
+            <a:off x="566928" y="2450592"/>
+            <a:ext cx="2606040" cy="402336"/>
+          </a:xfrm>
+          <a:prstGeom prst="rect">
+            <a:avLst/>
+          </a:prstGeom>
+          <a:noFill/>
+          <a:ln/>
+        </p:spPr>
+        <p:txBody>
+          <a:bodyPr wrap="square" lIns="0" tIns="0" rIns="0" bIns="0" rtlCol="0" anchor="ctr"/>
+          <a:lstStyle/>
+          <a:p>
+            <a:pPr indent="0" marL="0">
+              <a:lnSpc>
+                <a:spcPct val="120000"/>
+              </a:lnSpc>
+              <a:buNone/>
+            </a:pPr>
+            <a:r>
+              <a:rPr lang="en-US" sz="1400" dirty="0">
+                <a:solidFill>
+                  <a:srgbClr val="718096"/>
+                </a:solidFill>
+                <a:latin typeface="Pretendard" pitchFamily="34" charset="0"/>
+                <a:ea typeface="Pretendard" pitchFamily="34" charset="-122"/>
+                <a:cs typeface="Pretendard" pitchFamily="34" charset="-120"/>
+              </a:rPr>
+              <a:t>대지면적</a:t>
+            </a:r>
+            <a:endParaRPr lang="en-US" sz="1400" dirty="0"/>
+          </a:p>
+        </p:txBody>
+      </p:sp>
+      <p:sp>
+        <p:nvSpPr>
+          <p:cNvPr id="14" name="Text 12"/>
+          <p:cNvSpPr/>
+          <p:nvPr/>
+        </p:nvSpPr>
+        <p:spPr>
+          <a:xfrm>
+            <a:off x="3172968" y="2450592"/>
+            <a:ext cx="4251960" cy="402336"/>
+          </a:xfrm>
+          <a:prstGeom prst="rect">
+            <a:avLst/>
+          </a:prstGeom>
+          <a:noFill/>
+          <a:ln/>
+        </p:spPr>
+        <p:txBody>
+          <a:bodyPr wrap="square" lIns="0" tIns="0" rIns="0" bIns="0" rtlCol="0" anchor="ctr"/>
+          <a:lstStyle/>
+          <a:p>
+            <a:pPr indent="0" marL="0">
+              <a:lnSpc>
+                <a:spcPct val="120000"/>
+              </a:lnSpc>
+              <a:buNone/>
+            </a:pPr>
+            <a:r>
+              <a:rPr lang="en-US" sz="1400" b="1" dirty="0">
+                <a:solidFill>
+                  <a:srgbClr val="10161F"/>
+                </a:solidFill>
+                <a:latin typeface="Pretendard" pitchFamily="34" charset="0"/>
+                <a:ea typeface="Pretendard" pitchFamily="34" charset="-122"/>
+                <a:cs typeface="Pretendard" pitchFamily="34" charset="-120"/>
+              </a:rPr>
+              <a:t>1,000㎡ (약 303평(약 1001.7㎡))</a:t>
+            </a:r>
+            <a:endParaRPr lang="en-US" sz="1400" dirty="0"/>
+          </a:p>
+        </p:txBody>
+      </p:sp>
+      <p:sp>
+        <p:nvSpPr>
+          <p:cNvPr id="15" name="Shape 13"/>
+          <p:cNvSpPr/>
+          <p:nvPr/>
+        </p:nvSpPr>
+        <p:spPr>
+          <a:xfrm>
+            <a:off x="566928" y="2852928"/>
+            <a:ext cx="6858000" cy="0"/>
+          </a:xfrm>
+          <a:prstGeom prst="line">
+            <a:avLst/>
+          </a:prstGeom>
+          <a:noFill/>
+          <a:ln w="3810">
+            <a:solidFill>
+              <a:srgbClr val="CBD5E0"/>
+            </a:solidFill>
+            <a:prstDash val="solid"/>
+          </a:ln>
+        </p:spPr>
+      </p:sp>
+      <p:sp>
+        <p:nvSpPr>
+          <p:cNvPr id="16" name="Text 14"/>
+          <p:cNvSpPr/>
+          <p:nvPr/>
+        </p:nvSpPr>
+        <p:spPr>
+          <a:xfrm>
+            <a:off x="566928" y="2852928"/>
+            <a:ext cx="2606040" cy="402336"/>
+          </a:xfrm>
+          <a:prstGeom prst="rect">
+            <a:avLst/>
+          </a:prstGeom>
+          <a:noFill/>
+          <a:ln/>
+        </p:spPr>
+        <p:txBody>
+          <a:bodyPr wrap="square" lIns="0" tIns="0" rIns="0" bIns="0" rtlCol="0" anchor="ctr"/>
+          <a:lstStyle/>
+          <a:p>
+            <a:pPr indent="0" marL="0">
+              <a:lnSpc>
+                <a:spcPct val="120000"/>
+              </a:lnSpc>
+              <a:buNone/>
+            </a:pPr>
+            <a:r>
+              <a:rPr lang="en-US" sz="1400" dirty="0">
+                <a:solidFill>
+                  <a:srgbClr val="718096"/>
+                </a:solidFill>
+                <a:latin typeface="Pretendard" pitchFamily="34" charset="0"/>
+                <a:ea typeface="Pretendard" pitchFamily="34" charset="-122"/>
+                <a:cs typeface="Pretendard" pitchFamily="34" charset="-120"/>
+              </a:rPr>
+              <a:t>용도지역</a:t>
+            </a:r>
+            <a:endParaRPr lang="en-US" sz="1400" dirty="0"/>
+          </a:p>
+        </p:txBody>
+      </p:sp>
+      <p:sp>
+        <p:nvSpPr>
+          <p:cNvPr id="17" name="Text 15"/>
+          <p:cNvSpPr/>
+          <p:nvPr/>
+        </p:nvSpPr>
+        <p:spPr>
+          <a:xfrm>
+            <a:off x="3172968" y="2852928"/>
+            <a:ext cx="4251960" cy="402336"/>
+          </a:xfrm>
+          <a:prstGeom prst="rect">
+            <a:avLst/>
+          </a:prstGeom>
+          <a:noFill/>
+          <a:ln/>
+        </p:spPr>
+        <p:txBody>
+          <a:bodyPr wrap="square" lIns="0" tIns="0" rIns="0" bIns="0" rtlCol="0" anchor="ctr"/>
+          <a:lstStyle/>
+          <a:p>
+            <a:pPr indent="0" marL="0">
+              <a:lnSpc>
+                <a:spcPct val="120000"/>
+              </a:lnSpc>
+              <a:buNone/>
+            </a:pPr>
+            <a:r>
+              <a:rPr lang="en-US" sz="1400" b="1" dirty="0">
+                <a:solidFill>
+                  <a:srgbClr val="10161F"/>
+                </a:solidFill>
+                <a:latin typeface="Pretendard" pitchFamily="34" charset="0"/>
+                <a:ea typeface="Pretendard" pitchFamily="34" charset="-122"/>
+                <a:cs typeface="Pretendard" pitchFamily="34" charset="-120"/>
+              </a:rPr>
+              <a:t>일반상업지역</a:t>
+            </a:r>
+            <a:endParaRPr lang="en-US" sz="1400" dirty="0"/>
+          </a:p>
+        </p:txBody>
+      </p:sp>
+      <p:sp>
+        <p:nvSpPr>
+          <p:cNvPr id="18" name="Shape 16"/>
+          <p:cNvSpPr/>
+          <p:nvPr/>
+        </p:nvSpPr>
+        <p:spPr>
+          <a:xfrm>
+            <a:off x="566928" y="3255264"/>
+            <a:ext cx="6858000" cy="0"/>
+          </a:xfrm>
+          <a:prstGeom prst="line">
+            <a:avLst/>
+          </a:prstGeom>
+          <a:noFill/>
+          <a:ln w="3810">
+            <a:solidFill>
+              <a:srgbClr val="CBD5E0"/>
+            </a:solidFill>
+            <a:prstDash val="solid"/>
+          </a:ln>
+        </p:spPr>
+      </p:sp>
+      <p:sp>
+        <p:nvSpPr>
+          <p:cNvPr id="19" name="Text 17"/>
+          <p:cNvSpPr/>
+          <p:nvPr/>
+        </p:nvSpPr>
+        <p:spPr>
+          <a:xfrm>
+            <a:off x="566928" y="3255264"/>
+            <a:ext cx="2606040" cy="402336"/>
+          </a:xfrm>
+          <a:prstGeom prst="rect">
+            <a:avLst/>
+          </a:prstGeom>
+          <a:noFill/>
+          <a:ln/>
+        </p:spPr>
+        <p:txBody>
+          <a:bodyPr wrap="square" lIns="0" tIns="0" rIns="0" bIns="0" rtlCol="0" anchor="ctr"/>
+          <a:lstStyle/>
+          <a:p>
+            <a:pPr indent="0" marL="0">
+              <a:lnSpc>
+                <a:spcPct val="120000"/>
+              </a:lnSpc>
+              <a:buNone/>
+            </a:pPr>
+            <a:r>
+              <a:rPr lang="en-US" sz="1400" dirty="0">
+                <a:solidFill>
+                  <a:srgbClr val="718096"/>
+                </a:solidFill>
+                <a:latin typeface="Pretendard" pitchFamily="34" charset="0"/>
+                <a:ea typeface="Pretendard" pitchFamily="34" charset="-122"/>
+                <a:cs typeface="Pretendard" pitchFamily="34" charset="-120"/>
+              </a:rPr>
+              <a:t>매매 희망가</a:t>
+            </a:r>
+            <a:endParaRPr lang="en-US" sz="1400" dirty="0"/>
+          </a:p>
+        </p:txBody>
+      </p:sp>
+      <p:sp>
+        <p:nvSpPr>
+          <p:cNvPr id="20" name="Text 18"/>
+          <p:cNvSpPr/>
+          <p:nvPr/>
+        </p:nvSpPr>
+        <p:spPr>
+          <a:xfrm>
+            <a:off x="3172968" y="3255264"/>
+            <a:ext cx="4251960" cy="402336"/>
+          </a:xfrm>
+          <a:prstGeom prst="rect">
+            <a:avLst/>
+          </a:prstGeom>
+          <a:noFill/>
+          <a:ln/>
+        </p:spPr>
+        <p:txBody>
+          <a:bodyPr wrap="square" lIns="0" tIns="0" rIns="0" bIns="0" rtlCol="0" anchor="ctr"/>
+          <a:lstStyle/>
+          <a:p>
+            <a:pPr indent="0" marL="0">
+              <a:lnSpc>
+                <a:spcPct val="120000"/>
+              </a:lnSpc>
+              <a:buNone/>
+            </a:pPr>
+            <a:r>
+              <a:rPr lang="en-US" sz="1400" b="1" dirty="0">
+                <a:solidFill>
+                  <a:srgbClr val="10161F"/>
+                </a:solidFill>
+                <a:latin typeface="Pretendard" pitchFamily="34" charset="0"/>
+                <a:ea typeface="Pretendard" pitchFamily="34" charset="-122"/>
+                <a:cs typeface="Pretendard" pitchFamily="34" charset="-120"/>
+              </a:rPr>
+              <a:t>165억</a:t>
+            </a:r>
+            <a:endParaRPr lang="en-US" sz="1400" dirty="0"/>
+          </a:p>
+        </p:txBody>
+      </p:sp>
+      <p:sp>
+        <p:nvSpPr>
+          <p:cNvPr id="21" name="Shape 19"/>
           <p:cNvSpPr/>
           <p:nvPr/>
         </p:nvSpPr>
@@ -5822,7 +6614,7 @@
       </p:sp>
       <p:sp>
         <p:nvSpPr>
-          <p:cNvPr id="10" name="Shape 8"/>
+          <p:cNvPr id="22" name="Shape 20"/>
           <p:cNvSpPr/>
           <p:nvPr/>
         </p:nvSpPr>
@@ -5837,14 +6629,14 @@
             </a:avLst>
           </a:prstGeom>
           <a:solidFill>
-            <a:srgbClr val="F3EBDA"/>
+            <a:srgbClr val="BEE3F8"/>
           </a:solidFill>
           <a:ln/>
         </p:spPr>
       </p:sp>
       <p:sp>
         <p:nvSpPr>
-          <p:cNvPr id="11" name="Shape 9"/>
+          <p:cNvPr id="23" name="Shape 21"/>
           <p:cNvSpPr/>
           <p:nvPr/>
         </p:nvSpPr>
@@ -5857,14 +6649,14 @@
             <a:avLst/>
           </a:prstGeom>
           <a:solidFill>
-            <a:srgbClr val="977024"/>
+            <a:srgbClr val="2B6CB0"/>
           </a:solidFill>
           <a:ln/>
         </p:spPr>
       </p:sp>
       <p:sp>
         <p:nvSpPr>
-          <p:cNvPr id="12" name="Text 10"/>
+          <p:cNvPr id="24" name="Text 22"/>
           <p:cNvSpPr/>
           <p:nvPr/>
         </p:nvSpPr>
@@ -5886,13 +6678,24 @@
             <a:pPr indent="0" marL="0">
               <a:buNone/>
             </a:pPr>
+            <a:r>
+              <a:rPr lang="en-US" sz="1050" b="1" dirty="0">
+                <a:solidFill>
+                  <a:srgbClr val="2B6CB0"/>
+                </a:solidFill>
+                <a:latin typeface="Pretendard" pitchFamily="34" charset="0"/>
+                <a:ea typeface="Pretendard" pitchFamily="34" charset="-122"/>
+                <a:cs typeface="Pretendard" pitchFamily="34" charset="-120"/>
+              </a:rPr>
+              <a:t>토지 및 건물 분석 포인트</a:t>
+            </a:r>
             <a:endParaRPr lang="en-US" sz="1050" dirty="0"/>
           </a:p>
         </p:txBody>
       </p:sp>
       <p:sp>
         <p:nvSpPr>
-          <p:cNvPr id="13" name="Text 11"/>
+          <p:cNvPr id="25" name="Text 23"/>
           <p:cNvSpPr/>
           <p:nvPr/>
         </p:nvSpPr>
@@ -5911,11 +6714,12 @@
           <a:bodyPr wrap="square" lIns="0" tIns="0" rIns="0" bIns="0" rtlCol="0" anchor="t"/>
           <a:lstStyle/>
           <a:p>
-            <a:pPr indent="0" marL="0">
+            <a:pPr marL="342900" indent="-342900">
               <a:lnSpc>
                 <a:spcPct val="120000"/>
               </a:lnSpc>
-              <a:buNone/>
+              <a:buSzPct val="100000"/>
+              <a:buChar char="•"/>
             </a:pPr>
             <a:r>
               <a:rPr lang="en-US" sz="930" dirty="0">
@@ -5926,15 +6730,223 @@
                 <a:ea typeface="Pretendard" pitchFamily="34" charset="-122"/>
                 <a:cs typeface="Pretendard" pitchFamily="34" charset="-120"/>
               </a:rPr>
-              <a:t>{"ok":true,"mocked":true,"extractedFields":{"area_signal":"역삼","asset_type":"오피스빌딩","price_band":"300억","size_signal":"3</a:t>
+              <a:t>물건 접면 도로 및 교통 여건은 현장 확인 사항입니다</a:t>
             </a:r>
             <a:endParaRPr lang="en-US" sz="930" dirty="0"/>
           </a:p>
-        </p:txBody>
-      </p:sp>
-      <p:sp>
-        <p:nvSpPr>
-          <p:cNvPr id="14" name="Text 12"/>
+          <a:p>
+            <a:pPr marL="342900" indent="-342900">
+              <a:lnSpc>
+                <a:spcPct val="120000"/>
+              </a:lnSpc>
+              <a:buSzPct val="100000"/>
+              <a:buChar char="•"/>
+            </a:pPr>
+            <a:r>
+              <a:rPr lang="en-US" sz="930" dirty="0">
+                <a:solidFill>
+                  <a:srgbClr val="10161F"/>
+                </a:solidFill>
+                <a:latin typeface="Pretendard" pitchFamily="34" charset="0"/>
+                <a:ea typeface="Pretendard" pitchFamily="34" charset="-122"/>
+                <a:cs typeface="Pretendard" pitchFamily="34" charset="-120"/>
+              </a:rPr>
+              <a:t>상세 건물 제원은 실사 자료를 참조하시기 바랍니다</a:t>
+            </a:r>
+            <a:endParaRPr lang="en-US" sz="930" dirty="0"/>
+          </a:p>
+          <a:p>
+            <a:pPr marL="342900" indent="-342900">
+              <a:lnSpc>
+                <a:spcPct val="120000"/>
+              </a:lnSpc>
+              <a:buSzPct val="100000"/>
+              <a:buChar char="•"/>
+            </a:pPr>
+            <a:r>
+              <a:rPr lang="en-US" sz="930" dirty="0">
+                <a:solidFill>
+                  <a:srgbClr val="10161F"/>
+                </a:solidFill>
+                <a:latin typeface="Pretendard" pitchFamily="34" charset="0"/>
+                <a:ea typeface="Pretendard" pitchFamily="34" charset="-122"/>
+                <a:cs typeface="Pretendard" pitchFamily="34" charset="-120"/>
+              </a:rPr>
+              <a:t>건물 현황 및 규모는 첨부 대장을 기준으로 합니다</a:t>
+            </a:r>
+            <a:endParaRPr lang="en-US" sz="930" dirty="0"/>
+          </a:p>
+        </p:txBody>
+      </p:sp>
+      <p:sp>
+        <p:nvSpPr>
+          <p:cNvPr id="26" name="Shape 24"/>
+          <p:cNvSpPr/>
+          <p:nvPr/>
+        </p:nvSpPr>
+        <p:spPr>
+          <a:xfrm>
+            <a:off x="7784287" y="3977640"/>
+            <a:ext cx="3840480" cy="2148840"/>
+          </a:xfrm>
+          <a:prstGeom prst="roundRect">
+            <a:avLst>
+              <a:gd name="adj" fmla="val 2553"/>
+            </a:avLst>
+          </a:prstGeom>
+          <a:solidFill>
+            <a:srgbClr val="BEE3F8"/>
+          </a:solidFill>
+          <a:ln/>
+        </p:spPr>
+      </p:sp>
+      <p:sp>
+        <p:nvSpPr>
+          <p:cNvPr id="27" name="Shape 25"/>
+          <p:cNvSpPr/>
+          <p:nvPr/>
+        </p:nvSpPr>
+        <p:spPr>
+          <a:xfrm>
+            <a:off x="7784287" y="4032504"/>
+            <a:ext cx="36576" cy="2039112"/>
+          </a:xfrm>
+          <a:prstGeom prst="rect">
+            <a:avLst/>
+          </a:prstGeom>
+          <a:solidFill>
+            <a:srgbClr val="2B6CB0"/>
+          </a:solidFill>
+          <a:ln/>
+        </p:spPr>
+      </p:sp>
+      <p:sp>
+        <p:nvSpPr>
+          <p:cNvPr id="28" name="Text 26"/>
+          <p:cNvSpPr/>
+          <p:nvPr/>
+        </p:nvSpPr>
+        <p:spPr>
+          <a:xfrm>
+            <a:off x="7967167" y="4087368"/>
+            <a:ext cx="3511296" cy="201168"/>
+          </a:xfrm>
+          <a:prstGeom prst="rect">
+            <a:avLst/>
+          </a:prstGeom>
+          <a:noFill/>
+          <a:ln/>
+        </p:spPr>
+        <p:txBody>
+          <a:bodyPr wrap="square" lIns="0" tIns="0" rIns="0" bIns="0" rtlCol="0" anchor="ctr"/>
+          <a:lstStyle/>
+          <a:p>
+            <a:pPr indent="0" marL="0">
+              <a:buNone/>
+            </a:pPr>
+            <a:r>
+              <a:rPr lang="en-US" sz="1050" b="1" dirty="0">
+                <a:solidFill>
+                  <a:srgbClr val="2B6CB0"/>
+                </a:solidFill>
+                <a:latin typeface="Pretendard" pitchFamily="34" charset="0"/>
+                <a:ea typeface="Pretendard" pitchFamily="34" charset="-122"/>
+                <a:cs typeface="Pretendard" pitchFamily="34" charset="-120"/>
+              </a:rPr>
+              <a:t>물건 실사 및 관리 상태</a:t>
+            </a:r>
+            <a:endParaRPr lang="en-US" sz="1050" dirty="0"/>
+          </a:p>
+        </p:txBody>
+      </p:sp>
+      <p:sp>
+        <p:nvSpPr>
+          <p:cNvPr id="29" name="Text 27"/>
+          <p:cNvSpPr/>
+          <p:nvPr/>
+        </p:nvSpPr>
+        <p:spPr>
+          <a:xfrm>
+            <a:off x="7967167" y="4306824"/>
+            <a:ext cx="3511296" cy="1746504"/>
+          </a:xfrm>
+          <a:prstGeom prst="rect">
+            <a:avLst/>
+          </a:prstGeom>
+          <a:noFill/>
+          <a:ln/>
+        </p:spPr>
+        <p:txBody>
+          <a:bodyPr wrap="square" lIns="0" tIns="0" rIns="0" bIns="0" rtlCol="0" anchor="t"/>
+          <a:lstStyle/>
+          <a:p>
+            <a:pPr marL="342900" indent="-342900">
+              <a:lnSpc>
+                <a:spcPct val="120000"/>
+              </a:lnSpc>
+              <a:buSzPct val="100000"/>
+              <a:buChar char="•"/>
+            </a:pPr>
+            <a:r>
+              <a:rPr lang="en-US" sz="930" dirty="0">
+                <a:solidFill>
+                  <a:srgbClr val="10161F"/>
+                </a:solidFill>
+                <a:latin typeface="Pretendard" pitchFamily="34" charset="0"/>
+                <a:ea typeface="Pretendard" pitchFamily="34" charset="-122"/>
+                <a:cs typeface="Pretendard" pitchFamily="34" charset="-120"/>
+              </a:rPr>
+              <a:t>건물 상태 및 설비 현황은 실사 보고서를 참조하십시오</a:t>
+            </a:r>
+            <a:endParaRPr lang="en-US" sz="930" dirty="0"/>
+          </a:p>
+          <a:p>
+            <a:pPr marL="342900" indent="-342900">
+              <a:lnSpc>
+                <a:spcPct val="120000"/>
+              </a:lnSpc>
+              <a:buSzPct val="100000"/>
+              <a:buChar char="•"/>
+            </a:pPr>
+            <a:r>
+              <a:rPr lang="en-US" sz="930" dirty="0">
+                <a:solidFill>
+                  <a:srgbClr val="10161F"/>
+                </a:solidFill>
+                <a:latin typeface="Pretendard" pitchFamily="34" charset="0"/>
+                <a:ea typeface="Pretendard" pitchFamily="34" charset="-122"/>
+                <a:cs typeface="Pretendard" pitchFamily="34" charset="-120"/>
+              </a:rPr>
+              <a:t>자금 조달 및 대출 조건은 금융 자문 후 확정됩니다</a:t>
+            </a:r>
+            <a:endParaRPr lang="en-US" sz="930" dirty="0"/>
+          </a:p>
+          <a:p>
+            <a:pPr marL="342900" indent="-342900">
+              <a:lnSpc>
+                <a:spcPct val="120000"/>
+              </a:lnSpc>
+              <a:buSzPct val="100000"/>
+              <a:buChar char="•"/>
+            </a:pPr>
+            <a:r>
+              <a:rPr lang="en-US" sz="930" dirty="0">
+                <a:solidFill>
+                  <a:srgbClr val="10161F"/>
+                </a:solidFill>
+                <a:latin typeface="Pretendard" pitchFamily="34" charset="0"/>
+                <a:ea typeface="Pretendard" pitchFamily="34" charset="-122"/>
+                <a:cs typeface="Pretendard" pitchFamily="34" charset="-120"/>
+              </a:rPr>
+              <a:t>상세 실사 단계에서 구체적인 계약 조건 및 세무 검토가 진행됩니다</a:t>
+            </a:r>
+            <a:endParaRPr lang="en-US" sz="930" dirty="0"/>
+          </a:p>
+        </p:txBody>
+      </p:sp>
+      <p:sp>
+        <p:nvSpPr>
+          <p:cNvPr id="30" name="Text 28"/>
           <p:cNvSpPr/>
           <p:nvPr/>
         </p:nvSpPr>
@@ -5973,7 +6985,7 @@
       </p:sp>
       <p:sp>
         <p:nvSpPr>
-          <p:cNvPr id="15" name="Text 13"/>
+          <p:cNvPr id="31" name="Text 29"/>
           <p:cNvSpPr/>
           <p:nvPr/>
         </p:nvSpPr>
@@ -12750,7 +13762,7 @@
                 <a:ea typeface="Pretendard" pitchFamily="34" charset="-122"/>
                 <a:cs typeface="Pretendard" pitchFamily="34" charset="-120"/>
               </a:rPr>
-              <a:t>{"ok":true,"mocked":true,"extractedFields":{"area_signal":"역삼","asset_type":"오피스빌딩","price_band":"300억","size_signal":"3000평(약 9917.4㎡)"},"extractedFacts":{"region":"역삼","exactAddressCandidate":"역삼동 742-1","assetType":"오피스빌딩","priceText":"300억","sizeText":"3000평(약 9917.4㎡)","currentUse":"오피스","currentUseSignal":"근린생활시설","leaseSignal":"임대중","vacancySignal":"공실없음","tenantNames":["쿠팡","네이버"],"unitRentTexts":["301호: 1500만"],"sellerMotivationText":"자산 효율화","brokerNotes":["초역세권 매물"]},"detectedSensitiveFields":["exact_address","tenant_name"],"ambiguousFields":[],"warnings":[],"areaSignal":"역삼","assetType":"오피스빌딩","priceBand":"300억","sizeSignal":"3000평(약 9917.4㎡)","dealType":"매각","buildingName":"역삼 센트럴타워","exactAddress":"역삼동 742-1","totalFloorArea":9917.3,"buildYear":2015,"currentUseSignal":"근린생활시설","vacancySignal":"공실 없음","fitSummary":"초역세권 근생 빌딩으로 시행/사옥 매입에 최적화","cautionSummary":"주요 임차인 만기 조율 필요","hiddenFields":["exact_address","seller_motivation"],"confidence":{"areaSignal":"confirmed","assetType":"confirmed","priceBand":"ai_hypothesis","fitSummary":"ai_hypothesis"},"missingData":["sizeSignal"],"boundaryNote":"본 자료는 실거래 통계 기반 참고치입니다.","buyerType":"법인 사옥형","budgetRange":{"min":50,"max":80,"display":"50억~80억"},"preferredRegions":["강남","성수"],"assetTypes":["꼬마빌딩","사옥용"],"purchasePurpose":"사옥용 매입","mustHave":["초역세권","주차"],"niceToHave":["테라스","루프탑"],"riskTolerance":"medium","financingNote":"자본금 50% 준비","missingQuestions":["구체적인 입주 시기가 언제인가요?","선호하는 수익률이 있나요?"],"privacyNotes":["연락처 비공개"],"fitReasons":["매수자 예산(50-80억)에 부합하는 매물입니다.","요청하신 성수/강남 권역에 해당합니다."],"cautionReasons":["요청한 용도와 달리 명도 협의가 다소 필요합니다."],"recommendedNextAction":"현장 답사 제안","kakaoMessage":"안녕하세요! 요청하신 조건에 부합하는 추천 매물이 있어 안내해 드립니다. 확인해보시고 피드백 부탁드립니다.","title":"강남 역삼역 초역세권 오피스 사옥용 빌딩 매각","shortSummary":"역삼역 도보 5분 거리의 준신축급 대형 오피스빌딩입니다.","dealPoints":["초역세권","사옥 최적"],"cautionPoints":["명도 조율 필요"],"hiddenInfoNotice":["보증금 및 지번은 인가 후 확인 가능"],"gateMessage":"G1 등급 등록이 필요합니다.","kakaoText":"강남 역삼역 오피스 빌딩 매각 안내입니다.","exactUnitCandidate":"101호","floor":"1층","areaSqmText":"150㎡","spaceType":"office","depositText":"5000만","monthlyRentText":"400만","maintenanceFeeText":"50만","availableFromText":"즉시입주","leaseTermMonthsText":"24","incentivesText":"렌트프리 2개월","restrictions":[],"landlordIdentity":"김성수","currentTenant":"스타트업","vacancyReason":"이전 확장","rentNegotiation":"협의 가능","region":"성수동","areaSqm":150,"deposit":5000,"monthlyRent":400,"maintenanceFee":50,"availableFrom":"즉시입주","leaseTermMonths":24,"incentives":{"rentFreeMonths":2,"interiorSupport":"일부 인테리어 지원","freeRentDetail":"렌트프리 2개월 지원"},"shortSummaryLease":"성수역 도보 5분 거리 1층 리테일 상가 매물입니다."} ### 층별 임대 현황</a:t>
+              <a:t>아래 수치는 AI 추정값으로 참고용이며, 투자 결정의 근거로 사용할 수 없습니다. ### [참고] 핵심 현금흐름 3줄 요약 (내 돈 &amp; 월 순수익) ### 층별 임대 현황</a:t>
             </a:r>
             <a:endParaRPr lang="en-US" sz="930" dirty="0"/>
           </a:p>
@@ -13012,11 +14024,11 @@
         <p:spPr>
           <a:xfrm>
             <a:off x="566928" y="1417320"/>
-            <a:ext cx="11057839" cy="3657600"/>
+            <a:ext cx="3515258" cy="3657600"/>
           </a:xfrm>
           <a:prstGeom prst="roundRect">
             <a:avLst>
-              <a:gd name="adj" fmla="val 1500"/>
+              <a:gd name="adj" fmla="val 1561"/>
             </a:avLst>
           </a:prstGeom>
           <a:solidFill>
@@ -13039,7 +14051,7 @@
         <p:spPr>
           <a:xfrm>
             <a:off x="566928" y="1417320"/>
-            <a:ext cx="11057839" cy="45720"/>
+            <a:ext cx="3515258" cy="45720"/>
           </a:xfrm>
           <a:prstGeom prst="rect">
             <a:avLst/>
@@ -13059,7 +14071,7 @@
         <p:spPr>
           <a:xfrm>
             <a:off x="795528" y="1618488"/>
-            <a:ext cx="10600639" cy="292608"/>
+            <a:ext cx="3058058" cy="292608"/>
           </a:xfrm>
           <a:prstGeom prst="rect">
             <a:avLst/>
@@ -13083,7 +14095,7 @@
                 <a:ea typeface="Pretendard" pitchFamily="34" charset="-122"/>
                 <a:cs typeface="Pretendard" pitchFamily="34" charset="-120"/>
               </a:rPr>
-              <a:t>용도 리스크</a:t>
+              <a:t>건물 물리적 상태</a:t>
             </a:r>
             <a:endParaRPr lang="en-US" sz="1350" dirty="0"/>
           </a:p>
@@ -13098,7 +14110,7 @@
         <p:spPr>
           <a:xfrm>
             <a:off x="795528" y="1947672"/>
-            <a:ext cx="10600639" cy="365760"/>
+            <a:ext cx="3058058" cy="365760"/>
           </a:xfrm>
           <a:prstGeom prst="rect">
             <a:avLst/>
@@ -13124,7 +14136,7 @@
                 <a:ea typeface="Pretendard" pitchFamily="34" charset="-122"/>
                 <a:cs typeface="Pretendard" pitchFamily="34" charset="-120"/>
               </a:rPr>
-              <a:t>—</a:t>
+              <a:t>준공연도 확인 필요, 구조 확인 필요</a:t>
             </a:r>
             <a:endParaRPr lang="en-US" sz="1250" dirty="0"/>
           </a:p>
@@ -13139,7 +14151,7 @@
         <p:spPr>
           <a:xfrm>
             <a:off x="795528" y="2377440"/>
-            <a:ext cx="10600639" cy="2606040"/>
+            <a:ext cx="3058058" cy="2606040"/>
           </a:xfrm>
           <a:prstGeom prst="rect">
             <a:avLst/>
@@ -13169,10 +14181,58 @@
                 <a:ea typeface="Pretendard" pitchFamily="34" charset="-122"/>
                 <a:cs typeface="Pretendard" pitchFamily="34" charset="-120"/>
               </a:rPr>
-              <a:t>{"ok":true,"mocked":true,"extractedFields":{"area_signal":"역삼","asset_type":"오피스빌딩","price_band":"300억","size_signal":"3000평(약 9917.4㎡)"},"extractedFacts":{"region":"역삼","exactAddressCandidate":"역삼동 7</a:t>
+              <a:t>누수</a:t>
             </a:r>
             <a:endParaRPr lang="en-US" sz="1100" dirty="0"/>
           </a:p>
+          <a:p>
+            <a:pPr marL="342900" indent="-342900">
+              <a:lnSpc>
+                <a:spcPct val="125000"/>
+              </a:lnSpc>
+              <a:spcBef>
+                <a:spcPts val="600"/>
+              </a:spcBef>
+              <a:buSzPct val="100000"/>
+              <a:buChar char="•"/>
+            </a:pPr>
+            <a:r>
+              <a:rPr lang="en-US" sz="1100" dirty="0">
+                <a:solidFill>
+                  <a:srgbClr val="10161F"/>
+                </a:solidFill>
+                <a:latin typeface="Pretendard" pitchFamily="34" charset="0"/>
+                <a:ea typeface="Pretendard" pitchFamily="34" charset="-122"/>
+                <a:cs typeface="Pretendard" pitchFamily="34" charset="-120"/>
+              </a:rPr>
+              <a:t>균열</a:t>
+            </a:r>
+            <a:endParaRPr lang="en-US" sz="1100" dirty="0"/>
+          </a:p>
+          <a:p>
+            <a:pPr marL="342900" indent="-342900">
+              <a:lnSpc>
+                <a:spcPct val="125000"/>
+              </a:lnSpc>
+              <a:spcBef>
+                <a:spcPts val="600"/>
+              </a:spcBef>
+              <a:buSzPct val="100000"/>
+              <a:buChar char="•"/>
+            </a:pPr>
+            <a:r>
+              <a:rPr lang="en-US" sz="1100" dirty="0">
+                <a:solidFill>
+                  <a:srgbClr val="10161F"/>
+                </a:solidFill>
+                <a:latin typeface="Pretendard" pitchFamily="34" charset="0"/>
+                <a:ea typeface="Pretendard" pitchFamily="34" charset="-122"/>
+                <a:cs typeface="Pretendard" pitchFamily="34" charset="-120"/>
+              </a:rPr>
+              <a:t>설비 노후 여부 현장 점검 필요</a:t>
+            </a:r>
+            <a:endParaRPr lang="en-US" sz="1100" dirty="0"/>
+          </a:p>
         </p:txBody>
       </p:sp>
       <p:sp>
@@ -13183,12 +14243,12 @@
         </p:nvSpPr>
         <p:spPr>
           <a:xfrm>
-            <a:off x="566928" y="5193792"/>
-            <a:ext cx="11057839" cy="621792"/>
+            <a:off x="4338218" y="1417320"/>
+            <a:ext cx="3515258" cy="3657600"/>
           </a:xfrm>
           <a:prstGeom prst="roundRect">
             <a:avLst>
-              <a:gd name="adj" fmla="val 8824"/>
+              <a:gd name="adj" fmla="val 1561"/>
             </a:avLst>
           </a:prstGeom>
           <a:solidFill>
@@ -13204,7 +14264,351 @@
       </p:sp>
       <p:sp>
         <p:nvSpPr>
-          <p:cNvPr id="12" name="Text 10"/>
+          <p:cNvPr id="12" name="Shape 10"/>
+          <p:cNvSpPr/>
+          <p:nvPr/>
+        </p:nvSpPr>
+        <p:spPr>
+          <a:xfrm>
+            <a:off x="4338218" y="1417320"/>
+            <a:ext cx="3515258" cy="45720"/>
+          </a:xfrm>
+          <a:prstGeom prst="rect">
+            <a:avLst/>
+          </a:prstGeom>
+          <a:solidFill>
+            <a:srgbClr val="B98A2E"/>
+          </a:solidFill>
+          <a:ln/>
+        </p:spPr>
+      </p:sp>
+      <p:sp>
+        <p:nvSpPr>
+          <p:cNvPr id="13" name="Text 11"/>
+          <p:cNvSpPr/>
+          <p:nvPr/>
+        </p:nvSpPr>
+        <p:spPr>
+          <a:xfrm>
+            <a:off x="4566818" y="1618488"/>
+            <a:ext cx="3058058" cy="292608"/>
+          </a:xfrm>
+          <a:prstGeom prst="rect">
+            <a:avLst/>
+          </a:prstGeom>
+          <a:noFill/>
+          <a:ln/>
+        </p:spPr>
+        <p:txBody>
+          <a:bodyPr wrap="square" lIns="0" tIns="0" rIns="0" bIns="0" rtlCol="0" anchor="ctr"/>
+          <a:lstStyle/>
+          <a:p>
+            <a:pPr indent="0" marL="0">
+              <a:buNone/>
+            </a:pPr>
+            <a:r>
+              <a:rPr lang="en-US" sz="1350" b="1" dirty="0">
+                <a:solidFill>
+                  <a:srgbClr val="977024"/>
+                </a:solidFill>
+                <a:latin typeface="Pretendard" pitchFamily="34" charset="0"/>
+                <a:ea typeface="Pretendard" pitchFamily="34" charset="-122"/>
+                <a:cs typeface="Pretendard" pitchFamily="34" charset="-120"/>
+              </a:rPr>
+              <a:t>승강기 및 설비</a:t>
+            </a:r>
+            <a:endParaRPr lang="en-US" sz="1350" dirty="0"/>
+          </a:p>
+        </p:txBody>
+      </p:sp>
+      <p:sp>
+        <p:nvSpPr>
+          <p:cNvPr id="14" name="Text 12"/>
+          <p:cNvSpPr/>
+          <p:nvPr/>
+        </p:nvSpPr>
+        <p:spPr>
+          <a:xfrm>
+            <a:off x="4566818" y="1947672"/>
+            <a:ext cx="3058058" cy="365760"/>
+          </a:xfrm>
+          <a:prstGeom prst="rect">
+            <a:avLst/>
+          </a:prstGeom>
+          <a:noFill/>
+          <a:ln/>
+        </p:spPr>
+        <p:txBody>
+          <a:bodyPr wrap="square" lIns="0" tIns="0" rIns="0" bIns="0" rtlCol="0" anchor="ctr">
+            <a:normAutofit/>
+          </a:bodyPr>
+          <a:lstStyle/>
+          <a:p>
+            <a:pPr indent="0" marL="0">
+              <a:buNone/>
+            </a:pPr>
+            <a:r>
+              <a:rPr lang="en-US" sz="1250" b="1" dirty="0">
+                <a:solidFill>
+                  <a:srgbClr val="10161F"/>
+                </a:solidFill>
+                <a:latin typeface="Pretendard" pitchFamily="34" charset="0"/>
+                <a:ea typeface="Pretendard" pitchFamily="34" charset="-122"/>
+                <a:cs typeface="Pretendard" pitchFamily="34" charset="-120"/>
+              </a:rPr>
+              <a:t>승강기 정보 확인 필요</a:t>
+            </a:r>
+            <a:endParaRPr lang="en-US" sz="1250" dirty="0"/>
+          </a:p>
+        </p:txBody>
+      </p:sp>
+      <p:sp>
+        <p:nvSpPr>
+          <p:cNvPr id="15" name="Text 13"/>
+          <p:cNvSpPr/>
+          <p:nvPr/>
+        </p:nvSpPr>
+        <p:spPr>
+          <a:xfrm>
+            <a:off x="4566818" y="2377440"/>
+            <a:ext cx="3058058" cy="2606040"/>
+          </a:xfrm>
+          <a:prstGeom prst="rect">
+            <a:avLst/>
+          </a:prstGeom>
+          <a:noFill/>
+          <a:ln/>
+        </p:spPr>
+        <p:txBody>
+          <a:bodyPr wrap="square" lIns="0" tIns="0" rIns="0" bIns="0" rtlCol="0" anchor="t">
+            <a:normAutofit/>
+          </a:bodyPr>
+          <a:lstStyle/>
+          <a:p>
+            <a:pPr marL="342900" indent="-342900">
+              <a:lnSpc>
+                <a:spcPct val="125000"/>
+              </a:lnSpc>
+              <a:buSzPct val="100000"/>
+              <a:buChar char="•"/>
+            </a:pPr>
+            <a:r>
+              <a:rPr lang="en-US" sz="1100" dirty="0">
+                <a:solidFill>
+                  <a:srgbClr val="10161F"/>
+                </a:solidFill>
+                <a:latin typeface="Pretendard" pitchFamily="34" charset="0"/>
+                <a:ea typeface="Pretendard" pitchFamily="34" charset="-122"/>
+                <a:cs typeface="Pretendard" pitchFamily="34" charset="-120"/>
+              </a:rPr>
+              <a:t>정기검사 이력, 냉난방 설비 상태 확인 필요</a:t>
+            </a:r>
+            <a:endParaRPr lang="en-US" sz="1100" dirty="0"/>
+          </a:p>
+        </p:txBody>
+      </p:sp>
+      <p:sp>
+        <p:nvSpPr>
+          <p:cNvPr id="16" name="Shape 14"/>
+          <p:cNvSpPr/>
+          <p:nvPr/>
+        </p:nvSpPr>
+        <p:spPr>
+          <a:xfrm>
+            <a:off x="8109509" y="1417320"/>
+            <a:ext cx="3515258" cy="3657600"/>
+          </a:xfrm>
+          <a:prstGeom prst="roundRect">
+            <a:avLst>
+              <a:gd name="adj" fmla="val 1561"/>
+            </a:avLst>
+          </a:prstGeom>
+          <a:solidFill>
+            <a:srgbClr val="F7FAFC"/>
+          </a:solidFill>
+          <a:ln w="6350">
+            <a:solidFill>
+              <a:srgbClr val="CBD5E0"/>
+            </a:solidFill>
+            <a:prstDash val="solid"/>
+          </a:ln>
+        </p:spPr>
+      </p:sp>
+      <p:sp>
+        <p:nvSpPr>
+          <p:cNvPr id="17" name="Shape 15"/>
+          <p:cNvSpPr/>
+          <p:nvPr/>
+        </p:nvSpPr>
+        <p:spPr>
+          <a:xfrm>
+            <a:off x="8109509" y="1417320"/>
+            <a:ext cx="3515258" cy="45720"/>
+          </a:xfrm>
+          <a:prstGeom prst="rect">
+            <a:avLst/>
+          </a:prstGeom>
+          <a:solidFill>
+            <a:srgbClr val="B98A2E"/>
+          </a:solidFill>
+          <a:ln/>
+        </p:spPr>
+      </p:sp>
+      <p:sp>
+        <p:nvSpPr>
+          <p:cNvPr id="18" name="Text 16"/>
+          <p:cNvSpPr/>
+          <p:nvPr/>
+        </p:nvSpPr>
+        <p:spPr>
+          <a:xfrm>
+            <a:off x="8338109" y="1618488"/>
+            <a:ext cx="3058058" cy="292608"/>
+          </a:xfrm>
+          <a:prstGeom prst="rect">
+            <a:avLst/>
+          </a:prstGeom>
+          <a:noFill/>
+          <a:ln/>
+        </p:spPr>
+        <p:txBody>
+          <a:bodyPr wrap="square" lIns="0" tIns="0" rIns="0" bIns="0" rtlCol="0" anchor="ctr"/>
+          <a:lstStyle/>
+          <a:p>
+            <a:pPr indent="0" marL="0">
+              <a:buNone/>
+            </a:pPr>
+            <a:r>
+              <a:rPr lang="en-US" sz="1350" b="1" dirty="0">
+                <a:solidFill>
+                  <a:srgbClr val="977024"/>
+                </a:solidFill>
+                <a:latin typeface="Pretendard" pitchFamily="34" charset="0"/>
+                <a:ea typeface="Pretendard" pitchFamily="34" charset="-122"/>
+                <a:cs typeface="Pretendard" pitchFamily="34" charset="-120"/>
+              </a:rPr>
+              <a:t>임차인 이탈 위험</a:t>
+            </a:r>
+            <a:endParaRPr lang="en-US" sz="1350" dirty="0"/>
+          </a:p>
+        </p:txBody>
+      </p:sp>
+      <p:sp>
+        <p:nvSpPr>
+          <p:cNvPr id="19" name="Text 17"/>
+          <p:cNvSpPr/>
+          <p:nvPr/>
+        </p:nvSpPr>
+        <p:spPr>
+          <a:xfrm>
+            <a:off x="8338109" y="1947672"/>
+            <a:ext cx="3058058" cy="365760"/>
+          </a:xfrm>
+          <a:prstGeom prst="rect">
+            <a:avLst/>
+          </a:prstGeom>
+          <a:noFill/>
+          <a:ln/>
+        </p:spPr>
+        <p:txBody>
+          <a:bodyPr wrap="square" lIns="0" tIns="0" rIns="0" bIns="0" rtlCol="0" anchor="ctr">
+            <a:normAutofit/>
+          </a:bodyPr>
+          <a:lstStyle/>
+          <a:p>
+            <a:pPr indent="0" marL="0">
+              <a:buNone/>
+            </a:pPr>
+            <a:r>
+              <a:rPr lang="en-US" sz="1250" b="1" dirty="0">
+                <a:solidFill>
+                  <a:srgbClr val="10161F"/>
+                </a:solidFill>
+                <a:latin typeface="Pretendard" pitchFamily="34" charset="0"/>
+                <a:ea typeface="Pretendard" pitchFamily="34" charset="-122"/>
+                <a:cs typeface="Pretendard" pitchFamily="34" charset="-120"/>
+              </a:rPr>
+              <a:t>임대차 계약 현황 LOI 접수 후 열람</a:t>
+            </a:r>
+            <a:endParaRPr lang="en-US" sz="1250" dirty="0"/>
+          </a:p>
+        </p:txBody>
+      </p:sp>
+      <p:sp>
+        <p:nvSpPr>
+          <p:cNvPr id="20" name="Text 18"/>
+          <p:cNvSpPr/>
+          <p:nvPr/>
+        </p:nvSpPr>
+        <p:spPr>
+          <a:xfrm>
+            <a:off x="8338109" y="2377440"/>
+            <a:ext cx="3058058" cy="2606040"/>
+          </a:xfrm>
+          <a:prstGeom prst="rect">
+            <a:avLst/>
+          </a:prstGeom>
+          <a:noFill/>
+          <a:ln/>
+        </p:spPr>
+        <p:txBody>
+          <a:bodyPr wrap="square" lIns="0" tIns="0" rIns="0" bIns="0" rtlCol="0" anchor="t">
+            <a:normAutofit/>
+          </a:bodyPr>
+          <a:lstStyle/>
+          <a:p>
+            <a:pPr marL="342900" indent="-342900">
+              <a:lnSpc>
+                <a:spcPct val="125000"/>
+              </a:lnSpc>
+              <a:buSzPct val="100000"/>
+              <a:buChar char="•"/>
+            </a:pPr>
+            <a:r>
+              <a:rPr lang="en-US" sz="1100" dirty="0">
+                <a:solidFill>
+                  <a:srgbClr val="10161F"/>
+                </a:solidFill>
+                <a:latin typeface="Pretendard" pitchFamily="34" charset="0"/>
+                <a:ea typeface="Pretendard" pitchFamily="34" charset="-122"/>
+                <a:cs typeface="Pretendard" pitchFamily="34" charset="-120"/>
+              </a:rPr>
+              <a:t>잔여 계약기간(WALE), 임차인 신용도 확인 필요</a:t>
+            </a:r>
+            <a:endParaRPr lang="en-US" sz="1100" dirty="0"/>
+          </a:p>
+        </p:txBody>
+      </p:sp>
+      <p:sp>
+        <p:nvSpPr>
+          <p:cNvPr id="21" name="Shape 19"/>
+          <p:cNvSpPr/>
+          <p:nvPr/>
+        </p:nvSpPr>
+        <p:spPr>
+          <a:xfrm>
+            <a:off x="566928" y="5193792"/>
+            <a:ext cx="11057839" cy="621792"/>
+          </a:xfrm>
+          <a:prstGeom prst="roundRect">
+            <a:avLst>
+              <a:gd name="adj" fmla="val 8824"/>
+            </a:avLst>
+          </a:prstGeom>
+          <a:solidFill>
+            <a:srgbClr val="F7FAFC"/>
+          </a:solidFill>
+          <a:ln w="6350">
+            <a:solidFill>
+              <a:srgbClr val="CBD5E0"/>
+            </a:solidFill>
+            <a:prstDash val="solid"/>
+          </a:ln>
+        </p:spPr>
+      </p:sp>
+      <p:sp>
+        <p:nvSpPr>
+          <p:cNvPr id="22" name="Text 20"/>
           <p:cNvSpPr/>
           <p:nvPr/>
         </p:nvSpPr>
@@ -13243,7 +14647,7 @@
       </p:sp>
       <p:sp>
         <p:nvSpPr>
-          <p:cNvPr id="13" name="Text 11"/>
+          <p:cNvPr id="23" name="Text 21"/>
           <p:cNvSpPr/>
           <p:nvPr/>
         </p:nvSpPr>
@@ -13282,7 +14686,7 @@
       </p:sp>
       <p:sp>
         <p:nvSpPr>
-          <p:cNvPr id="14" name="Text 12"/>
+          <p:cNvPr id="24" name="Text 22"/>
           <p:cNvSpPr/>
           <p:nvPr/>
         </p:nvSpPr>
@@ -13330,6 +14734,302 @@
 <file path=ppt/slides/slide8.xml><?xml version="1.0" encoding="utf-8"?>
 <p:sld xmlns:a="http://schemas.openxmlformats.org/drawingml/2006/main" xmlns:r="http://schemas.openxmlformats.org/officeDocument/2006/relationships" xmlns:p="http://schemas.openxmlformats.org/presentationml/2006/main">
   <p:cSld name="Slide 8">
+    <p:spTree>
+      <p:nvGrpSpPr>
+        <p:cNvPr id="1" name=""/>
+        <p:cNvGrpSpPr/>
+        <p:nvPr/>
+      </p:nvGrpSpPr>
+      <p:grpSpPr>
+        <a:xfrm>
+          <a:off x="0" y="0"/>
+          <a:ext cx="0" cy="0"/>
+          <a:chOff x="0" y="0"/>
+          <a:chExt cx="0" cy="0"/>
+        </a:xfrm>
+      </p:grpSpPr>
+      <p:sp>
+        <p:nvSpPr>
+          <p:cNvPr id="2" name="Shape 0"/>
+          <p:cNvSpPr/>
+          <p:nvPr/>
+        </p:nvSpPr>
+        <p:spPr>
+          <a:xfrm>
+            <a:off x="566928" y="457200"/>
+            <a:ext cx="384048" cy="384048"/>
+          </a:xfrm>
+          <a:prstGeom prst="ellipse">
+            <a:avLst/>
+          </a:prstGeom>
+          <a:solidFill>
+            <a:srgbClr val="B98A2E"/>
+          </a:solidFill>
+          <a:ln/>
+        </p:spPr>
+      </p:sp>
+      <p:sp>
+        <p:nvSpPr>
+          <p:cNvPr id="3" name="Text 1"/>
+          <p:cNvSpPr/>
+          <p:nvPr/>
+        </p:nvSpPr>
+        <p:spPr>
+          <a:xfrm>
+            <a:off x="566928" y="457200"/>
+            <a:ext cx="384048" cy="384048"/>
+          </a:xfrm>
+          <a:prstGeom prst="rect">
+            <a:avLst/>
+          </a:prstGeom>
+          <a:noFill/>
+          <a:ln/>
+        </p:spPr>
+        <p:txBody>
+          <a:bodyPr wrap="square" lIns="0" tIns="0" rIns="0" bIns="0" rtlCol="0" anchor="ctr"/>
+          <a:lstStyle/>
+          <a:p>
+            <a:pPr algn="ctr" indent="0" marL="0">
+              <a:buNone/>
+            </a:pPr>
+            <a:r>
+              <a:rPr lang="en-US" sz="1300" b="1" dirty="0">
+                <a:solidFill>
+                  <a:srgbClr val="FFFFFF"/>
+                </a:solidFill>
+                <a:latin typeface="Arial" pitchFamily="34" charset="0"/>
+                <a:ea typeface="Arial" pitchFamily="34" charset="-122"/>
+                <a:cs typeface="Arial" pitchFamily="34" charset="-120"/>
+              </a:rPr>
+              <a:t>08</a:t>
+            </a:r>
+            <a:endParaRPr lang="en-US" sz="1300" dirty="0"/>
+          </a:p>
+        </p:txBody>
+      </p:sp>
+      <p:sp>
+        <p:nvSpPr>
+          <p:cNvPr id="4" name="Text 2"/>
+          <p:cNvSpPr/>
+          <p:nvPr/>
+        </p:nvSpPr>
+        <p:spPr>
+          <a:xfrm>
+            <a:off x="1133856" y="457200"/>
+            <a:ext cx="10490911" cy="182880"/>
+          </a:xfrm>
+          <a:prstGeom prst="rect">
+            <a:avLst/>
+          </a:prstGeom>
+          <a:noFill/>
+          <a:ln/>
+        </p:spPr>
+        <p:txBody>
+          <a:bodyPr wrap="square" lIns="0" tIns="0" rIns="0" bIns="0" rtlCol="0" anchor="ctr"/>
+          <a:lstStyle/>
+          <a:p>
+            <a:pPr indent="0" marL="0">
+              <a:buNone/>
+            </a:pPr>
+            <a:r>
+              <a:rPr lang="en-US" sz="950" b="1" spc="200" kern="0" dirty="0">
+                <a:solidFill>
+                  <a:srgbClr val="B98A2E"/>
+                </a:solidFill>
+                <a:latin typeface="Arial" pitchFamily="34" charset="0"/>
+                <a:ea typeface="Arial" pitchFamily="34" charset="-122"/>
+                <a:cs typeface="Arial" pitchFamily="34" charset="-120"/>
+              </a:rPr>
+              <a:t>Checklist</a:t>
+            </a:r>
+            <a:endParaRPr lang="en-US" sz="950" dirty="0"/>
+          </a:p>
+        </p:txBody>
+      </p:sp>
+      <p:sp>
+        <p:nvSpPr>
+          <p:cNvPr id="5" name="Text 3"/>
+          <p:cNvSpPr/>
+          <p:nvPr/>
+        </p:nvSpPr>
+        <p:spPr>
+          <a:xfrm>
+            <a:off x="1133856" y="640080"/>
+            <a:ext cx="10490911" cy="365760"/>
+          </a:xfrm>
+          <a:prstGeom prst="rect">
+            <a:avLst/>
+          </a:prstGeom>
+          <a:noFill/>
+          <a:ln/>
+        </p:spPr>
+        <p:txBody>
+          <a:bodyPr wrap="square" lIns="0" tIns="0" rIns="0" bIns="0" rtlCol="0" anchor="ctr"/>
+          <a:lstStyle/>
+          <a:p>
+            <a:pPr indent="0" marL="0">
+              <a:buNone/>
+            </a:pPr>
+            <a:r>
+              <a:rPr lang="en-US" sz="2300" b="1" dirty="0">
+                <a:solidFill>
+                  <a:srgbClr val="10161F"/>
+                </a:solidFill>
+                <a:latin typeface="Pretendard" pitchFamily="34" charset="0"/>
+                <a:ea typeface="Pretendard" pitchFamily="34" charset="-122"/>
+                <a:cs typeface="Pretendard" pitchFamily="34" charset="-120"/>
+              </a:rPr>
+              <a:t>섹션 상세</a:t>
+            </a:r>
+            <a:endParaRPr lang="en-US" sz="2300" dirty="0"/>
+          </a:p>
+        </p:txBody>
+      </p:sp>
+      <p:sp>
+        <p:nvSpPr>
+          <p:cNvPr id="6" name="Text 4"/>
+          <p:cNvSpPr/>
+          <p:nvPr/>
+        </p:nvSpPr>
+        <p:spPr>
+          <a:xfrm>
+            <a:off x="566928" y="1517904"/>
+            <a:ext cx="6492240" cy="274320"/>
+          </a:xfrm>
+          <a:prstGeom prst="rect">
+            <a:avLst/>
+          </a:prstGeom>
+          <a:noFill/>
+          <a:ln/>
+        </p:spPr>
+        <p:txBody>
+          <a:bodyPr wrap="square" rtlCol="0" anchor="ctr"/>
+          <a:lstStyle/>
+          <a:p>
+            <a:pPr indent="0" marL="0">
+              <a:buNone/>
+            </a:pPr>
+            <a:endParaRPr lang="en-US" sz="1400" dirty="0"/>
+          </a:p>
+        </p:txBody>
+      </p:sp>
+      <p:sp>
+        <p:nvSpPr>
+          <p:cNvPr id="7" name="Text 5"/>
+          <p:cNvSpPr/>
+          <p:nvPr/>
+        </p:nvSpPr>
+        <p:spPr>
+          <a:xfrm>
+            <a:off x="566928" y="1874520"/>
+            <a:ext cx="6492240" cy="182880"/>
+          </a:xfrm>
+          <a:prstGeom prst="rect">
+            <a:avLst/>
+          </a:prstGeom>
+          <a:noFill/>
+          <a:ln/>
+        </p:spPr>
+        <p:txBody>
+          <a:bodyPr wrap="square" rtlCol="0" anchor="ctr"/>
+          <a:lstStyle/>
+          <a:p>
+            <a:pPr indent="0" marL="0">
+              <a:buNone/>
+            </a:pPr>
+            <a:endParaRPr lang="en-US" sz="900" dirty="0"/>
+          </a:p>
+        </p:txBody>
+      </p:sp>
+      <p:sp>
+        <p:nvSpPr>
+          <p:cNvPr id="8" name="Text 6"/>
+          <p:cNvSpPr/>
+          <p:nvPr/>
+        </p:nvSpPr>
+        <p:spPr>
+          <a:xfrm>
+            <a:off x="566928" y="6382512"/>
+            <a:ext cx="7315200" cy="219456"/>
+          </a:xfrm>
+          <a:prstGeom prst="rect">
+            <a:avLst/>
+          </a:prstGeom>
+          <a:noFill/>
+          <a:ln/>
+        </p:spPr>
+        <p:txBody>
+          <a:bodyPr wrap="square" lIns="0" tIns="0" rIns="0" bIns="0" rtlCol="0" anchor="ctr"/>
+          <a:lstStyle/>
+          <a:p>
+            <a:pPr indent="0" marL="0">
+              <a:buNone/>
+            </a:pPr>
+            <a:r>
+              <a:rPr lang="en-US" sz="800" dirty="0">
+                <a:solidFill>
+                  <a:srgbClr val="718096"/>
+                </a:solidFill>
+                <a:latin typeface="Pretendard" pitchFamily="34" charset="0"/>
+                <a:ea typeface="Pretendard" pitchFamily="34" charset="-122"/>
+                <a:cs typeface="Pretendard" pitchFamily="34" charset="-120"/>
+              </a:rPr>
+              <a:t>크리딜   |   </a:t>
+            </a:r>
+            <a:endParaRPr lang="en-US" sz="800" dirty="0"/>
+          </a:p>
+        </p:txBody>
+      </p:sp>
+      <p:sp>
+        <p:nvSpPr>
+          <p:cNvPr id="9" name="Text 7"/>
+          <p:cNvSpPr/>
+          <p:nvPr/>
+        </p:nvSpPr>
+        <p:spPr>
+          <a:xfrm>
+            <a:off x="10710367" y="6382512"/>
+            <a:ext cx="914400" cy="219456"/>
+          </a:xfrm>
+          <a:prstGeom prst="rect">
+            <a:avLst/>
+          </a:prstGeom>
+          <a:noFill/>
+          <a:ln/>
+        </p:spPr>
+        <p:txBody>
+          <a:bodyPr wrap="square" lIns="0" tIns="0" rIns="0" bIns="0" rtlCol="0" anchor="ctr"/>
+          <a:lstStyle/>
+          <a:p>
+            <a:pPr algn="r" indent="0" marL="0">
+              <a:buNone/>
+            </a:pPr>
+            <a:r>
+              <a:rPr lang="en-US" sz="900" b="1" dirty="0">
+                <a:solidFill>
+                  <a:srgbClr val="B98A2E"/>
+                </a:solidFill>
+                <a:latin typeface="Arial" pitchFamily="34" charset="0"/>
+                <a:ea typeface="Arial" pitchFamily="34" charset="-122"/>
+                <a:cs typeface="Arial" pitchFamily="34" charset="-120"/>
+              </a:rPr>
+              <a:t>8</a:t>
+            </a:r>
+            <a:endParaRPr lang="en-US" sz="900" dirty="0"/>
+          </a:p>
+        </p:txBody>
+      </p:sp>
+    </p:spTree>
+  </p:cSld>
+  <p:clrMapOvr>
+    <a:masterClrMapping/>
+  </p:clrMapOvr>
+</p:sld>
+</file>
+
+<file path=ppt/slides/slide9.xml><?xml version="1.0" encoding="utf-8"?>
+<p:sld xmlns:a="http://schemas.openxmlformats.org/drawingml/2006/main" xmlns:r="http://schemas.openxmlformats.org/officeDocument/2006/relationships" xmlns:p="http://schemas.openxmlformats.org/presentationml/2006/main">
+  <p:cSld name="Slide 9">
     <p:bg>
       <p:bgPr>
         <a:solidFill>
@@ -13404,7 +15104,7 @@
                 <a:ea typeface="Arial" pitchFamily="34" charset="-122"/>
                 <a:cs typeface="Arial" pitchFamily="34" charset="-120"/>
               </a:rPr>
-              <a:t>08</a:t>
+              <a:t>09</a:t>
             </a:r>
             <a:endParaRPr lang="en-US" sz="1300" dirty="0"/>
           </a:p>
@@ -13490,7 +15190,7 @@
       </p:sp>
       <p:graphicFrame>
         <p:nvGraphicFramePr>
-          <p:cNvPr id="9" name="Table 0"/>
+          <p:cNvPr id="10" name="Table 0"/>
           <p:cNvGraphicFramePr>
             <a:graphicFrameLocks noGrp="1"/>
           </p:cNvGraphicFramePr>
@@ -14758,434 +16458,6 @@
       <p:sp>
         <p:nvSpPr>
           <p:cNvPr id="11" name="Text 8"/>
-          <p:cNvSpPr/>
-          <p:nvPr/>
-        </p:nvSpPr>
-        <p:spPr>
-          <a:xfrm>
-            <a:off x="10710367" y="6382512"/>
-            <a:ext cx="914400" cy="219456"/>
-          </a:xfrm>
-          <a:prstGeom prst="rect">
-            <a:avLst/>
-          </a:prstGeom>
-          <a:noFill/>
-          <a:ln/>
-        </p:spPr>
-        <p:txBody>
-          <a:bodyPr wrap="square" lIns="0" tIns="0" rIns="0" bIns="0" rtlCol="0" anchor="ctr"/>
-          <a:lstStyle/>
-          <a:p>
-            <a:pPr algn="r" indent="0" marL="0">
-              <a:buNone/>
-            </a:pPr>
-            <a:r>
-              <a:rPr lang="en-US" sz="900" b="1" dirty="0">
-                <a:solidFill>
-                  <a:srgbClr val="B98A2E"/>
-                </a:solidFill>
-                <a:latin typeface="Arial" pitchFamily="34" charset="0"/>
-                <a:ea typeface="Arial" pitchFamily="34" charset="-122"/>
-                <a:cs typeface="Arial" pitchFamily="34" charset="-120"/>
-              </a:rPr>
-              <a:t>8</a:t>
-            </a:r>
-            <a:endParaRPr lang="en-US" sz="900" dirty="0"/>
-          </a:p>
-        </p:txBody>
-      </p:sp>
-    </p:spTree>
-  </p:cSld>
-  <p:clrMapOvr>
-    <a:masterClrMapping/>
-  </p:clrMapOvr>
-</p:sld>
-</file>
-
-<file path=ppt/slides/slide9.xml><?xml version="1.0" encoding="utf-8"?>
-<p:sld xmlns:a="http://schemas.openxmlformats.org/drawingml/2006/main" xmlns:r="http://schemas.openxmlformats.org/officeDocument/2006/relationships" xmlns:p="http://schemas.openxmlformats.org/presentationml/2006/main">
-  <p:cSld name="Slide 9">
-    <p:bg>
-      <p:bgPr>
-        <a:solidFill>
-          <a:srgbClr val="FFFFFF"/>
-        </a:solidFill>
-      </p:bgPr>
-    </p:bg>
-    <p:spTree>
-      <p:nvGrpSpPr>
-        <p:cNvPr id="1" name=""/>
-        <p:cNvGrpSpPr/>
-        <p:nvPr/>
-      </p:nvGrpSpPr>
-      <p:grpSpPr>
-        <a:xfrm>
-          <a:off x="0" y="0"/>
-          <a:ext cx="0" cy="0"/>
-          <a:chOff x="0" y="0"/>
-          <a:chExt cx="0" cy="0"/>
-        </a:xfrm>
-      </p:grpSpPr>
-      <p:sp>
-        <p:nvSpPr>
-          <p:cNvPr id="2" name="Shape 0"/>
-          <p:cNvSpPr/>
-          <p:nvPr/>
-        </p:nvSpPr>
-        <p:spPr>
-          <a:xfrm>
-            <a:off x="566928" y="457200"/>
-            <a:ext cx="384048" cy="384048"/>
-          </a:xfrm>
-          <a:prstGeom prst="ellipse">
-            <a:avLst/>
-          </a:prstGeom>
-          <a:solidFill>
-            <a:srgbClr val="B98A2E"/>
-          </a:solidFill>
-          <a:ln/>
-        </p:spPr>
-      </p:sp>
-      <p:sp>
-        <p:nvSpPr>
-          <p:cNvPr id="3" name="Text 1"/>
-          <p:cNvSpPr/>
-          <p:nvPr/>
-        </p:nvSpPr>
-        <p:spPr>
-          <a:xfrm>
-            <a:off x="566928" y="457200"/>
-            <a:ext cx="384048" cy="384048"/>
-          </a:xfrm>
-          <a:prstGeom prst="rect">
-            <a:avLst/>
-          </a:prstGeom>
-          <a:noFill/>
-          <a:ln/>
-        </p:spPr>
-        <p:txBody>
-          <a:bodyPr wrap="square" lIns="0" tIns="0" rIns="0" bIns="0" rtlCol="0" anchor="ctr"/>
-          <a:lstStyle/>
-          <a:p>
-            <a:pPr algn="ctr" indent="0" marL="0">
-              <a:buNone/>
-            </a:pPr>
-            <a:r>
-              <a:rPr lang="en-US" sz="1300" b="1" dirty="0">
-                <a:solidFill>
-                  <a:srgbClr val="FFFFFF"/>
-                </a:solidFill>
-                <a:latin typeface="Arial" pitchFamily="34" charset="0"/>
-                <a:ea typeface="Arial" pitchFamily="34" charset="-122"/>
-                <a:cs typeface="Arial" pitchFamily="34" charset="-120"/>
-              </a:rPr>
-              <a:t>09</a:t>
-            </a:r>
-            <a:endParaRPr lang="en-US" sz="1300" dirty="0"/>
-          </a:p>
-        </p:txBody>
-      </p:sp>
-      <p:sp>
-        <p:nvSpPr>
-          <p:cNvPr id="4" name="Text 2"/>
-          <p:cNvSpPr/>
-          <p:nvPr/>
-        </p:nvSpPr>
-        <p:spPr>
-          <a:xfrm>
-            <a:off x="1133856" y="457200"/>
-            <a:ext cx="10490911" cy="182880"/>
-          </a:xfrm>
-          <a:prstGeom prst="rect">
-            <a:avLst/>
-          </a:prstGeom>
-          <a:noFill/>
-          <a:ln/>
-        </p:spPr>
-        <p:txBody>
-          <a:bodyPr wrap="square" lIns="0" tIns="0" rIns="0" bIns="0" rtlCol="0" anchor="ctr"/>
-          <a:lstStyle/>
-          <a:p>
-            <a:pPr indent="0" marL="0">
-              <a:buNone/>
-            </a:pPr>
-            <a:r>
-              <a:rPr lang="en-US" sz="950" b="1" spc="200" kern="0" dirty="0">
-                <a:solidFill>
-                  <a:srgbClr val="B98A2E"/>
-                </a:solidFill>
-                <a:latin typeface="Arial" pitchFamily="34" charset="0"/>
-                <a:ea typeface="Arial" pitchFamily="34" charset="-122"/>
-                <a:cs typeface="Arial" pitchFamily="34" charset="-120"/>
-              </a:rPr>
-              <a:t>Process</a:t>
-            </a:r>
-            <a:endParaRPr lang="en-US" sz="950" dirty="0"/>
-          </a:p>
-        </p:txBody>
-      </p:sp>
-      <p:sp>
-        <p:nvSpPr>
-          <p:cNvPr id="5" name="Text 3"/>
-          <p:cNvSpPr/>
-          <p:nvPr/>
-        </p:nvSpPr>
-        <p:spPr>
-          <a:xfrm>
-            <a:off x="1133856" y="640080"/>
-            <a:ext cx="10490911" cy="365760"/>
-          </a:xfrm>
-          <a:prstGeom prst="rect">
-            <a:avLst/>
-          </a:prstGeom>
-          <a:noFill/>
-          <a:ln/>
-        </p:spPr>
-        <p:txBody>
-          <a:bodyPr wrap="square" lIns="0" tIns="0" rIns="0" bIns="0" rtlCol="0" anchor="ctr"/>
-          <a:lstStyle/>
-          <a:p>
-            <a:pPr indent="0" marL="0">
-              <a:buNone/>
-            </a:pPr>
-            <a:r>
-              <a:rPr lang="en-US" sz="2300" b="1" dirty="0">
-                <a:solidFill>
-                  <a:srgbClr val="10161F"/>
-                </a:solidFill>
-                <a:latin typeface="Pretendard" pitchFamily="34" charset="0"/>
-                <a:ea typeface="Pretendard" pitchFamily="34" charset="-122"/>
-                <a:cs typeface="Pretendard" pitchFamily="34" charset="-120"/>
-              </a:rPr>
-              <a:t>검토 후 다음 단계는 무엇인가</a:t>
-            </a:r>
-            <a:endParaRPr lang="en-US" sz="2300" dirty="0"/>
-          </a:p>
-        </p:txBody>
-      </p:sp>
-      <p:sp>
-        <p:nvSpPr>
-          <p:cNvPr id="6" name="Shape 4"/>
-          <p:cNvSpPr/>
-          <p:nvPr/>
-        </p:nvSpPr>
-        <p:spPr>
-          <a:xfrm>
-            <a:off x="566928" y="1572768"/>
-            <a:ext cx="11057839" cy="3200400"/>
-          </a:xfrm>
-          <a:prstGeom prst="roundRect">
-            <a:avLst>
-              <a:gd name="adj" fmla="val 1714"/>
-            </a:avLst>
-          </a:prstGeom>
-          <a:solidFill>
-            <a:srgbClr val="F7FAFC"/>
-          </a:solidFill>
-          <a:ln w="6350">
-            <a:solidFill>
-              <a:srgbClr val="CBD5E0"/>
-            </a:solidFill>
-            <a:prstDash val="solid"/>
-          </a:ln>
-        </p:spPr>
-      </p:sp>
-      <p:sp>
-        <p:nvSpPr>
-          <p:cNvPr id="7" name="Shape 5"/>
-          <p:cNvSpPr/>
-          <p:nvPr/>
-        </p:nvSpPr>
-        <p:spPr>
-          <a:xfrm>
-            <a:off x="786384" y="1792224"/>
-            <a:ext cx="438912" cy="438912"/>
-          </a:xfrm>
-          <a:prstGeom prst="ellipse">
-            <a:avLst/>
-          </a:prstGeom>
-          <a:solidFill>
-            <a:srgbClr val="B98A2E"/>
-          </a:solidFill>
-          <a:ln/>
-        </p:spPr>
-      </p:sp>
-      <p:sp>
-        <p:nvSpPr>
-          <p:cNvPr id="8" name="Text 6"/>
-          <p:cNvSpPr/>
-          <p:nvPr/>
-        </p:nvSpPr>
-        <p:spPr>
-          <a:xfrm>
-            <a:off x="786384" y="1792224"/>
-            <a:ext cx="438912" cy="438912"/>
-          </a:xfrm>
-          <a:prstGeom prst="rect">
-            <a:avLst/>
-          </a:prstGeom>
-          <a:noFill/>
-          <a:ln/>
-        </p:spPr>
-        <p:txBody>
-          <a:bodyPr wrap="square" lIns="0" tIns="0" rIns="0" bIns="0" rtlCol="0" anchor="ctr"/>
-          <a:lstStyle/>
-          <a:p>
-            <a:pPr algn="ctr" indent="0" marL="0">
-              <a:buNone/>
-            </a:pPr>
-            <a:r>
-              <a:rPr lang="en-US" sz="1400" b="1" dirty="0">
-                <a:solidFill>
-                  <a:srgbClr val="FFFFFF"/>
-                </a:solidFill>
-                <a:latin typeface="Arial" pitchFamily="34" charset="0"/>
-                <a:ea typeface="Arial" pitchFamily="34" charset="-122"/>
-                <a:cs typeface="Arial" pitchFamily="34" charset="-120"/>
-              </a:rPr>
-              <a:t>01</a:t>
-            </a:r>
-            <a:endParaRPr lang="en-US" sz="1400" dirty="0"/>
-          </a:p>
-        </p:txBody>
-      </p:sp>
-      <p:sp>
-        <p:nvSpPr>
-          <p:cNvPr id="9" name="Text 7"/>
-          <p:cNvSpPr/>
-          <p:nvPr/>
-        </p:nvSpPr>
-        <p:spPr>
-          <a:xfrm>
-            <a:off x="786384" y="2304288"/>
-            <a:ext cx="10618927" cy="365760"/>
-          </a:xfrm>
-          <a:prstGeom prst="rect">
-            <a:avLst/>
-          </a:prstGeom>
-          <a:noFill/>
-          <a:ln/>
-        </p:spPr>
-        <p:txBody>
-          <a:bodyPr wrap="square" rtlCol="0" anchor="ctr"/>
-          <a:lstStyle/>
-          <a:p>
-            <a:pPr indent="0" marL="0">
-              <a:buNone/>
-            </a:pPr>
-            <a:r>
-              <a:rPr lang="en-US" sz="1600" b="1" dirty="0">
-                <a:solidFill>
-                  <a:srgbClr val="10161F"/>
-                </a:solidFill>
-                <a:latin typeface="Pretendard" pitchFamily="34" charset="0"/>
-                <a:ea typeface="Pretendard" pitchFamily="34" charset="-122"/>
-                <a:cs typeface="Pretendard" pitchFamily="34" charset="-120"/>
-              </a:rPr>
-              <a:t>1단계</a:t>
-            </a:r>
-            <a:endParaRPr lang="en-US" sz="1600" dirty="0"/>
-          </a:p>
-        </p:txBody>
-      </p:sp>
-      <p:sp>
-        <p:nvSpPr>
-          <p:cNvPr id="10" name="Text 8"/>
-          <p:cNvSpPr/>
-          <p:nvPr/>
-        </p:nvSpPr>
-        <p:spPr>
-          <a:xfrm>
-            <a:off x="786384" y="2761488"/>
-            <a:ext cx="10618927" cy="1828800"/>
-          </a:xfrm>
-          <a:prstGeom prst="rect">
-            <a:avLst/>
-          </a:prstGeom>
-          <a:noFill/>
-          <a:ln/>
-        </p:spPr>
-        <p:txBody>
-          <a:bodyPr wrap="square" rtlCol="0" anchor="t"/>
-          <a:lstStyle/>
-          <a:p>
-            <a:pPr indent="0" marL="0">
-              <a:buNone/>
-            </a:pPr>
-            <a:r>
-              <a:rPr lang="en-US" sz="1100" dirty="0">
-                <a:solidFill>
-                  <a:srgbClr val="10161F"/>
-                </a:solidFill>
-                <a:latin typeface="Pretendard" pitchFamily="34" charset="0"/>
-                <a:ea typeface="Pretendard" pitchFamily="34" charset="-122"/>
-                <a:cs typeface="Pretendard" pitchFamily="34" charset="-120"/>
-              </a:rPr>
-              <a:t>{"ok"</a:t>
-            </a:r>
-            <a:endParaRPr lang="en-US" sz="1100" dirty="0"/>
-          </a:p>
-          <a:p>
-            <a:pPr indent="0" marL="0">
-              <a:buNone/>
-            </a:pPr>
-            <a:r>
-              <a:rPr lang="en-US" sz="1100" dirty="0">
-                <a:solidFill>
-                  <a:srgbClr val="10161F"/>
-                </a:solidFill>
-                <a:latin typeface="Pretendard" pitchFamily="34" charset="0"/>
-                <a:ea typeface="Pretendard" pitchFamily="34" charset="-122"/>
-                <a:cs typeface="Pretendard" pitchFamily="34" charset="-120"/>
-              </a:rPr>
-              <a:t>true,"mocked":true,"extractedFields":{"area_signal":"역삼","asset_type":"오피스빌딩","price_band":"300억","size_signal":"3000평(약 9917.4㎡)"},"extractedFacts":{"region":"역삼","exactAddressCandidate":"역삼동 742-1","assetType":"오피스빌딩","priceText":"300억","sizeText":"3000평(약 9917.4㎡)","currentUse":"오피스","currentUseSignal":"근린생활시설","leaseSignal":"임대중","vacancySignal":"공실없음","tenantNames":["쿠팡","네이버"],"unitRentTexts":["301호: 1500만"],"sellerMotivationText":"자산 효율화","brokerNotes":["초역세권 매물"]},"detectedSensitiveFields":["exact_address","tenant_name"],"ambiguousFields":[],"warnings":[],"areaSignal":"역삼","assetType":"오피스빌딩","priceBand":"300억","sizeSignal":"3000평(약 9917.4㎡)","dealType":"매각","buildingName":"역삼 센트럴타워","exactAddress":"역삼동 742-1","totalFloorArea":9917.3,"buildYear":2015,"currentUseSignal":"근린생활시설","vacancySignal":"공실 없음","fitSummary":"초역세권 근생 빌딩으로 시행/사옥 매입에 최적화","cautionSummary":"주요 임차인 만기 조율 필요","hiddenFields":["exact_address","seller_motivation"],"confidence":{"areaSignal":"confirmed","assetType":"confirmed","priceBand":"ai_hypothesis","fitSummary":"ai_hypothesis"},"missingData":["sizeSignal"],"boundaryNote":"본 자료는 실거래 통계 기반 참고치입니다.","buyerType":"법인 사옥형","budgetRange":{"min":50,"max":80,"display":"50억~80억"},"preferredRegions":["강남","성수"],"assetTypes":["꼬마빌딩","사옥용"],"purchasePurpose":"사옥용 매입","mustHave":["초역세권","주차"],"niceToHave":["테라스","루프탑"],"riskTolerance":"medium","financingNote":"자본금 50% 준비","missingQuestions":["구체적인 입주 시기가 언제인가요?","선호하는 수익률이 있나요?"],"privacyNotes":["연락처 비공개"],"fitReasons":["매수자 예산(50-80억)에 부합하는 매물입니다.","요청하신 성수/강남 권역에 해당합니다."],"cautionReasons":["요청한 용도와 달리 명도 협의가 다소 필요합니다."],"recommendedNextAction":"현장 답사 제안","kakaoMessage":"안녕하세요! 요청하신 조건에 부합하는 추천 매물이 있어 안내해 드립니다. 확인해보시고 피드백 부탁드립니다.","title":"강남 역삼역 초역세권 오피스 사옥용 빌딩 매각","shortSummary":"역삼역 도보 5분 거리의 준신축급 대형 오피스빌딩입니다.","dealPoints":["초역세권","사옥 최적"],"cautionPoints":["명도 조율 필요"],"hiddenInfoNotice":["보증금 및 지번은 인가 후 확인 가능"],"gateMessage":"G1 등급 등록이 필요합니다.","kakaoText":"강남 역삼역 오피스 빌딩 매각 안내입니다.","exactUnitCandidate":"101호","floor":"1층","areaSqmText":"150㎡","spaceType":"office","depositText":"5000만","monthlyRentText":"400만","maintenanceFeeText":"50만","availableFromText":"즉시입주","leaseTermMonthsText":"24","incentivesText":"렌트프리 2개월","restrictions":[],"landlordIdentity":"김성수","currentTenant":"스타트업","vacancyReason":"이전 확장","rentNegotiation":"협의 가능","region":"성수동","areaSqm":150,"deposit":5000,"monthlyRent":400,"maintenanceFee":50,"availableFrom":"즉시입주","leaseTermMonths":24,"incentives":{"rentFreeMonths":2,"interiorSupport":"일부 인테리어 지원","freeRentDetail":"렌트프리 2개월 지원"},"shortSummaryLease":"성수역 도보 5분 거리 1층 리테일 상가 매물입니다."}</a:t>
-            </a:r>
-            <a:endParaRPr lang="en-US" sz="1100" dirty="0"/>
-          </a:p>
-        </p:txBody>
-      </p:sp>
-      <p:sp>
-        <p:nvSpPr>
-          <p:cNvPr id="11" name="Text 9"/>
-          <p:cNvSpPr/>
-          <p:nvPr/>
-        </p:nvSpPr>
-        <p:spPr>
-          <a:xfrm>
-            <a:off x="566928" y="6382512"/>
-            <a:ext cx="7315200" cy="219456"/>
-          </a:xfrm>
-          <a:prstGeom prst="rect">
-            <a:avLst/>
-          </a:prstGeom>
-          <a:noFill/>
-          <a:ln/>
-        </p:spPr>
-        <p:txBody>
-          <a:bodyPr wrap="square" lIns="0" tIns="0" rIns="0" bIns="0" rtlCol="0" anchor="ctr"/>
-          <a:lstStyle/>
-          <a:p>
-            <a:pPr indent="0" marL="0">
-              <a:buNone/>
-            </a:pPr>
-            <a:r>
-              <a:rPr lang="en-US" sz="800" dirty="0">
-                <a:solidFill>
-                  <a:srgbClr val="718096"/>
-                </a:solidFill>
-                <a:latin typeface="Pretendard" pitchFamily="34" charset="0"/>
-                <a:ea typeface="Pretendard" pitchFamily="34" charset="-122"/>
-                <a:cs typeface="Pretendard" pitchFamily="34" charset="-120"/>
-              </a:rPr>
-              <a:t>크리딜   |   </a:t>
-            </a:r>
-            <a:endParaRPr lang="en-US" sz="800" dirty="0"/>
-          </a:p>
-        </p:txBody>
-      </p:sp>
-      <p:sp>
-        <p:nvSpPr>
-          <p:cNvPr id="12" name="Text 10"/>
           <p:cNvSpPr/>
           <p:nvPr/>
         </p:nvSpPr>
